--- a/infogather.pptx
+++ b/infogather.pptx
@@ -5,13 +5,15 @@
     <p:sldMasterId id="2147483648" r:id="rId4"/>
   </p:sldMasterIdLst>
   <p:notesMasterIdLst>
-    <p:notesMasterId r:id="rId9"/>
+    <p:notesMasterId r:id="rId11"/>
   </p:notesMasterIdLst>
   <p:sldIdLst>
     <p:sldId id="256" r:id="rId5"/>
     <p:sldId id="2147471222" r:id="rId6"/>
-    <p:sldId id="2147471223" r:id="rId7"/>
-    <p:sldId id="2147471217" r:id="rId8"/>
+    <p:sldId id="2147471224" r:id="rId7"/>
+    <p:sldId id="2147471225" r:id="rId8"/>
+    <p:sldId id="2147471223" r:id="rId9"/>
+    <p:sldId id="2147471217" r:id="rId10"/>
   </p:sldIdLst>
   <p:sldSz cx="11520488" cy="6480175"/>
   <p:notesSz cx="6858000" cy="9144000"/>
@@ -252,7 +254,7 @@
       <p15:notesGuideLst xmlns:p15="http://schemas.microsoft.com/office/powerpoint/2012/main"/>
     </p:ext>
     <p:ext uri="GoogleSlidesCustomDataVersion2">
-      <go:slidesCustomData xmlns:mc="http://schemas.openxmlformats.org/markup-compatibility/2006" xmlns:mv="urn:schemas-microsoft-com:mac:vml" xmlns:c="http://schemas.openxmlformats.org/drawingml/2006/chart" xmlns:dgm="http://schemas.openxmlformats.org/drawingml/2006/diagram" xmlns:o="urn:schemas-microsoft-com:office:office" xmlns:v="urn:schemas-microsoft-com:vml" xmlns:pvml="urn:schemas-microsoft-com:office:powerpoint" xmlns:com="http://schemas.openxmlformats.org/drawingml/2006/compatibility" xmlns:p14="http://schemas.microsoft.com/office/powerpoint/2010/main" xmlns:p15="http://schemas.microsoft.com/office/powerpoint/2012/main" xmlns:ahyp="http://schemas.microsoft.com/office/drawing/2018/hyperlinkcolor" xmlns:go="http://customooxmlschemas.google.com/" xmlns="" r:id="rId52" roundtripDataSignature="AMtx7mhqKJAzFugGzrpaCdpbPJOL8OwfdA=="/>
+      <go:slidesCustomData xmlns="" xmlns:go="http://customooxmlschemas.google.com/" xmlns:ahyp="http://schemas.microsoft.com/office/drawing/2018/hyperlinkcolor" xmlns:p15="http://schemas.microsoft.com/office/powerpoint/2012/main" xmlns:p14="http://schemas.microsoft.com/office/powerpoint/2010/main" xmlns:com="http://schemas.openxmlformats.org/drawingml/2006/compatibility" xmlns:pvml="urn:schemas-microsoft-com:office:powerpoint" xmlns:v="urn:schemas-microsoft-com:vml" xmlns:o="urn:schemas-microsoft-com:office:office" xmlns:dgm="http://schemas.openxmlformats.org/drawingml/2006/diagram" xmlns:c="http://schemas.openxmlformats.org/drawingml/2006/chart" xmlns:mv="urn:schemas-microsoft-com:mac:vml" xmlns:mc="http://schemas.openxmlformats.org/markup-compatibility/2006" r:id="rId52" roundtripDataSignature="AMtx7mhqKJAzFugGzrpaCdpbPJOL8OwfdA=="/>
     </p:ext>
   </p:extLst>
 </p:presentation>
@@ -1470,6 +1472,22 @@
     </pc:docChg>
   </pc:docChgLst>
   <pc:docChgLst>
+    <pc:chgData name="周立筠-數據應用部-永豐金證券" userId="S::liyun0222.zhou@sinopac.com::ee349c15-f274-43a3-b0c9-48d528d95247" providerId="AD" clId="Web-{A48564C8-421B-2203-E695-99D400D4424E}"/>
+    <pc:docChg chg="modSld">
+      <pc:chgData name="周立筠-數據應用部-永豐金證券" userId="S::liyun0222.zhou@sinopac.com::ee349c15-f274-43a3-b0c9-48d528d95247" providerId="AD" clId="Web-{A48564C8-421B-2203-E695-99D400D4424E}" dt="2024-08-23T09:42:27.791" v="49"/>
+      <pc:docMkLst>
+        <pc:docMk/>
+      </pc:docMkLst>
+      <pc:sldChg chg="modSp">
+        <pc:chgData name="周立筠-數據應用部-永豐金證券" userId="S::liyun0222.zhou@sinopac.com::ee349c15-f274-43a3-b0c9-48d528d95247" providerId="AD" clId="Web-{A48564C8-421B-2203-E695-99D400D4424E}" dt="2024-08-23T09:42:27.791" v="49"/>
+        <pc:sldMkLst>
+          <pc:docMk/>
+          <pc:sldMk cId="3262633635" sldId="297"/>
+        </pc:sldMkLst>
+      </pc:sldChg>
+    </pc:docChg>
+  </pc:docChgLst>
+  <pc:docChgLst>
     <pc:chgData name="張天豪-數位金融處-永豐銀行" userId="0d835702-99c9-4ef6-82d8-3ca86d4ccc15" providerId="ADAL" clId="{05C68244-A0A4-5F4B-A227-C47B6FE62571}"/>
     <pc:docChg chg="undo custSel addSld delSld modSld modMainMaster modSection">
       <pc:chgData name="張天豪-數位金融處-永豐銀行" userId="0d835702-99c9-4ef6-82d8-3ca86d4ccc15" providerId="ADAL" clId="{05C68244-A0A4-5F4B-A227-C47B6FE62571}" dt="2024-11-23T00:59:06.402" v="223" actId="12"/>
@@ -1570,22 +1588,6 @@
           </pc:sldLayoutMkLst>
         </pc:sldLayoutChg>
       </pc:sldMasterChg>
-    </pc:docChg>
-  </pc:docChgLst>
-  <pc:docChgLst>
-    <pc:chgData name="周立筠-數據應用部-永豐金證券" userId="S::liyun0222.zhou@sinopac.com::ee349c15-f274-43a3-b0c9-48d528d95247" providerId="AD" clId="Web-{A48564C8-421B-2203-E695-99D400D4424E}"/>
-    <pc:docChg chg="modSld">
-      <pc:chgData name="周立筠-數據應用部-永豐金證券" userId="S::liyun0222.zhou@sinopac.com::ee349c15-f274-43a3-b0c9-48d528d95247" providerId="AD" clId="Web-{A48564C8-421B-2203-E695-99D400D4424E}" dt="2024-08-23T09:42:27.791" v="49"/>
-      <pc:docMkLst>
-        <pc:docMk/>
-      </pc:docMkLst>
-      <pc:sldChg chg="modSp">
-        <pc:chgData name="周立筠-數據應用部-永豐金證券" userId="S::liyun0222.zhou@sinopac.com::ee349c15-f274-43a3-b0c9-48d528d95247" providerId="AD" clId="Web-{A48564C8-421B-2203-E695-99D400D4424E}" dt="2024-08-23T09:42:27.791" v="49"/>
-        <pc:sldMkLst>
-          <pc:docMk/>
-          <pc:sldMk cId="3262633635" sldId="297"/>
-        </pc:sldMkLst>
-      </pc:sldChg>
     </pc:docChg>
   </pc:docChgLst>
 </pc:chgInfo>
@@ -2457,6 +2459,156 @@
 </file>
 
 <file path=ppt/notesSlides/notesSlide3.xml><?xml version="1.0" encoding="utf-8"?>
+<p:notes xmlns:a="http://schemas.openxmlformats.org/drawingml/2006/main" xmlns:r="http://schemas.openxmlformats.org/officeDocument/2006/relationships" xmlns:p="http://schemas.openxmlformats.org/presentationml/2006/main">
+  <p:cSld>
+    <p:spTree>
+      <p:nvGrpSpPr>
+        <p:cNvPr id="1" name=""/>
+        <p:cNvGrpSpPr/>
+        <p:nvPr/>
+      </p:nvGrpSpPr>
+      <p:grpSpPr>
+        <a:xfrm>
+          <a:off x="0" y="0"/>
+          <a:ext cx="0" cy="0"/>
+          <a:chOff x="0" y="0"/>
+          <a:chExt cx="0" cy="0"/>
+        </a:xfrm>
+      </p:grpSpPr>
+      <p:sp>
+        <p:nvSpPr>
+          <p:cNvPr id="2" name="投影片影像版面配置區 1"/>
+          <p:cNvSpPr>
+            <a:spLocks noGrp="1" noRot="1" noChangeAspect="1"/>
+          </p:cNvSpPr>
+          <p:nvPr>
+            <p:ph type="sldImg"/>
+          </p:nvPr>
+        </p:nvSpPr>
+        <p:spPr>
+          <a:xfrm>
+            <a:off x="381000" y="685800"/>
+            <a:ext cx="6096000" cy="3429000"/>
+          </a:xfrm>
+        </p:spPr>
+      </p:sp>
+      <p:sp>
+        <p:nvSpPr>
+          <p:cNvPr id="3" name="備忘稿版面配置區 2"/>
+          <p:cNvSpPr>
+            <a:spLocks noGrp="1"/>
+          </p:cNvSpPr>
+          <p:nvPr>
+            <p:ph type="body" idx="1"/>
+          </p:nvPr>
+        </p:nvSpPr>
+        <p:spPr/>
+        <p:txBody>
+          <a:bodyPr/>
+          <a:lstStyle/>
+          <a:p>
+            <a:endParaRPr kumimoji="1" lang="zh-TW" altLang="en-US" dirty="0"/>
+          </a:p>
+        </p:txBody>
+      </p:sp>
+    </p:spTree>
+    <p:extLst>
+      <p:ext uri="{BB962C8B-B14F-4D97-AF65-F5344CB8AC3E}">
+        <p14:creationId xmlns:p14="http://schemas.microsoft.com/office/powerpoint/2010/main" val="2525449225"/>
+      </p:ext>
+    </p:extLst>
+  </p:cSld>
+  <p:clrMapOvr>
+    <a:masterClrMapping/>
+  </p:clrMapOvr>
+</p:notes>
+</file>
+
+<file path=ppt/notesSlides/notesSlide4.xml><?xml version="1.0" encoding="utf-8"?>
+<p:notes xmlns:a="http://schemas.openxmlformats.org/drawingml/2006/main" xmlns:r="http://schemas.openxmlformats.org/officeDocument/2006/relationships" xmlns:p="http://schemas.openxmlformats.org/presentationml/2006/main">
+  <p:cSld>
+    <p:spTree>
+      <p:nvGrpSpPr>
+        <p:cNvPr id="1" name="">
+          <a:extLst>
+            <a:ext uri="{FF2B5EF4-FFF2-40B4-BE49-F238E27FC236}">
+              <a16:creationId xmlns:a16="http://schemas.microsoft.com/office/drawing/2014/main" id="{E11B4B6C-24C5-DFCD-D485-DF3D78F4456E}"/>
+            </a:ext>
+          </a:extLst>
+        </p:cNvPr>
+        <p:cNvGrpSpPr/>
+        <p:nvPr/>
+      </p:nvGrpSpPr>
+      <p:grpSpPr>
+        <a:xfrm>
+          <a:off x="0" y="0"/>
+          <a:ext cx="0" cy="0"/>
+          <a:chOff x="0" y="0"/>
+          <a:chExt cx="0" cy="0"/>
+        </a:xfrm>
+      </p:grpSpPr>
+      <p:sp>
+        <p:nvSpPr>
+          <p:cNvPr id="2" name="投影片影像版面配置區 1">
+            <a:extLst>
+              <a:ext uri="{FF2B5EF4-FFF2-40B4-BE49-F238E27FC236}">
+                <a16:creationId xmlns:a16="http://schemas.microsoft.com/office/drawing/2014/main" id="{6AD1B42D-51F7-7E2F-DA5B-AB1C6E7E23D1}"/>
+              </a:ext>
+            </a:extLst>
+          </p:cNvPr>
+          <p:cNvSpPr>
+            <a:spLocks noGrp="1" noRot="1" noChangeAspect="1"/>
+          </p:cNvSpPr>
+          <p:nvPr>
+            <p:ph type="sldImg"/>
+          </p:nvPr>
+        </p:nvSpPr>
+        <p:spPr>
+          <a:xfrm>
+            <a:off x="381000" y="685800"/>
+            <a:ext cx="6096000" cy="3429000"/>
+          </a:xfrm>
+        </p:spPr>
+      </p:sp>
+      <p:sp>
+        <p:nvSpPr>
+          <p:cNvPr id="3" name="備忘稿版面配置區 2">
+            <a:extLst>
+              <a:ext uri="{FF2B5EF4-FFF2-40B4-BE49-F238E27FC236}">
+                <a16:creationId xmlns:a16="http://schemas.microsoft.com/office/drawing/2014/main" id="{5EE07BB6-483F-AB28-EC6F-720671174CF9}"/>
+              </a:ext>
+            </a:extLst>
+          </p:cNvPr>
+          <p:cNvSpPr>
+            <a:spLocks noGrp="1"/>
+          </p:cNvSpPr>
+          <p:nvPr>
+            <p:ph type="body" idx="1"/>
+          </p:nvPr>
+        </p:nvSpPr>
+        <p:spPr/>
+        <p:txBody>
+          <a:bodyPr/>
+          <a:lstStyle/>
+          <a:p>
+            <a:endParaRPr kumimoji="1" lang="zh-TW" altLang="en-US" dirty="0"/>
+          </a:p>
+        </p:txBody>
+      </p:sp>
+    </p:spTree>
+    <p:extLst>
+      <p:ext uri="{BB962C8B-B14F-4D97-AF65-F5344CB8AC3E}">
+        <p14:creationId xmlns:p14="http://schemas.microsoft.com/office/powerpoint/2010/main" val="2878049950"/>
+      </p:ext>
+    </p:extLst>
+  </p:cSld>
+  <p:clrMapOvr>
+    <a:masterClrMapping/>
+  </p:clrMapOvr>
+</p:notes>
+</file>
+
+<file path=ppt/notesSlides/notesSlide5.xml><?xml version="1.0" encoding="utf-8"?>
 <p:notes xmlns:a="http://schemas.openxmlformats.org/drawingml/2006/main" xmlns:r="http://schemas.openxmlformats.org/officeDocument/2006/relationships" xmlns:p="http://schemas.openxmlformats.org/presentationml/2006/main">
   <p:cSld>
     <p:spTree>
@@ -6469,6 +6621,4194 @@
       </p:grpSpPr>
       <p:sp>
         <p:nvSpPr>
+          <p:cNvPr id="2" name="標題 1">
+            <a:extLst>
+              <a:ext uri="{FF2B5EF4-FFF2-40B4-BE49-F238E27FC236}">
+                <a16:creationId xmlns:a16="http://schemas.microsoft.com/office/drawing/2014/main" id="{8F164B46-1F7F-A96F-1D9B-5D1D9A7E450F}"/>
+              </a:ext>
+            </a:extLst>
+          </p:cNvPr>
+          <p:cNvSpPr>
+            <a:spLocks noGrp="1"/>
+          </p:cNvSpPr>
+          <p:nvPr>
+            <p:ph type="title"/>
+          </p:nvPr>
+        </p:nvSpPr>
+        <p:spPr/>
+        <p:txBody>
+          <a:bodyPr/>
+          <a:lstStyle/>
+          <a:p>
+            <a:r>
+              <a:rPr lang="zh-TW" altLang="en-US" b="1" dirty="0"/>
+              <a:t>專案使用技術堆疊與系統邊界概覽</a:t>
+            </a:r>
+          </a:p>
+        </p:txBody>
+      </p:sp>
+      <p:pic>
+        <p:nvPicPr>
+          <p:cNvPr id="5" name="圖片 4" descr="一張含有 文字, 螢幕擷取畫面 的圖片&#10;&#10;AI 產生的內容可能不正確。">
+            <a:extLst>
+              <a:ext uri="{FF2B5EF4-FFF2-40B4-BE49-F238E27FC236}">
+                <a16:creationId xmlns:a16="http://schemas.microsoft.com/office/drawing/2014/main" id="{6D2BBD48-2B01-FE1F-16E6-1F32B7BA0DF2}"/>
+              </a:ext>
+            </a:extLst>
+          </p:cNvPr>
+          <p:cNvPicPr>
+            <a:picLocks noChangeAspect="1"/>
+          </p:cNvPicPr>
+          <p:nvPr/>
+        </p:nvPicPr>
+        <p:blipFill>
+          <a:blip r:embed="rId3"/>
+          <a:stretch>
+            <a:fillRect/>
+          </a:stretch>
+        </p:blipFill>
+        <p:spPr>
+          <a:xfrm>
+            <a:off x="1260242" y="814325"/>
+            <a:ext cx="9000000" cy="2592830"/>
+          </a:xfrm>
+          <a:prstGeom prst="rect">
+            <a:avLst/>
+          </a:prstGeom>
+        </p:spPr>
+      </p:pic>
+      <p:graphicFrame>
+        <p:nvGraphicFramePr>
+          <p:cNvPr id="8" name="表格 7">
+            <a:extLst>
+              <a:ext uri="{FF2B5EF4-FFF2-40B4-BE49-F238E27FC236}">
+                <a16:creationId xmlns:a16="http://schemas.microsoft.com/office/drawing/2014/main" id="{57C2B9AB-2A28-6954-6914-8AC98DBC1AEE}"/>
+              </a:ext>
+            </a:extLst>
+          </p:cNvPr>
+          <p:cNvGraphicFramePr>
+            <a:graphicFrameLocks noGrp="1"/>
+          </p:cNvGraphicFramePr>
+          <p:nvPr>
+            <p:extLst>
+              <p:ext uri="{D42A27DB-BD31-4B8C-83A1-F6EECF244321}">
+                <p14:modId xmlns:p14="http://schemas.microsoft.com/office/powerpoint/2010/main" val="2172758248"/>
+              </p:ext>
+            </p:extLst>
+          </p:nvPr>
+        </p:nvGraphicFramePr>
+        <p:xfrm>
+          <a:off x="450242" y="3609480"/>
+          <a:ext cx="10620000" cy="2340000"/>
+        </p:xfrm>
+        <a:graphic>
+          <a:graphicData uri="http://schemas.openxmlformats.org/drawingml/2006/table">
+            <a:tbl>
+              <a:tblPr/>
+              <a:tblGrid>
+                <a:gridCol w="1597346">
+                  <a:extLst>
+                    <a:ext uri="{9D8B030D-6E8A-4147-A177-3AD203B41FA5}">
+                      <a16:colId xmlns:a16="http://schemas.microsoft.com/office/drawing/2014/main" val="4151773850"/>
+                    </a:ext>
+                  </a:extLst>
+                </a:gridCol>
+                <a:gridCol w="3021458">
+                  <a:extLst>
+                    <a:ext uri="{9D8B030D-6E8A-4147-A177-3AD203B41FA5}">
+                      <a16:colId xmlns:a16="http://schemas.microsoft.com/office/drawing/2014/main" val="2795049291"/>
+                    </a:ext>
+                  </a:extLst>
+                </a:gridCol>
+                <a:gridCol w="6001196">
+                  <a:extLst>
+                    <a:ext uri="{9D8B030D-6E8A-4147-A177-3AD203B41FA5}">
+                      <a16:colId xmlns:a16="http://schemas.microsoft.com/office/drawing/2014/main" val="2931572429"/>
+                    </a:ext>
+                  </a:extLst>
+                </a:gridCol>
+              </a:tblGrid>
+              <a:tr h="230333">
+                <a:tc>
+                  <a:txBody>
+                    <a:bodyPr/>
+                    <a:lstStyle/>
+                    <a:p>
+                      <a:pPr>
+                        <a:buNone/>
+                      </a:pPr>
+                      <a:r>
+                        <a:rPr lang="zh-TW" altLang="en-US" sz="1200" b="1" dirty="0">
+                          <a:solidFill>
+                            <a:srgbClr val="000000"/>
+                          </a:solidFill>
+                          <a:effectLst/>
+                          <a:latin typeface="Microsoft JhengHei" panose="020B0604030504040204" pitchFamily="34" charset="-120"/>
+                          <a:ea typeface="Microsoft JhengHei" panose="020B0604030504040204" pitchFamily="34" charset="-120"/>
+                        </a:rPr>
+                        <a:t>元件</a:t>
+                      </a:r>
+                    </a:p>
+                  </a:txBody>
+                  <a:tcPr marL="22968" marR="22968" marT="10601" marB="10601" anchor="ctr">
+                    <a:lnL w="9525" cap="flat" cmpd="sng" algn="ctr">
+                      <a:solidFill>
+                        <a:srgbClr val="D6D6D6"/>
+                      </a:solidFill>
+                      <a:prstDash val="solid"/>
+                      <a:round/>
+                      <a:headEnd type="none" w="med" len="med"/>
+                      <a:tailEnd type="none" w="med" len="med"/>
+                    </a:lnL>
+                    <a:lnR w="9525" cap="flat" cmpd="sng" algn="ctr">
+                      <a:solidFill>
+                        <a:srgbClr val="D6D6D6"/>
+                      </a:solidFill>
+                      <a:prstDash val="solid"/>
+                      <a:round/>
+                      <a:headEnd type="none" w="med" len="med"/>
+                      <a:tailEnd type="none" w="med" len="med"/>
+                    </a:lnR>
+                    <a:lnT w="9525" cap="flat" cmpd="sng" algn="ctr">
+                      <a:solidFill>
+                        <a:srgbClr val="D6D6D6"/>
+                      </a:solidFill>
+                      <a:prstDash val="solid"/>
+                      <a:round/>
+                      <a:headEnd type="none" w="med" len="med"/>
+                      <a:tailEnd type="none" w="med" len="med"/>
+                    </a:lnT>
+                    <a:lnB w="9525" cap="flat" cmpd="sng" algn="ctr">
+                      <a:solidFill>
+                        <a:srgbClr val="D6D6D6"/>
+                      </a:solidFill>
+                      <a:prstDash val="solid"/>
+                      <a:round/>
+                      <a:headEnd type="none" w="med" len="med"/>
+                      <a:tailEnd type="none" w="med" len="med"/>
+                    </a:lnB>
+                    <a:solidFill>
+                      <a:srgbClr val="FFFFFF"/>
+                    </a:solidFill>
+                  </a:tcPr>
+                </a:tc>
+                <a:tc>
+                  <a:txBody>
+                    <a:bodyPr/>
+                    <a:lstStyle/>
+                    <a:p>
+                      <a:pPr>
+                        <a:buNone/>
+                      </a:pPr>
+                      <a:r>
+                        <a:rPr lang="zh-TW" altLang="en-US" sz="1200" b="1" dirty="0">
+                          <a:solidFill>
+                            <a:srgbClr val="000000"/>
+                          </a:solidFill>
+                          <a:effectLst/>
+                          <a:latin typeface="Microsoft JhengHei" panose="020B0604030504040204" pitchFamily="34" charset="-120"/>
+                          <a:ea typeface="Microsoft JhengHei" panose="020B0604030504040204" pitchFamily="34" charset="-120"/>
+                        </a:rPr>
+                        <a:t>技術 </a:t>
+                      </a:r>
+                      <a:r>
+                        <a:rPr lang="en-US" altLang="zh-TW" sz="1200" b="1" dirty="0">
+                          <a:solidFill>
+                            <a:srgbClr val="000000"/>
+                          </a:solidFill>
+                          <a:effectLst/>
+                          <a:latin typeface="Microsoft JhengHei" panose="020B0604030504040204" pitchFamily="34" charset="-120"/>
+                          <a:ea typeface="Microsoft JhengHei" panose="020B0604030504040204" pitchFamily="34" charset="-120"/>
+                        </a:rPr>
+                        <a:t>/ </a:t>
+                      </a:r>
+                      <a:r>
+                        <a:rPr lang="zh-TW" altLang="en-US" sz="1200" b="1" dirty="0">
+                          <a:solidFill>
+                            <a:srgbClr val="000000"/>
+                          </a:solidFill>
+                          <a:effectLst/>
+                          <a:latin typeface="Microsoft JhengHei" panose="020B0604030504040204" pitchFamily="34" charset="-120"/>
+                          <a:ea typeface="Microsoft JhengHei" panose="020B0604030504040204" pitchFamily="34" charset="-120"/>
+                        </a:rPr>
+                        <a:t>服務</a:t>
+                      </a:r>
+                    </a:p>
+                  </a:txBody>
+                  <a:tcPr marL="22968" marR="22968" marT="10601" marB="10601" anchor="ctr">
+                    <a:lnL w="9525" cap="flat" cmpd="sng" algn="ctr">
+                      <a:solidFill>
+                        <a:srgbClr val="D6D6D6"/>
+                      </a:solidFill>
+                      <a:prstDash val="solid"/>
+                      <a:round/>
+                      <a:headEnd type="none" w="med" len="med"/>
+                      <a:tailEnd type="none" w="med" len="med"/>
+                    </a:lnL>
+                    <a:lnR w="9525" cap="flat" cmpd="sng" algn="ctr">
+                      <a:solidFill>
+                        <a:srgbClr val="D6D6D6"/>
+                      </a:solidFill>
+                      <a:prstDash val="solid"/>
+                      <a:round/>
+                      <a:headEnd type="none" w="med" len="med"/>
+                      <a:tailEnd type="none" w="med" len="med"/>
+                    </a:lnR>
+                    <a:lnT w="9525" cap="flat" cmpd="sng" algn="ctr">
+                      <a:solidFill>
+                        <a:srgbClr val="D6D6D6"/>
+                      </a:solidFill>
+                      <a:prstDash val="solid"/>
+                      <a:round/>
+                      <a:headEnd type="none" w="med" len="med"/>
+                      <a:tailEnd type="none" w="med" len="med"/>
+                    </a:lnT>
+                    <a:lnB w="9525" cap="flat" cmpd="sng" algn="ctr">
+                      <a:solidFill>
+                        <a:srgbClr val="D6D6D6"/>
+                      </a:solidFill>
+                      <a:prstDash val="solid"/>
+                      <a:round/>
+                      <a:headEnd type="none" w="med" len="med"/>
+                      <a:tailEnd type="none" w="med" len="med"/>
+                    </a:lnB>
+                    <a:solidFill>
+                      <a:srgbClr val="FFFFFF"/>
+                    </a:solidFill>
+                  </a:tcPr>
+                </a:tc>
+                <a:tc>
+                  <a:txBody>
+                    <a:bodyPr/>
+                    <a:lstStyle/>
+                    <a:p>
+                      <a:pPr>
+                        <a:buNone/>
+                      </a:pPr>
+                      <a:r>
+                        <a:rPr lang="zh-TW" altLang="en-US" sz="1200" b="1" dirty="0">
+                          <a:solidFill>
+                            <a:srgbClr val="000000"/>
+                          </a:solidFill>
+                          <a:effectLst/>
+                          <a:latin typeface="Microsoft JhengHei" panose="020B0604030504040204" pitchFamily="34" charset="-120"/>
+                          <a:ea typeface="Microsoft JhengHei" panose="020B0604030504040204" pitchFamily="34" charset="-120"/>
+                        </a:rPr>
+                        <a:t>說明</a:t>
+                      </a:r>
+                    </a:p>
+                  </a:txBody>
+                  <a:tcPr marL="22968" marR="22968" marT="10601" marB="10601" anchor="ctr">
+                    <a:lnL w="9525" cap="flat" cmpd="sng" algn="ctr">
+                      <a:solidFill>
+                        <a:srgbClr val="D6D6D6"/>
+                      </a:solidFill>
+                      <a:prstDash val="solid"/>
+                      <a:round/>
+                      <a:headEnd type="none" w="med" len="med"/>
+                      <a:tailEnd type="none" w="med" len="med"/>
+                    </a:lnL>
+                    <a:lnR w="9525" cap="flat" cmpd="sng" algn="ctr">
+                      <a:solidFill>
+                        <a:srgbClr val="D6D6D6"/>
+                      </a:solidFill>
+                      <a:prstDash val="solid"/>
+                      <a:round/>
+                      <a:headEnd type="none" w="med" len="med"/>
+                      <a:tailEnd type="none" w="med" len="med"/>
+                    </a:lnR>
+                    <a:lnT w="9525" cap="flat" cmpd="sng" algn="ctr">
+                      <a:solidFill>
+                        <a:srgbClr val="D6D6D6"/>
+                      </a:solidFill>
+                      <a:prstDash val="solid"/>
+                      <a:round/>
+                      <a:headEnd type="none" w="med" len="med"/>
+                      <a:tailEnd type="none" w="med" len="med"/>
+                    </a:lnT>
+                    <a:lnB w="9525" cap="flat" cmpd="sng" algn="ctr">
+                      <a:solidFill>
+                        <a:srgbClr val="D6D6D6"/>
+                      </a:solidFill>
+                      <a:prstDash val="solid"/>
+                      <a:round/>
+                      <a:headEnd type="none" w="med" len="med"/>
+                      <a:tailEnd type="none" w="med" len="med"/>
+                    </a:lnB>
+                    <a:solidFill>
+                      <a:srgbClr val="FFFFFF"/>
+                    </a:solidFill>
+                  </a:tcPr>
+                </a:tc>
+                <a:extLst>
+                  <a:ext uri="{0D108BD9-81ED-4DB2-BD59-A6C34878D82A}">
+                    <a16:rowId xmlns:a16="http://schemas.microsoft.com/office/drawing/2014/main" val="1179448047"/>
+                  </a:ext>
+                </a:extLst>
+              </a:tr>
+              <a:tr h="230333">
+                <a:tc>
+                  <a:txBody>
+                    <a:bodyPr/>
+                    <a:lstStyle/>
+                    <a:p>
+                      <a:pPr>
+                        <a:buNone/>
+                      </a:pPr>
+                      <a:r>
+                        <a:rPr lang="en" sz="1200" b="0" dirty="0" err="1">
+                          <a:effectLst/>
+                          <a:latin typeface="Microsoft JhengHei" panose="020B0604030504040204" pitchFamily="34" charset="-120"/>
+                          <a:ea typeface="Microsoft JhengHei" panose="020B0604030504040204" pitchFamily="34" charset="-120"/>
+                        </a:rPr>
+                        <a:t>InfoGather</a:t>
+                      </a:r>
+                      <a:r>
+                        <a:rPr lang="en" sz="1200" b="0" dirty="0">
+                          <a:effectLst/>
+                          <a:latin typeface="Microsoft JhengHei" panose="020B0604030504040204" pitchFamily="34" charset="-120"/>
+                          <a:ea typeface="Microsoft JhengHei" panose="020B0604030504040204" pitchFamily="34" charset="-120"/>
+                        </a:rPr>
+                        <a:t> Web</a:t>
+                      </a:r>
+                    </a:p>
+                  </a:txBody>
+                  <a:tcPr marL="22968" marR="22968" marT="10601" marB="10601" anchor="ctr">
+                    <a:lnL w="9525" cap="flat" cmpd="sng" algn="ctr">
+                      <a:solidFill>
+                        <a:srgbClr val="D6D6D6"/>
+                      </a:solidFill>
+                      <a:prstDash val="solid"/>
+                      <a:round/>
+                      <a:headEnd type="none" w="med" len="med"/>
+                      <a:tailEnd type="none" w="med" len="med"/>
+                    </a:lnL>
+                    <a:lnR w="9525" cap="flat" cmpd="sng" algn="ctr">
+                      <a:solidFill>
+                        <a:srgbClr val="D6D6D6"/>
+                      </a:solidFill>
+                      <a:prstDash val="solid"/>
+                      <a:round/>
+                      <a:headEnd type="none" w="med" len="med"/>
+                      <a:tailEnd type="none" w="med" len="med"/>
+                    </a:lnR>
+                    <a:lnT w="9525" cap="flat" cmpd="sng" algn="ctr">
+                      <a:solidFill>
+                        <a:srgbClr val="D6D6D6"/>
+                      </a:solidFill>
+                      <a:prstDash val="solid"/>
+                      <a:round/>
+                      <a:headEnd type="none" w="med" len="med"/>
+                      <a:tailEnd type="none" w="med" len="med"/>
+                    </a:lnT>
+                    <a:lnB w="9525" cap="flat" cmpd="sng" algn="ctr">
+                      <a:solidFill>
+                        <a:srgbClr val="D6D6D6"/>
+                      </a:solidFill>
+                      <a:prstDash val="solid"/>
+                      <a:round/>
+                      <a:headEnd type="none" w="med" len="med"/>
+                      <a:tailEnd type="none" w="med" len="med"/>
+                    </a:lnB>
+                    <a:solidFill>
+                      <a:srgbClr val="FFFFFF"/>
+                    </a:solidFill>
+                  </a:tcPr>
+                </a:tc>
+                <a:tc>
+                  <a:txBody>
+                    <a:bodyPr/>
+                    <a:lstStyle/>
+                    <a:p>
+                      <a:pPr>
+                        <a:buNone/>
+                      </a:pPr>
+                      <a:r>
+                        <a:rPr lang="en" sz="1200" b="0" dirty="0">
+                          <a:effectLst/>
+                          <a:latin typeface="Microsoft JhengHei" panose="020B0604030504040204" pitchFamily="34" charset="-120"/>
+                          <a:ea typeface="Microsoft JhengHei" panose="020B0604030504040204" pitchFamily="34" charset="-120"/>
+                        </a:rPr>
+                        <a:t>Angular </a:t>
+                      </a:r>
+                      <a:r>
+                        <a:rPr lang="zh-TW" altLang="en-US" sz="1200" b="0" dirty="0">
+                          <a:effectLst/>
+                          <a:latin typeface="Microsoft JhengHei" panose="020B0604030504040204" pitchFamily="34" charset="-120"/>
+                          <a:ea typeface="Microsoft JhengHei" panose="020B0604030504040204" pitchFamily="34" charset="-120"/>
+                        </a:rPr>
+                        <a:t>前端</a:t>
+                      </a:r>
+                    </a:p>
+                  </a:txBody>
+                  <a:tcPr marL="22968" marR="22968" marT="10601" marB="10601" anchor="ctr">
+                    <a:lnL w="9525" cap="flat" cmpd="sng" algn="ctr">
+                      <a:solidFill>
+                        <a:srgbClr val="D6D6D6"/>
+                      </a:solidFill>
+                      <a:prstDash val="solid"/>
+                      <a:round/>
+                      <a:headEnd type="none" w="med" len="med"/>
+                      <a:tailEnd type="none" w="med" len="med"/>
+                    </a:lnL>
+                    <a:lnR w="9525" cap="flat" cmpd="sng" algn="ctr">
+                      <a:solidFill>
+                        <a:srgbClr val="D6D6D6"/>
+                      </a:solidFill>
+                      <a:prstDash val="solid"/>
+                      <a:round/>
+                      <a:headEnd type="none" w="med" len="med"/>
+                      <a:tailEnd type="none" w="med" len="med"/>
+                    </a:lnR>
+                    <a:lnT w="9525" cap="flat" cmpd="sng" algn="ctr">
+                      <a:solidFill>
+                        <a:srgbClr val="D6D6D6"/>
+                      </a:solidFill>
+                      <a:prstDash val="solid"/>
+                      <a:round/>
+                      <a:headEnd type="none" w="med" len="med"/>
+                      <a:tailEnd type="none" w="med" len="med"/>
+                    </a:lnT>
+                    <a:lnB w="9525" cap="flat" cmpd="sng" algn="ctr">
+                      <a:solidFill>
+                        <a:srgbClr val="D6D6D6"/>
+                      </a:solidFill>
+                      <a:prstDash val="solid"/>
+                      <a:round/>
+                      <a:headEnd type="none" w="med" len="med"/>
+                      <a:tailEnd type="none" w="med" len="med"/>
+                    </a:lnB>
+                    <a:solidFill>
+                      <a:srgbClr val="FFFFFF"/>
+                    </a:solidFill>
+                  </a:tcPr>
+                </a:tc>
+                <a:tc>
+                  <a:txBody>
+                    <a:bodyPr/>
+                    <a:lstStyle/>
+                    <a:p>
+                      <a:pPr>
+                        <a:buNone/>
+                      </a:pPr>
+                      <a:r>
+                        <a:rPr lang="zh-TW" altLang="en-US" sz="1200" b="0" dirty="0">
+                          <a:effectLst/>
+                          <a:latin typeface="Microsoft JhengHei" panose="020B0604030504040204" pitchFamily="34" charset="-120"/>
+                          <a:ea typeface="Microsoft JhengHei" panose="020B0604030504040204" pitchFamily="34" charset="-120"/>
+                        </a:rPr>
+                        <a:t>提供 </a:t>
+                      </a:r>
+                      <a:r>
+                        <a:rPr lang="en" sz="1200" b="0" dirty="0">
+                          <a:effectLst/>
+                          <a:latin typeface="Microsoft JhengHei" panose="020B0604030504040204" pitchFamily="34" charset="-120"/>
+                          <a:ea typeface="Microsoft JhengHei" panose="020B0604030504040204" pitchFamily="34" charset="-120"/>
+                        </a:rPr>
+                        <a:t>UI，</a:t>
+                      </a:r>
+                      <a:r>
+                        <a:rPr lang="zh-TW" altLang="en-US" sz="1200" b="0" dirty="0">
+                          <a:effectLst/>
+                          <a:latin typeface="Microsoft JhengHei" panose="020B0604030504040204" pitchFamily="34" charset="-120"/>
+                          <a:ea typeface="Microsoft JhengHei" panose="020B0604030504040204" pitchFamily="34" charset="-120"/>
+                        </a:rPr>
+                        <a:t>讓使用者瀏覽資料、管理資料來源</a:t>
+                      </a:r>
+                      <a:r>
+                        <a:rPr lang="en" sz="1200" b="0" dirty="0">
+                          <a:effectLst/>
+                          <a:latin typeface="Microsoft JhengHei" panose="020B0604030504040204" pitchFamily="34" charset="-120"/>
+                          <a:ea typeface="Microsoft JhengHei" panose="020B0604030504040204" pitchFamily="34" charset="-120"/>
+                        </a:rPr>
+                        <a:t>、</a:t>
+                      </a:r>
+                      <a:r>
+                        <a:rPr lang="en" sz="1200" b="0" dirty="0" err="1">
+                          <a:effectLst/>
+                          <a:latin typeface="Microsoft JhengHei" panose="020B0604030504040204" pitchFamily="34" charset="-120"/>
+                          <a:ea typeface="Microsoft JhengHei" panose="020B0604030504040204" pitchFamily="34" charset="-120"/>
+                        </a:rPr>
+                        <a:t>資訊助手、洞見彙報</a:t>
+                      </a:r>
+                      <a:r>
+                        <a:rPr lang="zh-TW" altLang="en-US" sz="1200" b="0" dirty="0">
+                          <a:effectLst/>
+                          <a:latin typeface="Microsoft JhengHei" panose="020B0604030504040204" pitchFamily="34" charset="-120"/>
+                          <a:ea typeface="Microsoft JhengHei" panose="020B0604030504040204" pitchFamily="34" charset="-120"/>
+                        </a:rPr>
+                        <a:t>與通知</a:t>
+                      </a:r>
+                    </a:p>
+                  </a:txBody>
+                  <a:tcPr marL="22968" marR="22968" marT="10601" marB="10601" anchor="ctr">
+                    <a:lnL w="9525" cap="flat" cmpd="sng" algn="ctr">
+                      <a:solidFill>
+                        <a:srgbClr val="D6D6D6"/>
+                      </a:solidFill>
+                      <a:prstDash val="solid"/>
+                      <a:round/>
+                      <a:headEnd type="none" w="med" len="med"/>
+                      <a:tailEnd type="none" w="med" len="med"/>
+                    </a:lnL>
+                    <a:lnR w="9525" cap="flat" cmpd="sng" algn="ctr">
+                      <a:solidFill>
+                        <a:srgbClr val="D6D6D6"/>
+                      </a:solidFill>
+                      <a:prstDash val="solid"/>
+                      <a:round/>
+                      <a:headEnd type="none" w="med" len="med"/>
+                      <a:tailEnd type="none" w="med" len="med"/>
+                    </a:lnR>
+                    <a:lnT w="9525" cap="flat" cmpd="sng" algn="ctr">
+                      <a:solidFill>
+                        <a:srgbClr val="D6D6D6"/>
+                      </a:solidFill>
+                      <a:prstDash val="solid"/>
+                      <a:round/>
+                      <a:headEnd type="none" w="med" len="med"/>
+                      <a:tailEnd type="none" w="med" len="med"/>
+                    </a:lnT>
+                    <a:lnB w="9525" cap="flat" cmpd="sng" algn="ctr">
+                      <a:solidFill>
+                        <a:srgbClr val="D6D6D6"/>
+                      </a:solidFill>
+                      <a:prstDash val="solid"/>
+                      <a:round/>
+                      <a:headEnd type="none" w="med" len="med"/>
+                      <a:tailEnd type="none" w="med" len="med"/>
+                    </a:lnB>
+                    <a:solidFill>
+                      <a:srgbClr val="FFFFFF"/>
+                    </a:solidFill>
+                  </a:tcPr>
+                </a:tc>
+                <a:extLst>
+                  <a:ext uri="{0D108BD9-81ED-4DB2-BD59-A6C34878D82A}">
+                    <a16:rowId xmlns:a16="http://schemas.microsoft.com/office/drawing/2014/main" val="4106164441"/>
+                  </a:ext>
+                </a:extLst>
+              </a:tr>
+              <a:tr h="230333">
+                <a:tc>
+                  <a:txBody>
+                    <a:bodyPr/>
+                    <a:lstStyle/>
+                    <a:p>
+                      <a:pPr>
+                        <a:buNone/>
+                      </a:pPr>
+                      <a:r>
+                        <a:rPr lang="en" sz="1200" b="0">
+                          <a:effectLst/>
+                          <a:latin typeface="Microsoft JhengHei" panose="020B0604030504040204" pitchFamily="34" charset="-120"/>
+                          <a:ea typeface="Microsoft JhengHei" panose="020B0604030504040204" pitchFamily="34" charset="-120"/>
+                        </a:rPr>
+                        <a:t>InfoGather API</a:t>
+                      </a:r>
+                    </a:p>
+                  </a:txBody>
+                  <a:tcPr marL="22968" marR="22968" marT="10601" marB="10601" anchor="ctr">
+                    <a:lnL w="9525" cap="flat" cmpd="sng" algn="ctr">
+                      <a:solidFill>
+                        <a:srgbClr val="D6D6D6"/>
+                      </a:solidFill>
+                      <a:prstDash val="solid"/>
+                      <a:round/>
+                      <a:headEnd type="none" w="med" len="med"/>
+                      <a:tailEnd type="none" w="med" len="med"/>
+                    </a:lnL>
+                    <a:lnR w="9525" cap="flat" cmpd="sng" algn="ctr">
+                      <a:solidFill>
+                        <a:srgbClr val="D6D6D6"/>
+                      </a:solidFill>
+                      <a:prstDash val="solid"/>
+                      <a:round/>
+                      <a:headEnd type="none" w="med" len="med"/>
+                      <a:tailEnd type="none" w="med" len="med"/>
+                    </a:lnR>
+                    <a:lnT w="9525" cap="flat" cmpd="sng" algn="ctr">
+                      <a:solidFill>
+                        <a:srgbClr val="D6D6D6"/>
+                      </a:solidFill>
+                      <a:prstDash val="solid"/>
+                      <a:round/>
+                      <a:headEnd type="none" w="med" len="med"/>
+                      <a:tailEnd type="none" w="med" len="med"/>
+                    </a:lnT>
+                    <a:lnB w="9525" cap="flat" cmpd="sng" algn="ctr">
+                      <a:solidFill>
+                        <a:srgbClr val="D6D6D6"/>
+                      </a:solidFill>
+                      <a:prstDash val="solid"/>
+                      <a:round/>
+                      <a:headEnd type="none" w="med" len="med"/>
+                      <a:tailEnd type="none" w="med" len="med"/>
+                    </a:lnB>
+                    <a:solidFill>
+                      <a:srgbClr val="FFFFFF"/>
+                    </a:solidFill>
+                  </a:tcPr>
+                </a:tc>
+                <a:tc>
+                  <a:txBody>
+                    <a:bodyPr/>
+                    <a:lstStyle/>
+                    <a:p>
+                      <a:pPr>
+                        <a:buNone/>
+                      </a:pPr>
+                      <a:r>
+                        <a:rPr lang="en" sz="1200" b="0" dirty="0">
+                          <a:effectLst/>
+                          <a:latin typeface="Microsoft JhengHei" panose="020B0604030504040204" pitchFamily="34" charset="-120"/>
+                          <a:ea typeface="Microsoft JhengHei" panose="020B0604030504040204" pitchFamily="34" charset="-120"/>
+                        </a:rPr>
+                        <a:t>Node.js </a:t>
+                      </a:r>
+                      <a:r>
+                        <a:rPr lang="zh-TW" altLang="en-US" sz="1200" b="0" dirty="0">
+                          <a:effectLst/>
+                          <a:latin typeface="Microsoft JhengHei" panose="020B0604030504040204" pitchFamily="34" charset="-120"/>
+                          <a:ea typeface="Microsoft JhengHei" panose="020B0604030504040204" pitchFamily="34" charset="-120"/>
+                        </a:rPr>
+                        <a:t>後端 </a:t>
+                      </a:r>
+                      <a:r>
+                        <a:rPr lang="en" sz="1200" b="0" dirty="0">
+                          <a:effectLst/>
+                          <a:latin typeface="Microsoft JhengHei" panose="020B0604030504040204" pitchFamily="34" charset="-120"/>
+                          <a:ea typeface="Microsoft JhengHei" panose="020B0604030504040204" pitchFamily="34" charset="-120"/>
+                        </a:rPr>
+                        <a:t>API</a:t>
+                      </a:r>
+                    </a:p>
+                  </a:txBody>
+                  <a:tcPr marL="22968" marR="22968" marT="10601" marB="10601" anchor="ctr">
+                    <a:lnL w="9525" cap="flat" cmpd="sng" algn="ctr">
+                      <a:solidFill>
+                        <a:srgbClr val="D6D6D6"/>
+                      </a:solidFill>
+                      <a:prstDash val="solid"/>
+                      <a:round/>
+                      <a:headEnd type="none" w="med" len="med"/>
+                      <a:tailEnd type="none" w="med" len="med"/>
+                    </a:lnL>
+                    <a:lnR w="9525" cap="flat" cmpd="sng" algn="ctr">
+                      <a:solidFill>
+                        <a:srgbClr val="D6D6D6"/>
+                      </a:solidFill>
+                      <a:prstDash val="solid"/>
+                      <a:round/>
+                      <a:headEnd type="none" w="med" len="med"/>
+                      <a:tailEnd type="none" w="med" len="med"/>
+                    </a:lnR>
+                    <a:lnT w="9525" cap="flat" cmpd="sng" algn="ctr">
+                      <a:solidFill>
+                        <a:srgbClr val="D6D6D6"/>
+                      </a:solidFill>
+                      <a:prstDash val="solid"/>
+                      <a:round/>
+                      <a:headEnd type="none" w="med" len="med"/>
+                      <a:tailEnd type="none" w="med" len="med"/>
+                    </a:lnT>
+                    <a:lnB w="9525" cap="flat" cmpd="sng" algn="ctr">
+                      <a:solidFill>
+                        <a:srgbClr val="D6D6D6"/>
+                      </a:solidFill>
+                      <a:prstDash val="solid"/>
+                      <a:round/>
+                      <a:headEnd type="none" w="med" len="med"/>
+                      <a:tailEnd type="none" w="med" len="med"/>
+                    </a:lnB>
+                    <a:solidFill>
+                      <a:srgbClr val="FFFFFF"/>
+                    </a:solidFill>
+                  </a:tcPr>
+                </a:tc>
+                <a:tc>
+                  <a:txBody>
+                    <a:bodyPr/>
+                    <a:lstStyle/>
+                    <a:p>
+                      <a:pPr>
+                        <a:buNone/>
+                      </a:pPr>
+                      <a:r>
+                        <a:rPr lang="zh-TW" altLang="en-US" sz="1200" b="0" dirty="0">
+                          <a:effectLst/>
+                          <a:latin typeface="Microsoft JhengHei" panose="020B0604030504040204" pitchFamily="34" charset="-120"/>
+                          <a:ea typeface="Microsoft JhengHei" panose="020B0604030504040204" pitchFamily="34" charset="-120"/>
+                        </a:rPr>
+                        <a:t>負責業務邏輯、權限驗證、資料存取、對外 </a:t>
+                      </a:r>
+                      <a:r>
+                        <a:rPr lang="en" sz="1200" b="0" dirty="0">
+                          <a:effectLst/>
+                          <a:latin typeface="Microsoft JhengHei" panose="020B0604030504040204" pitchFamily="34" charset="-120"/>
+                          <a:ea typeface="Microsoft JhengHei" panose="020B0604030504040204" pitchFamily="34" charset="-120"/>
+                        </a:rPr>
+                        <a:t>API、</a:t>
+                      </a:r>
+                      <a:r>
+                        <a:rPr lang="zh-TW" altLang="en-US" sz="1200" b="0" dirty="0">
+                          <a:effectLst/>
+                          <a:latin typeface="Microsoft JhengHei" panose="020B0604030504040204" pitchFamily="34" charset="-120"/>
+                          <a:ea typeface="Microsoft JhengHei" panose="020B0604030504040204" pitchFamily="34" charset="-120"/>
+                        </a:rPr>
+                        <a:t>觸發背景工作</a:t>
+                      </a:r>
+                    </a:p>
+                  </a:txBody>
+                  <a:tcPr marL="22968" marR="22968" marT="10601" marB="10601" anchor="ctr">
+                    <a:lnL w="9525" cap="flat" cmpd="sng" algn="ctr">
+                      <a:solidFill>
+                        <a:srgbClr val="D6D6D6"/>
+                      </a:solidFill>
+                      <a:prstDash val="solid"/>
+                      <a:round/>
+                      <a:headEnd type="none" w="med" len="med"/>
+                      <a:tailEnd type="none" w="med" len="med"/>
+                    </a:lnL>
+                    <a:lnR w="9525" cap="flat" cmpd="sng" algn="ctr">
+                      <a:solidFill>
+                        <a:srgbClr val="D6D6D6"/>
+                      </a:solidFill>
+                      <a:prstDash val="solid"/>
+                      <a:round/>
+                      <a:headEnd type="none" w="med" len="med"/>
+                      <a:tailEnd type="none" w="med" len="med"/>
+                    </a:lnR>
+                    <a:lnT w="9525" cap="flat" cmpd="sng" algn="ctr">
+                      <a:solidFill>
+                        <a:srgbClr val="D6D6D6"/>
+                      </a:solidFill>
+                      <a:prstDash val="solid"/>
+                      <a:round/>
+                      <a:headEnd type="none" w="med" len="med"/>
+                      <a:tailEnd type="none" w="med" len="med"/>
+                    </a:lnT>
+                    <a:lnB w="9525" cap="flat" cmpd="sng" algn="ctr">
+                      <a:solidFill>
+                        <a:srgbClr val="D6D6D6"/>
+                      </a:solidFill>
+                      <a:prstDash val="solid"/>
+                      <a:round/>
+                      <a:headEnd type="none" w="med" len="med"/>
+                      <a:tailEnd type="none" w="med" len="med"/>
+                    </a:lnB>
+                    <a:solidFill>
+                      <a:srgbClr val="FFFFFF"/>
+                    </a:solidFill>
+                  </a:tcPr>
+                </a:tc>
+                <a:extLst>
+                  <a:ext uri="{0D108BD9-81ED-4DB2-BD59-A6C34878D82A}">
+                    <a16:rowId xmlns:a16="http://schemas.microsoft.com/office/drawing/2014/main" val="67797231"/>
+                  </a:ext>
+                </a:extLst>
+              </a:tr>
+              <a:tr h="230333">
+                <a:tc>
+                  <a:txBody>
+                    <a:bodyPr/>
+                    <a:lstStyle/>
+                    <a:p>
+                      <a:pPr>
+                        <a:buNone/>
+                      </a:pPr>
+                      <a:r>
+                        <a:rPr lang="en" sz="1200" b="0">
+                          <a:effectLst/>
+                          <a:latin typeface="Microsoft JhengHei" panose="020B0604030504040204" pitchFamily="34" charset="-120"/>
+                          <a:ea typeface="Microsoft JhengHei" panose="020B0604030504040204" pitchFamily="34" charset="-120"/>
+                        </a:rPr>
+                        <a:t>Scheduler</a:t>
+                      </a:r>
+                    </a:p>
+                  </a:txBody>
+                  <a:tcPr marL="22968" marR="22968" marT="10601" marB="10601" anchor="ctr">
+                    <a:lnL w="9525" cap="flat" cmpd="sng" algn="ctr">
+                      <a:solidFill>
+                        <a:srgbClr val="D6D6D6"/>
+                      </a:solidFill>
+                      <a:prstDash val="solid"/>
+                      <a:round/>
+                      <a:headEnd type="none" w="med" len="med"/>
+                      <a:tailEnd type="none" w="med" len="med"/>
+                    </a:lnL>
+                    <a:lnR w="9525" cap="flat" cmpd="sng" algn="ctr">
+                      <a:solidFill>
+                        <a:srgbClr val="D6D6D6"/>
+                      </a:solidFill>
+                      <a:prstDash val="solid"/>
+                      <a:round/>
+                      <a:headEnd type="none" w="med" len="med"/>
+                      <a:tailEnd type="none" w="med" len="med"/>
+                    </a:lnR>
+                    <a:lnT w="9525" cap="flat" cmpd="sng" algn="ctr">
+                      <a:solidFill>
+                        <a:srgbClr val="D6D6D6"/>
+                      </a:solidFill>
+                      <a:prstDash val="solid"/>
+                      <a:round/>
+                      <a:headEnd type="none" w="med" len="med"/>
+                      <a:tailEnd type="none" w="med" len="med"/>
+                    </a:lnT>
+                    <a:lnB w="9525" cap="flat" cmpd="sng" algn="ctr">
+                      <a:solidFill>
+                        <a:srgbClr val="D6D6D6"/>
+                      </a:solidFill>
+                      <a:prstDash val="solid"/>
+                      <a:round/>
+                      <a:headEnd type="none" w="med" len="med"/>
+                      <a:tailEnd type="none" w="med" len="med"/>
+                    </a:lnB>
+                    <a:solidFill>
+                      <a:srgbClr val="FFFFFF"/>
+                    </a:solidFill>
+                  </a:tcPr>
+                </a:tc>
+                <a:tc>
+                  <a:txBody>
+                    <a:bodyPr/>
+                    <a:lstStyle/>
+                    <a:p>
+                      <a:pPr>
+                        <a:buNone/>
+                      </a:pPr>
+                      <a:r>
+                        <a:rPr lang="en" altLang="zh-TW" sz="1200" b="0" dirty="0">
+                          <a:effectLst/>
+                          <a:latin typeface="Microsoft JhengHei" panose="020B0604030504040204" pitchFamily="34" charset="-120"/>
+                          <a:ea typeface="Microsoft JhengHei" panose="020B0604030504040204" pitchFamily="34" charset="-120"/>
+                        </a:rPr>
+                        <a:t>Node.js </a:t>
+                      </a:r>
+                      <a:r>
+                        <a:rPr lang="zh-TW" altLang="en-US" sz="1200" b="0" dirty="0">
+                          <a:effectLst/>
+                          <a:latin typeface="Microsoft JhengHei" panose="020B0604030504040204" pitchFamily="34" charset="-120"/>
+                          <a:ea typeface="Microsoft JhengHei" panose="020B0604030504040204" pitchFamily="34" charset="-120"/>
+                        </a:rPr>
+                        <a:t>排程服務</a:t>
+                      </a:r>
+                    </a:p>
+                  </a:txBody>
+                  <a:tcPr marL="22968" marR="22968" marT="10601" marB="10601" anchor="ctr">
+                    <a:lnL w="9525" cap="flat" cmpd="sng" algn="ctr">
+                      <a:solidFill>
+                        <a:srgbClr val="D6D6D6"/>
+                      </a:solidFill>
+                      <a:prstDash val="solid"/>
+                      <a:round/>
+                      <a:headEnd type="none" w="med" len="med"/>
+                      <a:tailEnd type="none" w="med" len="med"/>
+                    </a:lnL>
+                    <a:lnR w="9525" cap="flat" cmpd="sng" algn="ctr">
+                      <a:solidFill>
+                        <a:srgbClr val="D6D6D6"/>
+                      </a:solidFill>
+                      <a:prstDash val="solid"/>
+                      <a:round/>
+                      <a:headEnd type="none" w="med" len="med"/>
+                      <a:tailEnd type="none" w="med" len="med"/>
+                    </a:lnR>
+                    <a:lnT w="9525" cap="flat" cmpd="sng" algn="ctr">
+                      <a:solidFill>
+                        <a:srgbClr val="D6D6D6"/>
+                      </a:solidFill>
+                      <a:prstDash val="solid"/>
+                      <a:round/>
+                      <a:headEnd type="none" w="med" len="med"/>
+                      <a:tailEnd type="none" w="med" len="med"/>
+                    </a:lnT>
+                    <a:lnB w="9525" cap="flat" cmpd="sng" algn="ctr">
+                      <a:solidFill>
+                        <a:srgbClr val="D6D6D6"/>
+                      </a:solidFill>
+                      <a:prstDash val="solid"/>
+                      <a:round/>
+                      <a:headEnd type="none" w="med" len="med"/>
+                      <a:tailEnd type="none" w="med" len="med"/>
+                    </a:lnB>
+                    <a:solidFill>
+                      <a:srgbClr val="FFFFFF"/>
+                    </a:solidFill>
+                  </a:tcPr>
+                </a:tc>
+                <a:tc>
+                  <a:txBody>
+                    <a:bodyPr/>
+                    <a:lstStyle/>
+                    <a:p>
+                      <a:pPr>
+                        <a:buNone/>
+                      </a:pPr>
+                      <a:r>
+                        <a:rPr lang="zh-TW" altLang="en-US" sz="1200" b="0" dirty="0">
+                          <a:effectLst/>
+                          <a:latin typeface="Microsoft JhengHei" panose="020B0604030504040204" pitchFamily="34" charset="-120"/>
+                          <a:ea typeface="Microsoft JhengHei" panose="020B0604030504040204" pitchFamily="34" charset="-120"/>
+                        </a:rPr>
+                        <a:t>定期掃描 </a:t>
+                      </a:r>
+                      <a:r>
+                        <a:rPr lang="en" sz="1200" b="0" dirty="0">
+                          <a:effectLst/>
+                          <a:latin typeface="Microsoft JhengHei" panose="020B0604030504040204" pitchFamily="34" charset="-120"/>
+                          <a:ea typeface="Microsoft JhengHei" panose="020B0604030504040204" pitchFamily="34" charset="-120"/>
+                        </a:rPr>
+                        <a:t>feeds </a:t>
+                      </a:r>
+                      <a:r>
+                        <a:rPr lang="zh-TW" altLang="en-US" sz="1200" b="0" dirty="0">
+                          <a:effectLst/>
+                          <a:latin typeface="Microsoft JhengHei" panose="020B0604030504040204" pitchFamily="34" charset="-120"/>
+                          <a:ea typeface="Microsoft JhengHei" panose="020B0604030504040204" pitchFamily="34" charset="-120"/>
+                        </a:rPr>
+                        <a:t>或工作條件，將待處理任務送進佇列</a:t>
+                      </a:r>
+                    </a:p>
+                  </a:txBody>
+                  <a:tcPr marL="22968" marR="22968" marT="10601" marB="10601" anchor="ctr">
+                    <a:lnL w="9525" cap="flat" cmpd="sng" algn="ctr">
+                      <a:solidFill>
+                        <a:srgbClr val="D6D6D6"/>
+                      </a:solidFill>
+                      <a:prstDash val="solid"/>
+                      <a:round/>
+                      <a:headEnd type="none" w="med" len="med"/>
+                      <a:tailEnd type="none" w="med" len="med"/>
+                    </a:lnL>
+                    <a:lnR w="9525" cap="flat" cmpd="sng" algn="ctr">
+                      <a:solidFill>
+                        <a:srgbClr val="D6D6D6"/>
+                      </a:solidFill>
+                      <a:prstDash val="solid"/>
+                      <a:round/>
+                      <a:headEnd type="none" w="med" len="med"/>
+                      <a:tailEnd type="none" w="med" len="med"/>
+                    </a:lnR>
+                    <a:lnT w="9525" cap="flat" cmpd="sng" algn="ctr">
+                      <a:solidFill>
+                        <a:srgbClr val="D6D6D6"/>
+                      </a:solidFill>
+                      <a:prstDash val="solid"/>
+                      <a:round/>
+                      <a:headEnd type="none" w="med" len="med"/>
+                      <a:tailEnd type="none" w="med" len="med"/>
+                    </a:lnT>
+                    <a:lnB w="9525" cap="flat" cmpd="sng" algn="ctr">
+                      <a:solidFill>
+                        <a:srgbClr val="D6D6D6"/>
+                      </a:solidFill>
+                      <a:prstDash val="solid"/>
+                      <a:round/>
+                      <a:headEnd type="none" w="med" len="med"/>
+                      <a:tailEnd type="none" w="med" len="med"/>
+                    </a:lnB>
+                    <a:solidFill>
+                      <a:srgbClr val="FFFFFF"/>
+                    </a:solidFill>
+                  </a:tcPr>
+                </a:tc>
+                <a:extLst>
+                  <a:ext uri="{0D108BD9-81ED-4DB2-BD59-A6C34878D82A}">
+                    <a16:rowId xmlns:a16="http://schemas.microsoft.com/office/drawing/2014/main" val="981969671"/>
+                  </a:ext>
+                </a:extLst>
+              </a:tr>
+              <a:tr h="248668">
+                <a:tc>
+                  <a:txBody>
+                    <a:bodyPr/>
+                    <a:lstStyle/>
+                    <a:p>
+                      <a:pPr>
+                        <a:buNone/>
+                      </a:pPr>
+                      <a:r>
+                        <a:rPr lang="en" sz="1200" b="0" dirty="0">
+                          <a:effectLst/>
+                          <a:latin typeface="Microsoft JhengHei" panose="020B0604030504040204" pitchFamily="34" charset="-120"/>
+                          <a:ea typeface="Microsoft JhengHei" panose="020B0604030504040204" pitchFamily="34" charset="-120"/>
+                        </a:rPr>
+                        <a:t>Workers</a:t>
+                      </a:r>
+                    </a:p>
+                  </a:txBody>
+                  <a:tcPr marL="22968" marR="22968" marT="10601" marB="10601" anchor="ctr">
+                    <a:lnL w="9525" cap="flat" cmpd="sng" algn="ctr">
+                      <a:solidFill>
+                        <a:srgbClr val="D6D6D6"/>
+                      </a:solidFill>
+                      <a:prstDash val="solid"/>
+                      <a:round/>
+                      <a:headEnd type="none" w="med" len="med"/>
+                      <a:tailEnd type="none" w="med" len="med"/>
+                    </a:lnL>
+                    <a:lnR w="9525" cap="flat" cmpd="sng" algn="ctr">
+                      <a:solidFill>
+                        <a:srgbClr val="D6D6D6"/>
+                      </a:solidFill>
+                      <a:prstDash val="solid"/>
+                      <a:round/>
+                      <a:headEnd type="none" w="med" len="med"/>
+                      <a:tailEnd type="none" w="med" len="med"/>
+                    </a:lnR>
+                    <a:lnT w="9525" cap="flat" cmpd="sng" algn="ctr">
+                      <a:solidFill>
+                        <a:srgbClr val="D6D6D6"/>
+                      </a:solidFill>
+                      <a:prstDash val="solid"/>
+                      <a:round/>
+                      <a:headEnd type="none" w="med" len="med"/>
+                      <a:tailEnd type="none" w="med" len="med"/>
+                    </a:lnT>
+                    <a:lnB w="9525" cap="flat" cmpd="sng" algn="ctr">
+                      <a:solidFill>
+                        <a:srgbClr val="D6D6D6"/>
+                      </a:solidFill>
+                      <a:prstDash val="solid"/>
+                      <a:round/>
+                      <a:headEnd type="none" w="med" len="med"/>
+                      <a:tailEnd type="none" w="med" len="med"/>
+                    </a:lnB>
+                    <a:solidFill>
+                      <a:srgbClr val="FFFFFF"/>
+                    </a:solidFill>
+                  </a:tcPr>
+                </a:tc>
+                <a:tc>
+                  <a:txBody>
+                    <a:bodyPr/>
+                    <a:lstStyle/>
+                    <a:p>
+                      <a:pPr>
+                        <a:buNone/>
+                      </a:pPr>
+                      <a:r>
+                        <a:rPr lang="en" altLang="zh-TW" sz="1200" b="0" dirty="0">
+                          <a:effectLst/>
+                          <a:latin typeface="Microsoft JhengHei" panose="020B0604030504040204" pitchFamily="34" charset="-120"/>
+                          <a:ea typeface="Microsoft JhengHei" panose="020B0604030504040204" pitchFamily="34" charset="-120"/>
+                        </a:rPr>
+                        <a:t>Node.js </a:t>
+                      </a:r>
+                      <a:r>
+                        <a:rPr lang="zh-TW" altLang="en-US" sz="1200" b="0" dirty="0">
+                          <a:effectLst/>
+                          <a:latin typeface="Microsoft JhengHei" panose="020B0604030504040204" pitchFamily="34" charset="-120"/>
+                          <a:ea typeface="Microsoft JhengHei" panose="020B0604030504040204" pitchFamily="34" charset="-120"/>
+                        </a:rPr>
+                        <a:t>工作執行服務</a:t>
+                      </a:r>
+                      <a:endParaRPr lang="en" sz="1200" b="0" dirty="0">
+                        <a:effectLst/>
+                        <a:latin typeface="Microsoft JhengHei" panose="020B0604030504040204" pitchFamily="34" charset="-120"/>
+                        <a:ea typeface="Microsoft JhengHei" panose="020B0604030504040204" pitchFamily="34" charset="-120"/>
+                      </a:endParaRPr>
+                    </a:p>
+                  </a:txBody>
+                  <a:tcPr marL="22968" marR="22968" marT="10601" marB="10601" anchor="ctr">
+                    <a:lnL w="9525" cap="flat" cmpd="sng" algn="ctr">
+                      <a:solidFill>
+                        <a:srgbClr val="D6D6D6"/>
+                      </a:solidFill>
+                      <a:prstDash val="solid"/>
+                      <a:round/>
+                      <a:headEnd type="none" w="med" len="med"/>
+                      <a:tailEnd type="none" w="med" len="med"/>
+                    </a:lnL>
+                    <a:lnR w="9525" cap="flat" cmpd="sng" algn="ctr">
+                      <a:solidFill>
+                        <a:srgbClr val="D6D6D6"/>
+                      </a:solidFill>
+                      <a:prstDash val="solid"/>
+                      <a:round/>
+                      <a:headEnd type="none" w="med" len="med"/>
+                      <a:tailEnd type="none" w="med" len="med"/>
+                    </a:lnR>
+                    <a:lnT w="9525" cap="flat" cmpd="sng" algn="ctr">
+                      <a:solidFill>
+                        <a:srgbClr val="D6D6D6"/>
+                      </a:solidFill>
+                      <a:prstDash val="solid"/>
+                      <a:round/>
+                      <a:headEnd type="none" w="med" len="med"/>
+                      <a:tailEnd type="none" w="med" len="med"/>
+                    </a:lnT>
+                    <a:lnB w="9525" cap="flat" cmpd="sng" algn="ctr">
+                      <a:solidFill>
+                        <a:srgbClr val="D6D6D6"/>
+                      </a:solidFill>
+                      <a:prstDash val="solid"/>
+                      <a:round/>
+                      <a:headEnd type="none" w="med" len="med"/>
+                      <a:tailEnd type="none" w="med" len="med"/>
+                    </a:lnB>
+                    <a:solidFill>
+                      <a:srgbClr val="FFFFFF"/>
+                    </a:solidFill>
+                  </a:tcPr>
+                </a:tc>
+                <a:tc>
+                  <a:txBody>
+                    <a:bodyPr/>
+                    <a:lstStyle/>
+                    <a:p>
+                      <a:pPr>
+                        <a:buNone/>
+                      </a:pPr>
+                      <a:r>
+                        <a:rPr lang="zh-TW" altLang="en-US" sz="1200" b="0" dirty="0">
+                          <a:effectLst/>
+                          <a:latin typeface="Microsoft JhengHei" panose="020B0604030504040204" pitchFamily="34" charset="-120"/>
+                          <a:ea typeface="Microsoft JhengHei" panose="020B0604030504040204" pitchFamily="34" charset="-120"/>
+                        </a:rPr>
+                        <a:t>非同步處理 </a:t>
+                      </a:r>
+                      <a:r>
+                        <a:rPr lang="en" sz="1200" b="0" dirty="0">
+                          <a:effectLst/>
+                          <a:latin typeface="Microsoft JhengHei" panose="020B0604030504040204" pitchFamily="34" charset="-120"/>
+                          <a:ea typeface="Microsoft JhengHei" panose="020B0604030504040204" pitchFamily="34" charset="-120"/>
+                        </a:rPr>
+                        <a:t>ingestion、</a:t>
+                      </a:r>
+                      <a:r>
+                        <a:rPr lang="zh-TW" altLang="en-US" sz="1200" b="0" dirty="0">
+                          <a:effectLst/>
+                          <a:latin typeface="Microsoft JhengHei" panose="020B0604030504040204" pitchFamily="34" charset="-120"/>
+                          <a:ea typeface="Microsoft JhengHei" panose="020B0604030504040204" pitchFamily="34" charset="-120"/>
+                        </a:rPr>
+                        <a:t>文章分析、</a:t>
+                      </a:r>
+                      <a:r>
+                        <a:rPr lang="en" sz="1200" b="0" dirty="0">
+                          <a:effectLst/>
+                          <a:latin typeface="Microsoft JhengHei" panose="020B0604030504040204" pitchFamily="34" charset="-120"/>
+                          <a:ea typeface="Microsoft JhengHei" panose="020B0604030504040204" pitchFamily="34" charset="-120"/>
+                        </a:rPr>
+                        <a:t>assistant </a:t>
+                      </a:r>
+                      <a:r>
+                        <a:rPr lang="en" sz="1200" b="0" dirty="0" err="1">
+                          <a:effectLst/>
+                          <a:latin typeface="Microsoft JhengHei" panose="020B0604030504040204" pitchFamily="34" charset="-120"/>
+                          <a:ea typeface="Microsoft JhengHei" panose="020B0604030504040204" pitchFamily="34" charset="-120"/>
+                        </a:rPr>
+                        <a:t>curation、brief</a:t>
+                      </a:r>
+                      <a:r>
+                        <a:rPr lang="en" sz="1200" b="0" dirty="0">
+                          <a:effectLst/>
+                          <a:latin typeface="Microsoft JhengHei" panose="020B0604030504040204" pitchFamily="34" charset="-120"/>
+                          <a:ea typeface="Microsoft JhengHei" panose="020B0604030504040204" pitchFamily="34" charset="-120"/>
+                        </a:rPr>
+                        <a:t> generation </a:t>
+                      </a:r>
+                      <a:r>
+                        <a:rPr lang="zh-TW" altLang="en-US" sz="1200" b="0" dirty="0">
+                          <a:effectLst/>
+                          <a:latin typeface="Microsoft JhengHei" panose="020B0604030504040204" pitchFamily="34" charset="-120"/>
+                          <a:ea typeface="Microsoft JhengHei" panose="020B0604030504040204" pitchFamily="34" charset="-120"/>
+                        </a:rPr>
+                        <a:t>等背景任務</a:t>
+                      </a:r>
+                    </a:p>
+                  </a:txBody>
+                  <a:tcPr marL="22968" marR="22968" marT="10601" marB="10601" anchor="ctr">
+                    <a:lnL w="9525" cap="flat" cmpd="sng" algn="ctr">
+                      <a:solidFill>
+                        <a:srgbClr val="D6D6D6"/>
+                      </a:solidFill>
+                      <a:prstDash val="solid"/>
+                      <a:round/>
+                      <a:headEnd type="none" w="med" len="med"/>
+                      <a:tailEnd type="none" w="med" len="med"/>
+                    </a:lnL>
+                    <a:lnR w="9525" cap="flat" cmpd="sng" algn="ctr">
+                      <a:solidFill>
+                        <a:srgbClr val="D6D6D6"/>
+                      </a:solidFill>
+                      <a:prstDash val="solid"/>
+                      <a:round/>
+                      <a:headEnd type="none" w="med" len="med"/>
+                      <a:tailEnd type="none" w="med" len="med"/>
+                    </a:lnR>
+                    <a:lnT w="9525" cap="flat" cmpd="sng" algn="ctr">
+                      <a:solidFill>
+                        <a:srgbClr val="D6D6D6"/>
+                      </a:solidFill>
+                      <a:prstDash val="solid"/>
+                      <a:round/>
+                      <a:headEnd type="none" w="med" len="med"/>
+                      <a:tailEnd type="none" w="med" len="med"/>
+                    </a:lnT>
+                    <a:lnB w="9525" cap="flat" cmpd="sng" algn="ctr">
+                      <a:solidFill>
+                        <a:srgbClr val="D6D6D6"/>
+                      </a:solidFill>
+                      <a:prstDash val="solid"/>
+                      <a:round/>
+                      <a:headEnd type="none" w="med" len="med"/>
+                      <a:tailEnd type="none" w="med" len="med"/>
+                    </a:lnB>
+                    <a:solidFill>
+                      <a:srgbClr val="FFFFFF"/>
+                    </a:solidFill>
+                  </a:tcPr>
+                </a:tc>
+                <a:extLst>
+                  <a:ext uri="{0D108BD9-81ED-4DB2-BD59-A6C34878D82A}">
+                    <a16:rowId xmlns:a16="http://schemas.microsoft.com/office/drawing/2014/main" val="3427072871"/>
+                  </a:ext>
+                </a:extLst>
+              </a:tr>
+              <a:tr h="248668">
+                <a:tc>
+                  <a:txBody>
+                    <a:bodyPr/>
+                    <a:lstStyle/>
+                    <a:p>
+                      <a:pPr>
+                        <a:buNone/>
+                      </a:pPr>
+                      <a:r>
+                        <a:rPr lang="en" sz="1200" b="0">
+                          <a:effectLst/>
+                          <a:latin typeface="Microsoft JhengHei" panose="020B0604030504040204" pitchFamily="34" charset="-120"/>
+                          <a:ea typeface="Microsoft JhengHei" panose="020B0604030504040204" pitchFamily="34" charset="-120"/>
+                        </a:rPr>
+                        <a:t>MongoDB</a:t>
+                      </a:r>
+                    </a:p>
+                  </a:txBody>
+                  <a:tcPr marL="22968" marR="22968" marT="10601" marB="10601" anchor="ctr">
+                    <a:lnL w="9525" cap="flat" cmpd="sng" algn="ctr">
+                      <a:solidFill>
+                        <a:srgbClr val="D6D6D6"/>
+                      </a:solidFill>
+                      <a:prstDash val="solid"/>
+                      <a:round/>
+                      <a:headEnd type="none" w="med" len="med"/>
+                      <a:tailEnd type="none" w="med" len="med"/>
+                    </a:lnL>
+                    <a:lnR w="9525" cap="flat" cmpd="sng" algn="ctr">
+                      <a:solidFill>
+                        <a:srgbClr val="D6D6D6"/>
+                      </a:solidFill>
+                      <a:prstDash val="solid"/>
+                      <a:round/>
+                      <a:headEnd type="none" w="med" len="med"/>
+                      <a:tailEnd type="none" w="med" len="med"/>
+                    </a:lnR>
+                    <a:lnT w="9525" cap="flat" cmpd="sng" algn="ctr">
+                      <a:solidFill>
+                        <a:srgbClr val="D6D6D6"/>
+                      </a:solidFill>
+                      <a:prstDash val="solid"/>
+                      <a:round/>
+                      <a:headEnd type="none" w="med" len="med"/>
+                      <a:tailEnd type="none" w="med" len="med"/>
+                    </a:lnT>
+                    <a:lnB w="9525" cap="flat" cmpd="sng" algn="ctr">
+                      <a:solidFill>
+                        <a:srgbClr val="D6D6D6"/>
+                      </a:solidFill>
+                      <a:prstDash val="solid"/>
+                      <a:round/>
+                      <a:headEnd type="none" w="med" len="med"/>
+                      <a:tailEnd type="none" w="med" len="med"/>
+                    </a:lnB>
+                    <a:solidFill>
+                      <a:srgbClr val="FFFFFF"/>
+                    </a:solidFill>
+                  </a:tcPr>
+                </a:tc>
+                <a:tc>
+                  <a:txBody>
+                    <a:bodyPr/>
+                    <a:lstStyle/>
+                    <a:p>
+                      <a:pPr>
+                        <a:buNone/>
+                      </a:pPr>
+                      <a:r>
+                        <a:rPr lang="zh-TW" altLang="en-US" sz="1200" b="0" dirty="0">
+                          <a:effectLst/>
+                          <a:latin typeface="Microsoft JhengHei" panose="020B0604030504040204" pitchFamily="34" charset="-120"/>
+                          <a:ea typeface="Microsoft JhengHei" panose="020B0604030504040204" pitchFamily="34" charset="-120"/>
+                        </a:rPr>
+                        <a:t>數據持久化資料庫</a:t>
+                      </a:r>
+                    </a:p>
+                  </a:txBody>
+                  <a:tcPr marL="22968" marR="22968" marT="10601" marB="10601" anchor="ctr">
+                    <a:lnL w="9525" cap="flat" cmpd="sng" algn="ctr">
+                      <a:solidFill>
+                        <a:srgbClr val="D6D6D6"/>
+                      </a:solidFill>
+                      <a:prstDash val="solid"/>
+                      <a:round/>
+                      <a:headEnd type="none" w="med" len="med"/>
+                      <a:tailEnd type="none" w="med" len="med"/>
+                    </a:lnL>
+                    <a:lnR w="9525" cap="flat" cmpd="sng" algn="ctr">
+                      <a:solidFill>
+                        <a:srgbClr val="D6D6D6"/>
+                      </a:solidFill>
+                      <a:prstDash val="solid"/>
+                      <a:round/>
+                      <a:headEnd type="none" w="med" len="med"/>
+                      <a:tailEnd type="none" w="med" len="med"/>
+                    </a:lnR>
+                    <a:lnT w="9525" cap="flat" cmpd="sng" algn="ctr">
+                      <a:solidFill>
+                        <a:srgbClr val="D6D6D6"/>
+                      </a:solidFill>
+                      <a:prstDash val="solid"/>
+                      <a:round/>
+                      <a:headEnd type="none" w="med" len="med"/>
+                      <a:tailEnd type="none" w="med" len="med"/>
+                    </a:lnT>
+                    <a:lnB w="9525" cap="flat" cmpd="sng" algn="ctr">
+                      <a:solidFill>
+                        <a:srgbClr val="D6D6D6"/>
+                      </a:solidFill>
+                      <a:prstDash val="solid"/>
+                      <a:round/>
+                      <a:headEnd type="none" w="med" len="med"/>
+                      <a:tailEnd type="none" w="med" len="med"/>
+                    </a:lnB>
+                    <a:solidFill>
+                      <a:srgbClr val="FFFFFF"/>
+                    </a:solidFill>
+                  </a:tcPr>
+                </a:tc>
+                <a:tc>
+                  <a:txBody>
+                    <a:bodyPr/>
+                    <a:lstStyle/>
+                    <a:p>
+                      <a:pPr>
+                        <a:buNone/>
+                      </a:pPr>
+                      <a:r>
+                        <a:rPr lang="zh-TW" altLang="en-US" sz="1200" b="0" dirty="0">
+                          <a:effectLst/>
+                          <a:latin typeface="Microsoft JhengHei" panose="020B0604030504040204" pitchFamily="34" charset="-120"/>
+                          <a:ea typeface="Microsoft JhengHei" panose="020B0604030504040204" pitchFamily="34" charset="-120"/>
+                        </a:rPr>
+                        <a:t>儲存 </a:t>
+                      </a:r>
+                      <a:r>
+                        <a:rPr lang="en" sz="1200" b="0" dirty="0" err="1">
+                          <a:effectLst/>
+                          <a:latin typeface="Microsoft JhengHei" panose="020B0604030504040204" pitchFamily="34" charset="-120"/>
+                          <a:ea typeface="Microsoft JhengHei" panose="020B0604030504040204" pitchFamily="34" charset="-120"/>
+                        </a:rPr>
+                        <a:t>feeds、articles、assistants、briefs、notifications、workspace</a:t>
+                      </a:r>
+                      <a:r>
+                        <a:rPr lang="en" sz="1200" b="0" dirty="0">
+                          <a:effectLst/>
+                          <a:latin typeface="Microsoft JhengHei" panose="020B0604030504040204" pitchFamily="34" charset="-120"/>
+                          <a:ea typeface="Microsoft JhengHei" panose="020B0604030504040204" pitchFamily="34" charset="-120"/>
+                        </a:rPr>
+                        <a:t> </a:t>
+                      </a:r>
+                      <a:r>
+                        <a:rPr lang="zh-TW" altLang="en-US" sz="1200" b="0" dirty="0">
+                          <a:effectLst/>
+                          <a:latin typeface="Microsoft JhengHei" panose="020B0604030504040204" pitchFamily="34" charset="-120"/>
+                          <a:ea typeface="Microsoft JhengHei" panose="020B0604030504040204" pitchFamily="34" charset="-120"/>
+                        </a:rPr>
+                        <a:t>資料</a:t>
+                      </a:r>
+                    </a:p>
+                  </a:txBody>
+                  <a:tcPr marL="22968" marR="22968" marT="10601" marB="10601" anchor="ctr">
+                    <a:lnL w="9525" cap="flat" cmpd="sng" algn="ctr">
+                      <a:solidFill>
+                        <a:srgbClr val="D6D6D6"/>
+                      </a:solidFill>
+                      <a:prstDash val="solid"/>
+                      <a:round/>
+                      <a:headEnd type="none" w="med" len="med"/>
+                      <a:tailEnd type="none" w="med" len="med"/>
+                    </a:lnL>
+                    <a:lnR w="9525" cap="flat" cmpd="sng" algn="ctr">
+                      <a:solidFill>
+                        <a:srgbClr val="D6D6D6"/>
+                      </a:solidFill>
+                      <a:prstDash val="solid"/>
+                      <a:round/>
+                      <a:headEnd type="none" w="med" len="med"/>
+                      <a:tailEnd type="none" w="med" len="med"/>
+                    </a:lnR>
+                    <a:lnT w="9525" cap="flat" cmpd="sng" algn="ctr">
+                      <a:solidFill>
+                        <a:srgbClr val="D6D6D6"/>
+                      </a:solidFill>
+                      <a:prstDash val="solid"/>
+                      <a:round/>
+                      <a:headEnd type="none" w="med" len="med"/>
+                      <a:tailEnd type="none" w="med" len="med"/>
+                    </a:lnT>
+                    <a:lnB w="9525" cap="flat" cmpd="sng" algn="ctr">
+                      <a:solidFill>
+                        <a:srgbClr val="D6D6D6"/>
+                      </a:solidFill>
+                      <a:prstDash val="solid"/>
+                      <a:round/>
+                      <a:headEnd type="none" w="med" len="med"/>
+                      <a:tailEnd type="none" w="med" len="med"/>
+                    </a:lnB>
+                    <a:solidFill>
+                      <a:srgbClr val="FFFFFF"/>
+                    </a:solidFill>
+                  </a:tcPr>
+                </a:tc>
+                <a:extLst>
+                  <a:ext uri="{0D108BD9-81ED-4DB2-BD59-A6C34878D82A}">
+                    <a16:rowId xmlns:a16="http://schemas.microsoft.com/office/drawing/2014/main" val="1887244742"/>
+                  </a:ext>
+                </a:extLst>
+              </a:tr>
+              <a:tr h="230333">
+                <a:tc>
+                  <a:txBody>
+                    <a:bodyPr/>
+                    <a:lstStyle/>
+                    <a:p>
+                      <a:pPr>
+                        <a:buNone/>
+                      </a:pPr>
+                      <a:r>
+                        <a:rPr lang="en" sz="1200" b="0" dirty="0">
+                          <a:effectLst/>
+                          <a:latin typeface="Microsoft JhengHei" panose="020B0604030504040204" pitchFamily="34" charset="-120"/>
+                          <a:ea typeface="Microsoft JhengHei" panose="020B0604030504040204" pitchFamily="34" charset="-120"/>
+                        </a:rPr>
+                        <a:t>Redis</a:t>
+                      </a:r>
+                    </a:p>
+                  </a:txBody>
+                  <a:tcPr marL="22968" marR="22968" marT="10601" marB="10601" anchor="ctr">
+                    <a:lnL w="9525" cap="flat" cmpd="sng" algn="ctr">
+                      <a:solidFill>
+                        <a:srgbClr val="D6D6D6"/>
+                      </a:solidFill>
+                      <a:prstDash val="solid"/>
+                      <a:round/>
+                      <a:headEnd type="none" w="med" len="med"/>
+                      <a:tailEnd type="none" w="med" len="med"/>
+                    </a:lnL>
+                    <a:lnR w="9525" cap="flat" cmpd="sng" algn="ctr">
+                      <a:solidFill>
+                        <a:srgbClr val="D6D6D6"/>
+                      </a:solidFill>
+                      <a:prstDash val="solid"/>
+                      <a:round/>
+                      <a:headEnd type="none" w="med" len="med"/>
+                      <a:tailEnd type="none" w="med" len="med"/>
+                    </a:lnR>
+                    <a:lnT w="9525" cap="flat" cmpd="sng" algn="ctr">
+                      <a:solidFill>
+                        <a:srgbClr val="D6D6D6"/>
+                      </a:solidFill>
+                      <a:prstDash val="solid"/>
+                      <a:round/>
+                      <a:headEnd type="none" w="med" len="med"/>
+                      <a:tailEnd type="none" w="med" len="med"/>
+                    </a:lnT>
+                    <a:lnB w="9525" cap="flat" cmpd="sng" algn="ctr">
+                      <a:solidFill>
+                        <a:srgbClr val="D6D6D6"/>
+                      </a:solidFill>
+                      <a:prstDash val="solid"/>
+                      <a:round/>
+                      <a:headEnd type="none" w="med" len="med"/>
+                      <a:tailEnd type="none" w="med" len="med"/>
+                    </a:lnB>
+                    <a:solidFill>
+                      <a:srgbClr val="FFFFFF"/>
+                    </a:solidFill>
+                  </a:tcPr>
+                </a:tc>
+                <a:tc>
+                  <a:txBody>
+                    <a:bodyPr/>
+                    <a:lstStyle/>
+                    <a:p>
+                      <a:pPr>
+                        <a:buNone/>
+                      </a:pPr>
+                      <a:r>
+                        <a:rPr lang="en" sz="1200" b="0" dirty="0">
+                          <a:effectLst/>
+                          <a:latin typeface="Microsoft JhengHei" panose="020B0604030504040204" pitchFamily="34" charset="-120"/>
+                          <a:ea typeface="Microsoft JhengHei" panose="020B0604030504040204" pitchFamily="34" charset="-120"/>
+                        </a:rPr>
+                        <a:t>Queue / Cache </a:t>
+                      </a:r>
+                      <a:r>
+                        <a:rPr lang="zh-TW" altLang="en-US" sz="1200" b="0" dirty="0">
+                          <a:effectLst/>
+                          <a:latin typeface="Microsoft JhengHei" panose="020B0604030504040204" pitchFamily="34" charset="-120"/>
+                          <a:ea typeface="Microsoft JhengHei" panose="020B0604030504040204" pitchFamily="34" charset="-120"/>
+                        </a:rPr>
+                        <a:t>基礎設施</a:t>
+                      </a:r>
+                    </a:p>
+                  </a:txBody>
+                  <a:tcPr marL="22968" marR="22968" marT="10601" marB="10601" anchor="ctr">
+                    <a:lnL w="9525" cap="flat" cmpd="sng" algn="ctr">
+                      <a:solidFill>
+                        <a:srgbClr val="D6D6D6"/>
+                      </a:solidFill>
+                      <a:prstDash val="solid"/>
+                      <a:round/>
+                      <a:headEnd type="none" w="med" len="med"/>
+                      <a:tailEnd type="none" w="med" len="med"/>
+                    </a:lnL>
+                    <a:lnR w="9525" cap="flat" cmpd="sng" algn="ctr">
+                      <a:solidFill>
+                        <a:srgbClr val="D6D6D6"/>
+                      </a:solidFill>
+                      <a:prstDash val="solid"/>
+                      <a:round/>
+                      <a:headEnd type="none" w="med" len="med"/>
+                      <a:tailEnd type="none" w="med" len="med"/>
+                    </a:lnR>
+                    <a:lnT w="9525" cap="flat" cmpd="sng" algn="ctr">
+                      <a:solidFill>
+                        <a:srgbClr val="D6D6D6"/>
+                      </a:solidFill>
+                      <a:prstDash val="solid"/>
+                      <a:round/>
+                      <a:headEnd type="none" w="med" len="med"/>
+                      <a:tailEnd type="none" w="med" len="med"/>
+                    </a:lnT>
+                    <a:lnB w="9525" cap="flat" cmpd="sng" algn="ctr">
+                      <a:solidFill>
+                        <a:srgbClr val="D6D6D6"/>
+                      </a:solidFill>
+                      <a:prstDash val="solid"/>
+                      <a:round/>
+                      <a:headEnd type="none" w="med" len="med"/>
+                      <a:tailEnd type="none" w="med" len="med"/>
+                    </a:lnB>
+                    <a:solidFill>
+                      <a:srgbClr val="FFFFFF"/>
+                    </a:solidFill>
+                  </a:tcPr>
+                </a:tc>
+                <a:tc>
+                  <a:txBody>
+                    <a:bodyPr/>
+                    <a:lstStyle/>
+                    <a:p>
+                      <a:pPr>
+                        <a:buNone/>
+                      </a:pPr>
+                      <a:r>
+                        <a:rPr lang="zh-TW" altLang="en-US" sz="1200" b="0" dirty="0">
+                          <a:effectLst/>
+                          <a:latin typeface="Microsoft JhengHei" panose="020B0604030504040204" pitchFamily="34" charset="-120"/>
+                          <a:ea typeface="Microsoft JhengHei" panose="020B0604030504040204" pitchFamily="34" charset="-120"/>
+                        </a:rPr>
+                        <a:t>作為 </a:t>
+                      </a:r>
+                      <a:r>
+                        <a:rPr lang="en" sz="1200" b="0" dirty="0" err="1">
+                          <a:effectLst/>
+                          <a:latin typeface="Microsoft JhengHei" panose="020B0604030504040204" pitchFamily="34" charset="-120"/>
+                          <a:ea typeface="Microsoft JhengHei" panose="020B0604030504040204" pitchFamily="34" charset="-120"/>
+                        </a:rPr>
+                        <a:t>BullMQ</a:t>
+                      </a:r>
+                      <a:r>
+                        <a:rPr lang="en" sz="1200" b="0" dirty="0">
+                          <a:effectLst/>
+                          <a:latin typeface="Microsoft JhengHei" panose="020B0604030504040204" pitchFamily="34" charset="-120"/>
+                          <a:ea typeface="Microsoft JhengHei" panose="020B0604030504040204" pitchFamily="34" charset="-120"/>
+                        </a:rPr>
+                        <a:t> </a:t>
+                      </a:r>
+                      <a:r>
+                        <a:rPr lang="zh-TW" altLang="en-US" sz="1200" b="0" dirty="0">
+                          <a:effectLst/>
+                          <a:latin typeface="Microsoft JhengHei" panose="020B0604030504040204" pitchFamily="34" charset="-120"/>
+                          <a:ea typeface="Microsoft JhengHei" panose="020B0604030504040204" pitchFamily="34" charset="-120"/>
+                        </a:rPr>
+                        <a:t>的底層佇列儲存，也可支援快取或工作狀態管理</a:t>
+                      </a:r>
+                    </a:p>
+                  </a:txBody>
+                  <a:tcPr marL="22968" marR="22968" marT="10601" marB="10601" anchor="ctr">
+                    <a:lnL w="9525" cap="flat" cmpd="sng" algn="ctr">
+                      <a:solidFill>
+                        <a:srgbClr val="D6D6D6"/>
+                      </a:solidFill>
+                      <a:prstDash val="solid"/>
+                      <a:round/>
+                      <a:headEnd type="none" w="med" len="med"/>
+                      <a:tailEnd type="none" w="med" len="med"/>
+                    </a:lnL>
+                    <a:lnR w="9525" cap="flat" cmpd="sng" algn="ctr">
+                      <a:solidFill>
+                        <a:srgbClr val="D6D6D6"/>
+                      </a:solidFill>
+                      <a:prstDash val="solid"/>
+                      <a:round/>
+                      <a:headEnd type="none" w="med" len="med"/>
+                      <a:tailEnd type="none" w="med" len="med"/>
+                    </a:lnR>
+                    <a:lnT w="9525" cap="flat" cmpd="sng" algn="ctr">
+                      <a:solidFill>
+                        <a:srgbClr val="D6D6D6"/>
+                      </a:solidFill>
+                      <a:prstDash val="solid"/>
+                      <a:round/>
+                      <a:headEnd type="none" w="med" len="med"/>
+                      <a:tailEnd type="none" w="med" len="med"/>
+                    </a:lnT>
+                    <a:lnB w="9525" cap="flat" cmpd="sng" algn="ctr">
+                      <a:solidFill>
+                        <a:srgbClr val="D6D6D6"/>
+                      </a:solidFill>
+                      <a:prstDash val="solid"/>
+                      <a:round/>
+                      <a:headEnd type="none" w="med" len="med"/>
+                      <a:tailEnd type="none" w="med" len="med"/>
+                    </a:lnB>
+                    <a:solidFill>
+                      <a:srgbClr val="FFFFFF"/>
+                    </a:solidFill>
+                  </a:tcPr>
+                </a:tc>
+                <a:extLst>
+                  <a:ext uri="{0D108BD9-81ED-4DB2-BD59-A6C34878D82A}">
+                    <a16:rowId xmlns:a16="http://schemas.microsoft.com/office/drawing/2014/main" val="2706777699"/>
+                  </a:ext>
+                </a:extLst>
+              </a:tr>
+              <a:tr h="230333">
+                <a:tc>
+                  <a:txBody>
+                    <a:bodyPr/>
+                    <a:lstStyle/>
+                    <a:p>
+                      <a:pPr>
+                        <a:buNone/>
+                      </a:pPr>
+                      <a:r>
+                        <a:rPr lang="en" sz="1200" b="0">
+                          <a:effectLst/>
+                          <a:latin typeface="Microsoft JhengHei" panose="020B0604030504040204" pitchFamily="34" charset="-120"/>
+                          <a:ea typeface="Microsoft JhengHei" panose="020B0604030504040204" pitchFamily="34" charset="-120"/>
+                        </a:rPr>
+                        <a:t>Copilot CLI Server</a:t>
+                      </a:r>
+                    </a:p>
+                  </a:txBody>
+                  <a:tcPr marL="22968" marR="22968" marT="10601" marB="10601" anchor="ctr">
+                    <a:lnL w="9525" cap="flat" cmpd="sng" algn="ctr">
+                      <a:solidFill>
+                        <a:srgbClr val="D6D6D6"/>
+                      </a:solidFill>
+                      <a:prstDash val="solid"/>
+                      <a:round/>
+                      <a:headEnd type="none" w="med" len="med"/>
+                      <a:tailEnd type="none" w="med" len="med"/>
+                    </a:lnL>
+                    <a:lnR w="9525" cap="flat" cmpd="sng" algn="ctr">
+                      <a:solidFill>
+                        <a:srgbClr val="D6D6D6"/>
+                      </a:solidFill>
+                      <a:prstDash val="solid"/>
+                      <a:round/>
+                      <a:headEnd type="none" w="med" len="med"/>
+                      <a:tailEnd type="none" w="med" len="med"/>
+                    </a:lnR>
+                    <a:lnT w="9525" cap="flat" cmpd="sng" algn="ctr">
+                      <a:solidFill>
+                        <a:srgbClr val="D6D6D6"/>
+                      </a:solidFill>
+                      <a:prstDash val="solid"/>
+                      <a:round/>
+                      <a:headEnd type="none" w="med" len="med"/>
+                      <a:tailEnd type="none" w="med" len="med"/>
+                    </a:lnT>
+                    <a:lnB w="9525" cap="flat" cmpd="sng" algn="ctr">
+                      <a:solidFill>
+                        <a:srgbClr val="D6D6D6"/>
+                      </a:solidFill>
+                      <a:prstDash val="solid"/>
+                      <a:round/>
+                      <a:headEnd type="none" w="med" len="med"/>
+                      <a:tailEnd type="none" w="med" len="med"/>
+                    </a:lnB>
+                    <a:solidFill>
+                      <a:srgbClr val="FFFFFF"/>
+                    </a:solidFill>
+                  </a:tcPr>
+                </a:tc>
+                <a:tc>
+                  <a:txBody>
+                    <a:bodyPr/>
+                    <a:lstStyle/>
+                    <a:p>
+                      <a:pPr>
+                        <a:buNone/>
+                      </a:pPr>
+                      <a:r>
+                        <a:rPr lang="en" sz="1200" b="0" dirty="0" err="1">
+                          <a:effectLst/>
+                          <a:latin typeface="Microsoft JhengHei" panose="020B0604030504040204" pitchFamily="34" charset="-120"/>
+                          <a:ea typeface="Microsoft JhengHei" panose="020B0604030504040204" pitchFamily="34" charset="-120"/>
+                        </a:rPr>
+                        <a:t>Github</a:t>
+                      </a:r>
+                      <a:r>
+                        <a:rPr lang="en" sz="1200" b="0" dirty="0">
+                          <a:effectLst/>
+                          <a:latin typeface="Microsoft JhengHei" panose="020B0604030504040204" pitchFamily="34" charset="-120"/>
+                          <a:ea typeface="Microsoft JhengHei" panose="020B0604030504040204" pitchFamily="34" charset="-120"/>
+                        </a:rPr>
+                        <a:t> Copilot CLI server mode</a:t>
+                      </a:r>
+                    </a:p>
+                  </a:txBody>
+                  <a:tcPr marL="22968" marR="22968" marT="10601" marB="10601" anchor="ctr">
+                    <a:lnL w="9525" cap="flat" cmpd="sng" algn="ctr">
+                      <a:solidFill>
+                        <a:srgbClr val="D6D6D6"/>
+                      </a:solidFill>
+                      <a:prstDash val="solid"/>
+                      <a:round/>
+                      <a:headEnd type="none" w="med" len="med"/>
+                      <a:tailEnd type="none" w="med" len="med"/>
+                    </a:lnL>
+                    <a:lnR w="9525" cap="flat" cmpd="sng" algn="ctr">
+                      <a:solidFill>
+                        <a:srgbClr val="D6D6D6"/>
+                      </a:solidFill>
+                      <a:prstDash val="solid"/>
+                      <a:round/>
+                      <a:headEnd type="none" w="med" len="med"/>
+                      <a:tailEnd type="none" w="med" len="med"/>
+                    </a:lnR>
+                    <a:lnT w="9525" cap="flat" cmpd="sng" algn="ctr">
+                      <a:solidFill>
+                        <a:srgbClr val="D6D6D6"/>
+                      </a:solidFill>
+                      <a:prstDash val="solid"/>
+                      <a:round/>
+                      <a:headEnd type="none" w="med" len="med"/>
+                      <a:tailEnd type="none" w="med" len="med"/>
+                    </a:lnT>
+                    <a:lnB w="9525" cap="flat" cmpd="sng" algn="ctr">
+                      <a:solidFill>
+                        <a:srgbClr val="D6D6D6"/>
+                      </a:solidFill>
+                      <a:prstDash val="solid"/>
+                      <a:round/>
+                      <a:headEnd type="none" w="med" len="med"/>
+                      <a:tailEnd type="none" w="med" len="med"/>
+                    </a:lnB>
+                    <a:solidFill>
+                      <a:srgbClr val="FFFFFF"/>
+                    </a:solidFill>
+                  </a:tcPr>
+                </a:tc>
+                <a:tc>
+                  <a:txBody>
+                    <a:bodyPr/>
+                    <a:lstStyle/>
+                    <a:p>
+                      <a:pPr>
+                        <a:buNone/>
+                      </a:pPr>
+                      <a:r>
+                        <a:rPr lang="zh-TW" altLang="en-US" sz="1200" b="0" dirty="0">
+                          <a:effectLst/>
+                          <a:latin typeface="Microsoft JhengHei" panose="020B0604030504040204" pitchFamily="34" charset="-120"/>
+                          <a:ea typeface="Microsoft JhengHei" panose="020B0604030504040204" pitchFamily="34" charset="-120"/>
+                        </a:rPr>
+                        <a:t>作為 </a:t>
+                      </a:r>
+                      <a:r>
+                        <a:rPr lang="en" sz="1200" b="0" dirty="0">
+                          <a:effectLst/>
+                          <a:latin typeface="Microsoft JhengHei" panose="020B0604030504040204" pitchFamily="34" charset="-120"/>
+                          <a:ea typeface="Microsoft JhengHei" panose="020B0604030504040204" pitchFamily="34" charset="-120"/>
+                        </a:rPr>
+                        <a:t>AI </a:t>
+                      </a:r>
+                      <a:r>
+                        <a:rPr lang="zh-TW" altLang="en-US" sz="1200" b="0" dirty="0">
+                          <a:effectLst/>
+                          <a:latin typeface="Microsoft JhengHei" panose="020B0604030504040204" pitchFamily="34" charset="-120"/>
+                          <a:ea typeface="Microsoft JhengHei" panose="020B0604030504040204" pitchFamily="34" charset="-120"/>
+                        </a:rPr>
+                        <a:t>執行入口，讓 </a:t>
+                      </a:r>
+                      <a:r>
+                        <a:rPr lang="en" sz="1200" b="0" dirty="0">
+                          <a:effectLst/>
+                          <a:latin typeface="Microsoft JhengHei" panose="020B0604030504040204" pitchFamily="34" charset="-120"/>
+                          <a:ea typeface="Microsoft JhengHei" panose="020B0604030504040204" pitchFamily="34" charset="-120"/>
+                        </a:rPr>
+                        <a:t>API </a:t>
+                      </a:r>
+                      <a:r>
+                        <a:rPr lang="zh-TW" altLang="en-US" sz="1200" b="0" dirty="0">
+                          <a:effectLst/>
+                          <a:latin typeface="Microsoft JhengHei" panose="020B0604030504040204" pitchFamily="34" charset="-120"/>
+                          <a:ea typeface="Microsoft JhengHei" panose="020B0604030504040204" pitchFamily="34" charset="-120"/>
+                        </a:rPr>
+                        <a:t>可以透過它與模型能力互動</a:t>
+                      </a:r>
+                    </a:p>
+                  </a:txBody>
+                  <a:tcPr marL="22968" marR="22968" marT="10601" marB="10601" anchor="ctr">
+                    <a:lnL w="9525" cap="flat" cmpd="sng" algn="ctr">
+                      <a:solidFill>
+                        <a:srgbClr val="D6D6D6"/>
+                      </a:solidFill>
+                      <a:prstDash val="solid"/>
+                      <a:round/>
+                      <a:headEnd type="none" w="med" len="med"/>
+                      <a:tailEnd type="none" w="med" len="med"/>
+                    </a:lnL>
+                    <a:lnR w="9525" cap="flat" cmpd="sng" algn="ctr">
+                      <a:solidFill>
+                        <a:srgbClr val="D6D6D6"/>
+                      </a:solidFill>
+                      <a:prstDash val="solid"/>
+                      <a:round/>
+                      <a:headEnd type="none" w="med" len="med"/>
+                      <a:tailEnd type="none" w="med" len="med"/>
+                    </a:lnR>
+                    <a:lnT w="9525" cap="flat" cmpd="sng" algn="ctr">
+                      <a:solidFill>
+                        <a:srgbClr val="D6D6D6"/>
+                      </a:solidFill>
+                      <a:prstDash val="solid"/>
+                      <a:round/>
+                      <a:headEnd type="none" w="med" len="med"/>
+                      <a:tailEnd type="none" w="med" len="med"/>
+                    </a:lnT>
+                    <a:lnB w="9525" cap="flat" cmpd="sng" algn="ctr">
+                      <a:solidFill>
+                        <a:srgbClr val="D6D6D6"/>
+                      </a:solidFill>
+                      <a:prstDash val="solid"/>
+                      <a:round/>
+                      <a:headEnd type="none" w="med" len="med"/>
+                      <a:tailEnd type="none" w="med" len="med"/>
+                    </a:lnB>
+                    <a:solidFill>
+                      <a:srgbClr val="FFFFFF"/>
+                    </a:solidFill>
+                  </a:tcPr>
+                </a:tc>
+                <a:extLst>
+                  <a:ext uri="{0D108BD9-81ED-4DB2-BD59-A6C34878D82A}">
+                    <a16:rowId xmlns:a16="http://schemas.microsoft.com/office/drawing/2014/main" val="2681382660"/>
+                  </a:ext>
+                </a:extLst>
+              </a:tr>
+              <a:tr h="230333">
+                <a:tc>
+                  <a:txBody>
+                    <a:bodyPr/>
+                    <a:lstStyle/>
+                    <a:p>
+                      <a:pPr>
+                        <a:buNone/>
+                      </a:pPr>
+                      <a:r>
+                        <a:rPr lang="en" sz="1200" b="0" dirty="0">
+                          <a:effectLst/>
+                          <a:latin typeface="Microsoft JhengHei" panose="020B0604030504040204" pitchFamily="34" charset="-120"/>
+                          <a:ea typeface="Microsoft JhengHei" panose="020B0604030504040204" pitchFamily="34" charset="-120"/>
+                        </a:rPr>
+                        <a:t>LLM Providers</a:t>
+                      </a:r>
+                    </a:p>
+                  </a:txBody>
+                  <a:tcPr marL="22968" marR="22968" marT="10601" marB="10601" anchor="ctr">
+                    <a:lnL w="9525" cap="flat" cmpd="sng" algn="ctr">
+                      <a:solidFill>
+                        <a:srgbClr val="D6D6D6"/>
+                      </a:solidFill>
+                      <a:prstDash val="solid"/>
+                      <a:round/>
+                      <a:headEnd type="none" w="med" len="med"/>
+                      <a:tailEnd type="none" w="med" len="med"/>
+                    </a:lnL>
+                    <a:lnR w="9525" cap="flat" cmpd="sng" algn="ctr">
+                      <a:solidFill>
+                        <a:srgbClr val="D6D6D6"/>
+                      </a:solidFill>
+                      <a:prstDash val="solid"/>
+                      <a:round/>
+                      <a:headEnd type="none" w="med" len="med"/>
+                      <a:tailEnd type="none" w="med" len="med"/>
+                    </a:lnR>
+                    <a:lnT w="9525" cap="flat" cmpd="sng" algn="ctr">
+                      <a:solidFill>
+                        <a:srgbClr val="D6D6D6"/>
+                      </a:solidFill>
+                      <a:prstDash val="solid"/>
+                      <a:round/>
+                      <a:headEnd type="none" w="med" len="med"/>
+                      <a:tailEnd type="none" w="med" len="med"/>
+                    </a:lnT>
+                    <a:lnB w="9525" cap="flat" cmpd="sng" algn="ctr">
+                      <a:solidFill>
+                        <a:srgbClr val="D6D6D6"/>
+                      </a:solidFill>
+                      <a:prstDash val="solid"/>
+                      <a:round/>
+                      <a:headEnd type="none" w="med" len="med"/>
+                      <a:tailEnd type="none" w="med" len="med"/>
+                    </a:lnB>
+                    <a:solidFill>
+                      <a:srgbClr val="FFFFFF"/>
+                    </a:solidFill>
+                  </a:tcPr>
+                </a:tc>
+                <a:tc>
+                  <a:txBody>
+                    <a:bodyPr/>
+                    <a:lstStyle/>
+                    <a:p>
+                      <a:pPr>
+                        <a:buNone/>
+                      </a:pPr>
+                      <a:r>
+                        <a:rPr lang="en" sz="1200" b="0" dirty="0">
+                          <a:effectLst/>
+                          <a:latin typeface="Microsoft JhengHei" panose="020B0604030504040204" pitchFamily="34" charset="-120"/>
+                          <a:ea typeface="Microsoft JhengHei" panose="020B0604030504040204" pitchFamily="34" charset="-120"/>
+                        </a:rPr>
+                        <a:t>LLM </a:t>
+                      </a:r>
+                      <a:r>
+                        <a:rPr lang="zh-TW" altLang="en-US" sz="1200" b="0" dirty="0">
+                          <a:effectLst/>
+                          <a:latin typeface="Microsoft JhengHei" panose="020B0604030504040204" pitchFamily="34" charset="-120"/>
+                          <a:ea typeface="Microsoft JhengHei" panose="020B0604030504040204" pitchFamily="34" charset="-120"/>
+                        </a:rPr>
+                        <a:t>供應商</a:t>
+                      </a:r>
+                      <a:r>
+                        <a:rPr lang="en-US" altLang="zh-TW" sz="1200" b="0" dirty="0">
+                          <a:effectLst/>
+                          <a:latin typeface="Microsoft JhengHei" panose="020B0604030504040204" pitchFamily="34" charset="-120"/>
+                          <a:ea typeface="Microsoft JhengHei" panose="020B0604030504040204" pitchFamily="34" charset="-120"/>
+                        </a:rPr>
+                        <a:t> (Azure OpenAI</a:t>
+                      </a:r>
+                      <a:r>
+                        <a:rPr lang="zh-TW" altLang="en-US" sz="1200" b="0" dirty="0">
+                          <a:effectLst/>
+                          <a:latin typeface="Microsoft JhengHei" panose="020B0604030504040204" pitchFamily="34" charset="-120"/>
+                          <a:ea typeface="Microsoft JhengHei" panose="020B0604030504040204" pitchFamily="34" charset="-120"/>
+                        </a:rPr>
+                        <a:t> </a:t>
+                      </a:r>
+                      <a:r>
+                        <a:rPr lang="en-US" altLang="zh-TW" sz="1200" b="0" dirty="0">
+                          <a:effectLst/>
+                          <a:latin typeface="Microsoft JhengHei" panose="020B0604030504040204" pitchFamily="34" charset="-120"/>
+                          <a:ea typeface="Microsoft JhengHei" panose="020B0604030504040204" pitchFamily="34" charset="-120"/>
+                        </a:rPr>
+                        <a:t>/ </a:t>
+                      </a:r>
+                      <a:r>
+                        <a:rPr lang="en-US" altLang="zh-TW" sz="1200" b="0" dirty="0" err="1">
+                          <a:effectLst/>
+                          <a:latin typeface="Microsoft JhengHei" panose="020B0604030504040204" pitchFamily="34" charset="-120"/>
+                          <a:ea typeface="Microsoft JhengHei" panose="020B0604030504040204" pitchFamily="34" charset="-120"/>
+                        </a:rPr>
+                        <a:t>LiteLLM</a:t>
+                      </a:r>
+                      <a:r>
+                        <a:rPr lang="en-US" altLang="zh-TW" sz="1200" b="0" dirty="0">
+                          <a:effectLst/>
+                          <a:latin typeface="Microsoft JhengHei" panose="020B0604030504040204" pitchFamily="34" charset="-120"/>
+                          <a:ea typeface="Microsoft JhengHei" panose="020B0604030504040204" pitchFamily="34" charset="-120"/>
+                        </a:rPr>
+                        <a:t>)</a:t>
+                      </a:r>
+                      <a:endParaRPr lang="zh-TW" altLang="en-US" sz="1200" b="0" dirty="0">
+                        <a:effectLst/>
+                        <a:latin typeface="Microsoft JhengHei" panose="020B0604030504040204" pitchFamily="34" charset="-120"/>
+                        <a:ea typeface="Microsoft JhengHei" panose="020B0604030504040204" pitchFamily="34" charset="-120"/>
+                      </a:endParaRPr>
+                    </a:p>
+                  </a:txBody>
+                  <a:tcPr marL="22968" marR="22968" marT="10601" marB="10601" anchor="ctr">
+                    <a:lnL w="9525" cap="flat" cmpd="sng" algn="ctr">
+                      <a:solidFill>
+                        <a:srgbClr val="D6D6D6"/>
+                      </a:solidFill>
+                      <a:prstDash val="solid"/>
+                      <a:round/>
+                      <a:headEnd type="none" w="med" len="med"/>
+                      <a:tailEnd type="none" w="med" len="med"/>
+                    </a:lnL>
+                    <a:lnR w="9525" cap="flat" cmpd="sng" algn="ctr">
+                      <a:solidFill>
+                        <a:srgbClr val="D6D6D6"/>
+                      </a:solidFill>
+                      <a:prstDash val="solid"/>
+                      <a:round/>
+                      <a:headEnd type="none" w="med" len="med"/>
+                      <a:tailEnd type="none" w="med" len="med"/>
+                    </a:lnR>
+                    <a:lnT w="9525" cap="flat" cmpd="sng" algn="ctr">
+                      <a:solidFill>
+                        <a:srgbClr val="D6D6D6"/>
+                      </a:solidFill>
+                      <a:prstDash val="solid"/>
+                      <a:round/>
+                      <a:headEnd type="none" w="med" len="med"/>
+                      <a:tailEnd type="none" w="med" len="med"/>
+                    </a:lnT>
+                    <a:lnB w="9525" cap="flat" cmpd="sng" algn="ctr">
+                      <a:solidFill>
+                        <a:srgbClr val="D6D6D6"/>
+                      </a:solidFill>
+                      <a:prstDash val="solid"/>
+                      <a:round/>
+                      <a:headEnd type="none" w="med" len="med"/>
+                      <a:tailEnd type="none" w="med" len="med"/>
+                    </a:lnB>
+                    <a:solidFill>
+                      <a:srgbClr val="FFFFFF"/>
+                    </a:solidFill>
+                  </a:tcPr>
+                </a:tc>
+                <a:tc>
+                  <a:txBody>
+                    <a:bodyPr/>
+                    <a:lstStyle/>
+                    <a:p>
+                      <a:pPr>
+                        <a:buNone/>
+                      </a:pPr>
+                      <a:r>
+                        <a:rPr lang="zh-TW" altLang="en-US" sz="1200" b="0" dirty="0">
+                          <a:effectLst/>
+                          <a:latin typeface="Microsoft JhengHei" panose="020B0604030504040204" pitchFamily="34" charset="-120"/>
+                          <a:ea typeface="Microsoft JhengHei" panose="020B0604030504040204" pitchFamily="34" charset="-120"/>
+                        </a:rPr>
+                        <a:t>提供文章判讀、摘要、分類、助理推理等 </a:t>
+                      </a:r>
+                      <a:r>
+                        <a:rPr lang="en" sz="1200" b="0" dirty="0">
+                          <a:effectLst/>
+                          <a:latin typeface="Microsoft JhengHei" panose="020B0604030504040204" pitchFamily="34" charset="-120"/>
+                          <a:ea typeface="Microsoft JhengHei" panose="020B0604030504040204" pitchFamily="34" charset="-120"/>
+                        </a:rPr>
+                        <a:t>AI </a:t>
+                      </a:r>
+                      <a:r>
+                        <a:rPr lang="zh-TW" altLang="en-US" sz="1200" b="0" dirty="0">
+                          <a:effectLst/>
+                          <a:latin typeface="Microsoft JhengHei" panose="020B0604030504040204" pitchFamily="34" charset="-120"/>
+                          <a:ea typeface="Microsoft JhengHei" panose="020B0604030504040204" pitchFamily="34" charset="-120"/>
+                        </a:rPr>
+                        <a:t>能力</a:t>
+                      </a:r>
+                    </a:p>
+                  </a:txBody>
+                  <a:tcPr marL="22968" marR="22968" marT="10601" marB="10601" anchor="ctr">
+                    <a:lnL w="9525" cap="flat" cmpd="sng" algn="ctr">
+                      <a:solidFill>
+                        <a:srgbClr val="D6D6D6"/>
+                      </a:solidFill>
+                      <a:prstDash val="solid"/>
+                      <a:round/>
+                      <a:headEnd type="none" w="med" len="med"/>
+                      <a:tailEnd type="none" w="med" len="med"/>
+                    </a:lnL>
+                    <a:lnR w="9525" cap="flat" cmpd="sng" algn="ctr">
+                      <a:solidFill>
+                        <a:srgbClr val="D6D6D6"/>
+                      </a:solidFill>
+                      <a:prstDash val="solid"/>
+                      <a:round/>
+                      <a:headEnd type="none" w="med" len="med"/>
+                      <a:tailEnd type="none" w="med" len="med"/>
+                    </a:lnR>
+                    <a:lnT w="9525" cap="flat" cmpd="sng" algn="ctr">
+                      <a:solidFill>
+                        <a:srgbClr val="D6D6D6"/>
+                      </a:solidFill>
+                      <a:prstDash val="solid"/>
+                      <a:round/>
+                      <a:headEnd type="none" w="med" len="med"/>
+                      <a:tailEnd type="none" w="med" len="med"/>
+                    </a:lnT>
+                    <a:lnB w="9525" cap="flat" cmpd="sng" algn="ctr">
+                      <a:solidFill>
+                        <a:srgbClr val="D6D6D6"/>
+                      </a:solidFill>
+                      <a:prstDash val="solid"/>
+                      <a:round/>
+                      <a:headEnd type="none" w="med" len="med"/>
+                      <a:tailEnd type="none" w="med" len="med"/>
+                    </a:lnB>
+                    <a:solidFill>
+                      <a:srgbClr val="FFFFFF"/>
+                    </a:solidFill>
+                  </a:tcPr>
+                </a:tc>
+                <a:extLst>
+                  <a:ext uri="{0D108BD9-81ED-4DB2-BD59-A6C34878D82A}">
+                    <a16:rowId xmlns:a16="http://schemas.microsoft.com/office/drawing/2014/main" val="2034247835"/>
+                  </a:ext>
+                </a:extLst>
+              </a:tr>
+              <a:tr h="230333">
+                <a:tc>
+                  <a:txBody>
+                    <a:bodyPr/>
+                    <a:lstStyle/>
+                    <a:p>
+                      <a:pPr>
+                        <a:buNone/>
+                      </a:pPr>
+                      <a:r>
+                        <a:rPr lang="en" sz="1200" b="0" dirty="0">
+                          <a:effectLst/>
+                          <a:latin typeface="Microsoft JhengHei" panose="020B0604030504040204" pitchFamily="34" charset="-120"/>
+                          <a:ea typeface="Microsoft JhengHei" panose="020B0604030504040204" pitchFamily="34" charset="-120"/>
+                        </a:rPr>
+                        <a:t>Data Sources</a:t>
+                      </a:r>
+                    </a:p>
+                  </a:txBody>
+                  <a:tcPr marL="22968" marR="22968" marT="10601" marB="10601" anchor="ctr">
+                    <a:lnL w="9525" cap="flat" cmpd="sng" algn="ctr">
+                      <a:solidFill>
+                        <a:srgbClr val="D6D6D6"/>
+                      </a:solidFill>
+                      <a:prstDash val="solid"/>
+                      <a:round/>
+                      <a:headEnd type="none" w="med" len="med"/>
+                      <a:tailEnd type="none" w="med" len="med"/>
+                    </a:lnL>
+                    <a:lnR w="9525" cap="flat" cmpd="sng" algn="ctr">
+                      <a:solidFill>
+                        <a:srgbClr val="D6D6D6"/>
+                      </a:solidFill>
+                      <a:prstDash val="solid"/>
+                      <a:round/>
+                      <a:headEnd type="none" w="med" len="med"/>
+                      <a:tailEnd type="none" w="med" len="med"/>
+                    </a:lnR>
+                    <a:lnT w="9525" cap="flat" cmpd="sng" algn="ctr">
+                      <a:solidFill>
+                        <a:srgbClr val="D6D6D6"/>
+                      </a:solidFill>
+                      <a:prstDash val="solid"/>
+                      <a:round/>
+                      <a:headEnd type="none" w="med" len="med"/>
+                      <a:tailEnd type="none" w="med" len="med"/>
+                    </a:lnT>
+                    <a:lnB w="9525" cap="flat" cmpd="sng" algn="ctr">
+                      <a:solidFill>
+                        <a:srgbClr val="D6D6D6"/>
+                      </a:solidFill>
+                      <a:prstDash val="solid"/>
+                      <a:round/>
+                      <a:headEnd type="none" w="med" len="med"/>
+                      <a:tailEnd type="none" w="med" len="med"/>
+                    </a:lnB>
+                    <a:solidFill>
+                      <a:srgbClr val="FFFFFF"/>
+                    </a:solidFill>
+                  </a:tcPr>
+                </a:tc>
+                <a:tc>
+                  <a:txBody>
+                    <a:bodyPr/>
+                    <a:lstStyle/>
+                    <a:p>
+                      <a:pPr>
+                        <a:buNone/>
+                      </a:pPr>
+                      <a:r>
+                        <a:rPr lang="en" sz="1200" b="0" dirty="0">
+                          <a:effectLst/>
+                          <a:latin typeface="Microsoft JhengHei" panose="020B0604030504040204" pitchFamily="34" charset="-120"/>
+                          <a:ea typeface="Microsoft JhengHei" panose="020B0604030504040204" pitchFamily="34" charset="-120"/>
+                        </a:rPr>
+                        <a:t>RSS、</a:t>
+                      </a:r>
+                      <a:r>
+                        <a:rPr lang="zh-TW" altLang="en-US" sz="1200" b="0" dirty="0">
+                          <a:effectLst/>
+                          <a:latin typeface="Microsoft JhengHei" panose="020B0604030504040204" pitchFamily="34" charset="-120"/>
+                          <a:ea typeface="Microsoft JhengHei" panose="020B0604030504040204" pitchFamily="34" charset="-120"/>
+                        </a:rPr>
+                        <a:t>搜尋來源、外部內容來源</a:t>
+                      </a:r>
+                    </a:p>
+                  </a:txBody>
+                  <a:tcPr marL="22968" marR="22968" marT="10601" marB="10601" anchor="ctr">
+                    <a:lnL w="9525" cap="flat" cmpd="sng" algn="ctr">
+                      <a:solidFill>
+                        <a:srgbClr val="D6D6D6"/>
+                      </a:solidFill>
+                      <a:prstDash val="solid"/>
+                      <a:round/>
+                      <a:headEnd type="none" w="med" len="med"/>
+                      <a:tailEnd type="none" w="med" len="med"/>
+                    </a:lnL>
+                    <a:lnR w="9525" cap="flat" cmpd="sng" algn="ctr">
+                      <a:solidFill>
+                        <a:srgbClr val="D6D6D6"/>
+                      </a:solidFill>
+                      <a:prstDash val="solid"/>
+                      <a:round/>
+                      <a:headEnd type="none" w="med" len="med"/>
+                      <a:tailEnd type="none" w="med" len="med"/>
+                    </a:lnR>
+                    <a:lnT w="9525" cap="flat" cmpd="sng" algn="ctr">
+                      <a:solidFill>
+                        <a:srgbClr val="D6D6D6"/>
+                      </a:solidFill>
+                      <a:prstDash val="solid"/>
+                      <a:round/>
+                      <a:headEnd type="none" w="med" len="med"/>
+                      <a:tailEnd type="none" w="med" len="med"/>
+                    </a:lnT>
+                    <a:lnB w="9525" cap="flat" cmpd="sng" algn="ctr">
+                      <a:solidFill>
+                        <a:srgbClr val="D6D6D6"/>
+                      </a:solidFill>
+                      <a:prstDash val="solid"/>
+                      <a:round/>
+                      <a:headEnd type="none" w="med" len="med"/>
+                      <a:tailEnd type="none" w="med" len="med"/>
+                    </a:lnB>
+                    <a:solidFill>
+                      <a:srgbClr val="FFFFFF"/>
+                    </a:solidFill>
+                  </a:tcPr>
+                </a:tc>
+                <a:tc>
+                  <a:txBody>
+                    <a:bodyPr/>
+                    <a:lstStyle/>
+                    <a:p>
+                      <a:pPr>
+                        <a:buNone/>
+                      </a:pPr>
+                      <a:r>
+                        <a:rPr lang="zh-TW" altLang="en-US" sz="1200" b="0" dirty="0">
+                          <a:effectLst/>
+                          <a:latin typeface="Microsoft JhengHei" panose="020B0604030504040204" pitchFamily="34" charset="-120"/>
+                          <a:ea typeface="Microsoft JhengHei" panose="020B0604030504040204" pitchFamily="34" charset="-120"/>
+                        </a:rPr>
+                        <a:t>系統擷取資訊的來源，提供文章或原始資料給 </a:t>
+                      </a:r>
+                      <a:r>
+                        <a:rPr lang="en" sz="1200" b="0" dirty="0">
+                          <a:effectLst/>
+                          <a:latin typeface="Microsoft JhengHei" panose="020B0604030504040204" pitchFamily="34" charset="-120"/>
+                          <a:ea typeface="Microsoft JhengHei" panose="020B0604030504040204" pitchFamily="34" charset="-120"/>
+                        </a:rPr>
+                        <a:t>API / Scheduler </a:t>
+                      </a:r>
+                      <a:r>
+                        <a:rPr lang="zh-TW" altLang="en-US" sz="1200" b="0" dirty="0">
+                          <a:effectLst/>
+                          <a:latin typeface="Microsoft JhengHei" panose="020B0604030504040204" pitchFamily="34" charset="-120"/>
+                          <a:ea typeface="Microsoft JhengHei" panose="020B0604030504040204" pitchFamily="34" charset="-120"/>
+                        </a:rPr>
+                        <a:t>處理</a:t>
+                      </a:r>
+                    </a:p>
+                  </a:txBody>
+                  <a:tcPr marL="22968" marR="22968" marT="10601" marB="10601" anchor="ctr">
+                    <a:lnL w="9525" cap="flat" cmpd="sng" algn="ctr">
+                      <a:solidFill>
+                        <a:srgbClr val="D6D6D6"/>
+                      </a:solidFill>
+                      <a:prstDash val="solid"/>
+                      <a:round/>
+                      <a:headEnd type="none" w="med" len="med"/>
+                      <a:tailEnd type="none" w="med" len="med"/>
+                    </a:lnL>
+                    <a:lnR w="9525" cap="flat" cmpd="sng" algn="ctr">
+                      <a:solidFill>
+                        <a:srgbClr val="D6D6D6"/>
+                      </a:solidFill>
+                      <a:prstDash val="solid"/>
+                      <a:round/>
+                      <a:headEnd type="none" w="med" len="med"/>
+                      <a:tailEnd type="none" w="med" len="med"/>
+                    </a:lnR>
+                    <a:lnT w="9525" cap="flat" cmpd="sng" algn="ctr">
+                      <a:solidFill>
+                        <a:srgbClr val="D6D6D6"/>
+                      </a:solidFill>
+                      <a:prstDash val="solid"/>
+                      <a:round/>
+                      <a:headEnd type="none" w="med" len="med"/>
+                      <a:tailEnd type="none" w="med" len="med"/>
+                    </a:lnT>
+                    <a:lnB w="9525" cap="flat" cmpd="sng" algn="ctr">
+                      <a:solidFill>
+                        <a:srgbClr val="D6D6D6"/>
+                      </a:solidFill>
+                      <a:prstDash val="solid"/>
+                      <a:round/>
+                      <a:headEnd type="none" w="med" len="med"/>
+                      <a:tailEnd type="none" w="med" len="med"/>
+                    </a:lnB>
+                    <a:solidFill>
+                      <a:srgbClr val="FFFFFF"/>
+                    </a:solidFill>
+                  </a:tcPr>
+                </a:tc>
+                <a:extLst>
+                  <a:ext uri="{0D108BD9-81ED-4DB2-BD59-A6C34878D82A}">
+                    <a16:rowId xmlns:a16="http://schemas.microsoft.com/office/drawing/2014/main" val="3337821277"/>
+                  </a:ext>
+                </a:extLst>
+              </a:tr>
+            </a:tbl>
+          </a:graphicData>
+        </a:graphic>
+      </p:graphicFrame>
+    </p:spTree>
+    <p:extLst>
+      <p:ext uri="{BB962C8B-B14F-4D97-AF65-F5344CB8AC3E}">
+        <p14:creationId xmlns:p14="http://schemas.microsoft.com/office/powerpoint/2010/main" val="2202823034"/>
+      </p:ext>
+    </p:extLst>
+  </p:cSld>
+  <p:clrMapOvr>
+    <a:masterClrMapping/>
+  </p:clrMapOvr>
+</p:sld>
+</file>
+
+<file path=ppt/slides/slide4.xml><?xml version="1.0" encoding="utf-8"?>
+<p:sld xmlns:a="http://schemas.openxmlformats.org/drawingml/2006/main" xmlns:r="http://schemas.openxmlformats.org/officeDocument/2006/relationships" xmlns:p="http://schemas.openxmlformats.org/presentationml/2006/main">
+  <p:cSld>
+    <p:spTree>
+      <p:nvGrpSpPr>
+        <p:cNvPr id="1" name="">
+          <a:extLst>
+            <a:ext uri="{FF2B5EF4-FFF2-40B4-BE49-F238E27FC236}">
+              <a16:creationId xmlns:a16="http://schemas.microsoft.com/office/drawing/2014/main" id="{C80F1C9A-CB1C-4442-8F53-894FC5EE1F2C}"/>
+            </a:ext>
+          </a:extLst>
+        </p:cNvPr>
+        <p:cNvGrpSpPr/>
+        <p:nvPr/>
+      </p:nvGrpSpPr>
+      <p:grpSpPr>
+        <a:xfrm>
+          <a:off x="0" y="0"/>
+          <a:ext cx="0" cy="0"/>
+          <a:chOff x="0" y="0"/>
+          <a:chExt cx="0" cy="0"/>
+        </a:xfrm>
+      </p:grpSpPr>
+      <p:sp>
+        <p:nvSpPr>
+          <p:cNvPr id="2" name="標題 1">
+            <a:extLst>
+              <a:ext uri="{FF2B5EF4-FFF2-40B4-BE49-F238E27FC236}">
+                <a16:creationId xmlns:a16="http://schemas.microsoft.com/office/drawing/2014/main" id="{62930CFD-B623-0CA4-ADD8-424E3CCF7711}"/>
+              </a:ext>
+            </a:extLst>
+          </p:cNvPr>
+          <p:cNvSpPr>
+            <a:spLocks noGrp="1"/>
+          </p:cNvSpPr>
+          <p:nvPr>
+            <p:ph type="title"/>
+          </p:nvPr>
+        </p:nvSpPr>
+        <p:spPr/>
+        <p:txBody>
+          <a:bodyPr/>
+          <a:lstStyle/>
+          <a:p>
+            <a:r>
+              <a:rPr lang="zh-TW" altLang="en-US" b="1" dirty="0"/>
+              <a:t>專案使用技術堆疊與系統邊界概覽</a:t>
+            </a:r>
+          </a:p>
+        </p:txBody>
+      </p:sp>
+      <p:pic>
+        <p:nvPicPr>
+          <p:cNvPr id="5" name="圖片 4" descr="一張含有 文字, 螢幕擷取畫面 的圖片&#10;&#10;AI 產生的內容可能不正確。">
+            <a:extLst>
+              <a:ext uri="{FF2B5EF4-FFF2-40B4-BE49-F238E27FC236}">
+                <a16:creationId xmlns:a16="http://schemas.microsoft.com/office/drawing/2014/main" id="{120DA8B0-14E6-4DDA-D717-6EE86465DF27}"/>
+              </a:ext>
+            </a:extLst>
+          </p:cNvPr>
+          <p:cNvPicPr>
+            <a:picLocks noChangeAspect="1"/>
+          </p:cNvPicPr>
+          <p:nvPr/>
+        </p:nvPicPr>
+        <p:blipFill>
+          <a:blip r:embed="rId3"/>
+          <a:stretch>
+            <a:fillRect/>
+          </a:stretch>
+        </p:blipFill>
+        <p:spPr>
+          <a:xfrm>
+            <a:off x="1260242" y="814325"/>
+            <a:ext cx="9000000" cy="2592830"/>
+          </a:xfrm>
+          <a:prstGeom prst="rect">
+            <a:avLst/>
+          </a:prstGeom>
+        </p:spPr>
+      </p:pic>
+      <p:graphicFrame>
+        <p:nvGraphicFramePr>
+          <p:cNvPr id="3" name="表格 2">
+            <a:extLst>
+              <a:ext uri="{FF2B5EF4-FFF2-40B4-BE49-F238E27FC236}">
+                <a16:creationId xmlns:a16="http://schemas.microsoft.com/office/drawing/2014/main" id="{BBD22C38-79CE-E156-197E-B6DC9D7984C0}"/>
+              </a:ext>
+            </a:extLst>
+          </p:cNvPr>
+          <p:cNvGraphicFramePr>
+            <a:graphicFrameLocks noGrp="1"/>
+          </p:cNvGraphicFramePr>
+          <p:nvPr>
+            <p:extLst>
+              <p:ext uri="{D42A27DB-BD31-4B8C-83A1-F6EECF244321}">
+                <p14:modId xmlns:p14="http://schemas.microsoft.com/office/powerpoint/2010/main" val="2222657314"/>
+              </p:ext>
+            </p:extLst>
+          </p:nvPr>
+        </p:nvGraphicFramePr>
+        <p:xfrm>
+          <a:off x="450242" y="3609480"/>
+          <a:ext cx="10620000" cy="2340002"/>
+        </p:xfrm>
+        <a:graphic>
+          <a:graphicData uri="http://schemas.openxmlformats.org/drawingml/2006/table">
+            <a:tbl>
+              <a:tblPr/>
+              <a:tblGrid>
+                <a:gridCol w="998693">
+                  <a:extLst>
+                    <a:ext uri="{9D8B030D-6E8A-4147-A177-3AD203B41FA5}">
+                      <a16:colId xmlns:a16="http://schemas.microsoft.com/office/drawing/2014/main" val="1267251201"/>
+                    </a:ext>
+                  </a:extLst>
+                </a:gridCol>
+                <a:gridCol w="4795375">
+                  <a:extLst>
+                    <a:ext uri="{9D8B030D-6E8A-4147-A177-3AD203B41FA5}">
+                      <a16:colId xmlns:a16="http://schemas.microsoft.com/office/drawing/2014/main" val="2527468516"/>
+                    </a:ext>
+                  </a:extLst>
+                </a:gridCol>
+                <a:gridCol w="4825932">
+                  <a:extLst>
+                    <a:ext uri="{9D8B030D-6E8A-4147-A177-3AD203B41FA5}">
+                      <a16:colId xmlns:a16="http://schemas.microsoft.com/office/drawing/2014/main" val="4194327151"/>
+                    </a:ext>
+                  </a:extLst>
+                </a:gridCol>
+              </a:tblGrid>
+              <a:tr h="279322">
+                <a:tc>
+                  <a:txBody>
+                    <a:bodyPr/>
+                    <a:lstStyle/>
+                    <a:p>
+                      <a:pPr>
+                        <a:buNone/>
+                      </a:pPr>
+                      <a:r>
+                        <a:rPr lang="zh-TW" altLang="en-US" sz="1200" b="1" dirty="0">
+                          <a:solidFill>
+                            <a:srgbClr val="000000"/>
+                          </a:solidFill>
+                          <a:effectLst/>
+                          <a:latin typeface="Microsoft JhengHei" panose="020B0604030504040204" pitchFamily="34" charset="-120"/>
+                          <a:ea typeface="Microsoft JhengHei" panose="020B0604030504040204" pitchFamily="34" charset="-120"/>
+                        </a:rPr>
+                        <a:t>流程階段</a:t>
+                      </a:r>
+                    </a:p>
+                  </a:txBody>
+                  <a:tcPr marL="81480" marR="81480" marT="37606" marB="37606" anchor="ctr">
+                    <a:lnL w="9525" cap="flat" cmpd="sng" algn="ctr">
+                      <a:solidFill>
+                        <a:srgbClr val="D6D6D6"/>
+                      </a:solidFill>
+                      <a:prstDash val="solid"/>
+                      <a:round/>
+                      <a:headEnd type="none" w="med" len="med"/>
+                      <a:tailEnd type="none" w="med" len="med"/>
+                    </a:lnL>
+                    <a:lnR w="9525" cap="flat" cmpd="sng" algn="ctr">
+                      <a:solidFill>
+                        <a:srgbClr val="D6D6D6"/>
+                      </a:solidFill>
+                      <a:prstDash val="solid"/>
+                      <a:round/>
+                      <a:headEnd type="none" w="med" len="med"/>
+                      <a:tailEnd type="none" w="med" len="med"/>
+                    </a:lnR>
+                    <a:lnT w="9525" cap="flat" cmpd="sng" algn="ctr">
+                      <a:solidFill>
+                        <a:srgbClr val="D6D6D6"/>
+                      </a:solidFill>
+                      <a:prstDash val="solid"/>
+                      <a:round/>
+                      <a:headEnd type="none" w="med" len="med"/>
+                      <a:tailEnd type="none" w="med" len="med"/>
+                    </a:lnT>
+                    <a:lnB w="9525" cap="flat" cmpd="sng" algn="ctr">
+                      <a:solidFill>
+                        <a:srgbClr val="D6D6D6"/>
+                      </a:solidFill>
+                      <a:prstDash val="solid"/>
+                      <a:round/>
+                      <a:headEnd type="none" w="med" len="med"/>
+                      <a:tailEnd type="none" w="med" len="med"/>
+                    </a:lnB>
+                    <a:solidFill>
+                      <a:srgbClr val="FFFFFF"/>
+                    </a:solidFill>
+                  </a:tcPr>
+                </a:tc>
+                <a:tc>
+                  <a:txBody>
+                    <a:bodyPr/>
+                    <a:lstStyle/>
+                    <a:p>
+                      <a:pPr>
+                        <a:buNone/>
+                      </a:pPr>
+                      <a:r>
+                        <a:rPr lang="zh-TW" altLang="en-US" sz="1200" b="1">
+                          <a:solidFill>
+                            <a:srgbClr val="000000"/>
+                          </a:solidFill>
+                          <a:effectLst/>
+                          <a:latin typeface="Microsoft JhengHei" panose="020B0604030504040204" pitchFamily="34" charset="-120"/>
+                          <a:ea typeface="Microsoft JhengHei" panose="020B0604030504040204" pitchFamily="34" charset="-120"/>
+                        </a:rPr>
+                        <a:t>方向</a:t>
+                      </a:r>
+                    </a:p>
+                  </a:txBody>
+                  <a:tcPr marL="81480" marR="81480" marT="37606" marB="37606" anchor="ctr">
+                    <a:lnL w="9525" cap="flat" cmpd="sng" algn="ctr">
+                      <a:solidFill>
+                        <a:srgbClr val="D6D6D6"/>
+                      </a:solidFill>
+                      <a:prstDash val="solid"/>
+                      <a:round/>
+                      <a:headEnd type="none" w="med" len="med"/>
+                      <a:tailEnd type="none" w="med" len="med"/>
+                    </a:lnL>
+                    <a:lnR w="9525" cap="flat" cmpd="sng" algn="ctr">
+                      <a:solidFill>
+                        <a:srgbClr val="D6D6D6"/>
+                      </a:solidFill>
+                      <a:prstDash val="solid"/>
+                      <a:round/>
+                      <a:headEnd type="none" w="med" len="med"/>
+                      <a:tailEnd type="none" w="med" len="med"/>
+                    </a:lnR>
+                    <a:lnT w="9525" cap="flat" cmpd="sng" algn="ctr">
+                      <a:solidFill>
+                        <a:srgbClr val="D6D6D6"/>
+                      </a:solidFill>
+                      <a:prstDash val="solid"/>
+                      <a:round/>
+                      <a:headEnd type="none" w="med" len="med"/>
+                      <a:tailEnd type="none" w="med" len="med"/>
+                    </a:lnT>
+                    <a:lnB w="9525" cap="flat" cmpd="sng" algn="ctr">
+                      <a:solidFill>
+                        <a:srgbClr val="D6D6D6"/>
+                      </a:solidFill>
+                      <a:prstDash val="solid"/>
+                      <a:round/>
+                      <a:headEnd type="none" w="med" len="med"/>
+                      <a:tailEnd type="none" w="med" len="med"/>
+                    </a:lnB>
+                    <a:solidFill>
+                      <a:srgbClr val="FFFFFF"/>
+                    </a:solidFill>
+                  </a:tcPr>
+                </a:tc>
+                <a:tc>
+                  <a:txBody>
+                    <a:bodyPr/>
+                    <a:lstStyle/>
+                    <a:p>
+                      <a:pPr>
+                        <a:buNone/>
+                      </a:pPr>
+                      <a:r>
+                        <a:rPr lang="zh-TW" altLang="en-US" sz="1200" b="1">
+                          <a:solidFill>
+                            <a:srgbClr val="000000"/>
+                          </a:solidFill>
+                          <a:effectLst/>
+                          <a:latin typeface="Microsoft JhengHei" panose="020B0604030504040204" pitchFamily="34" charset="-120"/>
+                          <a:ea typeface="Microsoft JhengHei" panose="020B0604030504040204" pitchFamily="34" charset="-120"/>
+                        </a:rPr>
+                        <a:t>說明</a:t>
+                      </a:r>
+                    </a:p>
+                  </a:txBody>
+                  <a:tcPr marL="81480" marR="81480" marT="37606" marB="37606" anchor="ctr">
+                    <a:lnL w="9525" cap="flat" cmpd="sng" algn="ctr">
+                      <a:solidFill>
+                        <a:srgbClr val="D6D6D6"/>
+                      </a:solidFill>
+                      <a:prstDash val="solid"/>
+                      <a:round/>
+                      <a:headEnd type="none" w="med" len="med"/>
+                      <a:tailEnd type="none" w="med" len="med"/>
+                    </a:lnL>
+                    <a:lnR w="9525" cap="flat" cmpd="sng" algn="ctr">
+                      <a:solidFill>
+                        <a:srgbClr val="D6D6D6"/>
+                      </a:solidFill>
+                      <a:prstDash val="solid"/>
+                      <a:round/>
+                      <a:headEnd type="none" w="med" len="med"/>
+                      <a:tailEnd type="none" w="med" len="med"/>
+                    </a:lnR>
+                    <a:lnT w="9525" cap="flat" cmpd="sng" algn="ctr">
+                      <a:solidFill>
+                        <a:srgbClr val="D6D6D6"/>
+                      </a:solidFill>
+                      <a:prstDash val="solid"/>
+                      <a:round/>
+                      <a:headEnd type="none" w="med" len="med"/>
+                      <a:tailEnd type="none" w="med" len="med"/>
+                    </a:lnT>
+                    <a:lnB w="9525" cap="flat" cmpd="sng" algn="ctr">
+                      <a:solidFill>
+                        <a:srgbClr val="D6D6D6"/>
+                      </a:solidFill>
+                      <a:prstDash val="solid"/>
+                      <a:round/>
+                      <a:headEnd type="none" w="med" len="med"/>
+                      <a:tailEnd type="none" w="med" len="med"/>
+                    </a:lnB>
+                    <a:solidFill>
+                      <a:srgbClr val="FFFFFF"/>
+                    </a:solidFill>
+                  </a:tcPr>
+                </a:tc>
+                <a:extLst>
+                  <a:ext uri="{0D108BD9-81ED-4DB2-BD59-A6C34878D82A}">
+                    <a16:rowId xmlns:a16="http://schemas.microsoft.com/office/drawing/2014/main" val="3481647956"/>
+                  </a:ext>
+                </a:extLst>
+              </a:tr>
+              <a:tr h="279322">
+                <a:tc>
+                  <a:txBody>
+                    <a:bodyPr/>
+                    <a:lstStyle/>
+                    <a:p>
+                      <a:pPr>
+                        <a:buNone/>
+                      </a:pPr>
+                      <a:r>
+                        <a:rPr lang="zh-TW" altLang="en-US" sz="1200" dirty="0">
+                          <a:effectLst/>
+                          <a:latin typeface="Microsoft JhengHei" panose="020B0604030504040204" pitchFamily="34" charset="-120"/>
+                          <a:ea typeface="Microsoft JhengHei" panose="020B0604030504040204" pitchFamily="34" charset="-120"/>
+                        </a:rPr>
+                        <a:t>使用者操作</a:t>
+                      </a:r>
+                    </a:p>
+                  </a:txBody>
+                  <a:tcPr marL="81480" marR="81480" marT="37606" marB="37606" anchor="ctr">
+                    <a:lnL w="9525" cap="flat" cmpd="sng" algn="ctr">
+                      <a:solidFill>
+                        <a:srgbClr val="D6D6D6"/>
+                      </a:solidFill>
+                      <a:prstDash val="solid"/>
+                      <a:round/>
+                      <a:headEnd type="none" w="med" len="med"/>
+                      <a:tailEnd type="none" w="med" len="med"/>
+                    </a:lnL>
+                    <a:lnR w="9525" cap="flat" cmpd="sng" algn="ctr">
+                      <a:solidFill>
+                        <a:srgbClr val="D6D6D6"/>
+                      </a:solidFill>
+                      <a:prstDash val="solid"/>
+                      <a:round/>
+                      <a:headEnd type="none" w="med" len="med"/>
+                      <a:tailEnd type="none" w="med" len="med"/>
+                    </a:lnR>
+                    <a:lnT w="9525" cap="flat" cmpd="sng" algn="ctr">
+                      <a:solidFill>
+                        <a:srgbClr val="D6D6D6"/>
+                      </a:solidFill>
+                      <a:prstDash val="solid"/>
+                      <a:round/>
+                      <a:headEnd type="none" w="med" len="med"/>
+                      <a:tailEnd type="none" w="med" len="med"/>
+                    </a:lnT>
+                    <a:lnB w="9525" cap="flat" cmpd="sng" algn="ctr">
+                      <a:solidFill>
+                        <a:srgbClr val="D6D6D6"/>
+                      </a:solidFill>
+                      <a:prstDash val="solid"/>
+                      <a:round/>
+                      <a:headEnd type="none" w="med" len="med"/>
+                      <a:tailEnd type="none" w="med" len="med"/>
+                    </a:lnB>
+                    <a:solidFill>
+                      <a:srgbClr val="FFFFFF"/>
+                    </a:solidFill>
+                  </a:tcPr>
+                </a:tc>
+                <a:tc>
+                  <a:txBody>
+                    <a:bodyPr/>
+                    <a:lstStyle/>
+                    <a:p>
+                      <a:pPr>
+                        <a:buNone/>
+                      </a:pPr>
+                      <a:r>
+                        <a:rPr lang="en" sz="1200">
+                          <a:effectLst/>
+                          <a:latin typeface="Microsoft JhengHei" panose="020B0604030504040204" pitchFamily="34" charset="-120"/>
+                          <a:ea typeface="Microsoft JhengHei" panose="020B0604030504040204" pitchFamily="34" charset="-120"/>
+                        </a:rPr>
+                        <a:t>User → InfoGather Web</a:t>
+                      </a:r>
+                    </a:p>
+                  </a:txBody>
+                  <a:tcPr marL="81480" marR="81480" marT="37606" marB="37606" anchor="ctr">
+                    <a:lnL w="9525" cap="flat" cmpd="sng" algn="ctr">
+                      <a:solidFill>
+                        <a:srgbClr val="D6D6D6"/>
+                      </a:solidFill>
+                      <a:prstDash val="solid"/>
+                      <a:round/>
+                      <a:headEnd type="none" w="med" len="med"/>
+                      <a:tailEnd type="none" w="med" len="med"/>
+                    </a:lnL>
+                    <a:lnR w="9525" cap="flat" cmpd="sng" algn="ctr">
+                      <a:solidFill>
+                        <a:srgbClr val="D6D6D6"/>
+                      </a:solidFill>
+                      <a:prstDash val="solid"/>
+                      <a:round/>
+                      <a:headEnd type="none" w="med" len="med"/>
+                      <a:tailEnd type="none" w="med" len="med"/>
+                    </a:lnR>
+                    <a:lnT w="9525" cap="flat" cmpd="sng" algn="ctr">
+                      <a:solidFill>
+                        <a:srgbClr val="D6D6D6"/>
+                      </a:solidFill>
+                      <a:prstDash val="solid"/>
+                      <a:round/>
+                      <a:headEnd type="none" w="med" len="med"/>
+                      <a:tailEnd type="none" w="med" len="med"/>
+                    </a:lnT>
+                    <a:lnB w="9525" cap="flat" cmpd="sng" algn="ctr">
+                      <a:solidFill>
+                        <a:srgbClr val="D6D6D6"/>
+                      </a:solidFill>
+                      <a:prstDash val="solid"/>
+                      <a:round/>
+                      <a:headEnd type="none" w="med" len="med"/>
+                      <a:tailEnd type="none" w="med" len="med"/>
+                    </a:lnB>
+                    <a:solidFill>
+                      <a:srgbClr val="FFFFFF"/>
+                    </a:solidFill>
+                  </a:tcPr>
+                </a:tc>
+                <a:tc>
+                  <a:txBody>
+                    <a:bodyPr/>
+                    <a:lstStyle/>
+                    <a:p>
+                      <a:pPr>
+                        <a:buNone/>
+                      </a:pPr>
+                      <a:r>
+                        <a:rPr lang="zh-TW" altLang="en-US" sz="1200">
+                          <a:effectLst/>
+                          <a:latin typeface="Microsoft JhengHei" panose="020B0604030504040204" pitchFamily="34" charset="-120"/>
+                          <a:ea typeface="Microsoft JhengHei" panose="020B0604030504040204" pitchFamily="34" charset="-120"/>
+                        </a:rPr>
+                        <a:t>使用者在前端介面發出操作</a:t>
+                      </a:r>
+                    </a:p>
+                  </a:txBody>
+                  <a:tcPr marL="81480" marR="81480" marT="37606" marB="37606" anchor="ctr">
+                    <a:lnL w="9525" cap="flat" cmpd="sng" algn="ctr">
+                      <a:solidFill>
+                        <a:srgbClr val="D6D6D6"/>
+                      </a:solidFill>
+                      <a:prstDash val="solid"/>
+                      <a:round/>
+                      <a:headEnd type="none" w="med" len="med"/>
+                      <a:tailEnd type="none" w="med" len="med"/>
+                    </a:lnL>
+                    <a:lnR w="9525" cap="flat" cmpd="sng" algn="ctr">
+                      <a:solidFill>
+                        <a:srgbClr val="D6D6D6"/>
+                      </a:solidFill>
+                      <a:prstDash val="solid"/>
+                      <a:round/>
+                      <a:headEnd type="none" w="med" len="med"/>
+                      <a:tailEnd type="none" w="med" len="med"/>
+                    </a:lnR>
+                    <a:lnT w="9525" cap="flat" cmpd="sng" algn="ctr">
+                      <a:solidFill>
+                        <a:srgbClr val="D6D6D6"/>
+                      </a:solidFill>
+                      <a:prstDash val="solid"/>
+                      <a:round/>
+                      <a:headEnd type="none" w="med" len="med"/>
+                      <a:tailEnd type="none" w="med" len="med"/>
+                    </a:lnT>
+                    <a:lnB w="9525" cap="flat" cmpd="sng" algn="ctr">
+                      <a:solidFill>
+                        <a:srgbClr val="D6D6D6"/>
+                      </a:solidFill>
+                      <a:prstDash val="solid"/>
+                      <a:round/>
+                      <a:headEnd type="none" w="med" len="med"/>
+                      <a:tailEnd type="none" w="med" len="med"/>
+                    </a:lnB>
+                    <a:solidFill>
+                      <a:srgbClr val="FFFFFF"/>
+                    </a:solidFill>
+                  </a:tcPr>
+                </a:tc>
+                <a:extLst>
+                  <a:ext uri="{0D108BD9-81ED-4DB2-BD59-A6C34878D82A}">
+                    <a16:rowId xmlns:a16="http://schemas.microsoft.com/office/drawing/2014/main" val="3771899495"/>
+                  </a:ext>
+                </a:extLst>
+              </a:tr>
+              <a:tr h="279322">
+                <a:tc>
+                  <a:txBody>
+                    <a:bodyPr/>
+                    <a:lstStyle/>
+                    <a:p>
+                      <a:pPr>
+                        <a:buNone/>
+                      </a:pPr>
+                      <a:r>
+                        <a:rPr lang="zh-TW" altLang="en-US" sz="1200" dirty="0">
+                          <a:effectLst/>
+                          <a:latin typeface="Microsoft JhengHei" panose="020B0604030504040204" pitchFamily="34" charset="-120"/>
+                          <a:ea typeface="Microsoft JhengHei" panose="020B0604030504040204" pitchFamily="34" charset="-120"/>
+                        </a:rPr>
+                        <a:t>前後端互動</a:t>
+                      </a:r>
+                    </a:p>
+                  </a:txBody>
+                  <a:tcPr marL="81480" marR="81480" marT="37606" marB="37606" anchor="ctr">
+                    <a:lnL w="9525" cap="flat" cmpd="sng" algn="ctr">
+                      <a:solidFill>
+                        <a:srgbClr val="D6D6D6"/>
+                      </a:solidFill>
+                      <a:prstDash val="solid"/>
+                      <a:round/>
+                      <a:headEnd type="none" w="med" len="med"/>
+                      <a:tailEnd type="none" w="med" len="med"/>
+                    </a:lnL>
+                    <a:lnR w="9525" cap="flat" cmpd="sng" algn="ctr">
+                      <a:solidFill>
+                        <a:srgbClr val="D6D6D6"/>
+                      </a:solidFill>
+                      <a:prstDash val="solid"/>
+                      <a:round/>
+                      <a:headEnd type="none" w="med" len="med"/>
+                      <a:tailEnd type="none" w="med" len="med"/>
+                    </a:lnR>
+                    <a:lnT w="9525" cap="flat" cmpd="sng" algn="ctr">
+                      <a:solidFill>
+                        <a:srgbClr val="D6D6D6"/>
+                      </a:solidFill>
+                      <a:prstDash val="solid"/>
+                      <a:round/>
+                      <a:headEnd type="none" w="med" len="med"/>
+                      <a:tailEnd type="none" w="med" len="med"/>
+                    </a:lnT>
+                    <a:lnB w="9525" cap="flat" cmpd="sng" algn="ctr">
+                      <a:solidFill>
+                        <a:srgbClr val="D6D6D6"/>
+                      </a:solidFill>
+                      <a:prstDash val="solid"/>
+                      <a:round/>
+                      <a:headEnd type="none" w="med" len="med"/>
+                      <a:tailEnd type="none" w="med" len="med"/>
+                    </a:lnB>
+                    <a:solidFill>
+                      <a:srgbClr val="FFFFFF"/>
+                    </a:solidFill>
+                  </a:tcPr>
+                </a:tc>
+                <a:tc>
+                  <a:txBody>
+                    <a:bodyPr/>
+                    <a:lstStyle/>
+                    <a:p>
+                      <a:pPr>
+                        <a:buNone/>
+                      </a:pPr>
+                      <a:r>
+                        <a:rPr lang="en" sz="1200" dirty="0" err="1">
+                          <a:effectLst/>
+                          <a:latin typeface="Microsoft JhengHei" panose="020B0604030504040204" pitchFamily="34" charset="-120"/>
+                          <a:ea typeface="Microsoft JhengHei" panose="020B0604030504040204" pitchFamily="34" charset="-120"/>
+                        </a:rPr>
+                        <a:t>InfoGather</a:t>
+                      </a:r>
+                      <a:r>
+                        <a:rPr lang="en" sz="1200" dirty="0">
+                          <a:effectLst/>
+                          <a:latin typeface="Microsoft JhengHei" panose="020B0604030504040204" pitchFamily="34" charset="-120"/>
+                          <a:ea typeface="Microsoft JhengHei" panose="020B0604030504040204" pitchFamily="34" charset="-120"/>
+                        </a:rPr>
+                        <a:t> Web → </a:t>
+                      </a:r>
+                      <a:r>
+                        <a:rPr lang="en" sz="1200" dirty="0" err="1">
+                          <a:effectLst/>
+                          <a:latin typeface="Microsoft JhengHei" panose="020B0604030504040204" pitchFamily="34" charset="-120"/>
+                          <a:ea typeface="Microsoft JhengHei" panose="020B0604030504040204" pitchFamily="34" charset="-120"/>
+                        </a:rPr>
+                        <a:t>InfoGather</a:t>
+                      </a:r>
+                      <a:r>
+                        <a:rPr lang="en" sz="1200" dirty="0">
+                          <a:effectLst/>
+                          <a:latin typeface="Microsoft JhengHei" panose="020B0604030504040204" pitchFamily="34" charset="-120"/>
+                          <a:ea typeface="Microsoft JhengHei" panose="020B0604030504040204" pitchFamily="34" charset="-120"/>
+                        </a:rPr>
+                        <a:t> API</a:t>
+                      </a:r>
+                    </a:p>
+                  </a:txBody>
+                  <a:tcPr marL="81480" marR="81480" marT="37606" marB="37606" anchor="ctr">
+                    <a:lnL w="9525" cap="flat" cmpd="sng" algn="ctr">
+                      <a:solidFill>
+                        <a:srgbClr val="D6D6D6"/>
+                      </a:solidFill>
+                      <a:prstDash val="solid"/>
+                      <a:round/>
+                      <a:headEnd type="none" w="med" len="med"/>
+                      <a:tailEnd type="none" w="med" len="med"/>
+                    </a:lnL>
+                    <a:lnR w="9525" cap="flat" cmpd="sng" algn="ctr">
+                      <a:solidFill>
+                        <a:srgbClr val="D6D6D6"/>
+                      </a:solidFill>
+                      <a:prstDash val="solid"/>
+                      <a:round/>
+                      <a:headEnd type="none" w="med" len="med"/>
+                      <a:tailEnd type="none" w="med" len="med"/>
+                    </a:lnR>
+                    <a:lnT w="9525" cap="flat" cmpd="sng" algn="ctr">
+                      <a:solidFill>
+                        <a:srgbClr val="D6D6D6"/>
+                      </a:solidFill>
+                      <a:prstDash val="solid"/>
+                      <a:round/>
+                      <a:headEnd type="none" w="med" len="med"/>
+                      <a:tailEnd type="none" w="med" len="med"/>
+                    </a:lnT>
+                    <a:lnB w="9525" cap="flat" cmpd="sng" algn="ctr">
+                      <a:solidFill>
+                        <a:srgbClr val="D6D6D6"/>
+                      </a:solidFill>
+                      <a:prstDash val="solid"/>
+                      <a:round/>
+                      <a:headEnd type="none" w="med" len="med"/>
+                      <a:tailEnd type="none" w="med" len="med"/>
+                    </a:lnB>
+                    <a:solidFill>
+                      <a:srgbClr val="FFFFFF"/>
+                    </a:solidFill>
+                  </a:tcPr>
+                </a:tc>
+                <a:tc>
+                  <a:txBody>
+                    <a:bodyPr/>
+                    <a:lstStyle/>
+                    <a:p>
+                      <a:pPr>
+                        <a:buNone/>
+                      </a:pPr>
+                      <a:r>
+                        <a:rPr lang="zh-TW" altLang="en-US" sz="1200">
+                          <a:effectLst/>
+                          <a:latin typeface="Microsoft JhengHei" panose="020B0604030504040204" pitchFamily="34" charset="-120"/>
+                          <a:ea typeface="Microsoft JhengHei" panose="020B0604030504040204" pitchFamily="34" charset="-120"/>
+                        </a:rPr>
+                        <a:t>前端呼叫 </a:t>
+                      </a:r>
+                      <a:r>
+                        <a:rPr lang="en" sz="1200">
+                          <a:effectLst/>
+                          <a:latin typeface="Microsoft JhengHei" panose="020B0604030504040204" pitchFamily="34" charset="-120"/>
+                          <a:ea typeface="Microsoft JhengHei" panose="020B0604030504040204" pitchFamily="34" charset="-120"/>
+                        </a:rPr>
+                        <a:t>API </a:t>
+                      </a:r>
+                      <a:r>
+                        <a:rPr lang="zh-TW" altLang="en-US" sz="1200">
+                          <a:effectLst/>
+                          <a:latin typeface="Microsoft JhengHei" panose="020B0604030504040204" pitchFamily="34" charset="-120"/>
+                          <a:ea typeface="Microsoft JhengHei" panose="020B0604030504040204" pitchFamily="34" charset="-120"/>
+                        </a:rPr>
+                        <a:t>取得資料或提交設定</a:t>
+                      </a:r>
+                    </a:p>
+                  </a:txBody>
+                  <a:tcPr marL="81480" marR="81480" marT="37606" marB="37606" anchor="ctr">
+                    <a:lnL w="9525" cap="flat" cmpd="sng" algn="ctr">
+                      <a:solidFill>
+                        <a:srgbClr val="D6D6D6"/>
+                      </a:solidFill>
+                      <a:prstDash val="solid"/>
+                      <a:round/>
+                      <a:headEnd type="none" w="med" len="med"/>
+                      <a:tailEnd type="none" w="med" len="med"/>
+                    </a:lnL>
+                    <a:lnR w="9525" cap="flat" cmpd="sng" algn="ctr">
+                      <a:solidFill>
+                        <a:srgbClr val="D6D6D6"/>
+                      </a:solidFill>
+                      <a:prstDash val="solid"/>
+                      <a:round/>
+                      <a:headEnd type="none" w="med" len="med"/>
+                      <a:tailEnd type="none" w="med" len="med"/>
+                    </a:lnR>
+                    <a:lnT w="9525" cap="flat" cmpd="sng" algn="ctr">
+                      <a:solidFill>
+                        <a:srgbClr val="D6D6D6"/>
+                      </a:solidFill>
+                      <a:prstDash val="solid"/>
+                      <a:round/>
+                      <a:headEnd type="none" w="med" len="med"/>
+                      <a:tailEnd type="none" w="med" len="med"/>
+                    </a:lnT>
+                    <a:lnB w="9525" cap="flat" cmpd="sng" algn="ctr">
+                      <a:solidFill>
+                        <a:srgbClr val="D6D6D6"/>
+                      </a:solidFill>
+                      <a:prstDash val="solid"/>
+                      <a:round/>
+                      <a:headEnd type="none" w="med" len="med"/>
+                      <a:tailEnd type="none" w="med" len="med"/>
+                    </a:lnB>
+                    <a:solidFill>
+                      <a:srgbClr val="FFFFFF"/>
+                    </a:solidFill>
+                  </a:tcPr>
+                </a:tc>
+                <a:extLst>
+                  <a:ext uri="{0D108BD9-81ED-4DB2-BD59-A6C34878D82A}">
+                    <a16:rowId xmlns:a16="http://schemas.microsoft.com/office/drawing/2014/main" val="208288365"/>
+                  </a:ext>
+                </a:extLst>
+              </a:tr>
+              <a:tr h="299067">
+                <a:tc>
+                  <a:txBody>
+                    <a:bodyPr/>
+                    <a:lstStyle/>
+                    <a:p>
+                      <a:pPr>
+                        <a:buNone/>
+                      </a:pPr>
+                      <a:r>
+                        <a:rPr lang="zh-TW" altLang="en-US" sz="1200" dirty="0">
+                          <a:effectLst/>
+                          <a:latin typeface="Microsoft JhengHei" panose="020B0604030504040204" pitchFamily="34" charset="-120"/>
+                          <a:ea typeface="Microsoft JhengHei" panose="020B0604030504040204" pitchFamily="34" charset="-120"/>
+                        </a:rPr>
+                        <a:t>資料擷取</a:t>
+                      </a:r>
+                    </a:p>
+                  </a:txBody>
+                  <a:tcPr marL="81480" marR="81480" marT="37606" marB="37606" anchor="ctr">
+                    <a:lnL w="9525" cap="flat" cmpd="sng" algn="ctr">
+                      <a:solidFill>
+                        <a:srgbClr val="D6D6D6"/>
+                      </a:solidFill>
+                      <a:prstDash val="solid"/>
+                      <a:round/>
+                      <a:headEnd type="none" w="med" len="med"/>
+                      <a:tailEnd type="none" w="med" len="med"/>
+                    </a:lnL>
+                    <a:lnR w="9525" cap="flat" cmpd="sng" algn="ctr">
+                      <a:solidFill>
+                        <a:srgbClr val="D6D6D6"/>
+                      </a:solidFill>
+                      <a:prstDash val="solid"/>
+                      <a:round/>
+                      <a:headEnd type="none" w="med" len="med"/>
+                      <a:tailEnd type="none" w="med" len="med"/>
+                    </a:lnR>
+                    <a:lnT w="9525" cap="flat" cmpd="sng" algn="ctr">
+                      <a:solidFill>
+                        <a:srgbClr val="D6D6D6"/>
+                      </a:solidFill>
+                      <a:prstDash val="solid"/>
+                      <a:round/>
+                      <a:headEnd type="none" w="med" len="med"/>
+                      <a:tailEnd type="none" w="med" len="med"/>
+                    </a:lnT>
+                    <a:lnB w="9525" cap="flat" cmpd="sng" algn="ctr">
+                      <a:solidFill>
+                        <a:srgbClr val="D6D6D6"/>
+                      </a:solidFill>
+                      <a:prstDash val="solid"/>
+                      <a:round/>
+                      <a:headEnd type="none" w="med" len="med"/>
+                      <a:tailEnd type="none" w="med" len="med"/>
+                    </a:lnB>
+                    <a:solidFill>
+                      <a:srgbClr val="FFFFFF"/>
+                    </a:solidFill>
+                  </a:tcPr>
+                </a:tc>
+                <a:tc>
+                  <a:txBody>
+                    <a:bodyPr/>
+                    <a:lstStyle/>
+                    <a:p>
+                      <a:pPr>
+                        <a:buNone/>
+                      </a:pPr>
+                      <a:r>
+                        <a:rPr lang="en" sz="1200" dirty="0">
+                          <a:effectLst/>
+                          <a:latin typeface="Microsoft JhengHei" panose="020B0604030504040204" pitchFamily="34" charset="-120"/>
+                          <a:ea typeface="Microsoft JhengHei" panose="020B0604030504040204" pitchFamily="34" charset="-120"/>
+                        </a:rPr>
+                        <a:t>Data Sources → </a:t>
+                      </a:r>
+                      <a:r>
+                        <a:rPr lang="en" sz="1200" dirty="0" err="1">
+                          <a:effectLst/>
+                          <a:latin typeface="Microsoft JhengHei" panose="020B0604030504040204" pitchFamily="34" charset="-120"/>
+                          <a:ea typeface="Microsoft JhengHei" panose="020B0604030504040204" pitchFamily="34" charset="-120"/>
+                        </a:rPr>
+                        <a:t>InfoGather</a:t>
+                      </a:r>
+                      <a:r>
+                        <a:rPr lang="en" sz="1200" dirty="0">
+                          <a:effectLst/>
+                          <a:latin typeface="Microsoft JhengHei" panose="020B0604030504040204" pitchFamily="34" charset="-120"/>
+                          <a:ea typeface="Microsoft JhengHei" panose="020B0604030504040204" pitchFamily="34" charset="-120"/>
+                        </a:rPr>
+                        <a:t> API / Scheduler</a:t>
+                      </a:r>
+                    </a:p>
+                  </a:txBody>
+                  <a:tcPr marL="81480" marR="81480" marT="37606" marB="37606" anchor="ctr">
+                    <a:lnL w="9525" cap="flat" cmpd="sng" algn="ctr">
+                      <a:solidFill>
+                        <a:srgbClr val="D6D6D6"/>
+                      </a:solidFill>
+                      <a:prstDash val="solid"/>
+                      <a:round/>
+                      <a:headEnd type="none" w="med" len="med"/>
+                      <a:tailEnd type="none" w="med" len="med"/>
+                    </a:lnL>
+                    <a:lnR w="9525" cap="flat" cmpd="sng" algn="ctr">
+                      <a:solidFill>
+                        <a:srgbClr val="D6D6D6"/>
+                      </a:solidFill>
+                      <a:prstDash val="solid"/>
+                      <a:round/>
+                      <a:headEnd type="none" w="med" len="med"/>
+                      <a:tailEnd type="none" w="med" len="med"/>
+                    </a:lnR>
+                    <a:lnT w="9525" cap="flat" cmpd="sng" algn="ctr">
+                      <a:solidFill>
+                        <a:srgbClr val="D6D6D6"/>
+                      </a:solidFill>
+                      <a:prstDash val="solid"/>
+                      <a:round/>
+                      <a:headEnd type="none" w="med" len="med"/>
+                      <a:tailEnd type="none" w="med" len="med"/>
+                    </a:lnT>
+                    <a:lnB w="9525" cap="flat" cmpd="sng" algn="ctr">
+                      <a:solidFill>
+                        <a:srgbClr val="D6D6D6"/>
+                      </a:solidFill>
+                      <a:prstDash val="solid"/>
+                      <a:round/>
+                      <a:headEnd type="none" w="med" len="med"/>
+                      <a:tailEnd type="none" w="med" len="med"/>
+                    </a:lnB>
+                    <a:solidFill>
+                      <a:srgbClr val="FFFFFF"/>
+                    </a:solidFill>
+                  </a:tcPr>
+                </a:tc>
+                <a:tc>
+                  <a:txBody>
+                    <a:bodyPr/>
+                    <a:lstStyle/>
+                    <a:p>
+                      <a:pPr>
+                        <a:buNone/>
+                      </a:pPr>
+                      <a:r>
+                        <a:rPr lang="zh-TW" altLang="en-US" sz="1200">
+                          <a:effectLst/>
+                          <a:latin typeface="Microsoft JhengHei" panose="020B0604030504040204" pitchFamily="34" charset="-120"/>
+                          <a:ea typeface="Microsoft JhengHei" panose="020B0604030504040204" pitchFamily="34" charset="-120"/>
+                        </a:rPr>
+                        <a:t>外部來源提供文章與資料，系統定期拉取</a:t>
+                      </a:r>
+                    </a:p>
+                  </a:txBody>
+                  <a:tcPr marL="81480" marR="81480" marT="37606" marB="37606" anchor="ctr">
+                    <a:lnL w="9525" cap="flat" cmpd="sng" algn="ctr">
+                      <a:solidFill>
+                        <a:srgbClr val="D6D6D6"/>
+                      </a:solidFill>
+                      <a:prstDash val="solid"/>
+                      <a:round/>
+                      <a:headEnd type="none" w="med" len="med"/>
+                      <a:tailEnd type="none" w="med" len="med"/>
+                    </a:lnL>
+                    <a:lnR w="9525" cap="flat" cmpd="sng" algn="ctr">
+                      <a:solidFill>
+                        <a:srgbClr val="D6D6D6"/>
+                      </a:solidFill>
+                      <a:prstDash val="solid"/>
+                      <a:round/>
+                      <a:headEnd type="none" w="med" len="med"/>
+                      <a:tailEnd type="none" w="med" len="med"/>
+                    </a:lnR>
+                    <a:lnT w="9525" cap="flat" cmpd="sng" algn="ctr">
+                      <a:solidFill>
+                        <a:srgbClr val="D6D6D6"/>
+                      </a:solidFill>
+                      <a:prstDash val="solid"/>
+                      <a:round/>
+                      <a:headEnd type="none" w="med" len="med"/>
+                      <a:tailEnd type="none" w="med" len="med"/>
+                    </a:lnT>
+                    <a:lnB w="9525" cap="flat" cmpd="sng" algn="ctr">
+                      <a:solidFill>
+                        <a:srgbClr val="D6D6D6"/>
+                      </a:solidFill>
+                      <a:prstDash val="solid"/>
+                      <a:round/>
+                      <a:headEnd type="none" w="med" len="med"/>
+                      <a:tailEnd type="none" w="med" len="med"/>
+                    </a:lnB>
+                    <a:solidFill>
+                      <a:srgbClr val="FFFFFF"/>
+                    </a:solidFill>
+                  </a:tcPr>
+                </a:tc>
+                <a:extLst>
+                  <a:ext uri="{0D108BD9-81ED-4DB2-BD59-A6C34878D82A}">
+                    <a16:rowId xmlns:a16="http://schemas.microsoft.com/office/drawing/2014/main" val="3654243204"/>
+                  </a:ext>
+                </a:extLst>
+              </a:tr>
+              <a:tr h="279322">
+                <a:tc>
+                  <a:txBody>
+                    <a:bodyPr/>
+                    <a:lstStyle/>
+                    <a:p>
+                      <a:pPr>
+                        <a:buNone/>
+                      </a:pPr>
+                      <a:r>
+                        <a:rPr lang="zh-TW" altLang="en-US" sz="1200" dirty="0">
+                          <a:effectLst/>
+                          <a:latin typeface="Microsoft JhengHei" panose="020B0604030504040204" pitchFamily="34" charset="-120"/>
+                          <a:ea typeface="Microsoft JhengHei" panose="020B0604030504040204" pitchFamily="34" charset="-120"/>
+                        </a:rPr>
+                        <a:t>任務排程</a:t>
+                      </a:r>
+                    </a:p>
+                  </a:txBody>
+                  <a:tcPr marL="81480" marR="81480" marT="37606" marB="37606" anchor="ctr">
+                    <a:lnL w="9525" cap="flat" cmpd="sng" algn="ctr">
+                      <a:solidFill>
+                        <a:srgbClr val="D6D6D6"/>
+                      </a:solidFill>
+                      <a:prstDash val="solid"/>
+                      <a:round/>
+                      <a:headEnd type="none" w="med" len="med"/>
+                      <a:tailEnd type="none" w="med" len="med"/>
+                    </a:lnL>
+                    <a:lnR w="9525" cap="flat" cmpd="sng" algn="ctr">
+                      <a:solidFill>
+                        <a:srgbClr val="D6D6D6"/>
+                      </a:solidFill>
+                      <a:prstDash val="solid"/>
+                      <a:round/>
+                      <a:headEnd type="none" w="med" len="med"/>
+                      <a:tailEnd type="none" w="med" len="med"/>
+                    </a:lnR>
+                    <a:lnT w="9525" cap="flat" cmpd="sng" algn="ctr">
+                      <a:solidFill>
+                        <a:srgbClr val="D6D6D6"/>
+                      </a:solidFill>
+                      <a:prstDash val="solid"/>
+                      <a:round/>
+                      <a:headEnd type="none" w="med" len="med"/>
+                      <a:tailEnd type="none" w="med" len="med"/>
+                    </a:lnT>
+                    <a:lnB w="9525" cap="flat" cmpd="sng" algn="ctr">
+                      <a:solidFill>
+                        <a:srgbClr val="D6D6D6"/>
+                      </a:solidFill>
+                      <a:prstDash val="solid"/>
+                      <a:round/>
+                      <a:headEnd type="none" w="med" len="med"/>
+                      <a:tailEnd type="none" w="med" len="med"/>
+                    </a:lnB>
+                    <a:solidFill>
+                      <a:srgbClr val="FFFFFF"/>
+                    </a:solidFill>
+                  </a:tcPr>
+                </a:tc>
+                <a:tc>
+                  <a:txBody>
+                    <a:bodyPr/>
+                    <a:lstStyle/>
+                    <a:p>
+                      <a:pPr>
+                        <a:buNone/>
+                      </a:pPr>
+                      <a:r>
+                        <a:rPr lang="en" sz="1200" dirty="0">
+                          <a:effectLst/>
+                          <a:latin typeface="Microsoft JhengHei" panose="020B0604030504040204" pitchFamily="34" charset="-120"/>
+                          <a:ea typeface="Microsoft JhengHei" panose="020B0604030504040204" pitchFamily="34" charset="-120"/>
+                        </a:rPr>
+                        <a:t>Scheduler → Redis</a:t>
+                      </a:r>
+                    </a:p>
+                  </a:txBody>
+                  <a:tcPr marL="81480" marR="81480" marT="37606" marB="37606" anchor="ctr">
+                    <a:lnL w="9525" cap="flat" cmpd="sng" algn="ctr">
+                      <a:solidFill>
+                        <a:srgbClr val="D6D6D6"/>
+                      </a:solidFill>
+                      <a:prstDash val="solid"/>
+                      <a:round/>
+                      <a:headEnd type="none" w="med" len="med"/>
+                      <a:tailEnd type="none" w="med" len="med"/>
+                    </a:lnL>
+                    <a:lnR w="9525" cap="flat" cmpd="sng" algn="ctr">
+                      <a:solidFill>
+                        <a:srgbClr val="D6D6D6"/>
+                      </a:solidFill>
+                      <a:prstDash val="solid"/>
+                      <a:round/>
+                      <a:headEnd type="none" w="med" len="med"/>
+                      <a:tailEnd type="none" w="med" len="med"/>
+                    </a:lnR>
+                    <a:lnT w="9525" cap="flat" cmpd="sng" algn="ctr">
+                      <a:solidFill>
+                        <a:srgbClr val="D6D6D6"/>
+                      </a:solidFill>
+                      <a:prstDash val="solid"/>
+                      <a:round/>
+                      <a:headEnd type="none" w="med" len="med"/>
+                      <a:tailEnd type="none" w="med" len="med"/>
+                    </a:lnT>
+                    <a:lnB w="9525" cap="flat" cmpd="sng" algn="ctr">
+                      <a:solidFill>
+                        <a:srgbClr val="D6D6D6"/>
+                      </a:solidFill>
+                      <a:prstDash val="solid"/>
+                      <a:round/>
+                      <a:headEnd type="none" w="med" len="med"/>
+                      <a:tailEnd type="none" w="med" len="med"/>
+                    </a:lnB>
+                    <a:solidFill>
+                      <a:srgbClr val="FFFFFF"/>
+                    </a:solidFill>
+                  </a:tcPr>
+                </a:tc>
+                <a:tc>
+                  <a:txBody>
+                    <a:bodyPr/>
+                    <a:lstStyle/>
+                    <a:p>
+                      <a:pPr>
+                        <a:buNone/>
+                      </a:pPr>
+                      <a:r>
+                        <a:rPr lang="zh-TW" altLang="en-US" sz="1200">
+                          <a:effectLst/>
+                          <a:latin typeface="Microsoft JhengHei" panose="020B0604030504040204" pitchFamily="34" charset="-120"/>
+                          <a:ea typeface="Microsoft JhengHei" panose="020B0604030504040204" pitchFamily="34" charset="-120"/>
+                        </a:rPr>
+                        <a:t>排程器把要執行的工作送進佇列</a:t>
+                      </a:r>
+                    </a:p>
+                  </a:txBody>
+                  <a:tcPr marL="81480" marR="81480" marT="37606" marB="37606" anchor="ctr">
+                    <a:lnL w="9525" cap="flat" cmpd="sng" algn="ctr">
+                      <a:solidFill>
+                        <a:srgbClr val="D6D6D6"/>
+                      </a:solidFill>
+                      <a:prstDash val="solid"/>
+                      <a:round/>
+                      <a:headEnd type="none" w="med" len="med"/>
+                      <a:tailEnd type="none" w="med" len="med"/>
+                    </a:lnL>
+                    <a:lnR w="9525" cap="flat" cmpd="sng" algn="ctr">
+                      <a:solidFill>
+                        <a:srgbClr val="D6D6D6"/>
+                      </a:solidFill>
+                      <a:prstDash val="solid"/>
+                      <a:round/>
+                      <a:headEnd type="none" w="med" len="med"/>
+                      <a:tailEnd type="none" w="med" len="med"/>
+                    </a:lnR>
+                    <a:lnT w="9525" cap="flat" cmpd="sng" algn="ctr">
+                      <a:solidFill>
+                        <a:srgbClr val="D6D6D6"/>
+                      </a:solidFill>
+                      <a:prstDash val="solid"/>
+                      <a:round/>
+                      <a:headEnd type="none" w="med" len="med"/>
+                      <a:tailEnd type="none" w="med" len="med"/>
+                    </a:lnT>
+                    <a:lnB w="9525" cap="flat" cmpd="sng" algn="ctr">
+                      <a:solidFill>
+                        <a:srgbClr val="D6D6D6"/>
+                      </a:solidFill>
+                      <a:prstDash val="solid"/>
+                      <a:round/>
+                      <a:headEnd type="none" w="med" len="med"/>
+                      <a:tailEnd type="none" w="med" len="med"/>
+                    </a:lnB>
+                    <a:solidFill>
+                      <a:srgbClr val="FFFFFF"/>
+                    </a:solidFill>
+                  </a:tcPr>
+                </a:tc>
+                <a:extLst>
+                  <a:ext uri="{0D108BD9-81ED-4DB2-BD59-A6C34878D82A}">
+                    <a16:rowId xmlns:a16="http://schemas.microsoft.com/office/drawing/2014/main" val="3611464877"/>
+                  </a:ext>
+                </a:extLst>
+              </a:tr>
+              <a:tr h="279322">
+                <a:tc>
+                  <a:txBody>
+                    <a:bodyPr/>
+                    <a:lstStyle/>
+                    <a:p>
+                      <a:pPr>
+                        <a:buNone/>
+                      </a:pPr>
+                      <a:r>
+                        <a:rPr lang="zh-TW" altLang="en-US" sz="1200" dirty="0">
+                          <a:effectLst/>
+                          <a:latin typeface="Microsoft JhengHei" panose="020B0604030504040204" pitchFamily="34" charset="-120"/>
+                          <a:ea typeface="Microsoft JhengHei" panose="020B0604030504040204" pitchFamily="34" charset="-120"/>
+                        </a:rPr>
+                        <a:t>背景處理</a:t>
+                      </a:r>
+                    </a:p>
+                  </a:txBody>
+                  <a:tcPr marL="81480" marR="81480" marT="37606" marB="37606" anchor="ctr">
+                    <a:lnL w="9525" cap="flat" cmpd="sng" algn="ctr">
+                      <a:solidFill>
+                        <a:srgbClr val="D6D6D6"/>
+                      </a:solidFill>
+                      <a:prstDash val="solid"/>
+                      <a:round/>
+                      <a:headEnd type="none" w="med" len="med"/>
+                      <a:tailEnd type="none" w="med" len="med"/>
+                    </a:lnL>
+                    <a:lnR w="9525" cap="flat" cmpd="sng" algn="ctr">
+                      <a:solidFill>
+                        <a:srgbClr val="D6D6D6"/>
+                      </a:solidFill>
+                      <a:prstDash val="solid"/>
+                      <a:round/>
+                      <a:headEnd type="none" w="med" len="med"/>
+                      <a:tailEnd type="none" w="med" len="med"/>
+                    </a:lnR>
+                    <a:lnT w="9525" cap="flat" cmpd="sng" algn="ctr">
+                      <a:solidFill>
+                        <a:srgbClr val="D6D6D6"/>
+                      </a:solidFill>
+                      <a:prstDash val="solid"/>
+                      <a:round/>
+                      <a:headEnd type="none" w="med" len="med"/>
+                      <a:tailEnd type="none" w="med" len="med"/>
+                    </a:lnT>
+                    <a:lnB w="9525" cap="flat" cmpd="sng" algn="ctr">
+                      <a:solidFill>
+                        <a:srgbClr val="D6D6D6"/>
+                      </a:solidFill>
+                      <a:prstDash val="solid"/>
+                      <a:round/>
+                      <a:headEnd type="none" w="med" len="med"/>
+                      <a:tailEnd type="none" w="med" len="med"/>
+                    </a:lnB>
+                    <a:solidFill>
+                      <a:srgbClr val="FFFFFF"/>
+                    </a:solidFill>
+                  </a:tcPr>
+                </a:tc>
+                <a:tc>
+                  <a:txBody>
+                    <a:bodyPr/>
+                    <a:lstStyle/>
+                    <a:p>
+                      <a:pPr>
+                        <a:buNone/>
+                      </a:pPr>
+                      <a:r>
+                        <a:rPr lang="en" sz="1200" dirty="0">
+                          <a:effectLst/>
+                          <a:latin typeface="Microsoft JhengHei" panose="020B0604030504040204" pitchFamily="34" charset="-120"/>
+                          <a:ea typeface="Microsoft JhengHei" panose="020B0604030504040204" pitchFamily="34" charset="-120"/>
+                        </a:rPr>
+                        <a:t>Workers ← Redis</a:t>
+                      </a:r>
+                    </a:p>
+                  </a:txBody>
+                  <a:tcPr marL="81480" marR="81480" marT="37606" marB="37606" anchor="ctr">
+                    <a:lnL w="9525" cap="flat" cmpd="sng" algn="ctr">
+                      <a:solidFill>
+                        <a:srgbClr val="D6D6D6"/>
+                      </a:solidFill>
+                      <a:prstDash val="solid"/>
+                      <a:round/>
+                      <a:headEnd type="none" w="med" len="med"/>
+                      <a:tailEnd type="none" w="med" len="med"/>
+                    </a:lnL>
+                    <a:lnR w="9525" cap="flat" cmpd="sng" algn="ctr">
+                      <a:solidFill>
+                        <a:srgbClr val="D6D6D6"/>
+                      </a:solidFill>
+                      <a:prstDash val="solid"/>
+                      <a:round/>
+                      <a:headEnd type="none" w="med" len="med"/>
+                      <a:tailEnd type="none" w="med" len="med"/>
+                    </a:lnR>
+                    <a:lnT w="9525" cap="flat" cmpd="sng" algn="ctr">
+                      <a:solidFill>
+                        <a:srgbClr val="D6D6D6"/>
+                      </a:solidFill>
+                      <a:prstDash val="solid"/>
+                      <a:round/>
+                      <a:headEnd type="none" w="med" len="med"/>
+                      <a:tailEnd type="none" w="med" len="med"/>
+                    </a:lnT>
+                    <a:lnB w="9525" cap="flat" cmpd="sng" algn="ctr">
+                      <a:solidFill>
+                        <a:srgbClr val="D6D6D6"/>
+                      </a:solidFill>
+                      <a:prstDash val="solid"/>
+                      <a:round/>
+                      <a:headEnd type="none" w="med" len="med"/>
+                      <a:tailEnd type="none" w="med" len="med"/>
+                    </a:lnB>
+                    <a:solidFill>
+                      <a:srgbClr val="FFFFFF"/>
+                    </a:solidFill>
+                  </a:tcPr>
+                </a:tc>
+                <a:tc>
+                  <a:txBody>
+                    <a:bodyPr/>
+                    <a:lstStyle/>
+                    <a:p>
+                      <a:pPr>
+                        <a:buNone/>
+                      </a:pPr>
+                      <a:r>
+                        <a:rPr lang="en" sz="1200" dirty="0">
+                          <a:effectLst/>
+                          <a:latin typeface="Microsoft JhengHei" panose="020B0604030504040204" pitchFamily="34" charset="-120"/>
+                          <a:ea typeface="Microsoft JhengHei" panose="020B0604030504040204" pitchFamily="34" charset="-120"/>
+                        </a:rPr>
+                        <a:t>Workers </a:t>
+                      </a:r>
+                      <a:r>
+                        <a:rPr lang="zh-TW" altLang="en-US" sz="1200" dirty="0">
+                          <a:effectLst/>
+                          <a:latin typeface="Microsoft JhengHei" panose="020B0604030504040204" pitchFamily="34" charset="-120"/>
+                          <a:ea typeface="Microsoft JhengHei" panose="020B0604030504040204" pitchFamily="34" charset="-120"/>
+                        </a:rPr>
+                        <a:t>從佇列取出任務進行處理</a:t>
+                      </a:r>
+                    </a:p>
+                  </a:txBody>
+                  <a:tcPr marL="81480" marR="81480" marT="37606" marB="37606" anchor="ctr">
+                    <a:lnL w="9525" cap="flat" cmpd="sng" algn="ctr">
+                      <a:solidFill>
+                        <a:srgbClr val="D6D6D6"/>
+                      </a:solidFill>
+                      <a:prstDash val="solid"/>
+                      <a:round/>
+                      <a:headEnd type="none" w="med" len="med"/>
+                      <a:tailEnd type="none" w="med" len="med"/>
+                    </a:lnL>
+                    <a:lnR w="9525" cap="flat" cmpd="sng" algn="ctr">
+                      <a:solidFill>
+                        <a:srgbClr val="D6D6D6"/>
+                      </a:solidFill>
+                      <a:prstDash val="solid"/>
+                      <a:round/>
+                      <a:headEnd type="none" w="med" len="med"/>
+                      <a:tailEnd type="none" w="med" len="med"/>
+                    </a:lnR>
+                    <a:lnT w="9525" cap="flat" cmpd="sng" algn="ctr">
+                      <a:solidFill>
+                        <a:srgbClr val="D6D6D6"/>
+                      </a:solidFill>
+                      <a:prstDash val="solid"/>
+                      <a:round/>
+                      <a:headEnd type="none" w="med" len="med"/>
+                      <a:tailEnd type="none" w="med" len="med"/>
+                    </a:lnT>
+                    <a:lnB w="9525" cap="flat" cmpd="sng" algn="ctr">
+                      <a:solidFill>
+                        <a:srgbClr val="D6D6D6"/>
+                      </a:solidFill>
+                      <a:prstDash val="solid"/>
+                      <a:round/>
+                      <a:headEnd type="none" w="med" len="med"/>
+                      <a:tailEnd type="none" w="med" len="med"/>
+                    </a:lnB>
+                    <a:solidFill>
+                      <a:srgbClr val="FFFFFF"/>
+                    </a:solidFill>
+                  </a:tcPr>
+                </a:tc>
+                <a:extLst>
+                  <a:ext uri="{0D108BD9-81ED-4DB2-BD59-A6C34878D82A}">
+                    <a16:rowId xmlns:a16="http://schemas.microsoft.com/office/drawing/2014/main" val="608356233"/>
+                  </a:ext>
+                </a:extLst>
+              </a:tr>
+              <a:tr h="279322">
+                <a:tc>
+                  <a:txBody>
+                    <a:bodyPr/>
+                    <a:lstStyle/>
+                    <a:p>
+                      <a:pPr>
+                        <a:buNone/>
+                      </a:pPr>
+                      <a:r>
+                        <a:rPr lang="zh-TW" altLang="en-US" sz="1200" dirty="0">
+                          <a:effectLst/>
+                          <a:latin typeface="Microsoft JhengHei" panose="020B0604030504040204" pitchFamily="34" charset="-120"/>
+                          <a:ea typeface="Microsoft JhengHei" panose="020B0604030504040204" pitchFamily="34" charset="-120"/>
+                        </a:rPr>
+                        <a:t>資料持久化</a:t>
+                      </a:r>
+                    </a:p>
+                  </a:txBody>
+                  <a:tcPr marL="81480" marR="81480" marT="37606" marB="37606" anchor="ctr">
+                    <a:lnL w="9525" cap="flat" cmpd="sng" algn="ctr">
+                      <a:solidFill>
+                        <a:srgbClr val="D6D6D6"/>
+                      </a:solidFill>
+                      <a:prstDash val="solid"/>
+                      <a:round/>
+                      <a:headEnd type="none" w="med" len="med"/>
+                      <a:tailEnd type="none" w="med" len="med"/>
+                    </a:lnL>
+                    <a:lnR w="9525" cap="flat" cmpd="sng" algn="ctr">
+                      <a:solidFill>
+                        <a:srgbClr val="D6D6D6"/>
+                      </a:solidFill>
+                      <a:prstDash val="solid"/>
+                      <a:round/>
+                      <a:headEnd type="none" w="med" len="med"/>
+                      <a:tailEnd type="none" w="med" len="med"/>
+                    </a:lnR>
+                    <a:lnT w="9525" cap="flat" cmpd="sng" algn="ctr">
+                      <a:solidFill>
+                        <a:srgbClr val="D6D6D6"/>
+                      </a:solidFill>
+                      <a:prstDash val="solid"/>
+                      <a:round/>
+                      <a:headEnd type="none" w="med" len="med"/>
+                      <a:tailEnd type="none" w="med" len="med"/>
+                    </a:lnT>
+                    <a:lnB w="9525" cap="flat" cmpd="sng" algn="ctr">
+                      <a:solidFill>
+                        <a:srgbClr val="D6D6D6"/>
+                      </a:solidFill>
+                      <a:prstDash val="solid"/>
+                      <a:round/>
+                      <a:headEnd type="none" w="med" len="med"/>
+                      <a:tailEnd type="none" w="med" len="med"/>
+                    </a:lnB>
+                    <a:solidFill>
+                      <a:srgbClr val="FFFFFF"/>
+                    </a:solidFill>
+                  </a:tcPr>
+                </a:tc>
+                <a:tc>
+                  <a:txBody>
+                    <a:bodyPr/>
+                    <a:lstStyle/>
+                    <a:p>
+                      <a:pPr>
+                        <a:buNone/>
+                      </a:pPr>
+                      <a:r>
+                        <a:rPr lang="en" sz="1200" dirty="0" err="1">
+                          <a:effectLst/>
+                          <a:latin typeface="Microsoft JhengHei" panose="020B0604030504040204" pitchFamily="34" charset="-120"/>
+                          <a:ea typeface="Microsoft JhengHei" panose="020B0604030504040204" pitchFamily="34" charset="-120"/>
+                        </a:rPr>
+                        <a:t>InfoGather</a:t>
+                      </a:r>
+                      <a:r>
+                        <a:rPr lang="en" sz="1200" dirty="0">
+                          <a:effectLst/>
+                          <a:latin typeface="Microsoft JhengHei" panose="020B0604030504040204" pitchFamily="34" charset="-120"/>
+                          <a:ea typeface="Microsoft JhengHei" panose="020B0604030504040204" pitchFamily="34" charset="-120"/>
+                        </a:rPr>
+                        <a:t> API / Workers → MongoDB</a:t>
+                      </a:r>
+                    </a:p>
+                  </a:txBody>
+                  <a:tcPr marL="81480" marR="81480" marT="37606" marB="37606" anchor="ctr">
+                    <a:lnL w="9525" cap="flat" cmpd="sng" algn="ctr">
+                      <a:solidFill>
+                        <a:srgbClr val="D6D6D6"/>
+                      </a:solidFill>
+                      <a:prstDash val="solid"/>
+                      <a:round/>
+                      <a:headEnd type="none" w="med" len="med"/>
+                      <a:tailEnd type="none" w="med" len="med"/>
+                    </a:lnL>
+                    <a:lnR w="9525" cap="flat" cmpd="sng" algn="ctr">
+                      <a:solidFill>
+                        <a:srgbClr val="D6D6D6"/>
+                      </a:solidFill>
+                      <a:prstDash val="solid"/>
+                      <a:round/>
+                      <a:headEnd type="none" w="med" len="med"/>
+                      <a:tailEnd type="none" w="med" len="med"/>
+                    </a:lnR>
+                    <a:lnT w="9525" cap="flat" cmpd="sng" algn="ctr">
+                      <a:solidFill>
+                        <a:srgbClr val="D6D6D6"/>
+                      </a:solidFill>
+                      <a:prstDash val="solid"/>
+                      <a:round/>
+                      <a:headEnd type="none" w="med" len="med"/>
+                      <a:tailEnd type="none" w="med" len="med"/>
+                    </a:lnT>
+                    <a:lnB w="9525" cap="flat" cmpd="sng" algn="ctr">
+                      <a:solidFill>
+                        <a:srgbClr val="D6D6D6"/>
+                      </a:solidFill>
+                      <a:prstDash val="solid"/>
+                      <a:round/>
+                      <a:headEnd type="none" w="med" len="med"/>
+                      <a:tailEnd type="none" w="med" len="med"/>
+                    </a:lnB>
+                    <a:solidFill>
+                      <a:srgbClr val="FFFFFF"/>
+                    </a:solidFill>
+                  </a:tcPr>
+                </a:tc>
+                <a:tc>
+                  <a:txBody>
+                    <a:bodyPr/>
+                    <a:lstStyle/>
+                    <a:p>
+                      <a:pPr>
+                        <a:buNone/>
+                      </a:pPr>
+                      <a:r>
+                        <a:rPr lang="en" sz="1200">
+                          <a:effectLst/>
+                          <a:latin typeface="Microsoft JhengHei" panose="020B0604030504040204" pitchFamily="34" charset="-120"/>
+                          <a:ea typeface="Microsoft JhengHei" panose="020B0604030504040204" pitchFamily="34" charset="-120"/>
+                        </a:rPr>
+                        <a:t>API </a:t>
+                      </a:r>
+                      <a:r>
+                        <a:rPr lang="zh-TW" altLang="en-US" sz="1200">
+                          <a:effectLst/>
+                          <a:latin typeface="Microsoft JhengHei" panose="020B0604030504040204" pitchFamily="34" charset="-120"/>
+                          <a:ea typeface="Microsoft JhengHei" panose="020B0604030504040204" pitchFamily="34" charset="-120"/>
+                        </a:rPr>
+                        <a:t>與背景工作把結果存入資料庫</a:t>
+                      </a:r>
+                    </a:p>
+                  </a:txBody>
+                  <a:tcPr marL="81480" marR="81480" marT="37606" marB="37606" anchor="ctr">
+                    <a:lnL w="9525" cap="flat" cmpd="sng" algn="ctr">
+                      <a:solidFill>
+                        <a:srgbClr val="D6D6D6"/>
+                      </a:solidFill>
+                      <a:prstDash val="solid"/>
+                      <a:round/>
+                      <a:headEnd type="none" w="med" len="med"/>
+                      <a:tailEnd type="none" w="med" len="med"/>
+                    </a:lnL>
+                    <a:lnR w="9525" cap="flat" cmpd="sng" algn="ctr">
+                      <a:solidFill>
+                        <a:srgbClr val="D6D6D6"/>
+                      </a:solidFill>
+                      <a:prstDash val="solid"/>
+                      <a:round/>
+                      <a:headEnd type="none" w="med" len="med"/>
+                      <a:tailEnd type="none" w="med" len="med"/>
+                    </a:lnR>
+                    <a:lnT w="9525" cap="flat" cmpd="sng" algn="ctr">
+                      <a:solidFill>
+                        <a:srgbClr val="D6D6D6"/>
+                      </a:solidFill>
+                      <a:prstDash val="solid"/>
+                      <a:round/>
+                      <a:headEnd type="none" w="med" len="med"/>
+                      <a:tailEnd type="none" w="med" len="med"/>
+                    </a:lnT>
+                    <a:lnB w="9525" cap="flat" cmpd="sng" algn="ctr">
+                      <a:solidFill>
+                        <a:srgbClr val="D6D6D6"/>
+                      </a:solidFill>
+                      <a:prstDash val="solid"/>
+                      <a:round/>
+                      <a:headEnd type="none" w="med" len="med"/>
+                      <a:tailEnd type="none" w="med" len="med"/>
+                    </a:lnB>
+                    <a:solidFill>
+                      <a:srgbClr val="FFFFFF"/>
+                    </a:solidFill>
+                  </a:tcPr>
+                </a:tc>
+                <a:extLst>
+                  <a:ext uri="{0D108BD9-81ED-4DB2-BD59-A6C34878D82A}">
+                    <a16:rowId xmlns:a16="http://schemas.microsoft.com/office/drawing/2014/main" val="2915300688"/>
+                  </a:ext>
+                </a:extLst>
+              </a:tr>
+              <a:tr h="365003">
+                <a:tc>
+                  <a:txBody>
+                    <a:bodyPr/>
+                    <a:lstStyle/>
+                    <a:p>
+                      <a:pPr>
+                        <a:buNone/>
+                      </a:pPr>
+                      <a:r>
+                        <a:rPr lang="en" sz="1200" dirty="0">
+                          <a:effectLst/>
+                          <a:latin typeface="Microsoft JhengHei" panose="020B0604030504040204" pitchFamily="34" charset="-120"/>
+                          <a:ea typeface="Microsoft JhengHei" panose="020B0604030504040204" pitchFamily="34" charset="-120"/>
+                        </a:rPr>
+                        <a:t>AI </a:t>
+                      </a:r>
+                      <a:r>
+                        <a:rPr lang="zh-TW" altLang="en-US" sz="1200" dirty="0">
+                          <a:effectLst/>
+                          <a:latin typeface="Microsoft JhengHei" panose="020B0604030504040204" pitchFamily="34" charset="-120"/>
+                          <a:ea typeface="Microsoft JhengHei" panose="020B0604030504040204" pitchFamily="34" charset="-120"/>
+                        </a:rPr>
+                        <a:t>能力呼叫</a:t>
+                      </a:r>
+                    </a:p>
+                  </a:txBody>
+                  <a:tcPr marL="81480" marR="81480" marT="37606" marB="37606" anchor="ctr">
+                    <a:lnL w="9525" cap="flat" cmpd="sng" algn="ctr">
+                      <a:solidFill>
+                        <a:srgbClr val="D6D6D6"/>
+                      </a:solidFill>
+                      <a:prstDash val="solid"/>
+                      <a:round/>
+                      <a:headEnd type="none" w="med" len="med"/>
+                      <a:tailEnd type="none" w="med" len="med"/>
+                    </a:lnL>
+                    <a:lnR w="9525" cap="flat" cmpd="sng" algn="ctr">
+                      <a:solidFill>
+                        <a:srgbClr val="D6D6D6"/>
+                      </a:solidFill>
+                      <a:prstDash val="solid"/>
+                      <a:round/>
+                      <a:headEnd type="none" w="med" len="med"/>
+                      <a:tailEnd type="none" w="med" len="med"/>
+                    </a:lnR>
+                    <a:lnT w="9525" cap="flat" cmpd="sng" algn="ctr">
+                      <a:solidFill>
+                        <a:srgbClr val="D6D6D6"/>
+                      </a:solidFill>
+                      <a:prstDash val="solid"/>
+                      <a:round/>
+                      <a:headEnd type="none" w="med" len="med"/>
+                      <a:tailEnd type="none" w="med" len="med"/>
+                    </a:lnT>
+                    <a:lnB w="9525" cap="flat" cmpd="sng" algn="ctr">
+                      <a:solidFill>
+                        <a:srgbClr val="D6D6D6"/>
+                      </a:solidFill>
+                      <a:prstDash val="solid"/>
+                      <a:round/>
+                      <a:headEnd type="none" w="med" len="med"/>
+                      <a:tailEnd type="none" w="med" len="med"/>
+                    </a:lnB>
+                    <a:solidFill>
+                      <a:srgbClr val="FFFFFF"/>
+                    </a:solidFill>
+                  </a:tcPr>
+                </a:tc>
+                <a:tc>
+                  <a:txBody>
+                    <a:bodyPr/>
+                    <a:lstStyle/>
+                    <a:p>
+                      <a:pPr>
+                        <a:buNone/>
+                      </a:pPr>
+                      <a:r>
+                        <a:rPr lang="en" sz="1200" dirty="0" err="1">
+                          <a:effectLst/>
+                          <a:latin typeface="Microsoft JhengHei" panose="020B0604030504040204" pitchFamily="34" charset="-120"/>
+                          <a:ea typeface="Microsoft JhengHei" panose="020B0604030504040204" pitchFamily="34" charset="-120"/>
+                        </a:rPr>
+                        <a:t>InfoGather</a:t>
+                      </a:r>
+                      <a:r>
+                        <a:rPr lang="en" sz="1200" dirty="0">
+                          <a:effectLst/>
+                          <a:latin typeface="Microsoft JhengHei" panose="020B0604030504040204" pitchFamily="34" charset="-120"/>
+                          <a:ea typeface="Microsoft JhengHei" panose="020B0604030504040204" pitchFamily="34" charset="-120"/>
+                        </a:rPr>
+                        <a:t> API</a:t>
+                      </a:r>
+                      <a:r>
+                        <a:rPr lang="en" altLang="zh-TW" sz="1200" dirty="0">
+                          <a:effectLst/>
+                          <a:latin typeface="Microsoft JhengHei" panose="020B0604030504040204" pitchFamily="34" charset="-120"/>
+                          <a:ea typeface="Microsoft JhengHei" panose="020B0604030504040204" pitchFamily="34" charset="-120"/>
+                        </a:rPr>
+                        <a:t> / Workers</a:t>
+                      </a:r>
+                      <a:r>
+                        <a:rPr lang="en" sz="1200" dirty="0">
+                          <a:effectLst/>
+                          <a:latin typeface="Microsoft JhengHei" panose="020B0604030504040204" pitchFamily="34" charset="-120"/>
+                          <a:ea typeface="Microsoft JhengHei" panose="020B0604030504040204" pitchFamily="34" charset="-120"/>
+                        </a:rPr>
+                        <a:t> → Copilot CLI Server → LLM Providers</a:t>
+                      </a:r>
+                    </a:p>
+                  </a:txBody>
+                  <a:tcPr marL="81480" marR="81480" marT="37606" marB="37606" anchor="ctr">
+                    <a:lnL w="9525" cap="flat" cmpd="sng" algn="ctr">
+                      <a:solidFill>
+                        <a:srgbClr val="D6D6D6"/>
+                      </a:solidFill>
+                      <a:prstDash val="solid"/>
+                      <a:round/>
+                      <a:headEnd type="none" w="med" len="med"/>
+                      <a:tailEnd type="none" w="med" len="med"/>
+                    </a:lnL>
+                    <a:lnR w="9525" cap="flat" cmpd="sng" algn="ctr">
+                      <a:solidFill>
+                        <a:srgbClr val="D6D6D6"/>
+                      </a:solidFill>
+                      <a:prstDash val="solid"/>
+                      <a:round/>
+                      <a:headEnd type="none" w="med" len="med"/>
+                      <a:tailEnd type="none" w="med" len="med"/>
+                    </a:lnR>
+                    <a:lnT w="9525" cap="flat" cmpd="sng" algn="ctr">
+                      <a:solidFill>
+                        <a:srgbClr val="D6D6D6"/>
+                      </a:solidFill>
+                      <a:prstDash val="solid"/>
+                      <a:round/>
+                      <a:headEnd type="none" w="med" len="med"/>
+                      <a:tailEnd type="none" w="med" len="med"/>
+                    </a:lnT>
+                    <a:lnB w="9525" cap="flat" cmpd="sng" algn="ctr">
+                      <a:solidFill>
+                        <a:srgbClr val="D6D6D6"/>
+                      </a:solidFill>
+                      <a:prstDash val="solid"/>
+                      <a:round/>
+                      <a:headEnd type="none" w="med" len="med"/>
+                      <a:tailEnd type="none" w="med" len="med"/>
+                    </a:lnB>
+                    <a:solidFill>
+                      <a:srgbClr val="FFFFFF"/>
+                    </a:solidFill>
+                  </a:tcPr>
+                </a:tc>
+                <a:tc>
+                  <a:txBody>
+                    <a:bodyPr/>
+                    <a:lstStyle/>
+                    <a:p>
+                      <a:pPr>
+                        <a:buNone/>
+                      </a:pPr>
+                      <a:r>
+                        <a:rPr lang="zh-TW" altLang="en-US" sz="1200" dirty="0">
+                          <a:effectLst/>
+                          <a:latin typeface="Microsoft JhengHei" panose="020B0604030504040204" pitchFamily="34" charset="-120"/>
+                          <a:ea typeface="Microsoft JhengHei" panose="020B0604030504040204" pitchFamily="34" charset="-120"/>
+                        </a:rPr>
+                        <a:t>後端透過 </a:t>
+                      </a:r>
+                      <a:r>
+                        <a:rPr lang="en" sz="1200" dirty="0">
+                          <a:effectLst/>
+                          <a:latin typeface="Microsoft JhengHei" panose="020B0604030504040204" pitchFamily="34" charset="-120"/>
+                          <a:ea typeface="Microsoft JhengHei" panose="020B0604030504040204" pitchFamily="34" charset="-120"/>
+                        </a:rPr>
+                        <a:t>Copilot CLI Server </a:t>
+                      </a:r>
+                      <a:r>
+                        <a:rPr lang="zh-TW" altLang="en-US" sz="1200" dirty="0">
+                          <a:effectLst/>
+                          <a:latin typeface="Microsoft JhengHei" panose="020B0604030504040204" pitchFamily="34" charset="-120"/>
+                          <a:ea typeface="Microsoft JhengHei" panose="020B0604030504040204" pitchFamily="34" charset="-120"/>
+                        </a:rPr>
+                        <a:t>呼叫模型完成分析與生成</a:t>
+                      </a:r>
+                    </a:p>
+                  </a:txBody>
+                  <a:tcPr marL="81480" marR="81480" marT="37606" marB="37606" anchor="ctr">
+                    <a:lnL w="9525" cap="flat" cmpd="sng" algn="ctr">
+                      <a:solidFill>
+                        <a:srgbClr val="D6D6D6"/>
+                      </a:solidFill>
+                      <a:prstDash val="solid"/>
+                      <a:round/>
+                      <a:headEnd type="none" w="med" len="med"/>
+                      <a:tailEnd type="none" w="med" len="med"/>
+                    </a:lnL>
+                    <a:lnR w="9525" cap="flat" cmpd="sng" algn="ctr">
+                      <a:solidFill>
+                        <a:srgbClr val="D6D6D6"/>
+                      </a:solidFill>
+                      <a:prstDash val="solid"/>
+                      <a:round/>
+                      <a:headEnd type="none" w="med" len="med"/>
+                      <a:tailEnd type="none" w="med" len="med"/>
+                    </a:lnR>
+                    <a:lnT w="9525" cap="flat" cmpd="sng" algn="ctr">
+                      <a:solidFill>
+                        <a:srgbClr val="D6D6D6"/>
+                      </a:solidFill>
+                      <a:prstDash val="solid"/>
+                      <a:round/>
+                      <a:headEnd type="none" w="med" len="med"/>
+                      <a:tailEnd type="none" w="med" len="med"/>
+                    </a:lnT>
+                    <a:lnB w="9525" cap="flat" cmpd="sng" algn="ctr">
+                      <a:solidFill>
+                        <a:srgbClr val="D6D6D6"/>
+                      </a:solidFill>
+                      <a:prstDash val="solid"/>
+                      <a:round/>
+                      <a:headEnd type="none" w="med" len="med"/>
+                      <a:tailEnd type="none" w="med" len="med"/>
+                    </a:lnB>
+                    <a:solidFill>
+                      <a:srgbClr val="FFFFFF"/>
+                    </a:solidFill>
+                  </a:tcPr>
+                </a:tc>
+                <a:extLst>
+                  <a:ext uri="{0D108BD9-81ED-4DB2-BD59-A6C34878D82A}">
+                    <a16:rowId xmlns:a16="http://schemas.microsoft.com/office/drawing/2014/main" val="2820134989"/>
+                  </a:ext>
+                </a:extLst>
+              </a:tr>
+            </a:tbl>
+          </a:graphicData>
+        </a:graphic>
+      </p:graphicFrame>
+    </p:spTree>
+    <p:extLst>
+      <p:ext uri="{BB962C8B-B14F-4D97-AF65-F5344CB8AC3E}">
+        <p14:creationId xmlns:p14="http://schemas.microsoft.com/office/powerpoint/2010/main" val="3945464203"/>
+      </p:ext>
+    </p:extLst>
+  </p:cSld>
+  <p:clrMapOvr>
+    <a:masterClrMapping/>
+  </p:clrMapOvr>
+</p:sld>
+</file>
+
+<file path=ppt/slides/slide5.xml><?xml version="1.0" encoding="utf-8"?>
+<p:sld xmlns:a="http://schemas.openxmlformats.org/drawingml/2006/main" xmlns:r="http://schemas.openxmlformats.org/officeDocument/2006/relationships" xmlns:p="http://schemas.openxmlformats.org/presentationml/2006/main">
+  <p:cSld>
+    <p:spTree>
+      <p:nvGrpSpPr>
+        <p:cNvPr id="1" name=""/>
+        <p:cNvGrpSpPr/>
+        <p:nvPr/>
+      </p:nvGrpSpPr>
+      <p:grpSpPr>
+        <a:xfrm>
+          <a:off x="0" y="0"/>
+          <a:ext cx="0" cy="0"/>
+          <a:chOff x="0" y="0"/>
+          <a:chExt cx="0" cy="0"/>
+        </a:xfrm>
+      </p:grpSpPr>
+      <p:sp>
+        <p:nvSpPr>
           <p:cNvPr id="3" name="標題 2">
             <a:extLst>
               <a:ext uri="{FF2B5EF4-FFF2-40B4-BE49-F238E27FC236}">
@@ -8796,7 +13136,7 @@
 </p:sld>
 </file>
 
-<file path=ppt/slides/slide4.xml><?xml version="1.0" encoding="utf-8"?>
+<file path=ppt/slides/slide6.xml><?xml version="1.0" encoding="utf-8"?>
 <p:sld xmlns:a="http://schemas.openxmlformats.org/drawingml/2006/main" xmlns:r="http://schemas.openxmlformats.org/officeDocument/2006/relationships" xmlns:p="http://schemas.openxmlformats.org/presentationml/2006/main">
   <p:cSld>
     <p:spTree>
@@ -11179,21 +15519,6 @@
 </file>
 
 <file path=customXml/item1.xml><?xml version="1.0" encoding="utf-8"?>
-<p:properties xmlns:p="http://schemas.microsoft.com/office/2006/metadata/properties" xmlns:xsi="http://www.w3.org/2001/XMLSchema-instance" xmlns:pc="http://schemas.microsoft.com/office/infopath/2007/PartnerControls">
-  <documentManagement/>
-</p:properties>
-</file>
-
-<file path=customXml/item2.xml><?xml version="1.0" encoding="utf-8"?>
-<?mso-contentType ?>
-<FormTemplates xmlns="http://schemas.microsoft.com/sharepoint/v3/contenttype/forms">
-  <Display>DocumentLibraryForm</Display>
-  <Edit>DocumentLibraryForm</Edit>
-  <New>DocumentLibraryForm</New>
-</FormTemplates>
-</file>
-
-<file path=customXml/item3.xml><?xml version="1.0" encoding="utf-8"?>
 <ct:contentTypeSchema xmlns:ct="http://schemas.microsoft.com/office/2006/metadata/contentType" xmlns:ma="http://schemas.microsoft.com/office/2006/metadata/properties/metaAttributes" ct:_="" ma:_="" ma:contentTypeName="Document" ma:contentTypeID="0x010100DE4F25D0FF425B4EA678AC2414B6A709" ma:contentTypeVersion="10" ma:contentTypeDescription="Create a new document." ma:contentTypeScope="" ma:versionID="8ceec2ce155b1d63c0c6fcd4110f3cfe">
   <xsd:schema xmlns:xsd="http://www.w3.org/2001/XMLSchema" xmlns:xs="http://www.w3.org/2001/XMLSchema" xmlns:p="http://schemas.microsoft.com/office/2006/metadata/properties" xmlns:ns2="7cac0686-f0c7-4236-b000-d7b90732a875" xmlns:ns3="9bfc64f2-d580-4df8-9fa4-4631ad6ac43d" targetNamespace="http://schemas.microsoft.com/office/2006/metadata/properties" ma:root="true" ma:fieldsID="267f21102a69fda15f58a0ecdfc9abe1" ns2:_="" ns3:_="">
     <xsd:import namespace="7cac0686-f0c7-4236-b000-d7b90732a875"/>
@@ -11394,32 +15719,22 @@
 </ct:contentTypeSchema>
 </file>
 
-<file path=customXml/itemProps1.xml><?xml version="1.0" encoding="utf-8"?>
-<ds:datastoreItem xmlns:ds="http://schemas.openxmlformats.org/officeDocument/2006/customXml" ds:itemID="{0FD5D526-59E0-46BD-B75A-4A393253F249}">
-  <ds:schemaRefs>
-    <ds:schemaRef ds:uri="http://schemas.microsoft.com/office/2006/documentManagement/types"/>
-    <ds:schemaRef ds:uri="http://schemas.microsoft.com/office/2006/metadata/properties"/>
-    <ds:schemaRef ds:uri="http://purl.org/dc/elements/1.1/"/>
-    <ds:schemaRef ds:uri="9bfc64f2-d580-4df8-9fa4-4631ad6ac43d"/>
-    <ds:schemaRef ds:uri="http://schemas.openxmlformats.org/package/2006/metadata/core-properties"/>
-    <ds:schemaRef ds:uri="http://purl.org/dc/terms/"/>
-    <ds:schemaRef ds:uri="http://www.w3.org/XML/1998/namespace"/>
-    <ds:schemaRef ds:uri="http://schemas.microsoft.com/office/infopath/2007/PartnerControls"/>
-    <ds:schemaRef ds:uri="7cac0686-f0c7-4236-b000-d7b90732a875"/>
-    <ds:schemaRef ds:uri="http://purl.org/dc/dcmitype/"/>
-  </ds:schemaRefs>
-</ds:datastoreItem>
+<file path=customXml/item2.xml><?xml version="1.0" encoding="utf-8"?>
+<?mso-contentType ?>
+<FormTemplates xmlns="http://schemas.microsoft.com/sharepoint/v3/contenttype/forms">
+  <Display>DocumentLibraryForm</Display>
+  <Edit>DocumentLibraryForm</Edit>
+  <New>DocumentLibraryForm</New>
+</FormTemplates>
 </file>
 
-<file path=customXml/itemProps2.xml><?xml version="1.0" encoding="utf-8"?>
-<ds:datastoreItem xmlns:ds="http://schemas.openxmlformats.org/officeDocument/2006/customXml" ds:itemID="{76929C79-DB32-411C-8C37-9A0BBBB5F642}">
-  <ds:schemaRefs>
-    <ds:schemaRef ds:uri="http://schemas.microsoft.com/sharepoint/v3/contenttype/forms"/>
-  </ds:schemaRefs>
-</ds:datastoreItem>
+<file path=customXml/item3.xml><?xml version="1.0" encoding="utf-8"?>
+<p:properties xmlns:p="http://schemas.microsoft.com/office/2006/metadata/properties" xmlns:xsi="http://www.w3.org/2001/XMLSchema-instance" xmlns:pc="http://schemas.microsoft.com/office/infopath/2007/PartnerControls">
+  <documentManagement/>
+</p:properties>
 </file>
 
-<file path=customXml/itemProps3.xml><?xml version="1.0" encoding="utf-8"?>
+<file path=customXml/itemProps1.xml><?xml version="1.0" encoding="utf-8"?>
 <ds:datastoreItem xmlns:ds="http://schemas.openxmlformats.org/officeDocument/2006/customXml" ds:itemID="{6B3946E7-66F8-4182-AA38-CFC406C59F4E}">
   <ds:schemaRefs>
     <ds:schemaRef ds:uri="http://schemas.microsoft.com/office/2006/metadata/contentType"/>
@@ -11438,6 +15753,31 @@
 </ds:datastoreItem>
 </file>
 
+<file path=customXml/itemProps2.xml><?xml version="1.0" encoding="utf-8"?>
+<ds:datastoreItem xmlns:ds="http://schemas.openxmlformats.org/officeDocument/2006/customXml" ds:itemID="{76929C79-DB32-411C-8C37-9A0BBBB5F642}">
+  <ds:schemaRefs>
+    <ds:schemaRef ds:uri="http://schemas.microsoft.com/sharepoint/v3/contenttype/forms"/>
+  </ds:schemaRefs>
+</ds:datastoreItem>
+</file>
+
+<file path=customXml/itemProps3.xml><?xml version="1.0" encoding="utf-8"?>
+<ds:datastoreItem xmlns:ds="http://schemas.openxmlformats.org/officeDocument/2006/customXml" ds:itemID="{0FD5D526-59E0-46BD-B75A-4A393253F249}">
+  <ds:schemaRefs>
+    <ds:schemaRef ds:uri="http://schemas.microsoft.com/office/2006/documentManagement/types"/>
+    <ds:schemaRef ds:uri="http://schemas.microsoft.com/office/2006/metadata/properties"/>
+    <ds:schemaRef ds:uri="http://purl.org/dc/elements/1.1/"/>
+    <ds:schemaRef ds:uri="9bfc64f2-d580-4df8-9fa4-4631ad6ac43d"/>
+    <ds:schemaRef ds:uri="http://schemas.openxmlformats.org/package/2006/metadata/core-properties"/>
+    <ds:schemaRef ds:uri="http://purl.org/dc/terms/"/>
+    <ds:schemaRef ds:uri="http://www.w3.org/XML/1998/namespace"/>
+    <ds:schemaRef ds:uri="http://schemas.microsoft.com/office/infopath/2007/PartnerControls"/>
+    <ds:schemaRef ds:uri="7cac0686-f0c7-4236-b000-d7b90732a875"/>
+    <ds:schemaRef ds:uri="http://purl.org/dc/dcmitype/"/>
+  </ds:schemaRefs>
+</ds:datastoreItem>
+</file>
+
 <file path=docMetadata/LabelInfo.xml><?xml version="1.0" encoding="utf-8"?>
 <clbl:labelList xmlns:clbl="http://schemas.microsoft.com/office/2020/mipLabelMetadata">
   <clbl:label id="{217a5a3d-163a-4e8b-af1b-58fd7f92894f}" enabled="0" method="" siteId="{217a5a3d-163a-4e8b-af1b-58fd7f92894f}" removed="1"/>

--- a/infogather.pptx
+++ b/infogather.pptx
@@ -5,7 +5,7 @@
     <p:sldMasterId id="2147483648" r:id="rId4"/>
   </p:sldMasterIdLst>
   <p:notesMasterIdLst>
-    <p:notesMasterId r:id="rId11"/>
+    <p:notesMasterId r:id="rId12"/>
   </p:notesMasterIdLst>
   <p:sldIdLst>
     <p:sldId id="256" r:id="rId5"/>
@@ -14,6 +14,7 @@
     <p:sldId id="2147471225" r:id="rId8"/>
     <p:sldId id="2147471223" r:id="rId9"/>
     <p:sldId id="2147471217" r:id="rId10"/>
+    <p:sldId id="2147471226" r:id="rId11"/>
   </p:sldIdLst>
   <p:sldSz cx="11520488" cy="6480175"/>
   <p:notesSz cx="6858000" cy="9144000"/>
@@ -254,7 +255,7 @@
       <p15:notesGuideLst xmlns:p15="http://schemas.microsoft.com/office/powerpoint/2012/main"/>
     </p:ext>
     <p:ext uri="GoogleSlidesCustomDataVersion2">
-      <go:slidesCustomData xmlns="" xmlns:go="http://customooxmlschemas.google.com/" xmlns:ahyp="http://schemas.microsoft.com/office/drawing/2018/hyperlinkcolor" xmlns:p15="http://schemas.microsoft.com/office/powerpoint/2012/main" xmlns:p14="http://schemas.microsoft.com/office/powerpoint/2010/main" xmlns:com="http://schemas.openxmlformats.org/drawingml/2006/compatibility" xmlns:pvml="urn:schemas-microsoft-com:office:powerpoint" xmlns:v="urn:schemas-microsoft-com:vml" xmlns:o="urn:schemas-microsoft-com:office:office" xmlns:dgm="http://schemas.openxmlformats.org/drawingml/2006/diagram" xmlns:c="http://schemas.openxmlformats.org/drawingml/2006/chart" xmlns:mv="urn:schemas-microsoft-com:mac:vml" xmlns:mc="http://schemas.openxmlformats.org/markup-compatibility/2006" r:id="rId52" roundtripDataSignature="AMtx7mhqKJAzFugGzrpaCdpbPJOL8OwfdA=="/>
+      <go:slidesCustomData xmlns:mc="http://schemas.openxmlformats.org/markup-compatibility/2006" xmlns:mv="urn:schemas-microsoft-com:mac:vml" xmlns:c="http://schemas.openxmlformats.org/drawingml/2006/chart" xmlns:dgm="http://schemas.openxmlformats.org/drawingml/2006/diagram" xmlns:o="urn:schemas-microsoft-com:office:office" xmlns:v="urn:schemas-microsoft-com:vml" xmlns:pvml="urn:schemas-microsoft-com:office:powerpoint" xmlns:com="http://schemas.openxmlformats.org/drawingml/2006/compatibility" xmlns:p14="http://schemas.microsoft.com/office/powerpoint/2010/main" xmlns:p15="http://schemas.microsoft.com/office/powerpoint/2012/main" xmlns:ahyp="http://schemas.microsoft.com/office/drawing/2018/hyperlinkcolor" xmlns:go="http://customooxmlschemas.google.com/" xmlns="" r:id="rId52" roundtripDataSignature="AMtx7mhqKJAzFugGzrpaCdpbPJOL8OwfdA=="/>
     </p:ext>
   </p:extLst>
 </p:presentation>
@@ -1472,22 +1473,6 @@
     </pc:docChg>
   </pc:docChgLst>
   <pc:docChgLst>
-    <pc:chgData name="周立筠-數據應用部-永豐金證券" userId="S::liyun0222.zhou@sinopac.com::ee349c15-f274-43a3-b0c9-48d528d95247" providerId="AD" clId="Web-{A48564C8-421B-2203-E695-99D400D4424E}"/>
-    <pc:docChg chg="modSld">
-      <pc:chgData name="周立筠-數據應用部-永豐金證券" userId="S::liyun0222.zhou@sinopac.com::ee349c15-f274-43a3-b0c9-48d528d95247" providerId="AD" clId="Web-{A48564C8-421B-2203-E695-99D400D4424E}" dt="2024-08-23T09:42:27.791" v="49"/>
-      <pc:docMkLst>
-        <pc:docMk/>
-      </pc:docMkLst>
-      <pc:sldChg chg="modSp">
-        <pc:chgData name="周立筠-數據應用部-永豐金證券" userId="S::liyun0222.zhou@sinopac.com::ee349c15-f274-43a3-b0c9-48d528d95247" providerId="AD" clId="Web-{A48564C8-421B-2203-E695-99D400D4424E}" dt="2024-08-23T09:42:27.791" v="49"/>
-        <pc:sldMkLst>
-          <pc:docMk/>
-          <pc:sldMk cId="3262633635" sldId="297"/>
-        </pc:sldMkLst>
-      </pc:sldChg>
-    </pc:docChg>
-  </pc:docChgLst>
-  <pc:docChgLst>
     <pc:chgData name="張天豪-數位金融處-永豐銀行" userId="0d835702-99c9-4ef6-82d8-3ca86d4ccc15" providerId="ADAL" clId="{05C68244-A0A4-5F4B-A227-C47B6FE62571}"/>
     <pc:docChg chg="undo custSel addSld delSld modSld modMainMaster modSection">
       <pc:chgData name="張天豪-數位金融處-永豐銀行" userId="0d835702-99c9-4ef6-82d8-3ca86d4ccc15" providerId="ADAL" clId="{05C68244-A0A4-5F4B-A227-C47B6FE62571}" dt="2024-11-23T00:59:06.402" v="223" actId="12"/>
@@ -1588,6 +1573,22 @@
           </pc:sldLayoutMkLst>
         </pc:sldLayoutChg>
       </pc:sldMasterChg>
+    </pc:docChg>
+  </pc:docChgLst>
+  <pc:docChgLst>
+    <pc:chgData name="周立筠-數據應用部-永豐金證券" userId="S::liyun0222.zhou@sinopac.com::ee349c15-f274-43a3-b0c9-48d528d95247" providerId="AD" clId="Web-{A48564C8-421B-2203-E695-99D400D4424E}"/>
+    <pc:docChg chg="modSld">
+      <pc:chgData name="周立筠-數據應用部-永豐金證券" userId="S::liyun0222.zhou@sinopac.com::ee349c15-f274-43a3-b0c9-48d528d95247" providerId="AD" clId="Web-{A48564C8-421B-2203-E695-99D400D4424E}" dt="2024-08-23T09:42:27.791" v="49"/>
+      <pc:docMkLst>
+        <pc:docMk/>
+      </pc:docMkLst>
+      <pc:sldChg chg="modSp">
+        <pc:chgData name="周立筠-數據應用部-永豐金證券" userId="S::liyun0222.zhou@sinopac.com::ee349c15-f274-43a3-b0c9-48d528d95247" providerId="AD" clId="Web-{A48564C8-421B-2203-E695-99D400D4424E}" dt="2024-08-23T09:42:27.791" v="49"/>
+        <pc:sldMkLst>
+          <pc:docMk/>
+          <pc:sldMk cId="3262633635" sldId="297"/>
+        </pc:sldMkLst>
+      </pc:sldChg>
     </pc:docChg>
   </pc:docChgLst>
 </pc:chgInfo>
@@ -3039,6 +3040,72 @@
     <p:extLst>
       <p:ext uri="{BB962C8B-B14F-4D97-AF65-F5344CB8AC3E}">
         <p14:creationId xmlns:p14="http://schemas.microsoft.com/office/powerpoint/2010/main" val="690164727"/>
+      </p:ext>
+    </p:extLst>
+  </p:cSld>
+  <p:clrMapOvr>
+    <a:masterClrMapping/>
+  </p:clrMapOvr>
+</p:notes>
+</file>
+
+<file path=ppt/notesSlides/notesSlide6.xml><?xml version="1.0" encoding="utf-8"?>
+<p:notes xmlns:a="http://schemas.openxmlformats.org/drawingml/2006/main" xmlns:r="http://schemas.openxmlformats.org/officeDocument/2006/relationships" xmlns:p="http://schemas.openxmlformats.org/presentationml/2006/main">
+  <p:cSld>
+    <p:spTree>
+      <p:nvGrpSpPr>
+        <p:cNvPr id="1" name=""/>
+        <p:cNvGrpSpPr/>
+        <p:nvPr/>
+      </p:nvGrpSpPr>
+      <p:grpSpPr>
+        <a:xfrm>
+          <a:off x="0" y="0"/>
+          <a:ext cx="0" cy="0"/>
+          <a:chOff x="0" y="0"/>
+          <a:chExt cx="0" cy="0"/>
+        </a:xfrm>
+      </p:grpSpPr>
+      <p:sp>
+        <p:nvSpPr>
+          <p:cNvPr id="2" name="投影片影像版面配置區 1"/>
+          <p:cNvSpPr>
+            <a:spLocks noGrp="1" noRot="1" noChangeAspect="1"/>
+          </p:cNvSpPr>
+          <p:nvPr>
+            <p:ph type="sldImg"/>
+          </p:nvPr>
+        </p:nvSpPr>
+        <p:spPr>
+          <a:xfrm>
+            <a:off x="381000" y="685800"/>
+            <a:ext cx="6096000" cy="3429000"/>
+          </a:xfrm>
+        </p:spPr>
+      </p:sp>
+      <p:sp>
+        <p:nvSpPr>
+          <p:cNvPr id="3" name="備忘稿版面配置區 2"/>
+          <p:cNvSpPr>
+            <a:spLocks noGrp="1"/>
+          </p:cNvSpPr>
+          <p:nvPr>
+            <p:ph type="body" idx="1"/>
+          </p:nvPr>
+        </p:nvSpPr>
+        <p:spPr/>
+        <p:txBody>
+          <a:bodyPr/>
+          <a:lstStyle/>
+          <a:p>
+            <a:endParaRPr kumimoji="1" lang="zh-TW" altLang="en-US" dirty="0"/>
+          </a:p>
+        </p:txBody>
+      </p:sp>
+    </p:spTree>
+    <p:extLst>
+      <p:ext uri="{BB962C8B-B14F-4D97-AF65-F5344CB8AC3E}">
+        <p14:creationId xmlns:p14="http://schemas.microsoft.com/office/powerpoint/2010/main" val="2420888186"/>
       </p:ext>
     </p:extLst>
   </p:cSld>
@@ -14956,6 +15023,3049 @@
 </p:sld>
 </file>
 
+<file path=ppt/slides/slide7.xml><?xml version="1.0" encoding="utf-8"?>
+<p:sld xmlns:a="http://schemas.openxmlformats.org/drawingml/2006/main" xmlns:r="http://schemas.openxmlformats.org/officeDocument/2006/relationships" xmlns:p="http://schemas.openxmlformats.org/presentationml/2006/main">
+  <p:cSld>
+    <p:spTree>
+      <p:nvGrpSpPr>
+        <p:cNvPr id="1" name=""/>
+        <p:cNvGrpSpPr/>
+        <p:nvPr/>
+      </p:nvGrpSpPr>
+      <p:grpSpPr>
+        <a:xfrm>
+          <a:off x="0" y="0"/>
+          <a:ext cx="0" cy="0"/>
+          <a:chOff x="0" y="0"/>
+          <a:chExt cx="0" cy="0"/>
+        </a:xfrm>
+      </p:grpSpPr>
+      <p:graphicFrame>
+        <p:nvGraphicFramePr>
+          <p:cNvPr id="3" name="表格 2">
+            <a:extLst>
+              <a:ext uri="{FF2B5EF4-FFF2-40B4-BE49-F238E27FC236}">
+                <a16:creationId xmlns:a16="http://schemas.microsoft.com/office/drawing/2014/main" id="{E6169001-1B9D-D1B0-AE7B-502E10A670F8}"/>
+              </a:ext>
+            </a:extLst>
+          </p:cNvPr>
+          <p:cNvGraphicFramePr>
+            <a:graphicFrameLocks noGrp="1"/>
+          </p:cNvGraphicFramePr>
+          <p:nvPr>
+            <p:extLst>
+              <p:ext uri="{D42A27DB-BD31-4B8C-83A1-F6EECF244321}">
+                <p14:modId xmlns:p14="http://schemas.microsoft.com/office/powerpoint/2010/main" val="62478964"/>
+              </p:ext>
+            </p:extLst>
+          </p:nvPr>
+        </p:nvGraphicFramePr>
+        <p:xfrm>
+          <a:off x="388144" y="1460623"/>
+          <a:ext cx="4706937" cy="3931920"/>
+        </p:xfrm>
+        <a:graphic>
+          <a:graphicData uri="http://schemas.openxmlformats.org/drawingml/2006/table">
+            <a:tbl>
+              <a:tblPr/>
+              <a:tblGrid>
+                <a:gridCol w="2686050">
+                  <a:extLst>
+                    <a:ext uri="{9D8B030D-6E8A-4147-A177-3AD203B41FA5}">
+                      <a16:colId xmlns:a16="http://schemas.microsoft.com/office/drawing/2014/main" val="2545213879"/>
+                    </a:ext>
+                  </a:extLst>
+                </a:gridCol>
+                <a:gridCol w="2020887">
+                  <a:extLst>
+                    <a:ext uri="{9D8B030D-6E8A-4147-A177-3AD203B41FA5}">
+                      <a16:colId xmlns:a16="http://schemas.microsoft.com/office/drawing/2014/main" val="310536545"/>
+                    </a:ext>
+                  </a:extLst>
+                </a:gridCol>
+              </a:tblGrid>
+              <a:tr h="187631">
+                <a:tc>
+                  <a:txBody>
+                    <a:bodyPr/>
+                    <a:lstStyle/>
+                    <a:p>
+                      <a:pPr>
+                        <a:buNone/>
+                      </a:pPr>
+                      <a:r>
+                        <a:rPr lang="zh-TW" altLang="en-US" b="1" dirty="0">
+                          <a:solidFill>
+                            <a:srgbClr val="000000"/>
+                          </a:solidFill>
+                          <a:effectLst/>
+                          <a:latin typeface="Microsoft JhengHei" panose="020B0604030504040204" pitchFamily="34" charset="-120"/>
+                          <a:ea typeface="Microsoft JhengHei" panose="020B0604030504040204" pitchFamily="34" charset="-120"/>
+                        </a:rPr>
+                        <a:t>資料類型</a:t>
+                      </a:r>
+                    </a:p>
+                  </a:txBody>
+                  <a:tcPr marL="123825" marR="123825" marT="57150" marB="57150" anchor="ctr">
+                    <a:lnL w="9525" cap="flat" cmpd="sng" algn="ctr">
+                      <a:solidFill>
+                        <a:srgbClr val="D6D6D6"/>
+                      </a:solidFill>
+                      <a:prstDash val="solid"/>
+                      <a:round/>
+                      <a:headEnd type="none" w="med" len="med"/>
+                      <a:tailEnd type="none" w="med" len="med"/>
+                    </a:lnL>
+                    <a:lnR w="9525" cap="flat" cmpd="sng" algn="ctr">
+                      <a:solidFill>
+                        <a:srgbClr val="D6D6D6"/>
+                      </a:solidFill>
+                      <a:prstDash val="solid"/>
+                      <a:round/>
+                      <a:headEnd type="none" w="med" len="med"/>
+                      <a:tailEnd type="none" w="med" len="med"/>
+                    </a:lnR>
+                    <a:lnT w="9525" cap="flat" cmpd="sng" algn="ctr">
+                      <a:solidFill>
+                        <a:srgbClr val="D6D6D6"/>
+                      </a:solidFill>
+                      <a:prstDash val="solid"/>
+                      <a:round/>
+                      <a:headEnd type="none" w="med" len="med"/>
+                      <a:tailEnd type="none" w="med" len="med"/>
+                    </a:lnT>
+                    <a:lnB w="9525" cap="flat" cmpd="sng" algn="ctr">
+                      <a:solidFill>
+                        <a:srgbClr val="D6D6D6"/>
+                      </a:solidFill>
+                      <a:prstDash val="solid"/>
+                      <a:round/>
+                      <a:headEnd type="none" w="med" len="med"/>
+                      <a:tailEnd type="none" w="med" len="med"/>
+                    </a:lnB>
+                    <a:solidFill>
+                      <a:srgbClr val="FFFFFF"/>
+                    </a:solidFill>
+                  </a:tcPr>
+                </a:tc>
+                <a:tc>
+                  <a:txBody>
+                    <a:bodyPr/>
+                    <a:lstStyle/>
+                    <a:p>
+                      <a:pPr algn="r">
+                        <a:buNone/>
+                      </a:pPr>
+                      <a:r>
+                        <a:rPr lang="zh-TW" altLang="en-US" b="1">
+                          <a:solidFill>
+                            <a:srgbClr val="000000"/>
+                          </a:solidFill>
+                          <a:effectLst/>
+                          <a:latin typeface="Microsoft JhengHei" panose="020B0604030504040204" pitchFamily="34" charset="-120"/>
+                          <a:ea typeface="Microsoft JhengHei" panose="020B0604030504040204" pitchFamily="34" charset="-120"/>
+                        </a:rPr>
+                        <a:t>數量 </a:t>
+                      </a:r>
+                      <a:r>
+                        <a:rPr lang="en-US" altLang="zh-TW" b="1">
+                          <a:solidFill>
+                            <a:srgbClr val="000000"/>
+                          </a:solidFill>
+                          <a:effectLst/>
+                          <a:latin typeface="Microsoft JhengHei" panose="020B0604030504040204" pitchFamily="34" charset="-120"/>
+                          <a:ea typeface="Microsoft JhengHei" panose="020B0604030504040204" pitchFamily="34" charset="-120"/>
+                        </a:rPr>
+                        <a:t>/ </a:t>
+                      </a:r>
+                      <a:r>
+                        <a:rPr lang="zh-TW" altLang="en-US" b="1">
+                          <a:solidFill>
+                            <a:srgbClr val="000000"/>
+                          </a:solidFill>
+                          <a:effectLst/>
+                          <a:latin typeface="Microsoft JhengHei" panose="020B0604030504040204" pitchFamily="34" charset="-120"/>
+                          <a:ea typeface="Microsoft JhengHei" panose="020B0604030504040204" pitchFamily="34" charset="-120"/>
+                        </a:rPr>
+                        <a:t>用量</a:t>
+                      </a:r>
+                    </a:p>
+                  </a:txBody>
+                  <a:tcPr marL="123825" marR="123825" marT="57150" marB="57150" anchor="ctr">
+                    <a:lnL w="9525" cap="flat" cmpd="sng" algn="ctr">
+                      <a:solidFill>
+                        <a:srgbClr val="D6D6D6"/>
+                      </a:solidFill>
+                      <a:prstDash val="solid"/>
+                      <a:round/>
+                      <a:headEnd type="none" w="med" len="med"/>
+                      <a:tailEnd type="none" w="med" len="med"/>
+                    </a:lnL>
+                    <a:lnR w="9525" cap="flat" cmpd="sng" algn="ctr">
+                      <a:solidFill>
+                        <a:srgbClr val="D6D6D6"/>
+                      </a:solidFill>
+                      <a:prstDash val="solid"/>
+                      <a:round/>
+                      <a:headEnd type="none" w="med" len="med"/>
+                      <a:tailEnd type="none" w="med" len="med"/>
+                    </a:lnR>
+                    <a:lnT w="9525" cap="flat" cmpd="sng" algn="ctr">
+                      <a:solidFill>
+                        <a:srgbClr val="D6D6D6"/>
+                      </a:solidFill>
+                      <a:prstDash val="solid"/>
+                      <a:round/>
+                      <a:headEnd type="none" w="med" len="med"/>
+                      <a:tailEnd type="none" w="med" len="med"/>
+                    </a:lnT>
+                    <a:lnB w="9525" cap="flat" cmpd="sng" algn="ctr">
+                      <a:solidFill>
+                        <a:srgbClr val="D6D6D6"/>
+                      </a:solidFill>
+                      <a:prstDash val="solid"/>
+                      <a:round/>
+                      <a:headEnd type="none" w="med" len="med"/>
+                      <a:tailEnd type="none" w="med" len="med"/>
+                    </a:lnB>
+                    <a:solidFill>
+                      <a:srgbClr val="FFFFFF"/>
+                    </a:solidFill>
+                  </a:tcPr>
+                </a:tc>
+                <a:extLst>
+                  <a:ext uri="{0D108BD9-81ED-4DB2-BD59-A6C34878D82A}">
+                    <a16:rowId xmlns:a16="http://schemas.microsoft.com/office/drawing/2014/main" val="1366846571"/>
+                  </a:ext>
+                </a:extLst>
+              </a:tr>
+              <a:tr h="187631">
+                <a:tc>
+                  <a:txBody>
+                    <a:bodyPr/>
+                    <a:lstStyle/>
+                    <a:p>
+                      <a:pPr>
+                        <a:buNone/>
+                      </a:pPr>
+                      <a:r>
+                        <a:rPr lang="en" dirty="0">
+                          <a:effectLst/>
+                          <a:latin typeface="Microsoft JhengHei" panose="020B0604030504040204" pitchFamily="34" charset="-120"/>
+                          <a:ea typeface="Microsoft JhengHei" panose="020B0604030504040204" pitchFamily="34" charset="-120"/>
+                        </a:rPr>
+                        <a:t>MongoDB collections</a:t>
+                      </a:r>
+                    </a:p>
+                  </a:txBody>
+                  <a:tcPr marL="123825" marR="123825" marT="57150" marB="57150" anchor="ctr">
+                    <a:lnL w="9525" cap="flat" cmpd="sng" algn="ctr">
+                      <a:solidFill>
+                        <a:srgbClr val="D6D6D6"/>
+                      </a:solidFill>
+                      <a:prstDash val="solid"/>
+                      <a:round/>
+                      <a:headEnd type="none" w="med" len="med"/>
+                      <a:tailEnd type="none" w="med" len="med"/>
+                    </a:lnL>
+                    <a:lnR w="9525" cap="flat" cmpd="sng" algn="ctr">
+                      <a:solidFill>
+                        <a:srgbClr val="D6D6D6"/>
+                      </a:solidFill>
+                      <a:prstDash val="solid"/>
+                      <a:round/>
+                      <a:headEnd type="none" w="med" len="med"/>
+                      <a:tailEnd type="none" w="med" len="med"/>
+                    </a:lnR>
+                    <a:lnT w="9525" cap="flat" cmpd="sng" algn="ctr">
+                      <a:solidFill>
+                        <a:srgbClr val="D6D6D6"/>
+                      </a:solidFill>
+                      <a:prstDash val="solid"/>
+                      <a:round/>
+                      <a:headEnd type="none" w="med" len="med"/>
+                      <a:tailEnd type="none" w="med" len="med"/>
+                    </a:lnT>
+                    <a:lnB w="9525" cap="flat" cmpd="sng" algn="ctr">
+                      <a:solidFill>
+                        <a:srgbClr val="D6D6D6"/>
+                      </a:solidFill>
+                      <a:prstDash val="solid"/>
+                      <a:round/>
+                      <a:headEnd type="none" w="med" len="med"/>
+                      <a:tailEnd type="none" w="med" len="med"/>
+                    </a:lnB>
+                    <a:solidFill>
+                      <a:srgbClr val="FFFFFF"/>
+                    </a:solidFill>
+                  </a:tcPr>
+                </a:tc>
+                <a:tc>
+                  <a:txBody>
+                    <a:bodyPr/>
+                    <a:lstStyle/>
+                    <a:p>
+                      <a:pPr algn="r">
+                        <a:buNone/>
+                      </a:pPr>
+                      <a:r>
+                        <a:rPr lang="en-US" altLang="zh-TW">
+                          <a:effectLst/>
+                          <a:latin typeface="Microsoft JhengHei" panose="020B0604030504040204" pitchFamily="34" charset="-120"/>
+                          <a:ea typeface="Microsoft JhengHei" panose="020B0604030504040204" pitchFamily="34" charset="-120"/>
+                        </a:rPr>
+                        <a:t>29</a:t>
+                      </a:r>
+                    </a:p>
+                  </a:txBody>
+                  <a:tcPr marL="123825" marR="123825" marT="57150" marB="57150" anchor="ctr">
+                    <a:lnL w="9525" cap="flat" cmpd="sng" algn="ctr">
+                      <a:solidFill>
+                        <a:srgbClr val="D6D6D6"/>
+                      </a:solidFill>
+                      <a:prstDash val="solid"/>
+                      <a:round/>
+                      <a:headEnd type="none" w="med" len="med"/>
+                      <a:tailEnd type="none" w="med" len="med"/>
+                    </a:lnL>
+                    <a:lnR w="9525" cap="flat" cmpd="sng" algn="ctr">
+                      <a:solidFill>
+                        <a:srgbClr val="D6D6D6"/>
+                      </a:solidFill>
+                      <a:prstDash val="solid"/>
+                      <a:round/>
+                      <a:headEnd type="none" w="med" len="med"/>
+                      <a:tailEnd type="none" w="med" len="med"/>
+                    </a:lnR>
+                    <a:lnT w="9525" cap="flat" cmpd="sng" algn="ctr">
+                      <a:solidFill>
+                        <a:srgbClr val="D6D6D6"/>
+                      </a:solidFill>
+                      <a:prstDash val="solid"/>
+                      <a:round/>
+                      <a:headEnd type="none" w="med" len="med"/>
+                      <a:tailEnd type="none" w="med" len="med"/>
+                    </a:lnT>
+                    <a:lnB w="9525" cap="flat" cmpd="sng" algn="ctr">
+                      <a:solidFill>
+                        <a:srgbClr val="D6D6D6"/>
+                      </a:solidFill>
+                      <a:prstDash val="solid"/>
+                      <a:round/>
+                      <a:headEnd type="none" w="med" len="med"/>
+                      <a:tailEnd type="none" w="med" len="med"/>
+                    </a:lnB>
+                    <a:solidFill>
+                      <a:srgbClr val="FFFFFF"/>
+                    </a:solidFill>
+                  </a:tcPr>
+                </a:tc>
+                <a:extLst>
+                  <a:ext uri="{0D108BD9-81ED-4DB2-BD59-A6C34878D82A}">
+                    <a16:rowId xmlns:a16="http://schemas.microsoft.com/office/drawing/2014/main" val="4004105299"/>
+                  </a:ext>
+                </a:extLst>
+              </a:tr>
+              <a:tr h="187631">
+                <a:tc>
+                  <a:txBody>
+                    <a:bodyPr/>
+                    <a:lstStyle/>
+                    <a:p>
+                      <a:pPr>
+                        <a:buNone/>
+                      </a:pPr>
+                      <a:r>
+                        <a:rPr lang="en">
+                          <a:effectLst/>
+                          <a:latin typeface="Microsoft JhengHei" panose="020B0604030504040204" pitchFamily="34" charset="-120"/>
+                          <a:ea typeface="Microsoft JhengHei" panose="020B0604030504040204" pitchFamily="34" charset="-120"/>
+                        </a:rPr>
+                        <a:t>MongoDB documents</a:t>
+                      </a:r>
+                    </a:p>
+                  </a:txBody>
+                  <a:tcPr marL="123825" marR="123825" marT="57150" marB="57150" anchor="ctr">
+                    <a:lnL w="9525" cap="flat" cmpd="sng" algn="ctr">
+                      <a:solidFill>
+                        <a:srgbClr val="D6D6D6"/>
+                      </a:solidFill>
+                      <a:prstDash val="solid"/>
+                      <a:round/>
+                      <a:headEnd type="none" w="med" len="med"/>
+                      <a:tailEnd type="none" w="med" len="med"/>
+                    </a:lnL>
+                    <a:lnR w="9525" cap="flat" cmpd="sng" algn="ctr">
+                      <a:solidFill>
+                        <a:srgbClr val="D6D6D6"/>
+                      </a:solidFill>
+                      <a:prstDash val="solid"/>
+                      <a:round/>
+                      <a:headEnd type="none" w="med" len="med"/>
+                      <a:tailEnd type="none" w="med" len="med"/>
+                    </a:lnR>
+                    <a:lnT w="9525" cap="flat" cmpd="sng" algn="ctr">
+                      <a:solidFill>
+                        <a:srgbClr val="D6D6D6"/>
+                      </a:solidFill>
+                      <a:prstDash val="solid"/>
+                      <a:round/>
+                      <a:headEnd type="none" w="med" len="med"/>
+                      <a:tailEnd type="none" w="med" len="med"/>
+                    </a:lnT>
+                    <a:lnB w="9525" cap="flat" cmpd="sng" algn="ctr">
+                      <a:solidFill>
+                        <a:srgbClr val="D6D6D6"/>
+                      </a:solidFill>
+                      <a:prstDash val="solid"/>
+                      <a:round/>
+                      <a:headEnd type="none" w="med" len="med"/>
+                      <a:tailEnd type="none" w="med" len="med"/>
+                    </a:lnB>
+                    <a:solidFill>
+                      <a:srgbClr val="FFFFFF"/>
+                    </a:solidFill>
+                  </a:tcPr>
+                </a:tc>
+                <a:tc>
+                  <a:txBody>
+                    <a:bodyPr/>
+                    <a:lstStyle/>
+                    <a:p>
+                      <a:pPr algn="r">
+                        <a:buNone/>
+                      </a:pPr>
+                      <a:r>
+                        <a:rPr lang="en-US" altLang="zh-TW" dirty="0">
+                          <a:effectLst/>
+                          <a:latin typeface="Microsoft JhengHei" panose="020B0604030504040204" pitchFamily="34" charset="-120"/>
+                          <a:ea typeface="Microsoft JhengHei" panose="020B0604030504040204" pitchFamily="34" charset="-120"/>
+                        </a:rPr>
+                        <a:t>1,265,635</a:t>
+                      </a:r>
+                    </a:p>
+                  </a:txBody>
+                  <a:tcPr marL="123825" marR="123825" marT="57150" marB="57150" anchor="ctr">
+                    <a:lnL w="9525" cap="flat" cmpd="sng" algn="ctr">
+                      <a:solidFill>
+                        <a:srgbClr val="D6D6D6"/>
+                      </a:solidFill>
+                      <a:prstDash val="solid"/>
+                      <a:round/>
+                      <a:headEnd type="none" w="med" len="med"/>
+                      <a:tailEnd type="none" w="med" len="med"/>
+                    </a:lnL>
+                    <a:lnR w="9525" cap="flat" cmpd="sng" algn="ctr">
+                      <a:solidFill>
+                        <a:srgbClr val="D6D6D6"/>
+                      </a:solidFill>
+                      <a:prstDash val="solid"/>
+                      <a:round/>
+                      <a:headEnd type="none" w="med" len="med"/>
+                      <a:tailEnd type="none" w="med" len="med"/>
+                    </a:lnR>
+                    <a:lnT w="9525" cap="flat" cmpd="sng" algn="ctr">
+                      <a:solidFill>
+                        <a:srgbClr val="D6D6D6"/>
+                      </a:solidFill>
+                      <a:prstDash val="solid"/>
+                      <a:round/>
+                      <a:headEnd type="none" w="med" len="med"/>
+                      <a:tailEnd type="none" w="med" len="med"/>
+                    </a:lnT>
+                    <a:lnB w="9525" cap="flat" cmpd="sng" algn="ctr">
+                      <a:solidFill>
+                        <a:srgbClr val="D6D6D6"/>
+                      </a:solidFill>
+                      <a:prstDash val="solid"/>
+                      <a:round/>
+                      <a:headEnd type="none" w="med" len="med"/>
+                      <a:tailEnd type="none" w="med" len="med"/>
+                    </a:lnB>
+                    <a:solidFill>
+                      <a:srgbClr val="FFFFFF"/>
+                    </a:solidFill>
+                  </a:tcPr>
+                </a:tc>
+                <a:extLst>
+                  <a:ext uri="{0D108BD9-81ED-4DB2-BD59-A6C34878D82A}">
+                    <a16:rowId xmlns:a16="http://schemas.microsoft.com/office/drawing/2014/main" val="2120722469"/>
+                  </a:ext>
+                </a:extLst>
+              </a:tr>
+              <a:tr h="187631">
+                <a:tc>
+                  <a:txBody>
+                    <a:bodyPr/>
+                    <a:lstStyle/>
+                    <a:p>
+                      <a:pPr>
+                        <a:buNone/>
+                      </a:pPr>
+                      <a:r>
+                        <a:rPr lang="en">
+                          <a:effectLst/>
+                          <a:latin typeface="Microsoft JhengHei" panose="020B0604030504040204" pitchFamily="34" charset="-120"/>
+                          <a:ea typeface="Microsoft JhengHei" panose="020B0604030504040204" pitchFamily="34" charset="-120"/>
+                        </a:rPr>
+                        <a:t>MongoDB logical data</a:t>
+                      </a:r>
+                    </a:p>
+                  </a:txBody>
+                  <a:tcPr marL="123825" marR="123825" marT="57150" marB="57150" anchor="ctr">
+                    <a:lnL w="9525" cap="flat" cmpd="sng" algn="ctr">
+                      <a:solidFill>
+                        <a:srgbClr val="D6D6D6"/>
+                      </a:solidFill>
+                      <a:prstDash val="solid"/>
+                      <a:round/>
+                      <a:headEnd type="none" w="med" len="med"/>
+                      <a:tailEnd type="none" w="med" len="med"/>
+                    </a:lnL>
+                    <a:lnR w="9525" cap="flat" cmpd="sng" algn="ctr">
+                      <a:solidFill>
+                        <a:srgbClr val="D6D6D6"/>
+                      </a:solidFill>
+                      <a:prstDash val="solid"/>
+                      <a:round/>
+                      <a:headEnd type="none" w="med" len="med"/>
+                      <a:tailEnd type="none" w="med" len="med"/>
+                    </a:lnR>
+                    <a:lnT w="9525" cap="flat" cmpd="sng" algn="ctr">
+                      <a:solidFill>
+                        <a:srgbClr val="D6D6D6"/>
+                      </a:solidFill>
+                      <a:prstDash val="solid"/>
+                      <a:round/>
+                      <a:headEnd type="none" w="med" len="med"/>
+                      <a:tailEnd type="none" w="med" len="med"/>
+                    </a:lnT>
+                    <a:lnB w="9525" cap="flat" cmpd="sng" algn="ctr">
+                      <a:solidFill>
+                        <a:srgbClr val="D6D6D6"/>
+                      </a:solidFill>
+                      <a:prstDash val="solid"/>
+                      <a:round/>
+                      <a:headEnd type="none" w="med" len="med"/>
+                      <a:tailEnd type="none" w="med" len="med"/>
+                    </a:lnB>
+                    <a:solidFill>
+                      <a:srgbClr val="FFFFFF"/>
+                    </a:solidFill>
+                  </a:tcPr>
+                </a:tc>
+                <a:tc>
+                  <a:txBody>
+                    <a:bodyPr/>
+                    <a:lstStyle/>
+                    <a:p>
+                      <a:pPr algn="r">
+                        <a:buNone/>
+                      </a:pPr>
+                      <a:r>
+                        <a:rPr lang="zh-TW" altLang="en-US">
+                          <a:effectLst/>
+                          <a:latin typeface="Microsoft JhengHei" panose="020B0604030504040204" pitchFamily="34" charset="-120"/>
+                          <a:ea typeface="Microsoft JhengHei" panose="020B0604030504040204" pitchFamily="34" charset="-120"/>
+                        </a:rPr>
+                        <a:t>約 </a:t>
+                      </a:r>
+                      <a:r>
+                        <a:rPr lang="en-US" altLang="zh-TW">
+                          <a:effectLst/>
+                          <a:latin typeface="Microsoft JhengHei" panose="020B0604030504040204" pitchFamily="34" charset="-120"/>
+                          <a:ea typeface="Microsoft JhengHei" panose="020B0604030504040204" pitchFamily="34" charset="-120"/>
+                        </a:rPr>
+                        <a:t>1,066.18 </a:t>
+                      </a:r>
+                      <a:r>
+                        <a:rPr lang="en">
+                          <a:effectLst/>
+                          <a:latin typeface="Microsoft JhengHei" panose="020B0604030504040204" pitchFamily="34" charset="-120"/>
+                          <a:ea typeface="Microsoft JhengHei" panose="020B0604030504040204" pitchFamily="34" charset="-120"/>
+                        </a:rPr>
+                        <a:t>MiB</a:t>
+                      </a:r>
+                    </a:p>
+                  </a:txBody>
+                  <a:tcPr marL="123825" marR="123825" marT="57150" marB="57150" anchor="ctr">
+                    <a:lnL w="9525" cap="flat" cmpd="sng" algn="ctr">
+                      <a:solidFill>
+                        <a:srgbClr val="D6D6D6"/>
+                      </a:solidFill>
+                      <a:prstDash val="solid"/>
+                      <a:round/>
+                      <a:headEnd type="none" w="med" len="med"/>
+                      <a:tailEnd type="none" w="med" len="med"/>
+                    </a:lnL>
+                    <a:lnR w="9525" cap="flat" cmpd="sng" algn="ctr">
+                      <a:solidFill>
+                        <a:srgbClr val="D6D6D6"/>
+                      </a:solidFill>
+                      <a:prstDash val="solid"/>
+                      <a:round/>
+                      <a:headEnd type="none" w="med" len="med"/>
+                      <a:tailEnd type="none" w="med" len="med"/>
+                    </a:lnR>
+                    <a:lnT w="9525" cap="flat" cmpd="sng" algn="ctr">
+                      <a:solidFill>
+                        <a:srgbClr val="D6D6D6"/>
+                      </a:solidFill>
+                      <a:prstDash val="solid"/>
+                      <a:round/>
+                      <a:headEnd type="none" w="med" len="med"/>
+                      <a:tailEnd type="none" w="med" len="med"/>
+                    </a:lnT>
+                    <a:lnB w="9525" cap="flat" cmpd="sng" algn="ctr">
+                      <a:solidFill>
+                        <a:srgbClr val="D6D6D6"/>
+                      </a:solidFill>
+                      <a:prstDash val="solid"/>
+                      <a:round/>
+                      <a:headEnd type="none" w="med" len="med"/>
+                      <a:tailEnd type="none" w="med" len="med"/>
+                    </a:lnB>
+                    <a:solidFill>
+                      <a:srgbClr val="FFFFFF"/>
+                    </a:solidFill>
+                  </a:tcPr>
+                </a:tc>
+                <a:extLst>
+                  <a:ext uri="{0D108BD9-81ED-4DB2-BD59-A6C34878D82A}">
+                    <a16:rowId xmlns:a16="http://schemas.microsoft.com/office/drawing/2014/main" val="1175324792"/>
+                  </a:ext>
+                </a:extLst>
+              </a:tr>
+              <a:tr h="187631">
+                <a:tc>
+                  <a:txBody>
+                    <a:bodyPr/>
+                    <a:lstStyle/>
+                    <a:p>
+                      <a:pPr>
+                        <a:buNone/>
+                      </a:pPr>
+                      <a:r>
+                        <a:rPr lang="en" dirty="0">
+                          <a:effectLst/>
+                          <a:latin typeface="Microsoft JhengHei" panose="020B0604030504040204" pitchFamily="34" charset="-120"/>
+                          <a:ea typeface="Microsoft JhengHei" panose="020B0604030504040204" pitchFamily="34" charset="-120"/>
+                        </a:rPr>
+                        <a:t>MongoDB storage + indexes</a:t>
+                      </a:r>
+                    </a:p>
+                  </a:txBody>
+                  <a:tcPr marL="123825" marR="123825" marT="57150" marB="57150" anchor="ctr">
+                    <a:lnL w="9525" cap="flat" cmpd="sng" algn="ctr">
+                      <a:solidFill>
+                        <a:srgbClr val="D6D6D6"/>
+                      </a:solidFill>
+                      <a:prstDash val="solid"/>
+                      <a:round/>
+                      <a:headEnd type="none" w="med" len="med"/>
+                      <a:tailEnd type="none" w="med" len="med"/>
+                    </a:lnL>
+                    <a:lnR w="9525" cap="flat" cmpd="sng" algn="ctr">
+                      <a:solidFill>
+                        <a:srgbClr val="D6D6D6"/>
+                      </a:solidFill>
+                      <a:prstDash val="solid"/>
+                      <a:round/>
+                      <a:headEnd type="none" w="med" len="med"/>
+                      <a:tailEnd type="none" w="med" len="med"/>
+                    </a:lnR>
+                    <a:lnT w="9525" cap="flat" cmpd="sng" algn="ctr">
+                      <a:solidFill>
+                        <a:srgbClr val="D6D6D6"/>
+                      </a:solidFill>
+                      <a:prstDash val="solid"/>
+                      <a:round/>
+                      <a:headEnd type="none" w="med" len="med"/>
+                      <a:tailEnd type="none" w="med" len="med"/>
+                    </a:lnT>
+                    <a:lnB w="9525" cap="flat" cmpd="sng" algn="ctr">
+                      <a:solidFill>
+                        <a:srgbClr val="D6D6D6"/>
+                      </a:solidFill>
+                      <a:prstDash val="solid"/>
+                      <a:round/>
+                      <a:headEnd type="none" w="med" len="med"/>
+                      <a:tailEnd type="none" w="med" len="med"/>
+                    </a:lnB>
+                    <a:solidFill>
+                      <a:srgbClr val="FFFFFF"/>
+                    </a:solidFill>
+                  </a:tcPr>
+                </a:tc>
+                <a:tc>
+                  <a:txBody>
+                    <a:bodyPr/>
+                    <a:lstStyle/>
+                    <a:p>
+                      <a:pPr algn="r">
+                        <a:buNone/>
+                      </a:pPr>
+                      <a:r>
+                        <a:rPr lang="zh-TW" altLang="en-US">
+                          <a:effectLst/>
+                          <a:latin typeface="Microsoft JhengHei" panose="020B0604030504040204" pitchFamily="34" charset="-120"/>
+                          <a:ea typeface="Microsoft JhengHei" panose="020B0604030504040204" pitchFamily="34" charset="-120"/>
+                        </a:rPr>
+                        <a:t>約 </a:t>
+                      </a:r>
+                      <a:r>
+                        <a:rPr lang="en-US" altLang="zh-TW">
+                          <a:effectLst/>
+                          <a:latin typeface="Microsoft JhengHei" panose="020B0604030504040204" pitchFamily="34" charset="-120"/>
+                          <a:ea typeface="Microsoft JhengHei" panose="020B0604030504040204" pitchFamily="34" charset="-120"/>
+                        </a:rPr>
+                        <a:t>1.36 </a:t>
+                      </a:r>
+                      <a:r>
+                        <a:rPr lang="en">
+                          <a:effectLst/>
+                          <a:latin typeface="Microsoft JhengHei" panose="020B0604030504040204" pitchFamily="34" charset="-120"/>
+                          <a:ea typeface="Microsoft JhengHei" panose="020B0604030504040204" pitchFamily="34" charset="-120"/>
+                        </a:rPr>
+                        <a:t>GiB</a:t>
+                      </a:r>
+                    </a:p>
+                  </a:txBody>
+                  <a:tcPr marL="123825" marR="123825" marT="57150" marB="57150" anchor="ctr">
+                    <a:lnL w="9525" cap="flat" cmpd="sng" algn="ctr">
+                      <a:solidFill>
+                        <a:srgbClr val="D6D6D6"/>
+                      </a:solidFill>
+                      <a:prstDash val="solid"/>
+                      <a:round/>
+                      <a:headEnd type="none" w="med" len="med"/>
+                      <a:tailEnd type="none" w="med" len="med"/>
+                    </a:lnL>
+                    <a:lnR w="9525" cap="flat" cmpd="sng" algn="ctr">
+                      <a:solidFill>
+                        <a:srgbClr val="D6D6D6"/>
+                      </a:solidFill>
+                      <a:prstDash val="solid"/>
+                      <a:round/>
+                      <a:headEnd type="none" w="med" len="med"/>
+                      <a:tailEnd type="none" w="med" len="med"/>
+                    </a:lnR>
+                    <a:lnT w="9525" cap="flat" cmpd="sng" algn="ctr">
+                      <a:solidFill>
+                        <a:srgbClr val="D6D6D6"/>
+                      </a:solidFill>
+                      <a:prstDash val="solid"/>
+                      <a:round/>
+                      <a:headEnd type="none" w="med" len="med"/>
+                      <a:tailEnd type="none" w="med" len="med"/>
+                    </a:lnT>
+                    <a:lnB w="9525" cap="flat" cmpd="sng" algn="ctr">
+                      <a:solidFill>
+                        <a:srgbClr val="D6D6D6"/>
+                      </a:solidFill>
+                      <a:prstDash val="solid"/>
+                      <a:round/>
+                      <a:headEnd type="none" w="med" len="med"/>
+                      <a:tailEnd type="none" w="med" len="med"/>
+                    </a:lnB>
+                    <a:solidFill>
+                      <a:srgbClr val="FFFFFF"/>
+                    </a:solidFill>
+                  </a:tcPr>
+                </a:tc>
+                <a:extLst>
+                  <a:ext uri="{0D108BD9-81ED-4DB2-BD59-A6C34878D82A}">
+                    <a16:rowId xmlns:a16="http://schemas.microsoft.com/office/drawing/2014/main" val="2456835058"/>
+                  </a:ext>
+                </a:extLst>
+              </a:tr>
+              <a:tr h="187631">
+                <a:tc>
+                  <a:txBody>
+                    <a:bodyPr/>
+                    <a:lstStyle/>
+                    <a:p>
+                      <a:pPr>
+                        <a:buNone/>
+                      </a:pPr>
+                      <a:r>
+                        <a:rPr lang="zh-TW" altLang="en-US" dirty="0">
+                          <a:effectLst/>
+                          <a:latin typeface="Microsoft JhengHei" panose="020B0604030504040204" pitchFamily="34" charset="-120"/>
+                          <a:ea typeface="Microsoft JhengHei" panose="020B0604030504040204" pitchFamily="34" charset="-120"/>
+                        </a:rPr>
+                        <a:t>使用者 </a:t>
+                      </a:r>
+                      <a:r>
+                        <a:rPr lang="en-US" altLang="zh-TW" dirty="0">
+                          <a:effectLst/>
+                          <a:latin typeface="Microsoft JhengHei" panose="020B0604030504040204" pitchFamily="34" charset="-120"/>
+                          <a:ea typeface="Microsoft JhengHei" panose="020B0604030504040204" pitchFamily="34" charset="-120"/>
+                        </a:rPr>
+                        <a:t>users</a:t>
+                      </a:r>
+                      <a:endParaRPr lang="zh-TW" altLang="en-US" dirty="0">
+                        <a:effectLst/>
+                        <a:latin typeface="Microsoft JhengHei" panose="020B0604030504040204" pitchFamily="34" charset="-120"/>
+                        <a:ea typeface="Microsoft JhengHei" panose="020B0604030504040204" pitchFamily="34" charset="-120"/>
+                      </a:endParaRPr>
+                    </a:p>
+                  </a:txBody>
+                  <a:tcPr marL="123825" marR="123825" marT="57150" marB="57150" anchor="ctr">
+                    <a:lnL w="9525" cap="flat" cmpd="sng" algn="ctr">
+                      <a:solidFill>
+                        <a:srgbClr val="D6D6D6"/>
+                      </a:solidFill>
+                      <a:prstDash val="solid"/>
+                      <a:round/>
+                      <a:headEnd type="none" w="med" len="med"/>
+                      <a:tailEnd type="none" w="med" len="med"/>
+                    </a:lnL>
+                    <a:lnR w="9525" cap="flat" cmpd="sng" algn="ctr">
+                      <a:solidFill>
+                        <a:srgbClr val="D6D6D6"/>
+                      </a:solidFill>
+                      <a:prstDash val="solid"/>
+                      <a:round/>
+                      <a:headEnd type="none" w="med" len="med"/>
+                      <a:tailEnd type="none" w="med" len="med"/>
+                    </a:lnR>
+                    <a:lnT w="9525" cap="flat" cmpd="sng" algn="ctr">
+                      <a:solidFill>
+                        <a:srgbClr val="D6D6D6"/>
+                      </a:solidFill>
+                      <a:prstDash val="solid"/>
+                      <a:round/>
+                      <a:headEnd type="none" w="med" len="med"/>
+                      <a:tailEnd type="none" w="med" len="med"/>
+                    </a:lnT>
+                    <a:lnB w="9525" cap="flat" cmpd="sng" algn="ctr">
+                      <a:solidFill>
+                        <a:srgbClr val="D6D6D6"/>
+                      </a:solidFill>
+                      <a:prstDash val="solid"/>
+                      <a:round/>
+                      <a:headEnd type="none" w="med" len="med"/>
+                      <a:tailEnd type="none" w="med" len="med"/>
+                    </a:lnB>
+                    <a:solidFill>
+                      <a:srgbClr val="FFFFFF"/>
+                    </a:solidFill>
+                  </a:tcPr>
+                </a:tc>
+                <a:tc>
+                  <a:txBody>
+                    <a:bodyPr/>
+                    <a:lstStyle/>
+                    <a:p>
+                      <a:pPr algn="r">
+                        <a:buNone/>
+                      </a:pPr>
+                      <a:r>
+                        <a:rPr lang="en-US" altLang="zh-TW">
+                          <a:effectLst/>
+                          <a:latin typeface="Microsoft JhengHei" panose="020B0604030504040204" pitchFamily="34" charset="-120"/>
+                          <a:ea typeface="Microsoft JhengHei" panose="020B0604030504040204" pitchFamily="34" charset="-120"/>
+                        </a:rPr>
+                        <a:t>181</a:t>
+                      </a:r>
+                    </a:p>
+                  </a:txBody>
+                  <a:tcPr marL="123825" marR="123825" marT="57150" marB="57150" anchor="ctr">
+                    <a:lnL w="9525" cap="flat" cmpd="sng" algn="ctr">
+                      <a:solidFill>
+                        <a:srgbClr val="D6D6D6"/>
+                      </a:solidFill>
+                      <a:prstDash val="solid"/>
+                      <a:round/>
+                      <a:headEnd type="none" w="med" len="med"/>
+                      <a:tailEnd type="none" w="med" len="med"/>
+                    </a:lnL>
+                    <a:lnR w="9525" cap="flat" cmpd="sng" algn="ctr">
+                      <a:solidFill>
+                        <a:srgbClr val="D6D6D6"/>
+                      </a:solidFill>
+                      <a:prstDash val="solid"/>
+                      <a:round/>
+                      <a:headEnd type="none" w="med" len="med"/>
+                      <a:tailEnd type="none" w="med" len="med"/>
+                    </a:lnR>
+                    <a:lnT w="9525" cap="flat" cmpd="sng" algn="ctr">
+                      <a:solidFill>
+                        <a:srgbClr val="D6D6D6"/>
+                      </a:solidFill>
+                      <a:prstDash val="solid"/>
+                      <a:round/>
+                      <a:headEnd type="none" w="med" len="med"/>
+                      <a:tailEnd type="none" w="med" len="med"/>
+                    </a:lnT>
+                    <a:lnB w="9525" cap="flat" cmpd="sng" algn="ctr">
+                      <a:solidFill>
+                        <a:srgbClr val="D6D6D6"/>
+                      </a:solidFill>
+                      <a:prstDash val="solid"/>
+                      <a:round/>
+                      <a:headEnd type="none" w="med" len="med"/>
+                      <a:tailEnd type="none" w="med" len="med"/>
+                    </a:lnB>
+                    <a:solidFill>
+                      <a:srgbClr val="FFFFFF"/>
+                    </a:solidFill>
+                  </a:tcPr>
+                </a:tc>
+                <a:extLst>
+                  <a:ext uri="{0D108BD9-81ED-4DB2-BD59-A6C34878D82A}">
+                    <a16:rowId xmlns:a16="http://schemas.microsoft.com/office/drawing/2014/main" val="3989889354"/>
+                  </a:ext>
+                </a:extLst>
+              </a:tr>
+              <a:tr h="187631">
+                <a:tc>
+                  <a:txBody>
+                    <a:bodyPr/>
+                    <a:lstStyle/>
+                    <a:p>
+                      <a:pPr>
+                        <a:buNone/>
+                      </a:pPr>
+                      <a:r>
+                        <a:rPr lang="zh-TW" altLang="en-US" dirty="0">
+                          <a:effectLst/>
+                          <a:latin typeface="Microsoft JhengHei" panose="020B0604030504040204" pitchFamily="34" charset="-120"/>
+                          <a:ea typeface="Microsoft JhengHei" panose="020B0604030504040204" pitchFamily="34" charset="-120"/>
+                        </a:rPr>
+                        <a:t>工作空間 </a:t>
+                      </a:r>
+                      <a:r>
+                        <a:rPr lang="en-US" altLang="zh-TW" dirty="0">
+                          <a:effectLst/>
+                          <a:latin typeface="Microsoft JhengHei" panose="020B0604030504040204" pitchFamily="34" charset="-120"/>
+                          <a:ea typeface="Microsoft JhengHei" panose="020B0604030504040204" pitchFamily="34" charset="-120"/>
+                        </a:rPr>
+                        <a:t>workspaces</a:t>
+                      </a:r>
+                      <a:endParaRPr lang="zh-TW" altLang="en-US" dirty="0">
+                        <a:effectLst/>
+                        <a:latin typeface="Microsoft JhengHei" panose="020B0604030504040204" pitchFamily="34" charset="-120"/>
+                        <a:ea typeface="Microsoft JhengHei" panose="020B0604030504040204" pitchFamily="34" charset="-120"/>
+                      </a:endParaRPr>
+                    </a:p>
+                  </a:txBody>
+                  <a:tcPr marL="123825" marR="123825" marT="57150" marB="57150" anchor="ctr">
+                    <a:lnL w="9525" cap="flat" cmpd="sng" algn="ctr">
+                      <a:solidFill>
+                        <a:srgbClr val="D6D6D6"/>
+                      </a:solidFill>
+                      <a:prstDash val="solid"/>
+                      <a:round/>
+                      <a:headEnd type="none" w="med" len="med"/>
+                      <a:tailEnd type="none" w="med" len="med"/>
+                    </a:lnL>
+                    <a:lnR w="9525" cap="flat" cmpd="sng" algn="ctr">
+                      <a:solidFill>
+                        <a:srgbClr val="D6D6D6"/>
+                      </a:solidFill>
+                      <a:prstDash val="solid"/>
+                      <a:round/>
+                      <a:headEnd type="none" w="med" len="med"/>
+                      <a:tailEnd type="none" w="med" len="med"/>
+                    </a:lnR>
+                    <a:lnT w="9525" cap="flat" cmpd="sng" algn="ctr">
+                      <a:solidFill>
+                        <a:srgbClr val="D6D6D6"/>
+                      </a:solidFill>
+                      <a:prstDash val="solid"/>
+                      <a:round/>
+                      <a:headEnd type="none" w="med" len="med"/>
+                      <a:tailEnd type="none" w="med" len="med"/>
+                    </a:lnT>
+                    <a:lnB w="9525" cap="flat" cmpd="sng" algn="ctr">
+                      <a:solidFill>
+                        <a:srgbClr val="D6D6D6"/>
+                      </a:solidFill>
+                      <a:prstDash val="solid"/>
+                      <a:round/>
+                      <a:headEnd type="none" w="med" len="med"/>
+                      <a:tailEnd type="none" w="med" len="med"/>
+                    </a:lnB>
+                    <a:solidFill>
+                      <a:srgbClr val="FFFFFF"/>
+                    </a:solidFill>
+                  </a:tcPr>
+                </a:tc>
+                <a:tc>
+                  <a:txBody>
+                    <a:bodyPr/>
+                    <a:lstStyle/>
+                    <a:p>
+                      <a:pPr algn="r">
+                        <a:buNone/>
+                      </a:pPr>
+                      <a:r>
+                        <a:rPr lang="en-US" altLang="zh-TW">
+                          <a:effectLst/>
+                          <a:latin typeface="Microsoft JhengHei" panose="020B0604030504040204" pitchFamily="34" charset="-120"/>
+                          <a:ea typeface="Microsoft JhengHei" panose="020B0604030504040204" pitchFamily="34" charset="-120"/>
+                        </a:rPr>
+                        <a:t>29</a:t>
+                      </a:r>
+                    </a:p>
+                  </a:txBody>
+                  <a:tcPr marL="123825" marR="123825" marT="57150" marB="57150" anchor="ctr">
+                    <a:lnL w="9525" cap="flat" cmpd="sng" algn="ctr">
+                      <a:solidFill>
+                        <a:srgbClr val="D6D6D6"/>
+                      </a:solidFill>
+                      <a:prstDash val="solid"/>
+                      <a:round/>
+                      <a:headEnd type="none" w="med" len="med"/>
+                      <a:tailEnd type="none" w="med" len="med"/>
+                    </a:lnL>
+                    <a:lnR w="9525" cap="flat" cmpd="sng" algn="ctr">
+                      <a:solidFill>
+                        <a:srgbClr val="D6D6D6"/>
+                      </a:solidFill>
+                      <a:prstDash val="solid"/>
+                      <a:round/>
+                      <a:headEnd type="none" w="med" len="med"/>
+                      <a:tailEnd type="none" w="med" len="med"/>
+                    </a:lnR>
+                    <a:lnT w="9525" cap="flat" cmpd="sng" algn="ctr">
+                      <a:solidFill>
+                        <a:srgbClr val="D6D6D6"/>
+                      </a:solidFill>
+                      <a:prstDash val="solid"/>
+                      <a:round/>
+                      <a:headEnd type="none" w="med" len="med"/>
+                      <a:tailEnd type="none" w="med" len="med"/>
+                    </a:lnT>
+                    <a:lnB w="9525" cap="flat" cmpd="sng" algn="ctr">
+                      <a:solidFill>
+                        <a:srgbClr val="D6D6D6"/>
+                      </a:solidFill>
+                      <a:prstDash val="solid"/>
+                      <a:round/>
+                      <a:headEnd type="none" w="med" len="med"/>
+                      <a:tailEnd type="none" w="med" len="med"/>
+                    </a:lnB>
+                    <a:solidFill>
+                      <a:srgbClr val="FFFFFF"/>
+                    </a:solidFill>
+                  </a:tcPr>
+                </a:tc>
+                <a:extLst>
+                  <a:ext uri="{0D108BD9-81ED-4DB2-BD59-A6C34878D82A}">
+                    <a16:rowId xmlns:a16="http://schemas.microsoft.com/office/drawing/2014/main" val="2593033871"/>
+                  </a:ext>
+                </a:extLst>
+              </a:tr>
+              <a:tr h="187631">
+                <a:tc>
+                  <a:txBody>
+                    <a:bodyPr/>
+                    <a:lstStyle/>
+                    <a:p>
+                      <a:pPr>
+                        <a:buNone/>
+                      </a:pPr>
+                      <a:r>
+                        <a:rPr lang="zh-TW" altLang="en-US" dirty="0">
+                          <a:effectLst/>
+                          <a:latin typeface="Microsoft JhengHei" panose="020B0604030504040204" pitchFamily="34" charset="-120"/>
+                          <a:ea typeface="Microsoft JhengHei" panose="020B0604030504040204" pitchFamily="34" charset="-120"/>
+                        </a:rPr>
+                        <a:t>資料來源 </a:t>
+                      </a:r>
+                      <a:r>
+                        <a:rPr lang="en" dirty="0">
+                          <a:effectLst/>
+                          <a:latin typeface="Microsoft JhengHei" panose="020B0604030504040204" pitchFamily="34" charset="-120"/>
+                          <a:ea typeface="Microsoft JhengHei" panose="020B0604030504040204" pitchFamily="34" charset="-120"/>
+                        </a:rPr>
+                        <a:t>feeds</a:t>
+                      </a:r>
+                    </a:p>
+                  </a:txBody>
+                  <a:tcPr marL="123825" marR="123825" marT="57150" marB="57150" anchor="ctr">
+                    <a:lnL w="9525" cap="flat" cmpd="sng" algn="ctr">
+                      <a:solidFill>
+                        <a:srgbClr val="D6D6D6"/>
+                      </a:solidFill>
+                      <a:prstDash val="solid"/>
+                      <a:round/>
+                      <a:headEnd type="none" w="med" len="med"/>
+                      <a:tailEnd type="none" w="med" len="med"/>
+                    </a:lnL>
+                    <a:lnR w="9525" cap="flat" cmpd="sng" algn="ctr">
+                      <a:solidFill>
+                        <a:srgbClr val="D6D6D6"/>
+                      </a:solidFill>
+                      <a:prstDash val="solid"/>
+                      <a:round/>
+                      <a:headEnd type="none" w="med" len="med"/>
+                      <a:tailEnd type="none" w="med" len="med"/>
+                    </a:lnR>
+                    <a:lnT w="9525" cap="flat" cmpd="sng" algn="ctr">
+                      <a:solidFill>
+                        <a:srgbClr val="D6D6D6"/>
+                      </a:solidFill>
+                      <a:prstDash val="solid"/>
+                      <a:round/>
+                      <a:headEnd type="none" w="med" len="med"/>
+                      <a:tailEnd type="none" w="med" len="med"/>
+                    </a:lnT>
+                    <a:lnB w="9525" cap="flat" cmpd="sng" algn="ctr">
+                      <a:solidFill>
+                        <a:srgbClr val="D6D6D6"/>
+                      </a:solidFill>
+                      <a:prstDash val="solid"/>
+                      <a:round/>
+                      <a:headEnd type="none" w="med" len="med"/>
+                      <a:tailEnd type="none" w="med" len="med"/>
+                    </a:lnB>
+                    <a:solidFill>
+                      <a:srgbClr val="FFFFFF"/>
+                    </a:solidFill>
+                  </a:tcPr>
+                </a:tc>
+                <a:tc>
+                  <a:txBody>
+                    <a:bodyPr/>
+                    <a:lstStyle/>
+                    <a:p>
+                      <a:pPr algn="r">
+                        <a:buNone/>
+                      </a:pPr>
+                      <a:r>
+                        <a:rPr lang="en-US" altLang="zh-TW">
+                          <a:effectLst/>
+                          <a:latin typeface="Microsoft JhengHei" panose="020B0604030504040204" pitchFamily="34" charset="-120"/>
+                          <a:ea typeface="Microsoft JhengHei" panose="020B0604030504040204" pitchFamily="34" charset="-120"/>
+                        </a:rPr>
+                        <a:t>176</a:t>
+                      </a:r>
+                      <a:r>
+                        <a:rPr lang="zh-TW" altLang="en-US">
+                          <a:effectLst/>
+                          <a:latin typeface="Microsoft JhengHei" panose="020B0604030504040204" pitchFamily="34" charset="-120"/>
+                          <a:ea typeface="Microsoft JhengHei" panose="020B0604030504040204" pitchFamily="34" charset="-120"/>
+                        </a:rPr>
+                        <a:t>，其中 </a:t>
+                      </a:r>
+                      <a:r>
+                        <a:rPr lang="en-US" altLang="zh-TW">
+                          <a:effectLst/>
+                          <a:latin typeface="Microsoft JhengHei" panose="020B0604030504040204" pitchFamily="34" charset="-120"/>
+                          <a:ea typeface="Microsoft JhengHei" panose="020B0604030504040204" pitchFamily="34" charset="-120"/>
+                        </a:rPr>
+                        <a:t>159 </a:t>
+                      </a:r>
+                      <a:r>
+                        <a:rPr lang="en">
+                          <a:effectLst/>
+                          <a:latin typeface="Microsoft JhengHei" panose="020B0604030504040204" pitchFamily="34" charset="-120"/>
+                          <a:ea typeface="Microsoft JhengHei" panose="020B0604030504040204" pitchFamily="34" charset="-120"/>
+                        </a:rPr>
+                        <a:t>active</a:t>
+                      </a:r>
+                    </a:p>
+                  </a:txBody>
+                  <a:tcPr marL="123825" marR="123825" marT="57150" marB="57150" anchor="ctr">
+                    <a:lnL w="9525" cap="flat" cmpd="sng" algn="ctr">
+                      <a:solidFill>
+                        <a:srgbClr val="D6D6D6"/>
+                      </a:solidFill>
+                      <a:prstDash val="solid"/>
+                      <a:round/>
+                      <a:headEnd type="none" w="med" len="med"/>
+                      <a:tailEnd type="none" w="med" len="med"/>
+                    </a:lnL>
+                    <a:lnR w="9525" cap="flat" cmpd="sng" algn="ctr">
+                      <a:solidFill>
+                        <a:srgbClr val="D6D6D6"/>
+                      </a:solidFill>
+                      <a:prstDash val="solid"/>
+                      <a:round/>
+                      <a:headEnd type="none" w="med" len="med"/>
+                      <a:tailEnd type="none" w="med" len="med"/>
+                    </a:lnR>
+                    <a:lnT w="9525" cap="flat" cmpd="sng" algn="ctr">
+                      <a:solidFill>
+                        <a:srgbClr val="D6D6D6"/>
+                      </a:solidFill>
+                      <a:prstDash val="solid"/>
+                      <a:round/>
+                      <a:headEnd type="none" w="med" len="med"/>
+                      <a:tailEnd type="none" w="med" len="med"/>
+                    </a:lnT>
+                    <a:lnB w="9525" cap="flat" cmpd="sng" algn="ctr">
+                      <a:solidFill>
+                        <a:srgbClr val="D6D6D6"/>
+                      </a:solidFill>
+                      <a:prstDash val="solid"/>
+                      <a:round/>
+                      <a:headEnd type="none" w="med" len="med"/>
+                      <a:tailEnd type="none" w="med" len="med"/>
+                    </a:lnB>
+                    <a:solidFill>
+                      <a:srgbClr val="FFFFFF"/>
+                    </a:solidFill>
+                  </a:tcPr>
+                </a:tc>
+                <a:extLst>
+                  <a:ext uri="{0D108BD9-81ED-4DB2-BD59-A6C34878D82A}">
+                    <a16:rowId xmlns:a16="http://schemas.microsoft.com/office/drawing/2014/main" val="2604882075"/>
+                  </a:ext>
+                </a:extLst>
+              </a:tr>
+              <a:tr h="187631">
+                <a:tc>
+                  <a:txBody>
+                    <a:bodyPr/>
+                    <a:lstStyle/>
+                    <a:p>
+                      <a:pPr>
+                        <a:buNone/>
+                      </a:pPr>
+                      <a:r>
+                        <a:rPr lang="zh-TW" altLang="en-US" dirty="0">
+                          <a:effectLst/>
+                          <a:latin typeface="Microsoft JhengHei" panose="020B0604030504040204" pitchFamily="34" charset="-120"/>
+                          <a:ea typeface="Microsoft JhengHei" panose="020B0604030504040204" pitchFamily="34" charset="-120"/>
+                        </a:rPr>
+                        <a:t>資訊助手 </a:t>
+                      </a:r>
+                      <a:r>
+                        <a:rPr lang="en" dirty="0">
+                          <a:effectLst/>
+                          <a:latin typeface="Microsoft JhengHei" panose="020B0604030504040204" pitchFamily="34" charset="-120"/>
+                          <a:ea typeface="Microsoft JhengHei" panose="020B0604030504040204" pitchFamily="34" charset="-120"/>
+                        </a:rPr>
+                        <a:t>assistants</a:t>
+                      </a:r>
+                    </a:p>
+                  </a:txBody>
+                  <a:tcPr marL="123825" marR="123825" marT="57150" marB="57150" anchor="ctr">
+                    <a:lnL w="9525" cap="flat" cmpd="sng" algn="ctr">
+                      <a:solidFill>
+                        <a:srgbClr val="D6D6D6"/>
+                      </a:solidFill>
+                      <a:prstDash val="solid"/>
+                      <a:round/>
+                      <a:headEnd type="none" w="med" len="med"/>
+                      <a:tailEnd type="none" w="med" len="med"/>
+                    </a:lnL>
+                    <a:lnR w="9525" cap="flat" cmpd="sng" algn="ctr">
+                      <a:solidFill>
+                        <a:srgbClr val="D6D6D6"/>
+                      </a:solidFill>
+                      <a:prstDash val="solid"/>
+                      <a:round/>
+                      <a:headEnd type="none" w="med" len="med"/>
+                      <a:tailEnd type="none" w="med" len="med"/>
+                    </a:lnR>
+                    <a:lnT w="9525" cap="flat" cmpd="sng" algn="ctr">
+                      <a:solidFill>
+                        <a:srgbClr val="D6D6D6"/>
+                      </a:solidFill>
+                      <a:prstDash val="solid"/>
+                      <a:round/>
+                      <a:headEnd type="none" w="med" len="med"/>
+                      <a:tailEnd type="none" w="med" len="med"/>
+                    </a:lnT>
+                    <a:lnB w="9525" cap="flat" cmpd="sng" algn="ctr">
+                      <a:solidFill>
+                        <a:srgbClr val="D6D6D6"/>
+                      </a:solidFill>
+                      <a:prstDash val="solid"/>
+                      <a:round/>
+                      <a:headEnd type="none" w="med" len="med"/>
+                      <a:tailEnd type="none" w="med" len="med"/>
+                    </a:lnB>
+                    <a:solidFill>
+                      <a:srgbClr val="FFFFFF"/>
+                    </a:solidFill>
+                  </a:tcPr>
+                </a:tc>
+                <a:tc>
+                  <a:txBody>
+                    <a:bodyPr/>
+                    <a:lstStyle/>
+                    <a:p>
+                      <a:pPr algn="r">
+                        <a:buNone/>
+                      </a:pPr>
+                      <a:r>
+                        <a:rPr lang="en-US" altLang="zh-TW">
+                          <a:effectLst/>
+                          <a:latin typeface="Microsoft JhengHei" panose="020B0604030504040204" pitchFamily="34" charset="-120"/>
+                          <a:ea typeface="Microsoft JhengHei" panose="020B0604030504040204" pitchFamily="34" charset="-120"/>
+                        </a:rPr>
+                        <a:t>41</a:t>
+                      </a:r>
+                      <a:r>
+                        <a:rPr lang="zh-TW" altLang="en-US">
+                          <a:effectLst/>
+                          <a:latin typeface="Microsoft JhengHei" panose="020B0604030504040204" pitchFamily="34" charset="-120"/>
+                          <a:ea typeface="Microsoft JhengHei" panose="020B0604030504040204" pitchFamily="34" charset="-120"/>
+                        </a:rPr>
+                        <a:t>，其中 </a:t>
+                      </a:r>
+                      <a:r>
+                        <a:rPr lang="en-US" altLang="zh-TW">
+                          <a:effectLst/>
+                          <a:latin typeface="Microsoft JhengHei" panose="020B0604030504040204" pitchFamily="34" charset="-120"/>
+                          <a:ea typeface="Microsoft JhengHei" panose="020B0604030504040204" pitchFamily="34" charset="-120"/>
+                        </a:rPr>
+                        <a:t>37 </a:t>
+                      </a:r>
+                      <a:r>
+                        <a:rPr lang="en">
+                          <a:effectLst/>
+                          <a:latin typeface="Microsoft JhengHei" panose="020B0604030504040204" pitchFamily="34" charset="-120"/>
+                          <a:ea typeface="Microsoft JhengHei" panose="020B0604030504040204" pitchFamily="34" charset="-120"/>
+                        </a:rPr>
+                        <a:t>active</a:t>
+                      </a:r>
+                    </a:p>
+                  </a:txBody>
+                  <a:tcPr marL="123825" marR="123825" marT="57150" marB="57150" anchor="ctr">
+                    <a:lnL w="9525" cap="flat" cmpd="sng" algn="ctr">
+                      <a:solidFill>
+                        <a:srgbClr val="D6D6D6"/>
+                      </a:solidFill>
+                      <a:prstDash val="solid"/>
+                      <a:round/>
+                      <a:headEnd type="none" w="med" len="med"/>
+                      <a:tailEnd type="none" w="med" len="med"/>
+                    </a:lnL>
+                    <a:lnR w="9525" cap="flat" cmpd="sng" algn="ctr">
+                      <a:solidFill>
+                        <a:srgbClr val="D6D6D6"/>
+                      </a:solidFill>
+                      <a:prstDash val="solid"/>
+                      <a:round/>
+                      <a:headEnd type="none" w="med" len="med"/>
+                      <a:tailEnd type="none" w="med" len="med"/>
+                    </a:lnR>
+                    <a:lnT w="9525" cap="flat" cmpd="sng" algn="ctr">
+                      <a:solidFill>
+                        <a:srgbClr val="D6D6D6"/>
+                      </a:solidFill>
+                      <a:prstDash val="solid"/>
+                      <a:round/>
+                      <a:headEnd type="none" w="med" len="med"/>
+                      <a:tailEnd type="none" w="med" len="med"/>
+                    </a:lnT>
+                    <a:lnB w="9525" cap="flat" cmpd="sng" algn="ctr">
+                      <a:solidFill>
+                        <a:srgbClr val="D6D6D6"/>
+                      </a:solidFill>
+                      <a:prstDash val="solid"/>
+                      <a:round/>
+                      <a:headEnd type="none" w="med" len="med"/>
+                      <a:tailEnd type="none" w="med" len="med"/>
+                    </a:lnB>
+                    <a:solidFill>
+                      <a:srgbClr val="FFFFFF"/>
+                    </a:solidFill>
+                  </a:tcPr>
+                </a:tc>
+                <a:extLst>
+                  <a:ext uri="{0D108BD9-81ED-4DB2-BD59-A6C34878D82A}">
+                    <a16:rowId xmlns:a16="http://schemas.microsoft.com/office/drawing/2014/main" val="887413197"/>
+                  </a:ext>
+                </a:extLst>
+              </a:tr>
+              <a:tr h="187631">
+                <a:tc>
+                  <a:txBody>
+                    <a:bodyPr/>
+                    <a:lstStyle/>
+                    <a:p>
+                      <a:pPr>
+                        <a:buNone/>
+                      </a:pPr>
+                      <a:r>
+                        <a:rPr lang="en" dirty="0" err="1">
+                          <a:effectLst/>
+                          <a:latin typeface="Microsoft JhengHei" panose="020B0604030504040204" pitchFamily="34" charset="-120"/>
+                          <a:ea typeface="Microsoft JhengHei" panose="020B0604030504040204" pitchFamily="34" charset="-120"/>
+                        </a:rPr>
+                        <a:t>文章總數</a:t>
+                      </a:r>
+                      <a:r>
+                        <a:rPr lang="zh-TW" altLang="en-US" dirty="0">
+                          <a:effectLst/>
+                          <a:latin typeface="Microsoft JhengHei" panose="020B0604030504040204" pitchFamily="34" charset="-120"/>
+                          <a:ea typeface="Microsoft JhengHei" panose="020B0604030504040204" pitchFamily="34" charset="-120"/>
+                        </a:rPr>
+                        <a:t> </a:t>
+                      </a:r>
+                      <a:r>
+                        <a:rPr lang="en" dirty="0">
+                          <a:effectLst/>
+                          <a:latin typeface="Microsoft JhengHei" panose="020B0604030504040204" pitchFamily="34" charset="-120"/>
+                          <a:ea typeface="Microsoft JhengHei" panose="020B0604030504040204" pitchFamily="34" charset="-120"/>
+                        </a:rPr>
+                        <a:t>articles </a:t>
+                      </a:r>
+                    </a:p>
+                  </a:txBody>
+                  <a:tcPr marL="123825" marR="123825" marT="57150" marB="57150" anchor="ctr">
+                    <a:lnL w="9525" cap="flat" cmpd="sng" algn="ctr">
+                      <a:solidFill>
+                        <a:srgbClr val="D6D6D6"/>
+                      </a:solidFill>
+                      <a:prstDash val="solid"/>
+                      <a:round/>
+                      <a:headEnd type="none" w="med" len="med"/>
+                      <a:tailEnd type="none" w="med" len="med"/>
+                    </a:lnL>
+                    <a:lnR w="9525" cap="flat" cmpd="sng" algn="ctr">
+                      <a:solidFill>
+                        <a:srgbClr val="D6D6D6"/>
+                      </a:solidFill>
+                      <a:prstDash val="solid"/>
+                      <a:round/>
+                      <a:headEnd type="none" w="med" len="med"/>
+                      <a:tailEnd type="none" w="med" len="med"/>
+                    </a:lnR>
+                    <a:lnT w="9525" cap="flat" cmpd="sng" algn="ctr">
+                      <a:solidFill>
+                        <a:srgbClr val="D6D6D6"/>
+                      </a:solidFill>
+                      <a:prstDash val="solid"/>
+                      <a:round/>
+                      <a:headEnd type="none" w="med" len="med"/>
+                      <a:tailEnd type="none" w="med" len="med"/>
+                    </a:lnT>
+                    <a:lnB w="9525" cap="flat" cmpd="sng" algn="ctr">
+                      <a:solidFill>
+                        <a:srgbClr val="D6D6D6"/>
+                      </a:solidFill>
+                      <a:prstDash val="solid"/>
+                      <a:round/>
+                      <a:headEnd type="none" w="med" len="med"/>
+                      <a:tailEnd type="none" w="med" len="med"/>
+                    </a:lnB>
+                    <a:solidFill>
+                      <a:srgbClr val="FFFFFF"/>
+                    </a:solidFill>
+                  </a:tcPr>
+                </a:tc>
+                <a:tc>
+                  <a:txBody>
+                    <a:bodyPr/>
+                    <a:lstStyle/>
+                    <a:p>
+                      <a:pPr algn="r">
+                        <a:buNone/>
+                      </a:pPr>
+                      <a:r>
+                        <a:rPr lang="en-US" altLang="zh-TW">
+                          <a:effectLst/>
+                          <a:latin typeface="Microsoft JhengHei" panose="020B0604030504040204" pitchFamily="34" charset="-120"/>
+                          <a:ea typeface="Microsoft JhengHei" panose="020B0604030504040204" pitchFamily="34" charset="-120"/>
+                        </a:rPr>
+                        <a:t>280,221</a:t>
+                      </a:r>
+                    </a:p>
+                  </a:txBody>
+                  <a:tcPr marL="123825" marR="123825" marT="57150" marB="57150" anchor="ctr">
+                    <a:lnL w="9525" cap="flat" cmpd="sng" algn="ctr">
+                      <a:solidFill>
+                        <a:srgbClr val="D6D6D6"/>
+                      </a:solidFill>
+                      <a:prstDash val="solid"/>
+                      <a:round/>
+                      <a:headEnd type="none" w="med" len="med"/>
+                      <a:tailEnd type="none" w="med" len="med"/>
+                    </a:lnL>
+                    <a:lnR w="9525" cap="flat" cmpd="sng" algn="ctr">
+                      <a:solidFill>
+                        <a:srgbClr val="D6D6D6"/>
+                      </a:solidFill>
+                      <a:prstDash val="solid"/>
+                      <a:round/>
+                      <a:headEnd type="none" w="med" len="med"/>
+                      <a:tailEnd type="none" w="med" len="med"/>
+                    </a:lnR>
+                    <a:lnT w="9525" cap="flat" cmpd="sng" algn="ctr">
+                      <a:solidFill>
+                        <a:srgbClr val="D6D6D6"/>
+                      </a:solidFill>
+                      <a:prstDash val="solid"/>
+                      <a:round/>
+                      <a:headEnd type="none" w="med" len="med"/>
+                      <a:tailEnd type="none" w="med" len="med"/>
+                    </a:lnT>
+                    <a:lnB w="9525" cap="flat" cmpd="sng" algn="ctr">
+                      <a:solidFill>
+                        <a:srgbClr val="D6D6D6"/>
+                      </a:solidFill>
+                      <a:prstDash val="solid"/>
+                      <a:round/>
+                      <a:headEnd type="none" w="med" len="med"/>
+                      <a:tailEnd type="none" w="med" len="med"/>
+                    </a:lnB>
+                    <a:solidFill>
+                      <a:srgbClr val="FFFFFF"/>
+                    </a:solidFill>
+                  </a:tcPr>
+                </a:tc>
+                <a:extLst>
+                  <a:ext uri="{0D108BD9-81ED-4DB2-BD59-A6C34878D82A}">
+                    <a16:rowId xmlns:a16="http://schemas.microsoft.com/office/drawing/2014/main" val="3410029300"/>
+                  </a:ext>
+                </a:extLst>
+              </a:tr>
+              <a:tr h="187631">
+                <a:tc>
+                  <a:txBody>
+                    <a:bodyPr/>
+                    <a:lstStyle/>
+                    <a:p>
+                      <a:pPr>
+                        <a:buNone/>
+                      </a:pPr>
+                      <a:r>
+                        <a:rPr lang="en" dirty="0" err="1">
+                          <a:effectLst/>
+                          <a:latin typeface="Microsoft JhengHei" panose="020B0604030504040204" pitchFamily="34" charset="-120"/>
+                          <a:ea typeface="Microsoft JhengHei" panose="020B0604030504040204" pitchFamily="34" charset="-120"/>
+                        </a:rPr>
+                        <a:t>評估總數</a:t>
+                      </a:r>
+                      <a:r>
+                        <a:rPr lang="zh-TW" altLang="en-US" dirty="0">
+                          <a:effectLst/>
+                          <a:latin typeface="Microsoft JhengHei" panose="020B0604030504040204" pitchFamily="34" charset="-120"/>
+                          <a:ea typeface="Microsoft JhengHei" panose="020B0604030504040204" pitchFamily="34" charset="-120"/>
+                        </a:rPr>
+                        <a:t> </a:t>
+                      </a:r>
+                      <a:r>
+                        <a:rPr lang="en" dirty="0" err="1">
+                          <a:effectLst/>
+                          <a:latin typeface="Microsoft JhengHei" panose="020B0604030504040204" pitchFamily="34" charset="-120"/>
+                          <a:ea typeface="Microsoft JhengHei" panose="020B0604030504040204" pitchFamily="34" charset="-120"/>
+                        </a:rPr>
+                        <a:t>assistantarticles</a:t>
+                      </a:r>
+                      <a:endParaRPr lang="en" dirty="0">
+                        <a:effectLst/>
+                        <a:latin typeface="Microsoft JhengHei" panose="020B0604030504040204" pitchFamily="34" charset="-120"/>
+                        <a:ea typeface="Microsoft JhengHei" panose="020B0604030504040204" pitchFamily="34" charset="-120"/>
+                      </a:endParaRPr>
+                    </a:p>
+                  </a:txBody>
+                  <a:tcPr marL="123825" marR="123825" marT="57150" marB="57150" anchor="ctr">
+                    <a:lnL w="9525" cap="flat" cmpd="sng" algn="ctr">
+                      <a:solidFill>
+                        <a:srgbClr val="D6D6D6"/>
+                      </a:solidFill>
+                      <a:prstDash val="solid"/>
+                      <a:round/>
+                      <a:headEnd type="none" w="med" len="med"/>
+                      <a:tailEnd type="none" w="med" len="med"/>
+                    </a:lnL>
+                    <a:lnR w="9525" cap="flat" cmpd="sng" algn="ctr">
+                      <a:solidFill>
+                        <a:srgbClr val="D6D6D6"/>
+                      </a:solidFill>
+                      <a:prstDash val="solid"/>
+                      <a:round/>
+                      <a:headEnd type="none" w="med" len="med"/>
+                      <a:tailEnd type="none" w="med" len="med"/>
+                    </a:lnR>
+                    <a:lnT w="9525" cap="flat" cmpd="sng" algn="ctr">
+                      <a:solidFill>
+                        <a:srgbClr val="D6D6D6"/>
+                      </a:solidFill>
+                      <a:prstDash val="solid"/>
+                      <a:round/>
+                      <a:headEnd type="none" w="med" len="med"/>
+                      <a:tailEnd type="none" w="med" len="med"/>
+                    </a:lnT>
+                    <a:lnB w="9525" cap="flat" cmpd="sng" algn="ctr">
+                      <a:solidFill>
+                        <a:srgbClr val="D6D6D6"/>
+                      </a:solidFill>
+                      <a:prstDash val="solid"/>
+                      <a:round/>
+                      <a:headEnd type="none" w="med" len="med"/>
+                      <a:tailEnd type="none" w="med" len="med"/>
+                    </a:lnB>
+                    <a:solidFill>
+                      <a:srgbClr val="FFFFFF"/>
+                    </a:solidFill>
+                  </a:tcPr>
+                </a:tc>
+                <a:tc>
+                  <a:txBody>
+                    <a:bodyPr/>
+                    <a:lstStyle/>
+                    <a:p>
+                      <a:pPr algn="r">
+                        <a:buNone/>
+                      </a:pPr>
+                      <a:r>
+                        <a:rPr lang="en-US" altLang="zh-TW">
+                          <a:effectLst/>
+                          <a:latin typeface="Microsoft JhengHei" panose="020B0604030504040204" pitchFamily="34" charset="-120"/>
+                          <a:ea typeface="Microsoft JhengHei" panose="020B0604030504040204" pitchFamily="34" charset="-120"/>
+                        </a:rPr>
+                        <a:t>976,905</a:t>
+                      </a:r>
+                    </a:p>
+                  </a:txBody>
+                  <a:tcPr marL="123825" marR="123825" marT="57150" marB="57150" anchor="ctr">
+                    <a:lnL w="9525" cap="flat" cmpd="sng" algn="ctr">
+                      <a:solidFill>
+                        <a:srgbClr val="D6D6D6"/>
+                      </a:solidFill>
+                      <a:prstDash val="solid"/>
+                      <a:round/>
+                      <a:headEnd type="none" w="med" len="med"/>
+                      <a:tailEnd type="none" w="med" len="med"/>
+                    </a:lnL>
+                    <a:lnR w="9525" cap="flat" cmpd="sng" algn="ctr">
+                      <a:solidFill>
+                        <a:srgbClr val="D6D6D6"/>
+                      </a:solidFill>
+                      <a:prstDash val="solid"/>
+                      <a:round/>
+                      <a:headEnd type="none" w="med" len="med"/>
+                      <a:tailEnd type="none" w="med" len="med"/>
+                    </a:lnR>
+                    <a:lnT w="9525" cap="flat" cmpd="sng" algn="ctr">
+                      <a:solidFill>
+                        <a:srgbClr val="D6D6D6"/>
+                      </a:solidFill>
+                      <a:prstDash val="solid"/>
+                      <a:round/>
+                      <a:headEnd type="none" w="med" len="med"/>
+                      <a:tailEnd type="none" w="med" len="med"/>
+                    </a:lnT>
+                    <a:lnB w="9525" cap="flat" cmpd="sng" algn="ctr">
+                      <a:solidFill>
+                        <a:srgbClr val="D6D6D6"/>
+                      </a:solidFill>
+                      <a:prstDash val="solid"/>
+                      <a:round/>
+                      <a:headEnd type="none" w="med" len="med"/>
+                      <a:tailEnd type="none" w="med" len="med"/>
+                    </a:lnB>
+                    <a:solidFill>
+                      <a:srgbClr val="FFFFFF"/>
+                    </a:solidFill>
+                  </a:tcPr>
+                </a:tc>
+                <a:extLst>
+                  <a:ext uri="{0D108BD9-81ED-4DB2-BD59-A6C34878D82A}">
+                    <a16:rowId xmlns:a16="http://schemas.microsoft.com/office/drawing/2014/main" val="307783756"/>
+                  </a:ext>
+                </a:extLst>
+              </a:tr>
+              <a:tr h="187631">
+                <a:tc>
+                  <a:txBody>
+                    <a:bodyPr/>
+                    <a:lstStyle/>
+                    <a:p>
+                      <a:pPr>
+                        <a:buNone/>
+                      </a:pPr>
+                      <a:r>
+                        <a:rPr lang="en" dirty="0" err="1">
+                          <a:effectLst/>
+                          <a:latin typeface="Microsoft JhengHei" panose="020B0604030504040204" pitchFamily="34" charset="-120"/>
+                          <a:ea typeface="Microsoft JhengHei" panose="020B0604030504040204" pitchFamily="34" charset="-120"/>
+                        </a:rPr>
+                        <a:t>通知總數</a:t>
+                      </a:r>
+                      <a:r>
+                        <a:rPr lang="zh-TW" altLang="en-US" dirty="0">
+                          <a:effectLst/>
+                          <a:latin typeface="Microsoft JhengHei" panose="020B0604030504040204" pitchFamily="34" charset="-120"/>
+                          <a:ea typeface="Microsoft JhengHei" panose="020B0604030504040204" pitchFamily="34" charset="-120"/>
+                        </a:rPr>
+                        <a:t> </a:t>
+                      </a:r>
+                      <a:r>
+                        <a:rPr lang="en" dirty="0">
+                          <a:effectLst/>
+                          <a:latin typeface="Microsoft JhengHei" panose="020B0604030504040204" pitchFamily="34" charset="-120"/>
+                          <a:ea typeface="Microsoft JhengHei" panose="020B0604030504040204" pitchFamily="34" charset="-120"/>
+                        </a:rPr>
+                        <a:t>notifications</a:t>
+                      </a:r>
+                    </a:p>
+                  </a:txBody>
+                  <a:tcPr marL="123825" marR="123825" marT="57150" marB="57150" anchor="ctr">
+                    <a:lnL w="9525" cap="flat" cmpd="sng" algn="ctr">
+                      <a:solidFill>
+                        <a:srgbClr val="D6D6D6"/>
+                      </a:solidFill>
+                      <a:prstDash val="solid"/>
+                      <a:round/>
+                      <a:headEnd type="none" w="med" len="med"/>
+                      <a:tailEnd type="none" w="med" len="med"/>
+                    </a:lnL>
+                    <a:lnR w="9525" cap="flat" cmpd="sng" algn="ctr">
+                      <a:solidFill>
+                        <a:srgbClr val="D6D6D6"/>
+                      </a:solidFill>
+                      <a:prstDash val="solid"/>
+                      <a:round/>
+                      <a:headEnd type="none" w="med" len="med"/>
+                      <a:tailEnd type="none" w="med" len="med"/>
+                    </a:lnR>
+                    <a:lnT w="9525" cap="flat" cmpd="sng" algn="ctr">
+                      <a:solidFill>
+                        <a:srgbClr val="D6D6D6"/>
+                      </a:solidFill>
+                      <a:prstDash val="solid"/>
+                      <a:round/>
+                      <a:headEnd type="none" w="med" len="med"/>
+                      <a:tailEnd type="none" w="med" len="med"/>
+                    </a:lnT>
+                    <a:lnB w="9525" cap="flat" cmpd="sng" algn="ctr">
+                      <a:solidFill>
+                        <a:srgbClr val="D6D6D6"/>
+                      </a:solidFill>
+                      <a:prstDash val="solid"/>
+                      <a:round/>
+                      <a:headEnd type="none" w="med" len="med"/>
+                      <a:tailEnd type="none" w="med" len="med"/>
+                    </a:lnB>
+                    <a:solidFill>
+                      <a:srgbClr val="FFFFFF"/>
+                    </a:solidFill>
+                  </a:tcPr>
+                </a:tc>
+                <a:tc>
+                  <a:txBody>
+                    <a:bodyPr/>
+                    <a:lstStyle/>
+                    <a:p>
+                      <a:pPr algn="r">
+                        <a:buNone/>
+                      </a:pPr>
+                      <a:r>
+                        <a:rPr lang="en-US" altLang="zh-TW" dirty="0">
+                          <a:effectLst/>
+                          <a:latin typeface="Microsoft JhengHei" panose="020B0604030504040204" pitchFamily="34" charset="-120"/>
+                          <a:ea typeface="Microsoft JhengHei" panose="020B0604030504040204" pitchFamily="34" charset="-120"/>
+                        </a:rPr>
+                        <a:t>4,629</a:t>
+                      </a:r>
+                    </a:p>
+                  </a:txBody>
+                  <a:tcPr marL="123825" marR="123825" marT="57150" marB="57150" anchor="ctr">
+                    <a:lnL w="9525" cap="flat" cmpd="sng" algn="ctr">
+                      <a:solidFill>
+                        <a:srgbClr val="D6D6D6"/>
+                      </a:solidFill>
+                      <a:prstDash val="solid"/>
+                      <a:round/>
+                      <a:headEnd type="none" w="med" len="med"/>
+                      <a:tailEnd type="none" w="med" len="med"/>
+                    </a:lnL>
+                    <a:lnR w="9525" cap="flat" cmpd="sng" algn="ctr">
+                      <a:solidFill>
+                        <a:srgbClr val="D6D6D6"/>
+                      </a:solidFill>
+                      <a:prstDash val="solid"/>
+                      <a:round/>
+                      <a:headEnd type="none" w="med" len="med"/>
+                      <a:tailEnd type="none" w="med" len="med"/>
+                    </a:lnR>
+                    <a:lnT w="9525" cap="flat" cmpd="sng" algn="ctr">
+                      <a:solidFill>
+                        <a:srgbClr val="D6D6D6"/>
+                      </a:solidFill>
+                      <a:prstDash val="solid"/>
+                      <a:round/>
+                      <a:headEnd type="none" w="med" len="med"/>
+                      <a:tailEnd type="none" w="med" len="med"/>
+                    </a:lnT>
+                    <a:lnB w="9525" cap="flat" cmpd="sng" algn="ctr">
+                      <a:solidFill>
+                        <a:srgbClr val="D6D6D6"/>
+                      </a:solidFill>
+                      <a:prstDash val="solid"/>
+                      <a:round/>
+                      <a:headEnd type="none" w="med" len="med"/>
+                      <a:tailEnd type="none" w="med" len="med"/>
+                    </a:lnB>
+                    <a:solidFill>
+                      <a:srgbClr val="FFFFFF"/>
+                    </a:solidFill>
+                  </a:tcPr>
+                </a:tc>
+                <a:extLst>
+                  <a:ext uri="{0D108BD9-81ED-4DB2-BD59-A6C34878D82A}">
+                    <a16:rowId xmlns:a16="http://schemas.microsoft.com/office/drawing/2014/main" val="3199075771"/>
+                  </a:ext>
+                </a:extLst>
+              </a:tr>
+            </a:tbl>
+          </a:graphicData>
+        </a:graphic>
+      </p:graphicFrame>
+      <p:sp>
+        <p:nvSpPr>
+          <p:cNvPr id="4" name="標題 3">
+            <a:extLst>
+              <a:ext uri="{FF2B5EF4-FFF2-40B4-BE49-F238E27FC236}">
+                <a16:creationId xmlns:a16="http://schemas.microsoft.com/office/drawing/2014/main" id="{A56B29AF-B826-A5C6-2084-7513F97C4D79}"/>
+              </a:ext>
+            </a:extLst>
+          </p:cNvPr>
+          <p:cNvSpPr>
+            <a:spLocks noGrp="1"/>
+          </p:cNvSpPr>
+          <p:nvPr>
+            <p:ph type="title"/>
+          </p:nvPr>
+        </p:nvSpPr>
+        <p:spPr/>
+        <p:txBody>
+          <a:bodyPr/>
+          <a:lstStyle/>
+          <a:p>
+            <a:r>
+              <a:rPr lang="zh-TW" altLang="en-US" b="1" dirty="0"/>
+              <a:t>平台資料規模現況</a:t>
+            </a:r>
+          </a:p>
+        </p:txBody>
+      </p:sp>
+      <p:sp>
+        <p:nvSpPr>
+          <p:cNvPr id="5" name="文字版面配置區 4">
+            <a:extLst>
+              <a:ext uri="{FF2B5EF4-FFF2-40B4-BE49-F238E27FC236}">
+                <a16:creationId xmlns:a16="http://schemas.microsoft.com/office/drawing/2014/main" id="{76A0E2D5-2C54-FD6F-195E-3E46A09B365C}"/>
+              </a:ext>
+            </a:extLst>
+          </p:cNvPr>
+          <p:cNvSpPr>
+            <a:spLocks noGrp="1"/>
+          </p:cNvSpPr>
+          <p:nvPr>
+            <p:ph type="body" idx="1"/>
+          </p:nvPr>
+        </p:nvSpPr>
+        <p:spPr/>
+        <p:txBody>
+          <a:bodyPr/>
+          <a:lstStyle/>
+          <a:p>
+            <a:r>
+              <a:rPr lang="zh-TW" altLang="en-US" dirty="0"/>
+              <a:t>平台資料規模現況</a:t>
+            </a:r>
+          </a:p>
+        </p:txBody>
+      </p:sp>
+      <p:graphicFrame>
+        <p:nvGraphicFramePr>
+          <p:cNvPr id="8" name="表格 7">
+            <a:extLst>
+              <a:ext uri="{FF2B5EF4-FFF2-40B4-BE49-F238E27FC236}">
+                <a16:creationId xmlns:a16="http://schemas.microsoft.com/office/drawing/2014/main" id="{D626B5F2-F698-01CC-2719-6918E1C9B596}"/>
+              </a:ext>
+            </a:extLst>
+          </p:cNvPr>
+          <p:cNvGraphicFramePr>
+            <a:graphicFrameLocks noGrp="1"/>
+          </p:cNvGraphicFramePr>
+          <p:nvPr>
+            <p:extLst>
+              <p:ext uri="{D42A27DB-BD31-4B8C-83A1-F6EECF244321}">
+                <p14:modId xmlns:p14="http://schemas.microsoft.com/office/powerpoint/2010/main" val="1972607690"/>
+              </p:ext>
+            </p:extLst>
+          </p:nvPr>
+        </p:nvGraphicFramePr>
+        <p:xfrm>
+          <a:off x="5532040" y="3912484"/>
+          <a:ext cx="5372100" cy="1737360"/>
+        </p:xfrm>
+        <a:graphic>
+          <a:graphicData uri="http://schemas.openxmlformats.org/drawingml/2006/table">
+            <a:tbl>
+              <a:tblPr/>
+              <a:tblGrid>
+                <a:gridCol w="1343025">
+                  <a:extLst>
+                    <a:ext uri="{9D8B030D-6E8A-4147-A177-3AD203B41FA5}">
+                      <a16:colId xmlns:a16="http://schemas.microsoft.com/office/drawing/2014/main" val="1840495998"/>
+                    </a:ext>
+                  </a:extLst>
+                </a:gridCol>
+                <a:gridCol w="1343025">
+                  <a:extLst>
+                    <a:ext uri="{9D8B030D-6E8A-4147-A177-3AD203B41FA5}">
+                      <a16:colId xmlns:a16="http://schemas.microsoft.com/office/drawing/2014/main" val="174371406"/>
+                    </a:ext>
+                  </a:extLst>
+                </a:gridCol>
+                <a:gridCol w="1343025">
+                  <a:extLst>
+                    <a:ext uri="{9D8B030D-6E8A-4147-A177-3AD203B41FA5}">
+                      <a16:colId xmlns:a16="http://schemas.microsoft.com/office/drawing/2014/main" val="1804692550"/>
+                    </a:ext>
+                  </a:extLst>
+                </a:gridCol>
+                <a:gridCol w="1343025">
+                  <a:extLst>
+                    <a:ext uri="{9D8B030D-6E8A-4147-A177-3AD203B41FA5}">
+                      <a16:colId xmlns:a16="http://schemas.microsoft.com/office/drawing/2014/main" val="246480372"/>
+                    </a:ext>
+                  </a:extLst>
+                </a:gridCol>
+              </a:tblGrid>
+              <a:tr h="0">
+                <a:tc>
+                  <a:txBody>
+                    <a:bodyPr/>
+                    <a:lstStyle/>
+                    <a:p>
+                      <a:pPr>
+                        <a:buNone/>
+                      </a:pPr>
+                      <a:r>
+                        <a:rPr lang="zh-TW" altLang="en-US" b="1" dirty="0">
+                          <a:solidFill>
+                            <a:srgbClr val="000000"/>
+                          </a:solidFill>
+                          <a:effectLst/>
+                          <a:latin typeface="Microsoft JhengHei" panose="020B0604030504040204" pitchFamily="34" charset="-120"/>
+                          <a:ea typeface="Microsoft JhengHei" panose="020B0604030504040204" pitchFamily="34" charset="-120"/>
+                        </a:rPr>
+                        <a:t>指標</a:t>
+                      </a:r>
+                    </a:p>
+                  </a:txBody>
+                  <a:tcPr marL="123825" marR="123825" marT="57150" marB="57150" anchor="ctr">
+                    <a:lnL w="9525" cap="flat" cmpd="sng" algn="ctr">
+                      <a:solidFill>
+                        <a:srgbClr val="D6D6D6"/>
+                      </a:solidFill>
+                      <a:prstDash val="solid"/>
+                      <a:round/>
+                      <a:headEnd type="none" w="med" len="med"/>
+                      <a:tailEnd type="none" w="med" len="med"/>
+                    </a:lnL>
+                    <a:lnR w="9525" cap="flat" cmpd="sng" algn="ctr">
+                      <a:solidFill>
+                        <a:srgbClr val="D6D6D6"/>
+                      </a:solidFill>
+                      <a:prstDash val="solid"/>
+                      <a:round/>
+                      <a:headEnd type="none" w="med" len="med"/>
+                      <a:tailEnd type="none" w="med" len="med"/>
+                    </a:lnR>
+                    <a:lnT w="9525" cap="flat" cmpd="sng" algn="ctr">
+                      <a:solidFill>
+                        <a:srgbClr val="D6D6D6"/>
+                      </a:solidFill>
+                      <a:prstDash val="solid"/>
+                      <a:round/>
+                      <a:headEnd type="none" w="med" len="med"/>
+                      <a:tailEnd type="none" w="med" len="med"/>
+                    </a:lnT>
+                    <a:lnB w="9525" cap="flat" cmpd="sng" algn="ctr">
+                      <a:solidFill>
+                        <a:srgbClr val="D6D6D6"/>
+                      </a:solidFill>
+                      <a:prstDash val="solid"/>
+                      <a:round/>
+                      <a:headEnd type="none" w="med" len="med"/>
+                      <a:tailEnd type="none" w="med" len="med"/>
+                    </a:lnB>
+                    <a:solidFill>
+                      <a:srgbClr val="FFFFFF"/>
+                    </a:solidFill>
+                  </a:tcPr>
+                </a:tc>
+                <a:tc>
+                  <a:txBody>
+                    <a:bodyPr/>
+                    <a:lstStyle/>
+                    <a:p>
+                      <a:pPr algn="r">
+                        <a:buNone/>
+                      </a:pPr>
+                      <a:r>
+                        <a:rPr lang="zh-TW" altLang="en-US" b="1" dirty="0">
+                          <a:solidFill>
+                            <a:srgbClr val="000000"/>
+                          </a:solidFill>
+                          <a:effectLst/>
+                          <a:latin typeface="Microsoft JhengHei" panose="020B0604030504040204" pitchFamily="34" charset="-120"/>
+                          <a:ea typeface="Microsoft JhengHei" panose="020B0604030504040204" pitchFamily="34" charset="-120"/>
+                        </a:rPr>
+                        <a:t>近 </a:t>
+                      </a:r>
+                      <a:r>
+                        <a:rPr lang="en-US" altLang="zh-TW" b="1" dirty="0">
+                          <a:solidFill>
+                            <a:srgbClr val="000000"/>
+                          </a:solidFill>
+                          <a:effectLst/>
+                          <a:latin typeface="Microsoft JhengHei" panose="020B0604030504040204" pitchFamily="34" charset="-120"/>
+                          <a:ea typeface="Microsoft JhengHei" panose="020B0604030504040204" pitchFamily="34" charset="-120"/>
+                        </a:rPr>
+                        <a:t>1 </a:t>
+                      </a:r>
+                      <a:r>
+                        <a:rPr lang="zh-TW" altLang="en-US" b="1" dirty="0">
+                          <a:solidFill>
+                            <a:srgbClr val="000000"/>
+                          </a:solidFill>
+                          <a:effectLst/>
+                          <a:latin typeface="Microsoft JhengHei" panose="020B0604030504040204" pitchFamily="34" charset="-120"/>
+                          <a:ea typeface="Microsoft JhengHei" panose="020B0604030504040204" pitchFamily="34" charset="-120"/>
+                        </a:rPr>
+                        <a:t>天</a:t>
+                      </a:r>
+                    </a:p>
+                  </a:txBody>
+                  <a:tcPr marL="123825" marR="123825" marT="57150" marB="57150" anchor="ctr">
+                    <a:lnL w="9525" cap="flat" cmpd="sng" algn="ctr">
+                      <a:solidFill>
+                        <a:srgbClr val="D6D6D6"/>
+                      </a:solidFill>
+                      <a:prstDash val="solid"/>
+                      <a:round/>
+                      <a:headEnd type="none" w="med" len="med"/>
+                      <a:tailEnd type="none" w="med" len="med"/>
+                    </a:lnL>
+                    <a:lnR w="9525" cap="flat" cmpd="sng" algn="ctr">
+                      <a:solidFill>
+                        <a:srgbClr val="D6D6D6"/>
+                      </a:solidFill>
+                      <a:prstDash val="solid"/>
+                      <a:round/>
+                      <a:headEnd type="none" w="med" len="med"/>
+                      <a:tailEnd type="none" w="med" len="med"/>
+                    </a:lnR>
+                    <a:lnT w="9525" cap="flat" cmpd="sng" algn="ctr">
+                      <a:solidFill>
+                        <a:srgbClr val="D6D6D6"/>
+                      </a:solidFill>
+                      <a:prstDash val="solid"/>
+                      <a:round/>
+                      <a:headEnd type="none" w="med" len="med"/>
+                      <a:tailEnd type="none" w="med" len="med"/>
+                    </a:lnT>
+                    <a:lnB w="9525" cap="flat" cmpd="sng" algn="ctr">
+                      <a:solidFill>
+                        <a:srgbClr val="D6D6D6"/>
+                      </a:solidFill>
+                      <a:prstDash val="solid"/>
+                      <a:round/>
+                      <a:headEnd type="none" w="med" len="med"/>
+                      <a:tailEnd type="none" w="med" len="med"/>
+                    </a:lnB>
+                    <a:solidFill>
+                      <a:srgbClr val="FFFFFF"/>
+                    </a:solidFill>
+                  </a:tcPr>
+                </a:tc>
+                <a:tc>
+                  <a:txBody>
+                    <a:bodyPr/>
+                    <a:lstStyle/>
+                    <a:p>
+                      <a:pPr algn="r">
+                        <a:buNone/>
+                      </a:pPr>
+                      <a:r>
+                        <a:rPr lang="zh-TW" altLang="en-US" b="1">
+                          <a:solidFill>
+                            <a:srgbClr val="000000"/>
+                          </a:solidFill>
+                          <a:effectLst/>
+                          <a:latin typeface="Microsoft JhengHei" panose="020B0604030504040204" pitchFamily="34" charset="-120"/>
+                          <a:ea typeface="Microsoft JhengHei" panose="020B0604030504040204" pitchFamily="34" charset="-120"/>
+                        </a:rPr>
+                        <a:t>近 </a:t>
+                      </a:r>
+                      <a:r>
+                        <a:rPr lang="en-US" altLang="zh-TW" b="1">
+                          <a:solidFill>
+                            <a:srgbClr val="000000"/>
+                          </a:solidFill>
+                          <a:effectLst/>
+                          <a:latin typeface="Microsoft JhengHei" panose="020B0604030504040204" pitchFamily="34" charset="-120"/>
+                          <a:ea typeface="Microsoft JhengHei" panose="020B0604030504040204" pitchFamily="34" charset="-120"/>
+                        </a:rPr>
+                        <a:t>7 </a:t>
+                      </a:r>
+                      <a:r>
+                        <a:rPr lang="zh-TW" altLang="en-US" b="1">
+                          <a:solidFill>
+                            <a:srgbClr val="000000"/>
+                          </a:solidFill>
+                          <a:effectLst/>
+                          <a:latin typeface="Microsoft JhengHei" panose="020B0604030504040204" pitchFamily="34" charset="-120"/>
+                          <a:ea typeface="Microsoft JhengHei" panose="020B0604030504040204" pitchFamily="34" charset="-120"/>
+                        </a:rPr>
+                        <a:t>天</a:t>
+                      </a:r>
+                    </a:p>
+                  </a:txBody>
+                  <a:tcPr marL="123825" marR="123825" marT="57150" marB="57150" anchor="ctr">
+                    <a:lnL w="9525" cap="flat" cmpd="sng" algn="ctr">
+                      <a:solidFill>
+                        <a:srgbClr val="D6D6D6"/>
+                      </a:solidFill>
+                      <a:prstDash val="solid"/>
+                      <a:round/>
+                      <a:headEnd type="none" w="med" len="med"/>
+                      <a:tailEnd type="none" w="med" len="med"/>
+                    </a:lnL>
+                    <a:lnR w="9525" cap="flat" cmpd="sng" algn="ctr">
+                      <a:solidFill>
+                        <a:srgbClr val="D6D6D6"/>
+                      </a:solidFill>
+                      <a:prstDash val="solid"/>
+                      <a:round/>
+                      <a:headEnd type="none" w="med" len="med"/>
+                      <a:tailEnd type="none" w="med" len="med"/>
+                    </a:lnR>
+                    <a:lnT w="9525" cap="flat" cmpd="sng" algn="ctr">
+                      <a:solidFill>
+                        <a:srgbClr val="D6D6D6"/>
+                      </a:solidFill>
+                      <a:prstDash val="solid"/>
+                      <a:round/>
+                      <a:headEnd type="none" w="med" len="med"/>
+                      <a:tailEnd type="none" w="med" len="med"/>
+                    </a:lnT>
+                    <a:lnB w="9525" cap="flat" cmpd="sng" algn="ctr">
+                      <a:solidFill>
+                        <a:srgbClr val="D6D6D6"/>
+                      </a:solidFill>
+                      <a:prstDash val="solid"/>
+                      <a:round/>
+                      <a:headEnd type="none" w="med" len="med"/>
+                      <a:tailEnd type="none" w="med" len="med"/>
+                    </a:lnB>
+                    <a:solidFill>
+                      <a:srgbClr val="FFFFFF"/>
+                    </a:solidFill>
+                  </a:tcPr>
+                </a:tc>
+                <a:tc>
+                  <a:txBody>
+                    <a:bodyPr/>
+                    <a:lstStyle/>
+                    <a:p>
+                      <a:pPr algn="r">
+                        <a:buNone/>
+                      </a:pPr>
+                      <a:r>
+                        <a:rPr lang="zh-TW" altLang="en-US" b="1">
+                          <a:solidFill>
+                            <a:srgbClr val="000000"/>
+                          </a:solidFill>
+                          <a:effectLst/>
+                          <a:latin typeface="Microsoft JhengHei" panose="020B0604030504040204" pitchFamily="34" charset="-120"/>
+                          <a:ea typeface="Microsoft JhengHei" panose="020B0604030504040204" pitchFamily="34" charset="-120"/>
+                        </a:rPr>
+                        <a:t>近 </a:t>
+                      </a:r>
+                      <a:r>
+                        <a:rPr lang="en-US" altLang="zh-TW" b="1">
+                          <a:solidFill>
+                            <a:srgbClr val="000000"/>
+                          </a:solidFill>
+                          <a:effectLst/>
+                          <a:latin typeface="Microsoft JhengHei" panose="020B0604030504040204" pitchFamily="34" charset="-120"/>
+                          <a:ea typeface="Microsoft JhengHei" panose="020B0604030504040204" pitchFamily="34" charset="-120"/>
+                        </a:rPr>
+                        <a:t>30 </a:t>
+                      </a:r>
+                      <a:r>
+                        <a:rPr lang="zh-TW" altLang="en-US" b="1">
+                          <a:solidFill>
+                            <a:srgbClr val="000000"/>
+                          </a:solidFill>
+                          <a:effectLst/>
+                          <a:latin typeface="Microsoft JhengHei" panose="020B0604030504040204" pitchFamily="34" charset="-120"/>
+                          <a:ea typeface="Microsoft JhengHei" panose="020B0604030504040204" pitchFamily="34" charset="-120"/>
+                        </a:rPr>
+                        <a:t>天</a:t>
+                      </a:r>
+                    </a:p>
+                  </a:txBody>
+                  <a:tcPr marL="123825" marR="123825" marT="57150" marB="57150" anchor="ctr">
+                    <a:lnL w="9525" cap="flat" cmpd="sng" algn="ctr">
+                      <a:solidFill>
+                        <a:srgbClr val="D6D6D6"/>
+                      </a:solidFill>
+                      <a:prstDash val="solid"/>
+                      <a:round/>
+                      <a:headEnd type="none" w="med" len="med"/>
+                      <a:tailEnd type="none" w="med" len="med"/>
+                    </a:lnL>
+                    <a:lnR w="9525" cap="flat" cmpd="sng" algn="ctr">
+                      <a:solidFill>
+                        <a:srgbClr val="D6D6D6"/>
+                      </a:solidFill>
+                      <a:prstDash val="solid"/>
+                      <a:round/>
+                      <a:headEnd type="none" w="med" len="med"/>
+                      <a:tailEnd type="none" w="med" len="med"/>
+                    </a:lnR>
+                    <a:lnT w="9525" cap="flat" cmpd="sng" algn="ctr">
+                      <a:solidFill>
+                        <a:srgbClr val="D6D6D6"/>
+                      </a:solidFill>
+                      <a:prstDash val="solid"/>
+                      <a:round/>
+                      <a:headEnd type="none" w="med" len="med"/>
+                      <a:tailEnd type="none" w="med" len="med"/>
+                    </a:lnT>
+                    <a:lnB w="9525" cap="flat" cmpd="sng" algn="ctr">
+                      <a:solidFill>
+                        <a:srgbClr val="D6D6D6"/>
+                      </a:solidFill>
+                      <a:prstDash val="solid"/>
+                      <a:round/>
+                      <a:headEnd type="none" w="med" len="med"/>
+                      <a:tailEnd type="none" w="med" len="med"/>
+                    </a:lnB>
+                    <a:solidFill>
+                      <a:srgbClr val="FFFFFF"/>
+                    </a:solidFill>
+                  </a:tcPr>
+                </a:tc>
+                <a:extLst>
+                  <a:ext uri="{0D108BD9-81ED-4DB2-BD59-A6C34878D82A}">
+                    <a16:rowId xmlns:a16="http://schemas.microsoft.com/office/drawing/2014/main" val="925837907"/>
+                  </a:ext>
+                </a:extLst>
+              </a:tr>
+              <a:tr h="0">
+                <a:tc>
+                  <a:txBody>
+                    <a:bodyPr/>
+                    <a:lstStyle/>
+                    <a:p>
+                      <a:pPr>
+                        <a:buNone/>
+                      </a:pPr>
+                      <a:r>
+                        <a:rPr lang="zh-TW" altLang="en-US">
+                          <a:effectLst/>
+                          <a:latin typeface="Microsoft JhengHei" panose="020B0604030504040204" pitchFamily="34" charset="-120"/>
+                          <a:ea typeface="Microsoft JhengHei" panose="020B0604030504040204" pitchFamily="34" charset="-120"/>
+                        </a:rPr>
+                        <a:t>新增 </a:t>
+                      </a:r>
+                      <a:r>
+                        <a:rPr lang="en">
+                          <a:effectLst/>
+                          <a:latin typeface="Microsoft JhengHei" panose="020B0604030504040204" pitchFamily="34" charset="-120"/>
+                          <a:ea typeface="Microsoft JhengHei" panose="020B0604030504040204" pitchFamily="34" charset="-120"/>
+                        </a:rPr>
+                        <a:t>articles</a:t>
+                      </a:r>
+                    </a:p>
+                  </a:txBody>
+                  <a:tcPr marL="123825" marR="123825" marT="57150" marB="57150" anchor="ctr">
+                    <a:lnL w="9525" cap="flat" cmpd="sng" algn="ctr">
+                      <a:solidFill>
+                        <a:srgbClr val="D6D6D6"/>
+                      </a:solidFill>
+                      <a:prstDash val="solid"/>
+                      <a:round/>
+                      <a:headEnd type="none" w="med" len="med"/>
+                      <a:tailEnd type="none" w="med" len="med"/>
+                    </a:lnL>
+                    <a:lnR w="9525" cap="flat" cmpd="sng" algn="ctr">
+                      <a:solidFill>
+                        <a:srgbClr val="D6D6D6"/>
+                      </a:solidFill>
+                      <a:prstDash val="solid"/>
+                      <a:round/>
+                      <a:headEnd type="none" w="med" len="med"/>
+                      <a:tailEnd type="none" w="med" len="med"/>
+                    </a:lnR>
+                    <a:lnT w="9525" cap="flat" cmpd="sng" algn="ctr">
+                      <a:solidFill>
+                        <a:srgbClr val="D6D6D6"/>
+                      </a:solidFill>
+                      <a:prstDash val="solid"/>
+                      <a:round/>
+                      <a:headEnd type="none" w="med" len="med"/>
+                      <a:tailEnd type="none" w="med" len="med"/>
+                    </a:lnT>
+                    <a:lnB w="9525" cap="flat" cmpd="sng" algn="ctr">
+                      <a:solidFill>
+                        <a:srgbClr val="D6D6D6"/>
+                      </a:solidFill>
+                      <a:prstDash val="solid"/>
+                      <a:round/>
+                      <a:headEnd type="none" w="med" len="med"/>
+                      <a:tailEnd type="none" w="med" len="med"/>
+                    </a:lnB>
+                    <a:solidFill>
+                      <a:srgbClr val="FFFFFF"/>
+                    </a:solidFill>
+                  </a:tcPr>
+                </a:tc>
+                <a:tc>
+                  <a:txBody>
+                    <a:bodyPr/>
+                    <a:lstStyle/>
+                    <a:p>
+                      <a:pPr algn="r">
+                        <a:buNone/>
+                      </a:pPr>
+                      <a:r>
+                        <a:rPr lang="en-US" altLang="zh-TW">
+                          <a:effectLst/>
+                          <a:latin typeface="Microsoft JhengHei" panose="020B0604030504040204" pitchFamily="34" charset="-120"/>
+                          <a:ea typeface="Microsoft JhengHei" panose="020B0604030504040204" pitchFamily="34" charset="-120"/>
+                        </a:rPr>
+                        <a:t>2,307</a:t>
+                      </a:r>
+                    </a:p>
+                  </a:txBody>
+                  <a:tcPr marL="123825" marR="123825" marT="57150" marB="57150" anchor="ctr">
+                    <a:lnL w="9525" cap="flat" cmpd="sng" algn="ctr">
+                      <a:solidFill>
+                        <a:srgbClr val="D6D6D6"/>
+                      </a:solidFill>
+                      <a:prstDash val="solid"/>
+                      <a:round/>
+                      <a:headEnd type="none" w="med" len="med"/>
+                      <a:tailEnd type="none" w="med" len="med"/>
+                    </a:lnL>
+                    <a:lnR w="9525" cap="flat" cmpd="sng" algn="ctr">
+                      <a:solidFill>
+                        <a:srgbClr val="D6D6D6"/>
+                      </a:solidFill>
+                      <a:prstDash val="solid"/>
+                      <a:round/>
+                      <a:headEnd type="none" w="med" len="med"/>
+                      <a:tailEnd type="none" w="med" len="med"/>
+                    </a:lnR>
+                    <a:lnT w="9525" cap="flat" cmpd="sng" algn="ctr">
+                      <a:solidFill>
+                        <a:srgbClr val="D6D6D6"/>
+                      </a:solidFill>
+                      <a:prstDash val="solid"/>
+                      <a:round/>
+                      <a:headEnd type="none" w="med" len="med"/>
+                      <a:tailEnd type="none" w="med" len="med"/>
+                    </a:lnT>
+                    <a:lnB w="9525" cap="flat" cmpd="sng" algn="ctr">
+                      <a:solidFill>
+                        <a:srgbClr val="D6D6D6"/>
+                      </a:solidFill>
+                      <a:prstDash val="solid"/>
+                      <a:round/>
+                      <a:headEnd type="none" w="med" len="med"/>
+                      <a:tailEnd type="none" w="med" len="med"/>
+                    </a:lnB>
+                    <a:solidFill>
+                      <a:srgbClr val="FFFFFF"/>
+                    </a:solidFill>
+                  </a:tcPr>
+                </a:tc>
+                <a:tc>
+                  <a:txBody>
+                    <a:bodyPr/>
+                    <a:lstStyle/>
+                    <a:p>
+                      <a:pPr algn="r">
+                        <a:buNone/>
+                      </a:pPr>
+                      <a:r>
+                        <a:rPr lang="en-US" altLang="zh-TW">
+                          <a:effectLst/>
+                          <a:latin typeface="Microsoft JhengHei" panose="020B0604030504040204" pitchFamily="34" charset="-120"/>
+                          <a:ea typeface="Microsoft JhengHei" panose="020B0604030504040204" pitchFamily="34" charset="-120"/>
+                        </a:rPr>
+                        <a:t>34,921</a:t>
+                      </a:r>
+                    </a:p>
+                  </a:txBody>
+                  <a:tcPr marL="123825" marR="123825" marT="57150" marB="57150" anchor="ctr">
+                    <a:lnL w="9525" cap="flat" cmpd="sng" algn="ctr">
+                      <a:solidFill>
+                        <a:srgbClr val="D6D6D6"/>
+                      </a:solidFill>
+                      <a:prstDash val="solid"/>
+                      <a:round/>
+                      <a:headEnd type="none" w="med" len="med"/>
+                      <a:tailEnd type="none" w="med" len="med"/>
+                    </a:lnL>
+                    <a:lnR w="9525" cap="flat" cmpd="sng" algn="ctr">
+                      <a:solidFill>
+                        <a:srgbClr val="D6D6D6"/>
+                      </a:solidFill>
+                      <a:prstDash val="solid"/>
+                      <a:round/>
+                      <a:headEnd type="none" w="med" len="med"/>
+                      <a:tailEnd type="none" w="med" len="med"/>
+                    </a:lnR>
+                    <a:lnT w="9525" cap="flat" cmpd="sng" algn="ctr">
+                      <a:solidFill>
+                        <a:srgbClr val="D6D6D6"/>
+                      </a:solidFill>
+                      <a:prstDash val="solid"/>
+                      <a:round/>
+                      <a:headEnd type="none" w="med" len="med"/>
+                      <a:tailEnd type="none" w="med" len="med"/>
+                    </a:lnT>
+                    <a:lnB w="9525" cap="flat" cmpd="sng" algn="ctr">
+                      <a:solidFill>
+                        <a:srgbClr val="D6D6D6"/>
+                      </a:solidFill>
+                      <a:prstDash val="solid"/>
+                      <a:round/>
+                      <a:headEnd type="none" w="med" len="med"/>
+                      <a:tailEnd type="none" w="med" len="med"/>
+                    </a:lnB>
+                    <a:solidFill>
+                      <a:srgbClr val="FFFFFF"/>
+                    </a:solidFill>
+                  </a:tcPr>
+                </a:tc>
+                <a:tc>
+                  <a:txBody>
+                    <a:bodyPr/>
+                    <a:lstStyle/>
+                    <a:p>
+                      <a:pPr algn="r">
+                        <a:buNone/>
+                      </a:pPr>
+                      <a:r>
+                        <a:rPr lang="en-US" altLang="zh-TW">
+                          <a:effectLst/>
+                          <a:latin typeface="Microsoft JhengHei" panose="020B0604030504040204" pitchFamily="34" charset="-120"/>
+                          <a:ea typeface="Microsoft JhengHei" panose="020B0604030504040204" pitchFamily="34" charset="-120"/>
+                        </a:rPr>
+                        <a:t>125,947</a:t>
+                      </a:r>
+                    </a:p>
+                  </a:txBody>
+                  <a:tcPr marL="123825" marR="123825" marT="57150" marB="57150" anchor="ctr">
+                    <a:lnL w="9525" cap="flat" cmpd="sng" algn="ctr">
+                      <a:solidFill>
+                        <a:srgbClr val="D6D6D6"/>
+                      </a:solidFill>
+                      <a:prstDash val="solid"/>
+                      <a:round/>
+                      <a:headEnd type="none" w="med" len="med"/>
+                      <a:tailEnd type="none" w="med" len="med"/>
+                    </a:lnL>
+                    <a:lnR w="9525" cap="flat" cmpd="sng" algn="ctr">
+                      <a:solidFill>
+                        <a:srgbClr val="D6D6D6"/>
+                      </a:solidFill>
+                      <a:prstDash val="solid"/>
+                      <a:round/>
+                      <a:headEnd type="none" w="med" len="med"/>
+                      <a:tailEnd type="none" w="med" len="med"/>
+                    </a:lnR>
+                    <a:lnT w="9525" cap="flat" cmpd="sng" algn="ctr">
+                      <a:solidFill>
+                        <a:srgbClr val="D6D6D6"/>
+                      </a:solidFill>
+                      <a:prstDash val="solid"/>
+                      <a:round/>
+                      <a:headEnd type="none" w="med" len="med"/>
+                      <a:tailEnd type="none" w="med" len="med"/>
+                    </a:lnT>
+                    <a:lnB w="9525" cap="flat" cmpd="sng" algn="ctr">
+                      <a:solidFill>
+                        <a:srgbClr val="D6D6D6"/>
+                      </a:solidFill>
+                      <a:prstDash val="solid"/>
+                      <a:round/>
+                      <a:headEnd type="none" w="med" len="med"/>
+                      <a:tailEnd type="none" w="med" len="med"/>
+                    </a:lnB>
+                    <a:solidFill>
+                      <a:srgbClr val="FFFFFF"/>
+                    </a:solidFill>
+                  </a:tcPr>
+                </a:tc>
+                <a:extLst>
+                  <a:ext uri="{0D108BD9-81ED-4DB2-BD59-A6C34878D82A}">
+                    <a16:rowId xmlns:a16="http://schemas.microsoft.com/office/drawing/2014/main" val="3126503615"/>
+                  </a:ext>
+                </a:extLst>
+              </a:tr>
+              <a:tr h="0">
+                <a:tc>
+                  <a:txBody>
+                    <a:bodyPr/>
+                    <a:lstStyle/>
+                    <a:p>
+                      <a:pPr>
+                        <a:buNone/>
+                      </a:pPr>
+                      <a:r>
+                        <a:rPr lang="zh-TW" altLang="en-US">
+                          <a:effectLst/>
+                          <a:latin typeface="Microsoft JhengHei" panose="020B0604030504040204" pitchFamily="34" charset="-120"/>
+                          <a:ea typeface="Microsoft JhengHei" panose="020B0604030504040204" pitchFamily="34" charset="-120"/>
+                        </a:rPr>
+                        <a:t>新增 </a:t>
+                      </a:r>
+                      <a:r>
+                        <a:rPr lang="en">
+                          <a:effectLst/>
+                          <a:latin typeface="Microsoft JhengHei" panose="020B0604030504040204" pitchFamily="34" charset="-120"/>
+                          <a:ea typeface="Microsoft JhengHei" panose="020B0604030504040204" pitchFamily="34" charset="-120"/>
+                        </a:rPr>
+                        <a:t>assistantarticles</a:t>
+                      </a:r>
+                    </a:p>
+                  </a:txBody>
+                  <a:tcPr marL="123825" marR="123825" marT="57150" marB="57150" anchor="ctr">
+                    <a:lnL w="9525" cap="flat" cmpd="sng" algn="ctr">
+                      <a:solidFill>
+                        <a:srgbClr val="D6D6D6"/>
+                      </a:solidFill>
+                      <a:prstDash val="solid"/>
+                      <a:round/>
+                      <a:headEnd type="none" w="med" len="med"/>
+                      <a:tailEnd type="none" w="med" len="med"/>
+                    </a:lnL>
+                    <a:lnR w="9525" cap="flat" cmpd="sng" algn="ctr">
+                      <a:solidFill>
+                        <a:srgbClr val="D6D6D6"/>
+                      </a:solidFill>
+                      <a:prstDash val="solid"/>
+                      <a:round/>
+                      <a:headEnd type="none" w="med" len="med"/>
+                      <a:tailEnd type="none" w="med" len="med"/>
+                    </a:lnR>
+                    <a:lnT w="9525" cap="flat" cmpd="sng" algn="ctr">
+                      <a:solidFill>
+                        <a:srgbClr val="D6D6D6"/>
+                      </a:solidFill>
+                      <a:prstDash val="solid"/>
+                      <a:round/>
+                      <a:headEnd type="none" w="med" len="med"/>
+                      <a:tailEnd type="none" w="med" len="med"/>
+                    </a:lnT>
+                    <a:lnB w="9525" cap="flat" cmpd="sng" algn="ctr">
+                      <a:solidFill>
+                        <a:srgbClr val="D6D6D6"/>
+                      </a:solidFill>
+                      <a:prstDash val="solid"/>
+                      <a:round/>
+                      <a:headEnd type="none" w="med" len="med"/>
+                      <a:tailEnd type="none" w="med" len="med"/>
+                    </a:lnB>
+                    <a:solidFill>
+                      <a:srgbClr val="FFFFFF"/>
+                    </a:solidFill>
+                  </a:tcPr>
+                </a:tc>
+                <a:tc>
+                  <a:txBody>
+                    <a:bodyPr/>
+                    <a:lstStyle/>
+                    <a:p>
+                      <a:pPr algn="r">
+                        <a:buNone/>
+                      </a:pPr>
+                      <a:r>
+                        <a:rPr lang="en-US" altLang="zh-TW">
+                          <a:effectLst/>
+                          <a:latin typeface="Microsoft JhengHei" panose="020B0604030504040204" pitchFamily="34" charset="-120"/>
+                          <a:ea typeface="Microsoft JhengHei" panose="020B0604030504040204" pitchFamily="34" charset="-120"/>
+                        </a:rPr>
+                        <a:t>12,059</a:t>
+                      </a:r>
+                    </a:p>
+                  </a:txBody>
+                  <a:tcPr marL="123825" marR="123825" marT="57150" marB="57150" anchor="ctr">
+                    <a:lnL w="9525" cap="flat" cmpd="sng" algn="ctr">
+                      <a:solidFill>
+                        <a:srgbClr val="D6D6D6"/>
+                      </a:solidFill>
+                      <a:prstDash val="solid"/>
+                      <a:round/>
+                      <a:headEnd type="none" w="med" len="med"/>
+                      <a:tailEnd type="none" w="med" len="med"/>
+                    </a:lnL>
+                    <a:lnR w="9525" cap="flat" cmpd="sng" algn="ctr">
+                      <a:solidFill>
+                        <a:srgbClr val="D6D6D6"/>
+                      </a:solidFill>
+                      <a:prstDash val="solid"/>
+                      <a:round/>
+                      <a:headEnd type="none" w="med" len="med"/>
+                      <a:tailEnd type="none" w="med" len="med"/>
+                    </a:lnR>
+                    <a:lnT w="9525" cap="flat" cmpd="sng" algn="ctr">
+                      <a:solidFill>
+                        <a:srgbClr val="D6D6D6"/>
+                      </a:solidFill>
+                      <a:prstDash val="solid"/>
+                      <a:round/>
+                      <a:headEnd type="none" w="med" len="med"/>
+                      <a:tailEnd type="none" w="med" len="med"/>
+                    </a:lnT>
+                    <a:lnB w="9525" cap="flat" cmpd="sng" algn="ctr">
+                      <a:solidFill>
+                        <a:srgbClr val="D6D6D6"/>
+                      </a:solidFill>
+                      <a:prstDash val="solid"/>
+                      <a:round/>
+                      <a:headEnd type="none" w="med" len="med"/>
+                      <a:tailEnd type="none" w="med" len="med"/>
+                    </a:lnB>
+                    <a:solidFill>
+                      <a:srgbClr val="FFFFFF"/>
+                    </a:solidFill>
+                  </a:tcPr>
+                </a:tc>
+                <a:tc>
+                  <a:txBody>
+                    <a:bodyPr/>
+                    <a:lstStyle/>
+                    <a:p>
+                      <a:pPr algn="r">
+                        <a:buNone/>
+                      </a:pPr>
+                      <a:r>
+                        <a:rPr lang="en-US" altLang="zh-TW">
+                          <a:effectLst/>
+                          <a:latin typeface="Microsoft JhengHei" panose="020B0604030504040204" pitchFamily="34" charset="-120"/>
+                          <a:ea typeface="Microsoft JhengHei" panose="020B0604030504040204" pitchFamily="34" charset="-120"/>
+                        </a:rPr>
+                        <a:t>124,527</a:t>
+                      </a:r>
+                    </a:p>
+                  </a:txBody>
+                  <a:tcPr marL="123825" marR="123825" marT="57150" marB="57150" anchor="ctr">
+                    <a:lnL w="9525" cap="flat" cmpd="sng" algn="ctr">
+                      <a:solidFill>
+                        <a:srgbClr val="D6D6D6"/>
+                      </a:solidFill>
+                      <a:prstDash val="solid"/>
+                      <a:round/>
+                      <a:headEnd type="none" w="med" len="med"/>
+                      <a:tailEnd type="none" w="med" len="med"/>
+                    </a:lnL>
+                    <a:lnR w="9525" cap="flat" cmpd="sng" algn="ctr">
+                      <a:solidFill>
+                        <a:srgbClr val="D6D6D6"/>
+                      </a:solidFill>
+                      <a:prstDash val="solid"/>
+                      <a:round/>
+                      <a:headEnd type="none" w="med" len="med"/>
+                      <a:tailEnd type="none" w="med" len="med"/>
+                    </a:lnR>
+                    <a:lnT w="9525" cap="flat" cmpd="sng" algn="ctr">
+                      <a:solidFill>
+                        <a:srgbClr val="D6D6D6"/>
+                      </a:solidFill>
+                      <a:prstDash val="solid"/>
+                      <a:round/>
+                      <a:headEnd type="none" w="med" len="med"/>
+                      <a:tailEnd type="none" w="med" len="med"/>
+                    </a:lnT>
+                    <a:lnB w="9525" cap="flat" cmpd="sng" algn="ctr">
+                      <a:solidFill>
+                        <a:srgbClr val="D6D6D6"/>
+                      </a:solidFill>
+                      <a:prstDash val="solid"/>
+                      <a:round/>
+                      <a:headEnd type="none" w="med" len="med"/>
+                      <a:tailEnd type="none" w="med" len="med"/>
+                    </a:lnB>
+                    <a:solidFill>
+                      <a:srgbClr val="FFFFFF"/>
+                    </a:solidFill>
+                  </a:tcPr>
+                </a:tc>
+                <a:tc>
+                  <a:txBody>
+                    <a:bodyPr/>
+                    <a:lstStyle/>
+                    <a:p>
+                      <a:pPr algn="r">
+                        <a:buNone/>
+                      </a:pPr>
+                      <a:r>
+                        <a:rPr lang="en-US" altLang="zh-TW">
+                          <a:effectLst/>
+                          <a:latin typeface="Microsoft JhengHei" panose="020B0604030504040204" pitchFamily="34" charset="-120"/>
+                          <a:ea typeface="Microsoft JhengHei" panose="020B0604030504040204" pitchFamily="34" charset="-120"/>
+                        </a:rPr>
+                        <a:t>506,701</a:t>
+                      </a:r>
+                    </a:p>
+                  </a:txBody>
+                  <a:tcPr marL="123825" marR="123825" marT="57150" marB="57150" anchor="ctr">
+                    <a:lnL w="9525" cap="flat" cmpd="sng" algn="ctr">
+                      <a:solidFill>
+                        <a:srgbClr val="D6D6D6"/>
+                      </a:solidFill>
+                      <a:prstDash val="solid"/>
+                      <a:round/>
+                      <a:headEnd type="none" w="med" len="med"/>
+                      <a:tailEnd type="none" w="med" len="med"/>
+                    </a:lnL>
+                    <a:lnR w="9525" cap="flat" cmpd="sng" algn="ctr">
+                      <a:solidFill>
+                        <a:srgbClr val="D6D6D6"/>
+                      </a:solidFill>
+                      <a:prstDash val="solid"/>
+                      <a:round/>
+                      <a:headEnd type="none" w="med" len="med"/>
+                      <a:tailEnd type="none" w="med" len="med"/>
+                    </a:lnR>
+                    <a:lnT w="9525" cap="flat" cmpd="sng" algn="ctr">
+                      <a:solidFill>
+                        <a:srgbClr val="D6D6D6"/>
+                      </a:solidFill>
+                      <a:prstDash val="solid"/>
+                      <a:round/>
+                      <a:headEnd type="none" w="med" len="med"/>
+                      <a:tailEnd type="none" w="med" len="med"/>
+                    </a:lnT>
+                    <a:lnB w="9525" cap="flat" cmpd="sng" algn="ctr">
+                      <a:solidFill>
+                        <a:srgbClr val="D6D6D6"/>
+                      </a:solidFill>
+                      <a:prstDash val="solid"/>
+                      <a:round/>
+                      <a:headEnd type="none" w="med" len="med"/>
+                      <a:tailEnd type="none" w="med" len="med"/>
+                    </a:lnB>
+                    <a:solidFill>
+                      <a:srgbClr val="FFFFFF"/>
+                    </a:solidFill>
+                  </a:tcPr>
+                </a:tc>
+                <a:extLst>
+                  <a:ext uri="{0D108BD9-81ED-4DB2-BD59-A6C34878D82A}">
+                    <a16:rowId xmlns:a16="http://schemas.microsoft.com/office/drawing/2014/main" val="3263036067"/>
+                  </a:ext>
+                </a:extLst>
+              </a:tr>
+              <a:tr h="0">
+                <a:tc>
+                  <a:txBody>
+                    <a:bodyPr/>
+                    <a:lstStyle/>
+                    <a:p>
+                      <a:pPr>
+                        <a:buNone/>
+                      </a:pPr>
+                      <a:r>
+                        <a:rPr lang="zh-TW" altLang="en-US">
+                          <a:effectLst/>
+                          <a:latin typeface="Microsoft JhengHei" panose="020B0604030504040204" pitchFamily="34" charset="-120"/>
+                          <a:ea typeface="Microsoft JhengHei" panose="020B0604030504040204" pitchFamily="34" charset="-120"/>
+                        </a:rPr>
+                        <a:t>新增 </a:t>
+                      </a:r>
+                      <a:r>
+                        <a:rPr lang="en">
+                          <a:effectLst/>
+                          <a:latin typeface="Microsoft JhengHei" panose="020B0604030504040204" pitchFamily="34" charset="-120"/>
+                          <a:ea typeface="Microsoft JhengHei" panose="020B0604030504040204" pitchFamily="34" charset="-120"/>
+                        </a:rPr>
+                        <a:t>users</a:t>
+                      </a:r>
+                    </a:p>
+                  </a:txBody>
+                  <a:tcPr marL="123825" marR="123825" marT="57150" marB="57150" anchor="ctr">
+                    <a:lnL w="9525" cap="flat" cmpd="sng" algn="ctr">
+                      <a:solidFill>
+                        <a:srgbClr val="D6D6D6"/>
+                      </a:solidFill>
+                      <a:prstDash val="solid"/>
+                      <a:round/>
+                      <a:headEnd type="none" w="med" len="med"/>
+                      <a:tailEnd type="none" w="med" len="med"/>
+                    </a:lnL>
+                    <a:lnR w="9525" cap="flat" cmpd="sng" algn="ctr">
+                      <a:solidFill>
+                        <a:srgbClr val="D6D6D6"/>
+                      </a:solidFill>
+                      <a:prstDash val="solid"/>
+                      <a:round/>
+                      <a:headEnd type="none" w="med" len="med"/>
+                      <a:tailEnd type="none" w="med" len="med"/>
+                    </a:lnR>
+                    <a:lnT w="9525" cap="flat" cmpd="sng" algn="ctr">
+                      <a:solidFill>
+                        <a:srgbClr val="D6D6D6"/>
+                      </a:solidFill>
+                      <a:prstDash val="solid"/>
+                      <a:round/>
+                      <a:headEnd type="none" w="med" len="med"/>
+                      <a:tailEnd type="none" w="med" len="med"/>
+                    </a:lnT>
+                    <a:lnB w="9525" cap="flat" cmpd="sng" algn="ctr">
+                      <a:solidFill>
+                        <a:srgbClr val="D6D6D6"/>
+                      </a:solidFill>
+                      <a:prstDash val="solid"/>
+                      <a:round/>
+                      <a:headEnd type="none" w="med" len="med"/>
+                      <a:tailEnd type="none" w="med" len="med"/>
+                    </a:lnB>
+                    <a:solidFill>
+                      <a:srgbClr val="FFFFFF"/>
+                    </a:solidFill>
+                  </a:tcPr>
+                </a:tc>
+                <a:tc>
+                  <a:txBody>
+                    <a:bodyPr/>
+                    <a:lstStyle/>
+                    <a:p>
+                      <a:pPr algn="r">
+                        <a:buNone/>
+                      </a:pPr>
+                      <a:r>
+                        <a:rPr lang="en-US" altLang="zh-TW">
+                          <a:effectLst/>
+                          <a:latin typeface="Microsoft JhengHei" panose="020B0604030504040204" pitchFamily="34" charset="-120"/>
+                          <a:ea typeface="Microsoft JhengHei" panose="020B0604030504040204" pitchFamily="34" charset="-120"/>
+                        </a:rPr>
+                        <a:t>0</a:t>
+                      </a:r>
+                    </a:p>
+                  </a:txBody>
+                  <a:tcPr marL="123825" marR="123825" marT="57150" marB="57150" anchor="ctr">
+                    <a:lnL w="9525" cap="flat" cmpd="sng" algn="ctr">
+                      <a:solidFill>
+                        <a:srgbClr val="D6D6D6"/>
+                      </a:solidFill>
+                      <a:prstDash val="solid"/>
+                      <a:round/>
+                      <a:headEnd type="none" w="med" len="med"/>
+                      <a:tailEnd type="none" w="med" len="med"/>
+                    </a:lnL>
+                    <a:lnR w="9525" cap="flat" cmpd="sng" algn="ctr">
+                      <a:solidFill>
+                        <a:srgbClr val="D6D6D6"/>
+                      </a:solidFill>
+                      <a:prstDash val="solid"/>
+                      <a:round/>
+                      <a:headEnd type="none" w="med" len="med"/>
+                      <a:tailEnd type="none" w="med" len="med"/>
+                    </a:lnR>
+                    <a:lnT w="9525" cap="flat" cmpd="sng" algn="ctr">
+                      <a:solidFill>
+                        <a:srgbClr val="D6D6D6"/>
+                      </a:solidFill>
+                      <a:prstDash val="solid"/>
+                      <a:round/>
+                      <a:headEnd type="none" w="med" len="med"/>
+                      <a:tailEnd type="none" w="med" len="med"/>
+                    </a:lnT>
+                    <a:lnB w="9525" cap="flat" cmpd="sng" algn="ctr">
+                      <a:solidFill>
+                        <a:srgbClr val="D6D6D6"/>
+                      </a:solidFill>
+                      <a:prstDash val="solid"/>
+                      <a:round/>
+                      <a:headEnd type="none" w="med" len="med"/>
+                      <a:tailEnd type="none" w="med" len="med"/>
+                    </a:lnB>
+                    <a:solidFill>
+                      <a:srgbClr val="FFFFFF"/>
+                    </a:solidFill>
+                  </a:tcPr>
+                </a:tc>
+                <a:tc>
+                  <a:txBody>
+                    <a:bodyPr/>
+                    <a:lstStyle/>
+                    <a:p>
+                      <a:pPr algn="r">
+                        <a:buNone/>
+                      </a:pPr>
+                      <a:r>
+                        <a:rPr lang="en-US" altLang="zh-TW">
+                          <a:effectLst/>
+                          <a:latin typeface="Microsoft JhengHei" panose="020B0604030504040204" pitchFamily="34" charset="-120"/>
+                          <a:ea typeface="Microsoft JhengHei" panose="020B0604030504040204" pitchFamily="34" charset="-120"/>
+                        </a:rPr>
+                        <a:t>9</a:t>
+                      </a:r>
+                    </a:p>
+                  </a:txBody>
+                  <a:tcPr marL="123825" marR="123825" marT="57150" marB="57150" anchor="ctr">
+                    <a:lnL w="9525" cap="flat" cmpd="sng" algn="ctr">
+                      <a:solidFill>
+                        <a:srgbClr val="D6D6D6"/>
+                      </a:solidFill>
+                      <a:prstDash val="solid"/>
+                      <a:round/>
+                      <a:headEnd type="none" w="med" len="med"/>
+                      <a:tailEnd type="none" w="med" len="med"/>
+                    </a:lnL>
+                    <a:lnR w="9525" cap="flat" cmpd="sng" algn="ctr">
+                      <a:solidFill>
+                        <a:srgbClr val="D6D6D6"/>
+                      </a:solidFill>
+                      <a:prstDash val="solid"/>
+                      <a:round/>
+                      <a:headEnd type="none" w="med" len="med"/>
+                      <a:tailEnd type="none" w="med" len="med"/>
+                    </a:lnR>
+                    <a:lnT w="9525" cap="flat" cmpd="sng" algn="ctr">
+                      <a:solidFill>
+                        <a:srgbClr val="D6D6D6"/>
+                      </a:solidFill>
+                      <a:prstDash val="solid"/>
+                      <a:round/>
+                      <a:headEnd type="none" w="med" len="med"/>
+                      <a:tailEnd type="none" w="med" len="med"/>
+                    </a:lnT>
+                    <a:lnB w="9525" cap="flat" cmpd="sng" algn="ctr">
+                      <a:solidFill>
+                        <a:srgbClr val="D6D6D6"/>
+                      </a:solidFill>
+                      <a:prstDash val="solid"/>
+                      <a:round/>
+                      <a:headEnd type="none" w="med" len="med"/>
+                      <a:tailEnd type="none" w="med" len="med"/>
+                    </a:lnB>
+                    <a:solidFill>
+                      <a:srgbClr val="FFFFFF"/>
+                    </a:solidFill>
+                  </a:tcPr>
+                </a:tc>
+                <a:tc>
+                  <a:txBody>
+                    <a:bodyPr/>
+                    <a:lstStyle/>
+                    <a:p>
+                      <a:pPr algn="r">
+                        <a:buNone/>
+                      </a:pPr>
+                      <a:r>
+                        <a:rPr lang="en-US" altLang="zh-TW" dirty="0">
+                          <a:effectLst/>
+                          <a:latin typeface="Microsoft JhengHei" panose="020B0604030504040204" pitchFamily="34" charset="-120"/>
+                          <a:ea typeface="Microsoft JhengHei" panose="020B0604030504040204" pitchFamily="34" charset="-120"/>
+                        </a:rPr>
+                        <a:t>49</a:t>
+                      </a:r>
+                    </a:p>
+                  </a:txBody>
+                  <a:tcPr marL="123825" marR="123825" marT="57150" marB="57150" anchor="ctr">
+                    <a:lnL w="9525" cap="flat" cmpd="sng" algn="ctr">
+                      <a:solidFill>
+                        <a:srgbClr val="D6D6D6"/>
+                      </a:solidFill>
+                      <a:prstDash val="solid"/>
+                      <a:round/>
+                      <a:headEnd type="none" w="med" len="med"/>
+                      <a:tailEnd type="none" w="med" len="med"/>
+                    </a:lnL>
+                    <a:lnR w="9525" cap="flat" cmpd="sng" algn="ctr">
+                      <a:solidFill>
+                        <a:srgbClr val="D6D6D6"/>
+                      </a:solidFill>
+                      <a:prstDash val="solid"/>
+                      <a:round/>
+                      <a:headEnd type="none" w="med" len="med"/>
+                      <a:tailEnd type="none" w="med" len="med"/>
+                    </a:lnR>
+                    <a:lnT w="9525" cap="flat" cmpd="sng" algn="ctr">
+                      <a:solidFill>
+                        <a:srgbClr val="D6D6D6"/>
+                      </a:solidFill>
+                      <a:prstDash val="solid"/>
+                      <a:round/>
+                      <a:headEnd type="none" w="med" len="med"/>
+                      <a:tailEnd type="none" w="med" len="med"/>
+                    </a:lnT>
+                    <a:lnB w="9525" cap="flat" cmpd="sng" algn="ctr">
+                      <a:solidFill>
+                        <a:srgbClr val="D6D6D6"/>
+                      </a:solidFill>
+                      <a:prstDash val="solid"/>
+                      <a:round/>
+                      <a:headEnd type="none" w="med" len="med"/>
+                      <a:tailEnd type="none" w="med" len="med"/>
+                    </a:lnB>
+                    <a:solidFill>
+                      <a:srgbClr val="FFFFFF"/>
+                    </a:solidFill>
+                  </a:tcPr>
+                </a:tc>
+                <a:extLst>
+                  <a:ext uri="{0D108BD9-81ED-4DB2-BD59-A6C34878D82A}">
+                    <a16:rowId xmlns:a16="http://schemas.microsoft.com/office/drawing/2014/main" val="2474316518"/>
+                  </a:ext>
+                </a:extLst>
+              </a:tr>
+            </a:tbl>
+          </a:graphicData>
+        </a:graphic>
+      </p:graphicFrame>
+      <p:pic>
+        <p:nvPicPr>
+          <p:cNvPr id="12" name="圖片 11" descr="一張含有 圓形, 螢幕擷取畫面, 圖表 的圖片&#10;&#10;AI 產生的內容可能不正確。">
+            <a:extLst>
+              <a:ext uri="{FF2B5EF4-FFF2-40B4-BE49-F238E27FC236}">
+                <a16:creationId xmlns:a16="http://schemas.microsoft.com/office/drawing/2014/main" id="{1E922402-F87F-FD60-2707-88CFBA449729}"/>
+              </a:ext>
+            </a:extLst>
+          </p:cNvPr>
+          <p:cNvPicPr>
+            <a:picLocks noChangeAspect="1"/>
+          </p:cNvPicPr>
+          <p:nvPr/>
+        </p:nvPicPr>
+        <p:blipFill>
+          <a:blip r:embed="rId3"/>
+          <a:stretch>
+            <a:fillRect/>
+          </a:stretch>
+        </p:blipFill>
+        <p:spPr>
+          <a:xfrm>
+            <a:off x="6194976" y="930407"/>
+            <a:ext cx="4046228" cy="2797791"/>
+          </a:xfrm>
+          <a:prstGeom prst="rect">
+            <a:avLst/>
+          </a:prstGeom>
+        </p:spPr>
+      </p:pic>
+    </p:spTree>
+    <p:extLst>
+      <p:ext uri="{BB962C8B-B14F-4D97-AF65-F5344CB8AC3E}">
+        <p14:creationId xmlns:p14="http://schemas.microsoft.com/office/powerpoint/2010/main" val="3891388891"/>
+      </p:ext>
+    </p:extLst>
+  </p:cSld>
+  <p:clrMapOvr>
+    <a:masterClrMapping/>
+  </p:clrMapOvr>
+</p:sld>
+</file>
+
 <file path=ppt/theme/theme1.xml><?xml version="1.0" encoding="utf-8"?>
 <a:theme xmlns:a="http://schemas.openxmlformats.org/drawingml/2006/main" name="數科處範本">
   <a:themeElements>
@@ -15519,6 +18629,21 @@
 </file>
 
 <file path=customXml/item1.xml><?xml version="1.0" encoding="utf-8"?>
+<p:properties xmlns:p="http://schemas.microsoft.com/office/2006/metadata/properties" xmlns:xsi="http://www.w3.org/2001/XMLSchema-instance" xmlns:pc="http://schemas.microsoft.com/office/infopath/2007/PartnerControls">
+  <documentManagement/>
+</p:properties>
+</file>
+
+<file path=customXml/item2.xml><?xml version="1.0" encoding="utf-8"?>
+<?mso-contentType ?>
+<FormTemplates xmlns="http://schemas.microsoft.com/sharepoint/v3/contenttype/forms">
+  <Display>DocumentLibraryForm</Display>
+  <Edit>DocumentLibraryForm</Edit>
+  <New>DocumentLibraryForm</New>
+</FormTemplates>
+</file>
+
+<file path=customXml/item3.xml><?xml version="1.0" encoding="utf-8"?>
 <ct:contentTypeSchema xmlns:ct="http://schemas.microsoft.com/office/2006/metadata/contentType" xmlns:ma="http://schemas.microsoft.com/office/2006/metadata/properties/metaAttributes" ct:_="" ma:_="" ma:contentTypeName="Document" ma:contentTypeID="0x010100DE4F25D0FF425B4EA678AC2414B6A709" ma:contentTypeVersion="10" ma:contentTypeDescription="Create a new document." ma:contentTypeScope="" ma:versionID="8ceec2ce155b1d63c0c6fcd4110f3cfe">
   <xsd:schema xmlns:xsd="http://www.w3.org/2001/XMLSchema" xmlns:xs="http://www.w3.org/2001/XMLSchema" xmlns:p="http://schemas.microsoft.com/office/2006/metadata/properties" xmlns:ns2="7cac0686-f0c7-4236-b000-d7b90732a875" xmlns:ns3="9bfc64f2-d580-4df8-9fa4-4631ad6ac43d" targetNamespace="http://schemas.microsoft.com/office/2006/metadata/properties" ma:root="true" ma:fieldsID="267f21102a69fda15f58a0ecdfc9abe1" ns2:_="" ns3:_="">
     <xsd:import namespace="7cac0686-f0c7-4236-b000-d7b90732a875"/>
@@ -15719,22 +18844,32 @@
 </ct:contentTypeSchema>
 </file>
 
-<file path=customXml/item2.xml><?xml version="1.0" encoding="utf-8"?>
-<?mso-contentType ?>
-<FormTemplates xmlns="http://schemas.microsoft.com/sharepoint/v3/contenttype/forms">
-  <Display>DocumentLibraryForm</Display>
-  <Edit>DocumentLibraryForm</Edit>
-  <New>DocumentLibraryForm</New>
-</FormTemplates>
+<file path=customXml/itemProps1.xml><?xml version="1.0" encoding="utf-8"?>
+<ds:datastoreItem xmlns:ds="http://schemas.openxmlformats.org/officeDocument/2006/customXml" ds:itemID="{0FD5D526-59E0-46BD-B75A-4A393253F249}">
+  <ds:schemaRefs>
+    <ds:schemaRef ds:uri="http://schemas.microsoft.com/office/2006/documentManagement/types"/>
+    <ds:schemaRef ds:uri="http://schemas.microsoft.com/office/2006/metadata/properties"/>
+    <ds:schemaRef ds:uri="http://purl.org/dc/elements/1.1/"/>
+    <ds:schemaRef ds:uri="9bfc64f2-d580-4df8-9fa4-4631ad6ac43d"/>
+    <ds:schemaRef ds:uri="http://schemas.openxmlformats.org/package/2006/metadata/core-properties"/>
+    <ds:schemaRef ds:uri="http://purl.org/dc/terms/"/>
+    <ds:schemaRef ds:uri="http://www.w3.org/XML/1998/namespace"/>
+    <ds:schemaRef ds:uri="http://schemas.microsoft.com/office/infopath/2007/PartnerControls"/>
+    <ds:schemaRef ds:uri="7cac0686-f0c7-4236-b000-d7b90732a875"/>
+    <ds:schemaRef ds:uri="http://purl.org/dc/dcmitype/"/>
+  </ds:schemaRefs>
+</ds:datastoreItem>
 </file>
 
-<file path=customXml/item3.xml><?xml version="1.0" encoding="utf-8"?>
-<p:properties xmlns:p="http://schemas.microsoft.com/office/2006/metadata/properties" xmlns:xsi="http://www.w3.org/2001/XMLSchema-instance" xmlns:pc="http://schemas.microsoft.com/office/infopath/2007/PartnerControls">
-  <documentManagement/>
-</p:properties>
+<file path=customXml/itemProps2.xml><?xml version="1.0" encoding="utf-8"?>
+<ds:datastoreItem xmlns:ds="http://schemas.openxmlformats.org/officeDocument/2006/customXml" ds:itemID="{76929C79-DB32-411C-8C37-9A0BBBB5F642}">
+  <ds:schemaRefs>
+    <ds:schemaRef ds:uri="http://schemas.microsoft.com/sharepoint/v3/contenttype/forms"/>
+  </ds:schemaRefs>
+</ds:datastoreItem>
 </file>
 
-<file path=customXml/itemProps1.xml><?xml version="1.0" encoding="utf-8"?>
+<file path=customXml/itemProps3.xml><?xml version="1.0" encoding="utf-8"?>
 <ds:datastoreItem xmlns:ds="http://schemas.openxmlformats.org/officeDocument/2006/customXml" ds:itemID="{6B3946E7-66F8-4182-AA38-CFC406C59F4E}">
   <ds:schemaRefs>
     <ds:schemaRef ds:uri="http://schemas.microsoft.com/office/2006/metadata/contentType"/>
@@ -15753,31 +18888,6 @@
 </ds:datastoreItem>
 </file>
 
-<file path=customXml/itemProps2.xml><?xml version="1.0" encoding="utf-8"?>
-<ds:datastoreItem xmlns:ds="http://schemas.openxmlformats.org/officeDocument/2006/customXml" ds:itemID="{76929C79-DB32-411C-8C37-9A0BBBB5F642}">
-  <ds:schemaRefs>
-    <ds:schemaRef ds:uri="http://schemas.microsoft.com/sharepoint/v3/contenttype/forms"/>
-  </ds:schemaRefs>
-</ds:datastoreItem>
-</file>
-
-<file path=customXml/itemProps3.xml><?xml version="1.0" encoding="utf-8"?>
-<ds:datastoreItem xmlns:ds="http://schemas.openxmlformats.org/officeDocument/2006/customXml" ds:itemID="{0FD5D526-59E0-46BD-B75A-4A393253F249}">
-  <ds:schemaRefs>
-    <ds:schemaRef ds:uri="http://schemas.microsoft.com/office/2006/documentManagement/types"/>
-    <ds:schemaRef ds:uri="http://schemas.microsoft.com/office/2006/metadata/properties"/>
-    <ds:schemaRef ds:uri="http://purl.org/dc/elements/1.1/"/>
-    <ds:schemaRef ds:uri="9bfc64f2-d580-4df8-9fa4-4631ad6ac43d"/>
-    <ds:schemaRef ds:uri="http://schemas.openxmlformats.org/package/2006/metadata/core-properties"/>
-    <ds:schemaRef ds:uri="http://purl.org/dc/terms/"/>
-    <ds:schemaRef ds:uri="http://www.w3.org/XML/1998/namespace"/>
-    <ds:schemaRef ds:uri="http://schemas.microsoft.com/office/infopath/2007/PartnerControls"/>
-    <ds:schemaRef ds:uri="7cac0686-f0c7-4236-b000-d7b90732a875"/>
-    <ds:schemaRef ds:uri="http://purl.org/dc/dcmitype/"/>
-  </ds:schemaRefs>
-</ds:datastoreItem>
-</file>
-
 <file path=docMetadata/LabelInfo.xml><?xml version="1.0" encoding="utf-8"?>
 <clbl:labelList xmlns:clbl="http://schemas.microsoft.com/office/2020/mipLabelMetadata">
   <clbl:label id="{217a5a3d-163a-4e8b-af1b-58fd7f92894f}" enabled="0" method="" siteId="{217a5a3d-163a-4e8b-af1b-58fd7f92894f}" removed="1"/>

--- a/infogather.pptx
+++ b/infogather.pptx
@@ -255,7 +255,7 @@
       <p15:notesGuideLst xmlns:p15="http://schemas.microsoft.com/office/powerpoint/2012/main"/>
     </p:ext>
     <p:ext uri="GoogleSlidesCustomDataVersion2">
-      <go:slidesCustomData xmlns:mc="http://schemas.openxmlformats.org/markup-compatibility/2006" xmlns:mv="urn:schemas-microsoft-com:mac:vml" xmlns:c="http://schemas.openxmlformats.org/drawingml/2006/chart" xmlns:dgm="http://schemas.openxmlformats.org/drawingml/2006/diagram" xmlns:o="urn:schemas-microsoft-com:office:office" xmlns:v="urn:schemas-microsoft-com:vml" xmlns:pvml="urn:schemas-microsoft-com:office:powerpoint" xmlns:com="http://schemas.openxmlformats.org/drawingml/2006/compatibility" xmlns:p14="http://schemas.microsoft.com/office/powerpoint/2010/main" xmlns:p15="http://schemas.microsoft.com/office/powerpoint/2012/main" xmlns:ahyp="http://schemas.microsoft.com/office/drawing/2018/hyperlinkcolor" xmlns:go="http://customooxmlschemas.google.com/" xmlns="" r:id="rId52" roundtripDataSignature="AMtx7mhqKJAzFugGzrpaCdpbPJOL8OwfdA=="/>
+      <go:slidesCustomData xmlns="" xmlns:go="http://customooxmlschemas.google.com/" xmlns:ahyp="http://schemas.microsoft.com/office/drawing/2018/hyperlinkcolor" xmlns:p15="http://schemas.microsoft.com/office/powerpoint/2012/main" xmlns:p14="http://schemas.microsoft.com/office/powerpoint/2010/main" xmlns:com="http://schemas.openxmlformats.org/drawingml/2006/compatibility" xmlns:pvml="urn:schemas-microsoft-com:office:powerpoint" xmlns:v="urn:schemas-microsoft-com:vml" xmlns:o="urn:schemas-microsoft-com:office:office" xmlns:dgm="http://schemas.openxmlformats.org/drawingml/2006/diagram" xmlns:c="http://schemas.openxmlformats.org/drawingml/2006/chart" xmlns:mv="urn:schemas-microsoft-com:mac:vml" xmlns:mc="http://schemas.openxmlformats.org/markup-compatibility/2006" r:id="rId52" roundtripDataSignature="AMtx7mhqKJAzFugGzrpaCdpbPJOL8OwfdA=="/>
     </p:ext>
   </p:extLst>
 </p:presentation>
@@ -1473,6 +1473,22 @@
     </pc:docChg>
   </pc:docChgLst>
   <pc:docChgLst>
+    <pc:chgData name="周立筠-數據應用部-永豐金證券" userId="S::liyun0222.zhou@sinopac.com::ee349c15-f274-43a3-b0c9-48d528d95247" providerId="AD" clId="Web-{A48564C8-421B-2203-E695-99D400D4424E}"/>
+    <pc:docChg chg="modSld">
+      <pc:chgData name="周立筠-數據應用部-永豐金證券" userId="S::liyun0222.zhou@sinopac.com::ee349c15-f274-43a3-b0c9-48d528d95247" providerId="AD" clId="Web-{A48564C8-421B-2203-E695-99D400D4424E}" dt="2024-08-23T09:42:27.791" v="49"/>
+      <pc:docMkLst>
+        <pc:docMk/>
+      </pc:docMkLst>
+      <pc:sldChg chg="modSp">
+        <pc:chgData name="周立筠-數據應用部-永豐金證券" userId="S::liyun0222.zhou@sinopac.com::ee349c15-f274-43a3-b0c9-48d528d95247" providerId="AD" clId="Web-{A48564C8-421B-2203-E695-99D400D4424E}" dt="2024-08-23T09:42:27.791" v="49"/>
+        <pc:sldMkLst>
+          <pc:docMk/>
+          <pc:sldMk cId="3262633635" sldId="297"/>
+        </pc:sldMkLst>
+      </pc:sldChg>
+    </pc:docChg>
+  </pc:docChgLst>
+  <pc:docChgLst>
     <pc:chgData name="張天豪-數位金融處-永豐銀行" userId="0d835702-99c9-4ef6-82d8-3ca86d4ccc15" providerId="ADAL" clId="{05C68244-A0A4-5F4B-A227-C47B6FE62571}"/>
     <pc:docChg chg="undo custSel addSld delSld modSld modMainMaster modSection">
       <pc:chgData name="張天豪-數位金融處-永豐銀行" userId="0d835702-99c9-4ef6-82d8-3ca86d4ccc15" providerId="ADAL" clId="{05C68244-A0A4-5F4B-A227-C47B6FE62571}" dt="2024-11-23T00:59:06.402" v="223" actId="12"/>
@@ -1573,22 +1589,6 @@
           </pc:sldLayoutMkLst>
         </pc:sldLayoutChg>
       </pc:sldMasterChg>
-    </pc:docChg>
-  </pc:docChgLst>
-  <pc:docChgLst>
-    <pc:chgData name="周立筠-數據應用部-永豐金證券" userId="S::liyun0222.zhou@sinopac.com::ee349c15-f274-43a3-b0c9-48d528d95247" providerId="AD" clId="Web-{A48564C8-421B-2203-E695-99D400D4424E}"/>
-    <pc:docChg chg="modSld">
-      <pc:chgData name="周立筠-數據應用部-永豐金證券" userId="S::liyun0222.zhou@sinopac.com::ee349c15-f274-43a3-b0c9-48d528d95247" providerId="AD" clId="Web-{A48564C8-421B-2203-E695-99D400D4424E}" dt="2024-08-23T09:42:27.791" v="49"/>
-      <pc:docMkLst>
-        <pc:docMk/>
-      </pc:docMkLst>
-      <pc:sldChg chg="modSp">
-        <pc:chgData name="周立筠-數據應用部-永豐金證券" userId="S::liyun0222.zhou@sinopac.com::ee349c15-f274-43a3-b0c9-48d528d95247" providerId="AD" clId="Web-{A48564C8-421B-2203-E695-99D400D4424E}" dt="2024-08-23T09:42:27.791" v="49"/>
-        <pc:sldMkLst>
-          <pc:docMk/>
-          <pc:sldMk cId="3262633635" sldId="297"/>
-        </pc:sldMkLst>
-      </pc:sldChg>
     </pc:docChg>
   </pc:docChgLst>
 </pc:chgInfo>
@@ -9126,36 +9126,6 @@
           </a:p>
         </p:txBody>
       </p:sp>
-      <p:pic>
-        <p:nvPicPr>
-          <p:cNvPr id="5" name="圖片 4" descr="一張含有 文字, 螢幕擷取畫面 的圖片&#10;&#10;AI 產生的內容可能不正確。">
-            <a:extLst>
-              <a:ext uri="{FF2B5EF4-FFF2-40B4-BE49-F238E27FC236}">
-                <a16:creationId xmlns:a16="http://schemas.microsoft.com/office/drawing/2014/main" id="{120DA8B0-14E6-4DDA-D717-6EE86465DF27}"/>
-              </a:ext>
-            </a:extLst>
-          </p:cNvPr>
-          <p:cNvPicPr>
-            <a:picLocks noChangeAspect="1"/>
-          </p:cNvPicPr>
-          <p:nvPr/>
-        </p:nvPicPr>
-        <p:blipFill>
-          <a:blip r:embed="rId3"/>
-          <a:stretch>
-            <a:fillRect/>
-          </a:stretch>
-        </p:blipFill>
-        <p:spPr>
-          <a:xfrm>
-            <a:off x="1260242" y="814325"/>
-            <a:ext cx="9000000" cy="2592830"/>
-          </a:xfrm>
-          <a:prstGeom prst="rect">
-            <a:avLst/>
-          </a:prstGeom>
-        </p:spPr>
-      </p:pic>
       <p:graphicFrame>
         <p:nvGraphicFramePr>
           <p:cNvPr id="3" name="表格 2">
@@ -9171,21 +9141,21 @@
           <p:nvPr>
             <p:extLst>
               <p:ext uri="{D42A27DB-BD31-4B8C-83A1-F6EECF244321}">
-                <p14:modId xmlns:p14="http://schemas.microsoft.com/office/powerpoint/2010/main" val="2222657314"/>
+                <p14:modId xmlns:p14="http://schemas.microsoft.com/office/powerpoint/2010/main" val="4000937281"/>
               </p:ext>
             </p:extLst>
           </p:nvPr>
         </p:nvGraphicFramePr>
         <p:xfrm>
           <a:off x="450242" y="3609480"/>
-          <a:ext cx="10620000" cy="2340002"/>
+          <a:ext cx="10809792" cy="2104015"/>
         </p:xfrm>
         <a:graphic>
           <a:graphicData uri="http://schemas.openxmlformats.org/drawingml/2006/table">
             <a:tbl>
               <a:tblPr/>
               <a:tblGrid>
-                <a:gridCol w="998693">
+                <a:gridCol w="1188485">
                   <a:extLst>
                     <a:ext uri="{9D8B030D-6E8A-4147-A177-3AD203B41FA5}">
                       <a16:colId xmlns:a16="http://schemas.microsoft.com/office/drawing/2014/main" val="1267251201"/>
@@ -9207,7 +9177,7 @@
                   </a:extLst>
                 </a:gridCol>
               </a:tblGrid>
-              <a:tr h="279322">
+              <a:tr h="227566">
                 <a:tc>
                   <a:txBody>
                     <a:bodyPr/>
@@ -9403,7 +9373,7 @@
                   </a:ext>
                 </a:extLst>
               </a:tr>
-              <a:tr h="279322">
+              <a:tr h="227566">
                 <a:tc>
                   <a:txBody>
                     <a:bodyPr/>
@@ -9412,6 +9382,14 @@
                       <a:pPr>
                         <a:buNone/>
                       </a:pPr>
+                      <a:r>
+                        <a:rPr lang="en-US" altLang="zh-TW" sz="1200" dirty="0">
+                          <a:effectLst/>
+                          <a:latin typeface="Microsoft JhengHei" panose="020B0604030504040204" pitchFamily="34" charset="-120"/>
+                          <a:ea typeface="Microsoft JhengHei" panose="020B0604030504040204" pitchFamily="34" charset="-120"/>
+                        </a:rPr>
+                        <a:t>① </a:t>
+                      </a:r>
                       <a:r>
                         <a:rPr lang="zh-TW" altLang="en-US" sz="1200" dirty="0">
                           <a:effectLst/>
@@ -9590,7 +9568,7 @@
                   </a:ext>
                 </a:extLst>
               </a:tr>
-              <a:tr h="279322">
+              <a:tr h="227566">
                 <a:tc>
                   <a:txBody>
                     <a:bodyPr/>
@@ -9599,6 +9577,14 @@
                       <a:pPr>
                         <a:buNone/>
                       </a:pPr>
+                      <a:r>
+                        <a:rPr lang="en-US" altLang="zh-TW" sz="1200" dirty="0">
+                          <a:effectLst/>
+                          <a:latin typeface="Microsoft JhengHei" panose="020B0604030504040204" pitchFamily="34" charset="-120"/>
+                          <a:ea typeface="Microsoft JhengHei" panose="020B0604030504040204" pitchFamily="34" charset="-120"/>
+                        </a:rPr>
+                        <a:t>② </a:t>
+                      </a:r>
                       <a:r>
                         <a:rPr lang="zh-TW" altLang="en-US" sz="1200" dirty="0">
                           <a:effectLst/>
@@ -9817,7 +9803,7 @@
                   </a:ext>
                 </a:extLst>
               </a:tr>
-              <a:tr h="299067">
+              <a:tr h="243652">
                 <a:tc>
                   <a:txBody>
                     <a:bodyPr/>
@@ -9826,6 +9812,14 @@
                       <a:pPr>
                         <a:buNone/>
                       </a:pPr>
+                      <a:r>
+                        <a:rPr lang="en-US" altLang="zh-TW" sz="1200" dirty="0">
+                          <a:effectLst/>
+                          <a:latin typeface="Microsoft JhengHei" panose="020B0604030504040204" pitchFamily="34" charset="-120"/>
+                          <a:ea typeface="Microsoft JhengHei" panose="020B0604030504040204" pitchFamily="34" charset="-120"/>
+                        </a:rPr>
+                        <a:t>③ </a:t>
+                      </a:r>
                       <a:r>
                         <a:rPr lang="zh-TW" altLang="en-US" sz="1200" dirty="0">
                           <a:effectLst/>
@@ -10020,7 +10014,7 @@
                   </a:ext>
                 </a:extLst>
               </a:tr>
-              <a:tr h="279322">
+              <a:tr h="227566">
                 <a:tc>
                   <a:txBody>
                     <a:bodyPr/>
@@ -10029,6 +10023,14 @@
                       <a:pPr>
                         <a:buNone/>
                       </a:pPr>
+                      <a:r>
+                        <a:rPr lang="en-US" altLang="zh-TW" sz="1200" dirty="0">
+                          <a:effectLst/>
+                          <a:latin typeface="Microsoft JhengHei" panose="020B0604030504040204" pitchFamily="34" charset="-120"/>
+                          <a:ea typeface="Microsoft JhengHei" panose="020B0604030504040204" pitchFamily="34" charset="-120"/>
+                        </a:rPr>
+                        <a:t>④ </a:t>
+                      </a:r>
                       <a:r>
                         <a:rPr lang="zh-TW" altLang="en-US" sz="1200" dirty="0">
                           <a:effectLst/>
@@ -10207,7 +10209,7 @@
                   </a:ext>
                 </a:extLst>
               </a:tr>
-              <a:tr h="279322">
+              <a:tr h="227566">
                 <a:tc>
                   <a:txBody>
                     <a:bodyPr/>
@@ -10216,6 +10218,14 @@
                       <a:pPr>
                         <a:buNone/>
                       </a:pPr>
+                      <a:r>
+                        <a:rPr lang="en-US" altLang="zh-TW" sz="1200" dirty="0">
+                          <a:effectLst/>
+                          <a:latin typeface="Microsoft JhengHei" panose="020B0604030504040204" pitchFamily="34" charset="-120"/>
+                          <a:ea typeface="Microsoft JhengHei" panose="020B0604030504040204" pitchFamily="34" charset="-120"/>
+                        </a:rPr>
+                        <a:t>⑤ </a:t>
+                      </a:r>
                       <a:r>
                         <a:rPr lang="zh-TW" altLang="en-US" sz="1200" dirty="0">
                           <a:effectLst/>
@@ -10402,7 +10412,7 @@
                   </a:ext>
                 </a:extLst>
               </a:tr>
-              <a:tr h="279322">
+              <a:tr h="227566">
                 <a:tc>
                   <a:txBody>
                     <a:bodyPr/>
@@ -10411,6 +10421,14 @@
                       <a:pPr>
                         <a:buNone/>
                       </a:pPr>
+                      <a:r>
+                        <a:rPr lang="en-US" altLang="zh-TW" sz="1200" dirty="0">
+                          <a:effectLst/>
+                          <a:latin typeface="Microsoft JhengHei" panose="020B0604030504040204" pitchFamily="34" charset="-120"/>
+                          <a:ea typeface="Microsoft JhengHei" panose="020B0604030504040204" pitchFamily="34" charset="-120"/>
+                        </a:rPr>
+                        <a:t>⑥ </a:t>
+                      </a:r>
                       <a:r>
                         <a:rPr lang="zh-TW" altLang="en-US" sz="1200" dirty="0">
                           <a:effectLst/>
@@ -10605,7 +10623,7 @@
                   </a:ext>
                 </a:extLst>
               </a:tr>
-              <a:tr h="365003">
+              <a:tr h="297371">
                 <a:tc>
                   <a:txBody>
                     <a:bodyPr/>
@@ -10620,7 +10638,7 @@
                           <a:latin typeface="Microsoft JhengHei" panose="020B0604030504040204" pitchFamily="34" charset="-120"/>
                           <a:ea typeface="Microsoft JhengHei" panose="020B0604030504040204" pitchFamily="34" charset="-120"/>
                         </a:rPr>
-                        <a:t>AI </a:t>
+                        <a:t>⑦ AI </a:t>
                       </a:r>
                       <a:r>
                         <a:rPr lang="zh-TW" altLang="en-US" sz="1200" dirty="0">
@@ -10844,6 +10862,36 @@
           </a:graphicData>
         </a:graphic>
       </p:graphicFrame>
+      <p:pic>
+        <p:nvPicPr>
+          <p:cNvPr id="10" name="圖片 9" descr="一張含有 文字, 螢幕擷取畫面, 字型 的圖片&#10;&#10;AI 產生的內容可能不正確。">
+            <a:extLst>
+              <a:ext uri="{FF2B5EF4-FFF2-40B4-BE49-F238E27FC236}">
+                <a16:creationId xmlns:a16="http://schemas.microsoft.com/office/drawing/2014/main" id="{73CB69F9-04CF-9DEE-9670-60506887CEF5}"/>
+              </a:ext>
+            </a:extLst>
+          </p:cNvPr>
+          <p:cNvPicPr>
+            <a:picLocks noChangeAspect="1"/>
+          </p:cNvPicPr>
+          <p:nvPr/>
+        </p:nvPicPr>
+        <p:blipFill>
+          <a:blip r:embed="rId3"/>
+          <a:stretch>
+            <a:fillRect/>
+          </a:stretch>
+        </p:blipFill>
+        <p:spPr>
+          <a:xfrm>
+            <a:off x="1260244" y="814325"/>
+            <a:ext cx="9000000" cy="2592829"/>
+          </a:xfrm>
+          <a:prstGeom prst="rect">
+            <a:avLst/>
+          </a:prstGeom>
+        </p:spPr>
+      </p:pic>
     </p:spTree>
     <p:extLst>
       <p:ext uri="{BB962C8B-B14F-4D97-AF65-F5344CB8AC3E}">
@@ -18629,21 +18677,6 @@
 </file>
 
 <file path=customXml/item1.xml><?xml version="1.0" encoding="utf-8"?>
-<p:properties xmlns:p="http://schemas.microsoft.com/office/2006/metadata/properties" xmlns:xsi="http://www.w3.org/2001/XMLSchema-instance" xmlns:pc="http://schemas.microsoft.com/office/infopath/2007/PartnerControls">
-  <documentManagement/>
-</p:properties>
-</file>
-
-<file path=customXml/item2.xml><?xml version="1.0" encoding="utf-8"?>
-<?mso-contentType ?>
-<FormTemplates xmlns="http://schemas.microsoft.com/sharepoint/v3/contenttype/forms">
-  <Display>DocumentLibraryForm</Display>
-  <Edit>DocumentLibraryForm</Edit>
-  <New>DocumentLibraryForm</New>
-</FormTemplates>
-</file>
-
-<file path=customXml/item3.xml><?xml version="1.0" encoding="utf-8"?>
 <ct:contentTypeSchema xmlns:ct="http://schemas.microsoft.com/office/2006/metadata/contentType" xmlns:ma="http://schemas.microsoft.com/office/2006/metadata/properties/metaAttributes" ct:_="" ma:_="" ma:contentTypeName="Document" ma:contentTypeID="0x010100DE4F25D0FF425B4EA678AC2414B6A709" ma:contentTypeVersion="10" ma:contentTypeDescription="Create a new document." ma:contentTypeScope="" ma:versionID="8ceec2ce155b1d63c0c6fcd4110f3cfe">
   <xsd:schema xmlns:xsd="http://www.w3.org/2001/XMLSchema" xmlns:xs="http://www.w3.org/2001/XMLSchema" xmlns:p="http://schemas.microsoft.com/office/2006/metadata/properties" xmlns:ns2="7cac0686-f0c7-4236-b000-d7b90732a875" xmlns:ns3="9bfc64f2-d580-4df8-9fa4-4631ad6ac43d" targetNamespace="http://schemas.microsoft.com/office/2006/metadata/properties" ma:root="true" ma:fieldsID="267f21102a69fda15f58a0ecdfc9abe1" ns2:_="" ns3:_="">
     <xsd:import namespace="7cac0686-f0c7-4236-b000-d7b90732a875"/>
@@ -18844,32 +18877,22 @@
 </ct:contentTypeSchema>
 </file>
 
-<file path=customXml/itemProps1.xml><?xml version="1.0" encoding="utf-8"?>
-<ds:datastoreItem xmlns:ds="http://schemas.openxmlformats.org/officeDocument/2006/customXml" ds:itemID="{0FD5D526-59E0-46BD-B75A-4A393253F249}">
-  <ds:schemaRefs>
-    <ds:schemaRef ds:uri="http://schemas.microsoft.com/office/2006/documentManagement/types"/>
-    <ds:schemaRef ds:uri="http://schemas.microsoft.com/office/2006/metadata/properties"/>
-    <ds:schemaRef ds:uri="http://purl.org/dc/elements/1.1/"/>
-    <ds:schemaRef ds:uri="9bfc64f2-d580-4df8-9fa4-4631ad6ac43d"/>
-    <ds:schemaRef ds:uri="http://schemas.openxmlformats.org/package/2006/metadata/core-properties"/>
-    <ds:schemaRef ds:uri="http://purl.org/dc/terms/"/>
-    <ds:schemaRef ds:uri="http://www.w3.org/XML/1998/namespace"/>
-    <ds:schemaRef ds:uri="http://schemas.microsoft.com/office/infopath/2007/PartnerControls"/>
-    <ds:schemaRef ds:uri="7cac0686-f0c7-4236-b000-d7b90732a875"/>
-    <ds:schemaRef ds:uri="http://purl.org/dc/dcmitype/"/>
-  </ds:schemaRefs>
-</ds:datastoreItem>
+<file path=customXml/item2.xml><?xml version="1.0" encoding="utf-8"?>
+<?mso-contentType ?>
+<FormTemplates xmlns="http://schemas.microsoft.com/sharepoint/v3/contenttype/forms">
+  <Display>DocumentLibraryForm</Display>
+  <Edit>DocumentLibraryForm</Edit>
+  <New>DocumentLibraryForm</New>
+</FormTemplates>
 </file>
 
-<file path=customXml/itemProps2.xml><?xml version="1.0" encoding="utf-8"?>
-<ds:datastoreItem xmlns:ds="http://schemas.openxmlformats.org/officeDocument/2006/customXml" ds:itemID="{76929C79-DB32-411C-8C37-9A0BBBB5F642}">
-  <ds:schemaRefs>
-    <ds:schemaRef ds:uri="http://schemas.microsoft.com/sharepoint/v3/contenttype/forms"/>
-  </ds:schemaRefs>
-</ds:datastoreItem>
+<file path=customXml/item3.xml><?xml version="1.0" encoding="utf-8"?>
+<p:properties xmlns:p="http://schemas.microsoft.com/office/2006/metadata/properties" xmlns:xsi="http://www.w3.org/2001/XMLSchema-instance" xmlns:pc="http://schemas.microsoft.com/office/infopath/2007/PartnerControls">
+  <documentManagement/>
+</p:properties>
 </file>
 
-<file path=customXml/itemProps3.xml><?xml version="1.0" encoding="utf-8"?>
+<file path=customXml/itemProps1.xml><?xml version="1.0" encoding="utf-8"?>
 <ds:datastoreItem xmlns:ds="http://schemas.openxmlformats.org/officeDocument/2006/customXml" ds:itemID="{6B3946E7-66F8-4182-AA38-CFC406C59F4E}">
   <ds:schemaRefs>
     <ds:schemaRef ds:uri="http://schemas.microsoft.com/office/2006/metadata/contentType"/>
@@ -18888,6 +18911,31 @@
 </ds:datastoreItem>
 </file>
 
+<file path=customXml/itemProps2.xml><?xml version="1.0" encoding="utf-8"?>
+<ds:datastoreItem xmlns:ds="http://schemas.openxmlformats.org/officeDocument/2006/customXml" ds:itemID="{76929C79-DB32-411C-8C37-9A0BBBB5F642}">
+  <ds:schemaRefs>
+    <ds:schemaRef ds:uri="http://schemas.microsoft.com/sharepoint/v3/contenttype/forms"/>
+  </ds:schemaRefs>
+</ds:datastoreItem>
+</file>
+
+<file path=customXml/itemProps3.xml><?xml version="1.0" encoding="utf-8"?>
+<ds:datastoreItem xmlns:ds="http://schemas.openxmlformats.org/officeDocument/2006/customXml" ds:itemID="{0FD5D526-59E0-46BD-B75A-4A393253F249}">
+  <ds:schemaRefs>
+    <ds:schemaRef ds:uri="http://schemas.microsoft.com/office/2006/documentManagement/types"/>
+    <ds:schemaRef ds:uri="http://schemas.microsoft.com/office/2006/metadata/properties"/>
+    <ds:schemaRef ds:uri="http://purl.org/dc/elements/1.1/"/>
+    <ds:schemaRef ds:uri="9bfc64f2-d580-4df8-9fa4-4631ad6ac43d"/>
+    <ds:schemaRef ds:uri="http://schemas.openxmlformats.org/package/2006/metadata/core-properties"/>
+    <ds:schemaRef ds:uri="http://purl.org/dc/terms/"/>
+    <ds:schemaRef ds:uri="http://www.w3.org/XML/1998/namespace"/>
+    <ds:schemaRef ds:uri="http://schemas.microsoft.com/office/infopath/2007/PartnerControls"/>
+    <ds:schemaRef ds:uri="7cac0686-f0c7-4236-b000-d7b90732a875"/>
+    <ds:schemaRef ds:uri="http://purl.org/dc/dcmitype/"/>
+  </ds:schemaRefs>
+</ds:datastoreItem>
+</file>
+
 <file path=docMetadata/LabelInfo.xml><?xml version="1.0" encoding="utf-8"?>
 <clbl:labelList xmlns:clbl="http://schemas.microsoft.com/office/2020/mipLabelMetadata">
   <clbl:label id="{217a5a3d-163a-4e8b-af1b-58fd7f92894f}" enabled="0" method="" siteId="{217a5a3d-163a-4e8b-af1b-58fd7f92894f}" removed="1"/>

--- a/infogather.pptx
+++ b/infogather.pptx
@@ -10,9 +10,9 @@
   <p:sldIdLst>
     <p:sldId id="256" r:id="rId5"/>
     <p:sldId id="2147471222" r:id="rId6"/>
-    <p:sldId id="2147471224" r:id="rId7"/>
-    <p:sldId id="2147471225" r:id="rId8"/>
-    <p:sldId id="2147471223" r:id="rId9"/>
+    <p:sldId id="2147471230" r:id="rId7"/>
+    <p:sldId id="2147471223" r:id="rId8"/>
+    <p:sldId id="2147471229" r:id="rId9"/>
     <p:sldId id="2147471217" r:id="rId10"/>
     <p:sldId id="2147471226" r:id="rId11"/>
   </p:sldIdLst>
@@ -255,7 +255,7 @@
       <p15:notesGuideLst xmlns:p15="http://schemas.microsoft.com/office/powerpoint/2012/main"/>
     </p:ext>
     <p:ext uri="GoogleSlidesCustomDataVersion2">
-      <go:slidesCustomData xmlns="" xmlns:go="http://customooxmlschemas.google.com/" xmlns:ahyp="http://schemas.microsoft.com/office/drawing/2018/hyperlinkcolor" xmlns:p15="http://schemas.microsoft.com/office/powerpoint/2012/main" xmlns:p14="http://schemas.microsoft.com/office/powerpoint/2010/main" xmlns:com="http://schemas.openxmlformats.org/drawingml/2006/compatibility" xmlns:pvml="urn:schemas-microsoft-com:office:powerpoint" xmlns:v="urn:schemas-microsoft-com:vml" xmlns:o="urn:schemas-microsoft-com:office:office" xmlns:dgm="http://schemas.openxmlformats.org/drawingml/2006/diagram" xmlns:c="http://schemas.openxmlformats.org/drawingml/2006/chart" xmlns:mv="urn:schemas-microsoft-com:mac:vml" xmlns:mc="http://schemas.openxmlformats.org/markup-compatibility/2006" r:id="rId52" roundtripDataSignature="AMtx7mhqKJAzFugGzrpaCdpbPJOL8OwfdA=="/>
+      <go:slidesCustomData xmlns:mc="http://schemas.openxmlformats.org/markup-compatibility/2006" xmlns:mv="urn:schemas-microsoft-com:mac:vml" xmlns:c="http://schemas.openxmlformats.org/drawingml/2006/chart" xmlns:dgm="http://schemas.openxmlformats.org/drawingml/2006/diagram" xmlns:o="urn:schemas-microsoft-com:office:office" xmlns:v="urn:schemas-microsoft-com:vml" xmlns:pvml="urn:schemas-microsoft-com:office:powerpoint" xmlns:com="http://schemas.openxmlformats.org/drawingml/2006/compatibility" xmlns:p14="http://schemas.microsoft.com/office/powerpoint/2010/main" xmlns:p15="http://schemas.microsoft.com/office/powerpoint/2012/main" xmlns:ahyp="http://schemas.microsoft.com/office/drawing/2018/hyperlinkcolor" xmlns:go="http://customooxmlschemas.google.com/" xmlns="" r:id="rId52" roundtripDataSignature="AMtx7mhqKJAzFugGzrpaCdpbPJOL8OwfdA=="/>
     </p:ext>
   </p:extLst>
 </p:presentation>
@@ -1473,22 +1473,6 @@
     </pc:docChg>
   </pc:docChgLst>
   <pc:docChgLst>
-    <pc:chgData name="周立筠-數據應用部-永豐金證券" userId="S::liyun0222.zhou@sinopac.com::ee349c15-f274-43a3-b0c9-48d528d95247" providerId="AD" clId="Web-{A48564C8-421B-2203-E695-99D400D4424E}"/>
-    <pc:docChg chg="modSld">
-      <pc:chgData name="周立筠-數據應用部-永豐金證券" userId="S::liyun0222.zhou@sinopac.com::ee349c15-f274-43a3-b0c9-48d528d95247" providerId="AD" clId="Web-{A48564C8-421B-2203-E695-99D400D4424E}" dt="2024-08-23T09:42:27.791" v="49"/>
-      <pc:docMkLst>
-        <pc:docMk/>
-      </pc:docMkLst>
-      <pc:sldChg chg="modSp">
-        <pc:chgData name="周立筠-數據應用部-永豐金證券" userId="S::liyun0222.zhou@sinopac.com::ee349c15-f274-43a3-b0c9-48d528d95247" providerId="AD" clId="Web-{A48564C8-421B-2203-E695-99D400D4424E}" dt="2024-08-23T09:42:27.791" v="49"/>
-        <pc:sldMkLst>
-          <pc:docMk/>
-          <pc:sldMk cId="3262633635" sldId="297"/>
-        </pc:sldMkLst>
-      </pc:sldChg>
-    </pc:docChg>
-  </pc:docChgLst>
-  <pc:docChgLst>
     <pc:chgData name="張天豪-數位金融處-永豐銀行" userId="0d835702-99c9-4ef6-82d8-3ca86d4ccc15" providerId="ADAL" clId="{05C68244-A0A4-5F4B-A227-C47B6FE62571}"/>
     <pc:docChg chg="undo custSel addSld delSld modSld modMainMaster modSection">
       <pc:chgData name="張天豪-數位金融處-永豐銀行" userId="0d835702-99c9-4ef6-82d8-3ca86d4ccc15" providerId="ADAL" clId="{05C68244-A0A4-5F4B-A227-C47B6FE62571}" dt="2024-11-23T00:59:06.402" v="223" actId="12"/>
@@ -1589,6 +1573,22 @@
           </pc:sldLayoutMkLst>
         </pc:sldLayoutChg>
       </pc:sldMasterChg>
+    </pc:docChg>
+  </pc:docChgLst>
+  <pc:docChgLst>
+    <pc:chgData name="周立筠-數據應用部-永豐金證券" userId="S::liyun0222.zhou@sinopac.com::ee349c15-f274-43a3-b0c9-48d528d95247" providerId="AD" clId="Web-{A48564C8-421B-2203-E695-99D400D4424E}"/>
+    <pc:docChg chg="modSld">
+      <pc:chgData name="周立筠-數據應用部-永豐金證券" userId="S::liyun0222.zhou@sinopac.com::ee349c15-f274-43a3-b0c9-48d528d95247" providerId="AD" clId="Web-{A48564C8-421B-2203-E695-99D400D4424E}" dt="2024-08-23T09:42:27.791" v="49"/>
+      <pc:docMkLst>
+        <pc:docMk/>
+      </pc:docMkLst>
+      <pc:sldChg chg="modSp">
+        <pc:chgData name="周立筠-數據應用部-永豐金證券" userId="S::liyun0222.zhou@sinopac.com::ee349c15-f274-43a3-b0c9-48d528d95247" providerId="AD" clId="Web-{A48564C8-421B-2203-E695-99D400D4424E}" dt="2024-08-23T09:42:27.791" v="49"/>
+        <pc:sldMkLst>
+          <pc:docMk/>
+          <pc:sldMk cId="3262633635" sldId="297"/>
+        </pc:sldMkLst>
+      </pc:sldChg>
     </pc:docChg>
   </pc:docChgLst>
 </pc:chgInfo>
@@ -2464,6 +2464,90 @@
   <p:cSld>
     <p:spTree>
       <p:nvGrpSpPr>
+        <p:cNvPr id="1" name="">
+          <a:extLst>
+            <a:ext uri="{FF2B5EF4-FFF2-40B4-BE49-F238E27FC236}">
+              <a16:creationId xmlns:a16="http://schemas.microsoft.com/office/drawing/2014/main" id="{A7D1083A-321F-F30A-3F0F-FCB184ECE1FA}"/>
+            </a:ext>
+          </a:extLst>
+        </p:cNvPr>
+        <p:cNvGrpSpPr/>
+        <p:nvPr/>
+      </p:nvGrpSpPr>
+      <p:grpSpPr>
+        <a:xfrm>
+          <a:off x="0" y="0"/>
+          <a:ext cx="0" cy="0"/>
+          <a:chOff x="0" y="0"/>
+          <a:chExt cx="0" cy="0"/>
+        </a:xfrm>
+      </p:grpSpPr>
+      <p:sp>
+        <p:nvSpPr>
+          <p:cNvPr id="2" name="投影片影像版面配置區 1">
+            <a:extLst>
+              <a:ext uri="{FF2B5EF4-FFF2-40B4-BE49-F238E27FC236}">
+                <a16:creationId xmlns:a16="http://schemas.microsoft.com/office/drawing/2014/main" id="{40D71BF3-D12E-1D77-9A61-3C646FB67460}"/>
+              </a:ext>
+            </a:extLst>
+          </p:cNvPr>
+          <p:cNvSpPr>
+            <a:spLocks noGrp="1" noRot="1" noChangeAspect="1"/>
+          </p:cNvSpPr>
+          <p:nvPr>
+            <p:ph type="sldImg"/>
+          </p:nvPr>
+        </p:nvSpPr>
+        <p:spPr>
+          <a:xfrm>
+            <a:off x="381000" y="685800"/>
+            <a:ext cx="6096000" cy="3429000"/>
+          </a:xfrm>
+        </p:spPr>
+      </p:sp>
+      <p:sp>
+        <p:nvSpPr>
+          <p:cNvPr id="3" name="備忘稿版面配置區 2">
+            <a:extLst>
+              <a:ext uri="{FF2B5EF4-FFF2-40B4-BE49-F238E27FC236}">
+                <a16:creationId xmlns:a16="http://schemas.microsoft.com/office/drawing/2014/main" id="{37D8F35A-B08A-5518-E41E-5EF1385C378E}"/>
+              </a:ext>
+            </a:extLst>
+          </p:cNvPr>
+          <p:cNvSpPr>
+            <a:spLocks noGrp="1"/>
+          </p:cNvSpPr>
+          <p:nvPr>
+            <p:ph type="body" idx="1"/>
+          </p:nvPr>
+        </p:nvSpPr>
+        <p:spPr/>
+        <p:txBody>
+          <a:bodyPr/>
+          <a:lstStyle/>
+          <a:p>
+            <a:endParaRPr kumimoji="1" lang="zh-TW" altLang="en-US" dirty="0"/>
+          </a:p>
+        </p:txBody>
+      </p:sp>
+    </p:spTree>
+    <p:extLst>
+      <p:ext uri="{BB962C8B-B14F-4D97-AF65-F5344CB8AC3E}">
+        <p14:creationId xmlns:p14="http://schemas.microsoft.com/office/powerpoint/2010/main" val="1443784881"/>
+      </p:ext>
+    </p:extLst>
+  </p:cSld>
+  <p:clrMapOvr>
+    <a:masterClrMapping/>
+  </p:clrMapOvr>
+</p:notes>
+</file>
+
+<file path=ppt/notesSlides/notesSlide4.xml><?xml version="1.0" encoding="utf-8"?>
+<p:notes xmlns:a="http://schemas.openxmlformats.org/drawingml/2006/main" xmlns:r="http://schemas.openxmlformats.org/officeDocument/2006/relationships" xmlns:p="http://schemas.openxmlformats.org/presentationml/2006/main">
+  <p:cSld>
+    <p:spTree>
+      <p:nvGrpSpPr>
         <p:cNvPr id="1" name=""/>
         <p:cNvGrpSpPr/>
         <p:nvPr/>
@@ -2515,7 +2599,7 @@
     </p:spTree>
     <p:extLst>
       <p:ext uri="{BB962C8B-B14F-4D97-AF65-F5344CB8AC3E}">
-        <p14:creationId xmlns:p14="http://schemas.microsoft.com/office/powerpoint/2010/main" val="2525449225"/>
+        <p14:creationId xmlns:p14="http://schemas.microsoft.com/office/powerpoint/2010/main" val="3351083051"/>
       </p:ext>
     </p:extLst>
   </p:cSld>
@@ -2525,7 +2609,7 @@
 </p:notes>
 </file>
 
-<file path=ppt/notesSlides/notesSlide4.xml><?xml version="1.0" encoding="utf-8"?>
+<file path=ppt/notesSlides/notesSlide5.xml><?xml version="1.0" encoding="utf-8"?>
 <p:notes xmlns:a="http://schemas.openxmlformats.org/drawingml/2006/main" xmlns:r="http://schemas.openxmlformats.org/officeDocument/2006/relationships" xmlns:p="http://schemas.openxmlformats.org/presentationml/2006/main">
   <p:cSld>
     <p:spTree>
@@ -2533,7 +2617,7 @@
         <p:cNvPr id="1" name="">
           <a:extLst>
             <a:ext uri="{FF2B5EF4-FFF2-40B4-BE49-F238E27FC236}">
-              <a16:creationId xmlns:a16="http://schemas.microsoft.com/office/drawing/2014/main" id="{E11B4B6C-24C5-DFCD-D485-DF3D78F4456E}"/>
+              <a16:creationId xmlns:a16="http://schemas.microsoft.com/office/drawing/2014/main" id="{1B4D5A0B-C23D-A6B6-F506-DBB4AB60F802}"/>
             </a:ext>
           </a:extLst>
         </p:cNvPr>
@@ -2553,7 +2637,7 @@
           <p:cNvPr id="2" name="投影片影像版面配置區 1">
             <a:extLst>
               <a:ext uri="{FF2B5EF4-FFF2-40B4-BE49-F238E27FC236}">
-                <a16:creationId xmlns:a16="http://schemas.microsoft.com/office/drawing/2014/main" id="{6AD1B42D-51F7-7E2F-DA5B-AB1C6E7E23D1}"/>
+                <a16:creationId xmlns:a16="http://schemas.microsoft.com/office/drawing/2014/main" id="{EF181B94-5775-4AF6-D761-FA6748C4C26C}"/>
               </a:ext>
             </a:extLst>
           </p:cNvPr>
@@ -2576,7 +2660,7 @@
           <p:cNvPr id="3" name="備忘稿版面配置區 2">
             <a:extLst>
               <a:ext uri="{FF2B5EF4-FFF2-40B4-BE49-F238E27FC236}">
-                <a16:creationId xmlns:a16="http://schemas.microsoft.com/office/drawing/2014/main" id="{5EE07BB6-483F-AB28-EC6F-720671174CF9}"/>
+                <a16:creationId xmlns:a16="http://schemas.microsoft.com/office/drawing/2014/main" id="{26A80CD3-F554-6BC9-21C3-A1A8DF906A34}"/>
               </a:ext>
             </a:extLst>
           </p:cNvPr>
@@ -2599,7 +2683,7 @@
     </p:spTree>
     <p:extLst>
       <p:ext uri="{BB962C8B-B14F-4D97-AF65-F5344CB8AC3E}">
-        <p14:creationId xmlns:p14="http://schemas.microsoft.com/office/powerpoint/2010/main" val="2878049950"/>
+        <p14:creationId xmlns:p14="http://schemas.microsoft.com/office/powerpoint/2010/main" val="3152261082"/>
       </p:ext>
     </p:extLst>
   </p:cSld>
@@ -2609,7 +2693,7 @@
 </p:notes>
 </file>
 
-<file path=ppt/notesSlides/notesSlide5.xml><?xml version="1.0" encoding="utf-8"?>
+<file path=ppt/notesSlides/notesSlide6.xml><?xml version="1.0" encoding="utf-8"?>
 <p:notes xmlns:a="http://schemas.openxmlformats.org/drawingml/2006/main" xmlns:r="http://schemas.openxmlformats.org/officeDocument/2006/relationships" xmlns:p="http://schemas.openxmlformats.org/presentationml/2006/main">
   <p:cSld>
     <p:spTree>
@@ -3049,7 +3133,7 @@
 </p:notes>
 </file>
 
-<file path=ppt/notesSlides/notesSlide6.xml><?xml version="1.0" encoding="utf-8"?>
+<file path=ppt/notesSlides/notesSlide7.xml><?xml version="1.0" encoding="utf-8"?>
 <p:notes xmlns:a="http://schemas.openxmlformats.org/drawingml/2006/main" xmlns:r="http://schemas.openxmlformats.org/officeDocument/2006/relationships" xmlns:p="http://schemas.openxmlformats.org/presentationml/2006/main">
   <p:cSld>
     <p:spTree>
@@ -6674,7 +6758,13 @@
   <p:cSld>
     <p:spTree>
       <p:nvGrpSpPr>
-        <p:cNvPr id="1" name=""/>
+        <p:cNvPr id="1" name="">
+          <a:extLst>
+            <a:ext uri="{FF2B5EF4-FFF2-40B4-BE49-F238E27FC236}">
+              <a16:creationId xmlns:a16="http://schemas.microsoft.com/office/drawing/2014/main" id="{356D6A87-2493-5500-0966-B6BAF42D4D35}"/>
+            </a:ext>
+          </a:extLst>
+        </p:cNvPr>
         <p:cNvGrpSpPr/>
         <p:nvPr/>
       </p:nvGrpSpPr>
@@ -6691,7 +6781,7 @@
           <p:cNvPr id="2" name="標題 1">
             <a:extLst>
               <a:ext uri="{FF2B5EF4-FFF2-40B4-BE49-F238E27FC236}">
-                <a16:creationId xmlns:a16="http://schemas.microsoft.com/office/drawing/2014/main" id="{8F164B46-1F7F-A96F-1D9B-5D1D9A7E450F}"/>
+                <a16:creationId xmlns:a16="http://schemas.microsoft.com/office/drawing/2014/main" id="{B77EB819-7347-39AB-74EF-BA4B13F6E1B2}"/>
               </a:ext>
             </a:extLst>
           </p:cNvPr>
@@ -6714,42 +6804,12 @@
           </a:p>
         </p:txBody>
       </p:sp>
-      <p:pic>
-        <p:nvPicPr>
-          <p:cNvPr id="5" name="圖片 4" descr="一張含有 文字, 螢幕擷取畫面 的圖片&#10;&#10;AI 產生的內容可能不正確。">
-            <a:extLst>
-              <a:ext uri="{FF2B5EF4-FFF2-40B4-BE49-F238E27FC236}">
-                <a16:creationId xmlns:a16="http://schemas.microsoft.com/office/drawing/2014/main" id="{6D2BBD48-2B01-FE1F-16E6-1F32B7BA0DF2}"/>
-              </a:ext>
-            </a:extLst>
-          </p:cNvPr>
-          <p:cNvPicPr>
-            <a:picLocks noChangeAspect="1"/>
-          </p:cNvPicPr>
-          <p:nvPr/>
-        </p:nvPicPr>
-        <p:blipFill>
-          <a:blip r:embed="rId3"/>
-          <a:stretch>
-            <a:fillRect/>
-          </a:stretch>
-        </p:blipFill>
-        <p:spPr>
-          <a:xfrm>
-            <a:off x="1260242" y="814325"/>
-            <a:ext cx="9000000" cy="2592830"/>
-          </a:xfrm>
-          <a:prstGeom prst="rect">
-            <a:avLst/>
-          </a:prstGeom>
-        </p:spPr>
-      </p:pic>
       <p:graphicFrame>
         <p:nvGraphicFramePr>
           <p:cNvPr id="8" name="表格 7">
             <a:extLst>
               <a:ext uri="{FF2B5EF4-FFF2-40B4-BE49-F238E27FC236}">
-                <a16:creationId xmlns:a16="http://schemas.microsoft.com/office/drawing/2014/main" id="{57C2B9AB-2A28-6954-6914-8AC98DBC1AEE}"/>
+                <a16:creationId xmlns:a16="http://schemas.microsoft.com/office/drawing/2014/main" id="{977A5CD2-F77F-B955-9659-8F9E645EFEB2}"/>
               </a:ext>
             </a:extLst>
           </p:cNvPr>
@@ -6759,14 +6819,14 @@
           <p:nvPr>
             <p:extLst>
               <p:ext uri="{D42A27DB-BD31-4B8C-83A1-F6EECF244321}">
-                <p14:modId xmlns:p14="http://schemas.microsoft.com/office/powerpoint/2010/main" val="2172758248"/>
+                <p14:modId xmlns:p14="http://schemas.microsoft.com/office/powerpoint/2010/main" val="2726193140"/>
               </p:ext>
             </p:extLst>
           </p:nvPr>
         </p:nvGraphicFramePr>
         <p:xfrm>
-          <a:off x="450242" y="3609480"/>
-          <a:ext cx="10620000" cy="2340000"/>
+          <a:off x="450244" y="3620278"/>
+          <a:ext cx="10620000" cy="2514600"/>
         </p:xfrm>
         <a:graphic>
           <a:graphicData uri="http://schemas.openxmlformats.org/drawingml/2006/table">
@@ -6795,17 +6855,17 @@
                   </a:extLst>
                 </a:gridCol>
               </a:tblGrid>
-              <a:tr h="230333">
-                <a:tc>
-                  <a:txBody>
-                    <a:bodyPr/>
-                    <a:lstStyle/>
-                    <a:p>
-                      <a:pPr>
-                        <a:buNone/>
-                      </a:pPr>
-                      <a:r>
-                        <a:rPr lang="zh-TW" altLang="en-US" sz="1200" b="1" dirty="0">
+              <a:tr h="183410">
+                <a:tc>
+                  <a:txBody>
+                    <a:bodyPr/>
+                    <a:lstStyle/>
+                    <a:p>
+                      <a:pPr>
+                        <a:buNone/>
+                      </a:pPr>
+                      <a:r>
+                        <a:rPr lang="zh-TW" altLang="en-US" sz="1050" b="1" dirty="0">
                           <a:solidFill>
                             <a:srgbClr val="000000"/>
                           </a:solidFill>
@@ -6817,7 +6877,7 @@
                       </a:r>
                     </a:p>
                   </a:txBody>
-                  <a:tcPr marL="22968" marR="22968" marT="10601" marB="10601" anchor="ctr">
+                  <a:tcPr anchor="ctr">
                     <a:lnL w="9525" cap="flat" cmpd="sng" algn="ctr">
                       <a:solidFill>
                         <a:srgbClr val="D6D6D6"/>
@@ -6868,7 +6928,7 @@
                         <a:buNone/>
                       </a:pPr>
                       <a:r>
-                        <a:rPr lang="zh-TW" altLang="en-US" sz="1200" b="1" dirty="0">
+                        <a:rPr lang="zh-TW" altLang="en-US" sz="1050" b="1" dirty="0">
                           <a:solidFill>
                             <a:srgbClr val="000000"/>
                           </a:solidFill>
@@ -6879,7 +6939,7 @@
                         <a:t>技術 </a:t>
                       </a:r>
                       <a:r>
-                        <a:rPr lang="en-US" altLang="zh-TW" sz="1200" b="1" dirty="0">
+                        <a:rPr lang="en-US" altLang="zh-TW" sz="1050" b="1" dirty="0">
                           <a:solidFill>
                             <a:srgbClr val="000000"/>
                           </a:solidFill>
@@ -6890,7 +6950,7 @@
                         <a:t>/ </a:t>
                       </a:r>
                       <a:r>
-                        <a:rPr lang="zh-TW" altLang="en-US" sz="1200" b="1" dirty="0">
+                        <a:rPr lang="zh-TW" altLang="en-US" sz="1050" b="1" dirty="0">
                           <a:solidFill>
                             <a:srgbClr val="000000"/>
                           </a:solidFill>
@@ -6902,7 +6962,7 @@
                       </a:r>
                     </a:p>
                   </a:txBody>
-                  <a:tcPr marL="22968" marR="22968" marT="10601" marB="10601" anchor="ctr">
+                  <a:tcPr anchor="ctr">
                     <a:lnL w="9525" cap="flat" cmpd="sng" algn="ctr">
                       <a:solidFill>
                         <a:srgbClr val="D6D6D6"/>
@@ -6953,7 +7013,7 @@
                         <a:buNone/>
                       </a:pPr>
                       <a:r>
-                        <a:rPr lang="zh-TW" altLang="en-US" sz="1200" b="1" dirty="0">
+                        <a:rPr lang="zh-TW" altLang="en-US" sz="1050" b="1" dirty="0">
                           <a:solidFill>
                             <a:srgbClr val="000000"/>
                           </a:solidFill>
@@ -6965,7 +7025,7 @@
                       </a:r>
                     </a:p>
                   </a:txBody>
-                  <a:tcPr marL="22968" marR="22968" marT="10601" marB="10601" anchor="ctr">
+                  <a:tcPr anchor="ctr">
                     <a:lnL w="9525" cap="flat" cmpd="sng" algn="ctr">
                       <a:solidFill>
                         <a:srgbClr val="D6D6D6"/>
@@ -7013,17 +7073,17 @@
                   </a:ext>
                 </a:extLst>
               </a:tr>
-              <a:tr h="230333">
-                <a:tc>
-                  <a:txBody>
-                    <a:bodyPr/>
-                    <a:lstStyle/>
-                    <a:p>
-                      <a:pPr>
-                        <a:buNone/>
-                      </a:pPr>
-                      <a:r>
-                        <a:rPr lang="en" sz="1200" b="0" dirty="0" err="1">
+              <a:tr h="183410">
+                <a:tc>
+                  <a:txBody>
+                    <a:bodyPr/>
+                    <a:lstStyle/>
+                    <a:p>
+                      <a:pPr>
+                        <a:buNone/>
+                      </a:pPr>
+                      <a:r>
+                        <a:rPr lang="en" sz="1050" b="0" dirty="0" err="1">
                           <a:effectLst/>
                           <a:latin typeface="Microsoft JhengHei" panose="020B0604030504040204" pitchFamily="34" charset="-120"/>
                           <a:ea typeface="Microsoft JhengHei" panose="020B0604030504040204" pitchFamily="34" charset="-120"/>
@@ -7031,7 +7091,7 @@
                         <a:t>InfoGather</a:t>
                       </a:r>
                       <a:r>
-                        <a:rPr lang="en" sz="1200" b="0" dirty="0">
+                        <a:rPr lang="en" sz="1050" b="0" dirty="0">
                           <a:effectLst/>
                           <a:latin typeface="Microsoft JhengHei" panose="020B0604030504040204" pitchFamily="34" charset="-120"/>
                           <a:ea typeface="Microsoft JhengHei" panose="020B0604030504040204" pitchFamily="34" charset="-120"/>
@@ -7040,7 +7100,7 @@
                       </a:r>
                     </a:p>
                   </a:txBody>
-                  <a:tcPr marL="22968" marR="22968" marT="10601" marB="10601" anchor="ctr">
+                  <a:tcPr anchor="ctr">
                     <a:lnL w="9525" cap="flat" cmpd="sng" algn="ctr">
                       <a:solidFill>
                         <a:srgbClr val="D6D6D6"/>
@@ -7091,7 +7151,7 @@
                         <a:buNone/>
                       </a:pPr>
                       <a:r>
-                        <a:rPr lang="en" sz="1200" b="0" dirty="0">
+                        <a:rPr lang="en" sz="1050" b="0" dirty="0">
                           <a:effectLst/>
                           <a:latin typeface="Microsoft JhengHei" panose="020B0604030504040204" pitchFamily="34" charset="-120"/>
                           <a:ea typeface="Microsoft JhengHei" panose="020B0604030504040204" pitchFamily="34" charset="-120"/>
@@ -7099,7 +7159,7 @@
                         <a:t>Angular </a:t>
                       </a:r>
                       <a:r>
-                        <a:rPr lang="zh-TW" altLang="en-US" sz="1200" b="0" dirty="0">
+                        <a:rPr lang="zh-TW" altLang="en-US" sz="1050" b="0" dirty="0">
                           <a:effectLst/>
                           <a:latin typeface="Microsoft JhengHei" panose="020B0604030504040204" pitchFamily="34" charset="-120"/>
                           <a:ea typeface="Microsoft JhengHei" panose="020B0604030504040204" pitchFamily="34" charset="-120"/>
@@ -7108,7 +7168,7 @@
                       </a:r>
                     </a:p>
                   </a:txBody>
-                  <a:tcPr marL="22968" marR="22968" marT="10601" marB="10601" anchor="ctr">
+                  <a:tcPr anchor="ctr">
                     <a:lnL w="9525" cap="flat" cmpd="sng" algn="ctr">
                       <a:solidFill>
                         <a:srgbClr val="D6D6D6"/>
@@ -7159,7 +7219,7 @@
                         <a:buNone/>
                       </a:pPr>
                       <a:r>
-                        <a:rPr lang="zh-TW" altLang="en-US" sz="1200" b="0" dirty="0">
+                        <a:rPr lang="zh-TW" altLang="en-US" sz="1050" b="0" dirty="0">
                           <a:effectLst/>
                           <a:latin typeface="Microsoft JhengHei" panose="020B0604030504040204" pitchFamily="34" charset="-120"/>
                           <a:ea typeface="Microsoft JhengHei" panose="020B0604030504040204" pitchFamily="34" charset="-120"/>
@@ -7167,7 +7227,7 @@
                         <a:t>提供 </a:t>
                       </a:r>
                       <a:r>
-                        <a:rPr lang="en" sz="1200" b="0" dirty="0">
+                        <a:rPr lang="en" sz="1050" b="0" dirty="0">
                           <a:effectLst/>
                           <a:latin typeface="Microsoft JhengHei" panose="020B0604030504040204" pitchFamily="34" charset="-120"/>
                           <a:ea typeface="Microsoft JhengHei" panose="020B0604030504040204" pitchFamily="34" charset="-120"/>
@@ -7175,7 +7235,7 @@
                         <a:t>UI，</a:t>
                       </a:r>
                       <a:r>
-                        <a:rPr lang="zh-TW" altLang="en-US" sz="1200" b="0" dirty="0">
+                        <a:rPr lang="zh-TW" altLang="en-US" sz="1050" b="0" dirty="0">
                           <a:effectLst/>
                           <a:latin typeface="Microsoft JhengHei" panose="020B0604030504040204" pitchFamily="34" charset="-120"/>
                           <a:ea typeface="Microsoft JhengHei" panose="020B0604030504040204" pitchFamily="34" charset="-120"/>
@@ -7183,7 +7243,7 @@
                         <a:t>讓使用者瀏覽資料、管理資料來源</a:t>
                       </a:r>
                       <a:r>
-                        <a:rPr lang="en" sz="1200" b="0" dirty="0">
+                        <a:rPr lang="en" sz="1050" b="0" dirty="0">
                           <a:effectLst/>
                           <a:latin typeface="Microsoft JhengHei" panose="020B0604030504040204" pitchFamily="34" charset="-120"/>
                           <a:ea typeface="Microsoft JhengHei" panose="020B0604030504040204" pitchFamily="34" charset="-120"/>
@@ -7191,7 +7251,7 @@
                         <a:t>、</a:t>
                       </a:r>
                       <a:r>
-                        <a:rPr lang="en" sz="1200" b="0" dirty="0" err="1">
+                        <a:rPr lang="en" sz="1050" b="0" dirty="0" err="1">
                           <a:effectLst/>
                           <a:latin typeface="Microsoft JhengHei" panose="020B0604030504040204" pitchFamily="34" charset="-120"/>
                           <a:ea typeface="Microsoft JhengHei" panose="020B0604030504040204" pitchFamily="34" charset="-120"/>
@@ -7199,7 +7259,7 @@
                         <a:t>資訊助手、洞見彙報</a:t>
                       </a:r>
                       <a:r>
-                        <a:rPr lang="zh-TW" altLang="en-US" sz="1200" b="0" dirty="0">
+                        <a:rPr lang="zh-TW" altLang="en-US" sz="1050" b="0" dirty="0">
                           <a:effectLst/>
                           <a:latin typeface="Microsoft JhengHei" panose="020B0604030504040204" pitchFamily="34" charset="-120"/>
                           <a:ea typeface="Microsoft JhengHei" panose="020B0604030504040204" pitchFamily="34" charset="-120"/>
@@ -7208,7 +7268,7 @@
                       </a:r>
                     </a:p>
                   </a:txBody>
-                  <a:tcPr marL="22968" marR="22968" marT="10601" marB="10601" anchor="ctr">
+                  <a:tcPr anchor="ctr">
                     <a:lnL w="9525" cap="flat" cmpd="sng" algn="ctr">
                       <a:solidFill>
                         <a:srgbClr val="D6D6D6"/>
@@ -7256,17 +7316,17 @@
                   </a:ext>
                 </a:extLst>
               </a:tr>
-              <a:tr h="230333">
-                <a:tc>
-                  <a:txBody>
-                    <a:bodyPr/>
-                    <a:lstStyle/>
-                    <a:p>
-                      <a:pPr>
-                        <a:buNone/>
-                      </a:pPr>
-                      <a:r>
-                        <a:rPr lang="en" sz="1200" b="0">
+              <a:tr h="183410">
+                <a:tc>
+                  <a:txBody>
+                    <a:bodyPr/>
+                    <a:lstStyle/>
+                    <a:p>
+                      <a:pPr>
+                        <a:buNone/>
+                      </a:pPr>
+                      <a:r>
+                        <a:rPr lang="en" sz="1050" b="0">
                           <a:effectLst/>
                           <a:latin typeface="Microsoft JhengHei" panose="020B0604030504040204" pitchFamily="34" charset="-120"/>
                           <a:ea typeface="Microsoft JhengHei" panose="020B0604030504040204" pitchFamily="34" charset="-120"/>
@@ -7275,7 +7335,7 @@
                       </a:r>
                     </a:p>
                   </a:txBody>
-                  <a:tcPr marL="22968" marR="22968" marT="10601" marB="10601" anchor="ctr">
+                  <a:tcPr anchor="ctr">
                     <a:lnL w="9525" cap="flat" cmpd="sng" algn="ctr">
                       <a:solidFill>
                         <a:srgbClr val="D6D6D6"/>
@@ -7326,7 +7386,7 @@
                         <a:buNone/>
                       </a:pPr>
                       <a:r>
-                        <a:rPr lang="en" sz="1200" b="0" dirty="0">
+                        <a:rPr lang="en" sz="1050" b="0" dirty="0">
                           <a:effectLst/>
                           <a:latin typeface="Microsoft JhengHei" panose="020B0604030504040204" pitchFamily="34" charset="-120"/>
                           <a:ea typeface="Microsoft JhengHei" panose="020B0604030504040204" pitchFamily="34" charset="-120"/>
@@ -7334,7 +7394,7 @@
                         <a:t>Node.js </a:t>
                       </a:r>
                       <a:r>
-                        <a:rPr lang="zh-TW" altLang="en-US" sz="1200" b="0" dirty="0">
+                        <a:rPr lang="zh-TW" altLang="en-US" sz="1050" b="0" dirty="0">
                           <a:effectLst/>
                           <a:latin typeface="Microsoft JhengHei" panose="020B0604030504040204" pitchFamily="34" charset="-120"/>
                           <a:ea typeface="Microsoft JhengHei" panose="020B0604030504040204" pitchFamily="34" charset="-120"/>
@@ -7342,7 +7402,7 @@
                         <a:t>後端 </a:t>
                       </a:r>
                       <a:r>
-                        <a:rPr lang="en" sz="1200" b="0" dirty="0">
+                        <a:rPr lang="en" sz="1050" b="0" dirty="0">
                           <a:effectLst/>
                           <a:latin typeface="Microsoft JhengHei" panose="020B0604030504040204" pitchFamily="34" charset="-120"/>
                           <a:ea typeface="Microsoft JhengHei" panose="020B0604030504040204" pitchFamily="34" charset="-120"/>
@@ -7351,7 +7411,7 @@
                       </a:r>
                     </a:p>
                   </a:txBody>
-                  <a:tcPr marL="22968" marR="22968" marT="10601" marB="10601" anchor="ctr">
+                  <a:tcPr anchor="ctr">
                     <a:lnL w="9525" cap="flat" cmpd="sng" algn="ctr">
                       <a:solidFill>
                         <a:srgbClr val="D6D6D6"/>
@@ -7402,7 +7462,7 @@
                         <a:buNone/>
                       </a:pPr>
                       <a:r>
-                        <a:rPr lang="zh-TW" altLang="en-US" sz="1200" b="0" dirty="0">
+                        <a:rPr lang="zh-TW" altLang="en-US" sz="1050" b="0" dirty="0">
                           <a:effectLst/>
                           <a:latin typeface="Microsoft JhengHei" panose="020B0604030504040204" pitchFamily="34" charset="-120"/>
                           <a:ea typeface="Microsoft JhengHei" panose="020B0604030504040204" pitchFamily="34" charset="-120"/>
@@ -7410,7 +7470,7 @@
                         <a:t>負責業務邏輯、權限驗證、資料存取、對外 </a:t>
                       </a:r>
                       <a:r>
-                        <a:rPr lang="en" sz="1200" b="0" dirty="0">
+                        <a:rPr lang="en" sz="1050" b="0" dirty="0">
                           <a:effectLst/>
                           <a:latin typeface="Microsoft JhengHei" panose="020B0604030504040204" pitchFamily="34" charset="-120"/>
                           <a:ea typeface="Microsoft JhengHei" panose="020B0604030504040204" pitchFamily="34" charset="-120"/>
@@ -7418,7 +7478,7 @@
                         <a:t>API、</a:t>
                       </a:r>
                       <a:r>
-                        <a:rPr lang="zh-TW" altLang="en-US" sz="1200" b="0" dirty="0">
+                        <a:rPr lang="zh-TW" altLang="en-US" sz="1050" b="0" dirty="0">
                           <a:effectLst/>
                           <a:latin typeface="Microsoft JhengHei" panose="020B0604030504040204" pitchFamily="34" charset="-120"/>
                           <a:ea typeface="Microsoft JhengHei" panose="020B0604030504040204" pitchFamily="34" charset="-120"/>
@@ -7427,7 +7487,7 @@
                       </a:r>
                     </a:p>
                   </a:txBody>
-                  <a:tcPr marL="22968" marR="22968" marT="10601" marB="10601" anchor="ctr">
+                  <a:tcPr anchor="ctr">
                     <a:lnL w="9525" cap="flat" cmpd="sng" algn="ctr">
                       <a:solidFill>
                         <a:srgbClr val="D6D6D6"/>
@@ -7475,17 +7535,17 @@
                   </a:ext>
                 </a:extLst>
               </a:tr>
-              <a:tr h="230333">
-                <a:tc>
-                  <a:txBody>
-                    <a:bodyPr/>
-                    <a:lstStyle/>
-                    <a:p>
-                      <a:pPr>
-                        <a:buNone/>
-                      </a:pPr>
-                      <a:r>
-                        <a:rPr lang="en" sz="1200" b="0">
+              <a:tr h="183410">
+                <a:tc>
+                  <a:txBody>
+                    <a:bodyPr/>
+                    <a:lstStyle/>
+                    <a:p>
+                      <a:pPr>
+                        <a:buNone/>
+                      </a:pPr>
+                      <a:r>
+                        <a:rPr lang="en" sz="1050" b="0">
                           <a:effectLst/>
                           <a:latin typeface="Microsoft JhengHei" panose="020B0604030504040204" pitchFamily="34" charset="-120"/>
                           <a:ea typeface="Microsoft JhengHei" panose="020B0604030504040204" pitchFamily="34" charset="-120"/>
@@ -7494,7 +7554,7 @@
                       </a:r>
                     </a:p>
                   </a:txBody>
-                  <a:tcPr marL="22968" marR="22968" marT="10601" marB="10601" anchor="ctr">
+                  <a:tcPr anchor="ctr">
                     <a:lnL w="9525" cap="flat" cmpd="sng" algn="ctr">
                       <a:solidFill>
                         <a:srgbClr val="D6D6D6"/>
@@ -7545,7 +7605,7 @@
                         <a:buNone/>
                       </a:pPr>
                       <a:r>
-                        <a:rPr lang="en" altLang="zh-TW" sz="1200" b="0" dirty="0">
+                        <a:rPr lang="en" altLang="zh-TW" sz="1050" b="0" dirty="0">
                           <a:effectLst/>
                           <a:latin typeface="Microsoft JhengHei" panose="020B0604030504040204" pitchFamily="34" charset="-120"/>
                           <a:ea typeface="Microsoft JhengHei" panose="020B0604030504040204" pitchFamily="34" charset="-120"/>
@@ -7553,7 +7613,7 @@
                         <a:t>Node.js </a:t>
                       </a:r>
                       <a:r>
-                        <a:rPr lang="zh-TW" altLang="en-US" sz="1200" b="0" dirty="0">
+                        <a:rPr lang="zh-TW" altLang="en-US" sz="1050" b="0" dirty="0">
                           <a:effectLst/>
                           <a:latin typeface="Microsoft JhengHei" panose="020B0604030504040204" pitchFamily="34" charset="-120"/>
                           <a:ea typeface="Microsoft JhengHei" panose="020B0604030504040204" pitchFamily="34" charset="-120"/>
@@ -7562,7 +7622,7 @@
                       </a:r>
                     </a:p>
                   </a:txBody>
-                  <a:tcPr marL="22968" marR="22968" marT="10601" marB="10601" anchor="ctr">
+                  <a:tcPr anchor="ctr">
                     <a:lnL w="9525" cap="flat" cmpd="sng" algn="ctr">
                       <a:solidFill>
                         <a:srgbClr val="D6D6D6"/>
@@ -7613,7 +7673,7 @@
                         <a:buNone/>
                       </a:pPr>
                       <a:r>
-                        <a:rPr lang="zh-TW" altLang="en-US" sz="1200" b="0" dirty="0">
+                        <a:rPr lang="zh-TW" altLang="en-US" sz="1050" b="0" dirty="0">
                           <a:effectLst/>
                           <a:latin typeface="Microsoft JhengHei" panose="020B0604030504040204" pitchFamily="34" charset="-120"/>
                           <a:ea typeface="Microsoft JhengHei" panose="020B0604030504040204" pitchFamily="34" charset="-120"/>
@@ -7621,7 +7681,7 @@
                         <a:t>定期掃描 </a:t>
                       </a:r>
                       <a:r>
-                        <a:rPr lang="en" sz="1200" b="0" dirty="0">
+                        <a:rPr lang="en" sz="1050" b="0" dirty="0">
                           <a:effectLst/>
                           <a:latin typeface="Microsoft JhengHei" panose="020B0604030504040204" pitchFamily="34" charset="-120"/>
                           <a:ea typeface="Microsoft JhengHei" panose="020B0604030504040204" pitchFamily="34" charset="-120"/>
@@ -7629,7 +7689,7 @@
                         <a:t>feeds </a:t>
                       </a:r>
                       <a:r>
-                        <a:rPr lang="zh-TW" altLang="en-US" sz="1200" b="0" dirty="0">
+                        <a:rPr lang="zh-TW" altLang="en-US" sz="1050" b="0" dirty="0">
                           <a:effectLst/>
                           <a:latin typeface="Microsoft JhengHei" panose="020B0604030504040204" pitchFamily="34" charset="-120"/>
                           <a:ea typeface="Microsoft JhengHei" panose="020B0604030504040204" pitchFamily="34" charset="-120"/>
@@ -7638,7 +7698,7 @@
                       </a:r>
                     </a:p>
                   </a:txBody>
-                  <a:tcPr marL="22968" marR="22968" marT="10601" marB="10601" anchor="ctr">
+                  <a:tcPr anchor="ctr">
                     <a:lnL w="9525" cap="flat" cmpd="sng" algn="ctr">
                       <a:solidFill>
                         <a:srgbClr val="D6D6D6"/>
@@ -7686,17 +7746,17 @@
                   </a:ext>
                 </a:extLst>
               </a:tr>
-              <a:tr h="248668">
-                <a:tc>
-                  <a:txBody>
-                    <a:bodyPr/>
-                    <a:lstStyle/>
-                    <a:p>
-                      <a:pPr>
-                        <a:buNone/>
-                      </a:pPr>
-                      <a:r>
-                        <a:rPr lang="en" sz="1200" b="0" dirty="0">
+              <a:tr h="183410">
+                <a:tc>
+                  <a:txBody>
+                    <a:bodyPr/>
+                    <a:lstStyle/>
+                    <a:p>
+                      <a:pPr>
+                        <a:buNone/>
+                      </a:pPr>
+                      <a:r>
+                        <a:rPr lang="en" sz="1050" b="0" dirty="0">
                           <a:effectLst/>
                           <a:latin typeface="Microsoft JhengHei" panose="020B0604030504040204" pitchFamily="34" charset="-120"/>
                           <a:ea typeface="Microsoft JhengHei" panose="020B0604030504040204" pitchFamily="34" charset="-120"/>
@@ -7705,7 +7765,7 @@
                       </a:r>
                     </a:p>
                   </a:txBody>
-                  <a:tcPr marL="22968" marR="22968" marT="10601" marB="10601" anchor="ctr">
+                  <a:tcPr anchor="ctr">
                     <a:lnL w="9525" cap="flat" cmpd="sng" algn="ctr">
                       <a:solidFill>
                         <a:srgbClr val="D6D6D6"/>
@@ -7756,7 +7816,7 @@
                         <a:buNone/>
                       </a:pPr>
                       <a:r>
-                        <a:rPr lang="en" altLang="zh-TW" sz="1200" b="0" dirty="0">
+                        <a:rPr lang="en" altLang="zh-TW" sz="1050" b="0" dirty="0">
                           <a:effectLst/>
                           <a:latin typeface="Microsoft JhengHei" panose="020B0604030504040204" pitchFamily="34" charset="-120"/>
                           <a:ea typeface="Microsoft JhengHei" panose="020B0604030504040204" pitchFamily="34" charset="-120"/>
@@ -7764,21 +7824,21 @@
                         <a:t>Node.js </a:t>
                       </a:r>
                       <a:r>
-                        <a:rPr lang="zh-TW" altLang="en-US" sz="1200" b="0" dirty="0">
+                        <a:rPr lang="zh-TW" altLang="en-US" sz="1050" b="0" dirty="0">
                           <a:effectLst/>
                           <a:latin typeface="Microsoft JhengHei" panose="020B0604030504040204" pitchFamily="34" charset="-120"/>
                           <a:ea typeface="Microsoft JhengHei" panose="020B0604030504040204" pitchFamily="34" charset="-120"/>
                         </a:rPr>
                         <a:t>工作執行服務</a:t>
                       </a:r>
-                      <a:endParaRPr lang="en" sz="1200" b="0" dirty="0">
+                      <a:endParaRPr lang="en" sz="1050" b="0" dirty="0">
                         <a:effectLst/>
                         <a:latin typeface="Microsoft JhengHei" panose="020B0604030504040204" pitchFamily="34" charset="-120"/>
                         <a:ea typeface="Microsoft JhengHei" panose="020B0604030504040204" pitchFamily="34" charset="-120"/>
                       </a:endParaRPr>
                     </a:p>
                   </a:txBody>
-                  <a:tcPr marL="22968" marR="22968" marT="10601" marB="10601" anchor="ctr">
+                  <a:tcPr anchor="ctr">
                     <a:lnL w="9525" cap="flat" cmpd="sng" algn="ctr">
                       <a:solidFill>
                         <a:srgbClr val="D6D6D6"/>
@@ -7829,7 +7889,7 @@
                         <a:buNone/>
                       </a:pPr>
                       <a:r>
-                        <a:rPr lang="zh-TW" altLang="en-US" sz="1200" b="0" dirty="0">
+                        <a:rPr lang="zh-TW" altLang="en-US" sz="1050" b="0" dirty="0">
                           <a:effectLst/>
                           <a:latin typeface="Microsoft JhengHei" panose="020B0604030504040204" pitchFamily="34" charset="-120"/>
                           <a:ea typeface="Microsoft JhengHei" panose="020B0604030504040204" pitchFamily="34" charset="-120"/>
@@ -7837,7 +7897,7 @@
                         <a:t>非同步處理 </a:t>
                       </a:r>
                       <a:r>
-                        <a:rPr lang="en" sz="1200" b="0" dirty="0">
+                        <a:rPr lang="en" sz="1050" b="0" dirty="0">
                           <a:effectLst/>
                           <a:latin typeface="Microsoft JhengHei" panose="020B0604030504040204" pitchFamily="34" charset="-120"/>
                           <a:ea typeface="Microsoft JhengHei" panose="020B0604030504040204" pitchFamily="34" charset="-120"/>
@@ -7845,7 +7905,7 @@
                         <a:t>ingestion、</a:t>
                       </a:r>
                       <a:r>
-                        <a:rPr lang="zh-TW" altLang="en-US" sz="1200" b="0" dirty="0">
+                        <a:rPr lang="zh-TW" altLang="en-US" sz="1050" b="0" dirty="0">
                           <a:effectLst/>
                           <a:latin typeface="Microsoft JhengHei" panose="020B0604030504040204" pitchFamily="34" charset="-120"/>
                           <a:ea typeface="Microsoft JhengHei" panose="020B0604030504040204" pitchFamily="34" charset="-120"/>
@@ -7853,7 +7913,7 @@
                         <a:t>文章分析、</a:t>
                       </a:r>
                       <a:r>
-                        <a:rPr lang="en" sz="1200" b="0" dirty="0">
+                        <a:rPr lang="en" sz="1050" b="0" dirty="0">
                           <a:effectLst/>
                           <a:latin typeface="Microsoft JhengHei" panose="020B0604030504040204" pitchFamily="34" charset="-120"/>
                           <a:ea typeface="Microsoft JhengHei" panose="020B0604030504040204" pitchFamily="34" charset="-120"/>
@@ -7861,7 +7921,7 @@
                         <a:t>assistant </a:t>
                       </a:r>
                       <a:r>
-                        <a:rPr lang="en" sz="1200" b="0" dirty="0" err="1">
+                        <a:rPr lang="en" sz="1050" b="0" dirty="0" err="1">
                           <a:effectLst/>
                           <a:latin typeface="Microsoft JhengHei" panose="020B0604030504040204" pitchFamily="34" charset="-120"/>
                           <a:ea typeface="Microsoft JhengHei" panose="020B0604030504040204" pitchFamily="34" charset="-120"/>
@@ -7869,7 +7929,7 @@
                         <a:t>curation、brief</a:t>
                       </a:r>
                       <a:r>
-                        <a:rPr lang="en" sz="1200" b="0" dirty="0">
+                        <a:rPr lang="en" sz="1050" b="0" dirty="0">
                           <a:effectLst/>
                           <a:latin typeface="Microsoft JhengHei" panose="020B0604030504040204" pitchFamily="34" charset="-120"/>
                           <a:ea typeface="Microsoft JhengHei" panose="020B0604030504040204" pitchFamily="34" charset="-120"/>
@@ -7877,7 +7937,7 @@
                         <a:t> generation </a:t>
                       </a:r>
                       <a:r>
-                        <a:rPr lang="zh-TW" altLang="en-US" sz="1200" b="0" dirty="0">
+                        <a:rPr lang="zh-TW" altLang="en-US" sz="1050" b="0" dirty="0">
                           <a:effectLst/>
                           <a:latin typeface="Microsoft JhengHei" panose="020B0604030504040204" pitchFamily="34" charset="-120"/>
                           <a:ea typeface="Microsoft JhengHei" panose="020B0604030504040204" pitchFamily="34" charset="-120"/>
@@ -7886,7 +7946,7 @@
                       </a:r>
                     </a:p>
                   </a:txBody>
-                  <a:tcPr marL="22968" marR="22968" marT="10601" marB="10601" anchor="ctr">
+                  <a:tcPr anchor="ctr">
                     <a:lnL w="9525" cap="flat" cmpd="sng" algn="ctr">
                       <a:solidFill>
                         <a:srgbClr val="D6D6D6"/>
@@ -7934,17 +7994,17 @@
                   </a:ext>
                 </a:extLst>
               </a:tr>
-              <a:tr h="248668">
-                <a:tc>
-                  <a:txBody>
-                    <a:bodyPr/>
-                    <a:lstStyle/>
-                    <a:p>
-                      <a:pPr>
-                        <a:buNone/>
-                      </a:pPr>
-                      <a:r>
-                        <a:rPr lang="en" sz="1200" b="0">
+              <a:tr h="183410">
+                <a:tc>
+                  <a:txBody>
+                    <a:bodyPr/>
+                    <a:lstStyle/>
+                    <a:p>
+                      <a:pPr>
+                        <a:buNone/>
+                      </a:pPr>
+                      <a:r>
+                        <a:rPr lang="en" sz="1050" b="0">
                           <a:effectLst/>
                           <a:latin typeface="Microsoft JhengHei" panose="020B0604030504040204" pitchFamily="34" charset="-120"/>
                           <a:ea typeface="Microsoft JhengHei" panose="020B0604030504040204" pitchFamily="34" charset="-120"/>
@@ -7953,7 +8013,7 @@
                       </a:r>
                     </a:p>
                   </a:txBody>
-                  <a:tcPr marL="22968" marR="22968" marT="10601" marB="10601" anchor="ctr">
+                  <a:tcPr anchor="ctr">
                     <a:lnL w="9525" cap="flat" cmpd="sng" algn="ctr">
                       <a:solidFill>
                         <a:srgbClr val="D6D6D6"/>
@@ -8004,7 +8064,7 @@
                         <a:buNone/>
                       </a:pPr>
                       <a:r>
-                        <a:rPr lang="zh-TW" altLang="en-US" sz="1200" b="0" dirty="0">
+                        <a:rPr lang="zh-TW" altLang="en-US" sz="1050" b="0" dirty="0">
                           <a:effectLst/>
                           <a:latin typeface="Microsoft JhengHei" panose="020B0604030504040204" pitchFamily="34" charset="-120"/>
                           <a:ea typeface="Microsoft JhengHei" panose="020B0604030504040204" pitchFamily="34" charset="-120"/>
@@ -8013,7 +8073,7 @@
                       </a:r>
                     </a:p>
                   </a:txBody>
-                  <a:tcPr marL="22968" marR="22968" marT="10601" marB="10601" anchor="ctr">
+                  <a:tcPr anchor="ctr">
                     <a:lnL w="9525" cap="flat" cmpd="sng" algn="ctr">
                       <a:solidFill>
                         <a:srgbClr val="D6D6D6"/>
@@ -8064,7 +8124,7 @@
                         <a:buNone/>
                       </a:pPr>
                       <a:r>
-                        <a:rPr lang="zh-TW" altLang="en-US" sz="1200" b="0" dirty="0">
+                        <a:rPr lang="zh-TW" altLang="en-US" sz="1050" b="0" dirty="0">
                           <a:effectLst/>
                           <a:latin typeface="Microsoft JhengHei" panose="020B0604030504040204" pitchFamily="34" charset="-120"/>
                           <a:ea typeface="Microsoft JhengHei" panose="020B0604030504040204" pitchFamily="34" charset="-120"/>
@@ -8072,7 +8132,7 @@
                         <a:t>儲存 </a:t>
                       </a:r>
                       <a:r>
-                        <a:rPr lang="en" sz="1200" b="0" dirty="0" err="1">
+                        <a:rPr lang="en" sz="1050" b="0" dirty="0" err="1">
                           <a:effectLst/>
                           <a:latin typeface="Microsoft JhengHei" panose="020B0604030504040204" pitchFamily="34" charset="-120"/>
                           <a:ea typeface="Microsoft JhengHei" panose="020B0604030504040204" pitchFamily="34" charset="-120"/>
@@ -8080,7 +8140,7 @@
                         <a:t>feeds、articles、assistants、briefs、notifications、workspace</a:t>
                       </a:r>
                       <a:r>
-                        <a:rPr lang="en" sz="1200" b="0" dirty="0">
+                        <a:rPr lang="en" sz="1050" b="0" dirty="0">
                           <a:effectLst/>
                           <a:latin typeface="Microsoft JhengHei" panose="020B0604030504040204" pitchFamily="34" charset="-120"/>
                           <a:ea typeface="Microsoft JhengHei" panose="020B0604030504040204" pitchFamily="34" charset="-120"/>
@@ -8088,7 +8148,7 @@
                         <a:t> </a:t>
                       </a:r>
                       <a:r>
-                        <a:rPr lang="zh-TW" altLang="en-US" sz="1200" b="0" dirty="0">
+                        <a:rPr lang="zh-TW" altLang="en-US" sz="1050" b="0" dirty="0">
                           <a:effectLst/>
                           <a:latin typeface="Microsoft JhengHei" panose="020B0604030504040204" pitchFamily="34" charset="-120"/>
                           <a:ea typeface="Microsoft JhengHei" panose="020B0604030504040204" pitchFamily="34" charset="-120"/>
@@ -8097,7 +8157,7 @@
                       </a:r>
                     </a:p>
                   </a:txBody>
-                  <a:tcPr marL="22968" marR="22968" marT="10601" marB="10601" anchor="ctr">
+                  <a:tcPr anchor="ctr">
                     <a:lnL w="9525" cap="flat" cmpd="sng" algn="ctr">
                       <a:solidFill>
                         <a:srgbClr val="D6D6D6"/>
@@ -8145,17 +8205,17 @@
                   </a:ext>
                 </a:extLst>
               </a:tr>
-              <a:tr h="230333">
-                <a:tc>
-                  <a:txBody>
-                    <a:bodyPr/>
-                    <a:lstStyle/>
-                    <a:p>
-                      <a:pPr>
-                        <a:buNone/>
-                      </a:pPr>
-                      <a:r>
-                        <a:rPr lang="en" sz="1200" b="0" dirty="0">
+              <a:tr h="183410">
+                <a:tc>
+                  <a:txBody>
+                    <a:bodyPr/>
+                    <a:lstStyle/>
+                    <a:p>
+                      <a:pPr>
+                        <a:buNone/>
+                      </a:pPr>
+                      <a:r>
+                        <a:rPr lang="en" sz="1050" b="0" dirty="0">
                           <a:effectLst/>
                           <a:latin typeface="Microsoft JhengHei" panose="020B0604030504040204" pitchFamily="34" charset="-120"/>
                           <a:ea typeface="Microsoft JhengHei" panose="020B0604030504040204" pitchFamily="34" charset="-120"/>
@@ -8164,7 +8224,7 @@
                       </a:r>
                     </a:p>
                   </a:txBody>
-                  <a:tcPr marL="22968" marR="22968" marT="10601" marB="10601" anchor="ctr">
+                  <a:tcPr anchor="ctr">
                     <a:lnL w="9525" cap="flat" cmpd="sng" algn="ctr">
                       <a:solidFill>
                         <a:srgbClr val="D6D6D6"/>
@@ -8215,7 +8275,7 @@
                         <a:buNone/>
                       </a:pPr>
                       <a:r>
-                        <a:rPr lang="en" sz="1200" b="0" dirty="0">
+                        <a:rPr lang="en" sz="1050" b="0" dirty="0">
                           <a:effectLst/>
                           <a:latin typeface="Microsoft JhengHei" panose="020B0604030504040204" pitchFamily="34" charset="-120"/>
                           <a:ea typeface="Microsoft JhengHei" panose="020B0604030504040204" pitchFamily="34" charset="-120"/>
@@ -8223,7 +8283,7 @@
                         <a:t>Queue / Cache </a:t>
                       </a:r>
                       <a:r>
-                        <a:rPr lang="zh-TW" altLang="en-US" sz="1200" b="0" dirty="0">
+                        <a:rPr lang="zh-TW" altLang="en-US" sz="1050" b="0" dirty="0">
                           <a:effectLst/>
                           <a:latin typeface="Microsoft JhengHei" panose="020B0604030504040204" pitchFamily="34" charset="-120"/>
                           <a:ea typeface="Microsoft JhengHei" panose="020B0604030504040204" pitchFamily="34" charset="-120"/>
@@ -8232,7 +8292,7 @@
                       </a:r>
                     </a:p>
                   </a:txBody>
-                  <a:tcPr marL="22968" marR="22968" marT="10601" marB="10601" anchor="ctr">
+                  <a:tcPr anchor="ctr">
                     <a:lnL w="9525" cap="flat" cmpd="sng" algn="ctr">
                       <a:solidFill>
                         <a:srgbClr val="D6D6D6"/>
@@ -8283,7 +8343,7 @@
                         <a:buNone/>
                       </a:pPr>
                       <a:r>
-                        <a:rPr lang="zh-TW" altLang="en-US" sz="1200" b="0" dirty="0">
+                        <a:rPr lang="zh-TW" altLang="en-US" sz="1050" b="0" dirty="0">
                           <a:effectLst/>
                           <a:latin typeface="Microsoft JhengHei" panose="020B0604030504040204" pitchFamily="34" charset="-120"/>
                           <a:ea typeface="Microsoft JhengHei" panose="020B0604030504040204" pitchFamily="34" charset="-120"/>
@@ -8291,7 +8351,7 @@
                         <a:t>作為 </a:t>
                       </a:r>
                       <a:r>
-                        <a:rPr lang="en" sz="1200" b="0" dirty="0" err="1">
+                        <a:rPr lang="en" sz="1050" b="0" dirty="0" err="1">
                           <a:effectLst/>
                           <a:latin typeface="Microsoft JhengHei" panose="020B0604030504040204" pitchFamily="34" charset="-120"/>
                           <a:ea typeface="Microsoft JhengHei" panose="020B0604030504040204" pitchFamily="34" charset="-120"/>
@@ -8299,7 +8359,7 @@
                         <a:t>BullMQ</a:t>
                       </a:r>
                       <a:r>
-                        <a:rPr lang="en" sz="1200" b="0" dirty="0">
+                        <a:rPr lang="en" sz="1050" b="0" dirty="0">
                           <a:effectLst/>
                           <a:latin typeface="Microsoft JhengHei" panose="020B0604030504040204" pitchFamily="34" charset="-120"/>
                           <a:ea typeface="Microsoft JhengHei" panose="020B0604030504040204" pitchFamily="34" charset="-120"/>
@@ -8307,7 +8367,7 @@
                         <a:t> </a:t>
                       </a:r>
                       <a:r>
-                        <a:rPr lang="zh-TW" altLang="en-US" sz="1200" b="0" dirty="0">
+                        <a:rPr lang="zh-TW" altLang="en-US" sz="1050" b="0" dirty="0">
                           <a:effectLst/>
                           <a:latin typeface="Microsoft JhengHei" panose="020B0604030504040204" pitchFamily="34" charset="-120"/>
                           <a:ea typeface="Microsoft JhengHei" panose="020B0604030504040204" pitchFamily="34" charset="-120"/>
@@ -8316,7 +8376,7 @@
                       </a:r>
                     </a:p>
                   </a:txBody>
-                  <a:tcPr marL="22968" marR="22968" marT="10601" marB="10601" anchor="ctr">
+                  <a:tcPr anchor="ctr">
                     <a:lnL w="9525" cap="flat" cmpd="sng" algn="ctr">
                       <a:solidFill>
                         <a:srgbClr val="D6D6D6"/>
@@ -8364,17 +8424,17 @@
                   </a:ext>
                 </a:extLst>
               </a:tr>
-              <a:tr h="230333">
-                <a:tc>
-                  <a:txBody>
-                    <a:bodyPr/>
-                    <a:lstStyle/>
-                    <a:p>
-                      <a:pPr>
-                        <a:buNone/>
-                      </a:pPr>
-                      <a:r>
-                        <a:rPr lang="en" sz="1200" b="0">
+              <a:tr h="183410">
+                <a:tc>
+                  <a:txBody>
+                    <a:bodyPr/>
+                    <a:lstStyle/>
+                    <a:p>
+                      <a:pPr>
+                        <a:buNone/>
+                      </a:pPr>
+                      <a:r>
+                        <a:rPr lang="en" sz="1050" b="0">
                           <a:effectLst/>
                           <a:latin typeface="Microsoft JhengHei" panose="020B0604030504040204" pitchFamily="34" charset="-120"/>
                           <a:ea typeface="Microsoft JhengHei" panose="020B0604030504040204" pitchFamily="34" charset="-120"/>
@@ -8383,7 +8443,7 @@
                       </a:r>
                     </a:p>
                   </a:txBody>
-                  <a:tcPr marL="22968" marR="22968" marT="10601" marB="10601" anchor="ctr">
+                  <a:tcPr anchor="ctr">
                     <a:lnL w="9525" cap="flat" cmpd="sng" algn="ctr">
                       <a:solidFill>
                         <a:srgbClr val="D6D6D6"/>
@@ -8434,7 +8494,7 @@
                         <a:buNone/>
                       </a:pPr>
                       <a:r>
-                        <a:rPr lang="en" sz="1200" b="0" dirty="0" err="1">
+                        <a:rPr lang="en" sz="1050" b="0" dirty="0" err="1">
                           <a:effectLst/>
                           <a:latin typeface="Microsoft JhengHei" panose="020B0604030504040204" pitchFamily="34" charset="-120"/>
                           <a:ea typeface="Microsoft JhengHei" panose="020B0604030504040204" pitchFamily="34" charset="-120"/>
@@ -8442,7 +8502,7 @@
                         <a:t>Github</a:t>
                       </a:r>
                       <a:r>
-                        <a:rPr lang="en" sz="1200" b="0" dirty="0">
+                        <a:rPr lang="en" sz="1050" b="0" dirty="0">
                           <a:effectLst/>
                           <a:latin typeface="Microsoft JhengHei" panose="020B0604030504040204" pitchFamily="34" charset="-120"/>
                           <a:ea typeface="Microsoft JhengHei" panose="020B0604030504040204" pitchFamily="34" charset="-120"/>
@@ -8451,7 +8511,7 @@
                       </a:r>
                     </a:p>
                   </a:txBody>
-                  <a:tcPr marL="22968" marR="22968" marT="10601" marB="10601" anchor="ctr">
+                  <a:tcPr anchor="ctr">
                     <a:lnL w="9525" cap="flat" cmpd="sng" algn="ctr">
                       <a:solidFill>
                         <a:srgbClr val="D6D6D6"/>
@@ -8502,7 +8562,7 @@
                         <a:buNone/>
                       </a:pPr>
                       <a:r>
-                        <a:rPr lang="zh-TW" altLang="en-US" sz="1200" b="0" dirty="0">
+                        <a:rPr lang="zh-TW" altLang="en-US" sz="1050" b="0" dirty="0">
                           <a:effectLst/>
                           <a:latin typeface="Microsoft JhengHei" panose="020B0604030504040204" pitchFamily="34" charset="-120"/>
                           <a:ea typeface="Microsoft JhengHei" panose="020B0604030504040204" pitchFamily="34" charset="-120"/>
@@ -8510,7 +8570,7 @@
                         <a:t>作為 </a:t>
                       </a:r>
                       <a:r>
-                        <a:rPr lang="en" sz="1200" b="0" dirty="0">
+                        <a:rPr lang="en" sz="1050" b="0" dirty="0">
                           <a:effectLst/>
                           <a:latin typeface="Microsoft JhengHei" panose="020B0604030504040204" pitchFamily="34" charset="-120"/>
                           <a:ea typeface="Microsoft JhengHei" panose="020B0604030504040204" pitchFamily="34" charset="-120"/>
@@ -8518,7 +8578,7 @@
                         <a:t>AI </a:t>
                       </a:r>
                       <a:r>
-                        <a:rPr lang="zh-TW" altLang="en-US" sz="1200" b="0" dirty="0">
+                        <a:rPr lang="zh-TW" altLang="en-US" sz="1050" b="0" dirty="0">
                           <a:effectLst/>
                           <a:latin typeface="Microsoft JhengHei" panose="020B0604030504040204" pitchFamily="34" charset="-120"/>
                           <a:ea typeface="Microsoft JhengHei" panose="020B0604030504040204" pitchFamily="34" charset="-120"/>
@@ -8526,7 +8586,7 @@
                         <a:t>執行入口，讓 </a:t>
                       </a:r>
                       <a:r>
-                        <a:rPr lang="en" sz="1200" b="0" dirty="0">
+                        <a:rPr lang="en" sz="1050" b="0" dirty="0">
                           <a:effectLst/>
                           <a:latin typeface="Microsoft JhengHei" panose="020B0604030504040204" pitchFamily="34" charset="-120"/>
                           <a:ea typeface="Microsoft JhengHei" panose="020B0604030504040204" pitchFamily="34" charset="-120"/>
@@ -8534,7 +8594,7 @@
                         <a:t>API </a:t>
                       </a:r>
                       <a:r>
-                        <a:rPr lang="zh-TW" altLang="en-US" sz="1200" b="0" dirty="0">
+                        <a:rPr lang="zh-TW" altLang="en-US" sz="1050" b="0" dirty="0">
                           <a:effectLst/>
                           <a:latin typeface="Microsoft JhengHei" panose="020B0604030504040204" pitchFamily="34" charset="-120"/>
                           <a:ea typeface="Microsoft JhengHei" panose="020B0604030504040204" pitchFamily="34" charset="-120"/>
@@ -8543,7 +8603,7 @@
                       </a:r>
                     </a:p>
                   </a:txBody>
-                  <a:tcPr marL="22968" marR="22968" marT="10601" marB="10601" anchor="ctr">
+                  <a:tcPr anchor="ctr">
                     <a:lnL w="9525" cap="flat" cmpd="sng" algn="ctr">
                       <a:solidFill>
                         <a:srgbClr val="D6D6D6"/>
@@ -8591,17 +8651,17 @@
                   </a:ext>
                 </a:extLst>
               </a:tr>
-              <a:tr h="230333">
-                <a:tc>
-                  <a:txBody>
-                    <a:bodyPr/>
-                    <a:lstStyle/>
-                    <a:p>
-                      <a:pPr>
-                        <a:buNone/>
-                      </a:pPr>
-                      <a:r>
-                        <a:rPr lang="en" sz="1200" b="0" dirty="0">
+              <a:tr h="183410">
+                <a:tc>
+                  <a:txBody>
+                    <a:bodyPr/>
+                    <a:lstStyle/>
+                    <a:p>
+                      <a:pPr>
+                        <a:buNone/>
+                      </a:pPr>
+                      <a:r>
+                        <a:rPr lang="en" sz="1050" b="0" dirty="0">
                           <a:effectLst/>
                           <a:latin typeface="Microsoft JhengHei" panose="020B0604030504040204" pitchFamily="34" charset="-120"/>
                           <a:ea typeface="Microsoft JhengHei" panose="020B0604030504040204" pitchFamily="34" charset="-120"/>
@@ -8610,7 +8670,7 @@
                       </a:r>
                     </a:p>
                   </a:txBody>
-                  <a:tcPr marL="22968" marR="22968" marT="10601" marB="10601" anchor="ctr">
+                  <a:tcPr anchor="ctr">
                     <a:lnL w="9525" cap="flat" cmpd="sng" algn="ctr">
                       <a:solidFill>
                         <a:srgbClr val="D6D6D6"/>
@@ -8661,7 +8721,7 @@
                         <a:buNone/>
                       </a:pPr>
                       <a:r>
-                        <a:rPr lang="en" sz="1200" b="0" dirty="0">
+                        <a:rPr lang="en" sz="1050" b="0" dirty="0">
                           <a:effectLst/>
                           <a:latin typeface="Microsoft JhengHei" panose="020B0604030504040204" pitchFamily="34" charset="-120"/>
                           <a:ea typeface="Microsoft JhengHei" panose="020B0604030504040204" pitchFamily="34" charset="-120"/>
@@ -8669,7 +8729,7 @@
                         <a:t>LLM </a:t>
                       </a:r>
                       <a:r>
-                        <a:rPr lang="zh-TW" altLang="en-US" sz="1200" b="0" dirty="0">
+                        <a:rPr lang="zh-TW" altLang="en-US" sz="1050" b="0" dirty="0">
                           <a:effectLst/>
                           <a:latin typeface="Microsoft JhengHei" panose="020B0604030504040204" pitchFamily="34" charset="-120"/>
                           <a:ea typeface="Microsoft JhengHei" panose="020B0604030504040204" pitchFamily="34" charset="-120"/>
@@ -8677,7 +8737,7 @@
                         <a:t>供應商</a:t>
                       </a:r>
                       <a:r>
-                        <a:rPr lang="en-US" altLang="zh-TW" sz="1200" b="0" dirty="0">
+                        <a:rPr lang="en-US" altLang="zh-TW" sz="1050" b="0" dirty="0">
                           <a:effectLst/>
                           <a:latin typeface="Microsoft JhengHei" panose="020B0604030504040204" pitchFamily="34" charset="-120"/>
                           <a:ea typeface="Microsoft JhengHei" panose="020B0604030504040204" pitchFamily="34" charset="-120"/>
@@ -8685,7 +8745,7 @@
                         <a:t> (Azure OpenAI</a:t>
                       </a:r>
                       <a:r>
-                        <a:rPr lang="zh-TW" altLang="en-US" sz="1200" b="0" dirty="0">
+                        <a:rPr lang="zh-TW" altLang="en-US" sz="1050" b="0" dirty="0">
                           <a:effectLst/>
                           <a:latin typeface="Microsoft JhengHei" panose="020B0604030504040204" pitchFamily="34" charset="-120"/>
                           <a:ea typeface="Microsoft JhengHei" panose="020B0604030504040204" pitchFamily="34" charset="-120"/>
@@ -8693,7 +8753,7 @@
                         <a:t> </a:t>
                       </a:r>
                       <a:r>
-                        <a:rPr lang="en-US" altLang="zh-TW" sz="1200" b="0" dirty="0">
+                        <a:rPr lang="en-US" altLang="zh-TW" sz="1050" b="0" dirty="0">
                           <a:effectLst/>
                           <a:latin typeface="Microsoft JhengHei" panose="020B0604030504040204" pitchFamily="34" charset="-120"/>
                           <a:ea typeface="Microsoft JhengHei" panose="020B0604030504040204" pitchFamily="34" charset="-120"/>
@@ -8701,7 +8761,7 @@
                         <a:t>/ </a:t>
                       </a:r>
                       <a:r>
-                        <a:rPr lang="en-US" altLang="zh-TW" sz="1200" b="0" dirty="0" err="1">
+                        <a:rPr lang="en-US" altLang="zh-TW" sz="1050" b="0" dirty="0" err="1">
                           <a:effectLst/>
                           <a:latin typeface="Microsoft JhengHei" panose="020B0604030504040204" pitchFamily="34" charset="-120"/>
                           <a:ea typeface="Microsoft JhengHei" panose="020B0604030504040204" pitchFamily="34" charset="-120"/>
@@ -8709,21 +8769,21 @@
                         <a:t>LiteLLM</a:t>
                       </a:r>
                       <a:r>
-                        <a:rPr lang="en-US" altLang="zh-TW" sz="1200" b="0" dirty="0">
+                        <a:rPr lang="en-US" altLang="zh-TW" sz="1050" b="0" dirty="0">
                           <a:effectLst/>
                           <a:latin typeface="Microsoft JhengHei" panose="020B0604030504040204" pitchFamily="34" charset="-120"/>
                           <a:ea typeface="Microsoft JhengHei" panose="020B0604030504040204" pitchFamily="34" charset="-120"/>
                         </a:rPr>
                         <a:t>)</a:t>
                       </a:r>
-                      <a:endParaRPr lang="zh-TW" altLang="en-US" sz="1200" b="0" dirty="0">
+                      <a:endParaRPr lang="zh-TW" altLang="en-US" sz="1050" b="0" dirty="0">
                         <a:effectLst/>
                         <a:latin typeface="Microsoft JhengHei" panose="020B0604030504040204" pitchFamily="34" charset="-120"/>
                         <a:ea typeface="Microsoft JhengHei" panose="020B0604030504040204" pitchFamily="34" charset="-120"/>
                       </a:endParaRPr>
                     </a:p>
                   </a:txBody>
-                  <a:tcPr marL="22968" marR="22968" marT="10601" marB="10601" anchor="ctr">
+                  <a:tcPr anchor="ctr">
                     <a:lnL w="9525" cap="flat" cmpd="sng" algn="ctr">
                       <a:solidFill>
                         <a:srgbClr val="D6D6D6"/>
@@ -8774,7 +8834,7 @@
                         <a:buNone/>
                       </a:pPr>
                       <a:r>
-                        <a:rPr lang="zh-TW" altLang="en-US" sz="1200" b="0" dirty="0">
+                        <a:rPr lang="zh-TW" altLang="en-US" sz="1050" b="0" dirty="0">
                           <a:effectLst/>
                           <a:latin typeface="Microsoft JhengHei" panose="020B0604030504040204" pitchFamily="34" charset="-120"/>
                           <a:ea typeface="Microsoft JhengHei" panose="020B0604030504040204" pitchFamily="34" charset="-120"/>
@@ -8782,7 +8842,7 @@
                         <a:t>提供文章判讀、摘要、分類、助理推理等 </a:t>
                       </a:r>
                       <a:r>
-                        <a:rPr lang="en" sz="1200" b="0" dirty="0">
+                        <a:rPr lang="en" sz="1050" b="0" dirty="0">
                           <a:effectLst/>
                           <a:latin typeface="Microsoft JhengHei" panose="020B0604030504040204" pitchFamily="34" charset="-120"/>
                           <a:ea typeface="Microsoft JhengHei" panose="020B0604030504040204" pitchFamily="34" charset="-120"/>
@@ -8790,7 +8850,7 @@
                         <a:t>AI </a:t>
                       </a:r>
                       <a:r>
-                        <a:rPr lang="zh-TW" altLang="en-US" sz="1200" b="0" dirty="0">
+                        <a:rPr lang="zh-TW" altLang="en-US" sz="1050" b="0" dirty="0">
                           <a:effectLst/>
                           <a:latin typeface="Microsoft JhengHei" panose="020B0604030504040204" pitchFamily="34" charset="-120"/>
                           <a:ea typeface="Microsoft JhengHei" panose="020B0604030504040204" pitchFamily="34" charset="-120"/>
@@ -8799,7 +8859,7 @@
                       </a:r>
                     </a:p>
                   </a:txBody>
-                  <a:tcPr marL="22968" marR="22968" marT="10601" marB="10601" anchor="ctr">
+                  <a:tcPr anchor="ctr">
                     <a:lnL w="9525" cap="flat" cmpd="sng" algn="ctr">
                       <a:solidFill>
                         <a:srgbClr val="D6D6D6"/>
@@ -8847,17 +8907,17 @@
                   </a:ext>
                 </a:extLst>
               </a:tr>
-              <a:tr h="230333">
-                <a:tc>
-                  <a:txBody>
-                    <a:bodyPr/>
-                    <a:lstStyle/>
-                    <a:p>
-                      <a:pPr>
-                        <a:buNone/>
-                      </a:pPr>
-                      <a:r>
-                        <a:rPr lang="en" sz="1200" b="0" dirty="0">
+              <a:tr h="183410">
+                <a:tc>
+                  <a:txBody>
+                    <a:bodyPr/>
+                    <a:lstStyle/>
+                    <a:p>
+                      <a:pPr>
+                        <a:buNone/>
+                      </a:pPr>
+                      <a:r>
+                        <a:rPr lang="en" sz="1050" b="0" dirty="0">
                           <a:effectLst/>
                           <a:latin typeface="Microsoft JhengHei" panose="020B0604030504040204" pitchFamily="34" charset="-120"/>
                           <a:ea typeface="Microsoft JhengHei" panose="020B0604030504040204" pitchFamily="34" charset="-120"/>
@@ -8866,7 +8926,7 @@
                       </a:r>
                     </a:p>
                   </a:txBody>
-                  <a:tcPr marL="22968" marR="22968" marT="10601" marB="10601" anchor="ctr">
+                  <a:tcPr anchor="ctr">
                     <a:lnL w="9525" cap="flat" cmpd="sng" algn="ctr">
                       <a:solidFill>
                         <a:srgbClr val="D6D6D6"/>
@@ -8917,7 +8977,7 @@
                         <a:buNone/>
                       </a:pPr>
                       <a:r>
-                        <a:rPr lang="en" sz="1200" b="0" dirty="0">
+                        <a:rPr lang="en" sz="1050" b="0" dirty="0">
                           <a:effectLst/>
                           <a:latin typeface="Microsoft JhengHei" panose="020B0604030504040204" pitchFamily="34" charset="-120"/>
                           <a:ea typeface="Microsoft JhengHei" panose="020B0604030504040204" pitchFamily="34" charset="-120"/>
@@ -8925,7 +8985,7 @@
                         <a:t>RSS、</a:t>
                       </a:r>
                       <a:r>
-                        <a:rPr lang="zh-TW" altLang="en-US" sz="1200" b="0" dirty="0">
+                        <a:rPr lang="zh-TW" altLang="en-US" sz="1050" b="0" dirty="0">
                           <a:effectLst/>
                           <a:latin typeface="Microsoft JhengHei" panose="020B0604030504040204" pitchFamily="34" charset="-120"/>
                           <a:ea typeface="Microsoft JhengHei" panose="020B0604030504040204" pitchFamily="34" charset="-120"/>
@@ -8934,7 +8994,7 @@
                       </a:r>
                     </a:p>
                   </a:txBody>
-                  <a:tcPr marL="22968" marR="22968" marT="10601" marB="10601" anchor="ctr">
+                  <a:tcPr anchor="ctr">
                     <a:lnL w="9525" cap="flat" cmpd="sng" algn="ctr">
                       <a:solidFill>
                         <a:srgbClr val="D6D6D6"/>
@@ -8985,7 +9045,7 @@
                         <a:buNone/>
                       </a:pPr>
                       <a:r>
-                        <a:rPr lang="zh-TW" altLang="en-US" sz="1200" b="0" dirty="0">
+                        <a:rPr lang="zh-TW" altLang="en-US" sz="1050" b="0" dirty="0">
                           <a:effectLst/>
                           <a:latin typeface="Microsoft JhengHei" panose="020B0604030504040204" pitchFamily="34" charset="-120"/>
                           <a:ea typeface="Microsoft JhengHei" panose="020B0604030504040204" pitchFamily="34" charset="-120"/>
@@ -8993,7 +9053,7 @@
                         <a:t>系統擷取資訊的來源，提供文章或原始資料給 </a:t>
                       </a:r>
                       <a:r>
-                        <a:rPr lang="en" sz="1200" b="0" dirty="0">
+                        <a:rPr lang="en" sz="1050" b="0" dirty="0">
                           <a:effectLst/>
                           <a:latin typeface="Microsoft JhengHei" panose="020B0604030504040204" pitchFamily="34" charset="-120"/>
                           <a:ea typeface="Microsoft JhengHei" panose="020B0604030504040204" pitchFamily="34" charset="-120"/>
@@ -9001,7 +9061,7 @@
                         <a:t>API / Scheduler </a:t>
                       </a:r>
                       <a:r>
-                        <a:rPr lang="zh-TW" altLang="en-US" sz="1200" b="0" dirty="0">
+                        <a:rPr lang="zh-TW" altLang="en-US" sz="1050" b="0" dirty="0">
                           <a:effectLst/>
                           <a:latin typeface="Microsoft JhengHei" panose="020B0604030504040204" pitchFamily="34" charset="-120"/>
                           <a:ea typeface="Microsoft JhengHei" panose="020B0604030504040204" pitchFamily="34" charset="-120"/>
@@ -9010,7 +9070,7 @@
                       </a:r>
                     </a:p>
                   </a:txBody>
-                  <a:tcPr marL="22968" marR="22968" marT="10601" marB="10601" anchor="ctr">
+                  <a:tcPr anchor="ctr">
                     <a:lnL w="9525" cap="flat" cmpd="sng" algn="ctr">
                       <a:solidFill>
                         <a:srgbClr val="D6D6D6"/>
@@ -9062,1812 +9122,12 @@
           </a:graphicData>
         </a:graphic>
       </p:graphicFrame>
-    </p:spTree>
-    <p:extLst>
-      <p:ext uri="{BB962C8B-B14F-4D97-AF65-F5344CB8AC3E}">
-        <p14:creationId xmlns:p14="http://schemas.microsoft.com/office/powerpoint/2010/main" val="2202823034"/>
-      </p:ext>
-    </p:extLst>
-  </p:cSld>
-  <p:clrMapOvr>
-    <a:masterClrMapping/>
-  </p:clrMapOvr>
-</p:sld>
-</file>
-
-<file path=ppt/slides/slide4.xml><?xml version="1.0" encoding="utf-8"?>
-<p:sld xmlns:a="http://schemas.openxmlformats.org/drawingml/2006/main" xmlns:r="http://schemas.openxmlformats.org/officeDocument/2006/relationships" xmlns:p="http://schemas.openxmlformats.org/presentationml/2006/main">
-  <p:cSld>
-    <p:spTree>
-      <p:nvGrpSpPr>
-        <p:cNvPr id="1" name="">
-          <a:extLst>
-            <a:ext uri="{FF2B5EF4-FFF2-40B4-BE49-F238E27FC236}">
-              <a16:creationId xmlns:a16="http://schemas.microsoft.com/office/drawing/2014/main" id="{C80F1C9A-CB1C-4442-8F53-894FC5EE1F2C}"/>
-            </a:ext>
-          </a:extLst>
-        </p:cNvPr>
-        <p:cNvGrpSpPr/>
-        <p:nvPr/>
-      </p:nvGrpSpPr>
-      <p:grpSpPr>
-        <a:xfrm>
-          <a:off x="0" y="0"/>
-          <a:ext cx="0" cy="0"/>
-          <a:chOff x="0" y="0"/>
-          <a:chExt cx="0" cy="0"/>
-        </a:xfrm>
-      </p:grpSpPr>
-      <p:sp>
-        <p:nvSpPr>
-          <p:cNvPr id="2" name="標題 1">
+      <p:pic>
+        <p:nvPicPr>
+          <p:cNvPr id="11" name="圖片 10" descr="一張含有 文字, 圖表, 行, 繪圖 的圖片&#10;&#10;AI 產生的內容可能不正確。">
             <a:extLst>
               <a:ext uri="{FF2B5EF4-FFF2-40B4-BE49-F238E27FC236}">
-                <a16:creationId xmlns:a16="http://schemas.microsoft.com/office/drawing/2014/main" id="{62930CFD-B623-0CA4-ADD8-424E3CCF7711}"/>
-              </a:ext>
-            </a:extLst>
-          </p:cNvPr>
-          <p:cNvSpPr>
-            <a:spLocks noGrp="1"/>
-          </p:cNvSpPr>
-          <p:nvPr>
-            <p:ph type="title"/>
-          </p:nvPr>
-        </p:nvSpPr>
-        <p:spPr/>
-        <p:txBody>
-          <a:bodyPr/>
-          <a:lstStyle/>
-          <a:p>
-            <a:r>
-              <a:rPr lang="zh-TW" altLang="en-US" b="1" dirty="0"/>
-              <a:t>專案使用技術堆疊與系統邊界概覽</a:t>
-            </a:r>
-          </a:p>
-        </p:txBody>
-      </p:sp>
-      <p:graphicFrame>
-        <p:nvGraphicFramePr>
-          <p:cNvPr id="3" name="表格 2">
-            <a:extLst>
-              <a:ext uri="{FF2B5EF4-FFF2-40B4-BE49-F238E27FC236}">
-                <a16:creationId xmlns:a16="http://schemas.microsoft.com/office/drawing/2014/main" id="{BBD22C38-79CE-E156-197E-B6DC9D7984C0}"/>
-              </a:ext>
-            </a:extLst>
-          </p:cNvPr>
-          <p:cNvGraphicFramePr>
-            <a:graphicFrameLocks noGrp="1"/>
-          </p:cNvGraphicFramePr>
-          <p:nvPr>
-            <p:extLst>
-              <p:ext uri="{D42A27DB-BD31-4B8C-83A1-F6EECF244321}">
-                <p14:modId xmlns:p14="http://schemas.microsoft.com/office/powerpoint/2010/main" val="4000937281"/>
-              </p:ext>
-            </p:extLst>
-          </p:nvPr>
-        </p:nvGraphicFramePr>
-        <p:xfrm>
-          <a:off x="450242" y="3609480"/>
-          <a:ext cx="10809792" cy="2104015"/>
-        </p:xfrm>
-        <a:graphic>
-          <a:graphicData uri="http://schemas.openxmlformats.org/drawingml/2006/table">
-            <a:tbl>
-              <a:tblPr/>
-              <a:tblGrid>
-                <a:gridCol w="1188485">
-                  <a:extLst>
-                    <a:ext uri="{9D8B030D-6E8A-4147-A177-3AD203B41FA5}">
-                      <a16:colId xmlns:a16="http://schemas.microsoft.com/office/drawing/2014/main" val="1267251201"/>
-                    </a:ext>
-                  </a:extLst>
-                </a:gridCol>
-                <a:gridCol w="4795375">
-                  <a:extLst>
-                    <a:ext uri="{9D8B030D-6E8A-4147-A177-3AD203B41FA5}">
-                      <a16:colId xmlns:a16="http://schemas.microsoft.com/office/drawing/2014/main" val="2527468516"/>
-                    </a:ext>
-                  </a:extLst>
-                </a:gridCol>
-                <a:gridCol w="4825932">
-                  <a:extLst>
-                    <a:ext uri="{9D8B030D-6E8A-4147-A177-3AD203B41FA5}">
-                      <a16:colId xmlns:a16="http://schemas.microsoft.com/office/drawing/2014/main" val="4194327151"/>
-                    </a:ext>
-                  </a:extLst>
-                </a:gridCol>
-              </a:tblGrid>
-              <a:tr h="227566">
-                <a:tc>
-                  <a:txBody>
-                    <a:bodyPr/>
-                    <a:lstStyle/>
-                    <a:p>
-                      <a:pPr>
-                        <a:buNone/>
-                      </a:pPr>
-                      <a:r>
-                        <a:rPr lang="zh-TW" altLang="en-US" sz="1200" b="1" dirty="0">
-                          <a:solidFill>
-                            <a:srgbClr val="000000"/>
-                          </a:solidFill>
-                          <a:effectLst/>
-                          <a:latin typeface="Microsoft JhengHei" panose="020B0604030504040204" pitchFamily="34" charset="-120"/>
-                          <a:ea typeface="Microsoft JhengHei" panose="020B0604030504040204" pitchFamily="34" charset="-120"/>
-                        </a:rPr>
-                        <a:t>流程階段</a:t>
-                      </a:r>
-                    </a:p>
-                  </a:txBody>
-                  <a:tcPr marL="81480" marR="81480" marT="37606" marB="37606" anchor="ctr">
-                    <a:lnL w="9525" cap="flat" cmpd="sng" algn="ctr">
-                      <a:solidFill>
-                        <a:srgbClr val="D6D6D6"/>
-                      </a:solidFill>
-                      <a:prstDash val="solid"/>
-                      <a:round/>
-                      <a:headEnd type="none" w="med" len="med"/>
-                      <a:tailEnd type="none" w="med" len="med"/>
-                    </a:lnL>
-                    <a:lnR w="9525" cap="flat" cmpd="sng" algn="ctr">
-                      <a:solidFill>
-                        <a:srgbClr val="D6D6D6"/>
-                      </a:solidFill>
-                      <a:prstDash val="solid"/>
-                      <a:round/>
-                      <a:headEnd type="none" w="med" len="med"/>
-                      <a:tailEnd type="none" w="med" len="med"/>
-                    </a:lnR>
-                    <a:lnT w="9525" cap="flat" cmpd="sng" algn="ctr">
-                      <a:solidFill>
-                        <a:srgbClr val="D6D6D6"/>
-                      </a:solidFill>
-                      <a:prstDash val="solid"/>
-                      <a:round/>
-                      <a:headEnd type="none" w="med" len="med"/>
-                      <a:tailEnd type="none" w="med" len="med"/>
-                    </a:lnT>
-                    <a:lnB w="9525" cap="flat" cmpd="sng" algn="ctr">
-                      <a:solidFill>
-                        <a:srgbClr val="D6D6D6"/>
-                      </a:solidFill>
-                      <a:prstDash val="solid"/>
-                      <a:round/>
-                      <a:headEnd type="none" w="med" len="med"/>
-                      <a:tailEnd type="none" w="med" len="med"/>
-                    </a:lnB>
-                    <a:solidFill>
-                      <a:srgbClr val="FFFFFF"/>
-                    </a:solidFill>
-                  </a:tcPr>
-                </a:tc>
-                <a:tc>
-                  <a:txBody>
-                    <a:bodyPr/>
-                    <a:lstStyle/>
-                    <a:p>
-                      <a:pPr>
-                        <a:buNone/>
-                      </a:pPr>
-                      <a:r>
-                        <a:rPr lang="zh-TW" altLang="en-US" sz="1200" b="1">
-                          <a:solidFill>
-                            <a:srgbClr val="000000"/>
-                          </a:solidFill>
-                          <a:effectLst/>
-                          <a:latin typeface="Microsoft JhengHei" panose="020B0604030504040204" pitchFamily="34" charset="-120"/>
-                          <a:ea typeface="Microsoft JhengHei" panose="020B0604030504040204" pitchFamily="34" charset="-120"/>
-                        </a:rPr>
-                        <a:t>方向</a:t>
-                      </a:r>
-                    </a:p>
-                  </a:txBody>
-                  <a:tcPr marL="81480" marR="81480" marT="37606" marB="37606" anchor="ctr">
-                    <a:lnL w="9525" cap="flat" cmpd="sng" algn="ctr">
-                      <a:solidFill>
-                        <a:srgbClr val="D6D6D6"/>
-                      </a:solidFill>
-                      <a:prstDash val="solid"/>
-                      <a:round/>
-                      <a:headEnd type="none" w="med" len="med"/>
-                      <a:tailEnd type="none" w="med" len="med"/>
-                    </a:lnL>
-                    <a:lnR w="9525" cap="flat" cmpd="sng" algn="ctr">
-                      <a:solidFill>
-                        <a:srgbClr val="D6D6D6"/>
-                      </a:solidFill>
-                      <a:prstDash val="solid"/>
-                      <a:round/>
-                      <a:headEnd type="none" w="med" len="med"/>
-                      <a:tailEnd type="none" w="med" len="med"/>
-                    </a:lnR>
-                    <a:lnT w="9525" cap="flat" cmpd="sng" algn="ctr">
-                      <a:solidFill>
-                        <a:srgbClr val="D6D6D6"/>
-                      </a:solidFill>
-                      <a:prstDash val="solid"/>
-                      <a:round/>
-                      <a:headEnd type="none" w="med" len="med"/>
-                      <a:tailEnd type="none" w="med" len="med"/>
-                    </a:lnT>
-                    <a:lnB w="9525" cap="flat" cmpd="sng" algn="ctr">
-                      <a:solidFill>
-                        <a:srgbClr val="D6D6D6"/>
-                      </a:solidFill>
-                      <a:prstDash val="solid"/>
-                      <a:round/>
-                      <a:headEnd type="none" w="med" len="med"/>
-                      <a:tailEnd type="none" w="med" len="med"/>
-                    </a:lnB>
-                    <a:solidFill>
-                      <a:srgbClr val="FFFFFF"/>
-                    </a:solidFill>
-                  </a:tcPr>
-                </a:tc>
-                <a:tc>
-                  <a:txBody>
-                    <a:bodyPr/>
-                    <a:lstStyle/>
-                    <a:p>
-                      <a:pPr>
-                        <a:buNone/>
-                      </a:pPr>
-                      <a:r>
-                        <a:rPr lang="zh-TW" altLang="en-US" sz="1200" b="1">
-                          <a:solidFill>
-                            <a:srgbClr val="000000"/>
-                          </a:solidFill>
-                          <a:effectLst/>
-                          <a:latin typeface="Microsoft JhengHei" panose="020B0604030504040204" pitchFamily="34" charset="-120"/>
-                          <a:ea typeface="Microsoft JhengHei" panose="020B0604030504040204" pitchFamily="34" charset="-120"/>
-                        </a:rPr>
-                        <a:t>說明</a:t>
-                      </a:r>
-                    </a:p>
-                  </a:txBody>
-                  <a:tcPr marL="81480" marR="81480" marT="37606" marB="37606" anchor="ctr">
-                    <a:lnL w="9525" cap="flat" cmpd="sng" algn="ctr">
-                      <a:solidFill>
-                        <a:srgbClr val="D6D6D6"/>
-                      </a:solidFill>
-                      <a:prstDash val="solid"/>
-                      <a:round/>
-                      <a:headEnd type="none" w="med" len="med"/>
-                      <a:tailEnd type="none" w="med" len="med"/>
-                    </a:lnL>
-                    <a:lnR w="9525" cap="flat" cmpd="sng" algn="ctr">
-                      <a:solidFill>
-                        <a:srgbClr val="D6D6D6"/>
-                      </a:solidFill>
-                      <a:prstDash val="solid"/>
-                      <a:round/>
-                      <a:headEnd type="none" w="med" len="med"/>
-                      <a:tailEnd type="none" w="med" len="med"/>
-                    </a:lnR>
-                    <a:lnT w="9525" cap="flat" cmpd="sng" algn="ctr">
-                      <a:solidFill>
-                        <a:srgbClr val="D6D6D6"/>
-                      </a:solidFill>
-                      <a:prstDash val="solid"/>
-                      <a:round/>
-                      <a:headEnd type="none" w="med" len="med"/>
-                      <a:tailEnd type="none" w="med" len="med"/>
-                    </a:lnT>
-                    <a:lnB w="9525" cap="flat" cmpd="sng" algn="ctr">
-                      <a:solidFill>
-                        <a:srgbClr val="D6D6D6"/>
-                      </a:solidFill>
-                      <a:prstDash val="solid"/>
-                      <a:round/>
-                      <a:headEnd type="none" w="med" len="med"/>
-                      <a:tailEnd type="none" w="med" len="med"/>
-                    </a:lnB>
-                    <a:solidFill>
-                      <a:srgbClr val="FFFFFF"/>
-                    </a:solidFill>
-                  </a:tcPr>
-                </a:tc>
-                <a:extLst>
-                  <a:ext uri="{0D108BD9-81ED-4DB2-BD59-A6C34878D82A}">
-                    <a16:rowId xmlns:a16="http://schemas.microsoft.com/office/drawing/2014/main" val="3481647956"/>
-                  </a:ext>
-                </a:extLst>
-              </a:tr>
-              <a:tr h="227566">
-                <a:tc>
-                  <a:txBody>
-                    <a:bodyPr/>
-                    <a:lstStyle/>
-                    <a:p>
-                      <a:pPr>
-                        <a:buNone/>
-                      </a:pPr>
-                      <a:r>
-                        <a:rPr lang="en-US" altLang="zh-TW" sz="1200" dirty="0">
-                          <a:effectLst/>
-                          <a:latin typeface="Microsoft JhengHei" panose="020B0604030504040204" pitchFamily="34" charset="-120"/>
-                          <a:ea typeface="Microsoft JhengHei" panose="020B0604030504040204" pitchFamily="34" charset="-120"/>
-                        </a:rPr>
-                        <a:t>① </a:t>
-                      </a:r>
-                      <a:r>
-                        <a:rPr lang="zh-TW" altLang="en-US" sz="1200" dirty="0">
-                          <a:effectLst/>
-                          <a:latin typeface="Microsoft JhengHei" panose="020B0604030504040204" pitchFamily="34" charset="-120"/>
-                          <a:ea typeface="Microsoft JhengHei" panose="020B0604030504040204" pitchFamily="34" charset="-120"/>
-                        </a:rPr>
-                        <a:t>使用者操作</a:t>
-                      </a:r>
-                    </a:p>
-                  </a:txBody>
-                  <a:tcPr marL="81480" marR="81480" marT="37606" marB="37606" anchor="ctr">
-                    <a:lnL w="9525" cap="flat" cmpd="sng" algn="ctr">
-                      <a:solidFill>
-                        <a:srgbClr val="D6D6D6"/>
-                      </a:solidFill>
-                      <a:prstDash val="solid"/>
-                      <a:round/>
-                      <a:headEnd type="none" w="med" len="med"/>
-                      <a:tailEnd type="none" w="med" len="med"/>
-                    </a:lnL>
-                    <a:lnR w="9525" cap="flat" cmpd="sng" algn="ctr">
-                      <a:solidFill>
-                        <a:srgbClr val="D6D6D6"/>
-                      </a:solidFill>
-                      <a:prstDash val="solid"/>
-                      <a:round/>
-                      <a:headEnd type="none" w="med" len="med"/>
-                      <a:tailEnd type="none" w="med" len="med"/>
-                    </a:lnR>
-                    <a:lnT w="9525" cap="flat" cmpd="sng" algn="ctr">
-                      <a:solidFill>
-                        <a:srgbClr val="D6D6D6"/>
-                      </a:solidFill>
-                      <a:prstDash val="solid"/>
-                      <a:round/>
-                      <a:headEnd type="none" w="med" len="med"/>
-                      <a:tailEnd type="none" w="med" len="med"/>
-                    </a:lnT>
-                    <a:lnB w="9525" cap="flat" cmpd="sng" algn="ctr">
-                      <a:solidFill>
-                        <a:srgbClr val="D6D6D6"/>
-                      </a:solidFill>
-                      <a:prstDash val="solid"/>
-                      <a:round/>
-                      <a:headEnd type="none" w="med" len="med"/>
-                      <a:tailEnd type="none" w="med" len="med"/>
-                    </a:lnB>
-                    <a:solidFill>
-                      <a:srgbClr val="FFFFFF"/>
-                    </a:solidFill>
-                  </a:tcPr>
-                </a:tc>
-                <a:tc>
-                  <a:txBody>
-                    <a:bodyPr/>
-                    <a:lstStyle/>
-                    <a:p>
-                      <a:pPr>
-                        <a:buNone/>
-                      </a:pPr>
-                      <a:r>
-                        <a:rPr lang="en" sz="1200">
-                          <a:effectLst/>
-                          <a:latin typeface="Microsoft JhengHei" panose="020B0604030504040204" pitchFamily="34" charset="-120"/>
-                          <a:ea typeface="Microsoft JhengHei" panose="020B0604030504040204" pitchFamily="34" charset="-120"/>
-                        </a:rPr>
-                        <a:t>User → InfoGather Web</a:t>
-                      </a:r>
-                    </a:p>
-                  </a:txBody>
-                  <a:tcPr marL="81480" marR="81480" marT="37606" marB="37606" anchor="ctr">
-                    <a:lnL w="9525" cap="flat" cmpd="sng" algn="ctr">
-                      <a:solidFill>
-                        <a:srgbClr val="D6D6D6"/>
-                      </a:solidFill>
-                      <a:prstDash val="solid"/>
-                      <a:round/>
-                      <a:headEnd type="none" w="med" len="med"/>
-                      <a:tailEnd type="none" w="med" len="med"/>
-                    </a:lnL>
-                    <a:lnR w="9525" cap="flat" cmpd="sng" algn="ctr">
-                      <a:solidFill>
-                        <a:srgbClr val="D6D6D6"/>
-                      </a:solidFill>
-                      <a:prstDash val="solid"/>
-                      <a:round/>
-                      <a:headEnd type="none" w="med" len="med"/>
-                      <a:tailEnd type="none" w="med" len="med"/>
-                    </a:lnR>
-                    <a:lnT w="9525" cap="flat" cmpd="sng" algn="ctr">
-                      <a:solidFill>
-                        <a:srgbClr val="D6D6D6"/>
-                      </a:solidFill>
-                      <a:prstDash val="solid"/>
-                      <a:round/>
-                      <a:headEnd type="none" w="med" len="med"/>
-                      <a:tailEnd type="none" w="med" len="med"/>
-                    </a:lnT>
-                    <a:lnB w="9525" cap="flat" cmpd="sng" algn="ctr">
-                      <a:solidFill>
-                        <a:srgbClr val="D6D6D6"/>
-                      </a:solidFill>
-                      <a:prstDash val="solid"/>
-                      <a:round/>
-                      <a:headEnd type="none" w="med" len="med"/>
-                      <a:tailEnd type="none" w="med" len="med"/>
-                    </a:lnB>
-                    <a:solidFill>
-                      <a:srgbClr val="FFFFFF"/>
-                    </a:solidFill>
-                  </a:tcPr>
-                </a:tc>
-                <a:tc>
-                  <a:txBody>
-                    <a:bodyPr/>
-                    <a:lstStyle/>
-                    <a:p>
-                      <a:pPr>
-                        <a:buNone/>
-                      </a:pPr>
-                      <a:r>
-                        <a:rPr lang="zh-TW" altLang="en-US" sz="1200">
-                          <a:effectLst/>
-                          <a:latin typeface="Microsoft JhengHei" panose="020B0604030504040204" pitchFamily="34" charset="-120"/>
-                          <a:ea typeface="Microsoft JhengHei" panose="020B0604030504040204" pitchFamily="34" charset="-120"/>
-                        </a:rPr>
-                        <a:t>使用者在前端介面發出操作</a:t>
-                      </a:r>
-                    </a:p>
-                  </a:txBody>
-                  <a:tcPr marL="81480" marR="81480" marT="37606" marB="37606" anchor="ctr">
-                    <a:lnL w="9525" cap="flat" cmpd="sng" algn="ctr">
-                      <a:solidFill>
-                        <a:srgbClr val="D6D6D6"/>
-                      </a:solidFill>
-                      <a:prstDash val="solid"/>
-                      <a:round/>
-                      <a:headEnd type="none" w="med" len="med"/>
-                      <a:tailEnd type="none" w="med" len="med"/>
-                    </a:lnL>
-                    <a:lnR w="9525" cap="flat" cmpd="sng" algn="ctr">
-                      <a:solidFill>
-                        <a:srgbClr val="D6D6D6"/>
-                      </a:solidFill>
-                      <a:prstDash val="solid"/>
-                      <a:round/>
-                      <a:headEnd type="none" w="med" len="med"/>
-                      <a:tailEnd type="none" w="med" len="med"/>
-                    </a:lnR>
-                    <a:lnT w="9525" cap="flat" cmpd="sng" algn="ctr">
-                      <a:solidFill>
-                        <a:srgbClr val="D6D6D6"/>
-                      </a:solidFill>
-                      <a:prstDash val="solid"/>
-                      <a:round/>
-                      <a:headEnd type="none" w="med" len="med"/>
-                      <a:tailEnd type="none" w="med" len="med"/>
-                    </a:lnT>
-                    <a:lnB w="9525" cap="flat" cmpd="sng" algn="ctr">
-                      <a:solidFill>
-                        <a:srgbClr val="D6D6D6"/>
-                      </a:solidFill>
-                      <a:prstDash val="solid"/>
-                      <a:round/>
-                      <a:headEnd type="none" w="med" len="med"/>
-                      <a:tailEnd type="none" w="med" len="med"/>
-                    </a:lnB>
-                    <a:solidFill>
-                      <a:srgbClr val="FFFFFF"/>
-                    </a:solidFill>
-                  </a:tcPr>
-                </a:tc>
-                <a:extLst>
-                  <a:ext uri="{0D108BD9-81ED-4DB2-BD59-A6C34878D82A}">
-                    <a16:rowId xmlns:a16="http://schemas.microsoft.com/office/drawing/2014/main" val="3771899495"/>
-                  </a:ext>
-                </a:extLst>
-              </a:tr>
-              <a:tr h="227566">
-                <a:tc>
-                  <a:txBody>
-                    <a:bodyPr/>
-                    <a:lstStyle/>
-                    <a:p>
-                      <a:pPr>
-                        <a:buNone/>
-                      </a:pPr>
-                      <a:r>
-                        <a:rPr lang="en-US" altLang="zh-TW" sz="1200" dirty="0">
-                          <a:effectLst/>
-                          <a:latin typeface="Microsoft JhengHei" panose="020B0604030504040204" pitchFamily="34" charset="-120"/>
-                          <a:ea typeface="Microsoft JhengHei" panose="020B0604030504040204" pitchFamily="34" charset="-120"/>
-                        </a:rPr>
-                        <a:t>② </a:t>
-                      </a:r>
-                      <a:r>
-                        <a:rPr lang="zh-TW" altLang="en-US" sz="1200" dirty="0">
-                          <a:effectLst/>
-                          <a:latin typeface="Microsoft JhengHei" panose="020B0604030504040204" pitchFamily="34" charset="-120"/>
-                          <a:ea typeface="Microsoft JhengHei" panose="020B0604030504040204" pitchFamily="34" charset="-120"/>
-                        </a:rPr>
-                        <a:t>前後端互動</a:t>
-                      </a:r>
-                    </a:p>
-                  </a:txBody>
-                  <a:tcPr marL="81480" marR="81480" marT="37606" marB="37606" anchor="ctr">
-                    <a:lnL w="9525" cap="flat" cmpd="sng" algn="ctr">
-                      <a:solidFill>
-                        <a:srgbClr val="D6D6D6"/>
-                      </a:solidFill>
-                      <a:prstDash val="solid"/>
-                      <a:round/>
-                      <a:headEnd type="none" w="med" len="med"/>
-                      <a:tailEnd type="none" w="med" len="med"/>
-                    </a:lnL>
-                    <a:lnR w="9525" cap="flat" cmpd="sng" algn="ctr">
-                      <a:solidFill>
-                        <a:srgbClr val="D6D6D6"/>
-                      </a:solidFill>
-                      <a:prstDash val="solid"/>
-                      <a:round/>
-                      <a:headEnd type="none" w="med" len="med"/>
-                      <a:tailEnd type="none" w="med" len="med"/>
-                    </a:lnR>
-                    <a:lnT w="9525" cap="flat" cmpd="sng" algn="ctr">
-                      <a:solidFill>
-                        <a:srgbClr val="D6D6D6"/>
-                      </a:solidFill>
-                      <a:prstDash val="solid"/>
-                      <a:round/>
-                      <a:headEnd type="none" w="med" len="med"/>
-                      <a:tailEnd type="none" w="med" len="med"/>
-                    </a:lnT>
-                    <a:lnB w="9525" cap="flat" cmpd="sng" algn="ctr">
-                      <a:solidFill>
-                        <a:srgbClr val="D6D6D6"/>
-                      </a:solidFill>
-                      <a:prstDash val="solid"/>
-                      <a:round/>
-                      <a:headEnd type="none" w="med" len="med"/>
-                      <a:tailEnd type="none" w="med" len="med"/>
-                    </a:lnB>
-                    <a:solidFill>
-                      <a:srgbClr val="FFFFFF"/>
-                    </a:solidFill>
-                  </a:tcPr>
-                </a:tc>
-                <a:tc>
-                  <a:txBody>
-                    <a:bodyPr/>
-                    <a:lstStyle/>
-                    <a:p>
-                      <a:pPr>
-                        <a:buNone/>
-                      </a:pPr>
-                      <a:r>
-                        <a:rPr lang="en" sz="1200" dirty="0" err="1">
-                          <a:effectLst/>
-                          <a:latin typeface="Microsoft JhengHei" panose="020B0604030504040204" pitchFamily="34" charset="-120"/>
-                          <a:ea typeface="Microsoft JhengHei" panose="020B0604030504040204" pitchFamily="34" charset="-120"/>
-                        </a:rPr>
-                        <a:t>InfoGather</a:t>
-                      </a:r>
-                      <a:r>
-                        <a:rPr lang="en" sz="1200" dirty="0">
-                          <a:effectLst/>
-                          <a:latin typeface="Microsoft JhengHei" panose="020B0604030504040204" pitchFamily="34" charset="-120"/>
-                          <a:ea typeface="Microsoft JhengHei" panose="020B0604030504040204" pitchFamily="34" charset="-120"/>
-                        </a:rPr>
-                        <a:t> Web → </a:t>
-                      </a:r>
-                      <a:r>
-                        <a:rPr lang="en" sz="1200" dirty="0" err="1">
-                          <a:effectLst/>
-                          <a:latin typeface="Microsoft JhengHei" panose="020B0604030504040204" pitchFamily="34" charset="-120"/>
-                          <a:ea typeface="Microsoft JhengHei" panose="020B0604030504040204" pitchFamily="34" charset="-120"/>
-                        </a:rPr>
-                        <a:t>InfoGather</a:t>
-                      </a:r>
-                      <a:r>
-                        <a:rPr lang="en" sz="1200" dirty="0">
-                          <a:effectLst/>
-                          <a:latin typeface="Microsoft JhengHei" panose="020B0604030504040204" pitchFamily="34" charset="-120"/>
-                          <a:ea typeface="Microsoft JhengHei" panose="020B0604030504040204" pitchFamily="34" charset="-120"/>
-                        </a:rPr>
-                        <a:t> API</a:t>
-                      </a:r>
-                    </a:p>
-                  </a:txBody>
-                  <a:tcPr marL="81480" marR="81480" marT="37606" marB="37606" anchor="ctr">
-                    <a:lnL w="9525" cap="flat" cmpd="sng" algn="ctr">
-                      <a:solidFill>
-                        <a:srgbClr val="D6D6D6"/>
-                      </a:solidFill>
-                      <a:prstDash val="solid"/>
-                      <a:round/>
-                      <a:headEnd type="none" w="med" len="med"/>
-                      <a:tailEnd type="none" w="med" len="med"/>
-                    </a:lnL>
-                    <a:lnR w="9525" cap="flat" cmpd="sng" algn="ctr">
-                      <a:solidFill>
-                        <a:srgbClr val="D6D6D6"/>
-                      </a:solidFill>
-                      <a:prstDash val="solid"/>
-                      <a:round/>
-                      <a:headEnd type="none" w="med" len="med"/>
-                      <a:tailEnd type="none" w="med" len="med"/>
-                    </a:lnR>
-                    <a:lnT w="9525" cap="flat" cmpd="sng" algn="ctr">
-                      <a:solidFill>
-                        <a:srgbClr val="D6D6D6"/>
-                      </a:solidFill>
-                      <a:prstDash val="solid"/>
-                      <a:round/>
-                      <a:headEnd type="none" w="med" len="med"/>
-                      <a:tailEnd type="none" w="med" len="med"/>
-                    </a:lnT>
-                    <a:lnB w="9525" cap="flat" cmpd="sng" algn="ctr">
-                      <a:solidFill>
-                        <a:srgbClr val="D6D6D6"/>
-                      </a:solidFill>
-                      <a:prstDash val="solid"/>
-                      <a:round/>
-                      <a:headEnd type="none" w="med" len="med"/>
-                      <a:tailEnd type="none" w="med" len="med"/>
-                    </a:lnB>
-                    <a:solidFill>
-                      <a:srgbClr val="FFFFFF"/>
-                    </a:solidFill>
-                  </a:tcPr>
-                </a:tc>
-                <a:tc>
-                  <a:txBody>
-                    <a:bodyPr/>
-                    <a:lstStyle/>
-                    <a:p>
-                      <a:pPr>
-                        <a:buNone/>
-                      </a:pPr>
-                      <a:r>
-                        <a:rPr lang="zh-TW" altLang="en-US" sz="1200">
-                          <a:effectLst/>
-                          <a:latin typeface="Microsoft JhengHei" panose="020B0604030504040204" pitchFamily="34" charset="-120"/>
-                          <a:ea typeface="Microsoft JhengHei" panose="020B0604030504040204" pitchFamily="34" charset="-120"/>
-                        </a:rPr>
-                        <a:t>前端呼叫 </a:t>
-                      </a:r>
-                      <a:r>
-                        <a:rPr lang="en" sz="1200">
-                          <a:effectLst/>
-                          <a:latin typeface="Microsoft JhengHei" panose="020B0604030504040204" pitchFamily="34" charset="-120"/>
-                          <a:ea typeface="Microsoft JhengHei" panose="020B0604030504040204" pitchFamily="34" charset="-120"/>
-                        </a:rPr>
-                        <a:t>API </a:t>
-                      </a:r>
-                      <a:r>
-                        <a:rPr lang="zh-TW" altLang="en-US" sz="1200">
-                          <a:effectLst/>
-                          <a:latin typeface="Microsoft JhengHei" panose="020B0604030504040204" pitchFamily="34" charset="-120"/>
-                          <a:ea typeface="Microsoft JhengHei" panose="020B0604030504040204" pitchFamily="34" charset="-120"/>
-                        </a:rPr>
-                        <a:t>取得資料或提交設定</a:t>
-                      </a:r>
-                    </a:p>
-                  </a:txBody>
-                  <a:tcPr marL="81480" marR="81480" marT="37606" marB="37606" anchor="ctr">
-                    <a:lnL w="9525" cap="flat" cmpd="sng" algn="ctr">
-                      <a:solidFill>
-                        <a:srgbClr val="D6D6D6"/>
-                      </a:solidFill>
-                      <a:prstDash val="solid"/>
-                      <a:round/>
-                      <a:headEnd type="none" w="med" len="med"/>
-                      <a:tailEnd type="none" w="med" len="med"/>
-                    </a:lnL>
-                    <a:lnR w="9525" cap="flat" cmpd="sng" algn="ctr">
-                      <a:solidFill>
-                        <a:srgbClr val="D6D6D6"/>
-                      </a:solidFill>
-                      <a:prstDash val="solid"/>
-                      <a:round/>
-                      <a:headEnd type="none" w="med" len="med"/>
-                      <a:tailEnd type="none" w="med" len="med"/>
-                    </a:lnR>
-                    <a:lnT w="9525" cap="flat" cmpd="sng" algn="ctr">
-                      <a:solidFill>
-                        <a:srgbClr val="D6D6D6"/>
-                      </a:solidFill>
-                      <a:prstDash val="solid"/>
-                      <a:round/>
-                      <a:headEnd type="none" w="med" len="med"/>
-                      <a:tailEnd type="none" w="med" len="med"/>
-                    </a:lnT>
-                    <a:lnB w="9525" cap="flat" cmpd="sng" algn="ctr">
-                      <a:solidFill>
-                        <a:srgbClr val="D6D6D6"/>
-                      </a:solidFill>
-                      <a:prstDash val="solid"/>
-                      <a:round/>
-                      <a:headEnd type="none" w="med" len="med"/>
-                      <a:tailEnd type="none" w="med" len="med"/>
-                    </a:lnB>
-                    <a:solidFill>
-                      <a:srgbClr val="FFFFFF"/>
-                    </a:solidFill>
-                  </a:tcPr>
-                </a:tc>
-                <a:extLst>
-                  <a:ext uri="{0D108BD9-81ED-4DB2-BD59-A6C34878D82A}">
-                    <a16:rowId xmlns:a16="http://schemas.microsoft.com/office/drawing/2014/main" val="208288365"/>
-                  </a:ext>
-                </a:extLst>
-              </a:tr>
-              <a:tr h="243652">
-                <a:tc>
-                  <a:txBody>
-                    <a:bodyPr/>
-                    <a:lstStyle/>
-                    <a:p>
-                      <a:pPr>
-                        <a:buNone/>
-                      </a:pPr>
-                      <a:r>
-                        <a:rPr lang="en-US" altLang="zh-TW" sz="1200" dirty="0">
-                          <a:effectLst/>
-                          <a:latin typeface="Microsoft JhengHei" panose="020B0604030504040204" pitchFamily="34" charset="-120"/>
-                          <a:ea typeface="Microsoft JhengHei" panose="020B0604030504040204" pitchFamily="34" charset="-120"/>
-                        </a:rPr>
-                        <a:t>③ </a:t>
-                      </a:r>
-                      <a:r>
-                        <a:rPr lang="zh-TW" altLang="en-US" sz="1200" dirty="0">
-                          <a:effectLst/>
-                          <a:latin typeface="Microsoft JhengHei" panose="020B0604030504040204" pitchFamily="34" charset="-120"/>
-                          <a:ea typeface="Microsoft JhengHei" panose="020B0604030504040204" pitchFamily="34" charset="-120"/>
-                        </a:rPr>
-                        <a:t>資料擷取</a:t>
-                      </a:r>
-                    </a:p>
-                  </a:txBody>
-                  <a:tcPr marL="81480" marR="81480" marT="37606" marB="37606" anchor="ctr">
-                    <a:lnL w="9525" cap="flat" cmpd="sng" algn="ctr">
-                      <a:solidFill>
-                        <a:srgbClr val="D6D6D6"/>
-                      </a:solidFill>
-                      <a:prstDash val="solid"/>
-                      <a:round/>
-                      <a:headEnd type="none" w="med" len="med"/>
-                      <a:tailEnd type="none" w="med" len="med"/>
-                    </a:lnL>
-                    <a:lnR w="9525" cap="flat" cmpd="sng" algn="ctr">
-                      <a:solidFill>
-                        <a:srgbClr val="D6D6D6"/>
-                      </a:solidFill>
-                      <a:prstDash val="solid"/>
-                      <a:round/>
-                      <a:headEnd type="none" w="med" len="med"/>
-                      <a:tailEnd type="none" w="med" len="med"/>
-                    </a:lnR>
-                    <a:lnT w="9525" cap="flat" cmpd="sng" algn="ctr">
-                      <a:solidFill>
-                        <a:srgbClr val="D6D6D6"/>
-                      </a:solidFill>
-                      <a:prstDash val="solid"/>
-                      <a:round/>
-                      <a:headEnd type="none" w="med" len="med"/>
-                      <a:tailEnd type="none" w="med" len="med"/>
-                    </a:lnT>
-                    <a:lnB w="9525" cap="flat" cmpd="sng" algn="ctr">
-                      <a:solidFill>
-                        <a:srgbClr val="D6D6D6"/>
-                      </a:solidFill>
-                      <a:prstDash val="solid"/>
-                      <a:round/>
-                      <a:headEnd type="none" w="med" len="med"/>
-                      <a:tailEnd type="none" w="med" len="med"/>
-                    </a:lnB>
-                    <a:solidFill>
-                      <a:srgbClr val="FFFFFF"/>
-                    </a:solidFill>
-                  </a:tcPr>
-                </a:tc>
-                <a:tc>
-                  <a:txBody>
-                    <a:bodyPr/>
-                    <a:lstStyle/>
-                    <a:p>
-                      <a:pPr>
-                        <a:buNone/>
-                      </a:pPr>
-                      <a:r>
-                        <a:rPr lang="en" sz="1200" dirty="0">
-                          <a:effectLst/>
-                          <a:latin typeface="Microsoft JhengHei" panose="020B0604030504040204" pitchFamily="34" charset="-120"/>
-                          <a:ea typeface="Microsoft JhengHei" panose="020B0604030504040204" pitchFamily="34" charset="-120"/>
-                        </a:rPr>
-                        <a:t>Data Sources → </a:t>
-                      </a:r>
-                      <a:r>
-                        <a:rPr lang="en" sz="1200" dirty="0" err="1">
-                          <a:effectLst/>
-                          <a:latin typeface="Microsoft JhengHei" panose="020B0604030504040204" pitchFamily="34" charset="-120"/>
-                          <a:ea typeface="Microsoft JhengHei" panose="020B0604030504040204" pitchFamily="34" charset="-120"/>
-                        </a:rPr>
-                        <a:t>InfoGather</a:t>
-                      </a:r>
-                      <a:r>
-                        <a:rPr lang="en" sz="1200" dirty="0">
-                          <a:effectLst/>
-                          <a:latin typeface="Microsoft JhengHei" panose="020B0604030504040204" pitchFamily="34" charset="-120"/>
-                          <a:ea typeface="Microsoft JhengHei" panose="020B0604030504040204" pitchFamily="34" charset="-120"/>
-                        </a:rPr>
-                        <a:t> API / Scheduler</a:t>
-                      </a:r>
-                    </a:p>
-                  </a:txBody>
-                  <a:tcPr marL="81480" marR="81480" marT="37606" marB="37606" anchor="ctr">
-                    <a:lnL w="9525" cap="flat" cmpd="sng" algn="ctr">
-                      <a:solidFill>
-                        <a:srgbClr val="D6D6D6"/>
-                      </a:solidFill>
-                      <a:prstDash val="solid"/>
-                      <a:round/>
-                      <a:headEnd type="none" w="med" len="med"/>
-                      <a:tailEnd type="none" w="med" len="med"/>
-                    </a:lnL>
-                    <a:lnR w="9525" cap="flat" cmpd="sng" algn="ctr">
-                      <a:solidFill>
-                        <a:srgbClr val="D6D6D6"/>
-                      </a:solidFill>
-                      <a:prstDash val="solid"/>
-                      <a:round/>
-                      <a:headEnd type="none" w="med" len="med"/>
-                      <a:tailEnd type="none" w="med" len="med"/>
-                    </a:lnR>
-                    <a:lnT w="9525" cap="flat" cmpd="sng" algn="ctr">
-                      <a:solidFill>
-                        <a:srgbClr val="D6D6D6"/>
-                      </a:solidFill>
-                      <a:prstDash val="solid"/>
-                      <a:round/>
-                      <a:headEnd type="none" w="med" len="med"/>
-                      <a:tailEnd type="none" w="med" len="med"/>
-                    </a:lnT>
-                    <a:lnB w="9525" cap="flat" cmpd="sng" algn="ctr">
-                      <a:solidFill>
-                        <a:srgbClr val="D6D6D6"/>
-                      </a:solidFill>
-                      <a:prstDash val="solid"/>
-                      <a:round/>
-                      <a:headEnd type="none" w="med" len="med"/>
-                      <a:tailEnd type="none" w="med" len="med"/>
-                    </a:lnB>
-                    <a:solidFill>
-                      <a:srgbClr val="FFFFFF"/>
-                    </a:solidFill>
-                  </a:tcPr>
-                </a:tc>
-                <a:tc>
-                  <a:txBody>
-                    <a:bodyPr/>
-                    <a:lstStyle/>
-                    <a:p>
-                      <a:pPr>
-                        <a:buNone/>
-                      </a:pPr>
-                      <a:r>
-                        <a:rPr lang="zh-TW" altLang="en-US" sz="1200">
-                          <a:effectLst/>
-                          <a:latin typeface="Microsoft JhengHei" panose="020B0604030504040204" pitchFamily="34" charset="-120"/>
-                          <a:ea typeface="Microsoft JhengHei" panose="020B0604030504040204" pitchFamily="34" charset="-120"/>
-                        </a:rPr>
-                        <a:t>外部來源提供文章與資料，系統定期拉取</a:t>
-                      </a:r>
-                    </a:p>
-                  </a:txBody>
-                  <a:tcPr marL="81480" marR="81480" marT="37606" marB="37606" anchor="ctr">
-                    <a:lnL w="9525" cap="flat" cmpd="sng" algn="ctr">
-                      <a:solidFill>
-                        <a:srgbClr val="D6D6D6"/>
-                      </a:solidFill>
-                      <a:prstDash val="solid"/>
-                      <a:round/>
-                      <a:headEnd type="none" w="med" len="med"/>
-                      <a:tailEnd type="none" w="med" len="med"/>
-                    </a:lnL>
-                    <a:lnR w="9525" cap="flat" cmpd="sng" algn="ctr">
-                      <a:solidFill>
-                        <a:srgbClr val="D6D6D6"/>
-                      </a:solidFill>
-                      <a:prstDash val="solid"/>
-                      <a:round/>
-                      <a:headEnd type="none" w="med" len="med"/>
-                      <a:tailEnd type="none" w="med" len="med"/>
-                    </a:lnR>
-                    <a:lnT w="9525" cap="flat" cmpd="sng" algn="ctr">
-                      <a:solidFill>
-                        <a:srgbClr val="D6D6D6"/>
-                      </a:solidFill>
-                      <a:prstDash val="solid"/>
-                      <a:round/>
-                      <a:headEnd type="none" w="med" len="med"/>
-                      <a:tailEnd type="none" w="med" len="med"/>
-                    </a:lnT>
-                    <a:lnB w="9525" cap="flat" cmpd="sng" algn="ctr">
-                      <a:solidFill>
-                        <a:srgbClr val="D6D6D6"/>
-                      </a:solidFill>
-                      <a:prstDash val="solid"/>
-                      <a:round/>
-                      <a:headEnd type="none" w="med" len="med"/>
-                      <a:tailEnd type="none" w="med" len="med"/>
-                    </a:lnB>
-                    <a:solidFill>
-                      <a:srgbClr val="FFFFFF"/>
-                    </a:solidFill>
-                  </a:tcPr>
-                </a:tc>
-                <a:extLst>
-                  <a:ext uri="{0D108BD9-81ED-4DB2-BD59-A6C34878D82A}">
-                    <a16:rowId xmlns:a16="http://schemas.microsoft.com/office/drawing/2014/main" val="3654243204"/>
-                  </a:ext>
-                </a:extLst>
-              </a:tr>
-              <a:tr h="227566">
-                <a:tc>
-                  <a:txBody>
-                    <a:bodyPr/>
-                    <a:lstStyle/>
-                    <a:p>
-                      <a:pPr>
-                        <a:buNone/>
-                      </a:pPr>
-                      <a:r>
-                        <a:rPr lang="en-US" altLang="zh-TW" sz="1200" dirty="0">
-                          <a:effectLst/>
-                          <a:latin typeface="Microsoft JhengHei" panose="020B0604030504040204" pitchFamily="34" charset="-120"/>
-                          <a:ea typeface="Microsoft JhengHei" panose="020B0604030504040204" pitchFamily="34" charset="-120"/>
-                        </a:rPr>
-                        <a:t>④ </a:t>
-                      </a:r>
-                      <a:r>
-                        <a:rPr lang="zh-TW" altLang="en-US" sz="1200" dirty="0">
-                          <a:effectLst/>
-                          <a:latin typeface="Microsoft JhengHei" panose="020B0604030504040204" pitchFamily="34" charset="-120"/>
-                          <a:ea typeface="Microsoft JhengHei" panose="020B0604030504040204" pitchFamily="34" charset="-120"/>
-                        </a:rPr>
-                        <a:t>任務排程</a:t>
-                      </a:r>
-                    </a:p>
-                  </a:txBody>
-                  <a:tcPr marL="81480" marR="81480" marT="37606" marB="37606" anchor="ctr">
-                    <a:lnL w="9525" cap="flat" cmpd="sng" algn="ctr">
-                      <a:solidFill>
-                        <a:srgbClr val="D6D6D6"/>
-                      </a:solidFill>
-                      <a:prstDash val="solid"/>
-                      <a:round/>
-                      <a:headEnd type="none" w="med" len="med"/>
-                      <a:tailEnd type="none" w="med" len="med"/>
-                    </a:lnL>
-                    <a:lnR w="9525" cap="flat" cmpd="sng" algn="ctr">
-                      <a:solidFill>
-                        <a:srgbClr val="D6D6D6"/>
-                      </a:solidFill>
-                      <a:prstDash val="solid"/>
-                      <a:round/>
-                      <a:headEnd type="none" w="med" len="med"/>
-                      <a:tailEnd type="none" w="med" len="med"/>
-                    </a:lnR>
-                    <a:lnT w="9525" cap="flat" cmpd="sng" algn="ctr">
-                      <a:solidFill>
-                        <a:srgbClr val="D6D6D6"/>
-                      </a:solidFill>
-                      <a:prstDash val="solid"/>
-                      <a:round/>
-                      <a:headEnd type="none" w="med" len="med"/>
-                      <a:tailEnd type="none" w="med" len="med"/>
-                    </a:lnT>
-                    <a:lnB w="9525" cap="flat" cmpd="sng" algn="ctr">
-                      <a:solidFill>
-                        <a:srgbClr val="D6D6D6"/>
-                      </a:solidFill>
-                      <a:prstDash val="solid"/>
-                      <a:round/>
-                      <a:headEnd type="none" w="med" len="med"/>
-                      <a:tailEnd type="none" w="med" len="med"/>
-                    </a:lnB>
-                    <a:solidFill>
-                      <a:srgbClr val="FFFFFF"/>
-                    </a:solidFill>
-                  </a:tcPr>
-                </a:tc>
-                <a:tc>
-                  <a:txBody>
-                    <a:bodyPr/>
-                    <a:lstStyle/>
-                    <a:p>
-                      <a:pPr>
-                        <a:buNone/>
-                      </a:pPr>
-                      <a:r>
-                        <a:rPr lang="en" sz="1200" dirty="0">
-                          <a:effectLst/>
-                          <a:latin typeface="Microsoft JhengHei" panose="020B0604030504040204" pitchFamily="34" charset="-120"/>
-                          <a:ea typeface="Microsoft JhengHei" panose="020B0604030504040204" pitchFamily="34" charset="-120"/>
-                        </a:rPr>
-                        <a:t>Scheduler → Redis</a:t>
-                      </a:r>
-                    </a:p>
-                  </a:txBody>
-                  <a:tcPr marL="81480" marR="81480" marT="37606" marB="37606" anchor="ctr">
-                    <a:lnL w="9525" cap="flat" cmpd="sng" algn="ctr">
-                      <a:solidFill>
-                        <a:srgbClr val="D6D6D6"/>
-                      </a:solidFill>
-                      <a:prstDash val="solid"/>
-                      <a:round/>
-                      <a:headEnd type="none" w="med" len="med"/>
-                      <a:tailEnd type="none" w="med" len="med"/>
-                    </a:lnL>
-                    <a:lnR w="9525" cap="flat" cmpd="sng" algn="ctr">
-                      <a:solidFill>
-                        <a:srgbClr val="D6D6D6"/>
-                      </a:solidFill>
-                      <a:prstDash val="solid"/>
-                      <a:round/>
-                      <a:headEnd type="none" w="med" len="med"/>
-                      <a:tailEnd type="none" w="med" len="med"/>
-                    </a:lnR>
-                    <a:lnT w="9525" cap="flat" cmpd="sng" algn="ctr">
-                      <a:solidFill>
-                        <a:srgbClr val="D6D6D6"/>
-                      </a:solidFill>
-                      <a:prstDash val="solid"/>
-                      <a:round/>
-                      <a:headEnd type="none" w="med" len="med"/>
-                      <a:tailEnd type="none" w="med" len="med"/>
-                    </a:lnT>
-                    <a:lnB w="9525" cap="flat" cmpd="sng" algn="ctr">
-                      <a:solidFill>
-                        <a:srgbClr val="D6D6D6"/>
-                      </a:solidFill>
-                      <a:prstDash val="solid"/>
-                      <a:round/>
-                      <a:headEnd type="none" w="med" len="med"/>
-                      <a:tailEnd type="none" w="med" len="med"/>
-                    </a:lnB>
-                    <a:solidFill>
-                      <a:srgbClr val="FFFFFF"/>
-                    </a:solidFill>
-                  </a:tcPr>
-                </a:tc>
-                <a:tc>
-                  <a:txBody>
-                    <a:bodyPr/>
-                    <a:lstStyle/>
-                    <a:p>
-                      <a:pPr>
-                        <a:buNone/>
-                      </a:pPr>
-                      <a:r>
-                        <a:rPr lang="zh-TW" altLang="en-US" sz="1200">
-                          <a:effectLst/>
-                          <a:latin typeface="Microsoft JhengHei" panose="020B0604030504040204" pitchFamily="34" charset="-120"/>
-                          <a:ea typeface="Microsoft JhengHei" panose="020B0604030504040204" pitchFamily="34" charset="-120"/>
-                        </a:rPr>
-                        <a:t>排程器把要執行的工作送進佇列</a:t>
-                      </a:r>
-                    </a:p>
-                  </a:txBody>
-                  <a:tcPr marL="81480" marR="81480" marT="37606" marB="37606" anchor="ctr">
-                    <a:lnL w="9525" cap="flat" cmpd="sng" algn="ctr">
-                      <a:solidFill>
-                        <a:srgbClr val="D6D6D6"/>
-                      </a:solidFill>
-                      <a:prstDash val="solid"/>
-                      <a:round/>
-                      <a:headEnd type="none" w="med" len="med"/>
-                      <a:tailEnd type="none" w="med" len="med"/>
-                    </a:lnL>
-                    <a:lnR w="9525" cap="flat" cmpd="sng" algn="ctr">
-                      <a:solidFill>
-                        <a:srgbClr val="D6D6D6"/>
-                      </a:solidFill>
-                      <a:prstDash val="solid"/>
-                      <a:round/>
-                      <a:headEnd type="none" w="med" len="med"/>
-                      <a:tailEnd type="none" w="med" len="med"/>
-                    </a:lnR>
-                    <a:lnT w="9525" cap="flat" cmpd="sng" algn="ctr">
-                      <a:solidFill>
-                        <a:srgbClr val="D6D6D6"/>
-                      </a:solidFill>
-                      <a:prstDash val="solid"/>
-                      <a:round/>
-                      <a:headEnd type="none" w="med" len="med"/>
-                      <a:tailEnd type="none" w="med" len="med"/>
-                    </a:lnT>
-                    <a:lnB w="9525" cap="flat" cmpd="sng" algn="ctr">
-                      <a:solidFill>
-                        <a:srgbClr val="D6D6D6"/>
-                      </a:solidFill>
-                      <a:prstDash val="solid"/>
-                      <a:round/>
-                      <a:headEnd type="none" w="med" len="med"/>
-                      <a:tailEnd type="none" w="med" len="med"/>
-                    </a:lnB>
-                    <a:solidFill>
-                      <a:srgbClr val="FFFFFF"/>
-                    </a:solidFill>
-                  </a:tcPr>
-                </a:tc>
-                <a:extLst>
-                  <a:ext uri="{0D108BD9-81ED-4DB2-BD59-A6C34878D82A}">
-                    <a16:rowId xmlns:a16="http://schemas.microsoft.com/office/drawing/2014/main" val="3611464877"/>
-                  </a:ext>
-                </a:extLst>
-              </a:tr>
-              <a:tr h="227566">
-                <a:tc>
-                  <a:txBody>
-                    <a:bodyPr/>
-                    <a:lstStyle/>
-                    <a:p>
-                      <a:pPr>
-                        <a:buNone/>
-                      </a:pPr>
-                      <a:r>
-                        <a:rPr lang="en-US" altLang="zh-TW" sz="1200" dirty="0">
-                          <a:effectLst/>
-                          <a:latin typeface="Microsoft JhengHei" panose="020B0604030504040204" pitchFamily="34" charset="-120"/>
-                          <a:ea typeface="Microsoft JhengHei" panose="020B0604030504040204" pitchFamily="34" charset="-120"/>
-                        </a:rPr>
-                        <a:t>⑤ </a:t>
-                      </a:r>
-                      <a:r>
-                        <a:rPr lang="zh-TW" altLang="en-US" sz="1200" dirty="0">
-                          <a:effectLst/>
-                          <a:latin typeface="Microsoft JhengHei" panose="020B0604030504040204" pitchFamily="34" charset="-120"/>
-                          <a:ea typeface="Microsoft JhengHei" panose="020B0604030504040204" pitchFamily="34" charset="-120"/>
-                        </a:rPr>
-                        <a:t>背景處理</a:t>
-                      </a:r>
-                    </a:p>
-                  </a:txBody>
-                  <a:tcPr marL="81480" marR="81480" marT="37606" marB="37606" anchor="ctr">
-                    <a:lnL w="9525" cap="flat" cmpd="sng" algn="ctr">
-                      <a:solidFill>
-                        <a:srgbClr val="D6D6D6"/>
-                      </a:solidFill>
-                      <a:prstDash val="solid"/>
-                      <a:round/>
-                      <a:headEnd type="none" w="med" len="med"/>
-                      <a:tailEnd type="none" w="med" len="med"/>
-                    </a:lnL>
-                    <a:lnR w="9525" cap="flat" cmpd="sng" algn="ctr">
-                      <a:solidFill>
-                        <a:srgbClr val="D6D6D6"/>
-                      </a:solidFill>
-                      <a:prstDash val="solid"/>
-                      <a:round/>
-                      <a:headEnd type="none" w="med" len="med"/>
-                      <a:tailEnd type="none" w="med" len="med"/>
-                    </a:lnR>
-                    <a:lnT w="9525" cap="flat" cmpd="sng" algn="ctr">
-                      <a:solidFill>
-                        <a:srgbClr val="D6D6D6"/>
-                      </a:solidFill>
-                      <a:prstDash val="solid"/>
-                      <a:round/>
-                      <a:headEnd type="none" w="med" len="med"/>
-                      <a:tailEnd type="none" w="med" len="med"/>
-                    </a:lnT>
-                    <a:lnB w="9525" cap="flat" cmpd="sng" algn="ctr">
-                      <a:solidFill>
-                        <a:srgbClr val="D6D6D6"/>
-                      </a:solidFill>
-                      <a:prstDash val="solid"/>
-                      <a:round/>
-                      <a:headEnd type="none" w="med" len="med"/>
-                      <a:tailEnd type="none" w="med" len="med"/>
-                    </a:lnB>
-                    <a:solidFill>
-                      <a:srgbClr val="FFFFFF"/>
-                    </a:solidFill>
-                  </a:tcPr>
-                </a:tc>
-                <a:tc>
-                  <a:txBody>
-                    <a:bodyPr/>
-                    <a:lstStyle/>
-                    <a:p>
-                      <a:pPr>
-                        <a:buNone/>
-                      </a:pPr>
-                      <a:r>
-                        <a:rPr lang="en" sz="1200" dirty="0">
-                          <a:effectLst/>
-                          <a:latin typeface="Microsoft JhengHei" panose="020B0604030504040204" pitchFamily="34" charset="-120"/>
-                          <a:ea typeface="Microsoft JhengHei" panose="020B0604030504040204" pitchFamily="34" charset="-120"/>
-                        </a:rPr>
-                        <a:t>Workers ← Redis</a:t>
-                      </a:r>
-                    </a:p>
-                  </a:txBody>
-                  <a:tcPr marL="81480" marR="81480" marT="37606" marB="37606" anchor="ctr">
-                    <a:lnL w="9525" cap="flat" cmpd="sng" algn="ctr">
-                      <a:solidFill>
-                        <a:srgbClr val="D6D6D6"/>
-                      </a:solidFill>
-                      <a:prstDash val="solid"/>
-                      <a:round/>
-                      <a:headEnd type="none" w="med" len="med"/>
-                      <a:tailEnd type="none" w="med" len="med"/>
-                    </a:lnL>
-                    <a:lnR w="9525" cap="flat" cmpd="sng" algn="ctr">
-                      <a:solidFill>
-                        <a:srgbClr val="D6D6D6"/>
-                      </a:solidFill>
-                      <a:prstDash val="solid"/>
-                      <a:round/>
-                      <a:headEnd type="none" w="med" len="med"/>
-                      <a:tailEnd type="none" w="med" len="med"/>
-                    </a:lnR>
-                    <a:lnT w="9525" cap="flat" cmpd="sng" algn="ctr">
-                      <a:solidFill>
-                        <a:srgbClr val="D6D6D6"/>
-                      </a:solidFill>
-                      <a:prstDash val="solid"/>
-                      <a:round/>
-                      <a:headEnd type="none" w="med" len="med"/>
-                      <a:tailEnd type="none" w="med" len="med"/>
-                    </a:lnT>
-                    <a:lnB w="9525" cap="flat" cmpd="sng" algn="ctr">
-                      <a:solidFill>
-                        <a:srgbClr val="D6D6D6"/>
-                      </a:solidFill>
-                      <a:prstDash val="solid"/>
-                      <a:round/>
-                      <a:headEnd type="none" w="med" len="med"/>
-                      <a:tailEnd type="none" w="med" len="med"/>
-                    </a:lnB>
-                    <a:solidFill>
-                      <a:srgbClr val="FFFFFF"/>
-                    </a:solidFill>
-                  </a:tcPr>
-                </a:tc>
-                <a:tc>
-                  <a:txBody>
-                    <a:bodyPr/>
-                    <a:lstStyle/>
-                    <a:p>
-                      <a:pPr>
-                        <a:buNone/>
-                      </a:pPr>
-                      <a:r>
-                        <a:rPr lang="en" sz="1200" dirty="0">
-                          <a:effectLst/>
-                          <a:latin typeface="Microsoft JhengHei" panose="020B0604030504040204" pitchFamily="34" charset="-120"/>
-                          <a:ea typeface="Microsoft JhengHei" panose="020B0604030504040204" pitchFamily="34" charset="-120"/>
-                        </a:rPr>
-                        <a:t>Workers </a:t>
-                      </a:r>
-                      <a:r>
-                        <a:rPr lang="zh-TW" altLang="en-US" sz="1200" dirty="0">
-                          <a:effectLst/>
-                          <a:latin typeface="Microsoft JhengHei" panose="020B0604030504040204" pitchFamily="34" charset="-120"/>
-                          <a:ea typeface="Microsoft JhengHei" panose="020B0604030504040204" pitchFamily="34" charset="-120"/>
-                        </a:rPr>
-                        <a:t>從佇列取出任務進行處理</a:t>
-                      </a:r>
-                    </a:p>
-                  </a:txBody>
-                  <a:tcPr marL="81480" marR="81480" marT="37606" marB="37606" anchor="ctr">
-                    <a:lnL w="9525" cap="flat" cmpd="sng" algn="ctr">
-                      <a:solidFill>
-                        <a:srgbClr val="D6D6D6"/>
-                      </a:solidFill>
-                      <a:prstDash val="solid"/>
-                      <a:round/>
-                      <a:headEnd type="none" w="med" len="med"/>
-                      <a:tailEnd type="none" w="med" len="med"/>
-                    </a:lnL>
-                    <a:lnR w="9525" cap="flat" cmpd="sng" algn="ctr">
-                      <a:solidFill>
-                        <a:srgbClr val="D6D6D6"/>
-                      </a:solidFill>
-                      <a:prstDash val="solid"/>
-                      <a:round/>
-                      <a:headEnd type="none" w="med" len="med"/>
-                      <a:tailEnd type="none" w="med" len="med"/>
-                    </a:lnR>
-                    <a:lnT w="9525" cap="flat" cmpd="sng" algn="ctr">
-                      <a:solidFill>
-                        <a:srgbClr val="D6D6D6"/>
-                      </a:solidFill>
-                      <a:prstDash val="solid"/>
-                      <a:round/>
-                      <a:headEnd type="none" w="med" len="med"/>
-                      <a:tailEnd type="none" w="med" len="med"/>
-                    </a:lnT>
-                    <a:lnB w="9525" cap="flat" cmpd="sng" algn="ctr">
-                      <a:solidFill>
-                        <a:srgbClr val="D6D6D6"/>
-                      </a:solidFill>
-                      <a:prstDash val="solid"/>
-                      <a:round/>
-                      <a:headEnd type="none" w="med" len="med"/>
-                      <a:tailEnd type="none" w="med" len="med"/>
-                    </a:lnB>
-                    <a:solidFill>
-                      <a:srgbClr val="FFFFFF"/>
-                    </a:solidFill>
-                  </a:tcPr>
-                </a:tc>
-                <a:extLst>
-                  <a:ext uri="{0D108BD9-81ED-4DB2-BD59-A6C34878D82A}">
-                    <a16:rowId xmlns:a16="http://schemas.microsoft.com/office/drawing/2014/main" val="608356233"/>
-                  </a:ext>
-                </a:extLst>
-              </a:tr>
-              <a:tr h="227566">
-                <a:tc>
-                  <a:txBody>
-                    <a:bodyPr/>
-                    <a:lstStyle/>
-                    <a:p>
-                      <a:pPr>
-                        <a:buNone/>
-                      </a:pPr>
-                      <a:r>
-                        <a:rPr lang="en-US" altLang="zh-TW" sz="1200" dirty="0">
-                          <a:effectLst/>
-                          <a:latin typeface="Microsoft JhengHei" panose="020B0604030504040204" pitchFamily="34" charset="-120"/>
-                          <a:ea typeface="Microsoft JhengHei" panose="020B0604030504040204" pitchFamily="34" charset="-120"/>
-                        </a:rPr>
-                        <a:t>⑥ </a:t>
-                      </a:r>
-                      <a:r>
-                        <a:rPr lang="zh-TW" altLang="en-US" sz="1200" dirty="0">
-                          <a:effectLst/>
-                          <a:latin typeface="Microsoft JhengHei" panose="020B0604030504040204" pitchFamily="34" charset="-120"/>
-                          <a:ea typeface="Microsoft JhengHei" panose="020B0604030504040204" pitchFamily="34" charset="-120"/>
-                        </a:rPr>
-                        <a:t>資料持久化</a:t>
-                      </a:r>
-                    </a:p>
-                  </a:txBody>
-                  <a:tcPr marL="81480" marR="81480" marT="37606" marB="37606" anchor="ctr">
-                    <a:lnL w="9525" cap="flat" cmpd="sng" algn="ctr">
-                      <a:solidFill>
-                        <a:srgbClr val="D6D6D6"/>
-                      </a:solidFill>
-                      <a:prstDash val="solid"/>
-                      <a:round/>
-                      <a:headEnd type="none" w="med" len="med"/>
-                      <a:tailEnd type="none" w="med" len="med"/>
-                    </a:lnL>
-                    <a:lnR w="9525" cap="flat" cmpd="sng" algn="ctr">
-                      <a:solidFill>
-                        <a:srgbClr val="D6D6D6"/>
-                      </a:solidFill>
-                      <a:prstDash val="solid"/>
-                      <a:round/>
-                      <a:headEnd type="none" w="med" len="med"/>
-                      <a:tailEnd type="none" w="med" len="med"/>
-                    </a:lnR>
-                    <a:lnT w="9525" cap="flat" cmpd="sng" algn="ctr">
-                      <a:solidFill>
-                        <a:srgbClr val="D6D6D6"/>
-                      </a:solidFill>
-                      <a:prstDash val="solid"/>
-                      <a:round/>
-                      <a:headEnd type="none" w="med" len="med"/>
-                      <a:tailEnd type="none" w="med" len="med"/>
-                    </a:lnT>
-                    <a:lnB w="9525" cap="flat" cmpd="sng" algn="ctr">
-                      <a:solidFill>
-                        <a:srgbClr val="D6D6D6"/>
-                      </a:solidFill>
-                      <a:prstDash val="solid"/>
-                      <a:round/>
-                      <a:headEnd type="none" w="med" len="med"/>
-                      <a:tailEnd type="none" w="med" len="med"/>
-                    </a:lnB>
-                    <a:solidFill>
-                      <a:srgbClr val="FFFFFF"/>
-                    </a:solidFill>
-                  </a:tcPr>
-                </a:tc>
-                <a:tc>
-                  <a:txBody>
-                    <a:bodyPr/>
-                    <a:lstStyle/>
-                    <a:p>
-                      <a:pPr>
-                        <a:buNone/>
-                      </a:pPr>
-                      <a:r>
-                        <a:rPr lang="en" sz="1200" dirty="0" err="1">
-                          <a:effectLst/>
-                          <a:latin typeface="Microsoft JhengHei" panose="020B0604030504040204" pitchFamily="34" charset="-120"/>
-                          <a:ea typeface="Microsoft JhengHei" panose="020B0604030504040204" pitchFamily="34" charset="-120"/>
-                        </a:rPr>
-                        <a:t>InfoGather</a:t>
-                      </a:r>
-                      <a:r>
-                        <a:rPr lang="en" sz="1200" dirty="0">
-                          <a:effectLst/>
-                          <a:latin typeface="Microsoft JhengHei" panose="020B0604030504040204" pitchFamily="34" charset="-120"/>
-                          <a:ea typeface="Microsoft JhengHei" panose="020B0604030504040204" pitchFamily="34" charset="-120"/>
-                        </a:rPr>
-                        <a:t> API / Workers → MongoDB</a:t>
-                      </a:r>
-                    </a:p>
-                  </a:txBody>
-                  <a:tcPr marL="81480" marR="81480" marT="37606" marB="37606" anchor="ctr">
-                    <a:lnL w="9525" cap="flat" cmpd="sng" algn="ctr">
-                      <a:solidFill>
-                        <a:srgbClr val="D6D6D6"/>
-                      </a:solidFill>
-                      <a:prstDash val="solid"/>
-                      <a:round/>
-                      <a:headEnd type="none" w="med" len="med"/>
-                      <a:tailEnd type="none" w="med" len="med"/>
-                    </a:lnL>
-                    <a:lnR w="9525" cap="flat" cmpd="sng" algn="ctr">
-                      <a:solidFill>
-                        <a:srgbClr val="D6D6D6"/>
-                      </a:solidFill>
-                      <a:prstDash val="solid"/>
-                      <a:round/>
-                      <a:headEnd type="none" w="med" len="med"/>
-                      <a:tailEnd type="none" w="med" len="med"/>
-                    </a:lnR>
-                    <a:lnT w="9525" cap="flat" cmpd="sng" algn="ctr">
-                      <a:solidFill>
-                        <a:srgbClr val="D6D6D6"/>
-                      </a:solidFill>
-                      <a:prstDash val="solid"/>
-                      <a:round/>
-                      <a:headEnd type="none" w="med" len="med"/>
-                      <a:tailEnd type="none" w="med" len="med"/>
-                    </a:lnT>
-                    <a:lnB w="9525" cap="flat" cmpd="sng" algn="ctr">
-                      <a:solidFill>
-                        <a:srgbClr val="D6D6D6"/>
-                      </a:solidFill>
-                      <a:prstDash val="solid"/>
-                      <a:round/>
-                      <a:headEnd type="none" w="med" len="med"/>
-                      <a:tailEnd type="none" w="med" len="med"/>
-                    </a:lnB>
-                    <a:solidFill>
-                      <a:srgbClr val="FFFFFF"/>
-                    </a:solidFill>
-                  </a:tcPr>
-                </a:tc>
-                <a:tc>
-                  <a:txBody>
-                    <a:bodyPr/>
-                    <a:lstStyle/>
-                    <a:p>
-                      <a:pPr>
-                        <a:buNone/>
-                      </a:pPr>
-                      <a:r>
-                        <a:rPr lang="en" sz="1200">
-                          <a:effectLst/>
-                          <a:latin typeface="Microsoft JhengHei" panose="020B0604030504040204" pitchFamily="34" charset="-120"/>
-                          <a:ea typeface="Microsoft JhengHei" panose="020B0604030504040204" pitchFamily="34" charset="-120"/>
-                        </a:rPr>
-                        <a:t>API </a:t>
-                      </a:r>
-                      <a:r>
-                        <a:rPr lang="zh-TW" altLang="en-US" sz="1200">
-                          <a:effectLst/>
-                          <a:latin typeface="Microsoft JhengHei" panose="020B0604030504040204" pitchFamily="34" charset="-120"/>
-                          <a:ea typeface="Microsoft JhengHei" panose="020B0604030504040204" pitchFamily="34" charset="-120"/>
-                        </a:rPr>
-                        <a:t>與背景工作把結果存入資料庫</a:t>
-                      </a:r>
-                    </a:p>
-                  </a:txBody>
-                  <a:tcPr marL="81480" marR="81480" marT="37606" marB="37606" anchor="ctr">
-                    <a:lnL w="9525" cap="flat" cmpd="sng" algn="ctr">
-                      <a:solidFill>
-                        <a:srgbClr val="D6D6D6"/>
-                      </a:solidFill>
-                      <a:prstDash val="solid"/>
-                      <a:round/>
-                      <a:headEnd type="none" w="med" len="med"/>
-                      <a:tailEnd type="none" w="med" len="med"/>
-                    </a:lnL>
-                    <a:lnR w="9525" cap="flat" cmpd="sng" algn="ctr">
-                      <a:solidFill>
-                        <a:srgbClr val="D6D6D6"/>
-                      </a:solidFill>
-                      <a:prstDash val="solid"/>
-                      <a:round/>
-                      <a:headEnd type="none" w="med" len="med"/>
-                      <a:tailEnd type="none" w="med" len="med"/>
-                    </a:lnR>
-                    <a:lnT w="9525" cap="flat" cmpd="sng" algn="ctr">
-                      <a:solidFill>
-                        <a:srgbClr val="D6D6D6"/>
-                      </a:solidFill>
-                      <a:prstDash val="solid"/>
-                      <a:round/>
-                      <a:headEnd type="none" w="med" len="med"/>
-                      <a:tailEnd type="none" w="med" len="med"/>
-                    </a:lnT>
-                    <a:lnB w="9525" cap="flat" cmpd="sng" algn="ctr">
-                      <a:solidFill>
-                        <a:srgbClr val="D6D6D6"/>
-                      </a:solidFill>
-                      <a:prstDash val="solid"/>
-                      <a:round/>
-                      <a:headEnd type="none" w="med" len="med"/>
-                      <a:tailEnd type="none" w="med" len="med"/>
-                    </a:lnB>
-                    <a:solidFill>
-                      <a:srgbClr val="FFFFFF"/>
-                    </a:solidFill>
-                  </a:tcPr>
-                </a:tc>
-                <a:extLst>
-                  <a:ext uri="{0D108BD9-81ED-4DB2-BD59-A6C34878D82A}">
-                    <a16:rowId xmlns:a16="http://schemas.microsoft.com/office/drawing/2014/main" val="2915300688"/>
-                  </a:ext>
-                </a:extLst>
-              </a:tr>
-              <a:tr h="297371">
-                <a:tc>
-                  <a:txBody>
-                    <a:bodyPr/>
-                    <a:lstStyle/>
-                    <a:p>
-                      <a:pPr>
-                        <a:buNone/>
-                      </a:pPr>
-                      <a:r>
-                        <a:rPr lang="en" sz="1200" dirty="0">
-                          <a:effectLst/>
-                          <a:latin typeface="Microsoft JhengHei" panose="020B0604030504040204" pitchFamily="34" charset="-120"/>
-                          <a:ea typeface="Microsoft JhengHei" panose="020B0604030504040204" pitchFamily="34" charset="-120"/>
-                        </a:rPr>
-                        <a:t>⑦ AI </a:t>
-                      </a:r>
-                      <a:r>
-                        <a:rPr lang="zh-TW" altLang="en-US" sz="1200" dirty="0">
-                          <a:effectLst/>
-                          <a:latin typeface="Microsoft JhengHei" panose="020B0604030504040204" pitchFamily="34" charset="-120"/>
-                          <a:ea typeface="Microsoft JhengHei" panose="020B0604030504040204" pitchFamily="34" charset="-120"/>
-                        </a:rPr>
-                        <a:t>能力呼叫</a:t>
-                      </a:r>
-                    </a:p>
-                  </a:txBody>
-                  <a:tcPr marL="81480" marR="81480" marT="37606" marB="37606" anchor="ctr">
-                    <a:lnL w="9525" cap="flat" cmpd="sng" algn="ctr">
-                      <a:solidFill>
-                        <a:srgbClr val="D6D6D6"/>
-                      </a:solidFill>
-                      <a:prstDash val="solid"/>
-                      <a:round/>
-                      <a:headEnd type="none" w="med" len="med"/>
-                      <a:tailEnd type="none" w="med" len="med"/>
-                    </a:lnL>
-                    <a:lnR w="9525" cap="flat" cmpd="sng" algn="ctr">
-                      <a:solidFill>
-                        <a:srgbClr val="D6D6D6"/>
-                      </a:solidFill>
-                      <a:prstDash val="solid"/>
-                      <a:round/>
-                      <a:headEnd type="none" w="med" len="med"/>
-                      <a:tailEnd type="none" w="med" len="med"/>
-                    </a:lnR>
-                    <a:lnT w="9525" cap="flat" cmpd="sng" algn="ctr">
-                      <a:solidFill>
-                        <a:srgbClr val="D6D6D6"/>
-                      </a:solidFill>
-                      <a:prstDash val="solid"/>
-                      <a:round/>
-                      <a:headEnd type="none" w="med" len="med"/>
-                      <a:tailEnd type="none" w="med" len="med"/>
-                    </a:lnT>
-                    <a:lnB w="9525" cap="flat" cmpd="sng" algn="ctr">
-                      <a:solidFill>
-                        <a:srgbClr val="D6D6D6"/>
-                      </a:solidFill>
-                      <a:prstDash val="solid"/>
-                      <a:round/>
-                      <a:headEnd type="none" w="med" len="med"/>
-                      <a:tailEnd type="none" w="med" len="med"/>
-                    </a:lnB>
-                    <a:solidFill>
-                      <a:srgbClr val="FFFFFF"/>
-                    </a:solidFill>
-                  </a:tcPr>
-                </a:tc>
-                <a:tc>
-                  <a:txBody>
-                    <a:bodyPr/>
-                    <a:lstStyle/>
-                    <a:p>
-                      <a:pPr>
-                        <a:buNone/>
-                      </a:pPr>
-                      <a:r>
-                        <a:rPr lang="en" sz="1200" dirty="0" err="1">
-                          <a:effectLst/>
-                          <a:latin typeface="Microsoft JhengHei" panose="020B0604030504040204" pitchFamily="34" charset="-120"/>
-                          <a:ea typeface="Microsoft JhengHei" panose="020B0604030504040204" pitchFamily="34" charset="-120"/>
-                        </a:rPr>
-                        <a:t>InfoGather</a:t>
-                      </a:r>
-                      <a:r>
-                        <a:rPr lang="en" sz="1200" dirty="0">
-                          <a:effectLst/>
-                          <a:latin typeface="Microsoft JhengHei" panose="020B0604030504040204" pitchFamily="34" charset="-120"/>
-                          <a:ea typeface="Microsoft JhengHei" panose="020B0604030504040204" pitchFamily="34" charset="-120"/>
-                        </a:rPr>
-                        <a:t> API</a:t>
-                      </a:r>
-                      <a:r>
-                        <a:rPr lang="en" altLang="zh-TW" sz="1200" dirty="0">
-                          <a:effectLst/>
-                          <a:latin typeface="Microsoft JhengHei" panose="020B0604030504040204" pitchFamily="34" charset="-120"/>
-                          <a:ea typeface="Microsoft JhengHei" panose="020B0604030504040204" pitchFamily="34" charset="-120"/>
-                        </a:rPr>
-                        <a:t> / Workers</a:t>
-                      </a:r>
-                      <a:r>
-                        <a:rPr lang="en" sz="1200" dirty="0">
-                          <a:effectLst/>
-                          <a:latin typeface="Microsoft JhengHei" panose="020B0604030504040204" pitchFamily="34" charset="-120"/>
-                          <a:ea typeface="Microsoft JhengHei" panose="020B0604030504040204" pitchFamily="34" charset="-120"/>
-                        </a:rPr>
-                        <a:t> → Copilot CLI Server → LLM Providers</a:t>
-                      </a:r>
-                    </a:p>
-                  </a:txBody>
-                  <a:tcPr marL="81480" marR="81480" marT="37606" marB="37606" anchor="ctr">
-                    <a:lnL w="9525" cap="flat" cmpd="sng" algn="ctr">
-                      <a:solidFill>
-                        <a:srgbClr val="D6D6D6"/>
-                      </a:solidFill>
-                      <a:prstDash val="solid"/>
-                      <a:round/>
-                      <a:headEnd type="none" w="med" len="med"/>
-                      <a:tailEnd type="none" w="med" len="med"/>
-                    </a:lnL>
-                    <a:lnR w="9525" cap="flat" cmpd="sng" algn="ctr">
-                      <a:solidFill>
-                        <a:srgbClr val="D6D6D6"/>
-                      </a:solidFill>
-                      <a:prstDash val="solid"/>
-                      <a:round/>
-                      <a:headEnd type="none" w="med" len="med"/>
-                      <a:tailEnd type="none" w="med" len="med"/>
-                    </a:lnR>
-                    <a:lnT w="9525" cap="flat" cmpd="sng" algn="ctr">
-                      <a:solidFill>
-                        <a:srgbClr val="D6D6D6"/>
-                      </a:solidFill>
-                      <a:prstDash val="solid"/>
-                      <a:round/>
-                      <a:headEnd type="none" w="med" len="med"/>
-                      <a:tailEnd type="none" w="med" len="med"/>
-                    </a:lnT>
-                    <a:lnB w="9525" cap="flat" cmpd="sng" algn="ctr">
-                      <a:solidFill>
-                        <a:srgbClr val="D6D6D6"/>
-                      </a:solidFill>
-                      <a:prstDash val="solid"/>
-                      <a:round/>
-                      <a:headEnd type="none" w="med" len="med"/>
-                      <a:tailEnd type="none" w="med" len="med"/>
-                    </a:lnB>
-                    <a:solidFill>
-                      <a:srgbClr val="FFFFFF"/>
-                    </a:solidFill>
-                  </a:tcPr>
-                </a:tc>
-                <a:tc>
-                  <a:txBody>
-                    <a:bodyPr/>
-                    <a:lstStyle/>
-                    <a:p>
-                      <a:pPr>
-                        <a:buNone/>
-                      </a:pPr>
-                      <a:r>
-                        <a:rPr lang="zh-TW" altLang="en-US" sz="1200" dirty="0">
-                          <a:effectLst/>
-                          <a:latin typeface="Microsoft JhengHei" panose="020B0604030504040204" pitchFamily="34" charset="-120"/>
-                          <a:ea typeface="Microsoft JhengHei" panose="020B0604030504040204" pitchFamily="34" charset="-120"/>
-                        </a:rPr>
-                        <a:t>後端透過 </a:t>
-                      </a:r>
-                      <a:r>
-                        <a:rPr lang="en" sz="1200" dirty="0">
-                          <a:effectLst/>
-                          <a:latin typeface="Microsoft JhengHei" panose="020B0604030504040204" pitchFamily="34" charset="-120"/>
-                          <a:ea typeface="Microsoft JhengHei" panose="020B0604030504040204" pitchFamily="34" charset="-120"/>
-                        </a:rPr>
-                        <a:t>Copilot CLI Server </a:t>
-                      </a:r>
-                      <a:r>
-                        <a:rPr lang="zh-TW" altLang="en-US" sz="1200" dirty="0">
-                          <a:effectLst/>
-                          <a:latin typeface="Microsoft JhengHei" panose="020B0604030504040204" pitchFamily="34" charset="-120"/>
-                          <a:ea typeface="Microsoft JhengHei" panose="020B0604030504040204" pitchFamily="34" charset="-120"/>
-                        </a:rPr>
-                        <a:t>呼叫模型完成分析與生成</a:t>
-                      </a:r>
-                    </a:p>
-                  </a:txBody>
-                  <a:tcPr marL="81480" marR="81480" marT="37606" marB="37606" anchor="ctr">
-                    <a:lnL w="9525" cap="flat" cmpd="sng" algn="ctr">
-                      <a:solidFill>
-                        <a:srgbClr val="D6D6D6"/>
-                      </a:solidFill>
-                      <a:prstDash val="solid"/>
-                      <a:round/>
-                      <a:headEnd type="none" w="med" len="med"/>
-                      <a:tailEnd type="none" w="med" len="med"/>
-                    </a:lnL>
-                    <a:lnR w="9525" cap="flat" cmpd="sng" algn="ctr">
-                      <a:solidFill>
-                        <a:srgbClr val="D6D6D6"/>
-                      </a:solidFill>
-                      <a:prstDash val="solid"/>
-                      <a:round/>
-                      <a:headEnd type="none" w="med" len="med"/>
-                      <a:tailEnd type="none" w="med" len="med"/>
-                    </a:lnR>
-                    <a:lnT w="9525" cap="flat" cmpd="sng" algn="ctr">
-                      <a:solidFill>
-                        <a:srgbClr val="D6D6D6"/>
-                      </a:solidFill>
-                      <a:prstDash val="solid"/>
-                      <a:round/>
-                      <a:headEnd type="none" w="med" len="med"/>
-                      <a:tailEnd type="none" w="med" len="med"/>
-                    </a:lnT>
-                    <a:lnB w="9525" cap="flat" cmpd="sng" algn="ctr">
-                      <a:solidFill>
-                        <a:srgbClr val="D6D6D6"/>
-                      </a:solidFill>
-                      <a:prstDash val="solid"/>
-                      <a:round/>
-                      <a:headEnd type="none" w="med" len="med"/>
-                      <a:tailEnd type="none" w="med" len="med"/>
-                    </a:lnB>
-                    <a:solidFill>
-                      <a:srgbClr val="FFFFFF"/>
-                    </a:solidFill>
-                  </a:tcPr>
-                </a:tc>
-                <a:extLst>
-                  <a:ext uri="{0D108BD9-81ED-4DB2-BD59-A6C34878D82A}">
-                    <a16:rowId xmlns:a16="http://schemas.microsoft.com/office/drawing/2014/main" val="2820134989"/>
-                  </a:ext>
-                </a:extLst>
-              </a:tr>
-            </a:tbl>
-          </a:graphicData>
-        </a:graphic>
-      </p:graphicFrame>
-      <p:pic>
-        <p:nvPicPr>
-          <p:cNvPr id="10" name="圖片 9" descr="一張含有 文字, 螢幕擷取畫面, 字型 的圖片&#10;&#10;AI 產生的內容可能不正確。">
-            <a:extLst>
-              <a:ext uri="{FF2B5EF4-FFF2-40B4-BE49-F238E27FC236}">
-                <a16:creationId xmlns:a16="http://schemas.microsoft.com/office/drawing/2014/main" id="{73CB69F9-04CF-9DEE-9670-60506887CEF5}"/>
+                <a16:creationId xmlns:a16="http://schemas.microsoft.com/office/drawing/2014/main" id="{29DCEF5A-1D61-E740-AE36-83D55C9B943D}"/>
               </a:ext>
             </a:extLst>
           </p:cNvPr>
@@ -10884,8 +9144,8 @@
         </p:blipFill>
         <p:spPr>
           <a:xfrm>
-            <a:off x="1260244" y="814325"/>
-            <a:ext cx="9000000" cy="2592829"/>
+            <a:off x="1342058" y="766139"/>
+            <a:ext cx="8595739" cy="2700000"/>
           </a:xfrm>
           <a:prstGeom prst="rect">
             <a:avLst/>
@@ -10895,7 +9155,7 @@
     </p:spTree>
     <p:extLst>
       <p:ext uri="{BB962C8B-B14F-4D97-AF65-F5344CB8AC3E}">
-        <p14:creationId xmlns:p14="http://schemas.microsoft.com/office/powerpoint/2010/main" val="3945464203"/>
+        <p14:creationId xmlns:p14="http://schemas.microsoft.com/office/powerpoint/2010/main" val="3880355150"/>
       </p:ext>
     </p:extLst>
   </p:cSld>
@@ -10905,7 +9165,7 @@
 </p:sld>
 </file>
 
-<file path=ppt/slides/slide5.xml><?xml version="1.0" encoding="utf-8"?>
+<file path=ppt/slides/slide4.xml><?xml version="1.0" encoding="utf-8"?>
 <p:sld xmlns:a="http://schemas.openxmlformats.org/drawingml/2006/main" xmlns:r="http://schemas.openxmlformats.org/officeDocument/2006/relationships" xmlns:p="http://schemas.openxmlformats.org/presentationml/2006/main">
   <p:cSld>
     <p:spTree>
@@ -10945,7 +9205,7 @@
           <a:p>
             <a:r>
               <a:rPr lang="zh-TW" altLang="en-US" b="1" dirty="0"/>
-              <a:t>高可用 </a:t>
+              <a:t>測試環境 </a:t>
             </a:r>
             <a:r>
               <a:rPr lang="en" altLang="zh-TW" b="1" dirty="0"/>
@@ -10953,18 +9213,102 @@
             </a:r>
             <a:r>
               <a:rPr lang="zh-TW" altLang="en-US" b="1" dirty="0"/>
-              <a:t>配置與服務部署</a:t>
+              <a:t>與服務配置</a:t>
             </a:r>
+            <a:endParaRPr lang="zh-TW" altLang="en-US" dirty="0"/>
+          </a:p>
+        </p:txBody>
+      </p:sp>
+      <p:sp>
+        <p:nvSpPr>
+          <p:cNvPr id="6" name="文字版面配置區 5">
+            <a:extLst>
+              <a:ext uri="{FF2B5EF4-FFF2-40B4-BE49-F238E27FC236}">
+                <a16:creationId xmlns:a16="http://schemas.microsoft.com/office/drawing/2014/main" id="{86D61659-C6AB-A52E-6A2C-6B3BA84F1C39}"/>
+              </a:ext>
+            </a:extLst>
+          </p:cNvPr>
+          <p:cNvSpPr>
+            <a:spLocks noGrp="1"/>
+          </p:cNvSpPr>
+          <p:nvPr>
+            <p:ph type="body" idx="1"/>
+          </p:nvPr>
+        </p:nvSpPr>
+        <p:spPr/>
+        <p:txBody>
+          <a:bodyPr/>
+          <a:lstStyle/>
+          <a:p>
+            <a:endParaRPr lang="en-US" altLang="zh-TW" dirty="0"/>
+          </a:p>
+          <a:p>
+            <a:endParaRPr lang="en-US" altLang="zh-TW" dirty="0"/>
+          </a:p>
+          <a:p>
+            <a:endParaRPr lang="en-US" altLang="zh-TW" dirty="0"/>
+          </a:p>
+          <a:p>
+            <a:endParaRPr lang="en-US" altLang="zh-TW" dirty="0"/>
+          </a:p>
+          <a:p>
+            <a:endParaRPr lang="en-US" altLang="zh-TW" dirty="0"/>
+          </a:p>
+          <a:p>
+            <a:endParaRPr lang="en-US" altLang="zh-TW" dirty="0"/>
+          </a:p>
+          <a:p>
+            <a:endParaRPr lang="en-US" altLang="zh-TW" dirty="0"/>
+          </a:p>
+          <a:p>
+            <a:endParaRPr lang="en-US" altLang="zh-TW" dirty="0"/>
+          </a:p>
+          <a:p>
+            <a:endParaRPr lang="en-US" altLang="zh-TW" dirty="0"/>
+          </a:p>
+          <a:p>
+            <a:endParaRPr lang="en-US" altLang="zh-TW" dirty="0"/>
+          </a:p>
+          <a:p>
+            <a:endParaRPr lang="en-US" altLang="zh-TW" dirty="0"/>
+          </a:p>
+          <a:p>
+            <a:endParaRPr lang="en-US" altLang="zh-TW" dirty="0"/>
+          </a:p>
+          <a:p>
+            <a:pPr marL="36000" indent="0">
+              <a:buNone/>
+            </a:pPr>
+            <a:endParaRPr lang="en-US" altLang="zh-TW" dirty="0"/>
+          </a:p>
+          <a:p>
+            <a:pPr marL="36000" indent="0">
+              <a:buNone/>
+            </a:pPr>
+            <a:endParaRPr lang="en-US" altLang="zh-TW" dirty="0"/>
+          </a:p>
+          <a:p>
+            <a:r>
+              <a:rPr lang="zh-TW" altLang="en-US" dirty="0"/>
+              <a:t>測試環境資源總計：</a:t>
+            </a:r>
+            <a:r>
+              <a:rPr lang="en" altLang="zh-TW" dirty="0"/>
+              <a:t>32 vCPU / 68 GB RAM / 1120 GB SSD</a:t>
+            </a:r>
+            <a:endParaRPr lang="en-US" altLang="zh-TW" dirty="0"/>
+          </a:p>
+          <a:p>
             <a:endParaRPr lang="zh-TW" altLang="en-US" dirty="0"/>
           </a:p>
         </p:txBody>
       </p:sp>
       <p:graphicFrame>
         <p:nvGraphicFramePr>
-          <p:cNvPr id="5" name="表格 4">
+          <p:cNvPr id="7" name="表格 6">
             <a:extLst>
               <a:ext uri="{FF2B5EF4-FFF2-40B4-BE49-F238E27FC236}">
-                <a16:creationId xmlns:a16="http://schemas.microsoft.com/office/drawing/2014/main" id="{513B0C0D-BCA6-4F9E-BAFF-0A34DBACA515}"/>
+                <a16:creationId xmlns:a16="http://schemas.microsoft.com/office/drawing/2014/main" id="{36296B90-57D8-88FB-0610-C42168C6D82F}"/>
               </a:ext>
             </a:extLst>
           </p:cNvPr>
@@ -10974,2263 +9318,1542 @@
           <p:nvPr>
             <p:extLst>
               <p:ext uri="{D42A27DB-BD31-4B8C-83A1-F6EECF244321}">
-                <p14:modId xmlns:p14="http://schemas.microsoft.com/office/powerpoint/2010/main" val="3589835658"/>
+                <p14:modId xmlns:p14="http://schemas.microsoft.com/office/powerpoint/2010/main" val="4194308909"/>
               </p:ext>
             </p:extLst>
           </p:nvPr>
         </p:nvGraphicFramePr>
         <p:xfrm>
-          <a:off x="233808" y="829626"/>
-          <a:ext cx="11107293" cy="5219488"/>
+          <a:off x="179388" y="826714"/>
+          <a:ext cx="11161712" cy="4320000"/>
         </p:xfrm>
         <a:graphic>
           <a:graphicData uri="http://schemas.openxmlformats.org/drawingml/2006/table">
             <a:tbl>
-              <a:tblPr firstRow="1" bandRow="1">
+              <a:tblPr>
                 <a:tableStyleId>{91DB7C30-2B5D-4D34-8F22-85940E495A18}</a:tableStyleId>
               </a:tblPr>
               <a:tblGrid>
-                <a:gridCol w="1781817">
+                <a:gridCol w="2840921">
                   <a:extLst>
                     <a:ext uri="{9D8B030D-6E8A-4147-A177-3AD203B41FA5}">
-                      <a16:colId xmlns:a16="http://schemas.microsoft.com/office/drawing/2014/main" val="4170085303"/>
+                      <a16:colId xmlns:a16="http://schemas.microsoft.com/office/drawing/2014/main" val="1199597028"/>
                     </a:ext>
                   </a:extLst>
                 </a:gridCol>
-                <a:gridCol w="964487">
+                <a:gridCol w="800337">
                   <a:extLst>
                     <a:ext uri="{9D8B030D-6E8A-4147-A177-3AD203B41FA5}">
-                      <a16:colId xmlns:a16="http://schemas.microsoft.com/office/drawing/2014/main" val="828908175"/>
+                      <a16:colId xmlns:a16="http://schemas.microsoft.com/office/drawing/2014/main" val="1578801080"/>
                     </a:ext>
                   </a:extLst>
                 </a:gridCol>
-                <a:gridCol w="839440">
+                <a:gridCol w="735476">
                   <a:extLst>
                     <a:ext uri="{9D8B030D-6E8A-4147-A177-3AD203B41FA5}">
-                      <a16:colId xmlns:a16="http://schemas.microsoft.com/office/drawing/2014/main" val="2217964813"/>
+                      <a16:colId xmlns:a16="http://schemas.microsoft.com/office/drawing/2014/main" val="3168828867"/>
                     </a:ext>
                   </a:extLst>
                 </a:gridCol>
-                <a:gridCol w="951800">
+                <a:gridCol w="789751">
                   <a:extLst>
                     <a:ext uri="{9D8B030D-6E8A-4147-A177-3AD203B41FA5}">
-                      <a16:colId xmlns:a16="http://schemas.microsoft.com/office/drawing/2014/main" val="3725896981"/>
+                      <a16:colId xmlns:a16="http://schemas.microsoft.com/office/drawing/2014/main" val="136309821"/>
                     </a:ext>
                   </a:extLst>
                 </a:gridCol>
-                <a:gridCol w="2872799">
+                <a:gridCol w="3413612">
                   <a:extLst>
                     <a:ext uri="{9D8B030D-6E8A-4147-A177-3AD203B41FA5}">
-                      <a16:colId xmlns:a16="http://schemas.microsoft.com/office/drawing/2014/main" val="4233718395"/>
+                      <a16:colId xmlns:a16="http://schemas.microsoft.com/office/drawing/2014/main" val="3760430905"/>
                     </a:ext>
                   </a:extLst>
                 </a:gridCol>
-                <a:gridCol w="3696950">
+                <a:gridCol w="2581615">
                   <a:extLst>
                     <a:ext uri="{9D8B030D-6E8A-4147-A177-3AD203B41FA5}">
-                      <a16:colId xmlns:a16="http://schemas.microsoft.com/office/drawing/2014/main" val="389320006"/>
+                      <a16:colId xmlns:a16="http://schemas.microsoft.com/office/drawing/2014/main" val="939028161"/>
                     </a:ext>
                   </a:extLst>
                 </a:gridCol>
               </a:tblGrid>
-              <a:tr h="326218">
-                <a:tc>
-                  <a:txBody>
-                    <a:bodyPr/>
-                    <a:lstStyle/>
-                    <a:p>
-                      <a:r>
-                        <a:rPr lang="en-US" altLang="zh-TW" sz="1400" dirty="0"/>
+              <a:tr h="353338">
+                <a:tc>
+                  <a:txBody>
+                    <a:bodyPr/>
+                    <a:lstStyle/>
+                    <a:p>
+                      <a:pPr>
+                        <a:buNone/>
+                      </a:pPr>
+                      <a:r>
+                        <a:rPr lang="en" sz="1400" dirty="0"/>
                         <a:t>VM</a:t>
                       </a:r>
-                      <a:endParaRPr lang="zh-TW" altLang="en-US" sz="1400" dirty="0"/>
-                    </a:p>
-                  </a:txBody>
-                  <a:tcPr/>
-                </a:tc>
-                <a:tc>
-                  <a:txBody>
-                    <a:bodyPr/>
-                    <a:lstStyle/>
-                    <a:p>
-                      <a:r>
-                        <a:rPr lang="en-US" altLang="zh-TW" sz="1400" dirty="0"/>
+                      <a:endParaRPr lang="zh-TW" altLang="en-US" sz="1400" dirty="0">
+                        <a:latin typeface="Microsoft JhengHei" panose="020B0604030504040204" pitchFamily="34" charset="-120"/>
+                        <a:ea typeface="Microsoft JhengHei" panose="020B0604030504040204" pitchFamily="34" charset="-120"/>
+                      </a:endParaRPr>
+                    </a:p>
+                  </a:txBody>
+                  <a:tcPr anchor="ctr"/>
+                </a:tc>
+                <a:tc>
+                  <a:txBody>
+                    <a:bodyPr/>
+                    <a:lstStyle/>
+                    <a:p>
+                      <a:pPr>
+                        <a:buNone/>
+                      </a:pPr>
+                      <a:r>
+                        <a:rPr lang="en" sz="1400" dirty="0"/>
                         <a:t>vCPU</a:t>
                       </a:r>
-                      <a:endParaRPr lang="zh-TW" altLang="en-US" sz="1400" dirty="0"/>
-                    </a:p>
-                  </a:txBody>
-                  <a:tcPr/>
-                </a:tc>
-                <a:tc>
-                  <a:txBody>
-                    <a:bodyPr/>
-                    <a:lstStyle/>
-                    <a:p>
-                      <a:r>
-                        <a:rPr lang="en-US" altLang="zh-TW" sz="1400" dirty="0"/>
+                      <a:endParaRPr lang="en" sz="1400" dirty="0">
+                        <a:latin typeface="Microsoft JhengHei" panose="020B0604030504040204" pitchFamily="34" charset="-120"/>
+                        <a:ea typeface="Microsoft JhengHei" panose="020B0604030504040204" pitchFamily="34" charset="-120"/>
+                      </a:endParaRPr>
+                    </a:p>
+                  </a:txBody>
+                  <a:tcPr anchor="ctr"/>
+                </a:tc>
+                <a:tc>
+                  <a:txBody>
+                    <a:bodyPr/>
+                    <a:lstStyle/>
+                    <a:p>
+                      <a:pPr>
+                        <a:buNone/>
+                      </a:pPr>
+                      <a:r>
+                        <a:rPr lang="en" sz="1400"/>
                         <a:t>RAM</a:t>
                       </a:r>
-                      <a:endParaRPr lang="zh-TW" altLang="en-US" sz="1400" dirty="0"/>
-                    </a:p>
-                  </a:txBody>
-                  <a:tcPr/>
-                </a:tc>
-                <a:tc>
-                  <a:txBody>
-                    <a:bodyPr/>
-                    <a:lstStyle/>
-                    <a:p>
-                      <a:r>
-                        <a:rPr lang="en-US" altLang="zh-TW" sz="1400" dirty="0"/>
-                        <a:t>SSD </a:t>
-                      </a:r>
-                      <a:endParaRPr lang="zh-TW" altLang="en-US" sz="1400" dirty="0"/>
-                    </a:p>
-                  </a:txBody>
-                  <a:tcPr/>
-                </a:tc>
-                <a:tc>
-                  <a:txBody>
-                    <a:bodyPr/>
-                    <a:lstStyle/>
-                    <a:p>
-                      <a:r>
-                        <a:rPr lang="zh-TW" altLang="en-US" sz="1400" dirty="0"/>
+                      <a:endParaRPr lang="en" sz="1400">
+                        <a:latin typeface="Microsoft JhengHei" panose="020B0604030504040204" pitchFamily="34" charset="-120"/>
+                        <a:ea typeface="Microsoft JhengHei" panose="020B0604030504040204" pitchFamily="34" charset="-120"/>
+                      </a:endParaRPr>
+                    </a:p>
+                  </a:txBody>
+                  <a:tcPr anchor="ctr"/>
+                </a:tc>
+                <a:tc>
+                  <a:txBody>
+                    <a:bodyPr/>
+                    <a:lstStyle/>
+                    <a:p>
+                      <a:pPr>
+                        <a:buNone/>
+                      </a:pPr>
+                      <a:r>
+                        <a:rPr lang="en" sz="1400" dirty="0"/>
+                        <a:t>SSD</a:t>
+                      </a:r>
+                      <a:endParaRPr lang="en" sz="1400" dirty="0">
+                        <a:latin typeface="Microsoft JhengHei" panose="020B0604030504040204" pitchFamily="34" charset="-120"/>
+                        <a:ea typeface="Microsoft JhengHei" panose="020B0604030504040204" pitchFamily="34" charset="-120"/>
+                      </a:endParaRPr>
+                    </a:p>
+                  </a:txBody>
+                  <a:tcPr anchor="ctr"/>
+                </a:tc>
+                <a:tc>
+                  <a:txBody>
+                    <a:bodyPr/>
+                    <a:lstStyle/>
+                    <a:p>
+                      <a:pPr>
+                        <a:buNone/>
+                      </a:pPr>
+                      <a:r>
+                        <a:rPr lang="zh-TW" altLang="en-US" sz="1400"/>
                         <a:t>部署服務</a:t>
                       </a:r>
-                    </a:p>
-                  </a:txBody>
-                  <a:tcPr/>
-                </a:tc>
-                <a:tc>
-                  <a:txBody>
-                    <a:bodyPr/>
-                    <a:lstStyle/>
-                    <a:p>
-                      <a:r>
-                        <a:rPr lang="zh-TW" altLang="en-US" sz="1400" dirty="0"/>
+                      <a:endParaRPr lang="zh-TW" altLang="en-US" sz="1400">
+                        <a:latin typeface="Microsoft JhengHei" panose="020B0604030504040204" pitchFamily="34" charset="-120"/>
+                        <a:ea typeface="Microsoft JhengHei" panose="020B0604030504040204" pitchFamily="34" charset="-120"/>
+                      </a:endParaRPr>
+                    </a:p>
+                  </a:txBody>
+                  <a:tcPr anchor="ctr"/>
+                </a:tc>
+                <a:tc>
+                  <a:txBody>
+                    <a:bodyPr/>
+                    <a:lstStyle/>
+                    <a:p>
+                      <a:pPr>
+                        <a:buNone/>
+                      </a:pPr>
+                      <a:r>
+                        <a:rPr lang="zh-TW" altLang="en-US" sz="1400"/>
                         <a:t>說明</a:t>
                       </a:r>
-                    </a:p>
-                  </a:txBody>
-                  <a:tcPr/>
+                      <a:endParaRPr lang="zh-TW" altLang="en-US" sz="1400">
+                        <a:latin typeface="Microsoft JhengHei" panose="020B0604030504040204" pitchFamily="34" charset="-120"/>
+                        <a:ea typeface="Microsoft JhengHei" panose="020B0604030504040204" pitchFamily="34" charset="-120"/>
+                      </a:endParaRPr>
+                    </a:p>
+                  </a:txBody>
+                  <a:tcPr anchor="ctr"/>
                 </a:tc>
                 <a:extLst>
                   <a:ext uri="{0D108BD9-81ED-4DB2-BD59-A6C34878D82A}">
-                    <a16:rowId xmlns:a16="http://schemas.microsoft.com/office/drawing/2014/main" val="4067265123"/>
+                    <a16:rowId xmlns:a16="http://schemas.microsoft.com/office/drawing/2014/main" val="961505403"/>
                   </a:ext>
                 </a:extLst>
               </a:tr>
-              <a:tr h="326218">
-                <a:tc>
-                  <a:txBody>
-                    <a:bodyPr/>
-                    <a:lstStyle/>
-                    <a:p>
-                      <a:r>
-                        <a:rPr lang="en-US" altLang="zh-TW" sz="1400" dirty="0">
+              <a:tr h="353338">
+                <a:tc>
+                  <a:txBody>
+                    <a:bodyPr/>
+                    <a:lstStyle/>
+                    <a:p>
+                      <a:pPr>
+                        <a:buNone/>
+                      </a:pPr>
+                      <a:r>
+                        <a:rPr lang="en" sz="1400" dirty="0">
                           <a:latin typeface="Consolas" panose="020B0609020204030204" pitchFamily="49" charset="0"/>
                           <a:cs typeface="Consolas" panose="020B0609020204030204" pitchFamily="49" charset="0"/>
                         </a:rPr>
-                        <a:t>vm-lb-01</a:t>
-                      </a:r>
-                      <a:endParaRPr lang="zh-TW" altLang="en-US" sz="1400" dirty="0">
+                        <a:t>infogather-sit-lb-01</a:t>
+                      </a:r>
+                      <a:endParaRPr lang="en" sz="1400" dirty="0">
                         <a:latin typeface="Consolas" panose="020B0609020204030204" pitchFamily="49" charset="0"/>
+                        <a:ea typeface="Microsoft JhengHei" panose="020B0604030504040204" pitchFamily="34" charset="-120"/>
                         <a:cs typeface="Consolas" panose="020B0609020204030204" pitchFamily="49" charset="0"/>
                       </a:endParaRPr>
                     </a:p>
                   </a:txBody>
-                  <a:tcPr/>
-                </a:tc>
-                <a:tc>
-                  <a:txBody>
-                    <a:bodyPr/>
-                    <a:lstStyle/>
-                    <a:p>
-                      <a:r>
-                        <a:rPr lang="en-US" altLang="zh-TW" sz="1400" dirty="0"/>
+                  <a:tcPr anchor="ctr"/>
+                </a:tc>
+                <a:tc>
+                  <a:txBody>
+                    <a:bodyPr/>
+                    <a:lstStyle/>
+                    <a:p>
+                      <a:pPr>
+                        <a:buNone/>
+                      </a:pPr>
+                      <a:r>
+                        <a:rPr lang="en"/>
                         <a:t>2 vCPU</a:t>
                       </a:r>
-                      <a:endParaRPr lang="zh-TW" altLang="en-US" sz="1400" dirty="0"/>
-                    </a:p>
-                  </a:txBody>
-                  <a:tcPr/>
-                </a:tc>
-                <a:tc>
-                  <a:txBody>
-                    <a:bodyPr/>
-                    <a:lstStyle/>
-                    <a:p>
-                      <a:r>
-                        <a:rPr lang="en-US" altLang="zh-TW" sz="1400" dirty="0"/>
+                    </a:p>
+                  </a:txBody>
+                  <a:tcPr anchor="ctr"/>
+                </a:tc>
+                <a:tc>
+                  <a:txBody>
+                    <a:bodyPr/>
+                    <a:lstStyle/>
+                    <a:p>
+                      <a:pPr>
+                        <a:buNone/>
+                      </a:pPr>
+                      <a:r>
+                        <a:rPr lang="en"/>
                         <a:t>4 GB</a:t>
                       </a:r>
-                      <a:endParaRPr lang="zh-TW" altLang="en-US" sz="1400" dirty="0"/>
-                    </a:p>
-                  </a:txBody>
-                  <a:tcPr/>
-                </a:tc>
-                <a:tc>
-                  <a:txBody>
-                    <a:bodyPr/>
-                    <a:lstStyle/>
-                    <a:p>
-                      <a:r>
-                        <a:rPr lang="en-US" altLang="zh-TW" sz="1400" dirty="0"/>
-                        <a:t>60 GB</a:t>
-                      </a:r>
-                      <a:endParaRPr lang="zh-TW" altLang="en-US" sz="1400" dirty="0"/>
-                    </a:p>
-                  </a:txBody>
-                  <a:tcPr/>
-                </a:tc>
-                <a:tc>
-                  <a:txBody>
-                    <a:bodyPr/>
-                    <a:lstStyle/>
-                    <a:p>
-                      <a:r>
-                        <a:rPr lang="en-US" altLang="zh-TW" sz="1400" dirty="0"/>
-                        <a:t>Nginx / HA Proxy</a:t>
-                      </a:r>
-                      <a:endParaRPr lang="zh-TW" altLang="en-US" sz="1400" dirty="0"/>
-                    </a:p>
-                  </a:txBody>
-                  <a:tcPr/>
-                </a:tc>
-                <a:tc>
-                  <a:txBody>
-                    <a:bodyPr/>
-                    <a:lstStyle/>
-                    <a:p>
-                      <a:r>
-                        <a:rPr lang="zh-TW" altLang="en-US" sz="1400" b="0" i="0" u="none" strike="noStrike" cap="none" dirty="0">
-                          <a:solidFill>
-                            <a:srgbClr val="000000"/>
-                          </a:solidFill>
-                          <a:effectLst/>
-                          <a:latin typeface="Arial"/>
-                          <a:ea typeface="Arial"/>
-                          <a:cs typeface="Arial"/>
-                          <a:sym typeface="Arial"/>
-                        </a:rPr>
-                        <a:t>入口 </a:t>
-                      </a:r>
-                      <a:r>
-                        <a:rPr lang="en" altLang="zh-TW" sz="1400" b="0" i="0" u="none" strike="noStrike" cap="none" dirty="0">
-                          <a:solidFill>
-                            <a:srgbClr val="000000"/>
-                          </a:solidFill>
-                          <a:effectLst/>
-                          <a:latin typeface="Arial"/>
-                          <a:ea typeface="Arial"/>
-                          <a:cs typeface="Arial"/>
-                          <a:sym typeface="Arial"/>
-                        </a:rPr>
-                        <a:t>active </a:t>
-                      </a:r>
-                      <a:r>
-                        <a:rPr lang="zh-TW" altLang="en-US" sz="1400" b="0" i="0" u="none" strike="noStrike" cap="none" dirty="0">
-                          <a:solidFill>
-                            <a:srgbClr val="000000"/>
-                          </a:solidFill>
-                          <a:effectLst/>
-                          <a:latin typeface="Arial"/>
-                          <a:ea typeface="Arial"/>
-                          <a:cs typeface="Arial"/>
-                          <a:sym typeface="Arial"/>
-                        </a:rPr>
-                        <a:t>節點</a:t>
-                      </a:r>
-                      <a:endParaRPr lang="zh-TW" altLang="en-US" sz="1400" dirty="0"/>
-                    </a:p>
-                  </a:txBody>
-                  <a:tcPr/>
+                    </a:p>
+                  </a:txBody>
+                  <a:tcPr anchor="ctr"/>
+                </a:tc>
+                <a:tc>
+                  <a:txBody>
+                    <a:bodyPr/>
+                    <a:lstStyle/>
+                    <a:p>
+                      <a:pPr>
+                        <a:buNone/>
+                      </a:pPr>
+                      <a:r>
+                        <a:rPr lang="en"/>
+                        <a:t>40 GB</a:t>
+                      </a:r>
+                    </a:p>
+                  </a:txBody>
+                  <a:tcPr anchor="ctr"/>
+                </a:tc>
+                <a:tc>
+                  <a:txBody>
+                    <a:bodyPr/>
+                    <a:lstStyle/>
+                    <a:p>
+                      <a:pPr>
+                        <a:buNone/>
+                      </a:pPr>
+                      <a:r>
+                        <a:rPr lang="en" sz="1400"/>
+                        <a:t>Nginx / HAProxy</a:t>
+                      </a:r>
+                      <a:endParaRPr lang="en" sz="1400">
+                        <a:latin typeface="Microsoft JhengHei" panose="020B0604030504040204" pitchFamily="34" charset="-120"/>
+                        <a:ea typeface="Microsoft JhengHei" panose="020B0604030504040204" pitchFamily="34" charset="-120"/>
+                      </a:endParaRPr>
+                    </a:p>
+                  </a:txBody>
+                  <a:tcPr anchor="ctr"/>
+                </a:tc>
+                <a:tc>
+                  <a:txBody>
+                    <a:bodyPr/>
+                    <a:lstStyle/>
+                    <a:p>
+                      <a:pPr>
+                        <a:buNone/>
+                      </a:pPr>
+                      <a:r>
+                        <a:rPr lang="en" sz="1400"/>
+                        <a:t>SIT </a:t>
+                      </a:r>
+                      <a:r>
+                        <a:rPr lang="zh-TW" altLang="en-US" sz="1400"/>
+                        <a:t>入口節點</a:t>
+                      </a:r>
+                      <a:endParaRPr lang="zh-TW" altLang="en-US" sz="1400">
+                        <a:latin typeface="Microsoft JhengHei" panose="020B0604030504040204" pitchFamily="34" charset="-120"/>
+                        <a:ea typeface="Microsoft JhengHei" panose="020B0604030504040204" pitchFamily="34" charset="-120"/>
+                      </a:endParaRPr>
+                    </a:p>
+                  </a:txBody>
+                  <a:tcPr anchor="ctr"/>
                 </a:tc>
                 <a:extLst>
                   <a:ext uri="{0D108BD9-81ED-4DB2-BD59-A6C34878D82A}">
-                    <a16:rowId xmlns:a16="http://schemas.microsoft.com/office/drawing/2014/main" val="1713446290"/>
+                    <a16:rowId xmlns:a16="http://schemas.microsoft.com/office/drawing/2014/main" val="4275047890"/>
                   </a:ext>
                 </a:extLst>
               </a:tr>
-              <a:tr h="326218">
-                <a:tc>
-                  <a:txBody>
-                    <a:bodyPr/>
-                    <a:lstStyle/>
-                    <a:p>
-                      <a:r>
-                        <a:rPr lang="en-US" altLang="zh-TW" sz="1400" dirty="0">
+              <a:tr h="353338">
+                <a:tc>
+                  <a:txBody>
+                    <a:bodyPr/>
+                    <a:lstStyle/>
+                    <a:p>
+                      <a:pPr>
+                        <a:buNone/>
+                      </a:pPr>
+                      <a:r>
+                        <a:rPr lang="en" sz="1400" dirty="0">
                           <a:latin typeface="Consolas" panose="020B0609020204030204" pitchFamily="49" charset="0"/>
                           <a:cs typeface="Consolas" panose="020B0609020204030204" pitchFamily="49" charset="0"/>
                         </a:rPr>
-                        <a:t>vm-lb-02</a:t>
-                      </a:r>
-                      <a:endParaRPr lang="zh-TW" altLang="en-US" sz="1400" dirty="0">
+                        <a:t>infogather-sit-app-01</a:t>
+                      </a:r>
+                      <a:endParaRPr lang="en" sz="1400" dirty="0">
                         <a:latin typeface="Consolas" panose="020B0609020204030204" pitchFamily="49" charset="0"/>
+                        <a:ea typeface="Microsoft JhengHei" panose="020B0604030504040204" pitchFamily="34" charset="-120"/>
                         <a:cs typeface="Consolas" panose="020B0609020204030204" pitchFamily="49" charset="0"/>
                       </a:endParaRPr>
                     </a:p>
                   </a:txBody>
-                  <a:tcPr/>
-                </a:tc>
-                <a:tc>
-                  <a:txBody>
-                    <a:bodyPr/>
-                    <a:lstStyle/>
-                    <a:p>
-                      <a:r>
-                        <a:rPr lang="en-US" altLang="zh-TW" sz="1400" dirty="0"/>
-                        <a:t>2 vCPU</a:t>
-                      </a:r>
-                      <a:endParaRPr lang="zh-TW" altLang="en-US" sz="1400" dirty="0"/>
-                    </a:p>
-                  </a:txBody>
-                  <a:tcPr/>
-                </a:tc>
-                <a:tc>
-                  <a:txBody>
-                    <a:bodyPr/>
-                    <a:lstStyle/>
-                    <a:p>
-                      <a:r>
-                        <a:rPr lang="en-US" altLang="zh-TW" sz="1400" dirty="0"/>
-                        <a:t>4 GB</a:t>
-                      </a:r>
-                      <a:endParaRPr lang="zh-TW" altLang="en-US" sz="1400" dirty="0"/>
-                    </a:p>
-                  </a:txBody>
-                  <a:tcPr/>
-                </a:tc>
-                <a:tc>
-                  <a:txBody>
-                    <a:bodyPr/>
-                    <a:lstStyle/>
-                    <a:p>
-                      <a:r>
-                        <a:rPr lang="en-US" altLang="zh-TW" sz="1400" dirty="0"/>
-                        <a:t>60 GB</a:t>
-                      </a:r>
-                      <a:endParaRPr lang="zh-TW" altLang="en-US" sz="1400" dirty="0"/>
-                    </a:p>
-                  </a:txBody>
-                  <a:tcPr/>
-                </a:tc>
-                <a:tc>
-                  <a:txBody>
-                    <a:bodyPr/>
-                    <a:lstStyle/>
-                    <a:p>
-                      <a:r>
-                        <a:rPr lang="en-US" altLang="zh-TW" sz="1400" dirty="0"/>
-                        <a:t>Nginx / HA Proxy</a:t>
-                      </a:r>
-                      <a:endParaRPr lang="zh-TW" altLang="en-US" sz="1400" dirty="0"/>
-                    </a:p>
-                  </a:txBody>
-                  <a:tcPr/>
-                </a:tc>
-                <a:tc>
-                  <a:txBody>
-                    <a:bodyPr/>
-                    <a:lstStyle/>
-                    <a:p>
-                      <a:r>
-                        <a:rPr lang="zh-TW" altLang="en-US" sz="1400" b="0" i="0" u="none" strike="noStrike" cap="none" dirty="0">
-                          <a:solidFill>
-                            <a:srgbClr val="000000"/>
-                          </a:solidFill>
-                          <a:effectLst/>
-                          <a:latin typeface="Arial"/>
-                          <a:ea typeface="Arial"/>
-                          <a:cs typeface="Arial"/>
-                          <a:sym typeface="Arial"/>
-                        </a:rPr>
-                        <a:t>入口 </a:t>
-                      </a:r>
-                      <a:r>
-                        <a:rPr lang="en" altLang="zh-TW" sz="1400" b="0" i="0" u="none" strike="noStrike" cap="none" dirty="0">
-                          <a:solidFill>
-                            <a:srgbClr val="000000"/>
-                          </a:solidFill>
-                          <a:effectLst/>
-                          <a:latin typeface="Arial"/>
-                          <a:ea typeface="Arial"/>
-                          <a:cs typeface="Arial"/>
-                          <a:sym typeface="Arial"/>
-                        </a:rPr>
-                        <a:t>standby </a:t>
-                      </a:r>
-                      <a:r>
-                        <a:rPr lang="zh-TW" altLang="en-US" sz="1400" b="0" i="0" u="none" strike="noStrike" cap="none" dirty="0">
-                          <a:solidFill>
-                            <a:srgbClr val="000000"/>
-                          </a:solidFill>
-                          <a:effectLst/>
-                          <a:latin typeface="Arial"/>
-                          <a:ea typeface="Arial"/>
-                          <a:cs typeface="Arial"/>
-                          <a:sym typeface="Arial"/>
-                        </a:rPr>
-                        <a:t>節點</a:t>
-                      </a:r>
-                      <a:endParaRPr lang="zh-TW" altLang="en-US" sz="1400" dirty="0"/>
-                    </a:p>
-                  </a:txBody>
-                  <a:tcPr/>
+                  <a:tcPr anchor="ctr"/>
+                </a:tc>
+                <a:tc>
+                  <a:txBody>
+                    <a:bodyPr/>
+                    <a:lstStyle/>
+                    <a:p>
+                      <a:pPr>
+                        <a:buNone/>
+                      </a:pPr>
+                      <a:r>
+                        <a:rPr lang="en"/>
+                        <a:t>4 vCPU</a:t>
+                      </a:r>
+                    </a:p>
+                  </a:txBody>
+                  <a:tcPr anchor="ctr"/>
+                </a:tc>
+                <a:tc>
+                  <a:txBody>
+                    <a:bodyPr/>
+                    <a:lstStyle/>
+                    <a:p>
+                      <a:pPr>
+                        <a:buNone/>
+                      </a:pPr>
+                      <a:r>
+                        <a:rPr lang="en"/>
+                        <a:t>8 GB</a:t>
+                      </a:r>
+                    </a:p>
+                  </a:txBody>
+                  <a:tcPr anchor="ctr"/>
+                </a:tc>
+                <a:tc>
+                  <a:txBody>
+                    <a:bodyPr/>
+                    <a:lstStyle/>
+                    <a:p>
+                      <a:pPr>
+                        <a:buNone/>
+                      </a:pPr>
+                      <a:r>
+                        <a:rPr lang="en"/>
+                        <a:t>80 GB</a:t>
+                      </a:r>
+                    </a:p>
+                  </a:txBody>
+                  <a:tcPr anchor="ctr"/>
+                </a:tc>
+                <a:tc>
+                  <a:txBody>
+                    <a:bodyPr/>
+                    <a:lstStyle/>
+                    <a:p>
+                      <a:pPr>
+                        <a:buNone/>
+                      </a:pPr>
+                      <a:r>
+                        <a:rPr lang="en" sz="1400" dirty="0" err="1"/>
+                        <a:t>InfoGather</a:t>
+                      </a:r>
+                      <a:r>
+                        <a:rPr lang="en" sz="1400" dirty="0"/>
+                        <a:t> </a:t>
+                      </a:r>
+                      <a:r>
+                        <a:rPr lang="en" sz="1400" dirty="0" err="1"/>
+                        <a:t>app、worker、scheduler</a:t>
+                      </a:r>
+                      <a:endParaRPr lang="en" sz="1400" dirty="0">
+                        <a:latin typeface="Microsoft JhengHei" panose="020B0604030504040204" pitchFamily="34" charset="-120"/>
+                        <a:ea typeface="Microsoft JhengHei" panose="020B0604030504040204" pitchFamily="34" charset="-120"/>
+                      </a:endParaRPr>
+                    </a:p>
+                  </a:txBody>
+                  <a:tcPr anchor="ctr"/>
+                </a:tc>
+                <a:tc>
+                  <a:txBody>
+                    <a:bodyPr/>
+                    <a:lstStyle/>
+                    <a:p>
+                      <a:pPr>
+                        <a:buNone/>
+                      </a:pPr>
+                      <a:r>
+                        <a:rPr lang="en" sz="1400" dirty="0"/>
+                        <a:t>SIT </a:t>
+                      </a:r>
+                      <a:r>
+                        <a:rPr lang="zh-TW" altLang="en-US" sz="1400" dirty="0"/>
+                        <a:t>主應用節點</a:t>
+                      </a:r>
+                      <a:endParaRPr lang="en" sz="1400" dirty="0">
+                        <a:latin typeface="Microsoft JhengHei" panose="020B0604030504040204" pitchFamily="34" charset="-120"/>
+                        <a:ea typeface="Microsoft JhengHei" panose="020B0604030504040204" pitchFamily="34" charset="-120"/>
+                      </a:endParaRPr>
+                    </a:p>
+                  </a:txBody>
+                  <a:tcPr anchor="ctr"/>
                 </a:tc>
                 <a:extLst>
                   <a:ext uri="{0D108BD9-81ED-4DB2-BD59-A6C34878D82A}">
-                    <a16:rowId xmlns:a16="http://schemas.microsoft.com/office/drawing/2014/main" val="1851843156"/>
+                    <a16:rowId xmlns:a16="http://schemas.microsoft.com/office/drawing/2014/main" val="2565674944"/>
                   </a:ext>
                 </a:extLst>
               </a:tr>
-              <a:tr h="326218">
-                <a:tc>
-                  <a:txBody>
-                    <a:bodyPr/>
-                    <a:lstStyle/>
-                    <a:p>
-                      <a:r>
-                        <a:rPr lang="en-US" altLang="zh-TW" sz="1400" dirty="0">
+              <a:tr h="353338">
+                <a:tc>
+                  <a:txBody>
+                    <a:bodyPr/>
+                    <a:lstStyle/>
+                    <a:p>
+                      <a:pPr>
+                        <a:buNone/>
+                      </a:pPr>
+                      <a:r>
+                        <a:rPr lang="en" sz="1400" dirty="0">
                           <a:latin typeface="Consolas" panose="020B0609020204030204" pitchFamily="49" charset="0"/>
                           <a:cs typeface="Consolas" panose="020B0609020204030204" pitchFamily="49" charset="0"/>
                         </a:rPr>
-                        <a:t>vm-app-01</a:t>
-                      </a:r>
-                      <a:endParaRPr lang="zh-TW" altLang="en-US" sz="1400" dirty="0">
+                        <a:t>infogather-sit-app-02</a:t>
+                      </a:r>
+                      <a:endParaRPr lang="en" sz="1400" dirty="0">
                         <a:latin typeface="Consolas" panose="020B0609020204030204" pitchFamily="49" charset="0"/>
+                        <a:ea typeface="Microsoft JhengHei" panose="020B0604030504040204" pitchFamily="34" charset="-120"/>
                         <a:cs typeface="Consolas" panose="020B0609020204030204" pitchFamily="49" charset="0"/>
                       </a:endParaRPr>
                     </a:p>
                   </a:txBody>
-                  <a:tcPr/>
-                </a:tc>
-                <a:tc>
-                  <a:txBody>
-                    <a:bodyPr/>
-                    <a:lstStyle/>
-                    <a:p>
-                      <a:r>
-                        <a:rPr lang="en-US" altLang="zh-TW" sz="1400" dirty="0"/>
+                  <a:tcPr anchor="ctr"/>
+                </a:tc>
+                <a:tc>
+                  <a:txBody>
+                    <a:bodyPr/>
+                    <a:lstStyle/>
+                    <a:p>
+                      <a:pPr>
+                        <a:buNone/>
+                      </a:pPr>
+                      <a:r>
+                        <a:rPr lang="en"/>
                         <a:t>4 vCPU</a:t>
                       </a:r>
-                      <a:endParaRPr lang="zh-TW" altLang="en-US" sz="1400" dirty="0"/>
-                    </a:p>
-                  </a:txBody>
-                  <a:tcPr/>
-                </a:tc>
-                <a:tc>
-                  <a:txBody>
-                    <a:bodyPr/>
-                    <a:lstStyle/>
-                    <a:p>
-                      <a:r>
-                        <a:rPr lang="en-US" altLang="zh-TW" sz="1400" dirty="0"/>
-                        <a:t>16 GB</a:t>
-                      </a:r>
-                      <a:endParaRPr lang="zh-TW" altLang="en-US" sz="1400" dirty="0"/>
-                    </a:p>
-                  </a:txBody>
-                  <a:tcPr/>
-                </a:tc>
-                <a:tc>
-                  <a:txBody>
-                    <a:bodyPr/>
-                    <a:lstStyle/>
-                    <a:p>
-                      <a:r>
-                        <a:rPr lang="en-US" altLang="zh-TW" sz="1400" dirty="0"/>
-                        <a:t>100 GB</a:t>
-                      </a:r>
-                      <a:endParaRPr lang="zh-TW" altLang="en-US" sz="1400" dirty="0"/>
-                    </a:p>
-                  </a:txBody>
-                  <a:tcPr/>
-                </a:tc>
-                <a:tc>
-                  <a:txBody>
-                    <a:bodyPr/>
-                    <a:lstStyle/>
-                    <a:p>
-                      <a:r>
-                        <a:rPr lang="en-US" altLang="zh-TW" sz="1400" dirty="0" err="1"/>
+                    </a:p>
+                  </a:txBody>
+                  <a:tcPr anchor="ctr"/>
+                </a:tc>
+                <a:tc>
+                  <a:txBody>
+                    <a:bodyPr/>
+                    <a:lstStyle/>
+                    <a:p>
+                      <a:pPr>
+                        <a:buNone/>
+                      </a:pPr>
+                      <a:r>
+                        <a:rPr lang="en"/>
+                        <a:t>8 GB</a:t>
+                      </a:r>
+                    </a:p>
+                  </a:txBody>
+                  <a:tcPr anchor="ctr"/>
+                </a:tc>
+                <a:tc>
+                  <a:txBody>
+                    <a:bodyPr/>
+                    <a:lstStyle/>
+                    <a:p>
+                      <a:pPr>
+                        <a:buNone/>
+                      </a:pPr>
+                      <a:r>
+                        <a:rPr lang="en"/>
+                        <a:t>80 GB</a:t>
+                      </a:r>
+                    </a:p>
+                  </a:txBody>
+                  <a:tcPr anchor="ctr"/>
+                </a:tc>
+                <a:tc>
+                  <a:txBody>
+                    <a:bodyPr/>
+                    <a:lstStyle/>
+                    <a:p>
+                      <a:pPr>
+                        <a:buNone/>
+                      </a:pPr>
+                      <a:r>
+                        <a:rPr lang="en" sz="1400" dirty="0" err="1"/>
                         <a:t>InfoGather</a:t>
                       </a:r>
                       <a:r>
-                        <a:rPr lang="en-US" altLang="zh-TW" sz="1400" dirty="0"/>
-                        <a:t> app, worker</a:t>
-                      </a:r>
-                      <a:endParaRPr lang="zh-TW" altLang="en-US" sz="1400" dirty="0"/>
-                    </a:p>
-                  </a:txBody>
-                  <a:tcPr/>
-                </a:tc>
-                <a:tc>
-                  <a:txBody>
-                    <a:bodyPr/>
-                    <a:lstStyle/>
-                    <a:p>
-                      <a:r>
-                        <a:rPr lang="en" altLang="zh-TW" sz="1400" b="0" i="0" u="none" strike="noStrike" cap="none" dirty="0" err="1">
-                          <a:solidFill>
-                            <a:srgbClr val="000000"/>
-                          </a:solidFill>
-                          <a:effectLst/>
-                          <a:latin typeface="Arial"/>
-                          <a:ea typeface="Arial"/>
-                          <a:cs typeface="Arial"/>
-                          <a:sym typeface="Arial"/>
-                        </a:rPr>
-                        <a:t>InfoGather</a:t>
-                      </a:r>
-                      <a:r>
-                        <a:rPr lang="en" altLang="zh-TW" sz="1400" b="0" i="0" u="none" strike="noStrike" cap="none" dirty="0">
-                          <a:solidFill>
-                            <a:srgbClr val="000000"/>
-                          </a:solidFill>
-                          <a:effectLst/>
-                          <a:latin typeface="Arial"/>
-                          <a:ea typeface="Arial"/>
-                          <a:cs typeface="Arial"/>
-                          <a:sym typeface="Arial"/>
-                        </a:rPr>
-                        <a:t> app </a:t>
-                      </a:r>
-                      <a:r>
-                        <a:rPr lang="zh-TW" altLang="en-US" sz="1400" b="0" i="0" u="none" strike="noStrike" cap="none" dirty="0">
-                          <a:solidFill>
-                            <a:srgbClr val="000000"/>
-                          </a:solidFill>
-                          <a:effectLst/>
-                          <a:latin typeface="Arial"/>
-                          <a:ea typeface="Arial"/>
-                          <a:cs typeface="Arial"/>
-                          <a:sym typeface="Arial"/>
-                        </a:rPr>
-                        <a:t>與 </a:t>
-                      </a:r>
-                      <a:r>
-                        <a:rPr lang="en" altLang="zh-TW" sz="1400" b="0" i="0" u="none" strike="noStrike" cap="none" dirty="0">
-                          <a:solidFill>
-                            <a:srgbClr val="000000"/>
-                          </a:solidFill>
-                          <a:effectLst/>
-                          <a:latin typeface="Arial"/>
-                          <a:ea typeface="Arial"/>
-                          <a:cs typeface="Arial"/>
-                          <a:sym typeface="Arial"/>
-                        </a:rPr>
-                        <a:t>worker </a:t>
-                      </a:r>
-                      <a:r>
-                        <a:rPr lang="zh-TW" altLang="en-US" sz="1400" b="0" i="0" u="none" strike="noStrike" cap="none" dirty="0">
-                          <a:solidFill>
-                            <a:srgbClr val="000000"/>
-                          </a:solidFill>
-                          <a:effectLst/>
-                          <a:latin typeface="Arial"/>
-                          <a:ea typeface="Arial"/>
-                          <a:cs typeface="Arial"/>
-                          <a:sym typeface="Arial"/>
-                        </a:rPr>
-                        <a:t>共用節點</a:t>
-                      </a:r>
-                      <a:endParaRPr lang="zh-TW" altLang="en-US" sz="1400" dirty="0"/>
-                    </a:p>
-                  </a:txBody>
-                  <a:tcPr/>
+                        <a:rPr lang="en" sz="1400" dirty="0"/>
+                        <a:t> </a:t>
+                      </a:r>
+                      <a:r>
+                        <a:rPr lang="en" sz="1400" dirty="0" err="1"/>
+                        <a:t>app、worker</a:t>
+                      </a:r>
+                      <a:endParaRPr lang="en" sz="1400" dirty="0">
+                        <a:latin typeface="Microsoft JhengHei" panose="020B0604030504040204" pitchFamily="34" charset="-120"/>
+                        <a:ea typeface="Microsoft JhengHei" panose="020B0604030504040204" pitchFamily="34" charset="-120"/>
+                      </a:endParaRPr>
+                    </a:p>
+                  </a:txBody>
+                  <a:tcPr anchor="ctr"/>
+                </a:tc>
+                <a:tc>
+                  <a:txBody>
+                    <a:bodyPr/>
+                    <a:lstStyle/>
+                    <a:p>
+                      <a:pPr>
+                        <a:buNone/>
+                      </a:pPr>
+                      <a:r>
+                        <a:rPr lang="en" sz="1400"/>
+                        <a:t>SIT </a:t>
+                      </a:r>
+                      <a:r>
+                        <a:rPr lang="zh-TW" altLang="en-US" sz="1400"/>
+                        <a:t>第二應用節點</a:t>
+                      </a:r>
+                      <a:endParaRPr lang="zh-TW" altLang="en-US" sz="1400">
+                        <a:latin typeface="Microsoft JhengHei" panose="020B0604030504040204" pitchFamily="34" charset="-120"/>
+                        <a:ea typeface="Microsoft JhengHei" panose="020B0604030504040204" pitchFamily="34" charset="-120"/>
+                      </a:endParaRPr>
+                    </a:p>
+                  </a:txBody>
+                  <a:tcPr anchor="ctr"/>
                 </a:tc>
                 <a:extLst>
                   <a:ext uri="{0D108BD9-81ED-4DB2-BD59-A6C34878D82A}">
-                    <a16:rowId xmlns:a16="http://schemas.microsoft.com/office/drawing/2014/main" val="924018234"/>
+                    <a16:rowId xmlns:a16="http://schemas.microsoft.com/office/drawing/2014/main" val="507787501"/>
                   </a:ext>
                 </a:extLst>
               </a:tr>
-              <a:tr h="326218">
-                <a:tc>
-                  <a:txBody>
-                    <a:bodyPr/>
-                    <a:lstStyle/>
-                    <a:p>
-                      <a:pPr marL="0" marR="0" lvl="0" indent="0" algn="l" defTabSz="914400" rtl="0" eaLnBrk="1" fontAlgn="auto" latinLnBrk="0" hangingPunct="1">
-                        <a:lnSpc>
-                          <a:spcPct val="100000"/>
-                        </a:lnSpc>
-                        <a:spcBef>
-                          <a:spcPts val="0"/>
-                        </a:spcBef>
-                        <a:spcAft>
-                          <a:spcPts val="0"/>
-                        </a:spcAft>
-                        <a:buClr>
-                          <a:srgbClr val="000000"/>
-                        </a:buClr>
-                        <a:buSzTx/>
-                        <a:buFont typeface="Arial"/>
-                        <a:buNone/>
-                        <a:tabLst/>
-                        <a:defRPr/>
-                      </a:pPr>
-                      <a:r>
-                        <a:rPr lang="en-US" altLang="zh-TW" sz="1400" dirty="0">
+              <a:tr h="363331">
+                <a:tc>
+                  <a:txBody>
+                    <a:bodyPr/>
+                    <a:lstStyle/>
+                    <a:p>
+                      <a:pPr>
+                        <a:buNone/>
+                      </a:pPr>
+                      <a:r>
+                        <a:rPr lang="en" sz="1400" dirty="0">
                           <a:latin typeface="Consolas" panose="020B0609020204030204" pitchFamily="49" charset="0"/>
                           <a:cs typeface="Consolas" panose="020B0609020204030204" pitchFamily="49" charset="0"/>
                         </a:rPr>
-                        <a:t>vm-app-01</a:t>
-                      </a:r>
-                      <a:endParaRPr lang="zh-TW" altLang="en-US" sz="1400" dirty="0">
+                        <a:t>infogather-sit-mongo-01</a:t>
+                      </a:r>
+                      <a:endParaRPr lang="en" sz="1400" dirty="0">
                         <a:latin typeface="Consolas" panose="020B0609020204030204" pitchFamily="49" charset="0"/>
+                        <a:ea typeface="Microsoft JhengHei" panose="020B0604030504040204" pitchFamily="34" charset="-120"/>
                         <a:cs typeface="Consolas" panose="020B0609020204030204" pitchFamily="49" charset="0"/>
                       </a:endParaRPr>
                     </a:p>
                   </a:txBody>
-                  <a:tcPr/>
-                </a:tc>
-                <a:tc>
-                  <a:txBody>
-                    <a:bodyPr/>
-                    <a:lstStyle/>
-                    <a:p>
-                      <a:r>
-                        <a:rPr lang="en-US" altLang="zh-TW" sz="1400" dirty="0"/>
+                  <a:tcPr anchor="ctr"/>
+                </a:tc>
+                <a:tc>
+                  <a:txBody>
+                    <a:bodyPr/>
+                    <a:lstStyle/>
+                    <a:p>
+                      <a:pPr>
+                        <a:buNone/>
+                      </a:pPr>
+                      <a:r>
+                        <a:rPr lang="en"/>
                         <a:t>4 vCPU</a:t>
                       </a:r>
-                      <a:endParaRPr lang="zh-TW" altLang="en-US" sz="1400" dirty="0"/>
-                    </a:p>
-                  </a:txBody>
-                  <a:tcPr/>
-                </a:tc>
-                <a:tc>
-                  <a:txBody>
-                    <a:bodyPr/>
-                    <a:lstStyle/>
-                    <a:p>
-                      <a:r>
-                        <a:rPr lang="en-US" altLang="zh-TW" sz="1400" dirty="0"/>
-                        <a:t>16 GB</a:t>
-                      </a:r>
-                      <a:endParaRPr lang="zh-TW" altLang="en-US" sz="1400" dirty="0"/>
-                    </a:p>
-                  </a:txBody>
-                  <a:tcPr/>
-                </a:tc>
-                <a:tc>
-                  <a:txBody>
-                    <a:bodyPr/>
-                    <a:lstStyle/>
-                    <a:p>
-                      <a:r>
-                        <a:rPr lang="en-US" altLang="zh-TW" sz="1400" dirty="0"/>
-                        <a:t>100 GB</a:t>
-                      </a:r>
-                      <a:endParaRPr lang="zh-TW" altLang="en-US" sz="1400" dirty="0"/>
-                    </a:p>
-                  </a:txBody>
-                  <a:tcPr/>
-                </a:tc>
-                <a:tc>
-                  <a:txBody>
-                    <a:bodyPr/>
-                    <a:lstStyle/>
-                    <a:p>
-                      <a:r>
-                        <a:rPr lang="en-US" altLang="zh-TW" sz="1400" dirty="0" err="1"/>
-                        <a:t>InfoGather</a:t>
-                      </a:r>
-                      <a:r>
-                        <a:rPr lang="en-US" altLang="zh-TW" sz="1400" dirty="0"/>
-                        <a:t> app, worker</a:t>
-                      </a:r>
-                      <a:endParaRPr lang="zh-TW" altLang="en-US" sz="1400" dirty="0"/>
-                    </a:p>
-                  </a:txBody>
-                  <a:tcPr/>
-                </a:tc>
-                <a:tc>
-                  <a:txBody>
-                    <a:bodyPr/>
-                    <a:lstStyle/>
-                    <a:p>
-                      <a:r>
-                        <a:rPr lang="en" altLang="zh-TW" sz="1400" b="0" i="0" u="none" strike="noStrike" cap="none" dirty="0" err="1">
-                          <a:solidFill>
-                            <a:srgbClr val="000000"/>
-                          </a:solidFill>
-                          <a:effectLst/>
-                          <a:latin typeface="Arial"/>
-                          <a:ea typeface="Arial"/>
-                          <a:cs typeface="Arial"/>
-                          <a:sym typeface="Arial"/>
-                        </a:rPr>
-                        <a:t>InfoGather</a:t>
-                      </a:r>
-                      <a:r>
-                        <a:rPr lang="en" altLang="zh-TW" sz="1400" b="0" i="0" u="none" strike="noStrike" cap="none" dirty="0">
-                          <a:solidFill>
-                            <a:srgbClr val="000000"/>
-                          </a:solidFill>
-                          <a:effectLst/>
-                          <a:latin typeface="Arial"/>
-                          <a:ea typeface="Arial"/>
-                          <a:cs typeface="Arial"/>
-                          <a:sym typeface="Arial"/>
-                        </a:rPr>
-                        <a:t> app </a:t>
-                      </a:r>
-                      <a:r>
-                        <a:rPr lang="zh-TW" altLang="en-US" sz="1400" b="0" i="0" u="none" strike="noStrike" cap="none" dirty="0">
-                          <a:solidFill>
-                            <a:srgbClr val="000000"/>
-                          </a:solidFill>
-                          <a:effectLst/>
-                          <a:latin typeface="Arial"/>
-                          <a:ea typeface="Arial"/>
-                          <a:cs typeface="Arial"/>
-                          <a:sym typeface="Arial"/>
-                        </a:rPr>
-                        <a:t>與 </a:t>
-                      </a:r>
-                      <a:r>
-                        <a:rPr lang="en" altLang="zh-TW" sz="1400" b="0" i="0" u="none" strike="noStrike" cap="none" dirty="0">
-                          <a:solidFill>
-                            <a:srgbClr val="000000"/>
-                          </a:solidFill>
-                          <a:effectLst/>
-                          <a:latin typeface="Arial"/>
-                          <a:ea typeface="Arial"/>
-                          <a:cs typeface="Arial"/>
-                          <a:sym typeface="Arial"/>
-                        </a:rPr>
-                        <a:t>worker </a:t>
-                      </a:r>
-                      <a:r>
-                        <a:rPr lang="zh-TW" altLang="en-US" sz="1400" b="0" i="0" u="none" strike="noStrike" cap="none" dirty="0">
-                          <a:solidFill>
-                            <a:srgbClr val="000000"/>
-                          </a:solidFill>
-                          <a:effectLst/>
-                          <a:latin typeface="Arial"/>
-                          <a:ea typeface="Arial"/>
-                          <a:cs typeface="Arial"/>
-                          <a:sym typeface="Arial"/>
-                        </a:rPr>
-                        <a:t>共用節點</a:t>
-                      </a:r>
-                      <a:endParaRPr lang="zh-TW" altLang="en-US" sz="1400" dirty="0"/>
-                    </a:p>
-                  </a:txBody>
-                  <a:tcPr/>
+                    </a:p>
+                  </a:txBody>
+                  <a:tcPr anchor="ctr"/>
+                </a:tc>
+                <a:tc>
+                  <a:txBody>
+                    <a:bodyPr/>
+                    <a:lstStyle/>
+                    <a:p>
+                      <a:pPr>
+                        <a:buNone/>
+                      </a:pPr>
+                      <a:r>
+                        <a:rPr lang="en"/>
+                        <a:t>8 GB</a:t>
+                      </a:r>
+                    </a:p>
+                  </a:txBody>
+                  <a:tcPr anchor="ctr"/>
+                </a:tc>
+                <a:tc>
+                  <a:txBody>
+                    <a:bodyPr/>
+                    <a:lstStyle/>
+                    <a:p>
+                      <a:pPr>
+                        <a:buNone/>
+                      </a:pPr>
+                      <a:r>
+                        <a:rPr lang="en"/>
+                        <a:t>200 GB</a:t>
+                      </a:r>
+                    </a:p>
+                  </a:txBody>
+                  <a:tcPr anchor="ctr"/>
+                </a:tc>
+                <a:tc>
+                  <a:txBody>
+                    <a:bodyPr/>
+                    <a:lstStyle/>
+                    <a:p>
+                      <a:pPr>
+                        <a:buNone/>
+                      </a:pPr>
+                      <a:r>
+                        <a:rPr lang="en" sz="1400"/>
+                        <a:t>MongoDB replica set member</a:t>
+                      </a:r>
+                      <a:endParaRPr lang="en" sz="1400">
+                        <a:latin typeface="Microsoft JhengHei" panose="020B0604030504040204" pitchFamily="34" charset="-120"/>
+                        <a:ea typeface="Microsoft JhengHei" panose="020B0604030504040204" pitchFamily="34" charset="-120"/>
+                      </a:endParaRPr>
+                    </a:p>
+                  </a:txBody>
+                  <a:tcPr anchor="ctr"/>
+                </a:tc>
+                <a:tc>
+                  <a:txBody>
+                    <a:bodyPr/>
+                    <a:lstStyle/>
+                    <a:p>
+                      <a:pPr>
+                        <a:buNone/>
+                      </a:pPr>
+                      <a:r>
+                        <a:rPr lang="en" sz="1400" dirty="0"/>
+                        <a:t>primary candidate</a:t>
+                      </a:r>
+                      <a:endParaRPr lang="en" sz="1400" dirty="0">
+                        <a:latin typeface="Microsoft JhengHei" panose="020B0604030504040204" pitchFamily="34" charset="-120"/>
+                        <a:ea typeface="Microsoft JhengHei" panose="020B0604030504040204" pitchFamily="34" charset="-120"/>
+                      </a:endParaRPr>
+                    </a:p>
+                  </a:txBody>
+                  <a:tcPr anchor="ctr"/>
                 </a:tc>
                 <a:extLst>
                   <a:ext uri="{0D108BD9-81ED-4DB2-BD59-A6C34878D82A}">
-                    <a16:rowId xmlns:a16="http://schemas.microsoft.com/office/drawing/2014/main" val="3442449912"/>
+                    <a16:rowId xmlns:a16="http://schemas.microsoft.com/office/drawing/2014/main" val="3240847069"/>
                   </a:ext>
                 </a:extLst>
               </a:tr>
-              <a:tr h="326218">
-                <a:tc>
-                  <a:txBody>
-                    <a:bodyPr/>
-                    <a:lstStyle/>
-                    <a:p>
-                      <a:pPr marL="0" marR="0" lvl="0" indent="0" algn="l" defTabSz="914400" rtl="0" eaLnBrk="1" fontAlgn="auto" latinLnBrk="0" hangingPunct="1">
-                        <a:lnSpc>
-                          <a:spcPct val="100000"/>
-                        </a:lnSpc>
-                        <a:spcBef>
-                          <a:spcPts val="0"/>
-                        </a:spcBef>
-                        <a:spcAft>
-                          <a:spcPts val="0"/>
-                        </a:spcAft>
-                        <a:buClr>
-                          <a:srgbClr val="000000"/>
-                        </a:buClr>
-                        <a:buSzTx/>
-                        <a:buFont typeface="Arial"/>
-                        <a:buNone/>
-                        <a:tabLst/>
-                        <a:defRPr/>
-                      </a:pPr>
-                      <a:r>
-                        <a:rPr lang="en-US" altLang="zh-TW" sz="1400" dirty="0">
+              <a:tr h="363331">
+                <a:tc>
+                  <a:txBody>
+                    <a:bodyPr/>
+                    <a:lstStyle/>
+                    <a:p>
+                      <a:pPr>
+                        <a:buNone/>
+                      </a:pPr>
+                      <a:r>
+                        <a:rPr lang="en" sz="1400" dirty="0">
                           <a:latin typeface="Consolas" panose="020B0609020204030204" pitchFamily="49" charset="0"/>
                           <a:cs typeface="Consolas" panose="020B0609020204030204" pitchFamily="49" charset="0"/>
                         </a:rPr>
-                        <a:t>vm-app-01</a:t>
-                      </a:r>
-                      <a:endParaRPr lang="zh-TW" altLang="en-US" sz="1400" dirty="0">
+                        <a:t>infogather-sit-mongo-02</a:t>
+                      </a:r>
+                      <a:endParaRPr lang="en" sz="1400" dirty="0">
                         <a:latin typeface="Consolas" panose="020B0609020204030204" pitchFamily="49" charset="0"/>
+                        <a:ea typeface="Microsoft JhengHei" panose="020B0604030504040204" pitchFamily="34" charset="-120"/>
                         <a:cs typeface="Consolas" panose="020B0609020204030204" pitchFamily="49" charset="0"/>
                       </a:endParaRPr>
                     </a:p>
                   </a:txBody>
-                  <a:tcPr/>
-                </a:tc>
-                <a:tc>
-                  <a:txBody>
-                    <a:bodyPr/>
-                    <a:lstStyle/>
-                    <a:p>
-                      <a:r>
-                        <a:rPr lang="en-US" altLang="zh-TW" sz="1400" dirty="0"/>
+                  <a:tcPr anchor="ctr"/>
+                </a:tc>
+                <a:tc>
+                  <a:txBody>
+                    <a:bodyPr/>
+                    <a:lstStyle/>
+                    <a:p>
+                      <a:pPr>
+                        <a:buNone/>
+                      </a:pPr>
+                      <a:r>
+                        <a:rPr lang="en"/>
                         <a:t>4 vCPU</a:t>
                       </a:r>
-                      <a:endParaRPr lang="zh-TW" altLang="en-US" sz="1400" dirty="0"/>
-                    </a:p>
-                  </a:txBody>
-                  <a:tcPr/>
-                </a:tc>
-                <a:tc>
-                  <a:txBody>
-                    <a:bodyPr/>
-                    <a:lstStyle/>
-                    <a:p>
-                      <a:r>
-                        <a:rPr lang="en-US" altLang="zh-TW" sz="1400" dirty="0"/>
-                        <a:t>16 GB</a:t>
-                      </a:r>
-                      <a:endParaRPr lang="zh-TW" altLang="en-US" sz="1400" dirty="0"/>
-                    </a:p>
-                  </a:txBody>
-                  <a:tcPr/>
-                </a:tc>
-                <a:tc>
-                  <a:txBody>
-                    <a:bodyPr/>
-                    <a:lstStyle/>
-                    <a:p>
-                      <a:r>
-                        <a:rPr lang="en-US" altLang="zh-TW" sz="1400" dirty="0"/>
-                        <a:t>100 GB</a:t>
-                      </a:r>
-                      <a:endParaRPr lang="zh-TW" altLang="en-US" sz="1400" dirty="0"/>
-                    </a:p>
-                  </a:txBody>
-                  <a:tcPr/>
-                </a:tc>
-                <a:tc>
-                  <a:txBody>
-                    <a:bodyPr/>
-                    <a:lstStyle/>
-                    <a:p>
-                      <a:r>
-                        <a:rPr lang="en-US" altLang="zh-TW" sz="1400" dirty="0" err="1"/>
-                        <a:t>InfoGather</a:t>
-                      </a:r>
-                      <a:r>
-                        <a:rPr lang="en-US" altLang="zh-TW" sz="1400" dirty="0"/>
-                        <a:t> worker, scheduler</a:t>
-                      </a:r>
-                      <a:endParaRPr lang="zh-TW" altLang="en-US" sz="1400" dirty="0"/>
-                    </a:p>
-                  </a:txBody>
-                  <a:tcPr/>
-                </a:tc>
-                <a:tc>
-                  <a:txBody>
-                    <a:bodyPr/>
-                    <a:lstStyle/>
-                    <a:p>
-                      <a:r>
-                        <a:rPr lang="en" altLang="zh-TW" sz="1400" b="0" i="0" u="none" strike="noStrike" cap="none" dirty="0" err="1">
-                          <a:solidFill>
-                            <a:srgbClr val="000000"/>
-                          </a:solidFill>
-                          <a:effectLst/>
-                          <a:latin typeface="Arial"/>
-                          <a:ea typeface="Arial"/>
-                          <a:cs typeface="Arial"/>
-                          <a:sym typeface="Arial"/>
-                        </a:rPr>
-                        <a:t>InfoGather</a:t>
-                      </a:r>
-                      <a:r>
-                        <a:rPr lang="en" altLang="zh-TW" sz="1400" b="0" i="0" u="none" strike="noStrike" cap="none" dirty="0">
-                          <a:solidFill>
-                            <a:srgbClr val="000000"/>
-                          </a:solidFill>
-                          <a:effectLst/>
-                          <a:latin typeface="Arial"/>
-                          <a:ea typeface="Arial"/>
-                          <a:cs typeface="Arial"/>
-                          <a:sym typeface="Arial"/>
-                        </a:rPr>
-                        <a:t> worker </a:t>
-                      </a:r>
-                      <a:r>
-                        <a:rPr lang="zh-TW" altLang="en-US" sz="1400" b="0" i="0" u="none" strike="noStrike" cap="none" dirty="0">
-                          <a:solidFill>
-                            <a:srgbClr val="000000"/>
-                          </a:solidFill>
-                          <a:effectLst/>
-                          <a:latin typeface="Arial"/>
-                          <a:ea typeface="Arial"/>
-                          <a:cs typeface="Arial"/>
-                          <a:sym typeface="Arial"/>
-                        </a:rPr>
-                        <a:t>與 </a:t>
-                      </a:r>
-                      <a:r>
-                        <a:rPr lang="en" altLang="zh-TW" sz="1400" b="0" i="0" u="none" strike="noStrike" cap="none" dirty="0">
-                          <a:solidFill>
-                            <a:srgbClr val="000000"/>
-                          </a:solidFill>
-                          <a:effectLst/>
-                          <a:latin typeface="Arial"/>
-                          <a:ea typeface="Arial"/>
-                          <a:cs typeface="Arial"/>
-                          <a:sym typeface="Arial"/>
-                        </a:rPr>
-                        <a:t>scheduler </a:t>
-                      </a:r>
-                      <a:r>
-                        <a:rPr lang="zh-TW" altLang="en-US" sz="1400" b="0" i="0" u="none" strike="noStrike" cap="none" dirty="0">
-                          <a:solidFill>
-                            <a:srgbClr val="000000"/>
-                          </a:solidFill>
-                          <a:effectLst/>
-                          <a:latin typeface="Arial"/>
-                          <a:ea typeface="Arial"/>
-                          <a:cs typeface="Arial"/>
-                          <a:sym typeface="Arial"/>
-                        </a:rPr>
-                        <a:t>共用節點</a:t>
-                      </a:r>
-                      <a:endParaRPr lang="zh-TW" altLang="en-US" sz="1400" dirty="0"/>
-                    </a:p>
-                  </a:txBody>
-                  <a:tcPr/>
+                    </a:p>
+                  </a:txBody>
+                  <a:tcPr anchor="ctr"/>
+                </a:tc>
+                <a:tc>
+                  <a:txBody>
+                    <a:bodyPr/>
+                    <a:lstStyle/>
+                    <a:p>
+                      <a:pPr>
+                        <a:buNone/>
+                      </a:pPr>
+                      <a:r>
+                        <a:rPr lang="en"/>
+                        <a:t>8 GB</a:t>
+                      </a:r>
+                    </a:p>
+                  </a:txBody>
+                  <a:tcPr anchor="ctr"/>
+                </a:tc>
+                <a:tc>
+                  <a:txBody>
+                    <a:bodyPr/>
+                    <a:lstStyle/>
+                    <a:p>
+                      <a:pPr>
+                        <a:buNone/>
+                      </a:pPr>
+                      <a:r>
+                        <a:rPr lang="en"/>
+                        <a:t>200 GB</a:t>
+                      </a:r>
+                    </a:p>
+                  </a:txBody>
+                  <a:tcPr anchor="ctr"/>
+                </a:tc>
+                <a:tc>
+                  <a:txBody>
+                    <a:bodyPr/>
+                    <a:lstStyle/>
+                    <a:p>
+                      <a:pPr>
+                        <a:buNone/>
+                      </a:pPr>
+                      <a:r>
+                        <a:rPr lang="en" sz="1400"/>
+                        <a:t>MongoDB replica set member</a:t>
+                      </a:r>
+                      <a:endParaRPr lang="en" sz="1400">
+                        <a:latin typeface="Microsoft JhengHei" panose="020B0604030504040204" pitchFamily="34" charset="-120"/>
+                        <a:ea typeface="Microsoft JhengHei" panose="020B0604030504040204" pitchFamily="34" charset="-120"/>
+                      </a:endParaRPr>
+                    </a:p>
+                  </a:txBody>
+                  <a:tcPr anchor="ctr"/>
+                </a:tc>
+                <a:tc>
+                  <a:txBody>
+                    <a:bodyPr/>
+                    <a:lstStyle/>
+                    <a:p>
+                      <a:pPr>
+                        <a:buNone/>
+                      </a:pPr>
+                      <a:r>
+                        <a:rPr lang="en" sz="1400" dirty="0"/>
+                        <a:t>secondary</a:t>
+                      </a:r>
+                      <a:endParaRPr lang="en" sz="1400" dirty="0">
+                        <a:latin typeface="Microsoft JhengHei" panose="020B0604030504040204" pitchFamily="34" charset="-120"/>
+                        <a:ea typeface="Microsoft JhengHei" panose="020B0604030504040204" pitchFamily="34" charset="-120"/>
+                      </a:endParaRPr>
+                    </a:p>
+                  </a:txBody>
+                  <a:tcPr anchor="ctr"/>
                 </a:tc>
                 <a:extLst>
                   <a:ext uri="{0D108BD9-81ED-4DB2-BD59-A6C34878D82A}">
-                    <a16:rowId xmlns:a16="http://schemas.microsoft.com/office/drawing/2014/main" val="2758557034"/>
+                    <a16:rowId xmlns:a16="http://schemas.microsoft.com/office/drawing/2014/main" val="523296309"/>
                   </a:ext>
                 </a:extLst>
               </a:tr>
-              <a:tr h="326218">
-                <a:tc>
-                  <a:txBody>
-                    <a:bodyPr/>
-                    <a:lstStyle/>
-                    <a:p>
-                      <a:r>
-                        <a:rPr lang="en-US" altLang="zh-TW" sz="1400" dirty="0"/>
-                        <a:t>vm-mongo-01</a:t>
-                      </a:r>
-                      <a:endParaRPr lang="zh-TW" altLang="en-US" sz="1400" dirty="0"/>
-                    </a:p>
-                  </a:txBody>
-                  <a:tcPr/>
-                </a:tc>
-                <a:tc>
-                  <a:txBody>
-                    <a:bodyPr/>
-                    <a:lstStyle/>
-                    <a:p>
-                      <a:r>
-                        <a:rPr lang="en-US" altLang="zh-TW" sz="1400" dirty="0"/>
+              <a:tr h="363331">
+                <a:tc>
+                  <a:txBody>
+                    <a:bodyPr/>
+                    <a:lstStyle/>
+                    <a:p>
+                      <a:pPr>
+                        <a:buNone/>
+                      </a:pPr>
+                      <a:r>
+                        <a:rPr lang="en" sz="1400" dirty="0">
+                          <a:latin typeface="Consolas" panose="020B0609020204030204" pitchFamily="49" charset="0"/>
+                          <a:cs typeface="Consolas" panose="020B0609020204030204" pitchFamily="49" charset="0"/>
+                        </a:rPr>
+                        <a:t>infogather-sit-mongo-03</a:t>
+                      </a:r>
+                      <a:endParaRPr lang="en" sz="1400" dirty="0">
+                        <a:latin typeface="Consolas" panose="020B0609020204030204" pitchFamily="49" charset="0"/>
+                        <a:ea typeface="Microsoft JhengHei" panose="020B0604030504040204" pitchFamily="34" charset="-120"/>
+                        <a:cs typeface="Consolas" panose="020B0609020204030204" pitchFamily="49" charset="0"/>
+                      </a:endParaRPr>
+                    </a:p>
+                  </a:txBody>
+                  <a:tcPr anchor="ctr"/>
+                </a:tc>
+                <a:tc>
+                  <a:txBody>
+                    <a:bodyPr/>
+                    <a:lstStyle/>
+                    <a:p>
+                      <a:pPr>
+                        <a:buNone/>
+                      </a:pPr>
+                      <a:r>
+                        <a:rPr lang="en"/>
                         <a:t>4 vCPU</a:t>
                       </a:r>
-                      <a:endParaRPr lang="zh-TW" altLang="en-US" sz="1400" dirty="0"/>
-                    </a:p>
-                  </a:txBody>
-                  <a:tcPr/>
-                </a:tc>
-                <a:tc>
-                  <a:txBody>
-                    <a:bodyPr/>
-                    <a:lstStyle/>
-                    <a:p>
-                      <a:r>
-                        <a:rPr lang="en-US" altLang="zh-TW" sz="1400" dirty="0"/>
-                        <a:t>16 GB</a:t>
-                      </a:r>
-                      <a:endParaRPr lang="zh-TW" altLang="en-US" sz="1400" dirty="0"/>
-                    </a:p>
-                  </a:txBody>
-                  <a:tcPr/>
-                </a:tc>
-                <a:tc>
-                  <a:txBody>
-                    <a:bodyPr/>
-                    <a:lstStyle/>
-                    <a:p>
-                      <a:r>
-                        <a:rPr lang="en-US" altLang="zh-TW" sz="1400" dirty="0"/>
-                        <a:t>500 GB</a:t>
-                      </a:r>
-                      <a:endParaRPr lang="zh-TW" altLang="en-US" sz="1400" dirty="0"/>
-                    </a:p>
-                  </a:txBody>
-                  <a:tcPr/>
-                </a:tc>
-                <a:tc>
-                  <a:txBody>
-                    <a:bodyPr/>
-                    <a:lstStyle/>
-                    <a:p>
-                      <a:r>
-                        <a:rPr lang="en-US" altLang="zh-TW" sz="1400" dirty="0"/>
-                        <a:t>MongoDB replica set</a:t>
-                      </a:r>
-                      <a:endParaRPr lang="zh-TW" altLang="en-US" sz="1400" dirty="0"/>
-                    </a:p>
-                  </a:txBody>
-                  <a:tcPr/>
-                </a:tc>
-                <a:tc>
-                  <a:txBody>
-                    <a:bodyPr/>
-                    <a:lstStyle/>
-                    <a:p>
-                      <a:r>
-                        <a:rPr lang="en" altLang="zh-TW" sz="1400" b="0" i="0" u="none" strike="noStrike" cap="none" dirty="0">
-                          <a:solidFill>
-                            <a:srgbClr val="000000"/>
-                          </a:solidFill>
-                          <a:effectLst/>
-                          <a:latin typeface="Arial"/>
-                          <a:ea typeface="Arial"/>
-                          <a:cs typeface="Arial"/>
-                          <a:sym typeface="Arial"/>
-                        </a:rPr>
-                        <a:t>MongoDB primary candidate</a:t>
-                      </a:r>
-                      <a:endParaRPr lang="zh-TW" altLang="en-US" sz="1400" dirty="0"/>
-                    </a:p>
-                  </a:txBody>
-                  <a:tcPr/>
+                    </a:p>
+                  </a:txBody>
+                  <a:tcPr anchor="ctr"/>
+                </a:tc>
+                <a:tc>
+                  <a:txBody>
+                    <a:bodyPr/>
+                    <a:lstStyle/>
+                    <a:p>
+                      <a:pPr>
+                        <a:buNone/>
+                      </a:pPr>
+                      <a:r>
+                        <a:rPr lang="en"/>
+                        <a:t>8 GB</a:t>
+                      </a:r>
+                    </a:p>
+                  </a:txBody>
+                  <a:tcPr anchor="ctr"/>
+                </a:tc>
+                <a:tc>
+                  <a:txBody>
+                    <a:bodyPr/>
+                    <a:lstStyle/>
+                    <a:p>
+                      <a:pPr>
+                        <a:buNone/>
+                      </a:pPr>
+                      <a:r>
+                        <a:rPr lang="en"/>
+                        <a:t>200 GB</a:t>
+                      </a:r>
+                    </a:p>
+                  </a:txBody>
+                  <a:tcPr anchor="ctr"/>
+                </a:tc>
+                <a:tc>
+                  <a:txBody>
+                    <a:bodyPr/>
+                    <a:lstStyle/>
+                    <a:p>
+                      <a:pPr>
+                        <a:buNone/>
+                      </a:pPr>
+                      <a:r>
+                        <a:rPr lang="en" sz="1400" dirty="0"/>
+                        <a:t>MongoDB replica set member</a:t>
+                      </a:r>
+                      <a:endParaRPr lang="en" sz="1400" dirty="0">
+                        <a:latin typeface="Microsoft JhengHei" panose="020B0604030504040204" pitchFamily="34" charset="-120"/>
+                        <a:ea typeface="Microsoft JhengHei" panose="020B0604030504040204" pitchFamily="34" charset="-120"/>
+                      </a:endParaRPr>
+                    </a:p>
+                  </a:txBody>
+                  <a:tcPr anchor="ctr"/>
+                </a:tc>
+                <a:tc>
+                  <a:txBody>
+                    <a:bodyPr/>
+                    <a:lstStyle/>
+                    <a:p>
+                      <a:pPr>
+                        <a:buNone/>
+                      </a:pPr>
+                      <a:r>
+                        <a:rPr lang="en" sz="1400" dirty="0"/>
+                        <a:t>secondary</a:t>
+                      </a:r>
+                      <a:endParaRPr lang="en" sz="1400" dirty="0">
+                        <a:latin typeface="Microsoft JhengHei" panose="020B0604030504040204" pitchFamily="34" charset="-120"/>
+                        <a:ea typeface="Microsoft JhengHei" panose="020B0604030504040204" pitchFamily="34" charset="-120"/>
+                      </a:endParaRPr>
+                    </a:p>
+                  </a:txBody>
+                  <a:tcPr anchor="ctr"/>
                 </a:tc>
                 <a:extLst>
                   <a:ext uri="{0D108BD9-81ED-4DB2-BD59-A6C34878D82A}">
-                    <a16:rowId xmlns:a16="http://schemas.microsoft.com/office/drawing/2014/main" val="834458703"/>
+                    <a16:rowId xmlns:a16="http://schemas.microsoft.com/office/drawing/2014/main" val="1648244485"/>
                   </a:ext>
                 </a:extLst>
               </a:tr>
-              <a:tr h="326218">
-                <a:tc>
-                  <a:txBody>
-                    <a:bodyPr/>
-                    <a:lstStyle/>
-                    <a:p>
-                      <a:pPr marL="0" marR="0" lvl="0" indent="0" algn="l" defTabSz="914400" rtl="0" eaLnBrk="1" fontAlgn="auto" latinLnBrk="0" hangingPunct="1">
-                        <a:lnSpc>
-                          <a:spcPct val="100000"/>
-                        </a:lnSpc>
-                        <a:spcBef>
-                          <a:spcPts val="0"/>
-                        </a:spcBef>
-                        <a:spcAft>
-                          <a:spcPts val="0"/>
-                        </a:spcAft>
-                        <a:buClr>
-                          <a:srgbClr val="000000"/>
-                        </a:buClr>
-                        <a:buSzTx/>
-                        <a:buFont typeface="Arial"/>
-                        <a:buNone/>
-                        <a:tabLst/>
-                        <a:defRPr/>
-                      </a:pPr>
-                      <a:r>
-                        <a:rPr lang="en-US" altLang="zh-TW" sz="1400" dirty="0"/>
-                        <a:t>vm-mongo-02</a:t>
-                      </a:r>
-                      <a:endParaRPr lang="zh-TW" altLang="en-US" sz="1400" dirty="0"/>
-                    </a:p>
-                  </a:txBody>
-                  <a:tcPr/>
-                </a:tc>
-                <a:tc>
-                  <a:txBody>
-                    <a:bodyPr/>
-                    <a:lstStyle/>
-                    <a:p>
-                      <a:r>
-                        <a:rPr lang="en-US" altLang="zh-TW" sz="1400" dirty="0"/>
-                        <a:t>4 vCPU</a:t>
-                      </a:r>
-                      <a:endParaRPr lang="zh-TW" altLang="en-US" sz="1400" dirty="0"/>
-                    </a:p>
-                  </a:txBody>
-                  <a:tcPr/>
-                </a:tc>
-                <a:tc>
-                  <a:txBody>
-                    <a:bodyPr/>
-                    <a:lstStyle/>
-                    <a:p>
-                      <a:r>
-                        <a:rPr lang="en-US" altLang="zh-TW" sz="1400" dirty="0"/>
-                        <a:t>16 GB</a:t>
-                      </a:r>
-                      <a:endParaRPr lang="zh-TW" altLang="en-US" sz="1400" dirty="0"/>
-                    </a:p>
-                  </a:txBody>
-                  <a:tcPr/>
-                </a:tc>
-                <a:tc>
-                  <a:txBody>
-                    <a:bodyPr/>
-                    <a:lstStyle/>
-                    <a:p>
-                      <a:r>
-                        <a:rPr lang="en-US" altLang="zh-TW" sz="1400" dirty="0"/>
-                        <a:t>500 GB</a:t>
-                      </a:r>
-                      <a:endParaRPr lang="zh-TW" altLang="en-US" sz="1400" dirty="0"/>
-                    </a:p>
-                  </a:txBody>
-                  <a:tcPr/>
-                </a:tc>
-                <a:tc>
-                  <a:txBody>
-                    <a:bodyPr/>
-                    <a:lstStyle/>
-                    <a:p>
-                      <a:pPr marL="0" marR="0" lvl="0" indent="0" algn="l" defTabSz="914400" rtl="0" eaLnBrk="1" fontAlgn="auto" latinLnBrk="0" hangingPunct="1">
-                        <a:lnSpc>
-                          <a:spcPct val="100000"/>
-                        </a:lnSpc>
-                        <a:spcBef>
-                          <a:spcPts val="0"/>
-                        </a:spcBef>
-                        <a:spcAft>
-                          <a:spcPts val="0"/>
-                        </a:spcAft>
-                        <a:buClr>
-                          <a:srgbClr val="000000"/>
-                        </a:buClr>
-                        <a:buSzTx/>
-                        <a:buFont typeface="Arial"/>
-                        <a:buNone/>
-                        <a:tabLst/>
-                        <a:defRPr/>
-                      </a:pPr>
-                      <a:r>
-                        <a:rPr lang="en-US" altLang="zh-TW" sz="1400" dirty="0"/>
-                        <a:t>MongoDB replica set</a:t>
-                      </a:r>
-                      <a:endParaRPr lang="zh-TW" altLang="en-US" sz="1400" dirty="0"/>
-                    </a:p>
-                  </a:txBody>
-                  <a:tcPr/>
-                </a:tc>
-                <a:tc>
-                  <a:txBody>
-                    <a:bodyPr/>
-                    <a:lstStyle/>
-                    <a:p>
-                      <a:r>
-                        <a:rPr lang="en" altLang="zh-TW" sz="1400" b="0" i="0" u="none" strike="noStrike" cap="none" dirty="0">
-                          <a:solidFill>
-                            <a:srgbClr val="000000"/>
-                          </a:solidFill>
-                          <a:effectLst/>
-                          <a:latin typeface="Arial"/>
-                          <a:ea typeface="Arial"/>
-                          <a:cs typeface="Arial"/>
-                          <a:sym typeface="Arial"/>
-                        </a:rPr>
-                        <a:t>MongoDB secondary</a:t>
-                      </a:r>
-                      <a:endParaRPr lang="zh-TW" altLang="en-US" sz="1400" dirty="0"/>
-                    </a:p>
-                  </a:txBody>
-                  <a:tcPr/>
+              <a:tr h="363331">
+                <a:tc>
+                  <a:txBody>
+                    <a:bodyPr/>
+                    <a:lstStyle/>
+                    <a:p>
+                      <a:pPr>
+                        <a:buNone/>
+                      </a:pPr>
+                      <a:r>
+                        <a:rPr lang="en" sz="1400" dirty="0">
+                          <a:latin typeface="Consolas" panose="020B0609020204030204" pitchFamily="49" charset="0"/>
+                          <a:cs typeface="Consolas" panose="020B0609020204030204" pitchFamily="49" charset="0"/>
+                        </a:rPr>
+                        <a:t>infogather-sit-redis-01</a:t>
+                      </a:r>
+                      <a:endParaRPr lang="en" sz="1400" dirty="0">
+                        <a:latin typeface="Consolas" panose="020B0609020204030204" pitchFamily="49" charset="0"/>
+                        <a:ea typeface="Microsoft JhengHei" panose="020B0604030504040204" pitchFamily="34" charset="-120"/>
+                        <a:cs typeface="Consolas" panose="020B0609020204030204" pitchFamily="49" charset="0"/>
+                      </a:endParaRPr>
+                    </a:p>
+                  </a:txBody>
+                  <a:tcPr anchor="ctr"/>
+                </a:tc>
+                <a:tc>
+                  <a:txBody>
+                    <a:bodyPr/>
+                    <a:lstStyle/>
+                    <a:p>
+                      <a:pPr>
+                        <a:buNone/>
+                      </a:pPr>
+                      <a:r>
+                        <a:rPr lang="en"/>
+                        <a:t>2 vCPU</a:t>
+                      </a:r>
+                    </a:p>
+                  </a:txBody>
+                  <a:tcPr anchor="ctr"/>
+                </a:tc>
+                <a:tc>
+                  <a:txBody>
+                    <a:bodyPr/>
+                    <a:lstStyle/>
+                    <a:p>
+                      <a:pPr>
+                        <a:buNone/>
+                      </a:pPr>
+                      <a:r>
+                        <a:rPr lang="en"/>
+                        <a:t>4 GB</a:t>
+                      </a:r>
+                    </a:p>
+                  </a:txBody>
+                  <a:tcPr anchor="ctr"/>
+                </a:tc>
+                <a:tc>
+                  <a:txBody>
+                    <a:bodyPr/>
+                    <a:lstStyle/>
+                    <a:p>
+                      <a:pPr>
+                        <a:buNone/>
+                      </a:pPr>
+                      <a:r>
+                        <a:rPr lang="en"/>
+                        <a:t>60 GB</a:t>
+                      </a:r>
+                    </a:p>
+                  </a:txBody>
+                  <a:tcPr anchor="ctr"/>
+                </a:tc>
+                <a:tc>
+                  <a:txBody>
+                    <a:bodyPr/>
+                    <a:lstStyle/>
+                    <a:p>
+                      <a:pPr>
+                        <a:buNone/>
+                      </a:pPr>
+                      <a:r>
+                        <a:rPr lang="en" sz="1400"/>
+                        <a:t>Redis server、Sentinel</a:t>
+                      </a:r>
+                      <a:endParaRPr lang="en" sz="1400">
+                        <a:latin typeface="Microsoft JhengHei" panose="020B0604030504040204" pitchFamily="34" charset="-120"/>
+                        <a:ea typeface="Microsoft JhengHei" panose="020B0604030504040204" pitchFamily="34" charset="-120"/>
+                      </a:endParaRPr>
+                    </a:p>
+                  </a:txBody>
+                  <a:tcPr anchor="ctr"/>
+                </a:tc>
+                <a:tc>
+                  <a:txBody>
+                    <a:bodyPr/>
+                    <a:lstStyle/>
+                    <a:p>
+                      <a:pPr>
+                        <a:buNone/>
+                      </a:pPr>
+                      <a:r>
+                        <a:rPr lang="en" sz="1400" dirty="0"/>
+                        <a:t>primary candidate</a:t>
+                      </a:r>
+                      <a:endParaRPr lang="en" sz="1400" dirty="0">
+                        <a:latin typeface="Microsoft JhengHei" panose="020B0604030504040204" pitchFamily="34" charset="-120"/>
+                        <a:ea typeface="Microsoft JhengHei" panose="020B0604030504040204" pitchFamily="34" charset="-120"/>
+                      </a:endParaRPr>
+                    </a:p>
+                  </a:txBody>
+                  <a:tcPr anchor="ctr"/>
                 </a:tc>
                 <a:extLst>
                   <a:ext uri="{0D108BD9-81ED-4DB2-BD59-A6C34878D82A}">
-                    <a16:rowId xmlns:a16="http://schemas.microsoft.com/office/drawing/2014/main" val="1902642623"/>
+                    <a16:rowId xmlns:a16="http://schemas.microsoft.com/office/drawing/2014/main" val="3474832487"/>
                   </a:ext>
                 </a:extLst>
               </a:tr>
-              <a:tr h="326218">
-                <a:tc>
-                  <a:txBody>
-                    <a:bodyPr/>
-                    <a:lstStyle/>
-                    <a:p>
-                      <a:pPr marL="0" marR="0" lvl="0" indent="0" algn="l" defTabSz="914400" rtl="0" eaLnBrk="1" fontAlgn="auto" latinLnBrk="0" hangingPunct="1">
-                        <a:lnSpc>
-                          <a:spcPct val="100000"/>
-                        </a:lnSpc>
-                        <a:spcBef>
-                          <a:spcPts val="0"/>
-                        </a:spcBef>
-                        <a:spcAft>
-                          <a:spcPts val="0"/>
-                        </a:spcAft>
-                        <a:buClr>
-                          <a:srgbClr val="000000"/>
-                        </a:buClr>
-                        <a:buSzTx/>
-                        <a:buFont typeface="Arial"/>
-                        <a:buNone/>
-                        <a:tabLst/>
-                        <a:defRPr/>
-                      </a:pPr>
-                      <a:r>
-                        <a:rPr lang="en-US" altLang="zh-TW" sz="1400" dirty="0"/>
-                        <a:t>vm-mongo-03</a:t>
-                      </a:r>
-                      <a:endParaRPr lang="zh-TW" altLang="en-US" sz="1400" dirty="0"/>
-                    </a:p>
-                  </a:txBody>
-                  <a:tcPr/>
-                </a:tc>
-                <a:tc>
-                  <a:txBody>
-                    <a:bodyPr/>
-                    <a:lstStyle/>
-                    <a:p>
-                      <a:r>
-                        <a:rPr lang="en-US" altLang="zh-TW" sz="1400" dirty="0"/>
-                        <a:t>4 vCPU</a:t>
-                      </a:r>
-                      <a:endParaRPr lang="zh-TW" altLang="en-US" sz="1400" dirty="0"/>
-                    </a:p>
-                  </a:txBody>
-                  <a:tcPr/>
-                </a:tc>
-                <a:tc>
-                  <a:txBody>
-                    <a:bodyPr/>
-                    <a:lstStyle/>
-                    <a:p>
-                      <a:r>
-                        <a:rPr lang="en-US" altLang="zh-TW" sz="1400" dirty="0"/>
-                        <a:t>16 GB</a:t>
-                      </a:r>
-                      <a:endParaRPr lang="zh-TW" altLang="en-US" sz="1400" dirty="0"/>
-                    </a:p>
-                  </a:txBody>
-                  <a:tcPr/>
-                </a:tc>
-                <a:tc>
-                  <a:txBody>
-                    <a:bodyPr/>
-                    <a:lstStyle/>
-                    <a:p>
-                      <a:r>
-                        <a:rPr lang="en-US" altLang="zh-TW" sz="1400" dirty="0"/>
-                        <a:t>500 GB</a:t>
-                      </a:r>
-                      <a:endParaRPr lang="zh-TW" altLang="en-US" sz="1400" dirty="0"/>
-                    </a:p>
-                  </a:txBody>
-                  <a:tcPr/>
-                </a:tc>
-                <a:tc>
-                  <a:txBody>
-                    <a:bodyPr/>
-                    <a:lstStyle/>
-                    <a:p>
-                      <a:r>
-                        <a:rPr lang="en-US" altLang="zh-TW" sz="1400" dirty="0"/>
-                        <a:t>MongoDB replica set</a:t>
-                      </a:r>
-                      <a:endParaRPr lang="zh-TW" altLang="en-US" sz="1400" dirty="0"/>
-                    </a:p>
-                  </a:txBody>
-                  <a:tcPr/>
-                </a:tc>
-                <a:tc>
-                  <a:txBody>
-                    <a:bodyPr/>
-                    <a:lstStyle/>
-                    <a:p>
-                      <a:r>
-                        <a:rPr lang="en" altLang="zh-TW" sz="1400" b="0" i="0" u="none" strike="noStrike" cap="none" dirty="0">
-                          <a:solidFill>
-                            <a:srgbClr val="000000"/>
-                          </a:solidFill>
-                          <a:effectLst/>
-                          <a:latin typeface="Arial"/>
-                          <a:ea typeface="Arial"/>
-                          <a:cs typeface="Arial"/>
-                          <a:sym typeface="Arial"/>
-                        </a:rPr>
-                        <a:t>MongoDB secondary</a:t>
-                      </a:r>
-                      <a:endParaRPr lang="zh-TW" altLang="en-US" sz="1400" dirty="0"/>
-                    </a:p>
-                  </a:txBody>
-                  <a:tcPr/>
+              <a:tr h="363331">
+                <a:tc>
+                  <a:txBody>
+                    <a:bodyPr/>
+                    <a:lstStyle/>
+                    <a:p>
+                      <a:pPr>
+                        <a:buNone/>
+                      </a:pPr>
+                      <a:r>
+                        <a:rPr lang="en" sz="1400" dirty="0">
+                          <a:latin typeface="Consolas" panose="020B0609020204030204" pitchFamily="49" charset="0"/>
+                          <a:cs typeface="Consolas" panose="020B0609020204030204" pitchFamily="49" charset="0"/>
+                        </a:rPr>
+                        <a:t>infogather-sit-redis-02</a:t>
+                      </a:r>
+                      <a:endParaRPr lang="en" sz="1400" dirty="0">
+                        <a:latin typeface="Consolas" panose="020B0609020204030204" pitchFamily="49" charset="0"/>
+                        <a:ea typeface="Microsoft JhengHei" panose="020B0604030504040204" pitchFamily="34" charset="-120"/>
+                        <a:cs typeface="Consolas" panose="020B0609020204030204" pitchFamily="49" charset="0"/>
+                      </a:endParaRPr>
+                    </a:p>
+                  </a:txBody>
+                  <a:tcPr anchor="ctr"/>
+                </a:tc>
+                <a:tc>
+                  <a:txBody>
+                    <a:bodyPr/>
+                    <a:lstStyle/>
+                    <a:p>
+                      <a:pPr>
+                        <a:buNone/>
+                      </a:pPr>
+                      <a:r>
+                        <a:rPr lang="en"/>
+                        <a:t>2 vCPU</a:t>
+                      </a:r>
+                    </a:p>
+                  </a:txBody>
+                  <a:tcPr anchor="ctr"/>
+                </a:tc>
+                <a:tc>
+                  <a:txBody>
+                    <a:bodyPr/>
+                    <a:lstStyle/>
+                    <a:p>
+                      <a:pPr>
+                        <a:buNone/>
+                      </a:pPr>
+                      <a:r>
+                        <a:rPr lang="en"/>
+                        <a:t>4 GB</a:t>
+                      </a:r>
+                    </a:p>
+                  </a:txBody>
+                  <a:tcPr anchor="ctr"/>
+                </a:tc>
+                <a:tc>
+                  <a:txBody>
+                    <a:bodyPr/>
+                    <a:lstStyle/>
+                    <a:p>
+                      <a:pPr>
+                        <a:buNone/>
+                      </a:pPr>
+                      <a:r>
+                        <a:rPr lang="en"/>
+                        <a:t>60 GB</a:t>
+                      </a:r>
+                    </a:p>
+                  </a:txBody>
+                  <a:tcPr anchor="ctr"/>
+                </a:tc>
+                <a:tc>
+                  <a:txBody>
+                    <a:bodyPr/>
+                    <a:lstStyle/>
+                    <a:p>
+                      <a:pPr>
+                        <a:buNone/>
+                      </a:pPr>
+                      <a:r>
+                        <a:rPr lang="en" sz="1400"/>
+                        <a:t>Redis server、Sentinel</a:t>
+                      </a:r>
+                      <a:endParaRPr lang="en" sz="1400">
+                        <a:latin typeface="Microsoft JhengHei" panose="020B0604030504040204" pitchFamily="34" charset="-120"/>
+                        <a:ea typeface="Microsoft JhengHei" panose="020B0604030504040204" pitchFamily="34" charset="-120"/>
+                      </a:endParaRPr>
+                    </a:p>
+                  </a:txBody>
+                  <a:tcPr anchor="ctr"/>
+                </a:tc>
+                <a:tc>
+                  <a:txBody>
+                    <a:bodyPr/>
+                    <a:lstStyle/>
+                    <a:p>
+                      <a:pPr>
+                        <a:buNone/>
+                      </a:pPr>
+                      <a:r>
+                        <a:rPr lang="en" sz="1400" dirty="0"/>
+                        <a:t>replica</a:t>
+                      </a:r>
+                      <a:endParaRPr lang="en" sz="1400" dirty="0">
+                        <a:latin typeface="Microsoft JhengHei" panose="020B0604030504040204" pitchFamily="34" charset="-120"/>
+                        <a:ea typeface="Microsoft JhengHei" panose="020B0604030504040204" pitchFamily="34" charset="-120"/>
+                      </a:endParaRPr>
+                    </a:p>
+                  </a:txBody>
+                  <a:tcPr anchor="ctr"/>
                 </a:tc>
                 <a:extLst>
                   <a:ext uri="{0D108BD9-81ED-4DB2-BD59-A6C34878D82A}">
-                    <a16:rowId xmlns:a16="http://schemas.microsoft.com/office/drawing/2014/main" val="3939620188"/>
+                    <a16:rowId xmlns:a16="http://schemas.microsoft.com/office/drawing/2014/main" val="1719398601"/>
                   </a:ext>
                 </a:extLst>
               </a:tr>
-              <a:tr h="326218">
-                <a:tc>
-                  <a:txBody>
-                    <a:bodyPr/>
-                    <a:lstStyle/>
-                    <a:p>
-                      <a:pPr marL="0" marR="0" lvl="0" indent="0" algn="l" defTabSz="914400" rtl="0" eaLnBrk="1" fontAlgn="auto" latinLnBrk="0" hangingPunct="1">
-                        <a:lnSpc>
-                          <a:spcPct val="100000"/>
-                        </a:lnSpc>
-                        <a:spcBef>
-                          <a:spcPts val="0"/>
-                        </a:spcBef>
-                        <a:spcAft>
-                          <a:spcPts val="0"/>
-                        </a:spcAft>
-                        <a:buClr>
-                          <a:srgbClr val="000000"/>
-                        </a:buClr>
-                        <a:buSzTx/>
-                        <a:buFont typeface="Arial"/>
-                        <a:buNone/>
-                        <a:tabLst/>
-                        <a:defRPr/>
-                      </a:pPr>
-                      <a:r>
-                        <a:rPr lang="en-US" altLang="zh-TW" sz="1400" dirty="0">
+              <a:tr h="363331">
+                <a:tc>
+                  <a:txBody>
+                    <a:bodyPr/>
+                    <a:lstStyle/>
+                    <a:p>
+                      <a:pPr>
+                        <a:buNone/>
+                      </a:pPr>
+                      <a:r>
+                        <a:rPr lang="en" sz="1400" dirty="0">
                           <a:latin typeface="Consolas" panose="020B0609020204030204" pitchFamily="49" charset="0"/>
                           <a:cs typeface="Consolas" panose="020B0609020204030204" pitchFamily="49" charset="0"/>
                         </a:rPr>
-                        <a:t>vm-redis-01</a:t>
-                      </a:r>
-                      <a:endParaRPr lang="zh-TW" altLang="en-US" sz="1400" dirty="0">
+                        <a:t>infogather-sit-redis-03</a:t>
+                      </a:r>
+                      <a:endParaRPr lang="en" sz="1400" dirty="0">
                         <a:latin typeface="Consolas" panose="020B0609020204030204" pitchFamily="49" charset="0"/>
+                        <a:ea typeface="Microsoft JhengHei" panose="020B0604030504040204" pitchFamily="34" charset="-120"/>
                         <a:cs typeface="Consolas" panose="020B0609020204030204" pitchFamily="49" charset="0"/>
                       </a:endParaRPr>
                     </a:p>
                   </a:txBody>
-                  <a:tcPr/>
-                </a:tc>
-                <a:tc>
-                  <a:txBody>
-                    <a:bodyPr/>
-                    <a:lstStyle/>
-                    <a:p>
-                      <a:r>
-                        <a:rPr lang="en-US" altLang="zh-TW" sz="1400" dirty="0"/>
+                  <a:tcPr anchor="ctr"/>
+                </a:tc>
+                <a:tc>
+                  <a:txBody>
+                    <a:bodyPr/>
+                    <a:lstStyle/>
+                    <a:p>
+                      <a:pPr>
+                        <a:buNone/>
+                      </a:pPr>
+                      <a:r>
+                        <a:rPr lang="en"/>
                         <a:t>2 vCPU</a:t>
                       </a:r>
-                      <a:endParaRPr lang="zh-TW" altLang="en-US" sz="1400" dirty="0"/>
-                    </a:p>
-                  </a:txBody>
-                  <a:tcPr/>
-                </a:tc>
-                <a:tc>
-                  <a:txBody>
-                    <a:bodyPr/>
-                    <a:lstStyle/>
-                    <a:p>
-                      <a:r>
-                        <a:rPr lang="en-US" altLang="zh-TW" sz="1400" dirty="0"/>
-                        <a:t>8 GB</a:t>
-                      </a:r>
-                      <a:endParaRPr lang="zh-TW" altLang="en-US" sz="1400" dirty="0"/>
-                    </a:p>
-                  </a:txBody>
-                  <a:tcPr/>
-                </a:tc>
-                <a:tc>
-                  <a:txBody>
-                    <a:bodyPr/>
-                    <a:lstStyle/>
-                    <a:p>
-                      <a:r>
-                        <a:rPr lang="en-US" altLang="zh-TW" sz="1400" dirty="0"/>
-                        <a:t>100 GB</a:t>
-                      </a:r>
-                      <a:endParaRPr lang="zh-TW" altLang="en-US" sz="1400" dirty="0"/>
-                    </a:p>
-                  </a:txBody>
-                  <a:tcPr/>
-                </a:tc>
-                <a:tc>
-                  <a:txBody>
-                    <a:bodyPr/>
-                    <a:lstStyle/>
-                    <a:p>
-                      <a:r>
-                        <a:rPr lang="en-US" altLang="zh-TW" sz="1400" dirty="0"/>
-                        <a:t>Redis server, sentinel</a:t>
-                      </a:r>
-                      <a:endParaRPr lang="zh-TW" altLang="en-US" sz="1400" dirty="0"/>
-                    </a:p>
-                  </a:txBody>
-                  <a:tcPr/>
-                </a:tc>
-                <a:tc>
-                  <a:txBody>
-                    <a:bodyPr/>
-                    <a:lstStyle/>
-                    <a:p>
-                      <a:r>
-                        <a:rPr lang="en" altLang="zh-TW" sz="1400" b="0" i="0" u="none" strike="noStrike" cap="none" dirty="0">
-                          <a:solidFill>
-                            <a:srgbClr val="000000"/>
-                          </a:solidFill>
-                          <a:effectLst/>
-                          <a:latin typeface="Arial"/>
-                          <a:ea typeface="Arial"/>
-                          <a:cs typeface="Arial"/>
-                          <a:sym typeface="Arial"/>
-                        </a:rPr>
-                        <a:t>Redis primary candidate</a:t>
-                      </a:r>
-                      <a:endParaRPr lang="zh-TW" altLang="en-US" sz="1400" dirty="0"/>
-                    </a:p>
-                  </a:txBody>
-                  <a:tcPr/>
+                    </a:p>
+                  </a:txBody>
+                  <a:tcPr anchor="ctr"/>
+                </a:tc>
+                <a:tc>
+                  <a:txBody>
+                    <a:bodyPr/>
+                    <a:lstStyle/>
+                    <a:p>
+                      <a:pPr>
+                        <a:buNone/>
+                      </a:pPr>
+                      <a:r>
+                        <a:rPr lang="en"/>
+                        <a:t>4 GB</a:t>
+                      </a:r>
+                    </a:p>
+                  </a:txBody>
+                  <a:tcPr anchor="ctr"/>
+                </a:tc>
+                <a:tc>
+                  <a:txBody>
+                    <a:bodyPr/>
+                    <a:lstStyle/>
+                    <a:p>
+                      <a:pPr>
+                        <a:buNone/>
+                      </a:pPr>
+                      <a:r>
+                        <a:rPr lang="en"/>
+                        <a:t>60 GB</a:t>
+                      </a:r>
+                    </a:p>
+                  </a:txBody>
+                  <a:tcPr anchor="ctr"/>
+                </a:tc>
+                <a:tc>
+                  <a:txBody>
+                    <a:bodyPr/>
+                    <a:lstStyle/>
+                    <a:p>
+                      <a:pPr>
+                        <a:buNone/>
+                      </a:pPr>
+                      <a:r>
+                        <a:rPr lang="en" sz="1400" dirty="0"/>
+                        <a:t>Redis </a:t>
+                      </a:r>
+                      <a:r>
+                        <a:rPr lang="en" sz="1400" dirty="0" err="1"/>
+                        <a:t>server、Sentinel</a:t>
+                      </a:r>
+                      <a:endParaRPr lang="en" sz="1400" dirty="0">
+                        <a:latin typeface="Microsoft JhengHei" panose="020B0604030504040204" pitchFamily="34" charset="-120"/>
+                        <a:ea typeface="Microsoft JhengHei" panose="020B0604030504040204" pitchFamily="34" charset="-120"/>
+                      </a:endParaRPr>
+                    </a:p>
+                  </a:txBody>
+                  <a:tcPr anchor="ctr"/>
+                </a:tc>
+                <a:tc>
+                  <a:txBody>
+                    <a:bodyPr/>
+                    <a:lstStyle/>
+                    <a:p>
+                      <a:pPr>
+                        <a:buNone/>
+                      </a:pPr>
+                      <a:r>
+                        <a:rPr lang="en" sz="1400" dirty="0"/>
+                        <a:t>replica</a:t>
+                      </a:r>
+                      <a:endParaRPr lang="en" sz="1400" dirty="0">
+                        <a:latin typeface="Microsoft JhengHei" panose="020B0604030504040204" pitchFamily="34" charset="-120"/>
+                        <a:ea typeface="Microsoft JhengHei" panose="020B0604030504040204" pitchFamily="34" charset="-120"/>
+                      </a:endParaRPr>
+                    </a:p>
+                  </a:txBody>
+                  <a:tcPr anchor="ctr"/>
                 </a:tc>
                 <a:extLst>
                   <a:ext uri="{0D108BD9-81ED-4DB2-BD59-A6C34878D82A}">
-                    <a16:rowId xmlns:a16="http://schemas.microsoft.com/office/drawing/2014/main" val="3475098484"/>
+                    <a16:rowId xmlns:a16="http://schemas.microsoft.com/office/drawing/2014/main" val="1353108866"/>
                   </a:ext>
                 </a:extLst>
               </a:tr>
-              <a:tr h="326218">
-                <a:tc>
-                  <a:txBody>
-                    <a:bodyPr/>
-                    <a:lstStyle/>
-                    <a:p>
-                      <a:pPr marL="0" marR="0" lvl="0" indent="0" algn="l" defTabSz="914400" rtl="0" eaLnBrk="1" fontAlgn="auto" latinLnBrk="0" hangingPunct="1">
-                        <a:lnSpc>
-                          <a:spcPct val="100000"/>
-                        </a:lnSpc>
-                        <a:spcBef>
-                          <a:spcPts val="0"/>
-                        </a:spcBef>
-                        <a:spcAft>
-                          <a:spcPts val="0"/>
-                        </a:spcAft>
-                        <a:buClr>
-                          <a:srgbClr val="000000"/>
-                        </a:buClr>
-                        <a:buSzTx/>
-                        <a:buFont typeface="Arial"/>
-                        <a:buNone/>
-                        <a:tabLst/>
-                        <a:defRPr/>
-                      </a:pPr>
-                      <a:r>
-                        <a:rPr lang="en-US" altLang="zh-TW" sz="1400" dirty="0">
+              <a:tr h="363331">
+                <a:tc>
+                  <a:txBody>
+                    <a:bodyPr/>
+                    <a:lstStyle/>
+                    <a:p>
+                      <a:pPr>
+                        <a:buNone/>
+                      </a:pPr>
+                      <a:r>
+                        <a:rPr lang="en" sz="1400" dirty="0">
                           <a:latin typeface="Consolas" panose="020B0609020204030204" pitchFamily="49" charset="0"/>
                           <a:cs typeface="Consolas" panose="020B0609020204030204" pitchFamily="49" charset="0"/>
                         </a:rPr>
-                        <a:t>vm-redis-02</a:t>
-                      </a:r>
-                      <a:endParaRPr lang="zh-TW" altLang="en-US" sz="1400" dirty="0">
+                        <a:t>infogather-sit-copilot-01</a:t>
+                      </a:r>
+                      <a:endParaRPr lang="en" sz="1400" dirty="0">
                         <a:latin typeface="Consolas" panose="020B0609020204030204" pitchFamily="49" charset="0"/>
+                        <a:ea typeface="Microsoft JhengHei" panose="020B0604030504040204" pitchFamily="34" charset="-120"/>
                         <a:cs typeface="Consolas" panose="020B0609020204030204" pitchFamily="49" charset="0"/>
                       </a:endParaRPr>
                     </a:p>
                   </a:txBody>
-                  <a:tcPr/>
-                </a:tc>
-                <a:tc>
-                  <a:txBody>
-                    <a:bodyPr/>
-                    <a:lstStyle/>
-                    <a:p>
-                      <a:r>
-                        <a:rPr lang="en-US" altLang="zh-TW" sz="1400" dirty="0"/>
+                  <a:tcPr anchor="ctr"/>
+                </a:tc>
+                <a:tc>
+                  <a:txBody>
+                    <a:bodyPr/>
+                    <a:lstStyle/>
+                    <a:p>
+                      <a:pPr>
+                        <a:buNone/>
+                      </a:pPr>
+                      <a:r>
+                        <a:rPr lang="en"/>
                         <a:t>2 vCPU</a:t>
                       </a:r>
-                      <a:endParaRPr lang="zh-TW" altLang="en-US" sz="1400" dirty="0"/>
-                    </a:p>
-                  </a:txBody>
-                  <a:tcPr/>
-                </a:tc>
-                <a:tc>
-                  <a:txBody>
-                    <a:bodyPr/>
-                    <a:lstStyle/>
-                    <a:p>
-                      <a:r>
-                        <a:rPr lang="en-US" altLang="zh-TW" sz="1400" dirty="0"/>
-                        <a:t>8 GB</a:t>
-                      </a:r>
-                      <a:endParaRPr lang="zh-TW" altLang="en-US" sz="1400" dirty="0"/>
-                    </a:p>
-                  </a:txBody>
-                  <a:tcPr/>
-                </a:tc>
-                <a:tc>
-                  <a:txBody>
-                    <a:bodyPr/>
-                    <a:lstStyle/>
-                    <a:p>
-                      <a:r>
-                        <a:rPr lang="en-US" altLang="zh-TW" sz="1400" dirty="0"/>
-                        <a:t>100 GB</a:t>
-                      </a:r>
-                      <a:endParaRPr lang="zh-TW" altLang="en-US" sz="1400" dirty="0"/>
-                    </a:p>
-                  </a:txBody>
-                  <a:tcPr/>
-                </a:tc>
-                <a:tc>
-                  <a:txBody>
-                    <a:bodyPr/>
-                    <a:lstStyle/>
-                    <a:p>
-                      <a:r>
-                        <a:rPr lang="en-US" altLang="zh-TW" sz="1400" dirty="0"/>
-                        <a:t>Redis server, sentinel</a:t>
-                      </a:r>
-                      <a:endParaRPr lang="zh-TW" altLang="en-US" sz="1400" dirty="0"/>
-                    </a:p>
-                  </a:txBody>
-                  <a:tcPr/>
-                </a:tc>
-                <a:tc>
-                  <a:txBody>
-                    <a:bodyPr/>
-                    <a:lstStyle/>
-                    <a:p>
-                      <a:r>
-                        <a:rPr lang="en" altLang="zh-TW" sz="1400" b="0" i="0" u="none" strike="noStrike" cap="none" dirty="0">
-                          <a:solidFill>
-                            <a:srgbClr val="000000"/>
-                          </a:solidFill>
-                          <a:effectLst/>
-                          <a:latin typeface="Arial"/>
-                          <a:ea typeface="Arial"/>
-                          <a:cs typeface="Arial"/>
-                          <a:sym typeface="Arial"/>
-                        </a:rPr>
-                        <a:t>Redis replica</a:t>
-                      </a:r>
-                      <a:endParaRPr lang="zh-TW" altLang="en-US" sz="1400" dirty="0"/>
-                    </a:p>
-                  </a:txBody>
-                  <a:tcPr/>
+                    </a:p>
+                  </a:txBody>
+                  <a:tcPr anchor="ctr"/>
+                </a:tc>
+                <a:tc>
+                  <a:txBody>
+                    <a:bodyPr/>
+                    <a:lstStyle/>
+                    <a:p>
+                      <a:pPr>
+                        <a:buNone/>
+                      </a:pPr>
+                      <a:r>
+                        <a:rPr lang="en"/>
+                        <a:t>4 GB</a:t>
+                      </a:r>
+                    </a:p>
+                  </a:txBody>
+                  <a:tcPr anchor="ctr"/>
+                </a:tc>
+                <a:tc>
+                  <a:txBody>
+                    <a:bodyPr/>
+                    <a:lstStyle/>
+                    <a:p>
+                      <a:pPr>
+                        <a:buNone/>
+                      </a:pPr>
+                      <a:r>
+                        <a:rPr lang="en"/>
+                        <a:t>40 GB</a:t>
+                      </a:r>
+                    </a:p>
+                  </a:txBody>
+                  <a:tcPr anchor="ctr"/>
+                </a:tc>
+                <a:tc>
+                  <a:txBody>
+                    <a:bodyPr/>
+                    <a:lstStyle/>
+                    <a:p>
+                      <a:pPr>
+                        <a:buNone/>
+                      </a:pPr>
+                      <a:r>
+                        <a:rPr lang="en" sz="1400" dirty="0"/>
+                        <a:t>Copilot CLI server</a:t>
+                      </a:r>
+                      <a:endParaRPr lang="en" sz="1400" dirty="0">
+                        <a:latin typeface="Microsoft JhengHei" panose="020B0604030504040204" pitchFamily="34" charset="-120"/>
+                        <a:ea typeface="Microsoft JhengHei" panose="020B0604030504040204" pitchFamily="34" charset="-120"/>
+                      </a:endParaRPr>
+                    </a:p>
+                  </a:txBody>
+                  <a:tcPr anchor="ctr"/>
+                </a:tc>
+                <a:tc>
+                  <a:txBody>
+                    <a:bodyPr/>
+                    <a:lstStyle/>
+                    <a:p>
+                      <a:pPr>
+                        <a:buNone/>
+                      </a:pPr>
+                      <a:r>
+                        <a:rPr lang="en" sz="1400" dirty="0"/>
+                        <a:t>SIT Agent / LLM runtime </a:t>
+                      </a:r>
+                      <a:r>
+                        <a:rPr lang="zh-TW" altLang="en-US" sz="1400" dirty="0"/>
+                        <a:t>節點</a:t>
+                      </a:r>
+                      <a:endParaRPr lang="zh-TW" altLang="en-US" sz="1400" dirty="0">
+                        <a:latin typeface="Microsoft JhengHei" panose="020B0604030504040204" pitchFamily="34" charset="-120"/>
+                        <a:ea typeface="Microsoft JhengHei" panose="020B0604030504040204" pitchFamily="34" charset="-120"/>
+                      </a:endParaRPr>
+                    </a:p>
+                  </a:txBody>
+                  <a:tcPr anchor="ctr"/>
                 </a:tc>
                 <a:extLst>
                   <a:ext uri="{0D108BD9-81ED-4DB2-BD59-A6C34878D82A}">
-                    <a16:rowId xmlns:a16="http://schemas.microsoft.com/office/drawing/2014/main" val="2330776270"/>
+                    <a16:rowId xmlns:a16="http://schemas.microsoft.com/office/drawing/2014/main" val="3175800829"/>
                   </a:ext>
                 </a:extLst>
               </a:tr>
-              <a:tr h="326218">
-                <a:tc>
-                  <a:txBody>
-                    <a:bodyPr/>
-                    <a:lstStyle/>
-                    <a:p>
-                      <a:pPr marL="0" marR="0" lvl="0" indent="0" algn="l" defTabSz="914400" rtl="0" eaLnBrk="1" fontAlgn="auto" latinLnBrk="0" hangingPunct="1">
-                        <a:lnSpc>
-                          <a:spcPct val="100000"/>
-                        </a:lnSpc>
-                        <a:spcBef>
-                          <a:spcPts val="0"/>
-                        </a:spcBef>
-                        <a:spcAft>
-                          <a:spcPts val="0"/>
-                        </a:spcAft>
-                        <a:buClr>
-                          <a:srgbClr val="000000"/>
-                        </a:buClr>
-                        <a:buSzTx/>
-                        <a:buFont typeface="Arial"/>
-                        <a:buNone/>
-                        <a:tabLst/>
-                        <a:defRPr/>
-                      </a:pPr>
-                      <a:r>
-                        <a:rPr lang="en-US" altLang="zh-TW" sz="1400" dirty="0">
+              <a:tr h="363331">
+                <a:tc>
+                  <a:txBody>
+                    <a:bodyPr/>
+                    <a:lstStyle/>
+                    <a:p>
+                      <a:pPr>
+                        <a:buNone/>
+                      </a:pPr>
+                      <a:r>
+                        <a:rPr lang="en" sz="1400" dirty="0">
                           <a:latin typeface="Consolas" panose="020B0609020204030204" pitchFamily="49" charset="0"/>
                           <a:cs typeface="Consolas" panose="020B0609020204030204" pitchFamily="49" charset="0"/>
                         </a:rPr>
-                        <a:t>vm-redis-03</a:t>
-                      </a:r>
-                      <a:endParaRPr lang="zh-TW" altLang="en-US" sz="1400" dirty="0">
+                        <a:t>infogather-sit-ops-01</a:t>
+                      </a:r>
+                      <a:endParaRPr lang="en" sz="1400" dirty="0">
                         <a:latin typeface="Consolas" panose="020B0609020204030204" pitchFamily="49" charset="0"/>
+                        <a:ea typeface="Microsoft JhengHei" panose="020B0604030504040204" pitchFamily="34" charset="-120"/>
                         <a:cs typeface="Consolas" panose="020B0609020204030204" pitchFamily="49" charset="0"/>
                       </a:endParaRPr>
                     </a:p>
                   </a:txBody>
-                  <a:tcPr/>
-                </a:tc>
-                <a:tc>
-                  <a:txBody>
-                    <a:bodyPr/>
-                    <a:lstStyle/>
-                    <a:p>
-                      <a:r>
-                        <a:rPr lang="en-US" altLang="zh-TW" sz="1400" dirty="0"/>
+                  <a:tcPr anchor="ctr"/>
+                </a:tc>
+                <a:tc>
+                  <a:txBody>
+                    <a:bodyPr/>
+                    <a:lstStyle/>
+                    <a:p>
+                      <a:pPr>
+                        <a:buNone/>
+                      </a:pPr>
+                      <a:r>
+                        <a:rPr lang="en"/>
                         <a:t>2 vCPU</a:t>
                       </a:r>
-                      <a:endParaRPr lang="zh-TW" altLang="en-US" sz="1400" dirty="0"/>
-                    </a:p>
-                  </a:txBody>
-                  <a:tcPr/>
-                </a:tc>
-                <a:tc>
-                  <a:txBody>
-                    <a:bodyPr/>
-                    <a:lstStyle/>
-                    <a:p>
-                      <a:r>
-                        <a:rPr lang="en-US" altLang="zh-TW" sz="1400" dirty="0"/>
-                        <a:t>8 GB</a:t>
-                      </a:r>
-                      <a:endParaRPr lang="zh-TW" altLang="en-US" sz="1400" dirty="0"/>
-                    </a:p>
-                  </a:txBody>
-                  <a:tcPr/>
-                </a:tc>
-                <a:tc>
-                  <a:txBody>
-                    <a:bodyPr/>
-                    <a:lstStyle/>
-                    <a:p>
-                      <a:r>
-                        <a:rPr lang="en-US" altLang="zh-TW" sz="1400" dirty="0"/>
-                        <a:t>100 GB</a:t>
-                      </a:r>
-                      <a:endParaRPr lang="zh-TW" altLang="en-US" sz="1400" dirty="0"/>
-                    </a:p>
-                  </a:txBody>
-                  <a:tcPr/>
-                </a:tc>
-                <a:tc>
-                  <a:txBody>
-                    <a:bodyPr/>
-                    <a:lstStyle/>
-                    <a:p>
-                      <a:pPr marL="0" marR="0" lvl="0" indent="0" algn="l" defTabSz="914400" rtl="0" eaLnBrk="1" fontAlgn="auto" latinLnBrk="0" hangingPunct="1">
-                        <a:lnSpc>
-                          <a:spcPct val="100000"/>
-                        </a:lnSpc>
-                        <a:spcBef>
-                          <a:spcPts val="0"/>
-                        </a:spcBef>
-                        <a:spcAft>
-                          <a:spcPts val="0"/>
-                        </a:spcAft>
-                        <a:buClr>
-                          <a:srgbClr val="000000"/>
-                        </a:buClr>
-                        <a:buSzTx/>
-                        <a:buFont typeface="Arial"/>
-                        <a:buNone/>
-                        <a:tabLst/>
-                        <a:defRPr/>
-                      </a:pPr>
-                      <a:r>
-                        <a:rPr lang="en-US" altLang="zh-TW" sz="1400" dirty="0"/>
-                        <a:t>Redis server, sentinel</a:t>
-                      </a:r>
-                      <a:endParaRPr lang="zh-TW" altLang="en-US" sz="1400" dirty="0"/>
-                    </a:p>
-                  </a:txBody>
-                  <a:tcPr/>
-                </a:tc>
-                <a:tc>
-                  <a:txBody>
-                    <a:bodyPr/>
-                    <a:lstStyle/>
-                    <a:p>
-                      <a:pPr marL="0" marR="0" lvl="0" indent="0" algn="l" defTabSz="914400" rtl="0" eaLnBrk="1" fontAlgn="auto" latinLnBrk="0" hangingPunct="1">
-                        <a:lnSpc>
-                          <a:spcPct val="100000"/>
-                        </a:lnSpc>
-                        <a:spcBef>
-                          <a:spcPts val="0"/>
-                        </a:spcBef>
-                        <a:spcAft>
-                          <a:spcPts val="0"/>
-                        </a:spcAft>
-                        <a:buClr>
-                          <a:srgbClr val="000000"/>
-                        </a:buClr>
-                        <a:buSzTx/>
-                        <a:buFont typeface="Arial"/>
-                        <a:buNone/>
-                        <a:tabLst/>
-                        <a:defRPr/>
-                      </a:pPr>
-                      <a:r>
-                        <a:rPr lang="en" altLang="zh-TW" sz="1400" b="0" i="0" u="none" strike="noStrike" cap="none" dirty="0">
-                          <a:solidFill>
-                            <a:srgbClr val="000000"/>
-                          </a:solidFill>
-                          <a:effectLst/>
-                          <a:latin typeface="Arial"/>
-                          <a:ea typeface="Arial"/>
-                          <a:cs typeface="Arial"/>
-                          <a:sym typeface="Arial"/>
-                        </a:rPr>
-                        <a:t>Redis replica</a:t>
-                      </a:r>
-                      <a:endParaRPr lang="zh-TW" altLang="en-US" sz="1400" dirty="0"/>
-                    </a:p>
-                  </a:txBody>
-                  <a:tcPr/>
+                    </a:p>
+                  </a:txBody>
+                  <a:tcPr anchor="ctr"/>
+                </a:tc>
+                <a:tc>
+                  <a:txBody>
+                    <a:bodyPr/>
+                    <a:lstStyle/>
+                    <a:p>
+                      <a:pPr>
+                        <a:buNone/>
+                      </a:pPr>
+                      <a:r>
+                        <a:rPr lang="en"/>
+                        <a:t>4 GB</a:t>
+                      </a:r>
+                    </a:p>
+                  </a:txBody>
+                  <a:tcPr anchor="ctr"/>
+                </a:tc>
+                <a:tc>
+                  <a:txBody>
+                    <a:bodyPr/>
+                    <a:lstStyle/>
+                    <a:p>
+                      <a:pPr>
+                        <a:buNone/>
+                      </a:pPr>
+                      <a:r>
+                        <a:rPr lang="en" dirty="0"/>
+                        <a:t>120 GB</a:t>
+                      </a:r>
+                    </a:p>
+                  </a:txBody>
+                  <a:tcPr anchor="ctr"/>
+                </a:tc>
+                <a:tc>
+                  <a:txBody>
+                    <a:bodyPr/>
+                    <a:lstStyle/>
+                    <a:p>
+                      <a:pPr>
+                        <a:buNone/>
+                      </a:pPr>
+                      <a:r>
+                        <a:rPr lang="en" sz="1400" dirty="0" err="1"/>
+                        <a:t>Prometheus、Grafana、operations</a:t>
+                      </a:r>
+                      <a:r>
+                        <a:rPr lang="en" sz="1400" dirty="0"/>
+                        <a:t> tools</a:t>
+                      </a:r>
+                      <a:endParaRPr lang="en" sz="1400" dirty="0">
+                        <a:latin typeface="Microsoft JhengHei" panose="020B0604030504040204" pitchFamily="34" charset="-120"/>
+                        <a:ea typeface="Microsoft JhengHei" panose="020B0604030504040204" pitchFamily="34" charset="-120"/>
+                      </a:endParaRPr>
+                    </a:p>
+                  </a:txBody>
+                  <a:tcPr anchor="ctr"/>
+                </a:tc>
+                <a:tc>
+                  <a:txBody>
+                    <a:bodyPr/>
+                    <a:lstStyle/>
+                    <a:p>
+                      <a:pPr>
+                        <a:buNone/>
+                      </a:pPr>
+                      <a:r>
+                        <a:rPr lang="en" sz="1400" dirty="0"/>
+                        <a:t>SIT </a:t>
+                      </a:r>
+                      <a:r>
+                        <a:rPr lang="zh-TW" altLang="en-US" sz="1400" dirty="0"/>
+                        <a:t>監控與維運控制節點</a:t>
+                      </a:r>
+                      <a:endParaRPr lang="zh-TW" altLang="en-US" sz="1400" dirty="0">
+                        <a:latin typeface="Microsoft JhengHei" panose="020B0604030504040204" pitchFamily="34" charset="-120"/>
+                        <a:ea typeface="Microsoft JhengHei" panose="020B0604030504040204" pitchFamily="34" charset="-120"/>
+                      </a:endParaRPr>
+                    </a:p>
+                  </a:txBody>
+                  <a:tcPr anchor="ctr"/>
                 </a:tc>
                 <a:extLst>
                   <a:ext uri="{0D108BD9-81ED-4DB2-BD59-A6C34878D82A}">
-                    <a16:rowId xmlns:a16="http://schemas.microsoft.com/office/drawing/2014/main" val="335511611"/>
-                  </a:ext>
-                </a:extLst>
-              </a:tr>
-              <a:tr h="326218">
-                <a:tc>
-                  <a:txBody>
-                    <a:bodyPr/>
-                    <a:lstStyle/>
-                    <a:p>
-                      <a:pPr marL="0" marR="0" lvl="0" indent="0" algn="l" defTabSz="914400" rtl="0" eaLnBrk="1" fontAlgn="auto" latinLnBrk="0" hangingPunct="1">
-                        <a:lnSpc>
-                          <a:spcPct val="100000"/>
-                        </a:lnSpc>
-                        <a:spcBef>
-                          <a:spcPts val="0"/>
-                        </a:spcBef>
-                        <a:spcAft>
-                          <a:spcPts val="0"/>
-                        </a:spcAft>
-                        <a:buClr>
-                          <a:srgbClr val="000000"/>
-                        </a:buClr>
-                        <a:buSzTx/>
-                        <a:buFont typeface="Arial"/>
-                        <a:buNone/>
-                        <a:tabLst/>
-                        <a:defRPr/>
-                      </a:pPr>
-                      <a:r>
-                        <a:rPr lang="en-US" altLang="zh-TW" sz="1400" dirty="0">
-                          <a:latin typeface="Consolas" panose="020B0609020204030204" pitchFamily="49" charset="0"/>
-                          <a:cs typeface="Consolas" panose="020B0609020204030204" pitchFamily="49" charset="0"/>
-                        </a:rPr>
-                        <a:t>vm-copilot-01</a:t>
-                      </a:r>
-                      <a:endParaRPr lang="zh-TW" altLang="en-US" sz="1400" dirty="0">
-                        <a:latin typeface="Consolas" panose="020B0609020204030204" pitchFamily="49" charset="0"/>
-                        <a:cs typeface="Consolas" panose="020B0609020204030204" pitchFamily="49" charset="0"/>
-                      </a:endParaRPr>
-                    </a:p>
-                  </a:txBody>
-                  <a:tcPr/>
-                </a:tc>
-                <a:tc>
-                  <a:txBody>
-                    <a:bodyPr/>
-                    <a:lstStyle/>
-                    <a:p>
-                      <a:r>
-                        <a:rPr lang="en-US" altLang="zh-TW" sz="1400" dirty="0"/>
-                        <a:t>1 vCPU</a:t>
-                      </a:r>
-                      <a:endParaRPr lang="zh-TW" altLang="en-US" sz="1400" dirty="0"/>
-                    </a:p>
-                  </a:txBody>
-                  <a:tcPr/>
-                </a:tc>
-                <a:tc>
-                  <a:txBody>
-                    <a:bodyPr/>
-                    <a:lstStyle/>
-                    <a:p>
-                      <a:r>
-                        <a:rPr lang="en-US" altLang="zh-TW" sz="1400" dirty="0"/>
-                        <a:t>2 GB</a:t>
-                      </a:r>
-                      <a:endParaRPr lang="zh-TW" altLang="en-US" sz="1400" dirty="0"/>
-                    </a:p>
-                  </a:txBody>
-                  <a:tcPr/>
-                </a:tc>
-                <a:tc>
-                  <a:txBody>
-                    <a:bodyPr/>
-                    <a:lstStyle/>
-                    <a:p>
-                      <a:r>
-                        <a:rPr lang="en-US" altLang="zh-TW" sz="1400" dirty="0"/>
-                        <a:t>60 GB</a:t>
-                      </a:r>
-                      <a:endParaRPr lang="zh-TW" altLang="en-US" sz="1400" dirty="0"/>
-                    </a:p>
-                  </a:txBody>
-                  <a:tcPr/>
-                </a:tc>
-                <a:tc>
-                  <a:txBody>
-                    <a:bodyPr/>
-                    <a:lstStyle/>
-                    <a:p>
-                      <a:r>
-                        <a:rPr lang="en-US" altLang="zh-TW" sz="1400" dirty="0"/>
-                        <a:t>Copilot CLI server</a:t>
-                      </a:r>
-                      <a:endParaRPr lang="zh-TW" altLang="en-US" sz="1400" dirty="0"/>
-                    </a:p>
-                  </a:txBody>
-                  <a:tcPr/>
-                </a:tc>
-                <a:tc>
-                  <a:txBody>
-                    <a:bodyPr/>
-                    <a:lstStyle/>
-                    <a:p>
-                      <a:r>
-                        <a:rPr lang="en" altLang="zh-TW" sz="1400" b="0" i="0" u="none" strike="noStrike" cap="none" dirty="0">
-                          <a:solidFill>
-                            <a:srgbClr val="000000"/>
-                          </a:solidFill>
-                          <a:effectLst/>
-                          <a:latin typeface="Arial"/>
-                          <a:ea typeface="Arial"/>
-                          <a:cs typeface="Arial"/>
-                          <a:sym typeface="Arial"/>
-                        </a:rPr>
-                        <a:t>CLI active </a:t>
-                      </a:r>
-                      <a:r>
-                        <a:rPr lang="zh-TW" altLang="en-US" sz="1400" b="0" i="0" u="none" strike="noStrike" cap="none" dirty="0">
-                          <a:solidFill>
-                            <a:srgbClr val="000000"/>
-                          </a:solidFill>
-                          <a:effectLst/>
-                          <a:latin typeface="Arial"/>
-                          <a:ea typeface="Arial"/>
-                          <a:cs typeface="Arial"/>
-                          <a:sym typeface="Arial"/>
-                        </a:rPr>
-                        <a:t>節點</a:t>
-                      </a:r>
-                      <a:endParaRPr lang="zh-TW" altLang="en-US" sz="1400" dirty="0"/>
-                    </a:p>
-                  </a:txBody>
-                  <a:tcPr/>
-                </a:tc>
-                <a:extLst>
-                  <a:ext uri="{0D108BD9-81ED-4DB2-BD59-A6C34878D82A}">
-                    <a16:rowId xmlns:a16="http://schemas.microsoft.com/office/drawing/2014/main" val="239889347"/>
-                  </a:ext>
-                </a:extLst>
-              </a:tr>
-              <a:tr h="326218">
-                <a:tc>
-                  <a:txBody>
-                    <a:bodyPr/>
-                    <a:lstStyle/>
-                    <a:p>
-                      <a:pPr marL="0" marR="0" lvl="0" indent="0" algn="l" defTabSz="914400" rtl="0" eaLnBrk="1" fontAlgn="auto" latinLnBrk="0" hangingPunct="1">
-                        <a:lnSpc>
-                          <a:spcPct val="100000"/>
-                        </a:lnSpc>
-                        <a:spcBef>
-                          <a:spcPts val="0"/>
-                        </a:spcBef>
-                        <a:spcAft>
-                          <a:spcPts val="0"/>
-                        </a:spcAft>
-                        <a:buClr>
-                          <a:srgbClr val="000000"/>
-                        </a:buClr>
-                        <a:buSzTx/>
-                        <a:buFont typeface="Arial"/>
-                        <a:buNone/>
-                        <a:tabLst/>
-                        <a:defRPr/>
-                      </a:pPr>
-                      <a:r>
-                        <a:rPr lang="en-US" altLang="zh-TW" sz="1400" dirty="0">
-                          <a:latin typeface="Consolas" panose="020B0609020204030204" pitchFamily="49" charset="0"/>
-                          <a:cs typeface="Consolas" panose="020B0609020204030204" pitchFamily="49" charset="0"/>
-                        </a:rPr>
-                        <a:t>vm-copilot-02</a:t>
-                      </a:r>
-                      <a:endParaRPr lang="zh-TW" altLang="en-US" sz="1400" dirty="0">
-                        <a:latin typeface="Consolas" panose="020B0609020204030204" pitchFamily="49" charset="0"/>
-                        <a:cs typeface="Consolas" panose="020B0609020204030204" pitchFamily="49" charset="0"/>
-                      </a:endParaRPr>
-                    </a:p>
-                  </a:txBody>
-                  <a:tcPr/>
-                </a:tc>
-                <a:tc>
-                  <a:txBody>
-                    <a:bodyPr/>
-                    <a:lstStyle/>
-                    <a:p>
-                      <a:r>
-                        <a:rPr lang="en-US" altLang="zh-TW" sz="1400" dirty="0"/>
-                        <a:t>1 vCPU</a:t>
-                      </a:r>
-                      <a:endParaRPr lang="zh-TW" altLang="en-US" sz="1400" dirty="0"/>
-                    </a:p>
-                  </a:txBody>
-                  <a:tcPr/>
-                </a:tc>
-                <a:tc>
-                  <a:txBody>
-                    <a:bodyPr/>
-                    <a:lstStyle/>
-                    <a:p>
-                      <a:r>
-                        <a:rPr lang="en-US" altLang="zh-TW" sz="1400" dirty="0"/>
-                        <a:t>2 GB</a:t>
-                      </a:r>
-                      <a:endParaRPr lang="zh-TW" altLang="en-US" sz="1400" dirty="0"/>
-                    </a:p>
-                  </a:txBody>
-                  <a:tcPr/>
-                </a:tc>
-                <a:tc>
-                  <a:txBody>
-                    <a:bodyPr/>
-                    <a:lstStyle/>
-                    <a:p>
-                      <a:r>
-                        <a:rPr lang="en-US" altLang="zh-TW" sz="1400" dirty="0"/>
-                        <a:t>60 GB</a:t>
-                      </a:r>
-                      <a:endParaRPr lang="zh-TW" altLang="en-US" sz="1400" dirty="0"/>
-                    </a:p>
-                  </a:txBody>
-                  <a:tcPr/>
-                </a:tc>
-                <a:tc>
-                  <a:txBody>
-                    <a:bodyPr/>
-                    <a:lstStyle/>
-                    <a:p>
-                      <a:pPr marL="0" marR="0" lvl="0" indent="0" algn="l" defTabSz="914400" rtl="0" eaLnBrk="1" fontAlgn="auto" latinLnBrk="0" hangingPunct="1">
-                        <a:lnSpc>
-                          <a:spcPct val="100000"/>
-                        </a:lnSpc>
-                        <a:spcBef>
-                          <a:spcPts val="0"/>
-                        </a:spcBef>
-                        <a:spcAft>
-                          <a:spcPts val="0"/>
-                        </a:spcAft>
-                        <a:buClr>
-                          <a:srgbClr val="000000"/>
-                        </a:buClr>
-                        <a:buSzTx/>
-                        <a:buFont typeface="Arial"/>
-                        <a:buNone/>
-                        <a:tabLst/>
-                        <a:defRPr/>
-                      </a:pPr>
-                      <a:r>
-                        <a:rPr lang="en-US" altLang="zh-TW" sz="1400" dirty="0"/>
-                        <a:t>Copilot CLI server</a:t>
-                      </a:r>
-                      <a:endParaRPr lang="zh-TW" altLang="en-US" sz="1400" dirty="0"/>
-                    </a:p>
-                  </a:txBody>
-                  <a:tcPr/>
-                </a:tc>
-                <a:tc>
-                  <a:txBody>
-                    <a:bodyPr/>
-                    <a:lstStyle/>
-                    <a:p>
-                      <a:r>
-                        <a:rPr lang="en" altLang="zh-TW" sz="1400" b="0" i="0" u="none" strike="noStrike" cap="none" dirty="0">
-                          <a:solidFill>
-                            <a:srgbClr val="000000"/>
-                          </a:solidFill>
-                          <a:effectLst/>
-                          <a:latin typeface="Arial"/>
-                          <a:ea typeface="Arial"/>
-                          <a:cs typeface="Arial"/>
-                          <a:sym typeface="Arial"/>
-                        </a:rPr>
-                        <a:t>CLI standby </a:t>
-                      </a:r>
-                      <a:r>
-                        <a:rPr lang="zh-TW" altLang="en-US" sz="1400" b="0" i="0" u="none" strike="noStrike" cap="none" dirty="0">
-                          <a:solidFill>
-                            <a:srgbClr val="000000"/>
-                          </a:solidFill>
-                          <a:effectLst/>
-                          <a:latin typeface="Arial"/>
-                          <a:ea typeface="Arial"/>
-                          <a:cs typeface="Arial"/>
-                          <a:sym typeface="Arial"/>
-                        </a:rPr>
-                        <a:t>節點</a:t>
-                      </a:r>
-                      <a:endParaRPr lang="zh-TW" altLang="en-US" sz="1400" dirty="0"/>
-                    </a:p>
-                  </a:txBody>
-                  <a:tcPr/>
-                </a:tc>
-                <a:extLst>
-                  <a:ext uri="{0D108BD9-81ED-4DB2-BD59-A6C34878D82A}">
-                    <a16:rowId xmlns:a16="http://schemas.microsoft.com/office/drawing/2014/main" val="730116185"/>
-                  </a:ext>
-                </a:extLst>
-              </a:tr>
-              <a:tr h="326218">
-                <a:tc>
-                  <a:txBody>
-                    <a:bodyPr/>
-                    <a:lstStyle/>
-                    <a:p>
-                      <a:pPr marL="0" marR="0" lvl="0" indent="0" algn="l" defTabSz="914400" rtl="0" eaLnBrk="1" fontAlgn="auto" latinLnBrk="0" hangingPunct="1">
-                        <a:lnSpc>
-                          <a:spcPct val="100000"/>
-                        </a:lnSpc>
-                        <a:spcBef>
-                          <a:spcPts val="0"/>
-                        </a:spcBef>
-                        <a:spcAft>
-                          <a:spcPts val="0"/>
-                        </a:spcAft>
-                        <a:buClr>
-                          <a:srgbClr val="000000"/>
-                        </a:buClr>
-                        <a:buSzTx/>
-                        <a:buFont typeface="Arial"/>
-                        <a:buNone/>
-                        <a:tabLst/>
-                        <a:defRPr/>
-                      </a:pPr>
-                      <a:r>
-                        <a:rPr lang="en-US" altLang="zh-TW" sz="1400" dirty="0">
-                          <a:latin typeface="Consolas" panose="020B0609020204030204" pitchFamily="49" charset="0"/>
-                          <a:cs typeface="Consolas" panose="020B0609020204030204" pitchFamily="49" charset="0"/>
-                        </a:rPr>
-                        <a:t>vm-ops-01</a:t>
-                      </a:r>
-                      <a:endParaRPr lang="zh-TW" altLang="en-US" sz="1400" dirty="0">
-                        <a:latin typeface="Consolas" panose="020B0609020204030204" pitchFamily="49" charset="0"/>
-                        <a:cs typeface="Consolas" panose="020B0609020204030204" pitchFamily="49" charset="0"/>
-                      </a:endParaRPr>
-                    </a:p>
-                  </a:txBody>
-                  <a:tcPr/>
-                </a:tc>
-                <a:tc>
-                  <a:txBody>
-                    <a:bodyPr/>
-                    <a:lstStyle/>
-                    <a:p>
-                      <a:r>
-                        <a:rPr lang="en-US" altLang="zh-TW" sz="1400" dirty="0"/>
-                        <a:t>2 vCPU</a:t>
-                      </a:r>
-                      <a:endParaRPr lang="zh-TW" altLang="en-US" sz="1400" dirty="0"/>
-                    </a:p>
-                  </a:txBody>
-                  <a:tcPr/>
-                </a:tc>
-                <a:tc>
-                  <a:txBody>
-                    <a:bodyPr/>
-                    <a:lstStyle/>
-                    <a:p>
-                      <a:r>
-                        <a:rPr lang="en-US" altLang="zh-TW" sz="1400" dirty="0"/>
-                        <a:t>8 GB</a:t>
-                      </a:r>
-                      <a:endParaRPr lang="zh-TW" altLang="en-US" sz="1400" dirty="0"/>
-                    </a:p>
-                  </a:txBody>
-                  <a:tcPr/>
-                </a:tc>
-                <a:tc>
-                  <a:txBody>
-                    <a:bodyPr/>
-                    <a:lstStyle/>
-                    <a:p>
-                      <a:r>
-                        <a:rPr lang="en-US" altLang="zh-TW" sz="1400" dirty="0"/>
-                        <a:t>500 GB</a:t>
-                      </a:r>
-                      <a:endParaRPr lang="zh-TW" altLang="en-US" sz="1400" dirty="0"/>
-                    </a:p>
-                  </a:txBody>
-                  <a:tcPr/>
-                </a:tc>
-                <a:tc>
-                  <a:txBody>
-                    <a:bodyPr/>
-                    <a:lstStyle/>
-                    <a:p>
-                      <a:r>
-                        <a:rPr lang="en" altLang="zh-TW" sz="1400" b="0" i="0" u="none" strike="noStrike" cap="none" dirty="0">
-                          <a:solidFill>
-                            <a:srgbClr val="000000"/>
-                          </a:solidFill>
-                          <a:effectLst/>
-                          <a:latin typeface="Arial"/>
-                          <a:ea typeface="Arial"/>
-                          <a:cs typeface="Arial"/>
-                          <a:sym typeface="Arial"/>
-                        </a:rPr>
-                        <a:t>Prometheus, Grafana</a:t>
-                      </a:r>
-                      <a:endParaRPr lang="zh-TW" altLang="en-US" sz="1400" dirty="0"/>
-                    </a:p>
-                  </a:txBody>
-                  <a:tcPr/>
-                </a:tc>
-                <a:tc>
-                  <a:txBody>
-                    <a:bodyPr/>
-                    <a:lstStyle/>
-                    <a:p>
-                      <a:r>
-                        <a:rPr lang="zh-TW" altLang="en-US" sz="1400" b="0" i="0" u="none" strike="noStrike" cap="none" dirty="0">
-                          <a:solidFill>
-                            <a:srgbClr val="000000"/>
-                          </a:solidFill>
-                          <a:effectLst/>
-                          <a:latin typeface="Arial"/>
-                          <a:ea typeface="Arial"/>
-                          <a:cs typeface="Arial"/>
-                          <a:sym typeface="Arial"/>
-                        </a:rPr>
-                        <a:t>維運觀測節點</a:t>
-                      </a:r>
-                      <a:endParaRPr lang="zh-TW" altLang="en-US" sz="1400" dirty="0"/>
-                    </a:p>
-                  </a:txBody>
-                  <a:tcPr/>
-                </a:tc>
-                <a:extLst>
-                  <a:ext uri="{0D108BD9-81ED-4DB2-BD59-A6C34878D82A}">
-                    <a16:rowId xmlns:a16="http://schemas.microsoft.com/office/drawing/2014/main" val="864022058"/>
-                  </a:ext>
-                </a:extLst>
-              </a:tr>
-              <a:tr h="326218">
-                <a:tc>
-                  <a:txBody>
-                    <a:bodyPr/>
-                    <a:lstStyle/>
-                    <a:p>
-                      <a:pPr marL="0" marR="0" lvl="0" indent="0" algn="l" defTabSz="914400" rtl="0" eaLnBrk="1" fontAlgn="auto" latinLnBrk="0" hangingPunct="1">
-                        <a:lnSpc>
-                          <a:spcPct val="100000"/>
-                        </a:lnSpc>
-                        <a:spcBef>
-                          <a:spcPts val="0"/>
-                        </a:spcBef>
-                        <a:spcAft>
-                          <a:spcPts val="0"/>
-                        </a:spcAft>
-                        <a:buClr>
-                          <a:srgbClr val="000000"/>
-                        </a:buClr>
-                        <a:buSzTx/>
-                        <a:buFont typeface="Arial"/>
-                        <a:buNone/>
-                        <a:tabLst/>
-                        <a:defRPr/>
-                      </a:pPr>
-                      <a:r>
-                        <a:rPr lang="en-US" altLang="zh-TW" sz="1400" dirty="0">
-                          <a:latin typeface="Consolas" panose="020B0609020204030204" pitchFamily="49" charset="0"/>
-                          <a:cs typeface="Consolas" panose="020B0609020204030204" pitchFamily="49" charset="0"/>
-                        </a:rPr>
-                        <a:t>vm-backup-01</a:t>
-                      </a:r>
-                      <a:endParaRPr lang="zh-TW" altLang="en-US" sz="1400" dirty="0">
-                        <a:latin typeface="Consolas" panose="020B0609020204030204" pitchFamily="49" charset="0"/>
-                        <a:cs typeface="Consolas" panose="020B0609020204030204" pitchFamily="49" charset="0"/>
-                      </a:endParaRPr>
-                    </a:p>
-                  </a:txBody>
-                  <a:tcPr/>
-                </a:tc>
-                <a:tc>
-                  <a:txBody>
-                    <a:bodyPr/>
-                    <a:lstStyle/>
-                    <a:p>
-                      <a:r>
-                        <a:rPr lang="en-US" altLang="zh-TW" sz="1400" dirty="0"/>
-                        <a:t>2 vCPU</a:t>
-                      </a:r>
-                      <a:endParaRPr lang="zh-TW" altLang="en-US" sz="1400" dirty="0"/>
-                    </a:p>
-                  </a:txBody>
-                  <a:tcPr/>
-                </a:tc>
-                <a:tc>
-                  <a:txBody>
-                    <a:bodyPr/>
-                    <a:lstStyle/>
-                    <a:p>
-                      <a:r>
-                        <a:rPr lang="en-US" altLang="zh-TW" sz="1400" dirty="0"/>
-                        <a:t>8 GB</a:t>
-                      </a:r>
-                      <a:endParaRPr lang="zh-TW" altLang="en-US" sz="1400" dirty="0"/>
-                    </a:p>
-                  </a:txBody>
-                  <a:tcPr/>
-                </a:tc>
-                <a:tc>
-                  <a:txBody>
-                    <a:bodyPr/>
-                    <a:lstStyle/>
-                    <a:p>
-                      <a:r>
-                        <a:rPr lang="en-US" altLang="zh-TW" sz="1400" dirty="0"/>
-                        <a:t>1 TB</a:t>
-                      </a:r>
-                      <a:endParaRPr lang="zh-TW" altLang="en-US" sz="1400" dirty="0"/>
-                    </a:p>
-                  </a:txBody>
-                  <a:tcPr/>
-                </a:tc>
-                <a:tc>
-                  <a:txBody>
-                    <a:bodyPr/>
-                    <a:lstStyle/>
-                    <a:p>
-                      <a:r>
-                        <a:rPr lang="en" altLang="zh-TW" sz="1400" dirty="0"/>
-                        <a:t>backup job / restore drill</a:t>
-                      </a:r>
-                      <a:endParaRPr lang="zh-TW" altLang="en-US" sz="1400" dirty="0"/>
-                    </a:p>
-                  </a:txBody>
-                  <a:tcPr/>
-                </a:tc>
-                <a:tc>
-                  <a:txBody>
-                    <a:bodyPr/>
-                    <a:lstStyle/>
-                    <a:p>
-                      <a:r>
-                        <a:rPr lang="zh-TW" altLang="en-US" sz="1400" b="0" i="0" u="none" strike="noStrike" cap="none" dirty="0">
-                          <a:solidFill>
-                            <a:srgbClr val="000000"/>
-                          </a:solidFill>
-                          <a:effectLst/>
-                          <a:latin typeface="Arial"/>
-                          <a:ea typeface="Arial"/>
-                          <a:cs typeface="Arial"/>
-                          <a:sym typeface="Arial"/>
-                        </a:rPr>
-                        <a:t>備份與還原演練節點</a:t>
-                      </a:r>
-                      <a:endParaRPr lang="zh-TW" altLang="en-US" sz="1400" dirty="0"/>
-                    </a:p>
-                  </a:txBody>
-                  <a:tcPr/>
-                </a:tc>
-                <a:extLst>
-                  <a:ext uri="{0D108BD9-81ED-4DB2-BD59-A6C34878D82A}">
-                    <a16:rowId xmlns:a16="http://schemas.microsoft.com/office/drawing/2014/main" val="329649083"/>
+                    <a16:rowId xmlns:a16="http://schemas.microsoft.com/office/drawing/2014/main" val="1664710146"/>
                   </a:ext>
                 </a:extLst>
               </a:tr>
@@ -13242,6 +10865,1717 @@
     <p:extLst>
       <p:ext uri="{BB962C8B-B14F-4D97-AF65-F5344CB8AC3E}">
         <p14:creationId xmlns:p14="http://schemas.microsoft.com/office/powerpoint/2010/main" val="1074177084"/>
+      </p:ext>
+    </p:extLst>
+  </p:cSld>
+  <p:clrMapOvr>
+    <a:masterClrMapping/>
+  </p:clrMapOvr>
+</p:sld>
+</file>
+
+<file path=ppt/slides/slide5.xml><?xml version="1.0" encoding="utf-8"?>
+<p:sld xmlns:a="http://schemas.openxmlformats.org/drawingml/2006/main" xmlns:r="http://schemas.openxmlformats.org/officeDocument/2006/relationships" xmlns:p="http://schemas.openxmlformats.org/presentationml/2006/main">
+  <p:cSld>
+    <p:spTree>
+      <p:nvGrpSpPr>
+        <p:cNvPr id="1" name="">
+          <a:extLst>
+            <a:ext uri="{FF2B5EF4-FFF2-40B4-BE49-F238E27FC236}">
+              <a16:creationId xmlns:a16="http://schemas.microsoft.com/office/drawing/2014/main" id="{46AF1D0A-7358-76D8-4B94-2BDDF0336F91}"/>
+            </a:ext>
+          </a:extLst>
+        </p:cNvPr>
+        <p:cNvGrpSpPr/>
+        <p:nvPr/>
+      </p:nvGrpSpPr>
+      <p:grpSpPr>
+        <a:xfrm>
+          <a:off x="0" y="0"/>
+          <a:ext cx="0" cy="0"/>
+          <a:chOff x="0" y="0"/>
+          <a:chExt cx="0" cy="0"/>
+        </a:xfrm>
+      </p:grpSpPr>
+      <p:sp>
+        <p:nvSpPr>
+          <p:cNvPr id="3" name="標題 2">
+            <a:extLst>
+              <a:ext uri="{FF2B5EF4-FFF2-40B4-BE49-F238E27FC236}">
+                <a16:creationId xmlns:a16="http://schemas.microsoft.com/office/drawing/2014/main" id="{936A83FF-A6D5-B2C4-8B72-33F8656994EF}"/>
+              </a:ext>
+            </a:extLst>
+          </p:cNvPr>
+          <p:cNvSpPr>
+            <a:spLocks noGrp="1"/>
+          </p:cNvSpPr>
+          <p:nvPr>
+            <p:ph type="title"/>
+          </p:nvPr>
+        </p:nvSpPr>
+        <p:spPr/>
+        <p:txBody>
+          <a:bodyPr/>
+          <a:lstStyle/>
+          <a:p>
+            <a:r>
+              <a:rPr lang="zh-TW" altLang="en-US" b="1" dirty="0"/>
+              <a:t>正式環境 </a:t>
+            </a:r>
+            <a:r>
+              <a:rPr lang="en" altLang="zh-TW" b="1" dirty="0"/>
+              <a:t>VM </a:t>
+            </a:r>
+            <a:r>
+              <a:rPr lang="zh-TW" altLang="en-US" b="1" dirty="0"/>
+              <a:t>與服務配置</a:t>
+            </a:r>
+            <a:endParaRPr lang="zh-TW" altLang="en-US" dirty="0"/>
+          </a:p>
+        </p:txBody>
+      </p:sp>
+      <p:sp>
+        <p:nvSpPr>
+          <p:cNvPr id="6" name="文字版面配置區 5">
+            <a:extLst>
+              <a:ext uri="{FF2B5EF4-FFF2-40B4-BE49-F238E27FC236}">
+                <a16:creationId xmlns:a16="http://schemas.microsoft.com/office/drawing/2014/main" id="{E432E00F-A29F-3F3E-DEB4-2839A2892BD4}"/>
+              </a:ext>
+            </a:extLst>
+          </p:cNvPr>
+          <p:cNvSpPr>
+            <a:spLocks noGrp="1"/>
+          </p:cNvSpPr>
+          <p:nvPr>
+            <p:ph type="body" idx="1"/>
+          </p:nvPr>
+        </p:nvSpPr>
+        <p:spPr/>
+        <p:txBody>
+          <a:bodyPr/>
+          <a:lstStyle/>
+          <a:p>
+            <a:endParaRPr lang="en-US" altLang="zh-TW" dirty="0"/>
+          </a:p>
+          <a:p>
+            <a:endParaRPr lang="en-US" altLang="zh-TW" dirty="0"/>
+          </a:p>
+          <a:p>
+            <a:endParaRPr lang="en-US" altLang="zh-TW" dirty="0"/>
+          </a:p>
+          <a:p>
+            <a:endParaRPr lang="en-US" altLang="zh-TW" dirty="0"/>
+          </a:p>
+          <a:p>
+            <a:endParaRPr lang="en-US" altLang="zh-TW" dirty="0"/>
+          </a:p>
+          <a:p>
+            <a:endParaRPr lang="en-US" altLang="zh-TW" dirty="0"/>
+          </a:p>
+          <a:p>
+            <a:endParaRPr lang="en-US" altLang="zh-TW" dirty="0"/>
+          </a:p>
+          <a:p>
+            <a:endParaRPr lang="en-US" altLang="zh-TW" dirty="0"/>
+          </a:p>
+          <a:p>
+            <a:endParaRPr lang="en-US" altLang="zh-TW" dirty="0"/>
+          </a:p>
+          <a:p>
+            <a:endParaRPr lang="en-US" altLang="zh-TW" dirty="0"/>
+          </a:p>
+          <a:p>
+            <a:endParaRPr lang="en-US" altLang="zh-TW" dirty="0"/>
+          </a:p>
+          <a:p>
+            <a:endParaRPr lang="en-US" altLang="zh-TW" dirty="0"/>
+          </a:p>
+          <a:p>
+            <a:pPr marL="36000" indent="0">
+              <a:buNone/>
+            </a:pPr>
+            <a:endParaRPr lang="en-US" altLang="zh-TW" dirty="0"/>
+          </a:p>
+          <a:p>
+            <a:pPr marL="36000" indent="0">
+              <a:buNone/>
+            </a:pPr>
+            <a:endParaRPr lang="en-US" altLang="zh-TW" dirty="0"/>
+          </a:p>
+          <a:p>
+            <a:r>
+              <a:rPr lang="zh-TW" altLang="en-US" dirty="0"/>
+              <a:t>正式環境資源總計：</a:t>
+            </a:r>
+            <a:r>
+              <a:rPr lang="en" altLang="zh-TW" dirty="0"/>
+              <a:t>3</a:t>
+            </a:r>
+            <a:r>
+              <a:rPr lang="en-US" altLang="zh-TW" dirty="0"/>
+              <a:t>4</a:t>
+            </a:r>
+            <a:r>
+              <a:rPr lang="en" altLang="zh-TW" dirty="0"/>
+              <a:t> vCPU / 104 GB RAM / 2240 GB SSD</a:t>
+            </a:r>
+            <a:endParaRPr lang="en-US" altLang="zh-TW" dirty="0"/>
+          </a:p>
+          <a:p>
+            <a:endParaRPr lang="zh-TW" altLang="en-US" dirty="0"/>
+          </a:p>
+        </p:txBody>
+      </p:sp>
+      <p:graphicFrame>
+        <p:nvGraphicFramePr>
+          <p:cNvPr id="2" name="表格 1">
+            <a:extLst>
+              <a:ext uri="{FF2B5EF4-FFF2-40B4-BE49-F238E27FC236}">
+                <a16:creationId xmlns:a16="http://schemas.microsoft.com/office/drawing/2014/main" id="{277419BC-A996-C46D-03AC-7D801D0DA775}"/>
+              </a:ext>
+            </a:extLst>
+          </p:cNvPr>
+          <p:cNvGraphicFramePr>
+            <a:graphicFrameLocks noGrp="1"/>
+          </p:cNvGraphicFramePr>
+          <p:nvPr>
+            <p:extLst>
+              <p:ext uri="{D42A27DB-BD31-4B8C-83A1-F6EECF244321}">
+                <p14:modId xmlns:p14="http://schemas.microsoft.com/office/powerpoint/2010/main" val="424111395"/>
+              </p:ext>
+            </p:extLst>
+          </p:nvPr>
+        </p:nvGraphicFramePr>
+        <p:xfrm>
+          <a:off x="179388" y="826714"/>
+          <a:ext cx="11161712" cy="4320000"/>
+        </p:xfrm>
+        <a:graphic>
+          <a:graphicData uri="http://schemas.openxmlformats.org/drawingml/2006/table">
+            <a:tbl>
+              <a:tblPr>
+                <a:tableStyleId>{91DB7C30-2B5D-4D34-8F22-85940E495A18}</a:tableStyleId>
+              </a:tblPr>
+              <a:tblGrid>
+                <a:gridCol w="2840921">
+                  <a:extLst>
+                    <a:ext uri="{9D8B030D-6E8A-4147-A177-3AD203B41FA5}">
+                      <a16:colId xmlns:a16="http://schemas.microsoft.com/office/drawing/2014/main" val="1199597028"/>
+                    </a:ext>
+                  </a:extLst>
+                </a:gridCol>
+                <a:gridCol w="800337">
+                  <a:extLst>
+                    <a:ext uri="{9D8B030D-6E8A-4147-A177-3AD203B41FA5}">
+                      <a16:colId xmlns:a16="http://schemas.microsoft.com/office/drawing/2014/main" val="1578801080"/>
+                    </a:ext>
+                  </a:extLst>
+                </a:gridCol>
+                <a:gridCol w="735476">
+                  <a:extLst>
+                    <a:ext uri="{9D8B030D-6E8A-4147-A177-3AD203B41FA5}">
+                      <a16:colId xmlns:a16="http://schemas.microsoft.com/office/drawing/2014/main" val="3168828867"/>
+                    </a:ext>
+                  </a:extLst>
+                </a:gridCol>
+                <a:gridCol w="789751">
+                  <a:extLst>
+                    <a:ext uri="{9D8B030D-6E8A-4147-A177-3AD203B41FA5}">
+                      <a16:colId xmlns:a16="http://schemas.microsoft.com/office/drawing/2014/main" val="136309821"/>
+                    </a:ext>
+                  </a:extLst>
+                </a:gridCol>
+                <a:gridCol w="3413612">
+                  <a:extLst>
+                    <a:ext uri="{9D8B030D-6E8A-4147-A177-3AD203B41FA5}">
+                      <a16:colId xmlns:a16="http://schemas.microsoft.com/office/drawing/2014/main" val="3760430905"/>
+                    </a:ext>
+                  </a:extLst>
+                </a:gridCol>
+                <a:gridCol w="2581615">
+                  <a:extLst>
+                    <a:ext uri="{9D8B030D-6E8A-4147-A177-3AD203B41FA5}">
+                      <a16:colId xmlns:a16="http://schemas.microsoft.com/office/drawing/2014/main" val="939028161"/>
+                    </a:ext>
+                  </a:extLst>
+                </a:gridCol>
+              </a:tblGrid>
+              <a:tr h="353338">
+                <a:tc>
+                  <a:txBody>
+                    <a:bodyPr/>
+                    <a:lstStyle/>
+                    <a:p>
+                      <a:pPr>
+                        <a:buNone/>
+                      </a:pPr>
+                      <a:r>
+                        <a:rPr lang="en" sz="1400" dirty="0"/>
+                        <a:t>VM</a:t>
+                      </a:r>
+                      <a:endParaRPr lang="zh-TW" altLang="en-US" sz="1400" dirty="0">
+                        <a:latin typeface="Microsoft JhengHei" panose="020B0604030504040204" pitchFamily="34" charset="-120"/>
+                        <a:ea typeface="Microsoft JhengHei" panose="020B0604030504040204" pitchFamily="34" charset="-120"/>
+                      </a:endParaRPr>
+                    </a:p>
+                  </a:txBody>
+                  <a:tcPr anchor="ctr"/>
+                </a:tc>
+                <a:tc>
+                  <a:txBody>
+                    <a:bodyPr/>
+                    <a:lstStyle/>
+                    <a:p>
+                      <a:pPr>
+                        <a:buNone/>
+                      </a:pPr>
+                      <a:r>
+                        <a:rPr lang="en" sz="1400" dirty="0"/>
+                        <a:t>vCPU</a:t>
+                      </a:r>
+                      <a:endParaRPr lang="en" sz="1400" dirty="0">
+                        <a:latin typeface="Microsoft JhengHei" panose="020B0604030504040204" pitchFamily="34" charset="-120"/>
+                        <a:ea typeface="Microsoft JhengHei" panose="020B0604030504040204" pitchFamily="34" charset="-120"/>
+                      </a:endParaRPr>
+                    </a:p>
+                  </a:txBody>
+                  <a:tcPr anchor="ctr"/>
+                </a:tc>
+                <a:tc>
+                  <a:txBody>
+                    <a:bodyPr/>
+                    <a:lstStyle/>
+                    <a:p>
+                      <a:pPr>
+                        <a:buNone/>
+                      </a:pPr>
+                      <a:r>
+                        <a:rPr lang="en" sz="1400"/>
+                        <a:t>RAM</a:t>
+                      </a:r>
+                      <a:endParaRPr lang="en" sz="1400">
+                        <a:latin typeface="Microsoft JhengHei" panose="020B0604030504040204" pitchFamily="34" charset="-120"/>
+                        <a:ea typeface="Microsoft JhengHei" panose="020B0604030504040204" pitchFamily="34" charset="-120"/>
+                      </a:endParaRPr>
+                    </a:p>
+                  </a:txBody>
+                  <a:tcPr anchor="ctr"/>
+                </a:tc>
+                <a:tc>
+                  <a:txBody>
+                    <a:bodyPr/>
+                    <a:lstStyle/>
+                    <a:p>
+                      <a:pPr>
+                        <a:buNone/>
+                      </a:pPr>
+                      <a:r>
+                        <a:rPr lang="en" sz="1400" dirty="0"/>
+                        <a:t>SSD</a:t>
+                      </a:r>
+                      <a:endParaRPr lang="en" sz="1400" dirty="0">
+                        <a:latin typeface="Microsoft JhengHei" panose="020B0604030504040204" pitchFamily="34" charset="-120"/>
+                        <a:ea typeface="Microsoft JhengHei" panose="020B0604030504040204" pitchFamily="34" charset="-120"/>
+                      </a:endParaRPr>
+                    </a:p>
+                  </a:txBody>
+                  <a:tcPr anchor="ctr"/>
+                </a:tc>
+                <a:tc>
+                  <a:txBody>
+                    <a:bodyPr/>
+                    <a:lstStyle/>
+                    <a:p>
+                      <a:pPr>
+                        <a:buNone/>
+                      </a:pPr>
+                      <a:r>
+                        <a:rPr lang="zh-TW" altLang="en-US" sz="1400"/>
+                        <a:t>部署服務</a:t>
+                      </a:r>
+                      <a:endParaRPr lang="zh-TW" altLang="en-US" sz="1400">
+                        <a:latin typeface="Microsoft JhengHei" panose="020B0604030504040204" pitchFamily="34" charset="-120"/>
+                        <a:ea typeface="Microsoft JhengHei" panose="020B0604030504040204" pitchFamily="34" charset="-120"/>
+                      </a:endParaRPr>
+                    </a:p>
+                  </a:txBody>
+                  <a:tcPr anchor="ctr"/>
+                </a:tc>
+                <a:tc>
+                  <a:txBody>
+                    <a:bodyPr/>
+                    <a:lstStyle/>
+                    <a:p>
+                      <a:pPr>
+                        <a:buNone/>
+                      </a:pPr>
+                      <a:r>
+                        <a:rPr lang="zh-TW" altLang="en-US" sz="1400"/>
+                        <a:t>說明</a:t>
+                      </a:r>
+                      <a:endParaRPr lang="zh-TW" altLang="en-US" sz="1400">
+                        <a:latin typeface="Microsoft JhengHei" panose="020B0604030504040204" pitchFamily="34" charset="-120"/>
+                        <a:ea typeface="Microsoft JhengHei" panose="020B0604030504040204" pitchFamily="34" charset="-120"/>
+                      </a:endParaRPr>
+                    </a:p>
+                  </a:txBody>
+                  <a:tcPr anchor="ctr"/>
+                </a:tc>
+                <a:extLst>
+                  <a:ext uri="{0D108BD9-81ED-4DB2-BD59-A6C34878D82A}">
+                    <a16:rowId xmlns:a16="http://schemas.microsoft.com/office/drawing/2014/main" val="961505403"/>
+                  </a:ext>
+                </a:extLst>
+              </a:tr>
+              <a:tr h="353338">
+                <a:tc>
+                  <a:txBody>
+                    <a:bodyPr/>
+                    <a:lstStyle/>
+                    <a:p>
+                      <a:pPr>
+                        <a:buNone/>
+                      </a:pPr>
+                      <a:r>
+                        <a:rPr lang="en" sz="1400" dirty="0">
+                          <a:latin typeface="Consolas" panose="020B0609020204030204" pitchFamily="49" charset="0"/>
+                          <a:cs typeface="Consolas" panose="020B0609020204030204" pitchFamily="49" charset="0"/>
+                        </a:rPr>
+                        <a:t>infogather-prod-lb-01</a:t>
+                      </a:r>
+                      <a:endParaRPr lang="en" sz="1400" dirty="0">
+                        <a:latin typeface="Consolas" panose="020B0609020204030204" pitchFamily="49" charset="0"/>
+                        <a:ea typeface="Microsoft JhengHei" panose="020B0604030504040204" pitchFamily="34" charset="-120"/>
+                        <a:cs typeface="Consolas" panose="020B0609020204030204" pitchFamily="49" charset="0"/>
+                      </a:endParaRPr>
+                    </a:p>
+                  </a:txBody>
+                  <a:tcPr anchor="ctr"/>
+                </a:tc>
+                <a:tc>
+                  <a:txBody>
+                    <a:bodyPr/>
+                    <a:lstStyle/>
+                    <a:p>
+                      <a:pPr>
+                        <a:buNone/>
+                      </a:pPr>
+                      <a:r>
+                        <a:rPr lang="en"/>
+                        <a:t>2 vCPU</a:t>
+                      </a:r>
+                    </a:p>
+                  </a:txBody>
+                  <a:tcPr anchor="ctr"/>
+                </a:tc>
+                <a:tc>
+                  <a:txBody>
+                    <a:bodyPr/>
+                    <a:lstStyle/>
+                    <a:p>
+                      <a:pPr>
+                        <a:buNone/>
+                      </a:pPr>
+                      <a:r>
+                        <a:rPr lang="en"/>
+                        <a:t>4 GB</a:t>
+                      </a:r>
+                    </a:p>
+                  </a:txBody>
+                  <a:tcPr anchor="ctr"/>
+                </a:tc>
+                <a:tc>
+                  <a:txBody>
+                    <a:bodyPr/>
+                    <a:lstStyle/>
+                    <a:p>
+                      <a:pPr>
+                        <a:buNone/>
+                      </a:pPr>
+                      <a:r>
+                        <a:rPr lang="en"/>
+                        <a:t>60 GB</a:t>
+                      </a:r>
+                    </a:p>
+                  </a:txBody>
+                  <a:tcPr anchor="ctr"/>
+                </a:tc>
+                <a:tc>
+                  <a:txBody>
+                    <a:bodyPr/>
+                    <a:lstStyle/>
+                    <a:p>
+                      <a:pPr>
+                        <a:buNone/>
+                      </a:pPr>
+                      <a:r>
+                        <a:rPr lang="en" sz="1400"/>
+                        <a:t>Nginx / HAProxy</a:t>
+                      </a:r>
+                      <a:endParaRPr lang="en" sz="1400">
+                        <a:latin typeface="Microsoft JhengHei" panose="020B0604030504040204" pitchFamily="34" charset="-120"/>
+                        <a:ea typeface="Microsoft JhengHei" panose="020B0604030504040204" pitchFamily="34" charset="-120"/>
+                      </a:endParaRPr>
+                    </a:p>
+                  </a:txBody>
+                  <a:tcPr anchor="ctr"/>
+                </a:tc>
+                <a:tc>
+                  <a:txBody>
+                    <a:bodyPr/>
+                    <a:lstStyle/>
+                    <a:p>
+                      <a:pPr>
+                        <a:buNone/>
+                      </a:pPr>
+                      <a:r>
+                        <a:rPr lang="en" sz="1400" dirty="0"/>
+                        <a:t>PROD </a:t>
+                      </a:r>
+                      <a:r>
+                        <a:rPr lang="zh-TW" altLang="en-US" sz="1400" dirty="0"/>
+                        <a:t>入口節點</a:t>
+                      </a:r>
+                      <a:endParaRPr lang="zh-TW" altLang="en-US" sz="1400" dirty="0">
+                        <a:latin typeface="Microsoft JhengHei" panose="020B0604030504040204" pitchFamily="34" charset="-120"/>
+                        <a:ea typeface="Microsoft JhengHei" panose="020B0604030504040204" pitchFamily="34" charset="-120"/>
+                      </a:endParaRPr>
+                    </a:p>
+                  </a:txBody>
+                  <a:tcPr anchor="ctr"/>
+                </a:tc>
+                <a:extLst>
+                  <a:ext uri="{0D108BD9-81ED-4DB2-BD59-A6C34878D82A}">
+                    <a16:rowId xmlns:a16="http://schemas.microsoft.com/office/drawing/2014/main" val="4275047890"/>
+                  </a:ext>
+                </a:extLst>
+              </a:tr>
+              <a:tr h="353338">
+                <a:tc>
+                  <a:txBody>
+                    <a:bodyPr/>
+                    <a:lstStyle/>
+                    <a:p>
+                      <a:pPr>
+                        <a:buNone/>
+                      </a:pPr>
+                      <a:r>
+                        <a:rPr lang="en" sz="1400" dirty="0">
+                          <a:latin typeface="Consolas" panose="020B0609020204030204" pitchFamily="49" charset="0"/>
+                          <a:cs typeface="Consolas" panose="020B0609020204030204" pitchFamily="49" charset="0"/>
+                        </a:rPr>
+                        <a:t>infogather-prod-app-01</a:t>
+                      </a:r>
+                      <a:endParaRPr lang="en" sz="1400" dirty="0">
+                        <a:latin typeface="Consolas" panose="020B0609020204030204" pitchFamily="49" charset="0"/>
+                        <a:ea typeface="Microsoft JhengHei" panose="020B0604030504040204" pitchFamily="34" charset="-120"/>
+                        <a:cs typeface="Consolas" panose="020B0609020204030204" pitchFamily="49" charset="0"/>
+                      </a:endParaRPr>
+                    </a:p>
+                  </a:txBody>
+                  <a:tcPr anchor="ctr"/>
+                </a:tc>
+                <a:tc>
+                  <a:txBody>
+                    <a:bodyPr/>
+                    <a:lstStyle/>
+                    <a:p>
+                      <a:pPr>
+                        <a:buNone/>
+                      </a:pPr>
+                      <a:r>
+                        <a:rPr lang="en"/>
+                        <a:t>4 vCPU</a:t>
+                      </a:r>
+                    </a:p>
+                  </a:txBody>
+                  <a:tcPr anchor="ctr"/>
+                </a:tc>
+                <a:tc>
+                  <a:txBody>
+                    <a:bodyPr/>
+                    <a:lstStyle/>
+                    <a:p>
+                      <a:pPr>
+                        <a:buNone/>
+                      </a:pPr>
+                      <a:r>
+                        <a:rPr lang="en"/>
+                        <a:t>16 GB</a:t>
+                      </a:r>
+                    </a:p>
+                  </a:txBody>
+                  <a:tcPr anchor="ctr"/>
+                </a:tc>
+                <a:tc>
+                  <a:txBody>
+                    <a:bodyPr/>
+                    <a:lstStyle/>
+                    <a:p>
+                      <a:pPr>
+                        <a:buNone/>
+                      </a:pPr>
+                      <a:r>
+                        <a:rPr lang="en"/>
+                        <a:t>100 GB</a:t>
+                      </a:r>
+                    </a:p>
+                  </a:txBody>
+                  <a:tcPr anchor="ctr"/>
+                </a:tc>
+                <a:tc>
+                  <a:txBody>
+                    <a:bodyPr/>
+                    <a:lstStyle/>
+                    <a:p>
+                      <a:pPr>
+                        <a:buNone/>
+                      </a:pPr>
+                      <a:r>
+                        <a:rPr lang="en" sz="1400" dirty="0" err="1"/>
+                        <a:t>InfoGather</a:t>
+                      </a:r>
+                      <a:r>
+                        <a:rPr lang="en" sz="1400" dirty="0"/>
+                        <a:t> </a:t>
+                      </a:r>
+                      <a:r>
+                        <a:rPr lang="en" sz="1400" dirty="0" err="1"/>
+                        <a:t>app、worker、scheduler</a:t>
+                      </a:r>
+                      <a:endParaRPr lang="en" sz="1400" dirty="0">
+                        <a:latin typeface="Microsoft JhengHei" panose="020B0604030504040204" pitchFamily="34" charset="-120"/>
+                        <a:ea typeface="Microsoft JhengHei" panose="020B0604030504040204" pitchFamily="34" charset="-120"/>
+                      </a:endParaRPr>
+                    </a:p>
+                  </a:txBody>
+                  <a:tcPr anchor="ctr"/>
+                </a:tc>
+                <a:tc>
+                  <a:txBody>
+                    <a:bodyPr/>
+                    <a:lstStyle/>
+                    <a:p>
+                      <a:pPr>
+                        <a:buNone/>
+                      </a:pPr>
+                      <a:r>
+                        <a:rPr lang="zh-TW" altLang="en-US" sz="1400" dirty="0"/>
+                        <a:t>主應用節點</a:t>
+                      </a:r>
+                      <a:endParaRPr lang="en" sz="1400" dirty="0">
+                        <a:latin typeface="Microsoft JhengHei" panose="020B0604030504040204" pitchFamily="34" charset="-120"/>
+                        <a:ea typeface="Microsoft JhengHei" panose="020B0604030504040204" pitchFamily="34" charset="-120"/>
+                      </a:endParaRPr>
+                    </a:p>
+                  </a:txBody>
+                  <a:tcPr anchor="ctr"/>
+                </a:tc>
+                <a:extLst>
+                  <a:ext uri="{0D108BD9-81ED-4DB2-BD59-A6C34878D82A}">
+                    <a16:rowId xmlns:a16="http://schemas.microsoft.com/office/drawing/2014/main" val="2565674944"/>
+                  </a:ext>
+                </a:extLst>
+              </a:tr>
+              <a:tr h="353338">
+                <a:tc>
+                  <a:txBody>
+                    <a:bodyPr/>
+                    <a:lstStyle/>
+                    <a:p>
+                      <a:pPr>
+                        <a:buNone/>
+                      </a:pPr>
+                      <a:r>
+                        <a:rPr lang="en" sz="1400" dirty="0">
+                          <a:latin typeface="Consolas" panose="020B0609020204030204" pitchFamily="49" charset="0"/>
+                          <a:cs typeface="Consolas" panose="020B0609020204030204" pitchFamily="49" charset="0"/>
+                        </a:rPr>
+                        <a:t>infogather-prod-app-02</a:t>
+                      </a:r>
+                      <a:endParaRPr lang="en" sz="1400" dirty="0">
+                        <a:latin typeface="Consolas" panose="020B0609020204030204" pitchFamily="49" charset="0"/>
+                        <a:ea typeface="Microsoft JhengHei" panose="020B0604030504040204" pitchFamily="34" charset="-120"/>
+                        <a:cs typeface="Consolas" panose="020B0609020204030204" pitchFamily="49" charset="0"/>
+                      </a:endParaRPr>
+                    </a:p>
+                  </a:txBody>
+                  <a:tcPr anchor="ctr"/>
+                </a:tc>
+                <a:tc>
+                  <a:txBody>
+                    <a:bodyPr/>
+                    <a:lstStyle/>
+                    <a:p>
+                      <a:pPr>
+                        <a:buNone/>
+                      </a:pPr>
+                      <a:r>
+                        <a:rPr lang="en"/>
+                        <a:t>4 vCPU</a:t>
+                      </a:r>
+                    </a:p>
+                  </a:txBody>
+                  <a:tcPr anchor="ctr"/>
+                </a:tc>
+                <a:tc>
+                  <a:txBody>
+                    <a:bodyPr/>
+                    <a:lstStyle/>
+                    <a:p>
+                      <a:pPr>
+                        <a:buNone/>
+                      </a:pPr>
+                      <a:r>
+                        <a:rPr lang="en"/>
+                        <a:t>16 GB</a:t>
+                      </a:r>
+                    </a:p>
+                  </a:txBody>
+                  <a:tcPr anchor="ctr"/>
+                </a:tc>
+                <a:tc>
+                  <a:txBody>
+                    <a:bodyPr/>
+                    <a:lstStyle/>
+                    <a:p>
+                      <a:pPr>
+                        <a:buNone/>
+                      </a:pPr>
+                      <a:r>
+                        <a:rPr lang="en"/>
+                        <a:t>100 GB</a:t>
+                      </a:r>
+                    </a:p>
+                  </a:txBody>
+                  <a:tcPr anchor="ctr"/>
+                </a:tc>
+                <a:tc>
+                  <a:txBody>
+                    <a:bodyPr/>
+                    <a:lstStyle/>
+                    <a:p>
+                      <a:pPr>
+                        <a:buNone/>
+                      </a:pPr>
+                      <a:r>
+                        <a:rPr lang="en" sz="1400" dirty="0" err="1"/>
+                        <a:t>InfoGather</a:t>
+                      </a:r>
+                      <a:r>
+                        <a:rPr lang="en" sz="1400" dirty="0"/>
+                        <a:t> </a:t>
+                      </a:r>
+                      <a:r>
+                        <a:rPr lang="en" sz="1400" dirty="0" err="1"/>
+                        <a:t>app、worker</a:t>
+                      </a:r>
+                      <a:endParaRPr lang="en" sz="1400" dirty="0">
+                        <a:latin typeface="Microsoft JhengHei" panose="020B0604030504040204" pitchFamily="34" charset="-120"/>
+                        <a:ea typeface="Microsoft JhengHei" panose="020B0604030504040204" pitchFamily="34" charset="-120"/>
+                      </a:endParaRPr>
+                    </a:p>
+                  </a:txBody>
+                  <a:tcPr anchor="ctr"/>
+                </a:tc>
+                <a:tc>
+                  <a:txBody>
+                    <a:bodyPr/>
+                    <a:lstStyle/>
+                    <a:p>
+                      <a:pPr>
+                        <a:buNone/>
+                      </a:pPr>
+                      <a:r>
+                        <a:rPr lang="zh-TW" altLang="en-US" sz="1400" dirty="0"/>
+                        <a:t>第二應用節點</a:t>
+                      </a:r>
+                      <a:endParaRPr lang="zh-TW" altLang="en-US" sz="1400" dirty="0">
+                        <a:latin typeface="Microsoft JhengHei" panose="020B0604030504040204" pitchFamily="34" charset="-120"/>
+                        <a:ea typeface="Microsoft JhengHei" panose="020B0604030504040204" pitchFamily="34" charset="-120"/>
+                      </a:endParaRPr>
+                    </a:p>
+                  </a:txBody>
+                  <a:tcPr anchor="ctr"/>
+                </a:tc>
+                <a:extLst>
+                  <a:ext uri="{0D108BD9-81ED-4DB2-BD59-A6C34878D82A}">
+                    <a16:rowId xmlns:a16="http://schemas.microsoft.com/office/drawing/2014/main" val="507787501"/>
+                  </a:ext>
+                </a:extLst>
+              </a:tr>
+              <a:tr h="363331">
+                <a:tc>
+                  <a:txBody>
+                    <a:bodyPr/>
+                    <a:lstStyle/>
+                    <a:p>
+                      <a:pPr>
+                        <a:buNone/>
+                      </a:pPr>
+                      <a:r>
+                        <a:rPr lang="en" sz="1400" dirty="0">
+                          <a:latin typeface="Consolas" panose="020B0609020204030204" pitchFamily="49" charset="0"/>
+                          <a:cs typeface="Consolas" panose="020B0609020204030204" pitchFamily="49" charset="0"/>
+                        </a:rPr>
+                        <a:t>infogather-prod-mongo-01</a:t>
+                      </a:r>
+                      <a:endParaRPr lang="en" sz="1400" dirty="0">
+                        <a:latin typeface="Consolas" panose="020B0609020204030204" pitchFamily="49" charset="0"/>
+                        <a:ea typeface="Microsoft JhengHei" panose="020B0604030504040204" pitchFamily="34" charset="-120"/>
+                        <a:cs typeface="Consolas" panose="020B0609020204030204" pitchFamily="49" charset="0"/>
+                      </a:endParaRPr>
+                    </a:p>
+                  </a:txBody>
+                  <a:tcPr anchor="ctr"/>
+                </a:tc>
+                <a:tc>
+                  <a:txBody>
+                    <a:bodyPr/>
+                    <a:lstStyle/>
+                    <a:p>
+                      <a:pPr>
+                        <a:buNone/>
+                      </a:pPr>
+                      <a:r>
+                        <a:rPr lang="en"/>
+                        <a:t>4 vCPU</a:t>
+                      </a:r>
+                    </a:p>
+                  </a:txBody>
+                  <a:tcPr anchor="ctr"/>
+                </a:tc>
+                <a:tc>
+                  <a:txBody>
+                    <a:bodyPr/>
+                    <a:lstStyle/>
+                    <a:p>
+                      <a:pPr>
+                        <a:buNone/>
+                      </a:pPr>
+                      <a:r>
+                        <a:rPr lang="en"/>
+                        <a:t>16 GB</a:t>
+                      </a:r>
+                    </a:p>
+                  </a:txBody>
+                  <a:tcPr anchor="ctr"/>
+                </a:tc>
+                <a:tc>
+                  <a:txBody>
+                    <a:bodyPr/>
+                    <a:lstStyle/>
+                    <a:p>
+                      <a:pPr>
+                        <a:buNone/>
+                      </a:pPr>
+                      <a:r>
+                        <a:rPr lang="en"/>
+                        <a:t>500 GB</a:t>
+                      </a:r>
+                    </a:p>
+                  </a:txBody>
+                  <a:tcPr anchor="ctr"/>
+                </a:tc>
+                <a:tc>
+                  <a:txBody>
+                    <a:bodyPr/>
+                    <a:lstStyle/>
+                    <a:p>
+                      <a:pPr>
+                        <a:buNone/>
+                      </a:pPr>
+                      <a:r>
+                        <a:rPr lang="en" sz="1400"/>
+                        <a:t>MongoDB replica set member</a:t>
+                      </a:r>
+                      <a:endParaRPr lang="en" sz="1400">
+                        <a:latin typeface="Microsoft JhengHei" panose="020B0604030504040204" pitchFamily="34" charset="-120"/>
+                        <a:ea typeface="Microsoft JhengHei" panose="020B0604030504040204" pitchFamily="34" charset="-120"/>
+                      </a:endParaRPr>
+                    </a:p>
+                  </a:txBody>
+                  <a:tcPr anchor="ctr"/>
+                </a:tc>
+                <a:tc>
+                  <a:txBody>
+                    <a:bodyPr/>
+                    <a:lstStyle/>
+                    <a:p>
+                      <a:pPr>
+                        <a:buNone/>
+                      </a:pPr>
+                      <a:r>
+                        <a:rPr lang="en" sz="1400" dirty="0"/>
+                        <a:t>primary candidate</a:t>
+                      </a:r>
+                      <a:endParaRPr lang="en" sz="1400" dirty="0">
+                        <a:latin typeface="Microsoft JhengHei" panose="020B0604030504040204" pitchFamily="34" charset="-120"/>
+                        <a:ea typeface="Microsoft JhengHei" panose="020B0604030504040204" pitchFamily="34" charset="-120"/>
+                      </a:endParaRPr>
+                    </a:p>
+                  </a:txBody>
+                  <a:tcPr anchor="ctr"/>
+                </a:tc>
+                <a:extLst>
+                  <a:ext uri="{0D108BD9-81ED-4DB2-BD59-A6C34878D82A}">
+                    <a16:rowId xmlns:a16="http://schemas.microsoft.com/office/drawing/2014/main" val="3240847069"/>
+                  </a:ext>
+                </a:extLst>
+              </a:tr>
+              <a:tr h="363331">
+                <a:tc>
+                  <a:txBody>
+                    <a:bodyPr/>
+                    <a:lstStyle/>
+                    <a:p>
+                      <a:pPr>
+                        <a:buNone/>
+                      </a:pPr>
+                      <a:r>
+                        <a:rPr lang="en" sz="1400" dirty="0">
+                          <a:latin typeface="Consolas" panose="020B0609020204030204" pitchFamily="49" charset="0"/>
+                          <a:cs typeface="Consolas" panose="020B0609020204030204" pitchFamily="49" charset="0"/>
+                        </a:rPr>
+                        <a:t>infogather-prod-mongo-02</a:t>
+                      </a:r>
+                      <a:endParaRPr lang="en" sz="1400" dirty="0">
+                        <a:latin typeface="Consolas" panose="020B0609020204030204" pitchFamily="49" charset="0"/>
+                        <a:ea typeface="Microsoft JhengHei" panose="020B0604030504040204" pitchFamily="34" charset="-120"/>
+                        <a:cs typeface="Consolas" panose="020B0609020204030204" pitchFamily="49" charset="0"/>
+                      </a:endParaRPr>
+                    </a:p>
+                  </a:txBody>
+                  <a:tcPr anchor="ctr"/>
+                </a:tc>
+                <a:tc>
+                  <a:txBody>
+                    <a:bodyPr/>
+                    <a:lstStyle/>
+                    <a:p>
+                      <a:pPr>
+                        <a:buNone/>
+                      </a:pPr>
+                      <a:r>
+                        <a:rPr lang="en"/>
+                        <a:t>4 vCPU</a:t>
+                      </a:r>
+                    </a:p>
+                  </a:txBody>
+                  <a:tcPr anchor="ctr"/>
+                </a:tc>
+                <a:tc>
+                  <a:txBody>
+                    <a:bodyPr/>
+                    <a:lstStyle/>
+                    <a:p>
+                      <a:pPr>
+                        <a:buNone/>
+                      </a:pPr>
+                      <a:r>
+                        <a:rPr lang="en"/>
+                        <a:t>16 GB</a:t>
+                      </a:r>
+                    </a:p>
+                  </a:txBody>
+                  <a:tcPr anchor="ctr"/>
+                </a:tc>
+                <a:tc>
+                  <a:txBody>
+                    <a:bodyPr/>
+                    <a:lstStyle/>
+                    <a:p>
+                      <a:pPr>
+                        <a:buNone/>
+                      </a:pPr>
+                      <a:r>
+                        <a:rPr lang="en"/>
+                        <a:t>500 GB</a:t>
+                      </a:r>
+                    </a:p>
+                  </a:txBody>
+                  <a:tcPr anchor="ctr"/>
+                </a:tc>
+                <a:tc>
+                  <a:txBody>
+                    <a:bodyPr/>
+                    <a:lstStyle/>
+                    <a:p>
+                      <a:pPr>
+                        <a:buNone/>
+                      </a:pPr>
+                      <a:r>
+                        <a:rPr lang="en" sz="1400"/>
+                        <a:t>MongoDB replica set member</a:t>
+                      </a:r>
+                      <a:endParaRPr lang="en" sz="1400">
+                        <a:latin typeface="Microsoft JhengHei" panose="020B0604030504040204" pitchFamily="34" charset="-120"/>
+                        <a:ea typeface="Microsoft JhengHei" panose="020B0604030504040204" pitchFamily="34" charset="-120"/>
+                      </a:endParaRPr>
+                    </a:p>
+                  </a:txBody>
+                  <a:tcPr anchor="ctr"/>
+                </a:tc>
+                <a:tc>
+                  <a:txBody>
+                    <a:bodyPr/>
+                    <a:lstStyle/>
+                    <a:p>
+                      <a:pPr>
+                        <a:buNone/>
+                      </a:pPr>
+                      <a:r>
+                        <a:rPr lang="en" sz="1400" dirty="0"/>
+                        <a:t>secondary</a:t>
+                      </a:r>
+                      <a:endParaRPr lang="en" sz="1400" dirty="0">
+                        <a:latin typeface="Microsoft JhengHei" panose="020B0604030504040204" pitchFamily="34" charset="-120"/>
+                        <a:ea typeface="Microsoft JhengHei" panose="020B0604030504040204" pitchFamily="34" charset="-120"/>
+                      </a:endParaRPr>
+                    </a:p>
+                  </a:txBody>
+                  <a:tcPr anchor="ctr"/>
+                </a:tc>
+                <a:extLst>
+                  <a:ext uri="{0D108BD9-81ED-4DB2-BD59-A6C34878D82A}">
+                    <a16:rowId xmlns:a16="http://schemas.microsoft.com/office/drawing/2014/main" val="523296309"/>
+                  </a:ext>
+                </a:extLst>
+              </a:tr>
+              <a:tr h="363331">
+                <a:tc>
+                  <a:txBody>
+                    <a:bodyPr/>
+                    <a:lstStyle/>
+                    <a:p>
+                      <a:pPr>
+                        <a:buNone/>
+                      </a:pPr>
+                      <a:r>
+                        <a:rPr lang="en" sz="1400" dirty="0">
+                          <a:latin typeface="Consolas" panose="020B0609020204030204" pitchFamily="49" charset="0"/>
+                          <a:cs typeface="Consolas" panose="020B0609020204030204" pitchFamily="49" charset="0"/>
+                        </a:rPr>
+                        <a:t>infogather-prod-mongo-03</a:t>
+                      </a:r>
+                      <a:endParaRPr lang="en" sz="1400" dirty="0">
+                        <a:latin typeface="Consolas" panose="020B0609020204030204" pitchFamily="49" charset="0"/>
+                        <a:ea typeface="Microsoft JhengHei" panose="020B0604030504040204" pitchFamily="34" charset="-120"/>
+                        <a:cs typeface="Consolas" panose="020B0609020204030204" pitchFamily="49" charset="0"/>
+                      </a:endParaRPr>
+                    </a:p>
+                  </a:txBody>
+                  <a:tcPr anchor="ctr"/>
+                </a:tc>
+                <a:tc>
+                  <a:txBody>
+                    <a:bodyPr/>
+                    <a:lstStyle/>
+                    <a:p>
+                      <a:pPr>
+                        <a:buNone/>
+                      </a:pPr>
+                      <a:r>
+                        <a:rPr lang="en"/>
+                        <a:t>4 vCPU</a:t>
+                      </a:r>
+                    </a:p>
+                  </a:txBody>
+                  <a:tcPr anchor="ctr"/>
+                </a:tc>
+                <a:tc>
+                  <a:txBody>
+                    <a:bodyPr/>
+                    <a:lstStyle/>
+                    <a:p>
+                      <a:pPr>
+                        <a:buNone/>
+                      </a:pPr>
+                      <a:r>
+                        <a:rPr lang="en"/>
+                        <a:t>16 GB</a:t>
+                      </a:r>
+                    </a:p>
+                  </a:txBody>
+                  <a:tcPr anchor="ctr"/>
+                </a:tc>
+                <a:tc>
+                  <a:txBody>
+                    <a:bodyPr/>
+                    <a:lstStyle/>
+                    <a:p>
+                      <a:pPr>
+                        <a:buNone/>
+                      </a:pPr>
+                      <a:r>
+                        <a:rPr lang="en"/>
+                        <a:t>500 GB</a:t>
+                      </a:r>
+                    </a:p>
+                  </a:txBody>
+                  <a:tcPr anchor="ctr"/>
+                </a:tc>
+                <a:tc>
+                  <a:txBody>
+                    <a:bodyPr/>
+                    <a:lstStyle/>
+                    <a:p>
+                      <a:pPr>
+                        <a:buNone/>
+                      </a:pPr>
+                      <a:r>
+                        <a:rPr lang="en" sz="1400" dirty="0"/>
+                        <a:t>MongoDB replica set member</a:t>
+                      </a:r>
+                      <a:endParaRPr lang="en" sz="1400" dirty="0">
+                        <a:latin typeface="Microsoft JhengHei" panose="020B0604030504040204" pitchFamily="34" charset="-120"/>
+                        <a:ea typeface="Microsoft JhengHei" panose="020B0604030504040204" pitchFamily="34" charset="-120"/>
+                      </a:endParaRPr>
+                    </a:p>
+                  </a:txBody>
+                  <a:tcPr anchor="ctr"/>
+                </a:tc>
+                <a:tc>
+                  <a:txBody>
+                    <a:bodyPr/>
+                    <a:lstStyle/>
+                    <a:p>
+                      <a:pPr>
+                        <a:buNone/>
+                      </a:pPr>
+                      <a:r>
+                        <a:rPr lang="en" sz="1400" dirty="0"/>
+                        <a:t>secondary</a:t>
+                      </a:r>
+                      <a:endParaRPr lang="en" sz="1400" dirty="0">
+                        <a:latin typeface="Microsoft JhengHei" panose="020B0604030504040204" pitchFamily="34" charset="-120"/>
+                        <a:ea typeface="Microsoft JhengHei" panose="020B0604030504040204" pitchFamily="34" charset="-120"/>
+                      </a:endParaRPr>
+                    </a:p>
+                  </a:txBody>
+                  <a:tcPr anchor="ctr"/>
+                </a:tc>
+                <a:extLst>
+                  <a:ext uri="{0D108BD9-81ED-4DB2-BD59-A6C34878D82A}">
+                    <a16:rowId xmlns:a16="http://schemas.microsoft.com/office/drawing/2014/main" val="1648244485"/>
+                  </a:ext>
+                </a:extLst>
+              </a:tr>
+              <a:tr h="363331">
+                <a:tc>
+                  <a:txBody>
+                    <a:bodyPr/>
+                    <a:lstStyle/>
+                    <a:p>
+                      <a:pPr>
+                        <a:buNone/>
+                      </a:pPr>
+                      <a:r>
+                        <a:rPr lang="en" sz="1400" dirty="0">
+                          <a:latin typeface="Consolas" panose="020B0609020204030204" pitchFamily="49" charset="0"/>
+                          <a:cs typeface="Consolas" panose="020B0609020204030204" pitchFamily="49" charset="0"/>
+                        </a:rPr>
+                        <a:t>infogather-prod-redis-01</a:t>
+                      </a:r>
+                      <a:endParaRPr lang="en" sz="1400" dirty="0">
+                        <a:latin typeface="Consolas" panose="020B0609020204030204" pitchFamily="49" charset="0"/>
+                        <a:ea typeface="Microsoft JhengHei" panose="020B0604030504040204" pitchFamily="34" charset="-120"/>
+                        <a:cs typeface="Consolas" panose="020B0609020204030204" pitchFamily="49" charset="0"/>
+                      </a:endParaRPr>
+                    </a:p>
+                  </a:txBody>
+                  <a:tcPr anchor="ctr"/>
+                </a:tc>
+                <a:tc>
+                  <a:txBody>
+                    <a:bodyPr/>
+                    <a:lstStyle/>
+                    <a:p>
+                      <a:pPr>
+                        <a:buNone/>
+                      </a:pPr>
+                      <a:r>
+                        <a:rPr lang="en"/>
+                        <a:t>2 vCPU</a:t>
+                      </a:r>
+                    </a:p>
+                  </a:txBody>
+                  <a:tcPr anchor="ctr"/>
+                </a:tc>
+                <a:tc>
+                  <a:txBody>
+                    <a:bodyPr/>
+                    <a:lstStyle/>
+                    <a:p>
+                      <a:pPr>
+                        <a:buNone/>
+                      </a:pPr>
+                      <a:r>
+                        <a:rPr lang="en"/>
+                        <a:t>8 GB</a:t>
+                      </a:r>
+                    </a:p>
+                  </a:txBody>
+                  <a:tcPr anchor="ctr"/>
+                </a:tc>
+                <a:tc>
+                  <a:txBody>
+                    <a:bodyPr/>
+                    <a:lstStyle/>
+                    <a:p>
+                      <a:pPr>
+                        <a:buNone/>
+                      </a:pPr>
+                      <a:r>
+                        <a:rPr lang="en"/>
+                        <a:t>100 GB</a:t>
+                      </a:r>
+                    </a:p>
+                  </a:txBody>
+                  <a:tcPr anchor="ctr"/>
+                </a:tc>
+                <a:tc>
+                  <a:txBody>
+                    <a:bodyPr/>
+                    <a:lstStyle/>
+                    <a:p>
+                      <a:pPr>
+                        <a:buNone/>
+                      </a:pPr>
+                      <a:r>
+                        <a:rPr lang="en" sz="1400"/>
+                        <a:t>Redis server、Sentinel</a:t>
+                      </a:r>
+                      <a:endParaRPr lang="en" sz="1400">
+                        <a:latin typeface="Microsoft JhengHei" panose="020B0604030504040204" pitchFamily="34" charset="-120"/>
+                        <a:ea typeface="Microsoft JhengHei" panose="020B0604030504040204" pitchFamily="34" charset="-120"/>
+                      </a:endParaRPr>
+                    </a:p>
+                  </a:txBody>
+                  <a:tcPr anchor="ctr"/>
+                </a:tc>
+                <a:tc>
+                  <a:txBody>
+                    <a:bodyPr/>
+                    <a:lstStyle/>
+                    <a:p>
+                      <a:pPr>
+                        <a:buNone/>
+                      </a:pPr>
+                      <a:r>
+                        <a:rPr lang="en" sz="1400" dirty="0"/>
+                        <a:t>primary candidate</a:t>
+                      </a:r>
+                      <a:endParaRPr lang="en" sz="1400" dirty="0">
+                        <a:latin typeface="Microsoft JhengHei" panose="020B0604030504040204" pitchFamily="34" charset="-120"/>
+                        <a:ea typeface="Microsoft JhengHei" panose="020B0604030504040204" pitchFamily="34" charset="-120"/>
+                      </a:endParaRPr>
+                    </a:p>
+                  </a:txBody>
+                  <a:tcPr anchor="ctr"/>
+                </a:tc>
+                <a:extLst>
+                  <a:ext uri="{0D108BD9-81ED-4DB2-BD59-A6C34878D82A}">
+                    <a16:rowId xmlns:a16="http://schemas.microsoft.com/office/drawing/2014/main" val="3474832487"/>
+                  </a:ext>
+                </a:extLst>
+              </a:tr>
+              <a:tr h="363331">
+                <a:tc>
+                  <a:txBody>
+                    <a:bodyPr/>
+                    <a:lstStyle/>
+                    <a:p>
+                      <a:pPr>
+                        <a:buNone/>
+                      </a:pPr>
+                      <a:r>
+                        <a:rPr lang="en" sz="1400" dirty="0">
+                          <a:latin typeface="Consolas" panose="020B0609020204030204" pitchFamily="49" charset="0"/>
+                          <a:cs typeface="Consolas" panose="020B0609020204030204" pitchFamily="49" charset="0"/>
+                        </a:rPr>
+                        <a:t>infogather-prod-redis-02</a:t>
+                      </a:r>
+                      <a:endParaRPr lang="en" sz="1400" dirty="0">
+                        <a:latin typeface="Consolas" panose="020B0609020204030204" pitchFamily="49" charset="0"/>
+                        <a:ea typeface="Microsoft JhengHei" panose="020B0604030504040204" pitchFamily="34" charset="-120"/>
+                        <a:cs typeface="Consolas" panose="020B0609020204030204" pitchFamily="49" charset="0"/>
+                      </a:endParaRPr>
+                    </a:p>
+                  </a:txBody>
+                  <a:tcPr anchor="ctr"/>
+                </a:tc>
+                <a:tc>
+                  <a:txBody>
+                    <a:bodyPr/>
+                    <a:lstStyle/>
+                    <a:p>
+                      <a:pPr>
+                        <a:buNone/>
+                      </a:pPr>
+                      <a:r>
+                        <a:rPr lang="en"/>
+                        <a:t>2 vCPU</a:t>
+                      </a:r>
+                    </a:p>
+                  </a:txBody>
+                  <a:tcPr anchor="ctr"/>
+                </a:tc>
+                <a:tc>
+                  <a:txBody>
+                    <a:bodyPr/>
+                    <a:lstStyle/>
+                    <a:p>
+                      <a:pPr>
+                        <a:buNone/>
+                      </a:pPr>
+                      <a:r>
+                        <a:rPr lang="en"/>
+                        <a:t>8 GB</a:t>
+                      </a:r>
+                    </a:p>
+                  </a:txBody>
+                  <a:tcPr anchor="ctr"/>
+                </a:tc>
+                <a:tc>
+                  <a:txBody>
+                    <a:bodyPr/>
+                    <a:lstStyle/>
+                    <a:p>
+                      <a:pPr>
+                        <a:buNone/>
+                      </a:pPr>
+                      <a:r>
+                        <a:rPr lang="en"/>
+                        <a:t>100 GB</a:t>
+                      </a:r>
+                    </a:p>
+                  </a:txBody>
+                  <a:tcPr anchor="ctr"/>
+                </a:tc>
+                <a:tc>
+                  <a:txBody>
+                    <a:bodyPr/>
+                    <a:lstStyle/>
+                    <a:p>
+                      <a:pPr>
+                        <a:buNone/>
+                      </a:pPr>
+                      <a:r>
+                        <a:rPr lang="en" sz="1400"/>
+                        <a:t>Redis server、Sentinel</a:t>
+                      </a:r>
+                      <a:endParaRPr lang="en" sz="1400">
+                        <a:latin typeface="Microsoft JhengHei" panose="020B0604030504040204" pitchFamily="34" charset="-120"/>
+                        <a:ea typeface="Microsoft JhengHei" panose="020B0604030504040204" pitchFamily="34" charset="-120"/>
+                      </a:endParaRPr>
+                    </a:p>
+                  </a:txBody>
+                  <a:tcPr anchor="ctr"/>
+                </a:tc>
+                <a:tc>
+                  <a:txBody>
+                    <a:bodyPr/>
+                    <a:lstStyle/>
+                    <a:p>
+                      <a:pPr>
+                        <a:buNone/>
+                      </a:pPr>
+                      <a:r>
+                        <a:rPr lang="en" sz="1400" dirty="0"/>
+                        <a:t>replica</a:t>
+                      </a:r>
+                      <a:endParaRPr lang="en" sz="1400" dirty="0">
+                        <a:latin typeface="Microsoft JhengHei" panose="020B0604030504040204" pitchFamily="34" charset="-120"/>
+                        <a:ea typeface="Microsoft JhengHei" panose="020B0604030504040204" pitchFamily="34" charset="-120"/>
+                      </a:endParaRPr>
+                    </a:p>
+                  </a:txBody>
+                  <a:tcPr anchor="ctr"/>
+                </a:tc>
+                <a:extLst>
+                  <a:ext uri="{0D108BD9-81ED-4DB2-BD59-A6C34878D82A}">
+                    <a16:rowId xmlns:a16="http://schemas.microsoft.com/office/drawing/2014/main" val="1719398601"/>
+                  </a:ext>
+                </a:extLst>
+              </a:tr>
+              <a:tr h="363331">
+                <a:tc>
+                  <a:txBody>
+                    <a:bodyPr/>
+                    <a:lstStyle/>
+                    <a:p>
+                      <a:pPr>
+                        <a:buNone/>
+                      </a:pPr>
+                      <a:r>
+                        <a:rPr lang="en" sz="1400" dirty="0">
+                          <a:latin typeface="Consolas" panose="020B0609020204030204" pitchFamily="49" charset="0"/>
+                          <a:cs typeface="Consolas" panose="020B0609020204030204" pitchFamily="49" charset="0"/>
+                        </a:rPr>
+                        <a:t>infogather-prod-redis-03</a:t>
+                      </a:r>
+                      <a:endParaRPr lang="en" sz="1400" dirty="0">
+                        <a:latin typeface="Consolas" panose="020B0609020204030204" pitchFamily="49" charset="0"/>
+                        <a:ea typeface="Microsoft JhengHei" panose="020B0604030504040204" pitchFamily="34" charset="-120"/>
+                        <a:cs typeface="Consolas" panose="020B0609020204030204" pitchFamily="49" charset="0"/>
+                      </a:endParaRPr>
+                    </a:p>
+                  </a:txBody>
+                  <a:tcPr anchor="ctr"/>
+                </a:tc>
+                <a:tc>
+                  <a:txBody>
+                    <a:bodyPr/>
+                    <a:lstStyle/>
+                    <a:p>
+                      <a:pPr>
+                        <a:buNone/>
+                      </a:pPr>
+                      <a:r>
+                        <a:rPr lang="en"/>
+                        <a:t>2 vCPU</a:t>
+                      </a:r>
+                    </a:p>
+                  </a:txBody>
+                  <a:tcPr anchor="ctr"/>
+                </a:tc>
+                <a:tc>
+                  <a:txBody>
+                    <a:bodyPr/>
+                    <a:lstStyle/>
+                    <a:p>
+                      <a:pPr>
+                        <a:buNone/>
+                      </a:pPr>
+                      <a:r>
+                        <a:rPr lang="en"/>
+                        <a:t>8 GB</a:t>
+                      </a:r>
+                    </a:p>
+                  </a:txBody>
+                  <a:tcPr anchor="ctr"/>
+                </a:tc>
+                <a:tc>
+                  <a:txBody>
+                    <a:bodyPr/>
+                    <a:lstStyle/>
+                    <a:p>
+                      <a:pPr>
+                        <a:buNone/>
+                      </a:pPr>
+                      <a:r>
+                        <a:rPr lang="en"/>
+                        <a:t>100 GB</a:t>
+                      </a:r>
+                    </a:p>
+                  </a:txBody>
+                  <a:tcPr anchor="ctr"/>
+                </a:tc>
+                <a:tc>
+                  <a:txBody>
+                    <a:bodyPr/>
+                    <a:lstStyle/>
+                    <a:p>
+                      <a:pPr>
+                        <a:buNone/>
+                      </a:pPr>
+                      <a:r>
+                        <a:rPr lang="en" sz="1400" dirty="0"/>
+                        <a:t>Redis </a:t>
+                      </a:r>
+                      <a:r>
+                        <a:rPr lang="en" sz="1400" dirty="0" err="1"/>
+                        <a:t>server、Sentinel</a:t>
+                      </a:r>
+                      <a:endParaRPr lang="en" sz="1400" dirty="0">
+                        <a:latin typeface="Microsoft JhengHei" panose="020B0604030504040204" pitchFamily="34" charset="-120"/>
+                        <a:ea typeface="Microsoft JhengHei" panose="020B0604030504040204" pitchFamily="34" charset="-120"/>
+                      </a:endParaRPr>
+                    </a:p>
+                  </a:txBody>
+                  <a:tcPr anchor="ctr"/>
+                </a:tc>
+                <a:tc>
+                  <a:txBody>
+                    <a:bodyPr/>
+                    <a:lstStyle/>
+                    <a:p>
+                      <a:pPr>
+                        <a:buNone/>
+                      </a:pPr>
+                      <a:r>
+                        <a:rPr lang="en" sz="1400" dirty="0"/>
+                        <a:t>replica</a:t>
+                      </a:r>
+                      <a:endParaRPr lang="en" sz="1400" dirty="0">
+                        <a:latin typeface="Microsoft JhengHei" panose="020B0604030504040204" pitchFamily="34" charset="-120"/>
+                        <a:ea typeface="Microsoft JhengHei" panose="020B0604030504040204" pitchFamily="34" charset="-120"/>
+                      </a:endParaRPr>
+                    </a:p>
+                  </a:txBody>
+                  <a:tcPr anchor="ctr"/>
+                </a:tc>
+                <a:extLst>
+                  <a:ext uri="{0D108BD9-81ED-4DB2-BD59-A6C34878D82A}">
+                    <a16:rowId xmlns:a16="http://schemas.microsoft.com/office/drawing/2014/main" val="1353108866"/>
+                  </a:ext>
+                </a:extLst>
+              </a:tr>
+              <a:tr h="363331">
+                <a:tc>
+                  <a:txBody>
+                    <a:bodyPr/>
+                    <a:lstStyle/>
+                    <a:p>
+                      <a:pPr>
+                        <a:buNone/>
+                      </a:pPr>
+                      <a:r>
+                        <a:rPr lang="en" sz="1400" dirty="0">
+                          <a:latin typeface="Consolas" panose="020B0609020204030204" pitchFamily="49" charset="0"/>
+                          <a:cs typeface="Consolas" panose="020B0609020204030204" pitchFamily="49" charset="0"/>
+                        </a:rPr>
+                        <a:t>infogather-prod-copilot-01</a:t>
+                      </a:r>
+                      <a:endParaRPr lang="en" sz="1400" dirty="0">
+                        <a:latin typeface="Consolas" panose="020B0609020204030204" pitchFamily="49" charset="0"/>
+                        <a:ea typeface="Microsoft JhengHei" panose="020B0604030504040204" pitchFamily="34" charset="-120"/>
+                        <a:cs typeface="Consolas" panose="020B0609020204030204" pitchFamily="49" charset="0"/>
+                      </a:endParaRPr>
+                    </a:p>
+                  </a:txBody>
+                  <a:tcPr anchor="ctr"/>
+                </a:tc>
+                <a:tc>
+                  <a:txBody>
+                    <a:bodyPr/>
+                    <a:lstStyle/>
+                    <a:p>
+                      <a:pPr>
+                        <a:buNone/>
+                      </a:pPr>
+                      <a:r>
+                        <a:rPr lang="en"/>
+                        <a:t>2 vCPU</a:t>
+                      </a:r>
+                    </a:p>
+                  </a:txBody>
+                  <a:tcPr anchor="ctr"/>
+                </a:tc>
+                <a:tc>
+                  <a:txBody>
+                    <a:bodyPr/>
+                    <a:lstStyle/>
+                    <a:p>
+                      <a:pPr>
+                        <a:buNone/>
+                      </a:pPr>
+                      <a:r>
+                        <a:rPr lang="en"/>
+                        <a:t>4 GB</a:t>
+                      </a:r>
+                    </a:p>
+                  </a:txBody>
+                  <a:tcPr anchor="ctr"/>
+                </a:tc>
+                <a:tc>
+                  <a:txBody>
+                    <a:bodyPr/>
+                    <a:lstStyle/>
+                    <a:p>
+                      <a:pPr>
+                        <a:buNone/>
+                      </a:pPr>
+                      <a:r>
+                        <a:rPr lang="en"/>
+                        <a:t>60 GB</a:t>
+                      </a:r>
+                    </a:p>
+                  </a:txBody>
+                  <a:tcPr anchor="ctr"/>
+                </a:tc>
+                <a:tc>
+                  <a:txBody>
+                    <a:bodyPr/>
+                    <a:lstStyle/>
+                    <a:p>
+                      <a:pPr>
+                        <a:buNone/>
+                      </a:pPr>
+                      <a:r>
+                        <a:rPr lang="en" sz="1400" dirty="0"/>
+                        <a:t>Copilot CLI server</a:t>
+                      </a:r>
+                      <a:endParaRPr lang="en" sz="1400" dirty="0">
+                        <a:latin typeface="Microsoft JhengHei" panose="020B0604030504040204" pitchFamily="34" charset="-120"/>
+                        <a:ea typeface="Microsoft JhengHei" panose="020B0604030504040204" pitchFamily="34" charset="-120"/>
+                      </a:endParaRPr>
+                    </a:p>
+                  </a:txBody>
+                  <a:tcPr anchor="ctr"/>
+                </a:tc>
+                <a:tc>
+                  <a:txBody>
+                    <a:bodyPr/>
+                    <a:lstStyle/>
+                    <a:p>
+                      <a:pPr>
+                        <a:buNone/>
+                      </a:pPr>
+                      <a:r>
+                        <a:rPr lang="en" sz="1400" dirty="0"/>
+                        <a:t>Agent / LLM runtime </a:t>
+                      </a:r>
+                      <a:r>
+                        <a:rPr lang="zh-TW" altLang="en-US" sz="1400" dirty="0"/>
+                        <a:t>節點</a:t>
+                      </a:r>
+                      <a:endParaRPr lang="zh-TW" altLang="en-US" sz="1400" dirty="0">
+                        <a:latin typeface="Microsoft JhengHei" panose="020B0604030504040204" pitchFamily="34" charset="-120"/>
+                        <a:ea typeface="Microsoft JhengHei" panose="020B0604030504040204" pitchFamily="34" charset="-120"/>
+                      </a:endParaRPr>
+                    </a:p>
+                  </a:txBody>
+                  <a:tcPr anchor="ctr"/>
+                </a:tc>
+                <a:extLst>
+                  <a:ext uri="{0D108BD9-81ED-4DB2-BD59-A6C34878D82A}">
+                    <a16:rowId xmlns:a16="http://schemas.microsoft.com/office/drawing/2014/main" val="3175800829"/>
+                  </a:ext>
+                </a:extLst>
+              </a:tr>
+              <a:tr h="363331">
+                <a:tc>
+                  <a:txBody>
+                    <a:bodyPr/>
+                    <a:lstStyle/>
+                    <a:p>
+                      <a:pPr>
+                        <a:buNone/>
+                      </a:pPr>
+                      <a:r>
+                        <a:rPr lang="en" sz="1400" dirty="0">
+                          <a:latin typeface="Consolas" panose="020B0609020204030204" pitchFamily="49" charset="0"/>
+                          <a:cs typeface="Consolas" panose="020B0609020204030204" pitchFamily="49" charset="0"/>
+                        </a:rPr>
+                        <a:t>infogather-prod-ops-01</a:t>
+                      </a:r>
+                      <a:endParaRPr lang="en" sz="1400" dirty="0">
+                        <a:latin typeface="Consolas" panose="020B0609020204030204" pitchFamily="49" charset="0"/>
+                        <a:ea typeface="Microsoft JhengHei" panose="020B0604030504040204" pitchFamily="34" charset="-120"/>
+                        <a:cs typeface="Consolas" panose="020B0609020204030204" pitchFamily="49" charset="0"/>
+                      </a:endParaRPr>
+                    </a:p>
+                  </a:txBody>
+                  <a:tcPr anchor="ctr"/>
+                </a:tc>
+                <a:tc>
+                  <a:txBody>
+                    <a:bodyPr/>
+                    <a:lstStyle/>
+                    <a:p>
+                      <a:pPr>
+                        <a:buNone/>
+                      </a:pPr>
+                      <a:r>
+                        <a:rPr lang="en"/>
+                        <a:t>4 vCPU</a:t>
+                      </a:r>
+                    </a:p>
+                  </a:txBody>
+                  <a:tcPr anchor="ctr"/>
+                </a:tc>
+                <a:tc>
+                  <a:txBody>
+                    <a:bodyPr/>
+                    <a:lstStyle/>
+                    <a:p>
+                      <a:pPr>
+                        <a:buNone/>
+                      </a:pPr>
+                      <a:r>
+                        <a:rPr lang="en"/>
+                        <a:t>8 GB</a:t>
+                      </a:r>
+                    </a:p>
+                  </a:txBody>
+                  <a:tcPr anchor="ctr"/>
+                </a:tc>
+                <a:tc>
+                  <a:txBody>
+                    <a:bodyPr/>
+                    <a:lstStyle/>
+                    <a:p>
+                      <a:pPr>
+                        <a:buNone/>
+                      </a:pPr>
+                      <a:r>
+                        <a:rPr lang="en" dirty="0"/>
+                        <a:t>200 GB</a:t>
+                      </a:r>
+                    </a:p>
+                  </a:txBody>
+                  <a:tcPr anchor="ctr"/>
+                </a:tc>
+                <a:tc>
+                  <a:txBody>
+                    <a:bodyPr/>
+                    <a:lstStyle/>
+                    <a:p>
+                      <a:pPr>
+                        <a:buNone/>
+                      </a:pPr>
+                      <a:r>
+                        <a:rPr lang="en" sz="1400" dirty="0" err="1"/>
+                        <a:t>Prometheus、Grafana、operations</a:t>
+                      </a:r>
+                      <a:r>
+                        <a:rPr lang="en" sz="1400" dirty="0"/>
+                        <a:t> tools</a:t>
+                      </a:r>
+                      <a:endParaRPr lang="en" sz="1400" dirty="0">
+                        <a:latin typeface="Microsoft JhengHei" panose="020B0604030504040204" pitchFamily="34" charset="-120"/>
+                        <a:ea typeface="Microsoft JhengHei" panose="020B0604030504040204" pitchFamily="34" charset="-120"/>
+                      </a:endParaRPr>
+                    </a:p>
+                  </a:txBody>
+                  <a:tcPr anchor="ctr"/>
+                </a:tc>
+                <a:tc>
+                  <a:txBody>
+                    <a:bodyPr/>
+                    <a:lstStyle/>
+                    <a:p>
+                      <a:pPr>
+                        <a:buNone/>
+                      </a:pPr>
+                      <a:r>
+                        <a:rPr lang="zh-TW" altLang="en-US" sz="1400" dirty="0"/>
+                        <a:t>正式環境監控與維運控制節點</a:t>
+                      </a:r>
+                      <a:endParaRPr lang="zh-TW" altLang="en-US" sz="1400" dirty="0">
+                        <a:latin typeface="Microsoft JhengHei" panose="020B0604030504040204" pitchFamily="34" charset="-120"/>
+                        <a:ea typeface="Microsoft JhengHei" panose="020B0604030504040204" pitchFamily="34" charset="-120"/>
+                      </a:endParaRPr>
+                    </a:p>
+                  </a:txBody>
+                  <a:tcPr anchor="ctr"/>
+                </a:tc>
+                <a:extLst>
+                  <a:ext uri="{0D108BD9-81ED-4DB2-BD59-A6C34878D82A}">
+                    <a16:rowId xmlns:a16="http://schemas.microsoft.com/office/drawing/2014/main" val="1664710146"/>
+                  </a:ext>
+                </a:extLst>
+              </a:tr>
+            </a:tbl>
+          </a:graphicData>
+        </a:graphic>
+      </p:graphicFrame>
+    </p:spTree>
+    <p:extLst>
+      <p:ext uri="{BB962C8B-B14F-4D97-AF65-F5344CB8AC3E}">
+        <p14:creationId xmlns:p14="http://schemas.microsoft.com/office/powerpoint/2010/main" val="381932011"/>
       </p:ext>
     </p:extLst>
   </p:cSld>
@@ -18677,6 +18011,21 @@
 </file>
 
 <file path=customXml/item1.xml><?xml version="1.0" encoding="utf-8"?>
+<p:properties xmlns:p="http://schemas.microsoft.com/office/2006/metadata/properties" xmlns:xsi="http://www.w3.org/2001/XMLSchema-instance" xmlns:pc="http://schemas.microsoft.com/office/infopath/2007/PartnerControls">
+  <documentManagement/>
+</p:properties>
+</file>
+
+<file path=customXml/item2.xml><?xml version="1.0" encoding="utf-8"?>
+<?mso-contentType ?>
+<FormTemplates xmlns="http://schemas.microsoft.com/sharepoint/v3/contenttype/forms">
+  <Display>DocumentLibraryForm</Display>
+  <Edit>DocumentLibraryForm</Edit>
+  <New>DocumentLibraryForm</New>
+</FormTemplates>
+</file>
+
+<file path=customXml/item3.xml><?xml version="1.0" encoding="utf-8"?>
 <ct:contentTypeSchema xmlns:ct="http://schemas.microsoft.com/office/2006/metadata/contentType" xmlns:ma="http://schemas.microsoft.com/office/2006/metadata/properties/metaAttributes" ct:_="" ma:_="" ma:contentTypeName="Document" ma:contentTypeID="0x010100DE4F25D0FF425B4EA678AC2414B6A709" ma:contentTypeVersion="10" ma:contentTypeDescription="Create a new document." ma:contentTypeScope="" ma:versionID="8ceec2ce155b1d63c0c6fcd4110f3cfe">
   <xsd:schema xmlns:xsd="http://www.w3.org/2001/XMLSchema" xmlns:xs="http://www.w3.org/2001/XMLSchema" xmlns:p="http://schemas.microsoft.com/office/2006/metadata/properties" xmlns:ns2="7cac0686-f0c7-4236-b000-d7b90732a875" xmlns:ns3="9bfc64f2-d580-4df8-9fa4-4631ad6ac43d" targetNamespace="http://schemas.microsoft.com/office/2006/metadata/properties" ma:root="true" ma:fieldsID="267f21102a69fda15f58a0ecdfc9abe1" ns2:_="" ns3:_="">
     <xsd:import namespace="7cac0686-f0c7-4236-b000-d7b90732a875"/>
@@ -18877,22 +18226,32 @@
 </ct:contentTypeSchema>
 </file>
 
-<file path=customXml/item2.xml><?xml version="1.0" encoding="utf-8"?>
-<?mso-contentType ?>
-<FormTemplates xmlns="http://schemas.microsoft.com/sharepoint/v3/contenttype/forms">
-  <Display>DocumentLibraryForm</Display>
-  <Edit>DocumentLibraryForm</Edit>
-  <New>DocumentLibraryForm</New>
-</FormTemplates>
+<file path=customXml/itemProps1.xml><?xml version="1.0" encoding="utf-8"?>
+<ds:datastoreItem xmlns:ds="http://schemas.openxmlformats.org/officeDocument/2006/customXml" ds:itemID="{0FD5D526-59E0-46BD-B75A-4A393253F249}">
+  <ds:schemaRefs>
+    <ds:schemaRef ds:uri="http://schemas.microsoft.com/office/2006/documentManagement/types"/>
+    <ds:schemaRef ds:uri="http://schemas.microsoft.com/office/2006/metadata/properties"/>
+    <ds:schemaRef ds:uri="http://purl.org/dc/elements/1.1/"/>
+    <ds:schemaRef ds:uri="9bfc64f2-d580-4df8-9fa4-4631ad6ac43d"/>
+    <ds:schemaRef ds:uri="http://schemas.openxmlformats.org/package/2006/metadata/core-properties"/>
+    <ds:schemaRef ds:uri="http://purl.org/dc/terms/"/>
+    <ds:schemaRef ds:uri="http://www.w3.org/XML/1998/namespace"/>
+    <ds:schemaRef ds:uri="http://schemas.microsoft.com/office/infopath/2007/PartnerControls"/>
+    <ds:schemaRef ds:uri="7cac0686-f0c7-4236-b000-d7b90732a875"/>
+    <ds:schemaRef ds:uri="http://purl.org/dc/dcmitype/"/>
+  </ds:schemaRefs>
+</ds:datastoreItem>
 </file>
 
-<file path=customXml/item3.xml><?xml version="1.0" encoding="utf-8"?>
-<p:properties xmlns:p="http://schemas.microsoft.com/office/2006/metadata/properties" xmlns:xsi="http://www.w3.org/2001/XMLSchema-instance" xmlns:pc="http://schemas.microsoft.com/office/infopath/2007/PartnerControls">
-  <documentManagement/>
-</p:properties>
+<file path=customXml/itemProps2.xml><?xml version="1.0" encoding="utf-8"?>
+<ds:datastoreItem xmlns:ds="http://schemas.openxmlformats.org/officeDocument/2006/customXml" ds:itemID="{76929C79-DB32-411C-8C37-9A0BBBB5F642}">
+  <ds:schemaRefs>
+    <ds:schemaRef ds:uri="http://schemas.microsoft.com/sharepoint/v3/contenttype/forms"/>
+  </ds:schemaRefs>
+</ds:datastoreItem>
 </file>
 
-<file path=customXml/itemProps1.xml><?xml version="1.0" encoding="utf-8"?>
+<file path=customXml/itemProps3.xml><?xml version="1.0" encoding="utf-8"?>
 <ds:datastoreItem xmlns:ds="http://schemas.openxmlformats.org/officeDocument/2006/customXml" ds:itemID="{6B3946E7-66F8-4182-AA38-CFC406C59F4E}">
   <ds:schemaRefs>
     <ds:schemaRef ds:uri="http://schemas.microsoft.com/office/2006/metadata/contentType"/>
@@ -18911,31 +18270,6 @@
 </ds:datastoreItem>
 </file>
 
-<file path=customXml/itemProps2.xml><?xml version="1.0" encoding="utf-8"?>
-<ds:datastoreItem xmlns:ds="http://schemas.openxmlformats.org/officeDocument/2006/customXml" ds:itemID="{76929C79-DB32-411C-8C37-9A0BBBB5F642}">
-  <ds:schemaRefs>
-    <ds:schemaRef ds:uri="http://schemas.microsoft.com/sharepoint/v3/contenttype/forms"/>
-  </ds:schemaRefs>
-</ds:datastoreItem>
-</file>
-
-<file path=customXml/itemProps3.xml><?xml version="1.0" encoding="utf-8"?>
-<ds:datastoreItem xmlns:ds="http://schemas.openxmlformats.org/officeDocument/2006/customXml" ds:itemID="{0FD5D526-59E0-46BD-B75A-4A393253F249}">
-  <ds:schemaRefs>
-    <ds:schemaRef ds:uri="http://schemas.microsoft.com/office/2006/documentManagement/types"/>
-    <ds:schemaRef ds:uri="http://schemas.microsoft.com/office/2006/metadata/properties"/>
-    <ds:schemaRef ds:uri="http://purl.org/dc/elements/1.1/"/>
-    <ds:schemaRef ds:uri="9bfc64f2-d580-4df8-9fa4-4631ad6ac43d"/>
-    <ds:schemaRef ds:uri="http://schemas.openxmlformats.org/package/2006/metadata/core-properties"/>
-    <ds:schemaRef ds:uri="http://purl.org/dc/terms/"/>
-    <ds:schemaRef ds:uri="http://www.w3.org/XML/1998/namespace"/>
-    <ds:schemaRef ds:uri="http://schemas.microsoft.com/office/infopath/2007/PartnerControls"/>
-    <ds:schemaRef ds:uri="7cac0686-f0c7-4236-b000-d7b90732a875"/>
-    <ds:schemaRef ds:uri="http://purl.org/dc/dcmitype/"/>
-  </ds:schemaRefs>
-</ds:datastoreItem>
-</file>
-
 <file path=docMetadata/LabelInfo.xml><?xml version="1.0" encoding="utf-8"?>
 <clbl:labelList xmlns:clbl="http://schemas.microsoft.com/office/2020/mipLabelMetadata">
   <clbl:label id="{217a5a3d-163a-4e8b-af1b-58fd7f92894f}" enabled="0" method="" siteId="{217a5a3d-163a-4e8b-af1b-58fd7f92894f}" removed="1"/>

--- a/infogather.pptx
+++ b/infogather.pptx
@@ -5,7 +5,7 @@
     <p:sldMasterId id="2147483648" r:id="rId4"/>
   </p:sldMasterIdLst>
   <p:notesMasterIdLst>
-    <p:notesMasterId r:id="rId12"/>
+    <p:notesMasterId r:id="rId14"/>
   </p:notesMasterIdLst>
   <p:sldIdLst>
     <p:sldId id="256" r:id="rId5"/>
@@ -15,6 +15,8 @@
     <p:sldId id="2147471229" r:id="rId9"/>
     <p:sldId id="2147471217" r:id="rId10"/>
     <p:sldId id="2147471226" r:id="rId11"/>
+    <p:sldId id="2147471231" r:id="rId12"/>
+    <p:sldId id="2147471233" r:id="rId13"/>
   </p:sldIdLst>
   <p:sldSz cx="11520488" cy="6480175"/>
   <p:notesSz cx="6858000" cy="9144000"/>
@@ -255,7 +257,7 @@
       <p15:notesGuideLst xmlns:p15="http://schemas.microsoft.com/office/powerpoint/2012/main"/>
     </p:ext>
     <p:ext uri="GoogleSlidesCustomDataVersion2">
-      <go:slidesCustomData xmlns:mc="http://schemas.openxmlformats.org/markup-compatibility/2006" xmlns:mv="urn:schemas-microsoft-com:mac:vml" xmlns:c="http://schemas.openxmlformats.org/drawingml/2006/chart" xmlns:dgm="http://schemas.openxmlformats.org/drawingml/2006/diagram" xmlns:o="urn:schemas-microsoft-com:office:office" xmlns:v="urn:schemas-microsoft-com:vml" xmlns:pvml="urn:schemas-microsoft-com:office:powerpoint" xmlns:com="http://schemas.openxmlformats.org/drawingml/2006/compatibility" xmlns:p14="http://schemas.microsoft.com/office/powerpoint/2010/main" xmlns:p15="http://schemas.microsoft.com/office/powerpoint/2012/main" xmlns:ahyp="http://schemas.microsoft.com/office/drawing/2018/hyperlinkcolor" xmlns:go="http://customooxmlschemas.google.com/" xmlns="" r:id="rId52" roundtripDataSignature="AMtx7mhqKJAzFugGzrpaCdpbPJOL8OwfdA=="/>
+      <go:slidesCustomData xmlns="" xmlns:go="http://customooxmlschemas.google.com/" xmlns:ahyp="http://schemas.microsoft.com/office/drawing/2018/hyperlinkcolor" xmlns:p15="http://schemas.microsoft.com/office/powerpoint/2012/main" xmlns:p14="http://schemas.microsoft.com/office/powerpoint/2010/main" xmlns:com="http://schemas.openxmlformats.org/drawingml/2006/compatibility" xmlns:pvml="urn:schemas-microsoft-com:office:powerpoint" xmlns:v="urn:schemas-microsoft-com:vml" xmlns:o="urn:schemas-microsoft-com:office:office" xmlns:dgm="http://schemas.openxmlformats.org/drawingml/2006/diagram" xmlns:c="http://schemas.openxmlformats.org/drawingml/2006/chart" xmlns:mv="urn:schemas-microsoft-com:mac:vml" xmlns:mc="http://schemas.openxmlformats.org/markup-compatibility/2006" r:id="rId52" roundtripDataSignature="AMtx7mhqKJAzFugGzrpaCdpbPJOL8OwfdA=="/>
     </p:ext>
   </p:extLst>
 </p:presentation>
@@ -1473,6 +1475,22 @@
     </pc:docChg>
   </pc:docChgLst>
   <pc:docChgLst>
+    <pc:chgData name="周立筠-數據應用部-永豐金證券" userId="S::liyun0222.zhou@sinopac.com::ee349c15-f274-43a3-b0c9-48d528d95247" providerId="AD" clId="Web-{A48564C8-421B-2203-E695-99D400D4424E}"/>
+    <pc:docChg chg="modSld">
+      <pc:chgData name="周立筠-數據應用部-永豐金證券" userId="S::liyun0222.zhou@sinopac.com::ee349c15-f274-43a3-b0c9-48d528d95247" providerId="AD" clId="Web-{A48564C8-421B-2203-E695-99D400D4424E}" dt="2024-08-23T09:42:27.791" v="49"/>
+      <pc:docMkLst>
+        <pc:docMk/>
+      </pc:docMkLst>
+      <pc:sldChg chg="modSp">
+        <pc:chgData name="周立筠-數據應用部-永豐金證券" userId="S::liyun0222.zhou@sinopac.com::ee349c15-f274-43a3-b0c9-48d528d95247" providerId="AD" clId="Web-{A48564C8-421B-2203-E695-99D400D4424E}" dt="2024-08-23T09:42:27.791" v="49"/>
+        <pc:sldMkLst>
+          <pc:docMk/>
+          <pc:sldMk cId="3262633635" sldId="297"/>
+        </pc:sldMkLst>
+      </pc:sldChg>
+    </pc:docChg>
+  </pc:docChgLst>
+  <pc:docChgLst>
     <pc:chgData name="張天豪-數位金融處-永豐銀行" userId="0d835702-99c9-4ef6-82d8-3ca86d4ccc15" providerId="ADAL" clId="{05C68244-A0A4-5F4B-A227-C47B6FE62571}"/>
     <pc:docChg chg="undo custSel addSld delSld modSld modMainMaster modSection">
       <pc:chgData name="張天豪-數位金融處-永豐銀行" userId="0d835702-99c9-4ef6-82d8-3ca86d4ccc15" providerId="ADAL" clId="{05C68244-A0A4-5F4B-A227-C47B6FE62571}" dt="2024-11-23T00:59:06.402" v="223" actId="12"/>
@@ -1573,22 +1591,6 @@
           </pc:sldLayoutMkLst>
         </pc:sldLayoutChg>
       </pc:sldMasterChg>
-    </pc:docChg>
-  </pc:docChgLst>
-  <pc:docChgLst>
-    <pc:chgData name="周立筠-數據應用部-永豐金證券" userId="S::liyun0222.zhou@sinopac.com::ee349c15-f274-43a3-b0c9-48d528d95247" providerId="AD" clId="Web-{A48564C8-421B-2203-E695-99D400D4424E}"/>
-    <pc:docChg chg="modSld">
-      <pc:chgData name="周立筠-數據應用部-永豐金證券" userId="S::liyun0222.zhou@sinopac.com::ee349c15-f274-43a3-b0c9-48d528d95247" providerId="AD" clId="Web-{A48564C8-421B-2203-E695-99D400D4424E}" dt="2024-08-23T09:42:27.791" v="49"/>
-      <pc:docMkLst>
-        <pc:docMk/>
-      </pc:docMkLst>
-      <pc:sldChg chg="modSp">
-        <pc:chgData name="周立筠-數據應用部-永豐金證券" userId="S::liyun0222.zhou@sinopac.com::ee349c15-f274-43a3-b0c9-48d528d95247" providerId="AD" clId="Web-{A48564C8-421B-2203-E695-99D400D4424E}" dt="2024-08-23T09:42:27.791" v="49"/>
-        <pc:sldMkLst>
-          <pc:docMk/>
-          <pc:sldMk cId="3262633635" sldId="297"/>
-        </pc:sldMkLst>
-      </pc:sldChg>
     </pc:docChg>
   </pc:docChgLst>
 </pc:chgInfo>
@@ -3190,6 +3192,72 @@
     <p:extLst>
       <p:ext uri="{BB962C8B-B14F-4D97-AF65-F5344CB8AC3E}">
         <p14:creationId xmlns:p14="http://schemas.microsoft.com/office/powerpoint/2010/main" val="2420888186"/>
+      </p:ext>
+    </p:extLst>
+  </p:cSld>
+  <p:clrMapOvr>
+    <a:masterClrMapping/>
+  </p:clrMapOvr>
+</p:notes>
+</file>
+
+<file path=ppt/notesSlides/notesSlide8.xml><?xml version="1.0" encoding="utf-8"?>
+<p:notes xmlns:a="http://schemas.openxmlformats.org/drawingml/2006/main" xmlns:r="http://schemas.openxmlformats.org/officeDocument/2006/relationships" xmlns:p="http://schemas.openxmlformats.org/presentationml/2006/main">
+  <p:cSld>
+    <p:spTree>
+      <p:nvGrpSpPr>
+        <p:cNvPr id="1" name=""/>
+        <p:cNvGrpSpPr/>
+        <p:nvPr/>
+      </p:nvGrpSpPr>
+      <p:grpSpPr>
+        <a:xfrm>
+          <a:off x="0" y="0"/>
+          <a:ext cx="0" cy="0"/>
+          <a:chOff x="0" y="0"/>
+          <a:chExt cx="0" cy="0"/>
+        </a:xfrm>
+      </p:grpSpPr>
+      <p:sp>
+        <p:nvSpPr>
+          <p:cNvPr id="2" name="投影片影像版面配置區 1"/>
+          <p:cNvSpPr>
+            <a:spLocks noGrp="1" noRot="1" noChangeAspect="1"/>
+          </p:cNvSpPr>
+          <p:nvPr>
+            <p:ph type="sldImg"/>
+          </p:nvPr>
+        </p:nvSpPr>
+        <p:spPr>
+          <a:xfrm>
+            <a:off x="381000" y="685800"/>
+            <a:ext cx="6096000" cy="3429000"/>
+          </a:xfrm>
+        </p:spPr>
+      </p:sp>
+      <p:sp>
+        <p:nvSpPr>
+          <p:cNvPr id="3" name="備忘稿版面配置區 2"/>
+          <p:cNvSpPr>
+            <a:spLocks noGrp="1"/>
+          </p:cNvSpPr>
+          <p:nvPr>
+            <p:ph type="body" idx="1"/>
+          </p:nvPr>
+        </p:nvSpPr>
+        <p:spPr/>
+        <p:txBody>
+          <a:bodyPr/>
+          <a:lstStyle/>
+          <a:p>
+            <a:endParaRPr kumimoji="1" lang="zh-TW" altLang="en-US" dirty="0"/>
+          </a:p>
+        </p:txBody>
+      </p:sp>
+    </p:spTree>
+    <p:extLst>
+      <p:ext uri="{BB962C8B-B14F-4D97-AF65-F5344CB8AC3E}">
+        <p14:creationId xmlns:p14="http://schemas.microsoft.com/office/powerpoint/2010/main" val="2070439293"/>
       </p:ext>
     </p:extLst>
   </p:cSld>
@@ -17448,6 +17516,4626 @@
 </p:sld>
 </file>
 
+<file path=ppt/slides/slide8.xml><?xml version="1.0" encoding="utf-8"?>
+<p:sld xmlns:a="http://schemas.openxmlformats.org/drawingml/2006/main" xmlns:r="http://schemas.openxmlformats.org/officeDocument/2006/relationships" xmlns:p="http://schemas.openxmlformats.org/presentationml/2006/main">
+  <p:cSld>
+    <p:spTree>
+      <p:nvGrpSpPr>
+        <p:cNvPr id="1" name=""/>
+        <p:cNvGrpSpPr/>
+        <p:nvPr/>
+      </p:nvGrpSpPr>
+      <p:grpSpPr>
+        <a:xfrm>
+          <a:off x="0" y="0"/>
+          <a:ext cx="0" cy="0"/>
+          <a:chOff x="0" y="0"/>
+          <a:chExt cx="0" cy="0"/>
+        </a:xfrm>
+      </p:grpSpPr>
+      <p:sp>
+        <p:nvSpPr>
+          <p:cNvPr id="16" name="文字版面配置區 2">
+            <a:extLst>
+              <a:ext uri="{FF2B5EF4-FFF2-40B4-BE49-F238E27FC236}">
+                <a16:creationId xmlns:a16="http://schemas.microsoft.com/office/drawing/2014/main" id="{4AC31464-733D-B883-8631-AE539D53F01C}"/>
+              </a:ext>
+            </a:extLst>
+          </p:cNvPr>
+          <p:cNvSpPr txBox="1">
+            <a:spLocks/>
+          </p:cNvSpPr>
+          <p:nvPr/>
+        </p:nvSpPr>
+        <p:spPr>
+          <a:xfrm>
+            <a:off x="4364813" y="719138"/>
+            <a:ext cx="6976287" cy="5401026"/>
+          </a:xfrm>
+          <a:prstGeom prst="rect">
+            <a:avLst/>
+          </a:prstGeom>
+          <a:noFill/>
+          <a:ln>
+            <a:noFill/>
+          </a:ln>
+        </p:spPr>
+        <p:txBody>
+          <a:bodyPr spcFirstLastPara="1" wrap="square" lIns="88150" tIns="44050" rIns="88150" bIns="44050" anchor="t" anchorCtr="0">
+            <a:noAutofit/>
+          </a:bodyPr>
+          <a:lstStyle>
+            <a:defPPr marR="0" lvl="0" algn="l" rtl="0">
+              <a:lnSpc>
+                <a:spcPct val="100000"/>
+              </a:lnSpc>
+              <a:spcBef>
+                <a:spcPts val="0"/>
+              </a:spcBef>
+              <a:spcAft>
+                <a:spcPts val="0"/>
+              </a:spcAft>
+            </a:defPPr>
+            <a:lvl1pPr marL="252000" marR="0" lvl="0" indent="-216000" algn="l" rtl="0">
+              <a:lnSpc>
+                <a:spcPct val="100000"/>
+              </a:lnSpc>
+              <a:spcBef>
+                <a:spcPts val="600"/>
+              </a:spcBef>
+              <a:spcAft>
+                <a:spcPts val="0"/>
+              </a:spcAft>
+              <a:buClrTx/>
+              <a:buSzPct val="100000"/>
+              <a:buFont typeface="標準系統字體"/>
+              <a:buChar char="○"/>
+              <a:defRPr sz="1600" b="0" i="0" u="none" strike="noStrike" cap="none">
+                <a:solidFill>
+                  <a:schemeClr val="tx1"/>
+                </a:solidFill>
+                <a:latin typeface="微軟正黑體" panose="020B0604030504040204" pitchFamily="34" charset="-120"/>
+                <a:ea typeface="微軟正黑體" panose="020B0604030504040204" pitchFamily="34" charset="-120"/>
+                <a:cs typeface="微軟正黑體" panose="020B0604030504040204" pitchFamily="34" charset="-120"/>
+                <a:sym typeface="Microsoft JhengHei"/>
+              </a:defRPr>
+            </a:lvl1pPr>
+            <a:lvl2pPr marL="504000" marR="0" lvl="1" indent="-216000" algn="l" rtl="0">
+              <a:lnSpc>
+                <a:spcPct val="100000"/>
+              </a:lnSpc>
+              <a:spcBef>
+                <a:spcPts val="600"/>
+              </a:spcBef>
+              <a:spcAft>
+                <a:spcPts val="0"/>
+              </a:spcAft>
+              <a:buClrTx/>
+              <a:buSzPct val="100000"/>
+              <a:buFont typeface="標準系統字體"/>
+              <a:buChar char="○"/>
+              <a:defRPr sz="1400" b="0" i="0" u="none" strike="noStrike" cap="none">
+                <a:solidFill>
+                  <a:schemeClr val="tx1"/>
+                </a:solidFill>
+                <a:latin typeface="微軟正黑體" panose="020B0604030504040204" pitchFamily="34" charset="-120"/>
+                <a:ea typeface="微軟正黑體" panose="020B0604030504040204" pitchFamily="34" charset="-120"/>
+                <a:cs typeface="Roboto"/>
+                <a:sym typeface="Roboto"/>
+              </a:defRPr>
+            </a:lvl2pPr>
+            <a:lvl3pPr marL="756000" marR="0" lvl="2" indent="-216000" algn="l" rtl="0">
+              <a:lnSpc>
+                <a:spcPct val="100000"/>
+              </a:lnSpc>
+              <a:spcBef>
+                <a:spcPts val="600"/>
+              </a:spcBef>
+              <a:spcAft>
+                <a:spcPts val="0"/>
+              </a:spcAft>
+              <a:buClrTx/>
+              <a:buSzPct val="100000"/>
+              <a:buFont typeface="標準系統字體"/>
+              <a:buChar char="○"/>
+              <a:defRPr sz="1200" b="0" i="0" u="none" strike="noStrike" cap="none">
+                <a:solidFill>
+                  <a:schemeClr val="tx1"/>
+                </a:solidFill>
+                <a:latin typeface="微軟正黑體" panose="020B0604030504040204" pitchFamily="34" charset="-120"/>
+                <a:ea typeface="微軟正黑體" panose="020B0604030504040204" pitchFamily="34" charset="-120"/>
+                <a:cs typeface="Roboto"/>
+                <a:sym typeface="Roboto"/>
+              </a:defRPr>
+            </a:lvl3pPr>
+            <a:lvl4pPr marL="1008000" marR="0" lvl="3" indent="-216000" algn="l" rtl="0">
+              <a:lnSpc>
+                <a:spcPct val="100000"/>
+              </a:lnSpc>
+              <a:spcBef>
+                <a:spcPts val="600"/>
+              </a:spcBef>
+              <a:spcAft>
+                <a:spcPts val="0"/>
+              </a:spcAft>
+              <a:buClrTx/>
+              <a:buSzPct val="100000"/>
+              <a:buFont typeface="標準系統字體"/>
+              <a:buChar char="○"/>
+              <a:defRPr sz="1000" b="0" i="0" u="none" strike="noStrike" cap="none">
+                <a:solidFill>
+                  <a:schemeClr val="tx1"/>
+                </a:solidFill>
+                <a:latin typeface="微軟正黑體" panose="020B0604030504040204" pitchFamily="34" charset="-120"/>
+                <a:ea typeface="微軟正黑體" panose="020B0604030504040204" pitchFamily="34" charset="-120"/>
+                <a:cs typeface="Roboto"/>
+                <a:sym typeface="Roboto"/>
+              </a:defRPr>
+            </a:lvl4pPr>
+            <a:lvl5pPr marL="1260000" marR="0" lvl="4" indent="-216000" algn="l" rtl="0">
+              <a:lnSpc>
+                <a:spcPct val="100000"/>
+              </a:lnSpc>
+              <a:spcBef>
+                <a:spcPts val="600"/>
+              </a:spcBef>
+              <a:spcAft>
+                <a:spcPts val="0"/>
+              </a:spcAft>
+              <a:buClrTx/>
+              <a:buSzPct val="100000"/>
+              <a:buFont typeface="標準系統字體"/>
+              <a:buChar char="○"/>
+              <a:defRPr sz="800" b="0" i="0" u="none" strike="noStrike" cap="none">
+                <a:solidFill>
+                  <a:schemeClr val="tx1"/>
+                </a:solidFill>
+                <a:latin typeface="微軟正黑體" panose="020B0604030504040204" pitchFamily="34" charset="-120"/>
+                <a:ea typeface="微軟正黑體" panose="020B0604030504040204" pitchFamily="34" charset="-120"/>
+                <a:cs typeface="Roboto"/>
+                <a:sym typeface="Roboto"/>
+              </a:defRPr>
+            </a:lvl5pPr>
+            <a:lvl6pPr marL="1512000" marR="0" lvl="5" indent="-216000" algn="l" rtl="0">
+              <a:lnSpc>
+                <a:spcPct val="100000"/>
+              </a:lnSpc>
+              <a:spcBef>
+                <a:spcPts val="600"/>
+              </a:spcBef>
+              <a:spcAft>
+                <a:spcPts val="0"/>
+              </a:spcAft>
+              <a:buClrTx/>
+              <a:buSzPct val="100000"/>
+              <a:buFont typeface="Microsoft JhengHei Light" panose="020B0304030504040204" pitchFamily="34" charset="-120"/>
+              <a:buChar char="o"/>
+              <a:defRPr sz="1600" b="0" i="0" u="none" strike="noStrike" cap="none">
+                <a:solidFill>
+                  <a:schemeClr val="tx1"/>
+                </a:solidFill>
+                <a:latin typeface="微軟正黑體" panose="020B0604030504040204" pitchFamily="34" charset="-120"/>
+                <a:ea typeface="微軟正黑體" panose="020B0604030504040204" pitchFamily="34" charset="-120"/>
+                <a:cs typeface="Roboto"/>
+                <a:sym typeface="Roboto"/>
+              </a:defRPr>
+            </a:lvl6pPr>
+            <a:lvl7pPr marL="3200400" marR="0" lvl="6" indent="-355600" algn="l" rtl="0">
+              <a:lnSpc>
+                <a:spcPct val="100000"/>
+              </a:lnSpc>
+              <a:spcBef>
+                <a:spcPts val="1000"/>
+              </a:spcBef>
+              <a:spcAft>
+                <a:spcPts val="0"/>
+              </a:spcAft>
+              <a:buClr>
+                <a:srgbClr val="5489A3"/>
+              </a:buClr>
+              <a:buSzPts val="2000"/>
+              <a:buFont typeface="Roboto"/>
+              <a:buChar char="–"/>
+              <a:defRPr sz="2000" b="0" i="0" u="none" strike="noStrike" cap="none">
+                <a:solidFill>
+                  <a:srgbClr val="5489A3"/>
+                </a:solidFill>
+                <a:latin typeface="Roboto"/>
+                <a:ea typeface="Roboto"/>
+                <a:cs typeface="Roboto"/>
+                <a:sym typeface="Roboto"/>
+              </a:defRPr>
+            </a:lvl7pPr>
+            <a:lvl8pPr marL="3657600" marR="0" lvl="7" indent="-355600" algn="l" rtl="0">
+              <a:lnSpc>
+                <a:spcPct val="100000"/>
+              </a:lnSpc>
+              <a:spcBef>
+                <a:spcPts val="1000"/>
+              </a:spcBef>
+              <a:spcAft>
+                <a:spcPts val="0"/>
+              </a:spcAft>
+              <a:buClr>
+                <a:srgbClr val="5489A3"/>
+              </a:buClr>
+              <a:buSzPts val="2000"/>
+              <a:buFont typeface="Roboto"/>
+              <a:buChar char="–"/>
+              <a:defRPr sz="2000" b="0" i="0" u="none" strike="noStrike" cap="none">
+                <a:solidFill>
+                  <a:srgbClr val="5489A3"/>
+                </a:solidFill>
+                <a:latin typeface="Roboto"/>
+                <a:ea typeface="Roboto"/>
+                <a:cs typeface="Roboto"/>
+                <a:sym typeface="Roboto"/>
+              </a:defRPr>
+            </a:lvl8pPr>
+            <a:lvl9pPr marL="4114800" marR="0" lvl="8" indent="-355600" algn="l" rtl="0">
+              <a:lnSpc>
+                <a:spcPct val="100000"/>
+              </a:lnSpc>
+              <a:spcBef>
+                <a:spcPts val="1000"/>
+              </a:spcBef>
+              <a:spcAft>
+                <a:spcPts val="1000"/>
+              </a:spcAft>
+              <a:buClr>
+                <a:srgbClr val="5489A3"/>
+              </a:buClr>
+              <a:buSzPts val="2000"/>
+              <a:buFont typeface="Roboto"/>
+              <a:buChar char="–"/>
+              <a:defRPr sz="2000" b="0" i="0" u="none" strike="noStrike" cap="none">
+                <a:solidFill>
+                  <a:srgbClr val="5489A3"/>
+                </a:solidFill>
+                <a:latin typeface="Roboto"/>
+                <a:ea typeface="Roboto"/>
+                <a:cs typeface="Roboto"/>
+                <a:sym typeface="Roboto"/>
+              </a:defRPr>
+            </a:lvl9pPr>
+          </a:lstStyle>
+          <a:p>
+            <a:r>
+              <a:rPr lang="en-US" altLang="zh-TW" dirty="0" err="1"/>
+              <a:t>InfoGather</a:t>
+            </a:r>
+            <a:r>
+              <a:rPr lang="en-US" altLang="zh-TW" dirty="0"/>
+              <a:t> API</a:t>
+            </a:r>
+            <a:endParaRPr lang="zh-TW" altLang="en-US" dirty="0"/>
+          </a:p>
+        </p:txBody>
+      </p:sp>
+      <p:sp>
+        <p:nvSpPr>
+          <p:cNvPr id="2" name="標題 1">
+            <a:extLst>
+              <a:ext uri="{FF2B5EF4-FFF2-40B4-BE49-F238E27FC236}">
+                <a16:creationId xmlns:a16="http://schemas.microsoft.com/office/drawing/2014/main" id="{FA0021C8-3737-1595-99DB-59DD215D8FD6}"/>
+              </a:ext>
+            </a:extLst>
+          </p:cNvPr>
+          <p:cNvSpPr>
+            <a:spLocks noGrp="1"/>
+          </p:cNvSpPr>
+          <p:nvPr>
+            <p:ph type="title"/>
+          </p:nvPr>
+        </p:nvSpPr>
+        <p:spPr/>
+        <p:txBody>
+          <a:bodyPr/>
+          <a:lstStyle/>
+          <a:p>
+            <a:r>
+              <a:rPr lang="zh-TW" altLang="en-US" dirty="0"/>
+              <a:t>第三方套件</a:t>
+            </a:r>
+          </a:p>
+        </p:txBody>
+      </p:sp>
+      <p:sp>
+        <p:nvSpPr>
+          <p:cNvPr id="3" name="文字版面配置區 2">
+            <a:extLst>
+              <a:ext uri="{FF2B5EF4-FFF2-40B4-BE49-F238E27FC236}">
+                <a16:creationId xmlns:a16="http://schemas.microsoft.com/office/drawing/2014/main" id="{2B8C4D41-5438-4408-54CC-1C48CC03ED78}"/>
+              </a:ext>
+            </a:extLst>
+          </p:cNvPr>
+          <p:cNvSpPr>
+            <a:spLocks noGrp="1"/>
+          </p:cNvSpPr>
+          <p:nvPr>
+            <p:ph type="body" idx="1"/>
+          </p:nvPr>
+        </p:nvSpPr>
+        <p:spPr>
+          <a:xfrm>
+            <a:off x="179388" y="719138"/>
+            <a:ext cx="4185425" cy="5401026"/>
+          </a:xfrm>
+        </p:spPr>
+        <p:txBody>
+          <a:bodyPr/>
+          <a:lstStyle/>
+          <a:p>
+            <a:r>
+              <a:rPr lang="en-US" altLang="zh-TW" dirty="0" err="1"/>
+              <a:t>InfoGather</a:t>
+            </a:r>
+            <a:r>
+              <a:rPr lang="en-US" altLang="zh-TW" dirty="0"/>
+              <a:t> Web</a:t>
+            </a:r>
+            <a:endParaRPr lang="zh-TW" altLang="en-US" dirty="0"/>
+          </a:p>
+        </p:txBody>
+      </p:sp>
+      <p:graphicFrame>
+        <p:nvGraphicFramePr>
+          <p:cNvPr id="10" name="表格 9">
+            <a:extLst>
+              <a:ext uri="{FF2B5EF4-FFF2-40B4-BE49-F238E27FC236}">
+                <a16:creationId xmlns:a16="http://schemas.microsoft.com/office/drawing/2014/main" id="{7EE76454-7BE2-028E-4BA5-ECD53E772F7B}"/>
+              </a:ext>
+            </a:extLst>
+          </p:cNvPr>
+          <p:cNvGraphicFramePr>
+            <a:graphicFrameLocks noGrp="1"/>
+          </p:cNvGraphicFramePr>
+          <p:nvPr>
+            <p:extLst>
+              <p:ext uri="{D42A27DB-BD31-4B8C-83A1-F6EECF244321}">
+                <p14:modId xmlns:p14="http://schemas.microsoft.com/office/powerpoint/2010/main" val="4169987681"/>
+              </p:ext>
+            </p:extLst>
+          </p:nvPr>
+        </p:nvGraphicFramePr>
+        <p:xfrm>
+          <a:off x="512701" y="1187302"/>
+          <a:ext cx="3852112" cy="3901440"/>
+        </p:xfrm>
+        <a:graphic>
+          <a:graphicData uri="http://schemas.openxmlformats.org/drawingml/2006/table">
+            <a:tbl>
+              <a:tblPr>
+                <a:tableStyleId>{91DB7C30-2B5D-4D34-8F22-85940E495A18}</a:tableStyleId>
+              </a:tblPr>
+              <a:tblGrid>
+                <a:gridCol w="2232112">
+                  <a:extLst>
+                    <a:ext uri="{9D8B030D-6E8A-4147-A177-3AD203B41FA5}">
+                      <a16:colId xmlns:a16="http://schemas.microsoft.com/office/drawing/2014/main" val="2024109259"/>
+                    </a:ext>
+                  </a:extLst>
+                </a:gridCol>
+                <a:gridCol w="720000">
+                  <a:extLst>
+                    <a:ext uri="{9D8B030D-6E8A-4147-A177-3AD203B41FA5}">
+                      <a16:colId xmlns:a16="http://schemas.microsoft.com/office/drawing/2014/main" val="3166149084"/>
+                    </a:ext>
+                  </a:extLst>
+                </a:gridCol>
+                <a:gridCol w="900000">
+                  <a:extLst>
+                    <a:ext uri="{9D8B030D-6E8A-4147-A177-3AD203B41FA5}">
+                      <a16:colId xmlns:a16="http://schemas.microsoft.com/office/drawing/2014/main" val="894622394"/>
+                    </a:ext>
+                  </a:extLst>
+                </a:gridCol>
+              </a:tblGrid>
+              <a:tr h="234000">
+                <a:tc>
+                  <a:txBody>
+                    <a:bodyPr/>
+                    <a:lstStyle/>
+                    <a:p>
+                      <a:pPr>
+                        <a:buNone/>
+                      </a:pPr>
+                      <a:r>
+                        <a:rPr lang="zh-TW" altLang="en-US" sz="1000" dirty="0"/>
+                        <a:t>名稱</a:t>
+                      </a:r>
+                    </a:p>
+                  </a:txBody>
+                  <a:tcPr marL="45720" marR="45720" anchor="ctr"/>
+                </a:tc>
+                <a:tc>
+                  <a:txBody>
+                    <a:bodyPr/>
+                    <a:lstStyle/>
+                    <a:p>
+                      <a:pPr>
+                        <a:buNone/>
+                      </a:pPr>
+                      <a:r>
+                        <a:rPr lang="zh-TW" altLang="en-US" sz="1000" dirty="0"/>
+                        <a:t>版本號</a:t>
+                      </a:r>
+                    </a:p>
+                  </a:txBody>
+                  <a:tcPr marL="45720" marR="45720" anchor="ctr"/>
+                </a:tc>
+                <a:tc>
+                  <a:txBody>
+                    <a:bodyPr/>
+                    <a:lstStyle/>
+                    <a:p>
+                      <a:pPr>
+                        <a:buNone/>
+                      </a:pPr>
+                      <a:r>
+                        <a:rPr lang="zh-TW" altLang="en-US" sz="1000" dirty="0"/>
+                        <a:t>許可證</a:t>
+                      </a:r>
+                    </a:p>
+                  </a:txBody>
+                  <a:tcPr marL="45720" marR="45720" anchor="ctr"/>
+                </a:tc>
+                <a:extLst>
+                  <a:ext uri="{0D108BD9-81ED-4DB2-BD59-A6C34878D82A}">
+                    <a16:rowId xmlns:a16="http://schemas.microsoft.com/office/drawing/2014/main" val="2045707637"/>
+                  </a:ext>
+                </a:extLst>
+              </a:tr>
+              <a:tr h="234000">
+                <a:tc>
+                  <a:txBody>
+                    <a:bodyPr/>
+                    <a:lstStyle/>
+                    <a:p>
+                      <a:pPr>
+                        <a:buNone/>
+                      </a:pPr>
+                      <a:r>
+                        <a:rPr lang="en" sz="1000" dirty="0"/>
+                        <a:t>@angular/animations</a:t>
+                      </a:r>
+                    </a:p>
+                  </a:txBody>
+                  <a:tcPr marL="45720" marR="45720" anchor="ctr"/>
+                </a:tc>
+                <a:tc>
+                  <a:txBody>
+                    <a:bodyPr/>
+                    <a:lstStyle/>
+                    <a:p>
+                      <a:pPr>
+                        <a:buNone/>
+                      </a:pPr>
+                      <a:r>
+                        <a:rPr lang="en-US" altLang="zh-TW" sz="1000" dirty="0"/>
+                        <a:t>21.2.17</a:t>
+                      </a:r>
+                      <a:endParaRPr lang="zh-TW" altLang="en-US" sz="1000" dirty="0"/>
+                    </a:p>
+                  </a:txBody>
+                  <a:tcPr marL="45720" marR="45720" anchor="ctr"/>
+                </a:tc>
+                <a:tc>
+                  <a:txBody>
+                    <a:bodyPr/>
+                    <a:lstStyle/>
+                    <a:p>
+                      <a:pPr>
+                        <a:buNone/>
+                      </a:pPr>
+                      <a:r>
+                        <a:rPr lang="en" sz="1000" dirty="0"/>
+                        <a:t>MIT</a:t>
+                      </a:r>
+                    </a:p>
+                  </a:txBody>
+                  <a:tcPr marL="45720" marR="45720" anchor="ctr"/>
+                </a:tc>
+                <a:extLst>
+                  <a:ext uri="{0D108BD9-81ED-4DB2-BD59-A6C34878D82A}">
+                    <a16:rowId xmlns:a16="http://schemas.microsoft.com/office/drawing/2014/main" val="1786154734"/>
+                  </a:ext>
+                </a:extLst>
+              </a:tr>
+              <a:tr h="234000">
+                <a:tc>
+                  <a:txBody>
+                    <a:bodyPr/>
+                    <a:lstStyle/>
+                    <a:p>
+                      <a:pPr>
+                        <a:buNone/>
+                      </a:pPr>
+                      <a:r>
+                        <a:rPr lang="en" sz="1000" dirty="0"/>
+                        <a:t>@angular/</a:t>
+                      </a:r>
+                      <a:r>
+                        <a:rPr lang="en" sz="1000" dirty="0" err="1"/>
+                        <a:t>cdk</a:t>
+                      </a:r>
+                      <a:endParaRPr lang="en" sz="1000" dirty="0"/>
+                    </a:p>
+                  </a:txBody>
+                  <a:tcPr marL="45720" marR="45720" anchor="ctr"/>
+                </a:tc>
+                <a:tc>
+                  <a:txBody>
+                    <a:bodyPr/>
+                    <a:lstStyle/>
+                    <a:p>
+                      <a:pPr>
+                        <a:buNone/>
+                      </a:pPr>
+                      <a:r>
+                        <a:rPr lang="en-US" altLang="zh-TW" sz="1000" dirty="0"/>
+                        <a:t>21.2.14</a:t>
+                      </a:r>
+                      <a:endParaRPr lang="zh-TW" altLang="en-US" sz="1000" dirty="0"/>
+                    </a:p>
+                  </a:txBody>
+                  <a:tcPr marL="45720" marR="45720" anchor="ctr"/>
+                </a:tc>
+                <a:tc>
+                  <a:txBody>
+                    <a:bodyPr/>
+                    <a:lstStyle/>
+                    <a:p>
+                      <a:pPr>
+                        <a:buNone/>
+                      </a:pPr>
+                      <a:r>
+                        <a:rPr lang="en" sz="1000" dirty="0"/>
+                        <a:t>MIT</a:t>
+                      </a:r>
+                    </a:p>
+                  </a:txBody>
+                  <a:tcPr marL="45720" marR="45720" anchor="ctr"/>
+                </a:tc>
+                <a:extLst>
+                  <a:ext uri="{0D108BD9-81ED-4DB2-BD59-A6C34878D82A}">
+                    <a16:rowId xmlns:a16="http://schemas.microsoft.com/office/drawing/2014/main" val="3832243209"/>
+                  </a:ext>
+                </a:extLst>
+              </a:tr>
+              <a:tr h="234000">
+                <a:tc>
+                  <a:txBody>
+                    <a:bodyPr/>
+                    <a:lstStyle/>
+                    <a:p>
+                      <a:pPr>
+                        <a:buNone/>
+                      </a:pPr>
+                      <a:r>
+                        <a:rPr lang="en" sz="1000" dirty="0"/>
+                        <a:t>@angular/common</a:t>
+                      </a:r>
+                    </a:p>
+                  </a:txBody>
+                  <a:tcPr marL="45720" marR="45720" anchor="ctr"/>
+                </a:tc>
+                <a:tc>
+                  <a:txBody>
+                    <a:bodyPr/>
+                    <a:lstStyle/>
+                    <a:p>
+                      <a:pPr>
+                        <a:buNone/>
+                      </a:pPr>
+                      <a:r>
+                        <a:rPr lang="en-US" altLang="zh-TW" sz="1000" dirty="0"/>
+                        <a:t>21.2.17</a:t>
+                      </a:r>
+                      <a:endParaRPr lang="zh-TW" altLang="en-US" sz="1000" dirty="0"/>
+                    </a:p>
+                  </a:txBody>
+                  <a:tcPr marL="45720" marR="45720" anchor="ctr"/>
+                </a:tc>
+                <a:tc>
+                  <a:txBody>
+                    <a:bodyPr/>
+                    <a:lstStyle/>
+                    <a:p>
+                      <a:pPr>
+                        <a:buNone/>
+                      </a:pPr>
+                      <a:r>
+                        <a:rPr lang="en" sz="1000" dirty="0"/>
+                        <a:t>MIT</a:t>
+                      </a:r>
+                    </a:p>
+                  </a:txBody>
+                  <a:tcPr marL="45720" marR="45720" anchor="ctr"/>
+                </a:tc>
+                <a:extLst>
+                  <a:ext uri="{0D108BD9-81ED-4DB2-BD59-A6C34878D82A}">
+                    <a16:rowId xmlns:a16="http://schemas.microsoft.com/office/drawing/2014/main" val="1208141719"/>
+                  </a:ext>
+                </a:extLst>
+              </a:tr>
+              <a:tr h="234000">
+                <a:tc>
+                  <a:txBody>
+                    <a:bodyPr/>
+                    <a:lstStyle/>
+                    <a:p>
+                      <a:pPr>
+                        <a:buNone/>
+                      </a:pPr>
+                      <a:r>
+                        <a:rPr lang="en" sz="1000" dirty="0"/>
+                        <a:t>@angular/compiler</a:t>
+                      </a:r>
+                    </a:p>
+                  </a:txBody>
+                  <a:tcPr marL="45720" marR="45720" anchor="ctr"/>
+                </a:tc>
+                <a:tc>
+                  <a:txBody>
+                    <a:bodyPr/>
+                    <a:lstStyle/>
+                    <a:p>
+                      <a:pPr>
+                        <a:buNone/>
+                      </a:pPr>
+                      <a:r>
+                        <a:rPr lang="en-US" altLang="zh-TW" sz="1000" dirty="0"/>
+                        <a:t>21.2.17</a:t>
+                      </a:r>
+                      <a:endParaRPr lang="zh-TW" altLang="en-US" sz="1000" dirty="0"/>
+                    </a:p>
+                  </a:txBody>
+                  <a:tcPr marL="45720" marR="45720" anchor="ctr"/>
+                </a:tc>
+                <a:tc>
+                  <a:txBody>
+                    <a:bodyPr/>
+                    <a:lstStyle/>
+                    <a:p>
+                      <a:pPr>
+                        <a:buNone/>
+                      </a:pPr>
+                      <a:r>
+                        <a:rPr lang="en" sz="1000" dirty="0"/>
+                        <a:t>MIT</a:t>
+                      </a:r>
+                    </a:p>
+                  </a:txBody>
+                  <a:tcPr marL="45720" marR="45720" anchor="ctr"/>
+                </a:tc>
+                <a:extLst>
+                  <a:ext uri="{0D108BD9-81ED-4DB2-BD59-A6C34878D82A}">
+                    <a16:rowId xmlns:a16="http://schemas.microsoft.com/office/drawing/2014/main" val="4246296224"/>
+                  </a:ext>
+                </a:extLst>
+              </a:tr>
+              <a:tr h="234000">
+                <a:tc>
+                  <a:txBody>
+                    <a:bodyPr/>
+                    <a:lstStyle/>
+                    <a:p>
+                      <a:pPr>
+                        <a:buNone/>
+                      </a:pPr>
+                      <a:r>
+                        <a:rPr lang="en" sz="1000" dirty="0"/>
+                        <a:t>@angular/core</a:t>
+                      </a:r>
+                    </a:p>
+                  </a:txBody>
+                  <a:tcPr marL="45720" marR="45720" anchor="ctr"/>
+                </a:tc>
+                <a:tc>
+                  <a:txBody>
+                    <a:bodyPr/>
+                    <a:lstStyle/>
+                    <a:p>
+                      <a:pPr>
+                        <a:buNone/>
+                      </a:pPr>
+                      <a:r>
+                        <a:rPr lang="en-US" altLang="zh-TW" sz="1000" dirty="0"/>
+                        <a:t>21.2.17</a:t>
+                      </a:r>
+                      <a:endParaRPr lang="zh-TW" altLang="en-US" sz="1000" dirty="0"/>
+                    </a:p>
+                  </a:txBody>
+                  <a:tcPr marL="45720" marR="45720" anchor="ctr"/>
+                </a:tc>
+                <a:tc>
+                  <a:txBody>
+                    <a:bodyPr/>
+                    <a:lstStyle/>
+                    <a:p>
+                      <a:pPr>
+                        <a:buNone/>
+                      </a:pPr>
+                      <a:r>
+                        <a:rPr lang="en" sz="1000" dirty="0"/>
+                        <a:t>MIT</a:t>
+                      </a:r>
+                    </a:p>
+                  </a:txBody>
+                  <a:tcPr marL="45720" marR="45720" anchor="ctr"/>
+                </a:tc>
+                <a:extLst>
+                  <a:ext uri="{0D108BD9-81ED-4DB2-BD59-A6C34878D82A}">
+                    <a16:rowId xmlns:a16="http://schemas.microsoft.com/office/drawing/2014/main" val="1659014945"/>
+                  </a:ext>
+                </a:extLst>
+              </a:tr>
+              <a:tr h="234000">
+                <a:tc>
+                  <a:txBody>
+                    <a:bodyPr/>
+                    <a:lstStyle/>
+                    <a:p>
+                      <a:pPr>
+                        <a:buNone/>
+                      </a:pPr>
+                      <a:r>
+                        <a:rPr lang="en" sz="1000" dirty="0"/>
+                        <a:t>@angular/forms</a:t>
+                      </a:r>
+                    </a:p>
+                  </a:txBody>
+                  <a:tcPr marL="45720" marR="45720" anchor="ctr"/>
+                </a:tc>
+                <a:tc>
+                  <a:txBody>
+                    <a:bodyPr/>
+                    <a:lstStyle/>
+                    <a:p>
+                      <a:pPr>
+                        <a:buNone/>
+                      </a:pPr>
+                      <a:r>
+                        <a:rPr lang="en-US" altLang="zh-TW" sz="1000" dirty="0"/>
+                        <a:t>21.2.17</a:t>
+                      </a:r>
+                      <a:endParaRPr lang="zh-TW" altLang="en-US" sz="1000" dirty="0"/>
+                    </a:p>
+                  </a:txBody>
+                  <a:tcPr marL="45720" marR="45720" anchor="ctr"/>
+                </a:tc>
+                <a:tc>
+                  <a:txBody>
+                    <a:bodyPr/>
+                    <a:lstStyle/>
+                    <a:p>
+                      <a:pPr>
+                        <a:buNone/>
+                      </a:pPr>
+                      <a:r>
+                        <a:rPr lang="en" sz="1000" dirty="0"/>
+                        <a:t>MIT</a:t>
+                      </a:r>
+                    </a:p>
+                  </a:txBody>
+                  <a:tcPr marL="45720" marR="45720" anchor="ctr"/>
+                </a:tc>
+                <a:extLst>
+                  <a:ext uri="{0D108BD9-81ED-4DB2-BD59-A6C34878D82A}">
+                    <a16:rowId xmlns:a16="http://schemas.microsoft.com/office/drawing/2014/main" val="2254292137"/>
+                  </a:ext>
+                </a:extLst>
+              </a:tr>
+              <a:tr h="234000">
+                <a:tc>
+                  <a:txBody>
+                    <a:bodyPr/>
+                    <a:lstStyle/>
+                    <a:p>
+                      <a:pPr>
+                        <a:buNone/>
+                      </a:pPr>
+                      <a:r>
+                        <a:rPr lang="en" sz="1000" dirty="0"/>
+                        <a:t>@angular/platform-browser</a:t>
+                      </a:r>
+                    </a:p>
+                  </a:txBody>
+                  <a:tcPr marL="45720" marR="45720" anchor="ctr"/>
+                </a:tc>
+                <a:tc>
+                  <a:txBody>
+                    <a:bodyPr/>
+                    <a:lstStyle/>
+                    <a:p>
+                      <a:pPr>
+                        <a:buNone/>
+                      </a:pPr>
+                      <a:r>
+                        <a:rPr lang="en-US" altLang="zh-TW" sz="1000" dirty="0"/>
+                        <a:t>21.2.17</a:t>
+                      </a:r>
+                      <a:endParaRPr lang="zh-TW" altLang="en-US" sz="1000" dirty="0"/>
+                    </a:p>
+                  </a:txBody>
+                  <a:tcPr marL="45720" marR="45720" anchor="ctr"/>
+                </a:tc>
+                <a:tc>
+                  <a:txBody>
+                    <a:bodyPr/>
+                    <a:lstStyle/>
+                    <a:p>
+                      <a:pPr>
+                        <a:buNone/>
+                      </a:pPr>
+                      <a:r>
+                        <a:rPr lang="en" sz="1000" dirty="0"/>
+                        <a:t>MIT</a:t>
+                      </a:r>
+                    </a:p>
+                  </a:txBody>
+                  <a:tcPr marL="45720" marR="45720" anchor="ctr"/>
+                </a:tc>
+                <a:extLst>
+                  <a:ext uri="{0D108BD9-81ED-4DB2-BD59-A6C34878D82A}">
+                    <a16:rowId xmlns:a16="http://schemas.microsoft.com/office/drawing/2014/main" val="2445768026"/>
+                  </a:ext>
+                </a:extLst>
+              </a:tr>
+              <a:tr h="234000">
+                <a:tc>
+                  <a:txBody>
+                    <a:bodyPr/>
+                    <a:lstStyle/>
+                    <a:p>
+                      <a:pPr>
+                        <a:buNone/>
+                      </a:pPr>
+                      <a:r>
+                        <a:rPr lang="en" sz="1000" dirty="0"/>
+                        <a:t>@angular/platform-browser-dynamic</a:t>
+                      </a:r>
+                    </a:p>
+                  </a:txBody>
+                  <a:tcPr marL="45720" marR="45720" anchor="ctr"/>
+                </a:tc>
+                <a:tc>
+                  <a:txBody>
+                    <a:bodyPr/>
+                    <a:lstStyle/>
+                    <a:p>
+                      <a:pPr>
+                        <a:buNone/>
+                      </a:pPr>
+                      <a:r>
+                        <a:rPr lang="en-US" altLang="zh-TW" sz="1000" dirty="0"/>
+                        <a:t>21.2.17</a:t>
+                      </a:r>
+                      <a:endParaRPr lang="zh-TW" altLang="en-US" sz="1000" dirty="0"/>
+                    </a:p>
+                  </a:txBody>
+                  <a:tcPr marL="45720" marR="45720" anchor="ctr"/>
+                </a:tc>
+                <a:tc>
+                  <a:txBody>
+                    <a:bodyPr/>
+                    <a:lstStyle/>
+                    <a:p>
+                      <a:pPr>
+                        <a:buNone/>
+                      </a:pPr>
+                      <a:r>
+                        <a:rPr lang="en" sz="1000" dirty="0"/>
+                        <a:t>MIT</a:t>
+                      </a:r>
+                    </a:p>
+                  </a:txBody>
+                  <a:tcPr marL="45720" marR="45720" anchor="ctr"/>
+                </a:tc>
+                <a:extLst>
+                  <a:ext uri="{0D108BD9-81ED-4DB2-BD59-A6C34878D82A}">
+                    <a16:rowId xmlns:a16="http://schemas.microsoft.com/office/drawing/2014/main" val="1229697816"/>
+                  </a:ext>
+                </a:extLst>
+              </a:tr>
+              <a:tr h="234000">
+                <a:tc>
+                  <a:txBody>
+                    <a:bodyPr/>
+                    <a:lstStyle/>
+                    <a:p>
+                      <a:pPr>
+                        <a:buNone/>
+                      </a:pPr>
+                      <a:r>
+                        <a:rPr lang="en" sz="1000" dirty="0"/>
+                        <a:t>@angular/router</a:t>
+                      </a:r>
+                    </a:p>
+                  </a:txBody>
+                  <a:tcPr marL="45720" marR="45720" anchor="ctr"/>
+                </a:tc>
+                <a:tc>
+                  <a:txBody>
+                    <a:bodyPr/>
+                    <a:lstStyle/>
+                    <a:p>
+                      <a:pPr>
+                        <a:buNone/>
+                      </a:pPr>
+                      <a:r>
+                        <a:rPr lang="en-US" altLang="zh-TW" sz="1000" dirty="0"/>
+                        <a:t>21.2.17</a:t>
+                      </a:r>
+                      <a:endParaRPr lang="zh-TW" altLang="en-US" sz="1000" dirty="0"/>
+                    </a:p>
+                  </a:txBody>
+                  <a:tcPr marL="45720" marR="45720" anchor="ctr"/>
+                </a:tc>
+                <a:tc>
+                  <a:txBody>
+                    <a:bodyPr/>
+                    <a:lstStyle/>
+                    <a:p>
+                      <a:pPr>
+                        <a:buNone/>
+                      </a:pPr>
+                      <a:r>
+                        <a:rPr lang="en" sz="1000" dirty="0"/>
+                        <a:t>MIT</a:t>
+                      </a:r>
+                    </a:p>
+                  </a:txBody>
+                  <a:tcPr marL="45720" marR="45720" anchor="ctr"/>
+                </a:tc>
+                <a:extLst>
+                  <a:ext uri="{0D108BD9-81ED-4DB2-BD59-A6C34878D82A}">
+                    <a16:rowId xmlns:a16="http://schemas.microsoft.com/office/drawing/2014/main" val="1271082657"/>
+                  </a:ext>
+                </a:extLst>
+              </a:tr>
+              <a:tr h="234000">
+                <a:tc>
+                  <a:txBody>
+                    <a:bodyPr/>
+                    <a:lstStyle/>
+                    <a:p>
+                      <a:pPr>
+                        <a:buNone/>
+                      </a:pPr>
+                      <a:r>
+                        <a:rPr lang="en" sz="1000"/>
+                        <a:t>@primeuix/themes</a:t>
+                      </a:r>
+                    </a:p>
+                  </a:txBody>
+                  <a:tcPr marL="45720" marR="45720" anchor="ctr"/>
+                </a:tc>
+                <a:tc>
+                  <a:txBody>
+                    <a:bodyPr/>
+                    <a:lstStyle/>
+                    <a:p>
+                      <a:pPr>
+                        <a:buNone/>
+                      </a:pPr>
+                      <a:r>
+                        <a:rPr lang="en-US" altLang="zh-TW" sz="1000" dirty="0"/>
+                        <a:t>2.0.3</a:t>
+                      </a:r>
+                      <a:endParaRPr lang="zh-TW" altLang="en-US" sz="1000" dirty="0"/>
+                    </a:p>
+                  </a:txBody>
+                  <a:tcPr marL="45720" marR="45720" anchor="ctr"/>
+                </a:tc>
+                <a:tc>
+                  <a:txBody>
+                    <a:bodyPr/>
+                    <a:lstStyle/>
+                    <a:p>
+                      <a:pPr>
+                        <a:buNone/>
+                      </a:pPr>
+                      <a:r>
+                        <a:rPr lang="en" sz="1000" dirty="0"/>
+                        <a:t>MIT</a:t>
+                      </a:r>
+                    </a:p>
+                  </a:txBody>
+                  <a:tcPr marL="45720" marR="45720" anchor="ctr"/>
+                </a:tc>
+                <a:extLst>
+                  <a:ext uri="{0D108BD9-81ED-4DB2-BD59-A6C34878D82A}">
+                    <a16:rowId xmlns:a16="http://schemas.microsoft.com/office/drawing/2014/main" val="1952193297"/>
+                  </a:ext>
+                </a:extLst>
+              </a:tr>
+              <a:tr h="234000">
+                <a:tc>
+                  <a:txBody>
+                    <a:bodyPr/>
+                    <a:lstStyle/>
+                    <a:p>
+                      <a:pPr>
+                        <a:buNone/>
+                      </a:pPr>
+                      <a:r>
+                        <a:rPr lang="en" sz="1000"/>
+                        <a:t>marked</a:t>
+                      </a:r>
+                    </a:p>
+                  </a:txBody>
+                  <a:tcPr marL="45720" marR="45720" anchor="ctr"/>
+                </a:tc>
+                <a:tc>
+                  <a:txBody>
+                    <a:bodyPr/>
+                    <a:lstStyle/>
+                    <a:p>
+                      <a:pPr>
+                        <a:buNone/>
+                      </a:pPr>
+                      <a:r>
+                        <a:rPr lang="en-US" altLang="zh-TW" sz="1000" dirty="0"/>
+                        <a:t>18.0.2</a:t>
+                      </a:r>
+                      <a:endParaRPr lang="zh-TW" altLang="en-US" sz="1000" dirty="0"/>
+                    </a:p>
+                  </a:txBody>
+                  <a:tcPr marL="45720" marR="45720" anchor="ctr"/>
+                </a:tc>
+                <a:tc>
+                  <a:txBody>
+                    <a:bodyPr/>
+                    <a:lstStyle/>
+                    <a:p>
+                      <a:pPr>
+                        <a:buNone/>
+                      </a:pPr>
+                      <a:r>
+                        <a:rPr lang="en" sz="1000" dirty="0"/>
+                        <a:t>MIT</a:t>
+                      </a:r>
+                    </a:p>
+                  </a:txBody>
+                  <a:tcPr marL="45720" marR="45720" anchor="ctr"/>
+                </a:tc>
+                <a:extLst>
+                  <a:ext uri="{0D108BD9-81ED-4DB2-BD59-A6C34878D82A}">
+                    <a16:rowId xmlns:a16="http://schemas.microsoft.com/office/drawing/2014/main" val="575934765"/>
+                  </a:ext>
+                </a:extLst>
+              </a:tr>
+              <a:tr h="234000">
+                <a:tc>
+                  <a:txBody>
+                    <a:bodyPr/>
+                    <a:lstStyle/>
+                    <a:p>
+                      <a:pPr>
+                        <a:buNone/>
+                      </a:pPr>
+                      <a:r>
+                        <a:rPr lang="en" sz="1000"/>
+                        <a:t>primeicons</a:t>
+                      </a:r>
+                    </a:p>
+                  </a:txBody>
+                  <a:tcPr marL="45720" marR="45720" anchor="ctr"/>
+                </a:tc>
+                <a:tc>
+                  <a:txBody>
+                    <a:bodyPr/>
+                    <a:lstStyle/>
+                    <a:p>
+                      <a:pPr>
+                        <a:buNone/>
+                      </a:pPr>
+                      <a:r>
+                        <a:rPr lang="en-US" altLang="zh-TW" sz="1000" dirty="0"/>
+                        <a:t>7.0.0</a:t>
+                      </a:r>
+                      <a:endParaRPr lang="zh-TW" altLang="en-US" sz="1000" dirty="0"/>
+                    </a:p>
+                  </a:txBody>
+                  <a:tcPr marL="45720" marR="45720" anchor="ctr"/>
+                </a:tc>
+                <a:tc>
+                  <a:txBody>
+                    <a:bodyPr/>
+                    <a:lstStyle/>
+                    <a:p>
+                      <a:pPr>
+                        <a:buNone/>
+                      </a:pPr>
+                      <a:r>
+                        <a:rPr lang="en" sz="1000" dirty="0"/>
+                        <a:t>MIT</a:t>
+                      </a:r>
+                    </a:p>
+                  </a:txBody>
+                  <a:tcPr marL="45720" marR="45720" anchor="ctr"/>
+                </a:tc>
+                <a:extLst>
+                  <a:ext uri="{0D108BD9-81ED-4DB2-BD59-A6C34878D82A}">
+                    <a16:rowId xmlns:a16="http://schemas.microsoft.com/office/drawing/2014/main" val="960694290"/>
+                  </a:ext>
+                </a:extLst>
+              </a:tr>
+              <a:tr h="234000">
+                <a:tc>
+                  <a:txBody>
+                    <a:bodyPr/>
+                    <a:lstStyle/>
+                    <a:p>
+                      <a:pPr>
+                        <a:buNone/>
+                      </a:pPr>
+                      <a:r>
+                        <a:rPr lang="en" sz="1000"/>
+                        <a:t>primeng</a:t>
+                      </a:r>
+                    </a:p>
+                  </a:txBody>
+                  <a:tcPr marL="45720" marR="45720" anchor="ctr"/>
+                </a:tc>
+                <a:tc>
+                  <a:txBody>
+                    <a:bodyPr/>
+                    <a:lstStyle/>
+                    <a:p>
+                      <a:pPr>
+                        <a:buNone/>
+                      </a:pPr>
+                      <a:r>
+                        <a:rPr lang="en-US" altLang="zh-TW" sz="1000" dirty="0"/>
+                        <a:t>21.1.7</a:t>
+                      </a:r>
+                      <a:endParaRPr lang="zh-TW" altLang="en-US" sz="1000" dirty="0"/>
+                    </a:p>
+                  </a:txBody>
+                  <a:tcPr marL="45720" marR="45720" anchor="ctr"/>
+                </a:tc>
+                <a:tc>
+                  <a:txBody>
+                    <a:bodyPr/>
+                    <a:lstStyle/>
+                    <a:p>
+                      <a:pPr>
+                        <a:buNone/>
+                      </a:pPr>
+                      <a:r>
+                        <a:rPr lang="en" sz="1000" dirty="0"/>
+                        <a:t>MIT</a:t>
+                      </a:r>
+                    </a:p>
+                  </a:txBody>
+                  <a:tcPr marL="45720" marR="45720" anchor="ctr"/>
+                </a:tc>
+                <a:extLst>
+                  <a:ext uri="{0D108BD9-81ED-4DB2-BD59-A6C34878D82A}">
+                    <a16:rowId xmlns:a16="http://schemas.microsoft.com/office/drawing/2014/main" val="3134615368"/>
+                  </a:ext>
+                </a:extLst>
+              </a:tr>
+              <a:tr h="234000">
+                <a:tc>
+                  <a:txBody>
+                    <a:bodyPr/>
+                    <a:lstStyle/>
+                    <a:p>
+                      <a:pPr>
+                        <a:buNone/>
+                      </a:pPr>
+                      <a:r>
+                        <a:rPr lang="en" sz="1000"/>
+                        <a:t>rxjs</a:t>
+                      </a:r>
+                    </a:p>
+                  </a:txBody>
+                  <a:tcPr marL="45720" marR="45720" anchor="ctr"/>
+                </a:tc>
+                <a:tc>
+                  <a:txBody>
+                    <a:bodyPr/>
+                    <a:lstStyle/>
+                    <a:p>
+                      <a:pPr>
+                        <a:buNone/>
+                      </a:pPr>
+                      <a:r>
+                        <a:rPr lang="en-US" altLang="zh-TW" sz="1000" dirty="0"/>
+                        <a:t>7.8.1</a:t>
+                      </a:r>
+                      <a:endParaRPr lang="zh-TW" altLang="en-US" sz="1000" dirty="0"/>
+                    </a:p>
+                  </a:txBody>
+                  <a:tcPr marL="45720" marR="45720" anchor="ctr"/>
+                </a:tc>
+                <a:tc>
+                  <a:txBody>
+                    <a:bodyPr/>
+                    <a:lstStyle/>
+                    <a:p>
+                      <a:pPr>
+                        <a:buNone/>
+                      </a:pPr>
+                      <a:r>
+                        <a:rPr lang="en" sz="1000" dirty="0"/>
+                        <a:t>Apache-2.0</a:t>
+                      </a:r>
+                    </a:p>
+                  </a:txBody>
+                  <a:tcPr marL="45720" marR="45720" anchor="ctr"/>
+                </a:tc>
+                <a:extLst>
+                  <a:ext uri="{0D108BD9-81ED-4DB2-BD59-A6C34878D82A}">
+                    <a16:rowId xmlns:a16="http://schemas.microsoft.com/office/drawing/2014/main" val="3796623001"/>
+                  </a:ext>
+                </a:extLst>
+              </a:tr>
+              <a:tr h="234000">
+                <a:tc>
+                  <a:txBody>
+                    <a:bodyPr/>
+                    <a:lstStyle/>
+                    <a:p>
+                      <a:pPr>
+                        <a:buNone/>
+                      </a:pPr>
+                      <a:r>
+                        <a:rPr lang="en" sz="1000" dirty="0" err="1"/>
+                        <a:t>zone.js</a:t>
+                      </a:r>
+                      <a:endParaRPr lang="en" sz="1000" dirty="0"/>
+                    </a:p>
+                  </a:txBody>
+                  <a:tcPr marL="45720" marR="45720" anchor="ctr"/>
+                </a:tc>
+                <a:tc>
+                  <a:txBody>
+                    <a:bodyPr/>
+                    <a:lstStyle/>
+                    <a:p>
+                      <a:pPr>
+                        <a:buNone/>
+                      </a:pPr>
+                      <a:r>
+                        <a:rPr lang="en-US" altLang="zh-TW" sz="1000" dirty="0"/>
+                        <a:t>0.16.1</a:t>
+                      </a:r>
+                      <a:endParaRPr lang="zh-TW" altLang="en-US" sz="1000" dirty="0"/>
+                    </a:p>
+                  </a:txBody>
+                  <a:tcPr marL="45720" marR="45720" anchor="ctr"/>
+                </a:tc>
+                <a:tc>
+                  <a:txBody>
+                    <a:bodyPr/>
+                    <a:lstStyle/>
+                    <a:p>
+                      <a:pPr>
+                        <a:buNone/>
+                      </a:pPr>
+                      <a:r>
+                        <a:rPr lang="en" sz="1000" dirty="0"/>
+                        <a:t>MIT</a:t>
+                      </a:r>
+                    </a:p>
+                  </a:txBody>
+                  <a:tcPr marL="45720" marR="45720" anchor="ctr"/>
+                </a:tc>
+                <a:extLst>
+                  <a:ext uri="{0D108BD9-81ED-4DB2-BD59-A6C34878D82A}">
+                    <a16:rowId xmlns:a16="http://schemas.microsoft.com/office/drawing/2014/main" val="3086442834"/>
+                  </a:ext>
+                </a:extLst>
+              </a:tr>
+            </a:tbl>
+          </a:graphicData>
+        </a:graphic>
+      </p:graphicFrame>
+      <p:graphicFrame>
+        <p:nvGraphicFramePr>
+          <p:cNvPr id="11" name="表格 10">
+            <a:extLst>
+              <a:ext uri="{FF2B5EF4-FFF2-40B4-BE49-F238E27FC236}">
+                <a16:creationId xmlns:a16="http://schemas.microsoft.com/office/drawing/2014/main" id="{7B7FC56B-9E0D-24BA-1A68-C8E6F2BEBF3C}"/>
+              </a:ext>
+            </a:extLst>
+          </p:cNvPr>
+          <p:cNvGraphicFramePr>
+            <a:graphicFrameLocks noGrp="1"/>
+          </p:cNvGraphicFramePr>
+          <p:nvPr>
+            <p:extLst>
+              <p:ext uri="{D42A27DB-BD31-4B8C-83A1-F6EECF244321}">
+                <p14:modId xmlns:p14="http://schemas.microsoft.com/office/powerpoint/2010/main" val="2803924490"/>
+              </p:ext>
+            </p:extLst>
+          </p:nvPr>
+        </p:nvGraphicFramePr>
+        <p:xfrm>
+          <a:off x="4592944" y="1187302"/>
+          <a:ext cx="3340141" cy="4876800"/>
+        </p:xfrm>
+        <a:graphic>
+          <a:graphicData uri="http://schemas.openxmlformats.org/drawingml/2006/table">
+            <a:tbl>
+              <a:tblPr>
+                <a:tableStyleId>{91DB7C30-2B5D-4D34-8F22-85940E495A18}</a:tableStyleId>
+              </a:tblPr>
+              <a:tblGrid>
+                <a:gridCol w="1540141">
+                  <a:extLst>
+                    <a:ext uri="{9D8B030D-6E8A-4147-A177-3AD203B41FA5}">
+                      <a16:colId xmlns:a16="http://schemas.microsoft.com/office/drawing/2014/main" val="2353047831"/>
+                    </a:ext>
+                  </a:extLst>
+                </a:gridCol>
+                <a:gridCol w="720000">
+                  <a:extLst>
+                    <a:ext uri="{9D8B030D-6E8A-4147-A177-3AD203B41FA5}">
+                      <a16:colId xmlns:a16="http://schemas.microsoft.com/office/drawing/2014/main" val="373485315"/>
+                    </a:ext>
+                  </a:extLst>
+                </a:gridCol>
+                <a:gridCol w="1080000">
+                  <a:extLst>
+                    <a:ext uri="{9D8B030D-6E8A-4147-A177-3AD203B41FA5}">
+                      <a16:colId xmlns:a16="http://schemas.microsoft.com/office/drawing/2014/main" val="4106785762"/>
+                    </a:ext>
+                  </a:extLst>
+                </a:gridCol>
+              </a:tblGrid>
+              <a:tr h="234000">
+                <a:tc>
+                  <a:txBody>
+                    <a:bodyPr/>
+                    <a:lstStyle/>
+                    <a:p>
+                      <a:pPr>
+                        <a:buNone/>
+                      </a:pPr>
+                      <a:r>
+                        <a:rPr lang="zh-TW" altLang="en-US" sz="1000" dirty="0"/>
+                        <a:t>名稱</a:t>
+                      </a:r>
+                    </a:p>
+                  </a:txBody>
+                  <a:tcPr marL="45720" marR="45720" anchor="ctr"/>
+                </a:tc>
+                <a:tc>
+                  <a:txBody>
+                    <a:bodyPr/>
+                    <a:lstStyle/>
+                    <a:p>
+                      <a:pPr>
+                        <a:buNone/>
+                      </a:pPr>
+                      <a:r>
+                        <a:rPr lang="zh-TW" altLang="en-US" sz="1000" dirty="0"/>
+                        <a:t>版本號</a:t>
+                      </a:r>
+                    </a:p>
+                  </a:txBody>
+                  <a:tcPr marL="45720" marR="45720" anchor="ctr"/>
+                </a:tc>
+                <a:tc>
+                  <a:txBody>
+                    <a:bodyPr/>
+                    <a:lstStyle/>
+                    <a:p>
+                      <a:pPr>
+                        <a:buNone/>
+                      </a:pPr>
+                      <a:r>
+                        <a:rPr lang="zh-TW" altLang="en-US" sz="1000" dirty="0"/>
+                        <a:t>許可證</a:t>
+                      </a:r>
+                    </a:p>
+                  </a:txBody>
+                  <a:tcPr marL="45720" marR="45720" anchor="ctr"/>
+                </a:tc>
+                <a:extLst>
+                  <a:ext uri="{0D108BD9-81ED-4DB2-BD59-A6C34878D82A}">
+                    <a16:rowId xmlns:a16="http://schemas.microsoft.com/office/drawing/2014/main" val="3581163796"/>
+                  </a:ext>
+                </a:extLst>
+              </a:tr>
+              <a:tr h="234000">
+                <a:tc>
+                  <a:txBody>
+                    <a:bodyPr/>
+                    <a:lstStyle/>
+                    <a:p>
+                      <a:pPr>
+                        <a:buNone/>
+                      </a:pPr>
+                      <a:r>
+                        <a:rPr lang="en" sz="1000" dirty="0"/>
+                        <a:t>@bull-board/</a:t>
+                      </a:r>
+                      <a:r>
+                        <a:rPr lang="en" sz="1000" dirty="0" err="1"/>
+                        <a:t>api</a:t>
+                      </a:r>
+                      <a:endParaRPr lang="en" sz="1000" dirty="0"/>
+                    </a:p>
+                  </a:txBody>
+                  <a:tcPr marL="45720" marR="45720" anchor="ctr"/>
+                </a:tc>
+                <a:tc>
+                  <a:txBody>
+                    <a:bodyPr/>
+                    <a:lstStyle/>
+                    <a:p>
+                      <a:pPr>
+                        <a:buNone/>
+                      </a:pPr>
+                      <a:r>
+                        <a:rPr lang="en-US" altLang="zh-TW" sz="1000" dirty="0"/>
+                        <a:t>6.13.0</a:t>
+                      </a:r>
+                      <a:endParaRPr lang="zh-TW" altLang="en-US" sz="1000" dirty="0"/>
+                    </a:p>
+                  </a:txBody>
+                  <a:tcPr marL="45720" marR="45720" anchor="ctr"/>
+                </a:tc>
+                <a:tc>
+                  <a:txBody>
+                    <a:bodyPr/>
+                    <a:lstStyle/>
+                    <a:p>
+                      <a:pPr>
+                        <a:buNone/>
+                      </a:pPr>
+                      <a:r>
+                        <a:rPr lang="en" sz="1000" dirty="0"/>
+                        <a:t>MIT</a:t>
+                      </a:r>
+                    </a:p>
+                  </a:txBody>
+                  <a:tcPr marL="45720" marR="45720" anchor="ctr"/>
+                </a:tc>
+                <a:extLst>
+                  <a:ext uri="{0D108BD9-81ED-4DB2-BD59-A6C34878D82A}">
+                    <a16:rowId xmlns:a16="http://schemas.microsoft.com/office/drawing/2014/main" val="3116081141"/>
+                  </a:ext>
+                </a:extLst>
+              </a:tr>
+              <a:tr h="234000">
+                <a:tc>
+                  <a:txBody>
+                    <a:bodyPr/>
+                    <a:lstStyle/>
+                    <a:p>
+                      <a:pPr>
+                        <a:buNone/>
+                      </a:pPr>
+                      <a:r>
+                        <a:rPr lang="en" sz="1000" dirty="0"/>
+                        <a:t>@bull-board/express</a:t>
+                      </a:r>
+                    </a:p>
+                  </a:txBody>
+                  <a:tcPr marL="45720" marR="45720" anchor="ctr"/>
+                </a:tc>
+                <a:tc>
+                  <a:txBody>
+                    <a:bodyPr/>
+                    <a:lstStyle/>
+                    <a:p>
+                      <a:pPr>
+                        <a:buNone/>
+                      </a:pPr>
+                      <a:r>
+                        <a:rPr lang="en-US" altLang="zh-TW" sz="1000" dirty="0"/>
+                        <a:t>6.13.0</a:t>
+                      </a:r>
+                      <a:endParaRPr lang="zh-TW" altLang="en-US" sz="1000" dirty="0"/>
+                    </a:p>
+                  </a:txBody>
+                  <a:tcPr marL="45720" marR="45720" anchor="ctr"/>
+                </a:tc>
+                <a:tc>
+                  <a:txBody>
+                    <a:bodyPr/>
+                    <a:lstStyle/>
+                    <a:p>
+                      <a:pPr>
+                        <a:buNone/>
+                      </a:pPr>
+                      <a:r>
+                        <a:rPr lang="en" sz="1000" dirty="0"/>
+                        <a:t>MIT</a:t>
+                      </a:r>
+                    </a:p>
+                  </a:txBody>
+                  <a:tcPr marL="45720" marR="45720" anchor="ctr"/>
+                </a:tc>
+                <a:extLst>
+                  <a:ext uri="{0D108BD9-81ED-4DB2-BD59-A6C34878D82A}">
+                    <a16:rowId xmlns:a16="http://schemas.microsoft.com/office/drawing/2014/main" val="3672551227"/>
+                  </a:ext>
+                </a:extLst>
+              </a:tr>
+              <a:tr h="234000">
+                <a:tc>
+                  <a:txBody>
+                    <a:bodyPr/>
+                    <a:lstStyle/>
+                    <a:p>
+                      <a:pPr>
+                        <a:buNone/>
+                      </a:pPr>
+                      <a:r>
+                        <a:rPr lang="en" sz="1000" dirty="0"/>
+                        <a:t>@</a:t>
+                      </a:r>
+                      <a:r>
+                        <a:rPr lang="en" sz="1000" dirty="0" err="1"/>
+                        <a:t>github</a:t>
+                      </a:r>
+                      <a:r>
+                        <a:rPr lang="en" sz="1000" dirty="0"/>
+                        <a:t>/copilot-</a:t>
+                      </a:r>
+                      <a:r>
+                        <a:rPr lang="en" sz="1000" dirty="0" err="1"/>
+                        <a:t>sdk</a:t>
+                      </a:r>
+                      <a:endParaRPr lang="en" sz="1000" dirty="0"/>
+                    </a:p>
+                  </a:txBody>
+                  <a:tcPr marL="45720" marR="45720" anchor="ctr"/>
+                </a:tc>
+                <a:tc>
+                  <a:txBody>
+                    <a:bodyPr/>
+                    <a:lstStyle/>
+                    <a:p>
+                      <a:pPr>
+                        <a:buNone/>
+                      </a:pPr>
+                      <a:r>
+                        <a:rPr lang="en-US" altLang="zh-TW" sz="1000" dirty="0"/>
+                        <a:t>0.3.0</a:t>
+                      </a:r>
+                      <a:endParaRPr lang="zh-TW" altLang="en-US" sz="1000" dirty="0"/>
+                    </a:p>
+                  </a:txBody>
+                  <a:tcPr marL="45720" marR="45720" anchor="ctr"/>
+                </a:tc>
+                <a:tc>
+                  <a:txBody>
+                    <a:bodyPr/>
+                    <a:lstStyle/>
+                    <a:p>
+                      <a:pPr>
+                        <a:buNone/>
+                      </a:pPr>
+                      <a:r>
+                        <a:rPr lang="en" sz="1000"/>
+                        <a:t>MIT</a:t>
+                      </a:r>
+                    </a:p>
+                  </a:txBody>
+                  <a:tcPr marL="45720" marR="45720" anchor="ctr"/>
+                </a:tc>
+                <a:extLst>
+                  <a:ext uri="{0D108BD9-81ED-4DB2-BD59-A6C34878D82A}">
+                    <a16:rowId xmlns:a16="http://schemas.microsoft.com/office/drawing/2014/main" val="3512624252"/>
+                  </a:ext>
+                </a:extLst>
+              </a:tr>
+              <a:tr h="234000">
+                <a:tc>
+                  <a:txBody>
+                    <a:bodyPr/>
+                    <a:lstStyle/>
+                    <a:p>
+                      <a:pPr>
+                        <a:buNone/>
+                      </a:pPr>
+                      <a:r>
+                        <a:rPr lang="en" sz="1000" dirty="0"/>
+                        <a:t>@</a:t>
+                      </a:r>
+                      <a:r>
+                        <a:rPr lang="en" sz="1000" dirty="0" err="1"/>
+                        <a:t>keyv</a:t>
+                      </a:r>
+                      <a:r>
+                        <a:rPr lang="en" sz="1000" dirty="0"/>
+                        <a:t>/</a:t>
+                      </a:r>
+                      <a:r>
+                        <a:rPr lang="en" sz="1000" dirty="0" err="1"/>
+                        <a:t>redis</a:t>
+                      </a:r>
+                      <a:endParaRPr lang="en" sz="1000" dirty="0"/>
+                    </a:p>
+                  </a:txBody>
+                  <a:tcPr marL="45720" marR="45720" anchor="ctr"/>
+                </a:tc>
+                <a:tc>
+                  <a:txBody>
+                    <a:bodyPr/>
+                    <a:lstStyle/>
+                    <a:p>
+                      <a:pPr>
+                        <a:buNone/>
+                      </a:pPr>
+                      <a:r>
+                        <a:rPr lang="en-US" altLang="zh-TW" sz="1000" dirty="0"/>
+                        <a:t>5.1.6</a:t>
+                      </a:r>
+                      <a:endParaRPr lang="zh-TW" altLang="en-US" sz="1000" dirty="0"/>
+                    </a:p>
+                  </a:txBody>
+                  <a:tcPr marL="45720" marR="45720" anchor="ctr"/>
+                </a:tc>
+                <a:tc>
+                  <a:txBody>
+                    <a:bodyPr/>
+                    <a:lstStyle/>
+                    <a:p>
+                      <a:pPr>
+                        <a:buNone/>
+                      </a:pPr>
+                      <a:r>
+                        <a:rPr lang="en" sz="1000" dirty="0"/>
+                        <a:t>MIT</a:t>
+                      </a:r>
+                    </a:p>
+                  </a:txBody>
+                  <a:tcPr marL="45720" marR="45720" anchor="ctr"/>
+                </a:tc>
+                <a:extLst>
+                  <a:ext uri="{0D108BD9-81ED-4DB2-BD59-A6C34878D82A}">
+                    <a16:rowId xmlns:a16="http://schemas.microsoft.com/office/drawing/2014/main" val="1573002309"/>
+                  </a:ext>
+                </a:extLst>
+              </a:tr>
+              <a:tr h="234000">
+                <a:tc>
+                  <a:txBody>
+                    <a:bodyPr/>
+                    <a:lstStyle/>
+                    <a:p>
+                      <a:pPr>
+                        <a:buNone/>
+                      </a:pPr>
+                      <a:r>
+                        <a:rPr lang="en" sz="1000" dirty="0"/>
+                        <a:t>@</a:t>
+                      </a:r>
+                      <a:r>
+                        <a:rPr lang="en" sz="1000" dirty="0" err="1"/>
+                        <a:t>nestjs</a:t>
+                      </a:r>
+                      <a:r>
+                        <a:rPr lang="en" sz="1000" dirty="0"/>
+                        <a:t>/</a:t>
+                      </a:r>
+                      <a:r>
+                        <a:rPr lang="en" sz="1000" dirty="0" err="1"/>
+                        <a:t>axios</a:t>
+                      </a:r>
+                      <a:endParaRPr lang="en" sz="1000" dirty="0"/>
+                    </a:p>
+                  </a:txBody>
+                  <a:tcPr marL="45720" marR="45720" anchor="ctr"/>
+                </a:tc>
+                <a:tc>
+                  <a:txBody>
+                    <a:bodyPr/>
+                    <a:lstStyle/>
+                    <a:p>
+                      <a:pPr>
+                        <a:buNone/>
+                      </a:pPr>
+                      <a:r>
+                        <a:rPr lang="en-US" altLang="zh-TW" sz="1000" dirty="0"/>
+                        <a:t>4.0.1</a:t>
+                      </a:r>
+                      <a:endParaRPr lang="zh-TW" altLang="en-US" sz="1000" dirty="0"/>
+                    </a:p>
+                  </a:txBody>
+                  <a:tcPr marL="45720" marR="45720" anchor="ctr"/>
+                </a:tc>
+                <a:tc>
+                  <a:txBody>
+                    <a:bodyPr/>
+                    <a:lstStyle/>
+                    <a:p>
+                      <a:pPr>
+                        <a:buNone/>
+                      </a:pPr>
+                      <a:r>
+                        <a:rPr lang="en" sz="1000" dirty="0"/>
+                        <a:t>MIT</a:t>
+                      </a:r>
+                    </a:p>
+                  </a:txBody>
+                  <a:tcPr marL="45720" marR="45720" anchor="ctr"/>
+                </a:tc>
+                <a:extLst>
+                  <a:ext uri="{0D108BD9-81ED-4DB2-BD59-A6C34878D82A}">
+                    <a16:rowId xmlns:a16="http://schemas.microsoft.com/office/drawing/2014/main" val="3187372359"/>
+                  </a:ext>
+                </a:extLst>
+              </a:tr>
+              <a:tr h="234000">
+                <a:tc>
+                  <a:txBody>
+                    <a:bodyPr/>
+                    <a:lstStyle/>
+                    <a:p>
+                      <a:pPr>
+                        <a:buNone/>
+                      </a:pPr>
+                      <a:r>
+                        <a:rPr lang="en" sz="1000" dirty="0"/>
+                        <a:t>@</a:t>
+                      </a:r>
+                      <a:r>
+                        <a:rPr lang="en" sz="1000" dirty="0" err="1"/>
+                        <a:t>nestjs</a:t>
+                      </a:r>
+                      <a:r>
+                        <a:rPr lang="en" sz="1000" dirty="0"/>
+                        <a:t>/</a:t>
+                      </a:r>
+                      <a:r>
+                        <a:rPr lang="en" sz="1000" dirty="0" err="1"/>
+                        <a:t>bullmq</a:t>
+                      </a:r>
+                      <a:endParaRPr lang="en" sz="1000" dirty="0"/>
+                    </a:p>
+                  </a:txBody>
+                  <a:tcPr marL="45720" marR="45720" anchor="ctr"/>
+                </a:tc>
+                <a:tc>
+                  <a:txBody>
+                    <a:bodyPr/>
+                    <a:lstStyle/>
+                    <a:p>
+                      <a:pPr>
+                        <a:buNone/>
+                      </a:pPr>
+                      <a:r>
+                        <a:rPr lang="en-US" altLang="zh-TW" sz="1000" dirty="0"/>
+                        <a:t>11.0.3</a:t>
+                      </a:r>
+                      <a:endParaRPr lang="zh-TW" altLang="en-US" sz="1000" dirty="0"/>
+                    </a:p>
+                  </a:txBody>
+                  <a:tcPr marL="45720" marR="45720" anchor="ctr"/>
+                </a:tc>
+                <a:tc>
+                  <a:txBody>
+                    <a:bodyPr/>
+                    <a:lstStyle/>
+                    <a:p>
+                      <a:pPr>
+                        <a:buNone/>
+                      </a:pPr>
+                      <a:r>
+                        <a:rPr lang="en" sz="1000" dirty="0"/>
+                        <a:t>MIT</a:t>
+                      </a:r>
+                    </a:p>
+                  </a:txBody>
+                  <a:tcPr marL="45720" marR="45720" anchor="ctr"/>
+                </a:tc>
+                <a:extLst>
+                  <a:ext uri="{0D108BD9-81ED-4DB2-BD59-A6C34878D82A}">
+                    <a16:rowId xmlns:a16="http://schemas.microsoft.com/office/drawing/2014/main" val="78696822"/>
+                  </a:ext>
+                </a:extLst>
+              </a:tr>
+              <a:tr h="234000">
+                <a:tc>
+                  <a:txBody>
+                    <a:bodyPr/>
+                    <a:lstStyle/>
+                    <a:p>
+                      <a:pPr>
+                        <a:buNone/>
+                      </a:pPr>
+                      <a:r>
+                        <a:rPr lang="en" sz="1000" dirty="0"/>
+                        <a:t>@</a:t>
+                      </a:r>
+                      <a:r>
+                        <a:rPr lang="en" sz="1000" dirty="0" err="1"/>
+                        <a:t>nestjs</a:t>
+                      </a:r>
+                      <a:r>
+                        <a:rPr lang="en" sz="1000" dirty="0"/>
+                        <a:t>/cache-manager</a:t>
+                      </a:r>
+                    </a:p>
+                  </a:txBody>
+                  <a:tcPr marL="45720" marR="45720" anchor="ctr"/>
+                </a:tc>
+                <a:tc>
+                  <a:txBody>
+                    <a:bodyPr/>
+                    <a:lstStyle/>
+                    <a:p>
+                      <a:pPr>
+                        <a:buNone/>
+                      </a:pPr>
+                      <a:r>
+                        <a:rPr lang="en-US" altLang="zh-TW" sz="1000" dirty="0"/>
+                        <a:t>3.1.0</a:t>
+                      </a:r>
+                      <a:endParaRPr lang="zh-TW" altLang="en-US" sz="1000" dirty="0"/>
+                    </a:p>
+                  </a:txBody>
+                  <a:tcPr marL="45720" marR="45720" anchor="ctr"/>
+                </a:tc>
+                <a:tc>
+                  <a:txBody>
+                    <a:bodyPr/>
+                    <a:lstStyle/>
+                    <a:p>
+                      <a:pPr>
+                        <a:buNone/>
+                      </a:pPr>
+                      <a:r>
+                        <a:rPr lang="en" sz="1000" dirty="0"/>
+                        <a:t>MIT</a:t>
+                      </a:r>
+                    </a:p>
+                  </a:txBody>
+                  <a:tcPr marL="45720" marR="45720" anchor="ctr"/>
+                </a:tc>
+                <a:extLst>
+                  <a:ext uri="{0D108BD9-81ED-4DB2-BD59-A6C34878D82A}">
+                    <a16:rowId xmlns:a16="http://schemas.microsoft.com/office/drawing/2014/main" val="3623657997"/>
+                  </a:ext>
+                </a:extLst>
+              </a:tr>
+              <a:tr h="234000">
+                <a:tc>
+                  <a:txBody>
+                    <a:bodyPr/>
+                    <a:lstStyle/>
+                    <a:p>
+                      <a:pPr>
+                        <a:buNone/>
+                      </a:pPr>
+                      <a:r>
+                        <a:rPr lang="en" sz="1000" dirty="0"/>
+                        <a:t>@</a:t>
+                      </a:r>
+                      <a:r>
+                        <a:rPr lang="en" sz="1000" dirty="0" err="1"/>
+                        <a:t>nestjs</a:t>
+                      </a:r>
+                      <a:r>
+                        <a:rPr lang="en" sz="1000" dirty="0"/>
+                        <a:t>/common</a:t>
+                      </a:r>
+                    </a:p>
+                  </a:txBody>
+                  <a:tcPr marL="45720" marR="45720" anchor="ctr"/>
+                </a:tc>
+                <a:tc>
+                  <a:txBody>
+                    <a:bodyPr/>
+                    <a:lstStyle/>
+                    <a:p>
+                      <a:pPr>
+                        <a:buNone/>
+                      </a:pPr>
+                      <a:r>
+                        <a:rPr lang="en-US" altLang="zh-TW" sz="1000" dirty="0"/>
+                        <a:t>11.1.6</a:t>
+                      </a:r>
+                      <a:endParaRPr lang="zh-TW" altLang="en-US" sz="1000" dirty="0"/>
+                    </a:p>
+                  </a:txBody>
+                  <a:tcPr marL="45720" marR="45720" anchor="ctr"/>
+                </a:tc>
+                <a:tc>
+                  <a:txBody>
+                    <a:bodyPr/>
+                    <a:lstStyle/>
+                    <a:p>
+                      <a:pPr>
+                        <a:buNone/>
+                      </a:pPr>
+                      <a:r>
+                        <a:rPr lang="en" sz="1000"/>
+                        <a:t>MIT</a:t>
+                      </a:r>
+                    </a:p>
+                  </a:txBody>
+                  <a:tcPr marL="45720" marR="45720" anchor="ctr"/>
+                </a:tc>
+                <a:extLst>
+                  <a:ext uri="{0D108BD9-81ED-4DB2-BD59-A6C34878D82A}">
+                    <a16:rowId xmlns:a16="http://schemas.microsoft.com/office/drawing/2014/main" val="741359053"/>
+                  </a:ext>
+                </a:extLst>
+              </a:tr>
+              <a:tr h="234000">
+                <a:tc>
+                  <a:txBody>
+                    <a:bodyPr/>
+                    <a:lstStyle/>
+                    <a:p>
+                      <a:pPr>
+                        <a:buNone/>
+                      </a:pPr>
+                      <a:r>
+                        <a:rPr lang="en" sz="1000" dirty="0"/>
+                        <a:t>@</a:t>
+                      </a:r>
+                      <a:r>
+                        <a:rPr lang="en" sz="1000" dirty="0" err="1"/>
+                        <a:t>nestjs</a:t>
+                      </a:r>
+                      <a:r>
+                        <a:rPr lang="en" sz="1000" dirty="0"/>
+                        <a:t>/config</a:t>
+                      </a:r>
+                    </a:p>
+                  </a:txBody>
+                  <a:tcPr marL="45720" marR="45720" anchor="ctr"/>
+                </a:tc>
+                <a:tc>
+                  <a:txBody>
+                    <a:bodyPr/>
+                    <a:lstStyle/>
+                    <a:p>
+                      <a:pPr>
+                        <a:buNone/>
+                      </a:pPr>
+                      <a:r>
+                        <a:rPr lang="en-US" altLang="zh-TW" sz="1000" dirty="0"/>
+                        <a:t>4.0.2</a:t>
+                      </a:r>
+                      <a:endParaRPr lang="zh-TW" altLang="en-US" sz="1000" dirty="0"/>
+                    </a:p>
+                  </a:txBody>
+                  <a:tcPr marL="45720" marR="45720" anchor="ctr"/>
+                </a:tc>
+                <a:tc>
+                  <a:txBody>
+                    <a:bodyPr/>
+                    <a:lstStyle/>
+                    <a:p>
+                      <a:pPr>
+                        <a:buNone/>
+                      </a:pPr>
+                      <a:r>
+                        <a:rPr lang="en" sz="1000" dirty="0"/>
+                        <a:t>MIT</a:t>
+                      </a:r>
+                    </a:p>
+                  </a:txBody>
+                  <a:tcPr marL="45720" marR="45720" anchor="ctr"/>
+                </a:tc>
+                <a:extLst>
+                  <a:ext uri="{0D108BD9-81ED-4DB2-BD59-A6C34878D82A}">
+                    <a16:rowId xmlns:a16="http://schemas.microsoft.com/office/drawing/2014/main" val="2921999833"/>
+                  </a:ext>
+                </a:extLst>
+              </a:tr>
+              <a:tr h="234000">
+                <a:tc>
+                  <a:txBody>
+                    <a:bodyPr/>
+                    <a:lstStyle/>
+                    <a:p>
+                      <a:pPr>
+                        <a:buNone/>
+                      </a:pPr>
+                      <a:r>
+                        <a:rPr lang="en" sz="1000" dirty="0"/>
+                        <a:t>@</a:t>
+                      </a:r>
+                      <a:r>
+                        <a:rPr lang="en" sz="1000" dirty="0" err="1"/>
+                        <a:t>nestjs</a:t>
+                      </a:r>
+                      <a:r>
+                        <a:rPr lang="en" sz="1000" dirty="0"/>
+                        <a:t>/core</a:t>
+                      </a:r>
+                    </a:p>
+                  </a:txBody>
+                  <a:tcPr marL="45720" marR="45720" anchor="ctr"/>
+                </a:tc>
+                <a:tc>
+                  <a:txBody>
+                    <a:bodyPr/>
+                    <a:lstStyle/>
+                    <a:p>
+                      <a:pPr>
+                        <a:buNone/>
+                      </a:pPr>
+                      <a:r>
+                        <a:rPr lang="en-US" altLang="zh-TW" sz="1000" dirty="0"/>
+                        <a:t>11.1.6</a:t>
+                      </a:r>
+                      <a:endParaRPr lang="zh-TW" altLang="en-US" sz="1000" dirty="0"/>
+                    </a:p>
+                  </a:txBody>
+                  <a:tcPr marL="45720" marR="45720" anchor="ctr"/>
+                </a:tc>
+                <a:tc>
+                  <a:txBody>
+                    <a:bodyPr/>
+                    <a:lstStyle/>
+                    <a:p>
+                      <a:pPr>
+                        <a:buNone/>
+                      </a:pPr>
+                      <a:r>
+                        <a:rPr lang="en" sz="1000" dirty="0"/>
+                        <a:t>MIT</a:t>
+                      </a:r>
+                    </a:p>
+                  </a:txBody>
+                  <a:tcPr marL="45720" marR="45720" anchor="ctr"/>
+                </a:tc>
+                <a:extLst>
+                  <a:ext uri="{0D108BD9-81ED-4DB2-BD59-A6C34878D82A}">
+                    <a16:rowId xmlns:a16="http://schemas.microsoft.com/office/drawing/2014/main" val="3483257713"/>
+                  </a:ext>
+                </a:extLst>
+              </a:tr>
+              <a:tr h="234000">
+                <a:tc>
+                  <a:txBody>
+                    <a:bodyPr/>
+                    <a:lstStyle/>
+                    <a:p>
+                      <a:pPr>
+                        <a:buNone/>
+                      </a:pPr>
+                      <a:r>
+                        <a:rPr lang="en" sz="1000" dirty="0"/>
+                        <a:t>@</a:t>
+                      </a:r>
+                      <a:r>
+                        <a:rPr lang="en" sz="1000" dirty="0" err="1"/>
+                        <a:t>nestjs</a:t>
+                      </a:r>
+                      <a:r>
+                        <a:rPr lang="en" sz="1000" dirty="0"/>
+                        <a:t>/</a:t>
+                      </a:r>
+                      <a:r>
+                        <a:rPr lang="en" sz="1000" dirty="0" err="1"/>
+                        <a:t>jwt</a:t>
+                      </a:r>
+                      <a:endParaRPr lang="en" sz="1000" dirty="0"/>
+                    </a:p>
+                  </a:txBody>
+                  <a:tcPr marL="45720" marR="45720" anchor="ctr"/>
+                </a:tc>
+                <a:tc>
+                  <a:txBody>
+                    <a:bodyPr/>
+                    <a:lstStyle/>
+                    <a:p>
+                      <a:pPr>
+                        <a:buNone/>
+                      </a:pPr>
+                      <a:r>
+                        <a:rPr lang="en-US" altLang="zh-TW" sz="1000" dirty="0"/>
+                        <a:t>11.0.0</a:t>
+                      </a:r>
+                      <a:endParaRPr lang="zh-TW" altLang="en-US" sz="1000" dirty="0"/>
+                    </a:p>
+                  </a:txBody>
+                  <a:tcPr marL="45720" marR="45720" anchor="ctr"/>
+                </a:tc>
+                <a:tc>
+                  <a:txBody>
+                    <a:bodyPr/>
+                    <a:lstStyle/>
+                    <a:p>
+                      <a:pPr>
+                        <a:buNone/>
+                      </a:pPr>
+                      <a:r>
+                        <a:rPr lang="en" sz="1000" dirty="0"/>
+                        <a:t>MIT</a:t>
+                      </a:r>
+                    </a:p>
+                  </a:txBody>
+                  <a:tcPr marL="45720" marR="45720" anchor="ctr"/>
+                </a:tc>
+                <a:extLst>
+                  <a:ext uri="{0D108BD9-81ED-4DB2-BD59-A6C34878D82A}">
+                    <a16:rowId xmlns:a16="http://schemas.microsoft.com/office/drawing/2014/main" val="250014764"/>
+                  </a:ext>
+                </a:extLst>
+              </a:tr>
+              <a:tr h="234000">
+                <a:tc>
+                  <a:txBody>
+                    <a:bodyPr/>
+                    <a:lstStyle/>
+                    <a:p>
+                      <a:pPr>
+                        <a:buNone/>
+                      </a:pPr>
+                      <a:r>
+                        <a:rPr lang="en" sz="1000" dirty="0"/>
+                        <a:t>@</a:t>
+                      </a:r>
+                      <a:r>
+                        <a:rPr lang="en" sz="1000" dirty="0" err="1"/>
+                        <a:t>nestjs</a:t>
+                      </a:r>
+                      <a:r>
+                        <a:rPr lang="en" sz="1000" dirty="0"/>
+                        <a:t>/mapped-types</a:t>
+                      </a:r>
+                    </a:p>
+                  </a:txBody>
+                  <a:tcPr marL="45720" marR="45720" anchor="ctr"/>
+                </a:tc>
+                <a:tc>
+                  <a:txBody>
+                    <a:bodyPr/>
+                    <a:lstStyle/>
+                    <a:p>
+                      <a:pPr>
+                        <a:buNone/>
+                      </a:pPr>
+                      <a:r>
+                        <a:rPr lang="en-US" altLang="zh-TW" sz="1000" dirty="0"/>
+                        <a:t>2.1.0</a:t>
+                      </a:r>
+                      <a:endParaRPr lang="zh-TW" altLang="en-US" sz="1000" dirty="0"/>
+                    </a:p>
+                  </a:txBody>
+                  <a:tcPr marL="45720" marR="45720" anchor="ctr"/>
+                </a:tc>
+                <a:tc>
+                  <a:txBody>
+                    <a:bodyPr/>
+                    <a:lstStyle/>
+                    <a:p>
+                      <a:pPr>
+                        <a:buNone/>
+                      </a:pPr>
+                      <a:r>
+                        <a:rPr lang="en" sz="1000" dirty="0"/>
+                        <a:t>MIT</a:t>
+                      </a:r>
+                    </a:p>
+                  </a:txBody>
+                  <a:tcPr marL="45720" marR="45720" anchor="ctr"/>
+                </a:tc>
+                <a:extLst>
+                  <a:ext uri="{0D108BD9-81ED-4DB2-BD59-A6C34878D82A}">
+                    <a16:rowId xmlns:a16="http://schemas.microsoft.com/office/drawing/2014/main" val="999857377"/>
+                  </a:ext>
+                </a:extLst>
+              </a:tr>
+              <a:tr h="234000">
+                <a:tc>
+                  <a:txBody>
+                    <a:bodyPr/>
+                    <a:lstStyle/>
+                    <a:p>
+                      <a:pPr>
+                        <a:buNone/>
+                      </a:pPr>
+                      <a:r>
+                        <a:rPr lang="en" sz="1000" dirty="0"/>
+                        <a:t>@</a:t>
+                      </a:r>
+                      <a:r>
+                        <a:rPr lang="en" sz="1000" dirty="0" err="1"/>
+                        <a:t>nestjs</a:t>
+                      </a:r>
+                      <a:r>
+                        <a:rPr lang="en" sz="1000" dirty="0"/>
+                        <a:t>/mongoose</a:t>
+                      </a:r>
+                    </a:p>
+                  </a:txBody>
+                  <a:tcPr marL="45720" marR="45720" anchor="ctr"/>
+                </a:tc>
+                <a:tc>
+                  <a:txBody>
+                    <a:bodyPr/>
+                    <a:lstStyle/>
+                    <a:p>
+                      <a:pPr>
+                        <a:buNone/>
+                      </a:pPr>
+                      <a:r>
+                        <a:rPr lang="en-US" altLang="zh-TW" sz="1000" dirty="0"/>
+                        <a:t>11.0.3</a:t>
+                      </a:r>
+                      <a:endParaRPr lang="zh-TW" altLang="en-US" sz="1000" dirty="0"/>
+                    </a:p>
+                  </a:txBody>
+                  <a:tcPr marL="45720" marR="45720" anchor="ctr"/>
+                </a:tc>
+                <a:tc>
+                  <a:txBody>
+                    <a:bodyPr/>
+                    <a:lstStyle/>
+                    <a:p>
+                      <a:pPr>
+                        <a:buNone/>
+                      </a:pPr>
+                      <a:r>
+                        <a:rPr lang="en" sz="1000" dirty="0"/>
+                        <a:t>MIT</a:t>
+                      </a:r>
+                    </a:p>
+                  </a:txBody>
+                  <a:tcPr marL="45720" marR="45720" anchor="ctr"/>
+                </a:tc>
+                <a:extLst>
+                  <a:ext uri="{0D108BD9-81ED-4DB2-BD59-A6C34878D82A}">
+                    <a16:rowId xmlns:a16="http://schemas.microsoft.com/office/drawing/2014/main" val="2772953980"/>
+                  </a:ext>
+                </a:extLst>
+              </a:tr>
+              <a:tr h="234000">
+                <a:tc>
+                  <a:txBody>
+                    <a:bodyPr/>
+                    <a:lstStyle/>
+                    <a:p>
+                      <a:pPr>
+                        <a:buNone/>
+                      </a:pPr>
+                      <a:r>
+                        <a:rPr lang="en" sz="1000" dirty="0"/>
+                        <a:t>@</a:t>
+                      </a:r>
+                      <a:r>
+                        <a:rPr lang="en" sz="1000" dirty="0" err="1"/>
+                        <a:t>nestjs</a:t>
+                      </a:r>
+                      <a:r>
+                        <a:rPr lang="en" sz="1000" dirty="0"/>
+                        <a:t>/passport</a:t>
+                      </a:r>
+                    </a:p>
+                  </a:txBody>
+                  <a:tcPr marL="45720" marR="45720" anchor="ctr"/>
+                </a:tc>
+                <a:tc>
+                  <a:txBody>
+                    <a:bodyPr/>
+                    <a:lstStyle/>
+                    <a:p>
+                      <a:pPr>
+                        <a:buNone/>
+                      </a:pPr>
+                      <a:r>
+                        <a:rPr lang="en-US" altLang="zh-TW" sz="1000" dirty="0"/>
+                        <a:t>11.0.5</a:t>
+                      </a:r>
+                      <a:endParaRPr lang="zh-TW" altLang="en-US" sz="1000" dirty="0"/>
+                    </a:p>
+                  </a:txBody>
+                  <a:tcPr marL="45720" marR="45720" anchor="ctr"/>
+                </a:tc>
+                <a:tc>
+                  <a:txBody>
+                    <a:bodyPr/>
+                    <a:lstStyle/>
+                    <a:p>
+                      <a:pPr>
+                        <a:buNone/>
+                      </a:pPr>
+                      <a:r>
+                        <a:rPr lang="en" sz="1000" dirty="0"/>
+                        <a:t>MIT</a:t>
+                      </a:r>
+                    </a:p>
+                  </a:txBody>
+                  <a:tcPr marL="45720" marR="45720" anchor="ctr"/>
+                </a:tc>
+                <a:extLst>
+                  <a:ext uri="{0D108BD9-81ED-4DB2-BD59-A6C34878D82A}">
+                    <a16:rowId xmlns:a16="http://schemas.microsoft.com/office/drawing/2014/main" val="3844704028"/>
+                  </a:ext>
+                </a:extLst>
+              </a:tr>
+              <a:tr h="234000">
+                <a:tc>
+                  <a:txBody>
+                    <a:bodyPr/>
+                    <a:lstStyle/>
+                    <a:p>
+                      <a:pPr>
+                        <a:buNone/>
+                      </a:pPr>
+                      <a:r>
+                        <a:rPr lang="en" sz="1000" dirty="0"/>
+                        <a:t>@</a:t>
+                      </a:r>
+                      <a:r>
+                        <a:rPr lang="en" sz="1000" dirty="0" err="1"/>
+                        <a:t>nestjs</a:t>
+                      </a:r>
+                      <a:r>
+                        <a:rPr lang="en" sz="1000" dirty="0"/>
+                        <a:t>/platform-express</a:t>
+                      </a:r>
+                    </a:p>
+                  </a:txBody>
+                  <a:tcPr marL="45720" marR="45720" anchor="ctr"/>
+                </a:tc>
+                <a:tc>
+                  <a:txBody>
+                    <a:bodyPr/>
+                    <a:lstStyle/>
+                    <a:p>
+                      <a:pPr>
+                        <a:buNone/>
+                      </a:pPr>
+                      <a:r>
+                        <a:rPr lang="en-US" altLang="zh-TW" sz="1000" dirty="0"/>
+                        <a:t>11.1.6</a:t>
+                      </a:r>
+                      <a:endParaRPr lang="zh-TW" altLang="en-US" sz="1000" dirty="0"/>
+                    </a:p>
+                  </a:txBody>
+                  <a:tcPr marL="45720" marR="45720" anchor="ctr"/>
+                </a:tc>
+                <a:tc>
+                  <a:txBody>
+                    <a:bodyPr/>
+                    <a:lstStyle/>
+                    <a:p>
+                      <a:pPr>
+                        <a:buNone/>
+                      </a:pPr>
+                      <a:r>
+                        <a:rPr lang="en" sz="1000" dirty="0"/>
+                        <a:t>MIT</a:t>
+                      </a:r>
+                    </a:p>
+                  </a:txBody>
+                  <a:tcPr marL="45720" marR="45720" anchor="ctr"/>
+                </a:tc>
+                <a:extLst>
+                  <a:ext uri="{0D108BD9-81ED-4DB2-BD59-A6C34878D82A}">
+                    <a16:rowId xmlns:a16="http://schemas.microsoft.com/office/drawing/2014/main" val="1098502452"/>
+                  </a:ext>
+                </a:extLst>
+              </a:tr>
+              <a:tr h="234000">
+                <a:tc>
+                  <a:txBody>
+                    <a:bodyPr/>
+                    <a:lstStyle/>
+                    <a:p>
+                      <a:pPr>
+                        <a:buNone/>
+                      </a:pPr>
+                      <a:r>
+                        <a:rPr lang="en" sz="1000" dirty="0"/>
+                        <a:t>@</a:t>
+                      </a:r>
+                      <a:r>
+                        <a:rPr lang="en" sz="1000" dirty="0" err="1"/>
+                        <a:t>nestjs</a:t>
+                      </a:r>
+                      <a:r>
+                        <a:rPr lang="en" sz="1000" dirty="0"/>
+                        <a:t>/schedule</a:t>
+                      </a:r>
+                    </a:p>
+                  </a:txBody>
+                  <a:tcPr marL="45720" marR="45720" anchor="ctr"/>
+                </a:tc>
+                <a:tc>
+                  <a:txBody>
+                    <a:bodyPr/>
+                    <a:lstStyle/>
+                    <a:p>
+                      <a:pPr>
+                        <a:buNone/>
+                      </a:pPr>
+                      <a:r>
+                        <a:rPr lang="en-US" altLang="zh-TW" sz="1000" dirty="0"/>
+                        <a:t>6.0.0</a:t>
+                      </a:r>
+                      <a:endParaRPr lang="zh-TW" altLang="en-US" sz="1000" dirty="0"/>
+                    </a:p>
+                  </a:txBody>
+                  <a:tcPr marL="45720" marR="45720" anchor="ctr"/>
+                </a:tc>
+                <a:tc>
+                  <a:txBody>
+                    <a:bodyPr/>
+                    <a:lstStyle/>
+                    <a:p>
+                      <a:pPr>
+                        <a:buNone/>
+                      </a:pPr>
+                      <a:r>
+                        <a:rPr lang="en" sz="1000" dirty="0"/>
+                        <a:t>MIT</a:t>
+                      </a:r>
+                    </a:p>
+                  </a:txBody>
+                  <a:tcPr marL="45720" marR="45720" anchor="ctr"/>
+                </a:tc>
+                <a:extLst>
+                  <a:ext uri="{0D108BD9-81ED-4DB2-BD59-A6C34878D82A}">
+                    <a16:rowId xmlns:a16="http://schemas.microsoft.com/office/drawing/2014/main" val="1057582456"/>
+                  </a:ext>
+                </a:extLst>
+              </a:tr>
+              <a:tr h="234000">
+                <a:tc>
+                  <a:txBody>
+                    <a:bodyPr/>
+                    <a:lstStyle/>
+                    <a:p>
+                      <a:pPr>
+                        <a:buNone/>
+                      </a:pPr>
+                      <a:r>
+                        <a:rPr lang="en" sz="1000" dirty="0"/>
+                        <a:t>@</a:t>
+                      </a:r>
+                      <a:r>
+                        <a:rPr lang="en" sz="1000" dirty="0" err="1"/>
+                        <a:t>nestjs</a:t>
+                      </a:r>
+                      <a:r>
+                        <a:rPr lang="en" sz="1000" dirty="0"/>
+                        <a:t>/serve-static</a:t>
+                      </a:r>
+                    </a:p>
+                  </a:txBody>
+                  <a:tcPr marL="45720" marR="45720" anchor="ctr"/>
+                </a:tc>
+                <a:tc>
+                  <a:txBody>
+                    <a:bodyPr/>
+                    <a:lstStyle/>
+                    <a:p>
+                      <a:pPr>
+                        <a:buNone/>
+                      </a:pPr>
+                      <a:r>
+                        <a:rPr lang="en-US" altLang="zh-TW" sz="1000" dirty="0"/>
+                        <a:t>5.0.3</a:t>
+                      </a:r>
+                      <a:endParaRPr lang="zh-TW" altLang="en-US" sz="1000" dirty="0"/>
+                    </a:p>
+                  </a:txBody>
+                  <a:tcPr marL="45720" marR="45720" anchor="ctr"/>
+                </a:tc>
+                <a:tc>
+                  <a:txBody>
+                    <a:bodyPr/>
+                    <a:lstStyle/>
+                    <a:p>
+                      <a:pPr>
+                        <a:buNone/>
+                      </a:pPr>
+                      <a:r>
+                        <a:rPr lang="en" sz="1000" dirty="0"/>
+                        <a:t>MIT</a:t>
+                      </a:r>
+                    </a:p>
+                  </a:txBody>
+                  <a:tcPr marL="45720" marR="45720" anchor="ctr"/>
+                </a:tc>
+                <a:extLst>
+                  <a:ext uri="{0D108BD9-81ED-4DB2-BD59-A6C34878D82A}">
+                    <a16:rowId xmlns:a16="http://schemas.microsoft.com/office/drawing/2014/main" val="2242371836"/>
+                  </a:ext>
+                </a:extLst>
+              </a:tr>
+              <a:tr h="234000">
+                <a:tc>
+                  <a:txBody>
+                    <a:bodyPr/>
+                    <a:lstStyle/>
+                    <a:p>
+                      <a:pPr>
+                        <a:buNone/>
+                      </a:pPr>
+                      <a:r>
+                        <a:rPr lang="en" sz="1000" dirty="0"/>
+                        <a:t>@</a:t>
+                      </a:r>
+                      <a:r>
+                        <a:rPr lang="en" sz="1000" dirty="0" err="1"/>
+                        <a:t>nestjs</a:t>
+                      </a:r>
+                      <a:r>
+                        <a:rPr lang="en" sz="1000" dirty="0"/>
+                        <a:t>/swagger</a:t>
+                      </a:r>
+                    </a:p>
+                  </a:txBody>
+                  <a:tcPr marL="45720" marR="45720" anchor="ctr"/>
+                </a:tc>
+                <a:tc>
+                  <a:txBody>
+                    <a:bodyPr/>
+                    <a:lstStyle/>
+                    <a:p>
+                      <a:pPr>
+                        <a:buNone/>
+                      </a:pPr>
+                      <a:r>
+                        <a:rPr lang="en-US" altLang="zh-TW" sz="1000" dirty="0"/>
+                        <a:t>11.2.0</a:t>
+                      </a:r>
+                      <a:endParaRPr lang="zh-TW" altLang="en-US" sz="1000" dirty="0"/>
+                    </a:p>
+                  </a:txBody>
+                  <a:tcPr marL="45720" marR="45720" anchor="ctr"/>
+                </a:tc>
+                <a:tc>
+                  <a:txBody>
+                    <a:bodyPr/>
+                    <a:lstStyle/>
+                    <a:p>
+                      <a:pPr>
+                        <a:buNone/>
+                      </a:pPr>
+                      <a:r>
+                        <a:rPr lang="en" sz="1000" dirty="0"/>
+                        <a:t>MIT</a:t>
+                      </a:r>
+                    </a:p>
+                  </a:txBody>
+                  <a:tcPr marL="45720" marR="45720" anchor="ctr"/>
+                </a:tc>
+                <a:extLst>
+                  <a:ext uri="{0D108BD9-81ED-4DB2-BD59-A6C34878D82A}">
+                    <a16:rowId xmlns:a16="http://schemas.microsoft.com/office/drawing/2014/main" val="3015574081"/>
+                  </a:ext>
+                </a:extLst>
+              </a:tr>
+              <a:tr h="234000">
+                <a:tc>
+                  <a:txBody>
+                    <a:bodyPr/>
+                    <a:lstStyle/>
+                    <a:p>
+                      <a:pPr>
+                        <a:buNone/>
+                      </a:pPr>
+                      <a:r>
+                        <a:rPr lang="en" sz="1000" dirty="0"/>
+                        <a:t>@</a:t>
+                      </a:r>
+                      <a:r>
+                        <a:rPr lang="en" sz="1000" dirty="0" err="1"/>
+                        <a:t>nestjs</a:t>
+                      </a:r>
+                      <a:r>
+                        <a:rPr lang="en" sz="1000" dirty="0"/>
+                        <a:t>/terminus</a:t>
+                      </a:r>
+                    </a:p>
+                  </a:txBody>
+                  <a:tcPr marL="45720" marR="45720" anchor="ctr"/>
+                </a:tc>
+                <a:tc>
+                  <a:txBody>
+                    <a:bodyPr/>
+                    <a:lstStyle/>
+                    <a:p>
+                      <a:pPr>
+                        <a:buNone/>
+                      </a:pPr>
+                      <a:r>
+                        <a:rPr lang="en-US" altLang="zh-TW" sz="1000" dirty="0"/>
+                        <a:t>11.1.1</a:t>
+                      </a:r>
+                      <a:endParaRPr lang="zh-TW" altLang="en-US" sz="1000" dirty="0"/>
+                    </a:p>
+                  </a:txBody>
+                  <a:tcPr marL="45720" marR="45720" anchor="ctr"/>
+                </a:tc>
+                <a:tc>
+                  <a:txBody>
+                    <a:bodyPr/>
+                    <a:lstStyle/>
+                    <a:p>
+                      <a:pPr>
+                        <a:buNone/>
+                      </a:pPr>
+                      <a:r>
+                        <a:rPr lang="en" sz="1000" dirty="0"/>
+                        <a:t>MIT</a:t>
+                      </a:r>
+                    </a:p>
+                  </a:txBody>
+                  <a:tcPr marL="45720" marR="45720" anchor="ctr"/>
+                </a:tc>
+                <a:extLst>
+                  <a:ext uri="{0D108BD9-81ED-4DB2-BD59-A6C34878D82A}">
+                    <a16:rowId xmlns:a16="http://schemas.microsoft.com/office/drawing/2014/main" val="2907583359"/>
+                  </a:ext>
+                </a:extLst>
+              </a:tr>
+            </a:tbl>
+          </a:graphicData>
+        </a:graphic>
+      </p:graphicFrame>
+      <p:graphicFrame>
+        <p:nvGraphicFramePr>
+          <p:cNvPr id="14" name="表格 13">
+            <a:extLst>
+              <a:ext uri="{FF2B5EF4-FFF2-40B4-BE49-F238E27FC236}">
+                <a16:creationId xmlns:a16="http://schemas.microsoft.com/office/drawing/2014/main" id="{19460D69-416B-C50E-9A01-5B55EC14C1D1}"/>
+              </a:ext>
+            </a:extLst>
+          </p:cNvPr>
+          <p:cNvGraphicFramePr>
+            <a:graphicFrameLocks noGrp="1"/>
+          </p:cNvGraphicFramePr>
+          <p:nvPr>
+            <p:extLst>
+              <p:ext uri="{D42A27DB-BD31-4B8C-83A1-F6EECF244321}">
+                <p14:modId xmlns:p14="http://schemas.microsoft.com/office/powerpoint/2010/main" val="2050093963"/>
+              </p:ext>
+            </p:extLst>
+          </p:nvPr>
+        </p:nvGraphicFramePr>
+        <p:xfrm>
+          <a:off x="8173326" y="1187302"/>
+          <a:ext cx="2800853" cy="3657600"/>
+        </p:xfrm>
+        <a:graphic>
+          <a:graphicData uri="http://schemas.openxmlformats.org/drawingml/2006/table">
+            <a:tbl>
+              <a:tblPr>
+                <a:tableStyleId>{91DB7C30-2B5D-4D34-8F22-85940E495A18}</a:tableStyleId>
+              </a:tblPr>
+              <a:tblGrid>
+                <a:gridCol w="1144853">
+                  <a:extLst>
+                    <a:ext uri="{9D8B030D-6E8A-4147-A177-3AD203B41FA5}">
+                      <a16:colId xmlns:a16="http://schemas.microsoft.com/office/drawing/2014/main" val="1751360819"/>
+                    </a:ext>
+                  </a:extLst>
+                </a:gridCol>
+                <a:gridCol w="720000">
+                  <a:extLst>
+                    <a:ext uri="{9D8B030D-6E8A-4147-A177-3AD203B41FA5}">
+                      <a16:colId xmlns:a16="http://schemas.microsoft.com/office/drawing/2014/main" val="1301956888"/>
+                    </a:ext>
+                  </a:extLst>
+                </a:gridCol>
+                <a:gridCol w="936000">
+                  <a:extLst>
+                    <a:ext uri="{9D8B030D-6E8A-4147-A177-3AD203B41FA5}">
+                      <a16:colId xmlns:a16="http://schemas.microsoft.com/office/drawing/2014/main" val="3705334990"/>
+                    </a:ext>
+                  </a:extLst>
+                </a:gridCol>
+              </a:tblGrid>
+              <a:tr h="234000">
+                <a:tc>
+                  <a:txBody>
+                    <a:bodyPr/>
+                    <a:lstStyle/>
+                    <a:p>
+                      <a:pPr>
+                        <a:buNone/>
+                      </a:pPr>
+                      <a:r>
+                        <a:rPr lang="zh-TW" altLang="en-US" sz="1000" dirty="0"/>
+                        <a:t>名稱</a:t>
+                      </a:r>
+                    </a:p>
+                  </a:txBody>
+                  <a:tcPr marL="45720" marR="45720" anchor="ctr"/>
+                </a:tc>
+                <a:tc>
+                  <a:txBody>
+                    <a:bodyPr/>
+                    <a:lstStyle/>
+                    <a:p>
+                      <a:pPr>
+                        <a:buNone/>
+                      </a:pPr>
+                      <a:r>
+                        <a:rPr lang="zh-TW" altLang="en-US" sz="1000" dirty="0"/>
+                        <a:t>版本號</a:t>
+                      </a:r>
+                    </a:p>
+                  </a:txBody>
+                  <a:tcPr marL="45720" marR="45720" anchor="ctr"/>
+                </a:tc>
+                <a:tc>
+                  <a:txBody>
+                    <a:bodyPr/>
+                    <a:lstStyle/>
+                    <a:p>
+                      <a:pPr>
+                        <a:buNone/>
+                      </a:pPr>
+                      <a:r>
+                        <a:rPr lang="zh-TW" altLang="en-US" sz="1000" dirty="0"/>
+                        <a:t>許可證</a:t>
+                      </a:r>
+                    </a:p>
+                  </a:txBody>
+                  <a:tcPr marL="45720" marR="45720" anchor="ctr"/>
+                </a:tc>
+                <a:extLst>
+                  <a:ext uri="{0D108BD9-81ED-4DB2-BD59-A6C34878D82A}">
+                    <a16:rowId xmlns:a16="http://schemas.microsoft.com/office/drawing/2014/main" val="493957840"/>
+                  </a:ext>
+                </a:extLst>
+              </a:tr>
+              <a:tr h="234000">
+                <a:tc>
+                  <a:txBody>
+                    <a:bodyPr/>
+                    <a:lstStyle/>
+                    <a:p>
+                      <a:pPr>
+                        <a:buNone/>
+                      </a:pPr>
+                      <a:r>
+                        <a:rPr lang="en" sz="1000" dirty="0" err="1"/>
+                        <a:t>ajv</a:t>
+                      </a:r>
+                      <a:endParaRPr lang="en" sz="1000" dirty="0"/>
+                    </a:p>
+                  </a:txBody>
+                  <a:tcPr marL="45720" marR="45720" anchor="ctr"/>
+                </a:tc>
+                <a:tc>
+                  <a:txBody>
+                    <a:bodyPr/>
+                    <a:lstStyle/>
+                    <a:p>
+                      <a:pPr>
+                        <a:buNone/>
+                      </a:pPr>
+                      <a:r>
+                        <a:rPr lang="en-US" altLang="zh-TW" sz="1000" dirty="0"/>
+                        <a:t>8.18.0</a:t>
+                      </a:r>
+                      <a:endParaRPr lang="zh-TW" altLang="en-US" sz="1000" dirty="0"/>
+                    </a:p>
+                  </a:txBody>
+                  <a:tcPr marL="45720" marR="45720" anchor="ctr"/>
+                </a:tc>
+                <a:tc>
+                  <a:txBody>
+                    <a:bodyPr/>
+                    <a:lstStyle/>
+                    <a:p>
+                      <a:pPr>
+                        <a:buNone/>
+                      </a:pPr>
+                      <a:r>
+                        <a:rPr lang="en" sz="1000" dirty="0"/>
+                        <a:t>MIT</a:t>
+                      </a:r>
+                    </a:p>
+                  </a:txBody>
+                  <a:tcPr marL="45720" marR="45720" anchor="ctr"/>
+                </a:tc>
+                <a:extLst>
+                  <a:ext uri="{0D108BD9-81ED-4DB2-BD59-A6C34878D82A}">
+                    <a16:rowId xmlns:a16="http://schemas.microsoft.com/office/drawing/2014/main" val="3013935731"/>
+                  </a:ext>
+                </a:extLst>
+              </a:tr>
+              <a:tr h="234000">
+                <a:tc>
+                  <a:txBody>
+                    <a:bodyPr/>
+                    <a:lstStyle/>
+                    <a:p>
+                      <a:pPr>
+                        <a:buNone/>
+                      </a:pPr>
+                      <a:r>
+                        <a:rPr lang="en" sz="1000" dirty="0" err="1"/>
+                        <a:t>ajv</a:t>
+                      </a:r>
+                      <a:r>
+                        <a:rPr lang="en" sz="1000" dirty="0"/>
+                        <a:t>-formats</a:t>
+                      </a:r>
+                    </a:p>
+                  </a:txBody>
+                  <a:tcPr marL="45720" marR="45720" anchor="ctr"/>
+                </a:tc>
+                <a:tc>
+                  <a:txBody>
+                    <a:bodyPr/>
+                    <a:lstStyle/>
+                    <a:p>
+                      <a:pPr>
+                        <a:buNone/>
+                      </a:pPr>
+                      <a:r>
+                        <a:rPr lang="en-US" altLang="zh-TW" sz="1000" dirty="0"/>
+                        <a:t>3.0.1</a:t>
+                      </a:r>
+                      <a:endParaRPr lang="zh-TW" altLang="en-US" sz="1000" dirty="0"/>
+                    </a:p>
+                  </a:txBody>
+                  <a:tcPr marL="45720" marR="45720" anchor="ctr"/>
+                </a:tc>
+                <a:tc>
+                  <a:txBody>
+                    <a:bodyPr/>
+                    <a:lstStyle/>
+                    <a:p>
+                      <a:pPr>
+                        <a:buNone/>
+                      </a:pPr>
+                      <a:r>
+                        <a:rPr lang="en" sz="1000" dirty="0"/>
+                        <a:t>MIT</a:t>
+                      </a:r>
+                    </a:p>
+                  </a:txBody>
+                  <a:tcPr marL="45720" marR="45720" anchor="ctr"/>
+                </a:tc>
+                <a:extLst>
+                  <a:ext uri="{0D108BD9-81ED-4DB2-BD59-A6C34878D82A}">
+                    <a16:rowId xmlns:a16="http://schemas.microsoft.com/office/drawing/2014/main" val="1744604350"/>
+                  </a:ext>
+                </a:extLst>
+              </a:tr>
+              <a:tr h="234000">
+                <a:tc>
+                  <a:txBody>
+                    <a:bodyPr/>
+                    <a:lstStyle/>
+                    <a:p>
+                      <a:pPr>
+                        <a:buNone/>
+                      </a:pPr>
+                      <a:r>
+                        <a:rPr lang="en" sz="1000" dirty="0" err="1"/>
+                        <a:t>bcrypt</a:t>
+                      </a:r>
+                      <a:endParaRPr lang="en" sz="1000" dirty="0"/>
+                    </a:p>
+                  </a:txBody>
+                  <a:tcPr marL="45720" marR="45720" anchor="ctr"/>
+                </a:tc>
+                <a:tc>
+                  <a:txBody>
+                    <a:bodyPr/>
+                    <a:lstStyle/>
+                    <a:p>
+                      <a:pPr>
+                        <a:buNone/>
+                      </a:pPr>
+                      <a:r>
+                        <a:rPr lang="en-US" altLang="zh-TW" sz="1000" dirty="0"/>
+                        <a:t>6.0.0</a:t>
+                      </a:r>
+                      <a:endParaRPr lang="zh-TW" altLang="en-US" sz="1000" dirty="0"/>
+                    </a:p>
+                  </a:txBody>
+                  <a:tcPr marL="45720" marR="45720" anchor="ctr"/>
+                </a:tc>
+                <a:tc>
+                  <a:txBody>
+                    <a:bodyPr/>
+                    <a:lstStyle/>
+                    <a:p>
+                      <a:pPr>
+                        <a:buNone/>
+                      </a:pPr>
+                      <a:r>
+                        <a:rPr lang="en" sz="1000" dirty="0"/>
+                        <a:t>MIT</a:t>
+                      </a:r>
+                    </a:p>
+                  </a:txBody>
+                  <a:tcPr marL="45720" marR="45720" anchor="ctr"/>
+                </a:tc>
+                <a:extLst>
+                  <a:ext uri="{0D108BD9-81ED-4DB2-BD59-A6C34878D82A}">
+                    <a16:rowId xmlns:a16="http://schemas.microsoft.com/office/drawing/2014/main" val="2987741664"/>
+                  </a:ext>
+                </a:extLst>
+              </a:tr>
+              <a:tr h="234000">
+                <a:tc>
+                  <a:txBody>
+                    <a:bodyPr/>
+                    <a:lstStyle/>
+                    <a:p>
+                      <a:pPr>
+                        <a:buNone/>
+                      </a:pPr>
+                      <a:r>
+                        <a:rPr lang="en" sz="1000" dirty="0" err="1"/>
+                        <a:t>bullmq</a:t>
+                      </a:r>
+                      <a:endParaRPr lang="en" sz="1000" dirty="0"/>
+                    </a:p>
+                  </a:txBody>
+                  <a:tcPr marL="45720" marR="45720" anchor="ctr"/>
+                </a:tc>
+                <a:tc>
+                  <a:txBody>
+                    <a:bodyPr/>
+                    <a:lstStyle/>
+                    <a:p>
+                      <a:pPr>
+                        <a:buNone/>
+                      </a:pPr>
+                      <a:r>
+                        <a:rPr lang="en-US" altLang="zh-TW" sz="1000" dirty="0"/>
+                        <a:t>5.58.5</a:t>
+                      </a:r>
+                      <a:endParaRPr lang="zh-TW" altLang="en-US" sz="1000" dirty="0"/>
+                    </a:p>
+                  </a:txBody>
+                  <a:tcPr marL="45720" marR="45720" anchor="ctr"/>
+                </a:tc>
+                <a:tc>
+                  <a:txBody>
+                    <a:bodyPr/>
+                    <a:lstStyle/>
+                    <a:p>
+                      <a:pPr>
+                        <a:buNone/>
+                      </a:pPr>
+                      <a:r>
+                        <a:rPr lang="en" sz="1000" dirty="0"/>
+                        <a:t>MIT</a:t>
+                      </a:r>
+                    </a:p>
+                  </a:txBody>
+                  <a:tcPr marL="45720" marR="45720" anchor="ctr"/>
+                </a:tc>
+                <a:extLst>
+                  <a:ext uri="{0D108BD9-81ED-4DB2-BD59-A6C34878D82A}">
+                    <a16:rowId xmlns:a16="http://schemas.microsoft.com/office/drawing/2014/main" val="3947758140"/>
+                  </a:ext>
+                </a:extLst>
+              </a:tr>
+              <a:tr h="234000">
+                <a:tc>
+                  <a:txBody>
+                    <a:bodyPr/>
+                    <a:lstStyle/>
+                    <a:p>
+                      <a:pPr>
+                        <a:buNone/>
+                      </a:pPr>
+                      <a:r>
+                        <a:rPr lang="en" sz="1000" dirty="0"/>
+                        <a:t>class-transformer</a:t>
+                      </a:r>
+                    </a:p>
+                  </a:txBody>
+                  <a:tcPr marL="45720" marR="45720" anchor="ctr"/>
+                </a:tc>
+                <a:tc>
+                  <a:txBody>
+                    <a:bodyPr/>
+                    <a:lstStyle/>
+                    <a:p>
+                      <a:pPr>
+                        <a:buNone/>
+                      </a:pPr>
+                      <a:r>
+                        <a:rPr lang="en-US" altLang="zh-TW" sz="1000" dirty="0"/>
+                        <a:t>0.5.1</a:t>
+                      </a:r>
+                      <a:endParaRPr lang="zh-TW" altLang="en-US" sz="1000" dirty="0"/>
+                    </a:p>
+                  </a:txBody>
+                  <a:tcPr marL="45720" marR="45720" anchor="ctr"/>
+                </a:tc>
+                <a:tc>
+                  <a:txBody>
+                    <a:bodyPr/>
+                    <a:lstStyle/>
+                    <a:p>
+                      <a:pPr>
+                        <a:buNone/>
+                      </a:pPr>
+                      <a:r>
+                        <a:rPr lang="en" sz="1000" dirty="0"/>
+                        <a:t>MIT</a:t>
+                      </a:r>
+                    </a:p>
+                  </a:txBody>
+                  <a:tcPr marL="45720" marR="45720" anchor="ctr"/>
+                </a:tc>
+                <a:extLst>
+                  <a:ext uri="{0D108BD9-81ED-4DB2-BD59-A6C34878D82A}">
+                    <a16:rowId xmlns:a16="http://schemas.microsoft.com/office/drawing/2014/main" val="1261471314"/>
+                  </a:ext>
+                </a:extLst>
+              </a:tr>
+              <a:tr h="234000">
+                <a:tc>
+                  <a:txBody>
+                    <a:bodyPr/>
+                    <a:lstStyle/>
+                    <a:p>
+                      <a:pPr>
+                        <a:buNone/>
+                      </a:pPr>
+                      <a:r>
+                        <a:rPr lang="en" sz="1000" dirty="0"/>
+                        <a:t>class-validator</a:t>
+                      </a:r>
+                    </a:p>
+                  </a:txBody>
+                  <a:tcPr marL="45720" marR="45720" anchor="ctr"/>
+                </a:tc>
+                <a:tc>
+                  <a:txBody>
+                    <a:bodyPr/>
+                    <a:lstStyle/>
+                    <a:p>
+                      <a:pPr>
+                        <a:buNone/>
+                      </a:pPr>
+                      <a:r>
+                        <a:rPr lang="en-US" altLang="zh-TW" sz="1000" dirty="0"/>
+                        <a:t>0.14.2</a:t>
+                      </a:r>
+                      <a:endParaRPr lang="zh-TW" altLang="en-US" sz="1000" dirty="0"/>
+                    </a:p>
+                  </a:txBody>
+                  <a:tcPr marL="45720" marR="45720" anchor="ctr"/>
+                </a:tc>
+                <a:tc>
+                  <a:txBody>
+                    <a:bodyPr/>
+                    <a:lstStyle/>
+                    <a:p>
+                      <a:pPr>
+                        <a:buNone/>
+                      </a:pPr>
+                      <a:r>
+                        <a:rPr lang="en" sz="1000" dirty="0"/>
+                        <a:t>MIT</a:t>
+                      </a:r>
+                    </a:p>
+                  </a:txBody>
+                  <a:tcPr marL="45720" marR="45720" anchor="ctr"/>
+                </a:tc>
+                <a:extLst>
+                  <a:ext uri="{0D108BD9-81ED-4DB2-BD59-A6C34878D82A}">
+                    <a16:rowId xmlns:a16="http://schemas.microsoft.com/office/drawing/2014/main" val="3971087823"/>
+                  </a:ext>
+                </a:extLst>
+              </a:tr>
+              <a:tr h="234000">
+                <a:tc>
+                  <a:txBody>
+                    <a:bodyPr/>
+                    <a:lstStyle/>
+                    <a:p>
+                      <a:pPr>
+                        <a:buNone/>
+                      </a:pPr>
+                      <a:r>
+                        <a:rPr lang="en" sz="1000" dirty="0" err="1"/>
+                        <a:t>dotenv</a:t>
+                      </a:r>
+                      <a:endParaRPr lang="en" sz="1000" dirty="0"/>
+                    </a:p>
+                  </a:txBody>
+                  <a:tcPr marL="45720" marR="45720" anchor="ctr"/>
+                </a:tc>
+                <a:tc>
+                  <a:txBody>
+                    <a:bodyPr/>
+                    <a:lstStyle/>
+                    <a:p>
+                      <a:pPr>
+                        <a:buNone/>
+                      </a:pPr>
+                      <a:r>
+                        <a:rPr lang="en-US" altLang="zh-TW" sz="1000" dirty="0"/>
+                        <a:t>17.2.3</a:t>
+                      </a:r>
+                      <a:endParaRPr lang="zh-TW" altLang="en-US" sz="1000" dirty="0"/>
+                    </a:p>
+                  </a:txBody>
+                  <a:tcPr marL="45720" marR="45720" anchor="ctr"/>
+                </a:tc>
+                <a:tc>
+                  <a:txBody>
+                    <a:bodyPr/>
+                    <a:lstStyle/>
+                    <a:p>
+                      <a:pPr>
+                        <a:buNone/>
+                      </a:pPr>
+                      <a:r>
+                        <a:rPr lang="en" sz="1000" dirty="0"/>
+                        <a:t>BSD-2-Clause</a:t>
+                      </a:r>
+                    </a:p>
+                  </a:txBody>
+                  <a:tcPr marL="45720" marR="45720" anchor="ctr"/>
+                </a:tc>
+                <a:extLst>
+                  <a:ext uri="{0D108BD9-81ED-4DB2-BD59-A6C34878D82A}">
+                    <a16:rowId xmlns:a16="http://schemas.microsoft.com/office/drawing/2014/main" val="3075078176"/>
+                  </a:ext>
+                </a:extLst>
+              </a:tr>
+              <a:tr h="234000">
+                <a:tc>
+                  <a:txBody>
+                    <a:bodyPr/>
+                    <a:lstStyle/>
+                    <a:p>
+                      <a:pPr>
+                        <a:buNone/>
+                      </a:pPr>
+                      <a:r>
+                        <a:rPr lang="en" sz="1000" dirty="0"/>
+                        <a:t>express</a:t>
+                      </a:r>
+                    </a:p>
+                  </a:txBody>
+                  <a:tcPr marL="45720" marR="45720" anchor="ctr"/>
+                </a:tc>
+                <a:tc>
+                  <a:txBody>
+                    <a:bodyPr/>
+                    <a:lstStyle/>
+                    <a:p>
+                      <a:pPr>
+                        <a:buNone/>
+                      </a:pPr>
+                      <a:r>
+                        <a:rPr lang="en-US" altLang="zh-TW" sz="1000" dirty="0"/>
+                        <a:t>5.2.1</a:t>
+                      </a:r>
+                      <a:endParaRPr lang="zh-TW" altLang="en-US" sz="1000" dirty="0"/>
+                    </a:p>
+                  </a:txBody>
+                  <a:tcPr marL="45720" marR="45720" anchor="ctr"/>
+                </a:tc>
+                <a:tc>
+                  <a:txBody>
+                    <a:bodyPr/>
+                    <a:lstStyle/>
+                    <a:p>
+                      <a:pPr>
+                        <a:buNone/>
+                      </a:pPr>
+                      <a:r>
+                        <a:rPr lang="en" sz="1000" dirty="0"/>
+                        <a:t>MIT</a:t>
+                      </a:r>
+                    </a:p>
+                  </a:txBody>
+                  <a:tcPr marL="45720" marR="45720" anchor="ctr"/>
+                </a:tc>
+                <a:extLst>
+                  <a:ext uri="{0D108BD9-81ED-4DB2-BD59-A6C34878D82A}">
+                    <a16:rowId xmlns:a16="http://schemas.microsoft.com/office/drawing/2014/main" val="52086228"/>
+                  </a:ext>
+                </a:extLst>
+              </a:tr>
+              <a:tr h="234000">
+                <a:tc>
+                  <a:txBody>
+                    <a:bodyPr/>
+                    <a:lstStyle/>
+                    <a:p>
+                      <a:pPr>
+                        <a:buNone/>
+                      </a:pPr>
+                      <a:r>
+                        <a:rPr lang="en" sz="1000" dirty="0" err="1"/>
+                        <a:t>ioredis</a:t>
+                      </a:r>
+                      <a:endParaRPr lang="en" sz="1000" dirty="0"/>
+                    </a:p>
+                  </a:txBody>
+                  <a:tcPr marL="45720" marR="45720" anchor="ctr"/>
+                </a:tc>
+                <a:tc>
+                  <a:txBody>
+                    <a:bodyPr/>
+                    <a:lstStyle/>
+                    <a:p>
+                      <a:pPr>
+                        <a:buNone/>
+                      </a:pPr>
+                      <a:r>
+                        <a:rPr lang="en-US" altLang="zh-TW" sz="1000" dirty="0"/>
+                        <a:t>5.7.0</a:t>
+                      </a:r>
+                      <a:endParaRPr lang="zh-TW" altLang="en-US" sz="1000" dirty="0"/>
+                    </a:p>
+                  </a:txBody>
+                  <a:tcPr marL="45720" marR="45720" anchor="ctr"/>
+                </a:tc>
+                <a:tc>
+                  <a:txBody>
+                    <a:bodyPr/>
+                    <a:lstStyle/>
+                    <a:p>
+                      <a:pPr>
+                        <a:buNone/>
+                      </a:pPr>
+                      <a:r>
+                        <a:rPr lang="en" sz="1000" dirty="0"/>
+                        <a:t>MIT</a:t>
+                      </a:r>
+                    </a:p>
+                  </a:txBody>
+                  <a:tcPr marL="45720" marR="45720" anchor="ctr"/>
+                </a:tc>
+                <a:extLst>
+                  <a:ext uri="{0D108BD9-81ED-4DB2-BD59-A6C34878D82A}">
+                    <a16:rowId xmlns:a16="http://schemas.microsoft.com/office/drawing/2014/main" val="3471331057"/>
+                  </a:ext>
+                </a:extLst>
+              </a:tr>
+              <a:tr h="234000">
+                <a:tc>
+                  <a:txBody>
+                    <a:bodyPr/>
+                    <a:lstStyle/>
+                    <a:p>
+                      <a:pPr>
+                        <a:buNone/>
+                      </a:pPr>
+                      <a:r>
+                        <a:rPr lang="en" sz="1000" dirty="0"/>
+                        <a:t>mongoose</a:t>
+                      </a:r>
+                    </a:p>
+                  </a:txBody>
+                  <a:tcPr marL="45720" marR="45720" anchor="ctr"/>
+                </a:tc>
+                <a:tc>
+                  <a:txBody>
+                    <a:bodyPr/>
+                    <a:lstStyle/>
+                    <a:p>
+                      <a:pPr>
+                        <a:buNone/>
+                      </a:pPr>
+                      <a:r>
+                        <a:rPr lang="en-US" altLang="zh-TW" sz="1000" dirty="0"/>
+                        <a:t>8.18.1</a:t>
+                      </a:r>
+                      <a:endParaRPr lang="zh-TW" altLang="en-US" sz="1000" dirty="0"/>
+                    </a:p>
+                  </a:txBody>
+                  <a:tcPr marL="45720" marR="45720" anchor="ctr"/>
+                </a:tc>
+                <a:tc>
+                  <a:txBody>
+                    <a:bodyPr/>
+                    <a:lstStyle/>
+                    <a:p>
+                      <a:pPr>
+                        <a:buNone/>
+                      </a:pPr>
+                      <a:r>
+                        <a:rPr lang="en" sz="1000" dirty="0"/>
+                        <a:t>MIT</a:t>
+                      </a:r>
+                    </a:p>
+                  </a:txBody>
+                  <a:tcPr marL="45720" marR="45720" anchor="ctr"/>
+                </a:tc>
+                <a:extLst>
+                  <a:ext uri="{0D108BD9-81ED-4DB2-BD59-A6C34878D82A}">
+                    <a16:rowId xmlns:a16="http://schemas.microsoft.com/office/drawing/2014/main" val="2724013241"/>
+                  </a:ext>
+                </a:extLst>
+              </a:tr>
+              <a:tr h="234000">
+                <a:tc>
+                  <a:txBody>
+                    <a:bodyPr/>
+                    <a:lstStyle/>
+                    <a:p>
+                      <a:pPr>
+                        <a:buNone/>
+                      </a:pPr>
+                      <a:r>
+                        <a:rPr lang="en" sz="1000" dirty="0"/>
+                        <a:t>passport-</a:t>
+                      </a:r>
+                      <a:r>
+                        <a:rPr lang="en" sz="1000" dirty="0" err="1"/>
+                        <a:t>microsoft</a:t>
+                      </a:r>
+                      <a:endParaRPr lang="en" sz="1000" dirty="0"/>
+                    </a:p>
+                  </a:txBody>
+                  <a:tcPr marL="45720" marR="45720" anchor="ctr"/>
+                </a:tc>
+                <a:tc>
+                  <a:txBody>
+                    <a:bodyPr/>
+                    <a:lstStyle/>
+                    <a:p>
+                      <a:pPr>
+                        <a:buNone/>
+                      </a:pPr>
+                      <a:r>
+                        <a:rPr lang="en-US" altLang="zh-TW" sz="1000" dirty="0"/>
+                        <a:t>2.1.0</a:t>
+                      </a:r>
+                      <a:endParaRPr lang="zh-TW" altLang="en-US" sz="1000" dirty="0"/>
+                    </a:p>
+                  </a:txBody>
+                  <a:tcPr marL="45720" marR="45720" anchor="ctr"/>
+                </a:tc>
+                <a:tc>
+                  <a:txBody>
+                    <a:bodyPr/>
+                    <a:lstStyle/>
+                    <a:p>
+                      <a:pPr>
+                        <a:buNone/>
+                      </a:pPr>
+                      <a:r>
+                        <a:rPr lang="en" sz="1000" dirty="0"/>
+                        <a:t>MIT</a:t>
+                      </a:r>
+                    </a:p>
+                  </a:txBody>
+                  <a:tcPr marL="45720" marR="45720" anchor="ctr"/>
+                </a:tc>
+                <a:extLst>
+                  <a:ext uri="{0D108BD9-81ED-4DB2-BD59-A6C34878D82A}">
+                    <a16:rowId xmlns:a16="http://schemas.microsoft.com/office/drawing/2014/main" val="2526565388"/>
+                  </a:ext>
+                </a:extLst>
+              </a:tr>
+              <a:tr h="234000">
+                <a:tc>
+                  <a:txBody>
+                    <a:bodyPr/>
+                    <a:lstStyle/>
+                    <a:p>
+                      <a:pPr>
+                        <a:buNone/>
+                      </a:pPr>
+                      <a:r>
+                        <a:rPr lang="en" sz="1000" dirty="0" err="1"/>
+                        <a:t>rss</a:t>
+                      </a:r>
+                      <a:r>
+                        <a:rPr lang="en" sz="1000" dirty="0"/>
+                        <a:t>-parser</a:t>
+                      </a:r>
+                    </a:p>
+                  </a:txBody>
+                  <a:tcPr marL="45720" marR="45720" anchor="ctr"/>
+                </a:tc>
+                <a:tc>
+                  <a:txBody>
+                    <a:bodyPr/>
+                    <a:lstStyle/>
+                    <a:p>
+                      <a:pPr>
+                        <a:buNone/>
+                      </a:pPr>
+                      <a:r>
+                        <a:rPr lang="en-US" altLang="zh-TW" sz="1000" dirty="0"/>
+                        <a:t>3.13.0</a:t>
+                      </a:r>
+                      <a:endParaRPr lang="zh-TW" altLang="en-US" sz="1000" dirty="0"/>
+                    </a:p>
+                  </a:txBody>
+                  <a:tcPr marL="45720" marR="45720" anchor="ctr"/>
+                </a:tc>
+                <a:tc>
+                  <a:txBody>
+                    <a:bodyPr/>
+                    <a:lstStyle/>
+                    <a:p>
+                      <a:pPr>
+                        <a:buNone/>
+                      </a:pPr>
+                      <a:r>
+                        <a:rPr lang="en" sz="1000" dirty="0"/>
+                        <a:t>MIT</a:t>
+                      </a:r>
+                    </a:p>
+                  </a:txBody>
+                  <a:tcPr marL="45720" marR="45720" anchor="ctr"/>
+                </a:tc>
+                <a:extLst>
+                  <a:ext uri="{0D108BD9-81ED-4DB2-BD59-A6C34878D82A}">
+                    <a16:rowId xmlns:a16="http://schemas.microsoft.com/office/drawing/2014/main" val="1242839389"/>
+                  </a:ext>
+                </a:extLst>
+              </a:tr>
+              <a:tr h="234000">
+                <a:tc>
+                  <a:txBody>
+                    <a:bodyPr/>
+                    <a:lstStyle/>
+                    <a:p>
+                      <a:pPr>
+                        <a:buNone/>
+                      </a:pPr>
+                      <a:r>
+                        <a:rPr lang="en" sz="1000" dirty="0" err="1"/>
+                        <a:t>rxjs</a:t>
+                      </a:r>
+                      <a:endParaRPr lang="en" sz="1000" dirty="0"/>
+                    </a:p>
+                  </a:txBody>
+                  <a:tcPr marL="45720" marR="45720" anchor="ctr"/>
+                </a:tc>
+                <a:tc>
+                  <a:txBody>
+                    <a:bodyPr/>
+                    <a:lstStyle/>
+                    <a:p>
+                      <a:pPr>
+                        <a:buNone/>
+                      </a:pPr>
+                      <a:r>
+                        <a:rPr lang="en-US" altLang="zh-TW" sz="1000" dirty="0"/>
+                        <a:t>7.8.1</a:t>
+                      </a:r>
+                      <a:endParaRPr lang="zh-TW" altLang="en-US" sz="1000" dirty="0"/>
+                    </a:p>
+                  </a:txBody>
+                  <a:tcPr marL="45720" marR="45720" anchor="ctr"/>
+                </a:tc>
+                <a:tc>
+                  <a:txBody>
+                    <a:bodyPr/>
+                    <a:lstStyle/>
+                    <a:p>
+                      <a:pPr>
+                        <a:buNone/>
+                      </a:pPr>
+                      <a:r>
+                        <a:rPr lang="en" sz="1000" dirty="0"/>
+                        <a:t>Apache-2.0</a:t>
+                      </a:r>
+                    </a:p>
+                  </a:txBody>
+                  <a:tcPr marL="45720" marR="45720" anchor="ctr"/>
+                </a:tc>
+                <a:extLst>
+                  <a:ext uri="{0D108BD9-81ED-4DB2-BD59-A6C34878D82A}">
+                    <a16:rowId xmlns:a16="http://schemas.microsoft.com/office/drawing/2014/main" val="1789334872"/>
+                  </a:ext>
+                </a:extLst>
+              </a:tr>
+              <a:tr h="234000">
+                <a:tc>
+                  <a:txBody>
+                    <a:bodyPr/>
+                    <a:lstStyle/>
+                    <a:p>
+                      <a:pPr>
+                        <a:buNone/>
+                      </a:pPr>
+                      <a:r>
+                        <a:rPr lang="en" sz="1000" dirty="0" err="1"/>
+                        <a:t>zod</a:t>
+                      </a:r>
+                      <a:endParaRPr lang="en" sz="1000" dirty="0"/>
+                    </a:p>
+                  </a:txBody>
+                  <a:tcPr marL="45720" marR="45720" anchor="ctr"/>
+                </a:tc>
+                <a:tc>
+                  <a:txBody>
+                    <a:bodyPr/>
+                    <a:lstStyle/>
+                    <a:p>
+                      <a:pPr>
+                        <a:buNone/>
+                      </a:pPr>
+                      <a:r>
+                        <a:rPr lang="en-US" altLang="zh-TW" sz="1000" dirty="0"/>
+                        <a:t>4.3.6</a:t>
+                      </a:r>
+                      <a:endParaRPr lang="zh-TW" altLang="en-US" sz="1000" dirty="0"/>
+                    </a:p>
+                  </a:txBody>
+                  <a:tcPr marL="45720" marR="45720" anchor="ctr"/>
+                </a:tc>
+                <a:tc>
+                  <a:txBody>
+                    <a:bodyPr/>
+                    <a:lstStyle/>
+                    <a:p>
+                      <a:pPr>
+                        <a:buNone/>
+                      </a:pPr>
+                      <a:r>
+                        <a:rPr lang="en" sz="1000" dirty="0"/>
+                        <a:t>MIT</a:t>
+                      </a:r>
+                    </a:p>
+                  </a:txBody>
+                  <a:tcPr marL="45720" marR="45720" anchor="ctr"/>
+                </a:tc>
+                <a:extLst>
+                  <a:ext uri="{0D108BD9-81ED-4DB2-BD59-A6C34878D82A}">
+                    <a16:rowId xmlns:a16="http://schemas.microsoft.com/office/drawing/2014/main" val="295826564"/>
+                  </a:ext>
+                </a:extLst>
+              </a:tr>
+            </a:tbl>
+          </a:graphicData>
+        </a:graphic>
+      </p:graphicFrame>
+    </p:spTree>
+    <p:extLst>
+      <p:ext uri="{BB962C8B-B14F-4D97-AF65-F5344CB8AC3E}">
+        <p14:creationId xmlns:p14="http://schemas.microsoft.com/office/powerpoint/2010/main" val="200946658"/>
+      </p:ext>
+    </p:extLst>
+  </p:cSld>
+  <p:clrMapOvr>
+    <a:masterClrMapping/>
+  </p:clrMapOvr>
+</p:sld>
+</file>
+
+<file path=ppt/slides/slide9.xml><?xml version="1.0" encoding="utf-8"?>
+<p:sld xmlns:a="http://schemas.openxmlformats.org/drawingml/2006/main" xmlns:r="http://schemas.openxmlformats.org/officeDocument/2006/relationships" xmlns:p="http://schemas.openxmlformats.org/presentationml/2006/main">
+  <p:cSld>
+    <p:spTree>
+      <p:nvGrpSpPr>
+        <p:cNvPr id="1" name=""/>
+        <p:cNvGrpSpPr/>
+        <p:nvPr/>
+      </p:nvGrpSpPr>
+      <p:grpSpPr>
+        <a:xfrm>
+          <a:off x="0" y="0"/>
+          <a:ext cx="0" cy="0"/>
+          <a:chOff x="0" y="0"/>
+          <a:chExt cx="0" cy="0"/>
+        </a:xfrm>
+      </p:grpSpPr>
+      <p:graphicFrame>
+        <p:nvGraphicFramePr>
+          <p:cNvPr id="2" name="表格 1">
+            <a:extLst>
+              <a:ext uri="{FF2B5EF4-FFF2-40B4-BE49-F238E27FC236}">
+                <a16:creationId xmlns:a16="http://schemas.microsoft.com/office/drawing/2014/main" id="{C5B7B4DB-FF6E-743F-443E-643AB8056383}"/>
+              </a:ext>
+            </a:extLst>
+          </p:cNvPr>
+          <p:cNvGraphicFramePr>
+            <a:graphicFrameLocks noGrp="1"/>
+          </p:cNvGraphicFramePr>
+          <p:nvPr>
+            <p:extLst>
+              <p:ext uri="{D42A27DB-BD31-4B8C-83A1-F6EECF244321}">
+                <p14:modId xmlns:p14="http://schemas.microsoft.com/office/powerpoint/2010/main" val="1846944417"/>
+              </p:ext>
+            </p:extLst>
+          </p:nvPr>
+        </p:nvGraphicFramePr>
+        <p:xfrm>
+          <a:off x="845344" y="875664"/>
+          <a:ext cx="9829800" cy="4259348"/>
+        </p:xfrm>
+        <a:graphic>
+          <a:graphicData uri="http://schemas.openxmlformats.org/drawingml/2006/table">
+            <a:tbl>
+              <a:tblPr>
+                <a:tableStyleId>{91DB7C30-2B5D-4D34-8F22-85940E495A18}</a:tableStyleId>
+              </a:tblPr>
+              <a:tblGrid>
+                <a:gridCol w="3276600">
+                  <a:extLst>
+                    <a:ext uri="{9D8B030D-6E8A-4147-A177-3AD203B41FA5}">
+                      <a16:colId xmlns:a16="http://schemas.microsoft.com/office/drawing/2014/main" val="1979650834"/>
+                    </a:ext>
+                  </a:extLst>
+                </a:gridCol>
+                <a:gridCol w="3276600">
+                  <a:extLst>
+                    <a:ext uri="{9D8B030D-6E8A-4147-A177-3AD203B41FA5}">
+                      <a16:colId xmlns:a16="http://schemas.microsoft.com/office/drawing/2014/main" val="2978366162"/>
+                    </a:ext>
+                  </a:extLst>
+                </a:gridCol>
+                <a:gridCol w="3276600">
+                  <a:extLst>
+                    <a:ext uri="{9D8B030D-6E8A-4147-A177-3AD203B41FA5}">
+                      <a16:colId xmlns:a16="http://schemas.microsoft.com/office/drawing/2014/main" val="971725472"/>
+                    </a:ext>
+                  </a:extLst>
+                </a:gridCol>
+              </a:tblGrid>
+              <a:tr h="221055">
+                <a:tc>
+                  <a:txBody>
+                    <a:bodyPr/>
+                    <a:lstStyle/>
+                    <a:p>
+                      <a:pPr>
+                        <a:buNone/>
+                      </a:pPr>
+                      <a:r>
+                        <a:rPr lang="zh-TW" altLang="en-US" sz="1000" dirty="0"/>
+                        <a:t>套件</a:t>
+                      </a:r>
+                    </a:p>
+                  </a:txBody>
+                  <a:tcPr marL="66317" marR="66317" marT="33158" marB="33158" anchor="ctr"/>
+                </a:tc>
+                <a:tc>
+                  <a:txBody>
+                    <a:bodyPr/>
+                    <a:lstStyle/>
+                    <a:p>
+                      <a:pPr>
+                        <a:buNone/>
+                      </a:pPr>
+                      <a:r>
+                        <a:rPr lang="zh-TW" altLang="en-US" sz="1000"/>
+                        <a:t>版本號</a:t>
+                      </a:r>
+                    </a:p>
+                  </a:txBody>
+                  <a:tcPr marL="66317" marR="66317" marT="33158" marB="33158" anchor="ctr"/>
+                </a:tc>
+                <a:tc>
+                  <a:txBody>
+                    <a:bodyPr/>
+                    <a:lstStyle/>
+                    <a:p>
+                      <a:pPr>
+                        <a:buNone/>
+                      </a:pPr>
+                      <a:r>
+                        <a:rPr lang="zh-TW" altLang="en-US" sz="1000"/>
+                        <a:t>許可證</a:t>
+                      </a:r>
+                    </a:p>
+                  </a:txBody>
+                  <a:tcPr marL="66317" marR="66317" marT="33158" marB="33158" anchor="ctr"/>
+                </a:tc>
+                <a:extLst>
+                  <a:ext uri="{0D108BD9-81ED-4DB2-BD59-A6C34878D82A}">
+                    <a16:rowId xmlns:a16="http://schemas.microsoft.com/office/drawing/2014/main" val="2034365754"/>
+                  </a:ext>
+                </a:extLst>
+              </a:tr>
+              <a:tr h="375794">
+                <a:tc>
+                  <a:txBody>
+                    <a:bodyPr/>
+                    <a:lstStyle/>
+                    <a:p>
+                      <a:pPr>
+                        <a:buNone/>
+                      </a:pPr>
+                      <a:r>
+                        <a:rPr lang="en" sz="1000" dirty="0"/>
+                        <a:t>@</a:t>
+                      </a:r>
+                      <a:r>
+                        <a:rPr lang="en" sz="1000" dirty="0" err="1"/>
+                        <a:t>nestjs</a:t>
+                      </a:r>
+                      <a:r>
+                        <a:rPr lang="en" sz="1000" dirty="0"/>
+                        <a:t>/common</a:t>
+                      </a:r>
+                    </a:p>
+                    <a:p>
+                      <a:pPr>
+                        <a:buNone/>
+                      </a:pPr>
+                      <a:r>
+                        <a:rPr lang="en" sz="1000" dirty="0"/>
+                        <a:t>@</a:t>
+                      </a:r>
+                      <a:r>
+                        <a:rPr lang="en" sz="1000" dirty="0" err="1"/>
+                        <a:t>nestjs</a:t>
+                      </a:r>
+                      <a:r>
+                        <a:rPr lang="en" sz="1000" dirty="0"/>
+                        <a:t>/core</a:t>
+                      </a:r>
+                    </a:p>
+                    <a:p>
+                      <a:pPr>
+                        <a:buNone/>
+                      </a:pPr>
+                      <a:r>
+                        <a:rPr lang="en" sz="1000" dirty="0"/>
+                        <a:t>@</a:t>
+                      </a:r>
+                      <a:r>
+                        <a:rPr lang="en" sz="1000" dirty="0" err="1"/>
+                        <a:t>nestjs</a:t>
+                      </a:r>
+                      <a:r>
+                        <a:rPr lang="en" sz="1000" dirty="0"/>
+                        <a:t>/platform-express</a:t>
+                      </a:r>
+                    </a:p>
+                  </a:txBody>
+                  <a:tcPr marL="66317" marR="66317" marT="33158" marB="33158" anchor="ctr"/>
+                </a:tc>
+                <a:tc>
+                  <a:txBody>
+                    <a:bodyPr/>
+                    <a:lstStyle/>
+                    <a:p>
+                      <a:pPr>
+                        <a:buNone/>
+                      </a:pPr>
+                      <a:r>
+                        <a:rPr lang="en-US" altLang="zh-TW" sz="1000"/>
+                        <a:t>11.1.6</a:t>
+                      </a:r>
+                      <a:endParaRPr lang="zh-TW" altLang="en-US" sz="1000"/>
+                    </a:p>
+                  </a:txBody>
+                  <a:tcPr marL="66317" marR="66317" marT="33158" marB="33158" anchor="ctr"/>
+                </a:tc>
+                <a:tc>
+                  <a:txBody>
+                    <a:bodyPr/>
+                    <a:lstStyle/>
+                    <a:p>
+                      <a:pPr>
+                        <a:buNone/>
+                      </a:pPr>
+                      <a:r>
+                        <a:rPr lang="en" sz="1000"/>
+                        <a:t>MIT</a:t>
+                      </a:r>
+                    </a:p>
+                  </a:txBody>
+                  <a:tcPr marL="66317" marR="66317" marT="33158" marB="33158" anchor="ctr"/>
+                </a:tc>
+                <a:extLst>
+                  <a:ext uri="{0D108BD9-81ED-4DB2-BD59-A6C34878D82A}">
+                    <a16:rowId xmlns:a16="http://schemas.microsoft.com/office/drawing/2014/main" val="177764190"/>
+                  </a:ext>
+                </a:extLst>
+              </a:tr>
+              <a:tr h="221055">
+                <a:tc>
+                  <a:txBody>
+                    <a:bodyPr/>
+                    <a:lstStyle/>
+                    <a:p>
+                      <a:pPr>
+                        <a:buNone/>
+                      </a:pPr>
+                      <a:r>
+                        <a:rPr lang="en" sz="1000"/>
+                        <a:t>@nestjs/config</a:t>
+                      </a:r>
+                    </a:p>
+                  </a:txBody>
+                  <a:tcPr marL="66317" marR="66317" marT="33158" marB="33158" anchor="ctr"/>
+                </a:tc>
+                <a:tc>
+                  <a:txBody>
+                    <a:bodyPr/>
+                    <a:lstStyle/>
+                    <a:p>
+                      <a:pPr>
+                        <a:buNone/>
+                      </a:pPr>
+                      <a:r>
+                        <a:rPr lang="en-US" altLang="zh-TW" sz="1000"/>
+                        <a:t>4.0.2</a:t>
+                      </a:r>
+                      <a:endParaRPr lang="zh-TW" altLang="en-US" sz="1000"/>
+                    </a:p>
+                  </a:txBody>
+                  <a:tcPr marL="66317" marR="66317" marT="33158" marB="33158" anchor="ctr"/>
+                </a:tc>
+                <a:tc>
+                  <a:txBody>
+                    <a:bodyPr/>
+                    <a:lstStyle/>
+                    <a:p>
+                      <a:pPr>
+                        <a:buNone/>
+                      </a:pPr>
+                      <a:r>
+                        <a:rPr lang="en" sz="1000"/>
+                        <a:t>MIT</a:t>
+                      </a:r>
+                    </a:p>
+                  </a:txBody>
+                  <a:tcPr marL="66317" marR="66317" marT="33158" marB="33158" anchor="ctr"/>
+                </a:tc>
+                <a:extLst>
+                  <a:ext uri="{0D108BD9-81ED-4DB2-BD59-A6C34878D82A}">
+                    <a16:rowId xmlns:a16="http://schemas.microsoft.com/office/drawing/2014/main" val="3883179950"/>
+                  </a:ext>
+                </a:extLst>
+              </a:tr>
+              <a:tr h="221055">
+                <a:tc>
+                  <a:txBody>
+                    <a:bodyPr/>
+                    <a:lstStyle/>
+                    <a:p>
+                      <a:pPr>
+                        <a:buNone/>
+                      </a:pPr>
+                      <a:r>
+                        <a:rPr lang="en" sz="1000"/>
+                        <a:t>@nestjs/swagger</a:t>
+                      </a:r>
+                    </a:p>
+                  </a:txBody>
+                  <a:tcPr marL="66317" marR="66317" marT="33158" marB="33158" anchor="ctr"/>
+                </a:tc>
+                <a:tc>
+                  <a:txBody>
+                    <a:bodyPr/>
+                    <a:lstStyle/>
+                    <a:p>
+                      <a:pPr>
+                        <a:buNone/>
+                      </a:pPr>
+                      <a:r>
+                        <a:rPr lang="en-US" altLang="zh-TW" sz="1000"/>
+                        <a:t>11.2.0</a:t>
+                      </a:r>
+                      <a:endParaRPr lang="zh-TW" altLang="en-US" sz="1000"/>
+                    </a:p>
+                  </a:txBody>
+                  <a:tcPr marL="66317" marR="66317" marT="33158" marB="33158" anchor="ctr"/>
+                </a:tc>
+                <a:tc>
+                  <a:txBody>
+                    <a:bodyPr/>
+                    <a:lstStyle/>
+                    <a:p>
+                      <a:pPr>
+                        <a:buNone/>
+                      </a:pPr>
+                      <a:r>
+                        <a:rPr lang="en" sz="1000"/>
+                        <a:t>MIT</a:t>
+                      </a:r>
+                    </a:p>
+                  </a:txBody>
+                  <a:tcPr marL="66317" marR="66317" marT="33158" marB="33158" anchor="ctr"/>
+                </a:tc>
+                <a:extLst>
+                  <a:ext uri="{0D108BD9-81ED-4DB2-BD59-A6C34878D82A}">
+                    <a16:rowId xmlns:a16="http://schemas.microsoft.com/office/drawing/2014/main" val="810962820"/>
+                  </a:ext>
+                </a:extLst>
+              </a:tr>
+              <a:tr h="221055">
+                <a:tc>
+                  <a:txBody>
+                    <a:bodyPr/>
+                    <a:lstStyle/>
+                    <a:p>
+                      <a:pPr>
+                        <a:buNone/>
+                      </a:pPr>
+                      <a:r>
+                        <a:rPr lang="en" sz="1000" dirty="0"/>
+                        <a:t>@</a:t>
+                      </a:r>
+                      <a:r>
+                        <a:rPr lang="en" sz="1000" dirty="0" err="1"/>
+                        <a:t>nestjs</a:t>
+                      </a:r>
+                      <a:r>
+                        <a:rPr lang="en" sz="1000" dirty="0"/>
+                        <a:t>/</a:t>
+                      </a:r>
+                      <a:r>
+                        <a:rPr lang="en" sz="1000" dirty="0" err="1"/>
+                        <a:t>mongoose、mongoose</a:t>
+                      </a:r>
+                      <a:endParaRPr lang="en" sz="1000" dirty="0"/>
+                    </a:p>
+                  </a:txBody>
+                  <a:tcPr marL="66317" marR="66317" marT="33158" marB="33158" anchor="ctr"/>
+                </a:tc>
+                <a:tc>
+                  <a:txBody>
+                    <a:bodyPr/>
+                    <a:lstStyle/>
+                    <a:p>
+                      <a:pPr>
+                        <a:buNone/>
+                      </a:pPr>
+                      <a:r>
+                        <a:rPr lang="en-US" altLang="zh-TW" sz="1000"/>
+                        <a:t>11.0.3</a:t>
+                      </a:r>
+                      <a:r>
+                        <a:rPr lang="zh-TW" altLang="en-US" sz="1000"/>
+                        <a:t>、</a:t>
+                      </a:r>
+                      <a:r>
+                        <a:rPr lang="en-US" altLang="zh-TW" sz="1000"/>
+                        <a:t>8.18.1</a:t>
+                      </a:r>
+                      <a:endParaRPr lang="zh-TW" altLang="en-US" sz="1000"/>
+                    </a:p>
+                  </a:txBody>
+                  <a:tcPr marL="66317" marR="66317" marT="33158" marB="33158" anchor="ctr"/>
+                </a:tc>
+                <a:tc>
+                  <a:txBody>
+                    <a:bodyPr/>
+                    <a:lstStyle/>
+                    <a:p>
+                      <a:pPr>
+                        <a:buNone/>
+                      </a:pPr>
+                      <a:r>
+                        <a:rPr lang="en" sz="1000"/>
+                        <a:t>MIT</a:t>
+                      </a:r>
+                    </a:p>
+                  </a:txBody>
+                  <a:tcPr marL="66317" marR="66317" marT="33158" marB="33158" anchor="ctr"/>
+                </a:tc>
+                <a:extLst>
+                  <a:ext uri="{0D108BD9-81ED-4DB2-BD59-A6C34878D82A}">
+                    <a16:rowId xmlns:a16="http://schemas.microsoft.com/office/drawing/2014/main" val="2553881078"/>
+                  </a:ext>
+                </a:extLst>
+              </a:tr>
+              <a:tr h="375794">
+                <a:tc>
+                  <a:txBody>
+                    <a:bodyPr/>
+                    <a:lstStyle/>
+                    <a:p>
+                      <a:pPr>
+                        <a:buNone/>
+                      </a:pPr>
+                      <a:r>
+                        <a:rPr lang="en" sz="1000"/>
+                        <a:t>@nestjs/bullmq、bullmq、ioredis</a:t>
+                      </a:r>
+                    </a:p>
+                  </a:txBody>
+                  <a:tcPr marL="66317" marR="66317" marT="33158" marB="33158" anchor="ctr"/>
+                </a:tc>
+                <a:tc>
+                  <a:txBody>
+                    <a:bodyPr/>
+                    <a:lstStyle/>
+                    <a:p>
+                      <a:pPr>
+                        <a:buNone/>
+                      </a:pPr>
+                      <a:r>
+                        <a:rPr lang="en-US" altLang="zh-TW" sz="1000"/>
+                        <a:t>11.0.3</a:t>
+                      </a:r>
+                      <a:r>
+                        <a:rPr lang="zh-TW" altLang="en-US" sz="1000"/>
+                        <a:t>、</a:t>
+                      </a:r>
+                      <a:r>
+                        <a:rPr lang="en-US" altLang="zh-TW" sz="1000"/>
+                        <a:t>5.58.5</a:t>
+                      </a:r>
+                      <a:r>
+                        <a:rPr lang="zh-TW" altLang="en-US" sz="1000"/>
+                        <a:t>、</a:t>
+                      </a:r>
+                      <a:r>
+                        <a:rPr lang="en-US" altLang="zh-TW" sz="1000"/>
+                        <a:t>5.7.0</a:t>
+                      </a:r>
+                      <a:endParaRPr lang="zh-TW" altLang="en-US" sz="1000"/>
+                    </a:p>
+                  </a:txBody>
+                  <a:tcPr marL="66317" marR="66317" marT="33158" marB="33158" anchor="ctr"/>
+                </a:tc>
+                <a:tc>
+                  <a:txBody>
+                    <a:bodyPr/>
+                    <a:lstStyle/>
+                    <a:p>
+                      <a:pPr>
+                        <a:buNone/>
+                      </a:pPr>
+                      <a:r>
+                        <a:rPr lang="en" sz="1000"/>
+                        <a:t>MIT</a:t>
+                      </a:r>
+                    </a:p>
+                  </a:txBody>
+                  <a:tcPr marL="66317" marR="66317" marT="33158" marB="33158" anchor="ctr"/>
+                </a:tc>
+                <a:extLst>
+                  <a:ext uri="{0D108BD9-81ED-4DB2-BD59-A6C34878D82A}">
+                    <a16:rowId xmlns:a16="http://schemas.microsoft.com/office/drawing/2014/main" val="2015474949"/>
+                  </a:ext>
+                </a:extLst>
+              </a:tr>
+              <a:tr h="375794">
+                <a:tc>
+                  <a:txBody>
+                    <a:bodyPr/>
+                    <a:lstStyle/>
+                    <a:p>
+                      <a:pPr>
+                        <a:buNone/>
+                      </a:pPr>
+                      <a:r>
+                        <a:rPr lang="en" sz="1000"/>
+                        <a:t>@nestjs/cache-manager、cache-manager、keyv、@keyv/redis</a:t>
+                      </a:r>
+                    </a:p>
+                  </a:txBody>
+                  <a:tcPr marL="66317" marR="66317" marT="33158" marB="33158" anchor="ctr"/>
+                </a:tc>
+                <a:tc>
+                  <a:txBody>
+                    <a:bodyPr/>
+                    <a:lstStyle/>
+                    <a:p>
+                      <a:pPr>
+                        <a:buNone/>
+                      </a:pPr>
+                      <a:r>
+                        <a:rPr lang="en-US" altLang="zh-TW" sz="1000" dirty="0"/>
+                        <a:t>3.1.0</a:t>
+                      </a:r>
+                      <a:r>
+                        <a:rPr lang="zh-TW" altLang="en-US" sz="1000" dirty="0"/>
+                        <a:t>、</a:t>
+                      </a:r>
+                      <a:r>
+                        <a:rPr lang="en-US" altLang="zh-TW" sz="1000" dirty="0"/>
+                        <a:t>7.2.8</a:t>
+                      </a:r>
+                      <a:r>
+                        <a:rPr lang="zh-TW" altLang="en-US" sz="1000" dirty="0"/>
+                        <a:t>、</a:t>
+                      </a:r>
+                      <a:r>
+                        <a:rPr lang="en-US" altLang="zh-TW" sz="1000" dirty="0"/>
+                        <a:t>5.6.0</a:t>
+                      </a:r>
+                      <a:r>
+                        <a:rPr lang="zh-TW" altLang="en-US" sz="1000" dirty="0"/>
+                        <a:t>、</a:t>
+                      </a:r>
+                      <a:r>
+                        <a:rPr lang="en-US" altLang="zh-TW" sz="1000" dirty="0"/>
+                        <a:t>5.1.6</a:t>
+                      </a:r>
+                      <a:endParaRPr lang="zh-TW" altLang="en-US" sz="1000" dirty="0"/>
+                    </a:p>
+                  </a:txBody>
+                  <a:tcPr marL="66317" marR="66317" marT="33158" marB="33158" anchor="ctr"/>
+                </a:tc>
+                <a:tc>
+                  <a:txBody>
+                    <a:bodyPr/>
+                    <a:lstStyle/>
+                    <a:p>
+                      <a:pPr>
+                        <a:buNone/>
+                      </a:pPr>
+                      <a:r>
+                        <a:rPr lang="en" sz="1000"/>
+                        <a:t>MIT</a:t>
+                      </a:r>
+                    </a:p>
+                  </a:txBody>
+                  <a:tcPr marL="66317" marR="66317" marT="33158" marB="33158" anchor="ctr"/>
+                </a:tc>
+                <a:extLst>
+                  <a:ext uri="{0D108BD9-81ED-4DB2-BD59-A6C34878D82A}">
+                    <a16:rowId xmlns:a16="http://schemas.microsoft.com/office/drawing/2014/main" val="3836038363"/>
+                  </a:ext>
+                </a:extLst>
+              </a:tr>
+              <a:tr h="530532">
+                <a:tc>
+                  <a:txBody>
+                    <a:bodyPr/>
+                    <a:lstStyle/>
+                    <a:p>
+                      <a:pPr>
+                        <a:buNone/>
+                      </a:pPr>
+                      <a:r>
+                        <a:rPr lang="en" sz="1000" dirty="0"/>
+                        <a:t>@</a:t>
+                      </a:r>
+                      <a:r>
+                        <a:rPr lang="en" sz="1000" dirty="0" err="1"/>
+                        <a:t>nestjs</a:t>
+                      </a:r>
+                      <a:r>
+                        <a:rPr lang="en" sz="1000" dirty="0"/>
+                        <a:t>/</a:t>
+                      </a:r>
+                      <a:r>
+                        <a:rPr lang="en" sz="1000" dirty="0" err="1"/>
+                        <a:t>jwt</a:t>
+                      </a:r>
+                      <a:r>
+                        <a:rPr lang="en" sz="1000" dirty="0"/>
+                        <a:t>、@</a:t>
+                      </a:r>
+                      <a:r>
+                        <a:rPr lang="en" sz="1000" dirty="0" err="1"/>
+                        <a:t>nestjs</a:t>
+                      </a:r>
+                      <a:r>
+                        <a:rPr lang="en" sz="1000" dirty="0"/>
+                        <a:t>/</a:t>
+                      </a:r>
+                      <a:r>
+                        <a:rPr lang="en" sz="1000" dirty="0" err="1"/>
+                        <a:t>passport、passport、passport-microsoft</a:t>
+                      </a:r>
+                      <a:r>
+                        <a:rPr lang="en" sz="1000" dirty="0"/>
+                        <a:t>、@azure/</a:t>
+                      </a:r>
+                      <a:r>
+                        <a:rPr lang="en" sz="1000" dirty="0" err="1"/>
+                        <a:t>msal</a:t>
+                      </a:r>
+                      <a:r>
+                        <a:rPr lang="en" sz="1000" dirty="0"/>
+                        <a:t>-node</a:t>
+                      </a:r>
+                    </a:p>
+                  </a:txBody>
+                  <a:tcPr marL="66317" marR="66317" marT="33158" marB="33158" anchor="ctr"/>
+                </a:tc>
+                <a:tc>
+                  <a:txBody>
+                    <a:bodyPr/>
+                    <a:lstStyle/>
+                    <a:p>
+                      <a:pPr>
+                        <a:buNone/>
+                      </a:pPr>
+                      <a:r>
+                        <a:rPr lang="en-US" altLang="zh-TW" sz="1000" dirty="0"/>
+                        <a:t>11.0.0</a:t>
+                      </a:r>
+                      <a:r>
+                        <a:rPr lang="zh-TW" altLang="en-US" sz="1000" dirty="0"/>
+                        <a:t>、</a:t>
+                      </a:r>
+                      <a:r>
+                        <a:rPr lang="en-US" altLang="zh-TW" sz="1000" dirty="0"/>
+                        <a:t>11.0.5</a:t>
+                      </a:r>
+                      <a:r>
+                        <a:rPr lang="zh-TW" altLang="en-US" sz="1000" dirty="0"/>
+                        <a:t>、</a:t>
+                      </a:r>
+                      <a:r>
+                        <a:rPr lang="en-US" altLang="zh-TW" sz="1000" dirty="0"/>
+                        <a:t>0.7.0</a:t>
+                      </a:r>
+                      <a:r>
+                        <a:rPr lang="zh-TW" altLang="en-US" sz="1000" dirty="0"/>
+                        <a:t>、</a:t>
+                      </a:r>
+                      <a:r>
+                        <a:rPr lang="en-US" altLang="zh-TW" sz="1000" dirty="0"/>
+                        <a:t>2.1.0</a:t>
+                      </a:r>
+                      <a:r>
+                        <a:rPr lang="zh-TW" altLang="en-US" sz="1000" dirty="0"/>
+                        <a:t>、</a:t>
+                      </a:r>
+                      <a:r>
+                        <a:rPr lang="en-US" altLang="zh-TW" sz="1000" dirty="0"/>
+                        <a:t>3.8.1</a:t>
+                      </a:r>
+                      <a:endParaRPr lang="zh-TW" altLang="en-US" sz="1000" dirty="0"/>
+                    </a:p>
+                  </a:txBody>
+                  <a:tcPr marL="66317" marR="66317" marT="33158" marB="33158" anchor="ctr"/>
+                </a:tc>
+                <a:tc>
+                  <a:txBody>
+                    <a:bodyPr/>
+                    <a:lstStyle/>
+                    <a:p>
+                      <a:pPr>
+                        <a:buNone/>
+                      </a:pPr>
+                      <a:r>
+                        <a:rPr lang="en" sz="1000"/>
+                        <a:t>MIT</a:t>
+                      </a:r>
+                    </a:p>
+                  </a:txBody>
+                  <a:tcPr marL="66317" marR="66317" marT="33158" marB="33158" anchor="ctr"/>
+                </a:tc>
+                <a:extLst>
+                  <a:ext uri="{0D108BD9-81ED-4DB2-BD59-A6C34878D82A}">
+                    <a16:rowId xmlns:a16="http://schemas.microsoft.com/office/drawing/2014/main" val="1004309143"/>
+                  </a:ext>
+                </a:extLst>
+              </a:tr>
+              <a:tr h="221055">
+                <a:tc>
+                  <a:txBody>
+                    <a:bodyPr/>
+                    <a:lstStyle/>
+                    <a:p>
+                      <a:pPr>
+                        <a:buNone/>
+                      </a:pPr>
+                      <a:r>
+                        <a:rPr lang="en" sz="1000"/>
+                        <a:t>@github/copilot-sdk</a:t>
+                      </a:r>
+                    </a:p>
+                  </a:txBody>
+                  <a:tcPr marL="66317" marR="66317" marT="33158" marB="33158" anchor="ctr"/>
+                </a:tc>
+                <a:tc>
+                  <a:txBody>
+                    <a:bodyPr/>
+                    <a:lstStyle/>
+                    <a:p>
+                      <a:pPr>
+                        <a:buNone/>
+                      </a:pPr>
+                      <a:r>
+                        <a:rPr lang="en-US" altLang="zh-TW" sz="1000" dirty="0"/>
+                        <a:t>0.3.0</a:t>
+                      </a:r>
+                      <a:endParaRPr lang="zh-TW" altLang="en-US" sz="1000" dirty="0"/>
+                    </a:p>
+                  </a:txBody>
+                  <a:tcPr marL="66317" marR="66317" marT="33158" marB="33158" anchor="ctr"/>
+                </a:tc>
+                <a:tc>
+                  <a:txBody>
+                    <a:bodyPr/>
+                    <a:lstStyle/>
+                    <a:p>
+                      <a:pPr>
+                        <a:buNone/>
+                      </a:pPr>
+                      <a:r>
+                        <a:rPr lang="en" sz="1000"/>
+                        <a:t>MIT</a:t>
+                      </a:r>
+                    </a:p>
+                  </a:txBody>
+                  <a:tcPr marL="66317" marR="66317" marT="33158" marB="33158" anchor="ctr"/>
+                </a:tc>
+                <a:extLst>
+                  <a:ext uri="{0D108BD9-81ED-4DB2-BD59-A6C34878D82A}">
+                    <a16:rowId xmlns:a16="http://schemas.microsoft.com/office/drawing/2014/main" val="2872064740"/>
+                  </a:ext>
+                </a:extLst>
+              </a:tr>
+              <a:tr h="375794">
+                <a:tc>
+                  <a:txBody>
+                    <a:bodyPr/>
+                    <a:lstStyle/>
+                    <a:p>
+                      <a:pPr>
+                        <a:buNone/>
+                      </a:pPr>
+                      <a:r>
+                        <a:rPr lang="en" sz="1000"/>
+                        <a:t>class-validator、class-transformer、zod</a:t>
+                      </a:r>
+                    </a:p>
+                  </a:txBody>
+                  <a:tcPr marL="66317" marR="66317" marT="33158" marB="33158" anchor="ctr"/>
+                </a:tc>
+                <a:tc>
+                  <a:txBody>
+                    <a:bodyPr/>
+                    <a:lstStyle/>
+                    <a:p>
+                      <a:pPr>
+                        <a:buNone/>
+                      </a:pPr>
+                      <a:r>
+                        <a:rPr lang="en-US" altLang="zh-TW" sz="1000"/>
+                        <a:t>0.14.2</a:t>
+                      </a:r>
+                      <a:r>
+                        <a:rPr lang="zh-TW" altLang="en-US" sz="1000"/>
+                        <a:t>、</a:t>
+                      </a:r>
+                      <a:r>
+                        <a:rPr lang="en-US" altLang="zh-TW" sz="1000"/>
+                        <a:t>0.5.1</a:t>
+                      </a:r>
+                      <a:r>
+                        <a:rPr lang="zh-TW" altLang="en-US" sz="1000"/>
+                        <a:t>、</a:t>
+                      </a:r>
+                      <a:r>
+                        <a:rPr lang="en-US" altLang="zh-TW" sz="1000"/>
+                        <a:t>4.3.6</a:t>
+                      </a:r>
+                      <a:endParaRPr lang="zh-TW" altLang="en-US" sz="1000"/>
+                    </a:p>
+                  </a:txBody>
+                  <a:tcPr marL="66317" marR="66317" marT="33158" marB="33158" anchor="ctr"/>
+                </a:tc>
+                <a:tc>
+                  <a:txBody>
+                    <a:bodyPr/>
+                    <a:lstStyle/>
+                    <a:p>
+                      <a:pPr>
+                        <a:buNone/>
+                      </a:pPr>
+                      <a:r>
+                        <a:rPr lang="en" sz="1000"/>
+                        <a:t>MIT</a:t>
+                      </a:r>
+                    </a:p>
+                  </a:txBody>
+                  <a:tcPr marL="66317" marR="66317" marT="33158" marB="33158" anchor="ctr"/>
+                </a:tc>
+                <a:extLst>
+                  <a:ext uri="{0D108BD9-81ED-4DB2-BD59-A6C34878D82A}">
+                    <a16:rowId xmlns:a16="http://schemas.microsoft.com/office/drawing/2014/main" val="2144807841"/>
+                  </a:ext>
+                </a:extLst>
+              </a:tr>
+              <a:tr h="375794">
+                <a:tc>
+                  <a:txBody>
+                    <a:bodyPr/>
+                    <a:lstStyle/>
+                    <a:p>
+                      <a:pPr>
+                        <a:buNone/>
+                      </a:pPr>
+                      <a:r>
+                        <a:rPr lang="en" sz="1000"/>
+                        <a:t>rss-parser、@tavily/core、axios</a:t>
+                      </a:r>
+                    </a:p>
+                  </a:txBody>
+                  <a:tcPr marL="66317" marR="66317" marT="33158" marB="33158" anchor="ctr"/>
+                </a:tc>
+                <a:tc>
+                  <a:txBody>
+                    <a:bodyPr/>
+                    <a:lstStyle/>
+                    <a:p>
+                      <a:pPr>
+                        <a:buNone/>
+                      </a:pPr>
+                      <a:r>
+                        <a:rPr lang="en-US" altLang="zh-TW" sz="1000"/>
+                        <a:t>3.13.0</a:t>
+                      </a:r>
+                      <a:r>
+                        <a:rPr lang="zh-TW" altLang="en-US" sz="1000"/>
+                        <a:t>、</a:t>
+                      </a:r>
+                      <a:r>
+                        <a:rPr lang="en-US" altLang="zh-TW" sz="1000"/>
+                        <a:t>0.5.12</a:t>
+                      </a:r>
+                      <a:r>
+                        <a:rPr lang="zh-TW" altLang="en-US" sz="1000"/>
+                        <a:t>、</a:t>
+                      </a:r>
+                      <a:r>
+                        <a:rPr lang="en-US" altLang="zh-TW" sz="1000"/>
+                        <a:t>1.15.0</a:t>
+                      </a:r>
+                      <a:endParaRPr lang="zh-TW" altLang="en-US" sz="1000"/>
+                    </a:p>
+                  </a:txBody>
+                  <a:tcPr marL="66317" marR="66317" marT="33158" marB="33158" anchor="ctr"/>
+                </a:tc>
+                <a:tc>
+                  <a:txBody>
+                    <a:bodyPr/>
+                    <a:lstStyle/>
+                    <a:p>
+                      <a:pPr>
+                        <a:buNone/>
+                      </a:pPr>
+                      <a:r>
+                        <a:rPr lang="en" sz="1000"/>
+                        <a:t>MIT</a:t>
+                      </a:r>
+                    </a:p>
+                  </a:txBody>
+                  <a:tcPr marL="66317" marR="66317" marT="33158" marB="33158" anchor="ctr"/>
+                </a:tc>
+                <a:extLst>
+                  <a:ext uri="{0D108BD9-81ED-4DB2-BD59-A6C34878D82A}">
+                    <a16:rowId xmlns:a16="http://schemas.microsoft.com/office/drawing/2014/main" val="449841225"/>
+                  </a:ext>
+                </a:extLst>
+              </a:tr>
+              <a:tr h="375794">
+                <a:tc>
+                  <a:txBody>
+                    <a:bodyPr/>
+                    <a:lstStyle/>
+                    <a:p>
+                      <a:pPr>
+                        <a:buNone/>
+                      </a:pPr>
+                      <a:r>
+                        <a:rPr lang="en" sz="1000"/>
+                        <a:t>@bull-board/api、@bull-board/express</a:t>
+                      </a:r>
+                    </a:p>
+                  </a:txBody>
+                  <a:tcPr marL="66317" marR="66317" marT="33158" marB="33158" anchor="ctr"/>
+                </a:tc>
+                <a:tc>
+                  <a:txBody>
+                    <a:bodyPr/>
+                    <a:lstStyle/>
+                    <a:p>
+                      <a:pPr>
+                        <a:buNone/>
+                      </a:pPr>
+                      <a:r>
+                        <a:rPr lang="en-US" altLang="zh-TW" sz="1000"/>
+                        <a:t>6.13.0</a:t>
+                      </a:r>
+                      <a:endParaRPr lang="zh-TW" altLang="en-US" sz="1000"/>
+                    </a:p>
+                  </a:txBody>
+                  <a:tcPr marL="66317" marR="66317" marT="33158" marB="33158" anchor="ctr"/>
+                </a:tc>
+                <a:tc>
+                  <a:txBody>
+                    <a:bodyPr/>
+                    <a:lstStyle/>
+                    <a:p>
+                      <a:pPr>
+                        <a:buNone/>
+                      </a:pPr>
+                      <a:r>
+                        <a:rPr lang="en" sz="1000"/>
+                        <a:t>MIT</a:t>
+                      </a:r>
+                    </a:p>
+                  </a:txBody>
+                  <a:tcPr marL="66317" marR="66317" marT="33158" marB="33158" anchor="ctr"/>
+                </a:tc>
+                <a:extLst>
+                  <a:ext uri="{0D108BD9-81ED-4DB2-BD59-A6C34878D82A}">
+                    <a16:rowId xmlns:a16="http://schemas.microsoft.com/office/drawing/2014/main" val="2918851166"/>
+                  </a:ext>
+                </a:extLst>
+              </a:tr>
+              <a:tr h="221055">
+                <a:tc>
+                  <a:txBody>
+                    <a:bodyPr/>
+                    <a:lstStyle/>
+                    <a:p>
+                      <a:pPr>
+                        <a:buNone/>
+                      </a:pPr>
+                      <a:r>
+                        <a:rPr lang="en" sz="1000"/>
+                        <a:t>dotenv、global-agent</a:t>
+                      </a:r>
+                    </a:p>
+                  </a:txBody>
+                  <a:tcPr marL="66317" marR="66317" marT="33158" marB="33158" anchor="ctr"/>
+                </a:tc>
+                <a:tc>
+                  <a:txBody>
+                    <a:bodyPr/>
+                    <a:lstStyle/>
+                    <a:p>
+                      <a:pPr>
+                        <a:buNone/>
+                      </a:pPr>
+                      <a:r>
+                        <a:rPr lang="en-US" altLang="zh-TW" sz="1000"/>
+                        <a:t>17.2.3</a:t>
+                      </a:r>
+                      <a:r>
+                        <a:rPr lang="zh-TW" altLang="en-US" sz="1000"/>
+                        <a:t>、</a:t>
+                      </a:r>
+                      <a:r>
+                        <a:rPr lang="en-US" altLang="zh-TW" sz="1000"/>
+                        <a:t>3.0.0</a:t>
+                      </a:r>
+                      <a:endParaRPr lang="zh-TW" altLang="en-US" sz="1000"/>
+                    </a:p>
+                  </a:txBody>
+                  <a:tcPr marL="66317" marR="66317" marT="33158" marB="33158" anchor="ctr"/>
+                </a:tc>
+                <a:tc>
+                  <a:txBody>
+                    <a:bodyPr/>
+                    <a:lstStyle/>
+                    <a:p>
+                      <a:pPr>
+                        <a:buNone/>
+                      </a:pPr>
+                      <a:r>
+                        <a:rPr lang="en" sz="1000" dirty="0"/>
+                        <a:t>BSD-2-Clause、BSD-3-Clause</a:t>
+                      </a:r>
+                    </a:p>
+                  </a:txBody>
+                  <a:tcPr marL="66317" marR="66317" marT="33158" marB="33158" anchor="ctr"/>
+                </a:tc>
+                <a:extLst>
+                  <a:ext uri="{0D108BD9-81ED-4DB2-BD59-A6C34878D82A}">
+                    <a16:rowId xmlns:a16="http://schemas.microsoft.com/office/drawing/2014/main" val="2391829051"/>
+                  </a:ext>
+                </a:extLst>
+              </a:tr>
+            </a:tbl>
+          </a:graphicData>
+        </a:graphic>
+      </p:graphicFrame>
+    </p:spTree>
+    <p:extLst>
+      <p:ext uri="{BB962C8B-B14F-4D97-AF65-F5344CB8AC3E}">
+        <p14:creationId xmlns:p14="http://schemas.microsoft.com/office/powerpoint/2010/main" val="3058347366"/>
+      </p:ext>
+    </p:extLst>
+  </p:cSld>
+  <p:clrMapOvr>
+    <a:masterClrMapping/>
+  </p:clrMapOvr>
+</p:sld>
+</file>
+
 <file path=ppt/theme/theme1.xml><?xml version="1.0" encoding="utf-8"?>
 <a:theme xmlns:a="http://schemas.openxmlformats.org/drawingml/2006/main" name="數科處範本">
   <a:themeElements>
@@ -18011,21 +22699,6 @@
 </file>
 
 <file path=customXml/item1.xml><?xml version="1.0" encoding="utf-8"?>
-<p:properties xmlns:p="http://schemas.microsoft.com/office/2006/metadata/properties" xmlns:xsi="http://www.w3.org/2001/XMLSchema-instance" xmlns:pc="http://schemas.microsoft.com/office/infopath/2007/PartnerControls">
-  <documentManagement/>
-</p:properties>
-</file>
-
-<file path=customXml/item2.xml><?xml version="1.0" encoding="utf-8"?>
-<?mso-contentType ?>
-<FormTemplates xmlns="http://schemas.microsoft.com/sharepoint/v3/contenttype/forms">
-  <Display>DocumentLibraryForm</Display>
-  <Edit>DocumentLibraryForm</Edit>
-  <New>DocumentLibraryForm</New>
-</FormTemplates>
-</file>
-
-<file path=customXml/item3.xml><?xml version="1.0" encoding="utf-8"?>
 <ct:contentTypeSchema xmlns:ct="http://schemas.microsoft.com/office/2006/metadata/contentType" xmlns:ma="http://schemas.microsoft.com/office/2006/metadata/properties/metaAttributes" ct:_="" ma:_="" ma:contentTypeName="Document" ma:contentTypeID="0x010100DE4F25D0FF425B4EA678AC2414B6A709" ma:contentTypeVersion="10" ma:contentTypeDescription="Create a new document." ma:contentTypeScope="" ma:versionID="8ceec2ce155b1d63c0c6fcd4110f3cfe">
   <xsd:schema xmlns:xsd="http://www.w3.org/2001/XMLSchema" xmlns:xs="http://www.w3.org/2001/XMLSchema" xmlns:p="http://schemas.microsoft.com/office/2006/metadata/properties" xmlns:ns2="7cac0686-f0c7-4236-b000-d7b90732a875" xmlns:ns3="9bfc64f2-d580-4df8-9fa4-4631ad6ac43d" targetNamespace="http://schemas.microsoft.com/office/2006/metadata/properties" ma:root="true" ma:fieldsID="267f21102a69fda15f58a0ecdfc9abe1" ns2:_="" ns3:_="">
     <xsd:import namespace="7cac0686-f0c7-4236-b000-d7b90732a875"/>
@@ -18226,32 +22899,22 @@
 </ct:contentTypeSchema>
 </file>
 
-<file path=customXml/itemProps1.xml><?xml version="1.0" encoding="utf-8"?>
-<ds:datastoreItem xmlns:ds="http://schemas.openxmlformats.org/officeDocument/2006/customXml" ds:itemID="{0FD5D526-59E0-46BD-B75A-4A393253F249}">
-  <ds:schemaRefs>
-    <ds:schemaRef ds:uri="http://schemas.microsoft.com/office/2006/documentManagement/types"/>
-    <ds:schemaRef ds:uri="http://schemas.microsoft.com/office/2006/metadata/properties"/>
-    <ds:schemaRef ds:uri="http://purl.org/dc/elements/1.1/"/>
-    <ds:schemaRef ds:uri="9bfc64f2-d580-4df8-9fa4-4631ad6ac43d"/>
-    <ds:schemaRef ds:uri="http://schemas.openxmlformats.org/package/2006/metadata/core-properties"/>
-    <ds:schemaRef ds:uri="http://purl.org/dc/terms/"/>
-    <ds:schemaRef ds:uri="http://www.w3.org/XML/1998/namespace"/>
-    <ds:schemaRef ds:uri="http://schemas.microsoft.com/office/infopath/2007/PartnerControls"/>
-    <ds:schemaRef ds:uri="7cac0686-f0c7-4236-b000-d7b90732a875"/>
-    <ds:schemaRef ds:uri="http://purl.org/dc/dcmitype/"/>
-  </ds:schemaRefs>
-</ds:datastoreItem>
+<file path=customXml/item2.xml><?xml version="1.0" encoding="utf-8"?>
+<?mso-contentType ?>
+<FormTemplates xmlns="http://schemas.microsoft.com/sharepoint/v3/contenttype/forms">
+  <Display>DocumentLibraryForm</Display>
+  <Edit>DocumentLibraryForm</Edit>
+  <New>DocumentLibraryForm</New>
+</FormTemplates>
 </file>
 
-<file path=customXml/itemProps2.xml><?xml version="1.0" encoding="utf-8"?>
-<ds:datastoreItem xmlns:ds="http://schemas.openxmlformats.org/officeDocument/2006/customXml" ds:itemID="{76929C79-DB32-411C-8C37-9A0BBBB5F642}">
-  <ds:schemaRefs>
-    <ds:schemaRef ds:uri="http://schemas.microsoft.com/sharepoint/v3/contenttype/forms"/>
-  </ds:schemaRefs>
-</ds:datastoreItem>
+<file path=customXml/item3.xml><?xml version="1.0" encoding="utf-8"?>
+<p:properties xmlns:p="http://schemas.microsoft.com/office/2006/metadata/properties" xmlns:xsi="http://www.w3.org/2001/XMLSchema-instance" xmlns:pc="http://schemas.microsoft.com/office/infopath/2007/PartnerControls">
+  <documentManagement/>
+</p:properties>
 </file>
 
-<file path=customXml/itemProps3.xml><?xml version="1.0" encoding="utf-8"?>
+<file path=customXml/itemProps1.xml><?xml version="1.0" encoding="utf-8"?>
 <ds:datastoreItem xmlns:ds="http://schemas.openxmlformats.org/officeDocument/2006/customXml" ds:itemID="{6B3946E7-66F8-4182-AA38-CFC406C59F4E}">
   <ds:schemaRefs>
     <ds:schemaRef ds:uri="http://schemas.microsoft.com/office/2006/metadata/contentType"/>
@@ -18270,6 +22933,31 @@
 </ds:datastoreItem>
 </file>
 
+<file path=customXml/itemProps2.xml><?xml version="1.0" encoding="utf-8"?>
+<ds:datastoreItem xmlns:ds="http://schemas.openxmlformats.org/officeDocument/2006/customXml" ds:itemID="{76929C79-DB32-411C-8C37-9A0BBBB5F642}">
+  <ds:schemaRefs>
+    <ds:schemaRef ds:uri="http://schemas.microsoft.com/sharepoint/v3/contenttype/forms"/>
+  </ds:schemaRefs>
+</ds:datastoreItem>
+</file>
+
+<file path=customXml/itemProps3.xml><?xml version="1.0" encoding="utf-8"?>
+<ds:datastoreItem xmlns:ds="http://schemas.openxmlformats.org/officeDocument/2006/customXml" ds:itemID="{0FD5D526-59E0-46BD-B75A-4A393253F249}">
+  <ds:schemaRefs>
+    <ds:schemaRef ds:uri="http://schemas.microsoft.com/office/2006/documentManagement/types"/>
+    <ds:schemaRef ds:uri="http://schemas.microsoft.com/office/2006/metadata/properties"/>
+    <ds:schemaRef ds:uri="http://purl.org/dc/elements/1.1/"/>
+    <ds:schemaRef ds:uri="9bfc64f2-d580-4df8-9fa4-4631ad6ac43d"/>
+    <ds:schemaRef ds:uri="http://schemas.openxmlformats.org/package/2006/metadata/core-properties"/>
+    <ds:schemaRef ds:uri="http://purl.org/dc/terms/"/>
+    <ds:schemaRef ds:uri="http://www.w3.org/XML/1998/namespace"/>
+    <ds:schemaRef ds:uri="http://schemas.microsoft.com/office/infopath/2007/PartnerControls"/>
+    <ds:schemaRef ds:uri="7cac0686-f0c7-4236-b000-d7b90732a875"/>
+    <ds:schemaRef ds:uri="http://purl.org/dc/dcmitype/"/>
+  </ds:schemaRefs>
+</ds:datastoreItem>
+</file>
+
 <file path=docMetadata/LabelInfo.xml><?xml version="1.0" encoding="utf-8"?>
 <clbl:labelList xmlns:clbl="http://schemas.microsoft.com/office/2020/mipLabelMetadata">
   <clbl:label id="{217a5a3d-163a-4e8b-af1b-58fd7f92894f}" enabled="0" method="" siteId="{217a5a3d-163a-4e8b-af1b-58fd7f92894f}" removed="1"/>

--- a/infogather.pptx
+++ b/infogather.pptx
@@ -5,7 +5,7 @@
     <p:sldMasterId id="2147483648" r:id="rId4"/>
   </p:sldMasterIdLst>
   <p:notesMasterIdLst>
-    <p:notesMasterId r:id="rId14"/>
+    <p:notesMasterId r:id="rId15"/>
   </p:notesMasterIdLst>
   <p:sldIdLst>
     <p:sldId id="256" r:id="rId5"/>
@@ -13,10 +13,11 @@
     <p:sldId id="2147471230" r:id="rId7"/>
     <p:sldId id="2147471223" r:id="rId8"/>
     <p:sldId id="2147471229" r:id="rId9"/>
-    <p:sldId id="2147471217" r:id="rId10"/>
-    <p:sldId id="2147471226" r:id="rId11"/>
-    <p:sldId id="2147471231" r:id="rId12"/>
-    <p:sldId id="2147471233" r:id="rId13"/>
+    <p:sldId id="2147471235" r:id="rId10"/>
+    <p:sldId id="2147471217" r:id="rId11"/>
+    <p:sldId id="2147471226" r:id="rId12"/>
+    <p:sldId id="2147471231" r:id="rId13"/>
+    <p:sldId id="2147471233" r:id="rId14"/>
   </p:sldIdLst>
   <p:sldSz cx="11520488" cy="6480175"/>
   <p:notesSz cx="6858000" cy="9144000"/>
@@ -257,7 +258,7 @@
       <p15:notesGuideLst xmlns:p15="http://schemas.microsoft.com/office/powerpoint/2012/main"/>
     </p:ext>
     <p:ext uri="GoogleSlidesCustomDataVersion2">
-      <go:slidesCustomData xmlns="" xmlns:go="http://customooxmlschemas.google.com/" xmlns:ahyp="http://schemas.microsoft.com/office/drawing/2018/hyperlinkcolor" xmlns:p15="http://schemas.microsoft.com/office/powerpoint/2012/main" xmlns:p14="http://schemas.microsoft.com/office/powerpoint/2010/main" xmlns:com="http://schemas.openxmlformats.org/drawingml/2006/compatibility" xmlns:pvml="urn:schemas-microsoft-com:office:powerpoint" xmlns:v="urn:schemas-microsoft-com:vml" xmlns:o="urn:schemas-microsoft-com:office:office" xmlns:dgm="http://schemas.openxmlformats.org/drawingml/2006/diagram" xmlns:c="http://schemas.openxmlformats.org/drawingml/2006/chart" xmlns:mv="urn:schemas-microsoft-com:mac:vml" xmlns:mc="http://schemas.openxmlformats.org/markup-compatibility/2006" r:id="rId52" roundtripDataSignature="AMtx7mhqKJAzFugGzrpaCdpbPJOL8OwfdA=="/>
+      <go:slidesCustomData xmlns:mc="http://schemas.openxmlformats.org/markup-compatibility/2006" xmlns:mv="urn:schemas-microsoft-com:mac:vml" xmlns:c="http://schemas.openxmlformats.org/drawingml/2006/chart" xmlns:dgm="http://schemas.openxmlformats.org/drawingml/2006/diagram" xmlns:o="urn:schemas-microsoft-com:office:office" xmlns:v="urn:schemas-microsoft-com:vml" xmlns:pvml="urn:schemas-microsoft-com:office:powerpoint" xmlns:com="http://schemas.openxmlformats.org/drawingml/2006/compatibility" xmlns:p14="http://schemas.microsoft.com/office/powerpoint/2010/main" xmlns:p15="http://schemas.microsoft.com/office/powerpoint/2012/main" xmlns:ahyp="http://schemas.microsoft.com/office/drawing/2018/hyperlinkcolor" xmlns:go="http://customooxmlschemas.google.com/" xmlns="" r:id="rId52" roundtripDataSignature="AMtx7mhqKJAzFugGzrpaCdpbPJOL8OwfdA=="/>
     </p:ext>
   </p:extLst>
 </p:presentation>
@@ -1475,22 +1476,6 @@
     </pc:docChg>
   </pc:docChgLst>
   <pc:docChgLst>
-    <pc:chgData name="周立筠-數據應用部-永豐金證券" userId="S::liyun0222.zhou@sinopac.com::ee349c15-f274-43a3-b0c9-48d528d95247" providerId="AD" clId="Web-{A48564C8-421B-2203-E695-99D400D4424E}"/>
-    <pc:docChg chg="modSld">
-      <pc:chgData name="周立筠-數據應用部-永豐金證券" userId="S::liyun0222.zhou@sinopac.com::ee349c15-f274-43a3-b0c9-48d528d95247" providerId="AD" clId="Web-{A48564C8-421B-2203-E695-99D400D4424E}" dt="2024-08-23T09:42:27.791" v="49"/>
-      <pc:docMkLst>
-        <pc:docMk/>
-      </pc:docMkLst>
-      <pc:sldChg chg="modSp">
-        <pc:chgData name="周立筠-數據應用部-永豐金證券" userId="S::liyun0222.zhou@sinopac.com::ee349c15-f274-43a3-b0c9-48d528d95247" providerId="AD" clId="Web-{A48564C8-421B-2203-E695-99D400D4424E}" dt="2024-08-23T09:42:27.791" v="49"/>
-        <pc:sldMkLst>
-          <pc:docMk/>
-          <pc:sldMk cId="3262633635" sldId="297"/>
-        </pc:sldMkLst>
-      </pc:sldChg>
-    </pc:docChg>
-  </pc:docChgLst>
-  <pc:docChgLst>
     <pc:chgData name="張天豪-數位金融處-永豐銀行" userId="0d835702-99c9-4ef6-82d8-3ca86d4ccc15" providerId="ADAL" clId="{05C68244-A0A4-5F4B-A227-C47B6FE62571}"/>
     <pc:docChg chg="undo custSel addSld delSld modSld modMainMaster modSection">
       <pc:chgData name="張天豪-數位金融處-永豐銀行" userId="0d835702-99c9-4ef6-82d8-3ca86d4ccc15" providerId="ADAL" clId="{05C68244-A0A4-5F4B-A227-C47B6FE62571}" dt="2024-11-23T00:59:06.402" v="223" actId="12"/>
@@ -1591,6 +1576,22 @@
           </pc:sldLayoutMkLst>
         </pc:sldLayoutChg>
       </pc:sldMasterChg>
+    </pc:docChg>
+  </pc:docChgLst>
+  <pc:docChgLst>
+    <pc:chgData name="周立筠-數據應用部-永豐金證券" userId="S::liyun0222.zhou@sinopac.com::ee349c15-f274-43a3-b0c9-48d528d95247" providerId="AD" clId="Web-{A48564C8-421B-2203-E695-99D400D4424E}"/>
+    <pc:docChg chg="modSld">
+      <pc:chgData name="周立筠-數據應用部-永豐金證券" userId="S::liyun0222.zhou@sinopac.com::ee349c15-f274-43a3-b0c9-48d528d95247" providerId="AD" clId="Web-{A48564C8-421B-2203-E695-99D400D4424E}" dt="2024-08-23T09:42:27.791" v="49"/>
+      <pc:docMkLst>
+        <pc:docMk/>
+      </pc:docMkLst>
+      <pc:sldChg chg="modSp">
+        <pc:chgData name="周立筠-數據應用部-永豐金證券" userId="S::liyun0222.zhou@sinopac.com::ee349c15-f274-43a3-b0c9-48d528d95247" providerId="AD" clId="Web-{A48564C8-421B-2203-E695-99D400D4424E}" dt="2024-08-23T09:42:27.791" v="49"/>
+        <pc:sldMkLst>
+          <pc:docMk/>
+          <pc:sldMk cId="3262633635" sldId="297"/>
+        </pc:sldMkLst>
+      </pc:sldChg>
     </pc:docChg>
   </pc:docChgLst>
 </pc:chgInfo>
@@ -2700,6 +2701,90 @@
   <p:cSld>
     <p:spTree>
       <p:nvGrpSpPr>
+        <p:cNvPr id="1" name="">
+          <a:extLst>
+            <a:ext uri="{FF2B5EF4-FFF2-40B4-BE49-F238E27FC236}">
+              <a16:creationId xmlns:a16="http://schemas.microsoft.com/office/drawing/2014/main" id="{6CB35ECF-5484-5A82-9FA1-D687F5B2B9F7}"/>
+            </a:ext>
+          </a:extLst>
+        </p:cNvPr>
+        <p:cNvGrpSpPr/>
+        <p:nvPr/>
+      </p:nvGrpSpPr>
+      <p:grpSpPr>
+        <a:xfrm>
+          <a:off x="0" y="0"/>
+          <a:ext cx="0" cy="0"/>
+          <a:chOff x="0" y="0"/>
+          <a:chExt cx="0" cy="0"/>
+        </a:xfrm>
+      </p:grpSpPr>
+      <p:sp>
+        <p:nvSpPr>
+          <p:cNvPr id="2" name="投影片影像版面配置區 1">
+            <a:extLst>
+              <a:ext uri="{FF2B5EF4-FFF2-40B4-BE49-F238E27FC236}">
+                <a16:creationId xmlns:a16="http://schemas.microsoft.com/office/drawing/2014/main" id="{DEDA1422-8342-FA00-B680-1703319F4916}"/>
+              </a:ext>
+            </a:extLst>
+          </p:cNvPr>
+          <p:cNvSpPr>
+            <a:spLocks noGrp="1" noRot="1" noChangeAspect="1"/>
+          </p:cNvSpPr>
+          <p:nvPr>
+            <p:ph type="sldImg"/>
+          </p:nvPr>
+        </p:nvSpPr>
+        <p:spPr>
+          <a:xfrm>
+            <a:off x="381000" y="685800"/>
+            <a:ext cx="6096000" cy="3429000"/>
+          </a:xfrm>
+        </p:spPr>
+      </p:sp>
+      <p:sp>
+        <p:nvSpPr>
+          <p:cNvPr id="3" name="備忘稿版面配置區 2">
+            <a:extLst>
+              <a:ext uri="{FF2B5EF4-FFF2-40B4-BE49-F238E27FC236}">
+                <a16:creationId xmlns:a16="http://schemas.microsoft.com/office/drawing/2014/main" id="{EBADB196-F24D-ADB0-5C16-3E4872EFAD99}"/>
+              </a:ext>
+            </a:extLst>
+          </p:cNvPr>
+          <p:cNvSpPr>
+            <a:spLocks noGrp="1"/>
+          </p:cNvSpPr>
+          <p:nvPr>
+            <p:ph type="body" idx="1"/>
+          </p:nvPr>
+        </p:nvSpPr>
+        <p:spPr/>
+        <p:txBody>
+          <a:bodyPr/>
+          <a:lstStyle/>
+          <a:p>
+            <a:endParaRPr kumimoji="1" lang="zh-TW" altLang="en-US" dirty="0"/>
+          </a:p>
+        </p:txBody>
+      </p:sp>
+    </p:spTree>
+    <p:extLst>
+      <p:ext uri="{BB962C8B-B14F-4D97-AF65-F5344CB8AC3E}">
+        <p14:creationId xmlns:p14="http://schemas.microsoft.com/office/powerpoint/2010/main" val="2609647577"/>
+      </p:ext>
+    </p:extLst>
+  </p:cSld>
+  <p:clrMapOvr>
+    <a:masterClrMapping/>
+  </p:clrMapOvr>
+</p:notes>
+</file>
+
+<file path=ppt/notesSlides/notesSlide7.xml><?xml version="1.0" encoding="utf-8"?>
+<p:notes xmlns:a="http://schemas.openxmlformats.org/drawingml/2006/main" xmlns:r="http://schemas.openxmlformats.org/officeDocument/2006/relationships" xmlns:p="http://schemas.openxmlformats.org/presentationml/2006/main">
+  <p:cSld>
+    <p:spTree>
+      <p:nvGrpSpPr>
         <p:cNvPr id="1" name=""/>
         <p:cNvGrpSpPr/>
         <p:nvPr/>
@@ -3135,7 +3220,7 @@
 </p:notes>
 </file>
 
-<file path=ppt/notesSlides/notesSlide7.xml><?xml version="1.0" encoding="utf-8"?>
+<file path=ppt/notesSlides/notesSlide8.xml><?xml version="1.0" encoding="utf-8"?>
 <p:notes xmlns:a="http://schemas.openxmlformats.org/drawingml/2006/main" xmlns:r="http://schemas.openxmlformats.org/officeDocument/2006/relationships" xmlns:p="http://schemas.openxmlformats.org/presentationml/2006/main">
   <p:cSld>
     <p:spTree>
@@ -3201,7 +3286,7 @@
 </p:notes>
 </file>
 
-<file path=ppt/notesSlides/notesSlide8.xml><?xml version="1.0" encoding="utf-8"?>
+<file path=ppt/notesSlides/notesSlide9.xml><?xml version="1.0" encoding="utf-8"?>
 <p:notes xmlns:a="http://schemas.openxmlformats.org/drawingml/2006/main" xmlns:r="http://schemas.openxmlformats.org/officeDocument/2006/relationships" xmlns:p="http://schemas.openxmlformats.org/presentationml/2006/main">
   <p:cSld>
     <p:spTree>
@@ -6724,6 +6809,1035 @@
 </p:sld>
 </file>
 
+<file path=ppt/slides/slide10.xml><?xml version="1.0" encoding="utf-8"?>
+<p:sld xmlns:a="http://schemas.openxmlformats.org/drawingml/2006/main" xmlns:r="http://schemas.openxmlformats.org/officeDocument/2006/relationships" xmlns:p="http://schemas.openxmlformats.org/presentationml/2006/main">
+  <p:cSld>
+    <p:spTree>
+      <p:nvGrpSpPr>
+        <p:cNvPr id="1" name=""/>
+        <p:cNvGrpSpPr/>
+        <p:nvPr/>
+      </p:nvGrpSpPr>
+      <p:grpSpPr>
+        <a:xfrm>
+          <a:off x="0" y="0"/>
+          <a:ext cx="0" cy="0"/>
+          <a:chOff x="0" y="0"/>
+          <a:chExt cx="0" cy="0"/>
+        </a:xfrm>
+      </p:grpSpPr>
+      <p:graphicFrame>
+        <p:nvGraphicFramePr>
+          <p:cNvPr id="2" name="表格 1">
+            <a:extLst>
+              <a:ext uri="{FF2B5EF4-FFF2-40B4-BE49-F238E27FC236}">
+                <a16:creationId xmlns:a16="http://schemas.microsoft.com/office/drawing/2014/main" id="{C5B7B4DB-FF6E-743F-443E-643AB8056383}"/>
+              </a:ext>
+            </a:extLst>
+          </p:cNvPr>
+          <p:cNvGraphicFramePr>
+            <a:graphicFrameLocks noGrp="1"/>
+          </p:cNvGraphicFramePr>
+          <p:nvPr>
+            <p:extLst>
+              <p:ext uri="{D42A27DB-BD31-4B8C-83A1-F6EECF244321}">
+                <p14:modId xmlns:p14="http://schemas.microsoft.com/office/powerpoint/2010/main" val="1846944417"/>
+              </p:ext>
+            </p:extLst>
+          </p:nvPr>
+        </p:nvGraphicFramePr>
+        <p:xfrm>
+          <a:off x="845344" y="875664"/>
+          <a:ext cx="9829800" cy="4259348"/>
+        </p:xfrm>
+        <a:graphic>
+          <a:graphicData uri="http://schemas.openxmlformats.org/drawingml/2006/table">
+            <a:tbl>
+              <a:tblPr>
+                <a:tableStyleId>{91DB7C30-2B5D-4D34-8F22-85940E495A18}</a:tableStyleId>
+              </a:tblPr>
+              <a:tblGrid>
+                <a:gridCol w="3276600">
+                  <a:extLst>
+                    <a:ext uri="{9D8B030D-6E8A-4147-A177-3AD203B41FA5}">
+                      <a16:colId xmlns:a16="http://schemas.microsoft.com/office/drawing/2014/main" val="1979650834"/>
+                    </a:ext>
+                  </a:extLst>
+                </a:gridCol>
+                <a:gridCol w="3276600">
+                  <a:extLst>
+                    <a:ext uri="{9D8B030D-6E8A-4147-A177-3AD203B41FA5}">
+                      <a16:colId xmlns:a16="http://schemas.microsoft.com/office/drawing/2014/main" val="2978366162"/>
+                    </a:ext>
+                  </a:extLst>
+                </a:gridCol>
+                <a:gridCol w="3276600">
+                  <a:extLst>
+                    <a:ext uri="{9D8B030D-6E8A-4147-A177-3AD203B41FA5}">
+                      <a16:colId xmlns:a16="http://schemas.microsoft.com/office/drawing/2014/main" val="971725472"/>
+                    </a:ext>
+                  </a:extLst>
+                </a:gridCol>
+              </a:tblGrid>
+              <a:tr h="221055">
+                <a:tc>
+                  <a:txBody>
+                    <a:bodyPr/>
+                    <a:lstStyle/>
+                    <a:p>
+                      <a:pPr>
+                        <a:buNone/>
+                      </a:pPr>
+                      <a:r>
+                        <a:rPr lang="zh-TW" altLang="en-US" sz="1000" dirty="0"/>
+                        <a:t>套件</a:t>
+                      </a:r>
+                    </a:p>
+                  </a:txBody>
+                  <a:tcPr marL="66317" marR="66317" marT="33158" marB="33158" anchor="ctr"/>
+                </a:tc>
+                <a:tc>
+                  <a:txBody>
+                    <a:bodyPr/>
+                    <a:lstStyle/>
+                    <a:p>
+                      <a:pPr>
+                        <a:buNone/>
+                      </a:pPr>
+                      <a:r>
+                        <a:rPr lang="zh-TW" altLang="en-US" sz="1000"/>
+                        <a:t>版本號</a:t>
+                      </a:r>
+                    </a:p>
+                  </a:txBody>
+                  <a:tcPr marL="66317" marR="66317" marT="33158" marB="33158" anchor="ctr"/>
+                </a:tc>
+                <a:tc>
+                  <a:txBody>
+                    <a:bodyPr/>
+                    <a:lstStyle/>
+                    <a:p>
+                      <a:pPr>
+                        <a:buNone/>
+                      </a:pPr>
+                      <a:r>
+                        <a:rPr lang="zh-TW" altLang="en-US" sz="1000"/>
+                        <a:t>許可證</a:t>
+                      </a:r>
+                    </a:p>
+                  </a:txBody>
+                  <a:tcPr marL="66317" marR="66317" marT="33158" marB="33158" anchor="ctr"/>
+                </a:tc>
+                <a:extLst>
+                  <a:ext uri="{0D108BD9-81ED-4DB2-BD59-A6C34878D82A}">
+                    <a16:rowId xmlns:a16="http://schemas.microsoft.com/office/drawing/2014/main" val="2034365754"/>
+                  </a:ext>
+                </a:extLst>
+              </a:tr>
+              <a:tr h="375794">
+                <a:tc>
+                  <a:txBody>
+                    <a:bodyPr/>
+                    <a:lstStyle/>
+                    <a:p>
+                      <a:pPr>
+                        <a:buNone/>
+                      </a:pPr>
+                      <a:r>
+                        <a:rPr lang="en" sz="1000" dirty="0"/>
+                        <a:t>@</a:t>
+                      </a:r>
+                      <a:r>
+                        <a:rPr lang="en" sz="1000" dirty="0" err="1"/>
+                        <a:t>nestjs</a:t>
+                      </a:r>
+                      <a:r>
+                        <a:rPr lang="en" sz="1000" dirty="0"/>
+                        <a:t>/common</a:t>
+                      </a:r>
+                    </a:p>
+                    <a:p>
+                      <a:pPr>
+                        <a:buNone/>
+                      </a:pPr>
+                      <a:r>
+                        <a:rPr lang="en" sz="1000" dirty="0"/>
+                        <a:t>@</a:t>
+                      </a:r>
+                      <a:r>
+                        <a:rPr lang="en" sz="1000" dirty="0" err="1"/>
+                        <a:t>nestjs</a:t>
+                      </a:r>
+                      <a:r>
+                        <a:rPr lang="en" sz="1000" dirty="0"/>
+                        <a:t>/core</a:t>
+                      </a:r>
+                    </a:p>
+                    <a:p>
+                      <a:pPr>
+                        <a:buNone/>
+                      </a:pPr>
+                      <a:r>
+                        <a:rPr lang="en" sz="1000" dirty="0"/>
+                        <a:t>@</a:t>
+                      </a:r>
+                      <a:r>
+                        <a:rPr lang="en" sz="1000" dirty="0" err="1"/>
+                        <a:t>nestjs</a:t>
+                      </a:r>
+                      <a:r>
+                        <a:rPr lang="en" sz="1000" dirty="0"/>
+                        <a:t>/platform-express</a:t>
+                      </a:r>
+                    </a:p>
+                  </a:txBody>
+                  <a:tcPr marL="66317" marR="66317" marT="33158" marB="33158" anchor="ctr"/>
+                </a:tc>
+                <a:tc>
+                  <a:txBody>
+                    <a:bodyPr/>
+                    <a:lstStyle/>
+                    <a:p>
+                      <a:pPr>
+                        <a:buNone/>
+                      </a:pPr>
+                      <a:r>
+                        <a:rPr lang="en-US" altLang="zh-TW" sz="1000"/>
+                        <a:t>11.1.6</a:t>
+                      </a:r>
+                      <a:endParaRPr lang="zh-TW" altLang="en-US" sz="1000"/>
+                    </a:p>
+                  </a:txBody>
+                  <a:tcPr marL="66317" marR="66317" marT="33158" marB="33158" anchor="ctr"/>
+                </a:tc>
+                <a:tc>
+                  <a:txBody>
+                    <a:bodyPr/>
+                    <a:lstStyle/>
+                    <a:p>
+                      <a:pPr>
+                        <a:buNone/>
+                      </a:pPr>
+                      <a:r>
+                        <a:rPr lang="en" sz="1000"/>
+                        <a:t>MIT</a:t>
+                      </a:r>
+                    </a:p>
+                  </a:txBody>
+                  <a:tcPr marL="66317" marR="66317" marT="33158" marB="33158" anchor="ctr"/>
+                </a:tc>
+                <a:extLst>
+                  <a:ext uri="{0D108BD9-81ED-4DB2-BD59-A6C34878D82A}">
+                    <a16:rowId xmlns:a16="http://schemas.microsoft.com/office/drawing/2014/main" val="177764190"/>
+                  </a:ext>
+                </a:extLst>
+              </a:tr>
+              <a:tr h="221055">
+                <a:tc>
+                  <a:txBody>
+                    <a:bodyPr/>
+                    <a:lstStyle/>
+                    <a:p>
+                      <a:pPr>
+                        <a:buNone/>
+                      </a:pPr>
+                      <a:r>
+                        <a:rPr lang="en" sz="1000"/>
+                        <a:t>@nestjs/config</a:t>
+                      </a:r>
+                    </a:p>
+                  </a:txBody>
+                  <a:tcPr marL="66317" marR="66317" marT="33158" marB="33158" anchor="ctr"/>
+                </a:tc>
+                <a:tc>
+                  <a:txBody>
+                    <a:bodyPr/>
+                    <a:lstStyle/>
+                    <a:p>
+                      <a:pPr>
+                        <a:buNone/>
+                      </a:pPr>
+                      <a:r>
+                        <a:rPr lang="en-US" altLang="zh-TW" sz="1000"/>
+                        <a:t>4.0.2</a:t>
+                      </a:r>
+                      <a:endParaRPr lang="zh-TW" altLang="en-US" sz="1000"/>
+                    </a:p>
+                  </a:txBody>
+                  <a:tcPr marL="66317" marR="66317" marT="33158" marB="33158" anchor="ctr"/>
+                </a:tc>
+                <a:tc>
+                  <a:txBody>
+                    <a:bodyPr/>
+                    <a:lstStyle/>
+                    <a:p>
+                      <a:pPr>
+                        <a:buNone/>
+                      </a:pPr>
+                      <a:r>
+                        <a:rPr lang="en" sz="1000"/>
+                        <a:t>MIT</a:t>
+                      </a:r>
+                    </a:p>
+                  </a:txBody>
+                  <a:tcPr marL="66317" marR="66317" marT="33158" marB="33158" anchor="ctr"/>
+                </a:tc>
+                <a:extLst>
+                  <a:ext uri="{0D108BD9-81ED-4DB2-BD59-A6C34878D82A}">
+                    <a16:rowId xmlns:a16="http://schemas.microsoft.com/office/drawing/2014/main" val="3883179950"/>
+                  </a:ext>
+                </a:extLst>
+              </a:tr>
+              <a:tr h="221055">
+                <a:tc>
+                  <a:txBody>
+                    <a:bodyPr/>
+                    <a:lstStyle/>
+                    <a:p>
+                      <a:pPr>
+                        <a:buNone/>
+                      </a:pPr>
+                      <a:r>
+                        <a:rPr lang="en" sz="1000"/>
+                        <a:t>@nestjs/swagger</a:t>
+                      </a:r>
+                    </a:p>
+                  </a:txBody>
+                  <a:tcPr marL="66317" marR="66317" marT="33158" marB="33158" anchor="ctr"/>
+                </a:tc>
+                <a:tc>
+                  <a:txBody>
+                    <a:bodyPr/>
+                    <a:lstStyle/>
+                    <a:p>
+                      <a:pPr>
+                        <a:buNone/>
+                      </a:pPr>
+                      <a:r>
+                        <a:rPr lang="en-US" altLang="zh-TW" sz="1000"/>
+                        <a:t>11.2.0</a:t>
+                      </a:r>
+                      <a:endParaRPr lang="zh-TW" altLang="en-US" sz="1000"/>
+                    </a:p>
+                  </a:txBody>
+                  <a:tcPr marL="66317" marR="66317" marT="33158" marB="33158" anchor="ctr"/>
+                </a:tc>
+                <a:tc>
+                  <a:txBody>
+                    <a:bodyPr/>
+                    <a:lstStyle/>
+                    <a:p>
+                      <a:pPr>
+                        <a:buNone/>
+                      </a:pPr>
+                      <a:r>
+                        <a:rPr lang="en" sz="1000"/>
+                        <a:t>MIT</a:t>
+                      </a:r>
+                    </a:p>
+                  </a:txBody>
+                  <a:tcPr marL="66317" marR="66317" marT="33158" marB="33158" anchor="ctr"/>
+                </a:tc>
+                <a:extLst>
+                  <a:ext uri="{0D108BD9-81ED-4DB2-BD59-A6C34878D82A}">
+                    <a16:rowId xmlns:a16="http://schemas.microsoft.com/office/drawing/2014/main" val="810962820"/>
+                  </a:ext>
+                </a:extLst>
+              </a:tr>
+              <a:tr h="221055">
+                <a:tc>
+                  <a:txBody>
+                    <a:bodyPr/>
+                    <a:lstStyle/>
+                    <a:p>
+                      <a:pPr>
+                        <a:buNone/>
+                      </a:pPr>
+                      <a:r>
+                        <a:rPr lang="en" sz="1000" dirty="0"/>
+                        <a:t>@</a:t>
+                      </a:r>
+                      <a:r>
+                        <a:rPr lang="en" sz="1000" dirty="0" err="1"/>
+                        <a:t>nestjs</a:t>
+                      </a:r>
+                      <a:r>
+                        <a:rPr lang="en" sz="1000" dirty="0"/>
+                        <a:t>/</a:t>
+                      </a:r>
+                      <a:r>
+                        <a:rPr lang="en" sz="1000" dirty="0" err="1"/>
+                        <a:t>mongoose、mongoose</a:t>
+                      </a:r>
+                      <a:endParaRPr lang="en" sz="1000" dirty="0"/>
+                    </a:p>
+                  </a:txBody>
+                  <a:tcPr marL="66317" marR="66317" marT="33158" marB="33158" anchor="ctr"/>
+                </a:tc>
+                <a:tc>
+                  <a:txBody>
+                    <a:bodyPr/>
+                    <a:lstStyle/>
+                    <a:p>
+                      <a:pPr>
+                        <a:buNone/>
+                      </a:pPr>
+                      <a:r>
+                        <a:rPr lang="en-US" altLang="zh-TW" sz="1000"/>
+                        <a:t>11.0.3</a:t>
+                      </a:r>
+                      <a:r>
+                        <a:rPr lang="zh-TW" altLang="en-US" sz="1000"/>
+                        <a:t>、</a:t>
+                      </a:r>
+                      <a:r>
+                        <a:rPr lang="en-US" altLang="zh-TW" sz="1000"/>
+                        <a:t>8.18.1</a:t>
+                      </a:r>
+                      <a:endParaRPr lang="zh-TW" altLang="en-US" sz="1000"/>
+                    </a:p>
+                  </a:txBody>
+                  <a:tcPr marL="66317" marR="66317" marT="33158" marB="33158" anchor="ctr"/>
+                </a:tc>
+                <a:tc>
+                  <a:txBody>
+                    <a:bodyPr/>
+                    <a:lstStyle/>
+                    <a:p>
+                      <a:pPr>
+                        <a:buNone/>
+                      </a:pPr>
+                      <a:r>
+                        <a:rPr lang="en" sz="1000"/>
+                        <a:t>MIT</a:t>
+                      </a:r>
+                    </a:p>
+                  </a:txBody>
+                  <a:tcPr marL="66317" marR="66317" marT="33158" marB="33158" anchor="ctr"/>
+                </a:tc>
+                <a:extLst>
+                  <a:ext uri="{0D108BD9-81ED-4DB2-BD59-A6C34878D82A}">
+                    <a16:rowId xmlns:a16="http://schemas.microsoft.com/office/drawing/2014/main" val="2553881078"/>
+                  </a:ext>
+                </a:extLst>
+              </a:tr>
+              <a:tr h="375794">
+                <a:tc>
+                  <a:txBody>
+                    <a:bodyPr/>
+                    <a:lstStyle/>
+                    <a:p>
+                      <a:pPr>
+                        <a:buNone/>
+                      </a:pPr>
+                      <a:r>
+                        <a:rPr lang="en" sz="1000"/>
+                        <a:t>@nestjs/bullmq、bullmq、ioredis</a:t>
+                      </a:r>
+                    </a:p>
+                  </a:txBody>
+                  <a:tcPr marL="66317" marR="66317" marT="33158" marB="33158" anchor="ctr"/>
+                </a:tc>
+                <a:tc>
+                  <a:txBody>
+                    <a:bodyPr/>
+                    <a:lstStyle/>
+                    <a:p>
+                      <a:pPr>
+                        <a:buNone/>
+                      </a:pPr>
+                      <a:r>
+                        <a:rPr lang="en-US" altLang="zh-TW" sz="1000"/>
+                        <a:t>11.0.3</a:t>
+                      </a:r>
+                      <a:r>
+                        <a:rPr lang="zh-TW" altLang="en-US" sz="1000"/>
+                        <a:t>、</a:t>
+                      </a:r>
+                      <a:r>
+                        <a:rPr lang="en-US" altLang="zh-TW" sz="1000"/>
+                        <a:t>5.58.5</a:t>
+                      </a:r>
+                      <a:r>
+                        <a:rPr lang="zh-TW" altLang="en-US" sz="1000"/>
+                        <a:t>、</a:t>
+                      </a:r>
+                      <a:r>
+                        <a:rPr lang="en-US" altLang="zh-TW" sz="1000"/>
+                        <a:t>5.7.0</a:t>
+                      </a:r>
+                      <a:endParaRPr lang="zh-TW" altLang="en-US" sz="1000"/>
+                    </a:p>
+                  </a:txBody>
+                  <a:tcPr marL="66317" marR="66317" marT="33158" marB="33158" anchor="ctr"/>
+                </a:tc>
+                <a:tc>
+                  <a:txBody>
+                    <a:bodyPr/>
+                    <a:lstStyle/>
+                    <a:p>
+                      <a:pPr>
+                        <a:buNone/>
+                      </a:pPr>
+                      <a:r>
+                        <a:rPr lang="en" sz="1000"/>
+                        <a:t>MIT</a:t>
+                      </a:r>
+                    </a:p>
+                  </a:txBody>
+                  <a:tcPr marL="66317" marR="66317" marT="33158" marB="33158" anchor="ctr"/>
+                </a:tc>
+                <a:extLst>
+                  <a:ext uri="{0D108BD9-81ED-4DB2-BD59-A6C34878D82A}">
+                    <a16:rowId xmlns:a16="http://schemas.microsoft.com/office/drawing/2014/main" val="2015474949"/>
+                  </a:ext>
+                </a:extLst>
+              </a:tr>
+              <a:tr h="375794">
+                <a:tc>
+                  <a:txBody>
+                    <a:bodyPr/>
+                    <a:lstStyle/>
+                    <a:p>
+                      <a:pPr>
+                        <a:buNone/>
+                      </a:pPr>
+                      <a:r>
+                        <a:rPr lang="en" sz="1000"/>
+                        <a:t>@nestjs/cache-manager、cache-manager、keyv、@keyv/redis</a:t>
+                      </a:r>
+                    </a:p>
+                  </a:txBody>
+                  <a:tcPr marL="66317" marR="66317" marT="33158" marB="33158" anchor="ctr"/>
+                </a:tc>
+                <a:tc>
+                  <a:txBody>
+                    <a:bodyPr/>
+                    <a:lstStyle/>
+                    <a:p>
+                      <a:pPr>
+                        <a:buNone/>
+                      </a:pPr>
+                      <a:r>
+                        <a:rPr lang="en-US" altLang="zh-TW" sz="1000" dirty="0"/>
+                        <a:t>3.1.0</a:t>
+                      </a:r>
+                      <a:r>
+                        <a:rPr lang="zh-TW" altLang="en-US" sz="1000" dirty="0"/>
+                        <a:t>、</a:t>
+                      </a:r>
+                      <a:r>
+                        <a:rPr lang="en-US" altLang="zh-TW" sz="1000" dirty="0"/>
+                        <a:t>7.2.8</a:t>
+                      </a:r>
+                      <a:r>
+                        <a:rPr lang="zh-TW" altLang="en-US" sz="1000" dirty="0"/>
+                        <a:t>、</a:t>
+                      </a:r>
+                      <a:r>
+                        <a:rPr lang="en-US" altLang="zh-TW" sz="1000" dirty="0"/>
+                        <a:t>5.6.0</a:t>
+                      </a:r>
+                      <a:r>
+                        <a:rPr lang="zh-TW" altLang="en-US" sz="1000" dirty="0"/>
+                        <a:t>、</a:t>
+                      </a:r>
+                      <a:r>
+                        <a:rPr lang="en-US" altLang="zh-TW" sz="1000" dirty="0"/>
+                        <a:t>5.1.6</a:t>
+                      </a:r>
+                      <a:endParaRPr lang="zh-TW" altLang="en-US" sz="1000" dirty="0"/>
+                    </a:p>
+                  </a:txBody>
+                  <a:tcPr marL="66317" marR="66317" marT="33158" marB="33158" anchor="ctr"/>
+                </a:tc>
+                <a:tc>
+                  <a:txBody>
+                    <a:bodyPr/>
+                    <a:lstStyle/>
+                    <a:p>
+                      <a:pPr>
+                        <a:buNone/>
+                      </a:pPr>
+                      <a:r>
+                        <a:rPr lang="en" sz="1000"/>
+                        <a:t>MIT</a:t>
+                      </a:r>
+                    </a:p>
+                  </a:txBody>
+                  <a:tcPr marL="66317" marR="66317" marT="33158" marB="33158" anchor="ctr"/>
+                </a:tc>
+                <a:extLst>
+                  <a:ext uri="{0D108BD9-81ED-4DB2-BD59-A6C34878D82A}">
+                    <a16:rowId xmlns:a16="http://schemas.microsoft.com/office/drawing/2014/main" val="3836038363"/>
+                  </a:ext>
+                </a:extLst>
+              </a:tr>
+              <a:tr h="530532">
+                <a:tc>
+                  <a:txBody>
+                    <a:bodyPr/>
+                    <a:lstStyle/>
+                    <a:p>
+                      <a:pPr>
+                        <a:buNone/>
+                      </a:pPr>
+                      <a:r>
+                        <a:rPr lang="en" sz="1000" dirty="0"/>
+                        <a:t>@</a:t>
+                      </a:r>
+                      <a:r>
+                        <a:rPr lang="en" sz="1000" dirty="0" err="1"/>
+                        <a:t>nestjs</a:t>
+                      </a:r>
+                      <a:r>
+                        <a:rPr lang="en" sz="1000" dirty="0"/>
+                        <a:t>/</a:t>
+                      </a:r>
+                      <a:r>
+                        <a:rPr lang="en" sz="1000" dirty="0" err="1"/>
+                        <a:t>jwt</a:t>
+                      </a:r>
+                      <a:r>
+                        <a:rPr lang="en" sz="1000" dirty="0"/>
+                        <a:t>、@</a:t>
+                      </a:r>
+                      <a:r>
+                        <a:rPr lang="en" sz="1000" dirty="0" err="1"/>
+                        <a:t>nestjs</a:t>
+                      </a:r>
+                      <a:r>
+                        <a:rPr lang="en" sz="1000" dirty="0"/>
+                        <a:t>/</a:t>
+                      </a:r>
+                      <a:r>
+                        <a:rPr lang="en" sz="1000" dirty="0" err="1"/>
+                        <a:t>passport、passport、passport-microsoft</a:t>
+                      </a:r>
+                      <a:r>
+                        <a:rPr lang="en" sz="1000" dirty="0"/>
+                        <a:t>、@azure/</a:t>
+                      </a:r>
+                      <a:r>
+                        <a:rPr lang="en" sz="1000" dirty="0" err="1"/>
+                        <a:t>msal</a:t>
+                      </a:r>
+                      <a:r>
+                        <a:rPr lang="en" sz="1000" dirty="0"/>
+                        <a:t>-node</a:t>
+                      </a:r>
+                    </a:p>
+                  </a:txBody>
+                  <a:tcPr marL="66317" marR="66317" marT="33158" marB="33158" anchor="ctr"/>
+                </a:tc>
+                <a:tc>
+                  <a:txBody>
+                    <a:bodyPr/>
+                    <a:lstStyle/>
+                    <a:p>
+                      <a:pPr>
+                        <a:buNone/>
+                      </a:pPr>
+                      <a:r>
+                        <a:rPr lang="en-US" altLang="zh-TW" sz="1000" dirty="0"/>
+                        <a:t>11.0.0</a:t>
+                      </a:r>
+                      <a:r>
+                        <a:rPr lang="zh-TW" altLang="en-US" sz="1000" dirty="0"/>
+                        <a:t>、</a:t>
+                      </a:r>
+                      <a:r>
+                        <a:rPr lang="en-US" altLang="zh-TW" sz="1000" dirty="0"/>
+                        <a:t>11.0.5</a:t>
+                      </a:r>
+                      <a:r>
+                        <a:rPr lang="zh-TW" altLang="en-US" sz="1000" dirty="0"/>
+                        <a:t>、</a:t>
+                      </a:r>
+                      <a:r>
+                        <a:rPr lang="en-US" altLang="zh-TW" sz="1000" dirty="0"/>
+                        <a:t>0.7.0</a:t>
+                      </a:r>
+                      <a:r>
+                        <a:rPr lang="zh-TW" altLang="en-US" sz="1000" dirty="0"/>
+                        <a:t>、</a:t>
+                      </a:r>
+                      <a:r>
+                        <a:rPr lang="en-US" altLang="zh-TW" sz="1000" dirty="0"/>
+                        <a:t>2.1.0</a:t>
+                      </a:r>
+                      <a:r>
+                        <a:rPr lang="zh-TW" altLang="en-US" sz="1000" dirty="0"/>
+                        <a:t>、</a:t>
+                      </a:r>
+                      <a:r>
+                        <a:rPr lang="en-US" altLang="zh-TW" sz="1000" dirty="0"/>
+                        <a:t>3.8.1</a:t>
+                      </a:r>
+                      <a:endParaRPr lang="zh-TW" altLang="en-US" sz="1000" dirty="0"/>
+                    </a:p>
+                  </a:txBody>
+                  <a:tcPr marL="66317" marR="66317" marT="33158" marB="33158" anchor="ctr"/>
+                </a:tc>
+                <a:tc>
+                  <a:txBody>
+                    <a:bodyPr/>
+                    <a:lstStyle/>
+                    <a:p>
+                      <a:pPr>
+                        <a:buNone/>
+                      </a:pPr>
+                      <a:r>
+                        <a:rPr lang="en" sz="1000"/>
+                        <a:t>MIT</a:t>
+                      </a:r>
+                    </a:p>
+                  </a:txBody>
+                  <a:tcPr marL="66317" marR="66317" marT="33158" marB="33158" anchor="ctr"/>
+                </a:tc>
+                <a:extLst>
+                  <a:ext uri="{0D108BD9-81ED-4DB2-BD59-A6C34878D82A}">
+                    <a16:rowId xmlns:a16="http://schemas.microsoft.com/office/drawing/2014/main" val="1004309143"/>
+                  </a:ext>
+                </a:extLst>
+              </a:tr>
+              <a:tr h="221055">
+                <a:tc>
+                  <a:txBody>
+                    <a:bodyPr/>
+                    <a:lstStyle/>
+                    <a:p>
+                      <a:pPr>
+                        <a:buNone/>
+                      </a:pPr>
+                      <a:r>
+                        <a:rPr lang="en" sz="1000"/>
+                        <a:t>@github/copilot-sdk</a:t>
+                      </a:r>
+                    </a:p>
+                  </a:txBody>
+                  <a:tcPr marL="66317" marR="66317" marT="33158" marB="33158" anchor="ctr"/>
+                </a:tc>
+                <a:tc>
+                  <a:txBody>
+                    <a:bodyPr/>
+                    <a:lstStyle/>
+                    <a:p>
+                      <a:pPr>
+                        <a:buNone/>
+                      </a:pPr>
+                      <a:r>
+                        <a:rPr lang="en-US" altLang="zh-TW" sz="1000" dirty="0"/>
+                        <a:t>0.3.0</a:t>
+                      </a:r>
+                      <a:endParaRPr lang="zh-TW" altLang="en-US" sz="1000" dirty="0"/>
+                    </a:p>
+                  </a:txBody>
+                  <a:tcPr marL="66317" marR="66317" marT="33158" marB="33158" anchor="ctr"/>
+                </a:tc>
+                <a:tc>
+                  <a:txBody>
+                    <a:bodyPr/>
+                    <a:lstStyle/>
+                    <a:p>
+                      <a:pPr>
+                        <a:buNone/>
+                      </a:pPr>
+                      <a:r>
+                        <a:rPr lang="en" sz="1000"/>
+                        <a:t>MIT</a:t>
+                      </a:r>
+                    </a:p>
+                  </a:txBody>
+                  <a:tcPr marL="66317" marR="66317" marT="33158" marB="33158" anchor="ctr"/>
+                </a:tc>
+                <a:extLst>
+                  <a:ext uri="{0D108BD9-81ED-4DB2-BD59-A6C34878D82A}">
+                    <a16:rowId xmlns:a16="http://schemas.microsoft.com/office/drawing/2014/main" val="2872064740"/>
+                  </a:ext>
+                </a:extLst>
+              </a:tr>
+              <a:tr h="375794">
+                <a:tc>
+                  <a:txBody>
+                    <a:bodyPr/>
+                    <a:lstStyle/>
+                    <a:p>
+                      <a:pPr>
+                        <a:buNone/>
+                      </a:pPr>
+                      <a:r>
+                        <a:rPr lang="en" sz="1000"/>
+                        <a:t>class-validator、class-transformer、zod</a:t>
+                      </a:r>
+                    </a:p>
+                  </a:txBody>
+                  <a:tcPr marL="66317" marR="66317" marT="33158" marB="33158" anchor="ctr"/>
+                </a:tc>
+                <a:tc>
+                  <a:txBody>
+                    <a:bodyPr/>
+                    <a:lstStyle/>
+                    <a:p>
+                      <a:pPr>
+                        <a:buNone/>
+                      </a:pPr>
+                      <a:r>
+                        <a:rPr lang="en-US" altLang="zh-TW" sz="1000"/>
+                        <a:t>0.14.2</a:t>
+                      </a:r>
+                      <a:r>
+                        <a:rPr lang="zh-TW" altLang="en-US" sz="1000"/>
+                        <a:t>、</a:t>
+                      </a:r>
+                      <a:r>
+                        <a:rPr lang="en-US" altLang="zh-TW" sz="1000"/>
+                        <a:t>0.5.1</a:t>
+                      </a:r>
+                      <a:r>
+                        <a:rPr lang="zh-TW" altLang="en-US" sz="1000"/>
+                        <a:t>、</a:t>
+                      </a:r>
+                      <a:r>
+                        <a:rPr lang="en-US" altLang="zh-TW" sz="1000"/>
+                        <a:t>4.3.6</a:t>
+                      </a:r>
+                      <a:endParaRPr lang="zh-TW" altLang="en-US" sz="1000"/>
+                    </a:p>
+                  </a:txBody>
+                  <a:tcPr marL="66317" marR="66317" marT="33158" marB="33158" anchor="ctr"/>
+                </a:tc>
+                <a:tc>
+                  <a:txBody>
+                    <a:bodyPr/>
+                    <a:lstStyle/>
+                    <a:p>
+                      <a:pPr>
+                        <a:buNone/>
+                      </a:pPr>
+                      <a:r>
+                        <a:rPr lang="en" sz="1000"/>
+                        <a:t>MIT</a:t>
+                      </a:r>
+                    </a:p>
+                  </a:txBody>
+                  <a:tcPr marL="66317" marR="66317" marT="33158" marB="33158" anchor="ctr"/>
+                </a:tc>
+                <a:extLst>
+                  <a:ext uri="{0D108BD9-81ED-4DB2-BD59-A6C34878D82A}">
+                    <a16:rowId xmlns:a16="http://schemas.microsoft.com/office/drawing/2014/main" val="2144807841"/>
+                  </a:ext>
+                </a:extLst>
+              </a:tr>
+              <a:tr h="375794">
+                <a:tc>
+                  <a:txBody>
+                    <a:bodyPr/>
+                    <a:lstStyle/>
+                    <a:p>
+                      <a:pPr>
+                        <a:buNone/>
+                      </a:pPr>
+                      <a:r>
+                        <a:rPr lang="en" sz="1000"/>
+                        <a:t>rss-parser、@tavily/core、axios</a:t>
+                      </a:r>
+                    </a:p>
+                  </a:txBody>
+                  <a:tcPr marL="66317" marR="66317" marT="33158" marB="33158" anchor="ctr"/>
+                </a:tc>
+                <a:tc>
+                  <a:txBody>
+                    <a:bodyPr/>
+                    <a:lstStyle/>
+                    <a:p>
+                      <a:pPr>
+                        <a:buNone/>
+                      </a:pPr>
+                      <a:r>
+                        <a:rPr lang="en-US" altLang="zh-TW" sz="1000"/>
+                        <a:t>3.13.0</a:t>
+                      </a:r>
+                      <a:r>
+                        <a:rPr lang="zh-TW" altLang="en-US" sz="1000"/>
+                        <a:t>、</a:t>
+                      </a:r>
+                      <a:r>
+                        <a:rPr lang="en-US" altLang="zh-TW" sz="1000"/>
+                        <a:t>0.5.12</a:t>
+                      </a:r>
+                      <a:r>
+                        <a:rPr lang="zh-TW" altLang="en-US" sz="1000"/>
+                        <a:t>、</a:t>
+                      </a:r>
+                      <a:r>
+                        <a:rPr lang="en-US" altLang="zh-TW" sz="1000"/>
+                        <a:t>1.15.0</a:t>
+                      </a:r>
+                      <a:endParaRPr lang="zh-TW" altLang="en-US" sz="1000"/>
+                    </a:p>
+                  </a:txBody>
+                  <a:tcPr marL="66317" marR="66317" marT="33158" marB="33158" anchor="ctr"/>
+                </a:tc>
+                <a:tc>
+                  <a:txBody>
+                    <a:bodyPr/>
+                    <a:lstStyle/>
+                    <a:p>
+                      <a:pPr>
+                        <a:buNone/>
+                      </a:pPr>
+                      <a:r>
+                        <a:rPr lang="en" sz="1000"/>
+                        <a:t>MIT</a:t>
+                      </a:r>
+                    </a:p>
+                  </a:txBody>
+                  <a:tcPr marL="66317" marR="66317" marT="33158" marB="33158" anchor="ctr"/>
+                </a:tc>
+                <a:extLst>
+                  <a:ext uri="{0D108BD9-81ED-4DB2-BD59-A6C34878D82A}">
+                    <a16:rowId xmlns:a16="http://schemas.microsoft.com/office/drawing/2014/main" val="449841225"/>
+                  </a:ext>
+                </a:extLst>
+              </a:tr>
+              <a:tr h="375794">
+                <a:tc>
+                  <a:txBody>
+                    <a:bodyPr/>
+                    <a:lstStyle/>
+                    <a:p>
+                      <a:pPr>
+                        <a:buNone/>
+                      </a:pPr>
+                      <a:r>
+                        <a:rPr lang="en" sz="1000"/>
+                        <a:t>@bull-board/api、@bull-board/express</a:t>
+                      </a:r>
+                    </a:p>
+                  </a:txBody>
+                  <a:tcPr marL="66317" marR="66317" marT="33158" marB="33158" anchor="ctr"/>
+                </a:tc>
+                <a:tc>
+                  <a:txBody>
+                    <a:bodyPr/>
+                    <a:lstStyle/>
+                    <a:p>
+                      <a:pPr>
+                        <a:buNone/>
+                      </a:pPr>
+                      <a:r>
+                        <a:rPr lang="en-US" altLang="zh-TW" sz="1000"/>
+                        <a:t>6.13.0</a:t>
+                      </a:r>
+                      <a:endParaRPr lang="zh-TW" altLang="en-US" sz="1000"/>
+                    </a:p>
+                  </a:txBody>
+                  <a:tcPr marL="66317" marR="66317" marT="33158" marB="33158" anchor="ctr"/>
+                </a:tc>
+                <a:tc>
+                  <a:txBody>
+                    <a:bodyPr/>
+                    <a:lstStyle/>
+                    <a:p>
+                      <a:pPr>
+                        <a:buNone/>
+                      </a:pPr>
+                      <a:r>
+                        <a:rPr lang="en" sz="1000"/>
+                        <a:t>MIT</a:t>
+                      </a:r>
+                    </a:p>
+                  </a:txBody>
+                  <a:tcPr marL="66317" marR="66317" marT="33158" marB="33158" anchor="ctr"/>
+                </a:tc>
+                <a:extLst>
+                  <a:ext uri="{0D108BD9-81ED-4DB2-BD59-A6C34878D82A}">
+                    <a16:rowId xmlns:a16="http://schemas.microsoft.com/office/drawing/2014/main" val="2918851166"/>
+                  </a:ext>
+                </a:extLst>
+              </a:tr>
+              <a:tr h="221055">
+                <a:tc>
+                  <a:txBody>
+                    <a:bodyPr/>
+                    <a:lstStyle/>
+                    <a:p>
+                      <a:pPr>
+                        <a:buNone/>
+                      </a:pPr>
+                      <a:r>
+                        <a:rPr lang="en" sz="1000"/>
+                        <a:t>dotenv、global-agent</a:t>
+                      </a:r>
+                    </a:p>
+                  </a:txBody>
+                  <a:tcPr marL="66317" marR="66317" marT="33158" marB="33158" anchor="ctr"/>
+                </a:tc>
+                <a:tc>
+                  <a:txBody>
+                    <a:bodyPr/>
+                    <a:lstStyle/>
+                    <a:p>
+                      <a:pPr>
+                        <a:buNone/>
+                      </a:pPr>
+                      <a:r>
+                        <a:rPr lang="en-US" altLang="zh-TW" sz="1000"/>
+                        <a:t>17.2.3</a:t>
+                      </a:r>
+                      <a:r>
+                        <a:rPr lang="zh-TW" altLang="en-US" sz="1000"/>
+                        <a:t>、</a:t>
+                      </a:r>
+                      <a:r>
+                        <a:rPr lang="en-US" altLang="zh-TW" sz="1000"/>
+                        <a:t>3.0.0</a:t>
+                      </a:r>
+                      <a:endParaRPr lang="zh-TW" altLang="en-US" sz="1000"/>
+                    </a:p>
+                  </a:txBody>
+                  <a:tcPr marL="66317" marR="66317" marT="33158" marB="33158" anchor="ctr"/>
+                </a:tc>
+                <a:tc>
+                  <a:txBody>
+                    <a:bodyPr/>
+                    <a:lstStyle/>
+                    <a:p>
+                      <a:pPr>
+                        <a:buNone/>
+                      </a:pPr>
+                      <a:r>
+                        <a:rPr lang="en" sz="1000" dirty="0"/>
+                        <a:t>BSD-2-Clause、BSD-3-Clause</a:t>
+                      </a:r>
+                    </a:p>
+                  </a:txBody>
+                  <a:tcPr marL="66317" marR="66317" marT="33158" marB="33158" anchor="ctr"/>
+                </a:tc>
+                <a:extLst>
+                  <a:ext uri="{0D108BD9-81ED-4DB2-BD59-A6C34878D82A}">
+                    <a16:rowId xmlns:a16="http://schemas.microsoft.com/office/drawing/2014/main" val="2391829051"/>
+                  </a:ext>
+                </a:extLst>
+              </a:tr>
+            </a:tbl>
+          </a:graphicData>
+        </a:graphic>
+      </p:graphicFrame>
+    </p:spTree>
+    <p:extLst>
+      <p:ext uri="{BB962C8B-B14F-4D97-AF65-F5344CB8AC3E}">
+        <p14:creationId xmlns:p14="http://schemas.microsoft.com/office/powerpoint/2010/main" val="3058347366"/>
+      </p:ext>
+    </p:extLst>
+  </p:cSld>
+  <p:clrMapOvr>
+    <a:masterClrMapping/>
+  </p:clrMapOvr>
+</p:sld>
+</file>
+
 <file path=ppt/slides/slide2.xml><?xml version="1.0" encoding="utf-8"?>
 <p:sld xmlns:a="http://schemas.openxmlformats.org/drawingml/2006/main" xmlns:r="http://schemas.openxmlformats.org/officeDocument/2006/relationships" xmlns:p="http://schemas.openxmlformats.org/presentationml/2006/main">
   <p:cSld>
@@ -12658,6 +13772,1668 @@
   <p:cSld>
     <p:spTree>
       <p:nvGrpSpPr>
+        <p:cNvPr id="1" name="">
+          <a:extLst>
+            <a:ext uri="{FF2B5EF4-FFF2-40B4-BE49-F238E27FC236}">
+              <a16:creationId xmlns:a16="http://schemas.microsoft.com/office/drawing/2014/main" id="{650B7474-FA8E-1E3B-8838-9BEF6A857001}"/>
+            </a:ext>
+          </a:extLst>
+        </p:cNvPr>
+        <p:cNvGrpSpPr/>
+        <p:nvPr/>
+      </p:nvGrpSpPr>
+      <p:grpSpPr>
+        <a:xfrm>
+          <a:off x="0" y="0"/>
+          <a:ext cx="0" cy="0"/>
+          <a:chOff x="0" y="0"/>
+          <a:chExt cx="0" cy="0"/>
+        </a:xfrm>
+      </p:grpSpPr>
+      <p:sp>
+        <p:nvSpPr>
+          <p:cNvPr id="3" name="標題 2">
+            <a:extLst>
+              <a:ext uri="{FF2B5EF4-FFF2-40B4-BE49-F238E27FC236}">
+                <a16:creationId xmlns:a16="http://schemas.microsoft.com/office/drawing/2014/main" id="{5409CE95-9941-8275-673B-3D3AFD623B79}"/>
+              </a:ext>
+            </a:extLst>
+          </p:cNvPr>
+          <p:cNvSpPr>
+            <a:spLocks noGrp="1"/>
+          </p:cNvSpPr>
+          <p:nvPr>
+            <p:ph type="title"/>
+          </p:nvPr>
+        </p:nvSpPr>
+        <p:spPr/>
+        <p:txBody>
+          <a:bodyPr/>
+          <a:lstStyle/>
+          <a:p>
+            <a:r>
+              <a:rPr lang="en-US" altLang="zh-TW" b="1" dirty="0"/>
+              <a:t>Azure </a:t>
+            </a:r>
+            <a:r>
+              <a:rPr lang="zh-TW" altLang="en-US" b="1" dirty="0"/>
+              <a:t>測試環境配置</a:t>
+            </a:r>
+            <a:endParaRPr lang="zh-TW" altLang="en-US" dirty="0"/>
+          </a:p>
+        </p:txBody>
+      </p:sp>
+      <p:sp>
+        <p:nvSpPr>
+          <p:cNvPr id="6" name="文字版面配置區 5">
+            <a:extLst>
+              <a:ext uri="{FF2B5EF4-FFF2-40B4-BE49-F238E27FC236}">
+                <a16:creationId xmlns:a16="http://schemas.microsoft.com/office/drawing/2014/main" id="{05D9EA71-6081-206A-0394-1E68B7B8D459}"/>
+              </a:ext>
+            </a:extLst>
+          </p:cNvPr>
+          <p:cNvSpPr>
+            <a:spLocks noGrp="1"/>
+          </p:cNvSpPr>
+          <p:nvPr>
+            <p:ph type="body" idx="1"/>
+          </p:nvPr>
+        </p:nvSpPr>
+        <p:spPr/>
+        <p:txBody>
+          <a:bodyPr/>
+          <a:lstStyle/>
+          <a:p>
+            <a:endParaRPr lang="en-US" altLang="zh-TW" dirty="0"/>
+          </a:p>
+          <a:p>
+            <a:endParaRPr lang="en-US" altLang="zh-TW" dirty="0"/>
+          </a:p>
+          <a:p>
+            <a:endParaRPr lang="en-US" altLang="zh-TW" dirty="0"/>
+          </a:p>
+          <a:p>
+            <a:endParaRPr lang="en-US" altLang="zh-TW" dirty="0"/>
+          </a:p>
+          <a:p>
+            <a:endParaRPr lang="en-US" altLang="zh-TW" dirty="0"/>
+          </a:p>
+          <a:p>
+            <a:endParaRPr lang="en-US" altLang="zh-TW" dirty="0"/>
+          </a:p>
+          <a:p>
+            <a:endParaRPr lang="en-US" altLang="zh-TW" dirty="0"/>
+          </a:p>
+          <a:p>
+            <a:endParaRPr lang="en-US" altLang="zh-TW" dirty="0"/>
+          </a:p>
+          <a:p>
+            <a:endParaRPr lang="en-US" altLang="zh-TW" dirty="0"/>
+          </a:p>
+          <a:p>
+            <a:endParaRPr lang="en-US" altLang="zh-TW" dirty="0"/>
+          </a:p>
+          <a:p>
+            <a:endParaRPr lang="en-US" altLang="zh-TW" dirty="0"/>
+          </a:p>
+          <a:p>
+            <a:endParaRPr lang="en-US" altLang="zh-TW" dirty="0"/>
+          </a:p>
+          <a:p>
+            <a:pPr marL="36000" indent="0">
+              <a:buNone/>
+            </a:pPr>
+            <a:endParaRPr lang="en-US" altLang="zh-TW" dirty="0"/>
+          </a:p>
+          <a:p>
+            <a:pPr marL="36000" indent="0">
+              <a:buNone/>
+            </a:pPr>
+            <a:endParaRPr lang="en-US" altLang="zh-TW" dirty="0"/>
+          </a:p>
+        </p:txBody>
+      </p:sp>
+      <p:graphicFrame>
+        <p:nvGraphicFramePr>
+          <p:cNvPr id="2" name="表格 1">
+            <a:extLst>
+              <a:ext uri="{FF2B5EF4-FFF2-40B4-BE49-F238E27FC236}">
+                <a16:creationId xmlns:a16="http://schemas.microsoft.com/office/drawing/2014/main" id="{CE8CC8BE-B4A4-5C4E-E50C-E5E10C10FEC4}"/>
+              </a:ext>
+            </a:extLst>
+          </p:cNvPr>
+          <p:cNvGraphicFramePr>
+            <a:graphicFrameLocks noGrp="1"/>
+          </p:cNvGraphicFramePr>
+          <p:nvPr>
+            <p:extLst>
+              <p:ext uri="{D42A27DB-BD31-4B8C-83A1-F6EECF244321}">
+                <p14:modId xmlns:p14="http://schemas.microsoft.com/office/powerpoint/2010/main" val="2873493298"/>
+              </p:ext>
+            </p:extLst>
+          </p:nvPr>
+        </p:nvGraphicFramePr>
+        <p:xfrm>
+          <a:off x="179388" y="826714"/>
+          <a:ext cx="10209600" cy="4349979"/>
+        </p:xfrm>
+        <a:graphic>
+          <a:graphicData uri="http://schemas.openxmlformats.org/drawingml/2006/table">
+            <a:tbl>
+              <a:tblPr>
+                <a:tableStyleId>{91DB7C30-2B5D-4D34-8F22-85940E495A18}</a:tableStyleId>
+              </a:tblPr>
+              <a:tblGrid>
+                <a:gridCol w="1916602">
+                  <a:extLst>
+                    <a:ext uri="{9D8B030D-6E8A-4147-A177-3AD203B41FA5}">
+                      <a16:colId xmlns:a16="http://schemas.microsoft.com/office/drawing/2014/main" val="1199597028"/>
+                    </a:ext>
+                  </a:extLst>
+                </a:gridCol>
+                <a:gridCol w="3088281">
+                  <a:extLst>
+                    <a:ext uri="{9D8B030D-6E8A-4147-A177-3AD203B41FA5}">
+                      <a16:colId xmlns:a16="http://schemas.microsoft.com/office/drawing/2014/main" val="3760430905"/>
+                    </a:ext>
+                  </a:extLst>
+                </a:gridCol>
+                <a:gridCol w="5204717">
+                  <a:extLst>
+                    <a:ext uri="{9D8B030D-6E8A-4147-A177-3AD203B41FA5}">
+                      <a16:colId xmlns:a16="http://schemas.microsoft.com/office/drawing/2014/main" val="939028161"/>
+                    </a:ext>
+                  </a:extLst>
+                </a:gridCol>
+              </a:tblGrid>
+              <a:tr h="353338">
+                <a:tc>
+                  <a:txBody>
+                    <a:bodyPr/>
+                    <a:lstStyle/>
+                    <a:p>
+                      <a:pPr>
+                        <a:buNone/>
+                      </a:pPr>
+                      <a:r>
+                        <a:rPr lang="zh-TW" altLang="en-US" sz="1400" dirty="0">
+                          <a:latin typeface="Microsoft JhengHei" panose="020B0604030504040204" pitchFamily="34" charset="-120"/>
+                          <a:ea typeface="Microsoft JhengHei" panose="020B0604030504040204" pitchFamily="34" charset="-120"/>
+                        </a:rPr>
+                        <a:t>元件</a:t>
+                      </a:r>
+                    </a:p>
+                  </a:txBody>
+                  <a:tcPr anchor="ctr"/>
+                </a:tc>
+                <a:tc>
+                  <a:txBody>
+                    <a:bodyPr/>
+                    <a:lstStyle/>
+                    <a:p>
+                      <a:pPr>
+                        <a:buNone/>
+                      </a:pPr>
+                      <a:r>
+                        <a:rPr lang="en-US" altLang="zh-TW" sz="1400" dirty="0"/>
+                        <a:t>Azure </a:t>
+                      </a:r>
+                      <a:r>
+                        <a:rPr lang="zh-TW" altLang="en-US" sz="1400" dirty="0"/>
+                        <a:t>服務</a:t>
+                      </a:r>
+                      <a:endParaRPr lang="zh-TW" altLang="en-US" sz="1400" dirty="0">
+                        <a:latin typeface="Microsoft JhengHei" panose="020B0604030504040204" pitchFamily="34" charset="-120"/>
+                        <a:ea typeface="Microsoft JhengHei" panose="020B0604030504040204" pitchFamily="34" charset="-120"/>
+                      </a:endParaRPr>
+                    </a:p>
+                  </a:txBody>
+                  <a:tcPr anchor="ctr"/>
+                </a:tc>
+                <a:tc>
+                  <a:txBody>
+                    <a:bodyPr/>
+                    <a:lstStyle/>
+                    <a:p>
+                      <a:pPr>
+                        <a:buNone/>
+                      </a:pPr>
+                      <a:r>
+                        <a:rPr lang="zh-TW" altLang="en-US" sz="1400" dirty="0">
+                          <a:latin typeface="Microsoft JhengHei" panose="020B0604030504040204" pitchFamily="34" charset="-120"/>
+                          <a:ea typeface="Microsoft JhengHei" panose="020B0604030504040204" pitchFamily="34" charset="-120"/>
+                        </a:rPr>
+                        <a:t>規格</a:t>
+                      </a:r>
+                    </a:p>
+                  </a:txBody>
+                  <a:tcPr anchor="ctr"/>
+                </a:tc>
+                <a:extLst>
+                  <a:ext uri="{0D108BD9-81ED-4DB2-BD59-A6C34878D82A}">
+                    <a16:rowId xmlns:a16="http://schemas.microsoft.com/office/drawing/2014/main" val="961505403"/>
+                  </a:ext>
+                </a:extLst>
+              </a:tr>
+              <a:tr h="363331">
+                <a:tc>
+                  <a:txBody>
+                    <a:bodyPr/>
+                    <a:lstStyle/>
+                    <a:p>
+                      <a:pPr>
+                        <a:buNone/>
+                      </a:pPr>
+                      <a:r>
+                        <a:rPr lang="zh-TW" altLang="en-US" dirty="0"/>
+                        <a:t>入口</a:t>
+                      </a:r>
+                      <a:endParaRPr lang="en" sz="1400" dirty="0">
+                        <a:latin typeface="+mj-lt"/>
+                        <a:ea typeface="Microsoft JhengHei" panose="020B0604030504040204" pitchFamily="34" charset="-120"/>
+                        <a:cs typeface="Consolas" panose="020B0609020204030204" pitchFamily="49" charset="0"/>
+                      </a:endParaRPr>
+                    </a:p>
+                  </a:txBody>
+                  <a:tcPr anchor="ctr"/>
+                </a:tc>
+                <a:tc>
+                  <a:txBody>
+                    <a:bodyPr/>
+                    <a:lstStyle/>
+                    <a:p>
+                      <a:pPr>
+                        <a:buNone/>
+                      </a:pPr>
+                      <a:r>
+                        <a:rPr lang="en" altLang="zh-TW" dirty="0"/>
+                        <a:t>Azure Front Door Standard </a:t>
+                      </a:r>
+                      <a:r>
+                        <a:rPr lang="zh-TW" altLang="en" dirty="0"/>
+                        <a:t>＋ </a:t>
+                      </a:r>
+                      <a:r>
+                        <a:rPr lang="en" altLang="zh-TW" dirty="0"/>
+                        <a:t>WAF</a:t>
+                      </a:r>
+                      <a:endParaRPr lang="en" sz="1400" dirty="0">
+                        <a:latin typeface="Microsoft JhengHei" panose="020B0604030504040204" pitchFamily="34" charset="-120"/>
+                        <a:ea typeface="Microsoft JhengHei" panose="020B0604030504040204" pitchFamily="34" charset="-120"/>
+                      </a:endParaRPr>
+                    </a:p>
+                  </a:txBody>
+                  <a:tcPr anchor="ctr"/>
+                </a:tc>
+                <a:tc>
+                  <a:txBody>
+                    <a:bodyPr/>
+                    <a:lstStyle/>
+                    <a:p>
+                      <a:pPr>
+                        <a:buNone/>
+                      </a:pPr>
+                      <a:r>
+                        <a:rPr lang="en-US" altLang="zh-TW" sz="1400" b="0" i="0" u="none" strike="noStrike" cap="none" dirty="0">
+                          <a:solidFill>
+                            <a:srgbClr val="000000"/>
+                          </a:solidFill>
+                          <a:latin typeface="Arial"/>
+                          <a:ea typeface="Arial"/>
+                          <a:cs typeface="Arial"/>
+                          <a:sym typeface="Arial"/>
+                        </a:rPr>
+                        <a:t>1</a:t>
+                      </a:r>
+                      <a:r>
+                        <a:rPr lang="zh-TW" altLang="en-US" dirty="0"/>
+                        <a:t> 組 </a:t>
+                      </a:r>
+                      <a:r>
+                        <a:rPr lang="en" altLang="zh-TW" dirty="0"/>
+                        <a:t>endpoint</a:t>
+                      </a:r>
+                      <a:r>
+                        <a:rPr lang="zh-TW" altLang="en" dirty="0"/>
+                        <a:t>，</a:t>
+                      </a:r>
+                      <a:r>
+                        <a:rPr lang="en" altLang="zh-TW" sz="1400" b="0" i="0" u="none" strike="noStrike" cap="none" dirty="0">
+                          <a:solidFill>
+                            <a:srgbClr val="000000"/>
+                          </a:solidFill>
+                          <a:latin typeface="Arial"/>
+                          <a:ea typeface="Arial"/>
+                          <a:cs typeface="Arial"/>
+                          <a:sym typeface="Arial"/>
+                        </a:rPr>
+                        <a:t>1</a:t>
+                      </a:r>
+                      <a:r>
+                        <a:rPr lang="en" altLang="zh-TW" dirty="0"/>
+                        <a:t> </a:t>
+                      </a:r>
+                      <a:r>
+                        <a:rPr lang="zh-TW" altLang="en-US" dirty="0"/>
+                        <a:t>個 </a:t>
+                      </a:r>
+                      <a:r>
+                        <a:rPr lang="en" altLang="zh-TW" dirty="0"/>
+                        <a:t>backend pool</a:t>
+                      </a:r>
+                      <a:endParaRPr lang="zh-TW" altLang="en-US" sz="1400" dirty="0">
+                        <a:latin typeface="Microsoft JhengHei" panose="020B0604030504040204" pitchFamily="34" charset="-120"/>
+                        <a:ea typeface="Microsoft JhengHei" panose="020B0604030504040204" pitchFamily="34" charset="-120"/>
+                      </a:endParaRPr>
+                    </a:p>
+                  </a:txBody>
+                  <a:tcPr anchor="ctr"/>
+                </a:tc>
+                <a:extLst>
+                  <a:ext uri="{0D108BD9-81ED-4DB2-BD59-A6C34878D82A}">
+                    <a16:rowId xmlns:a16="http://schemas.microsoft.com/office/drawing/2014/main" val="1506681514"/>
+                  </a:ext>
+                </a:extLst>
+              </a:tr>
+              <a:tr h="363331">
+                <a:tc>
+                  <a:txBody>
+                    <a:bodyPr/>
+                    <a:lstStyle/>
+                    <a:p>
+                      <a:pPr>
+                        <a:buNone/>
+                      </a:pPr>
+                      <a:r>
+                        <a:rPr lang="en" sz="1400" dirty="0" err="1">
+                          <a:latin typeface="+mj-lt"/>
+                          <a:ea typeface="Microsoft JhengHei" panose="020B0604030504040204" pitchFamily="34" charset="-120"/>
+                          <a:cs typeface="Consolas" panose="020B0609020204030204" pitchFamily="49" charset="0"/>
+                        </a:rPr>
+                        <a:t>InfoGather</a:t>
+                      </a:r>
+                      <a:r>
+                        <a:rPr lang="en" sz="1400" dirty="0">
+                          <a:latin typeface="+mj-lt"/>
+                          <a:ea typeface="Microsoft JhengHei" panose="020B0604030504040204" pitchFamily="34" charset="-120"/>
+                          <a:cs typeface="Consolas" panose="020B0609020204030204" pitchFamily="49" charset="0"/>
+                        </a:rPr>
+                        <a:t> App</a:t>
+                      </a:r>
+                    </a:p>
+                  </a:txBody>
+                  <a:tcPr anchor="ctr"/>
+                </a:tc>
+                <a:tc>
+                  <a:txBody>
+                    <a:bodyPr/>
+                    <a:lstStyle/>
+                    <a:p>
+                      <a:pPr>
+                        <a:buNone/>
+                      </a:pPr>
+                      <a:r>
+                        <a:rPr lang="en" altLang="zh-TW" dirty="0"/>
+                        <a:t>Azure Container Apps</a:t>
+                      </a:r>
+                      <a:endParaRPr lang="en" sz="1400" dirty="0">
+                        <a:latin typeface="Microsoft JhengHei" panose="020B0604030504040204" pitchFamily="34" charset="-120"/>
+                        <a:ea typeface="Microsoft JhengHei" panose="020B0604030504040204" pitchFamily="34" charset="-120"/>
+                      </a:endParaRPr>
+                    </a:p>
+                  </a:txBody>
+                  <a:tcPr anchor="ctr"/>
+                </a:tc>
+                <a:tc>
+                  <a:txBody>
+                    <a:bodyPr/>
+                    <a:lstStyle/>
+                    <a:p>
+                      <a:pPr>
+                        <a:buNone/>
+                      </a:pPr>
+                      <a:r>
+                        <a:rPr lang="zh-TW" altLang="en-US" dirty="0"/>
+                        <a:t>每個 </a:t>
+                      </a:r>
+                      <a:r>
+                        <a:rPr lang="en" altLang="zh-TW" dirty="0"/>
+                        <a:t>replica </a:t>
+                      </a:r>
+                      <a:r>
+                        <a:rPr lang="en" altLang="zh-TW" sz="1400" b="0" i="0" u="none" strike="noStrike" cap="none" dirty="0">
+                          <a:solidFill>
+                            <a:srgbClr val="000000"/>
+                          </a:solidFill>
+                          <a:latin typeface="Arial"/>
+                          <a:ea typeface="Arial"/>
+                          <a:cs typeface="Arial"/>
+                          <a:sym typeface="Arial"/>
+                        </a:rPr>
+                        <a:t>1 vCPU</a:t>
+                      </a:r>
+                      <a:r>
+                        <a:rPr lang="zh-TW" altLang="en" sz="1400" b="0" i="0" u="none" strike="noStrike" cap="none" dirty="0">
+                          <a:solidFill>
+                            <a:srgbClr val="000000"/>
+                          </a:solidFill>
+                          <a:latin typeface="Arial"/>
+                          <a:ea typeface="Arial"/>
+                          <a:cs typeface="Arial"/>
+                          <a:sym typeface="Arial"/>
+                        </a:rPr>
+                        <a:t>／</a:t>
+                      </a:r>
+                      <a:r>
+                        <a:rPr lang="en" altLang="zh-TW" sz="1400" b="0" i="0" u="none" strike="noStrike" cap="none" dirty="0">
+                          <a:solidFill>
+                            <a:srgbClr val="000000"/>
+                          </a:solidFill>
+                          <a:latin typeface="Arial"/>
+                          <a:ea typeface="Arial"/>
+                          <a:cs typeface="Arial"/>
+                          <a:sym typeface="Arial"/>
+                        </a:rPr>
+                        <a:t>2 GiB RAM</a:t>
+                      </a:r>
+                      <a:r>
+                        <a:rPr lang="zh-TW" altLang="en" dirty="0"/>
+                        <a:t>，</a:t>
+                      </a:r>
+                      <a:r>
+                        <a:rPr lang="en" altLang="zh-TW" sz="1400" b="0" i="0" u="none" strike="noStrike" cap="none" dirty="0">
+                          <a:solidFill>
+                            <a:srgbClr val="000000"/>
+                          </a:solidFill>
+                          <a:latin typeface="Arial"/>
+                          <a:ea typeface="Arial"/>
+                          <a:cs typeface="Arial"/>
+                          <a:sym typeface="Arial"/>
+                        </a:rPr>
+                        <a:t>min 1</a:t>
+                      </a:r>
+                      <a:r>
+                        <a:rPr lang="zh-TW" altLang="en" sz="1400" b="0" i="0" u="none" strike="noStrike" cap="none" dirty="0">
+                          <a:solidFill>
+                            <a:srgbClr val="000000"/>
+                          </a:solidFill>
+                          <a:latin typeface="Arial"/>
+                          <a:ea typeface="Arial"/>
+                          <a:cs typeface="Arial"/>
+                          <a:sym typeface="Arial"/>
+                        </a:rPr>
+                        <a:t>／</a:t>
+                      </a:r>
+                      <a:r>
+                        <a:rPr lang="en" altLang="zh-TW" sz="1400" b="0" i="0" u="none" strike="noStrike" cap="none" dirty="0">
+                          <a:solidFill>
+                            <a:srgbClr val="000000"/>
+                          </a:solidFill>
+                          <a:latin typeface="Arial"/>
+                          <a:ea typeface="Arial"/>
+                          <a:cs typeface="Arial"/>
+                          <a:sym typeface="Arial"/>
+                        </a:rPr>
+                        <a:t>max 2</a:t>
+                      </a:r>
+                      <a:endParaRPr lang="zh-TW" altLang="en-US" sz="1400" dirty="0">
+                        <a:latin typeface="Microsoft JhengHei" panose="020B0604030504040204" pitchFamily="34" charset="-120"/>
+                        <a:ea typeface="Microsoft JhengHei" panose="020B0604030504040204" pitchFamily="34" charset="-120"/>
+                      </a:endParaRPr>
+                    </a:p>
+                  </a:txBody>
+                  <a:tcPr anchor="ctr"/>
+                </a:tc>
+                <a:extLst>
+                  <a:ext uri="{0D108BD9-81ED-4DB2-BD59-A6C34878D82A}">
+                    <a16:rowId xmlns:a16="http://schemas.microsoft.com/office/drawing/2014/main" val="1157993873"/>
+                  </a:ext>
+                </a:extLst>
+              </a:tr>
+              <a:tr h="363331">
+                <a:tc>
+                  <a:txBody>
+                    <a:bodyPr/>
+                    <a:lstStyle/>
+                    <a:p>
+                      <a:pPr>
+                        <a:buNone/>
+                      </a:pPr>
+                      <a:r>
+                        <a:rPr lang="en" sz="1400" dirty="0" err="1">
+                          <a:latin typeface="+mj-lt"/>
+                          <a:ea typeface="Microsoft JhengHei" panose="020B0604030504040204" pitchFamily="34" charset="-120"/>
+                          <a:cs typeface="Consolas" panose="020B0609020204030204" pitchFamily="49" charset="0"/>
+                        </a:rPr>
+                        <a:t>InfoGather</a:t>
+                      </a:r>
+                      <a:r>
+                        <a:rPr lang="en" sz="1400" dirty="0">
+                          <a:latin typeface="+mj-lt"/>
+                          <a:ea typeface="Microsoft JhengHei" panose="020B0604030504040204" pitchFamily="34" charset="-120"/>
+                          <a:cs typeface="Consolas" panose="020B0609020204030204" pitchFamily="49" charset="0"/>
+                        </a:rPr>
+                        <a:t> Worker</a:t>
+                      </a:r>
+                    </a:p>
+                  </a:txBody>
+                  <a:tcPr anchor="ctr"/>
+                </a:tc>
+                <a:tc>
+                  <a:txBody>
+                    <a:bodyPr/>
+                    <a:lstStyle/>
+                    <a:p>
+                      <a:pPr>
+                        <a:buNone/>
+                      </a:pPr>
+                      <a:r>
+                        <a:rPr lang="en" altLang="zh-TW" dirty="0"/>
+                        <a:t>Azure Container Apps</a:t>
+                      </a:r>
+                      <a:endParaRPr lang="en" sz="1400" dirty="0">
+                        <a:latin typeface="Microsoft JhengHei" panose="020B0604030504040204" pitchFamily="34" charset="-120"/>
+                        <a:ea typeface="Microsoft JhengHei" panose="020B0604030504040204" pitchFamily="34" charset="-120"/>
+                      </a:endParaRPr>
+                    </a:p>
+                  </a:txBody>
+                  <a:tcPr anchor="ctr"/>
+                </a:tc>
+                <a:tc>
+                  <a:txBody>
+                    <a:bodyPr/>
+                    <a:lstStyle/>
+                    <a:p>
+                      <a:pPr>
+                        <a:buNone/>
+                      </a:pPr>
+                      <a:r>
+                        <a:rPr lang="zh-TW" altLang="en-US" dirty="0"/>
+                        <a:t>每個 </a:t>
+                      </a:r>
+                      <a:r>
+                        <a:rPr lang="en" altLang="zh-TW" dirty="0"/>
+                        <a:t>replica </a:t>
+                      </a:r>
+                      <a:r>
+                        <a:rPr lang="en" altLang="zh-TW" sz="1400" b="0" i="0" u="none" strike="noStrike" cap="none" dirty="0">
+                          <a:solidFill>
+                            <a:srgbClr val="000000"/>
+                          </a:solidFill>
+                          <a:latin typeface="Arial"/>
+                          <a:ea typeface="Arial"/>
+                          <a:cs typeface="Arial"/>
+                          <a:sym typeface="Arial"/>
+                        </a:rPr>
+                        <a:t>2 vCPU</a:t>
+                      </a:r>
+                      <a:r>
+                        <a:rPr lang="zh-TW" altLang="en" sz="1400" b="0" i="0" u="none" strike="noStrike" cap="none" dirty="0">
+                          <a:solidFill>
+                            <a:srgbClr val="000000"/>
+                          </a:solidFill>
+                          <a:latin typeface="Arial"/>
+                          <a:ea typeface="Arial"/>
+                          <a:cs typeface="Arial"/>
+                          <a:sym typeface="Arial"/>
+                        </a:rPr>
+                        <a:t>／</a:t>
+                      </a:r>
+                      <a:r>
+                        <a:rPr lang="en" altLang="zh-TW" sz="1400" b="0" i="0" u="none" strike="noStrike" cap="none" dirty="0">
+                          <a:solidFill>
+                            <a:srgbClr val="000000"/>
+                          </a:solidFill>
+                          <a:latin typeface="Arial"/>
+                          <a:ea typeface="Arial"/>
+                          <a:cs typeface="Arial"/>
+                          <a:sym typeface="Arial"/>
+                        </a:rPr>
+                        <a:t>4 GiB RAM</a:t>
+                      </a:r>
+                      <a:r>
+                        <a:rPr lang="zh-TW" altLang="en" dirty="0"/>
+                        <a:t>，</a:t>
+                      </a:r>
+                      <a:r>
+                        <a:rPr lang="en" altLang="zh-TW" sz="1400" b="0" i="0" u="none" strike="noStrike" cap="none" dirty="0">
+                          <a:solidFill>
+                            <a:srgbClr val="000000"/>
+                          </a:solidFill>
+                          <a:latin typeface="Arial"/>
+                          <a:ea typeface="Arial"/>
+                          <a:cs typeface="Arial"/>
+                          <a:sym typeface="Arial"/>
+                        </a:rPr>
+                        <a:t>min 8</a:t>
+                      </a:r>
+                      <a:r>
+                        <a:rPr lang="zh-TW" altLang="en" sz="1400" b="0" i="0" u="none" strike="noStrike" cap="none" dirty="0">
+                          <a:solidFill>
+                            <a:srgbClr val="000000"/>
+                          </a:solidFill>
+                          <a:latin typeface="Arial"/>
+                          <a:ea typeface="Arial"/>
+                          <a:cs typeface="Arial"/>
+                          <a:sym typeface="Arial"/>
+                        </a:rPr>
+                        <a:t>／</a:t>
+                      </a:r>
+                      <a:r>
+                        <a:rPr lang="en" altLang="zh-TW" sz="1400" b="0" i="0" u="none" strike="noStrike" cap="none" dirty="0">
+                          <a:solidFill>
+                            <a:srgbClr val="000000"/>
+                          </a:solidFill>
+                          <a:latin typeface="Arial"/>
+                          <a:ea typeface="Arial"/>
+                          <a:cs typeface="Arial"/>
+                          <a:sym typeface="Arial"/>
+                        </a:rPr>
+                        <a:t>max 16</a:t>
+                      </a:r>
+                      <a:endParaRPr lang="en" sz="1400" dirty="0">
+                        <a:latin typeface="Microsoft JhengHei" panose="020B0604030504040204" pitchFamily="34" charset="-120"/>
+                        <a:ea typeface="Microsoft JhengHei" panose="020B0604030504040204" pitchFamily="34" charset="-120"/>
+                      </a:endParaRPr>
+                    </a:p>
+                  </a:txBody>
+                  <a:tcPr anchor="ctr"/>
+                </a:tc>
+                <a:extLst>
+                  <a:ext uri="{0D108BD9-81ED-4DB2-BD59-A6C34878D82A}">
+                    <a16:rowId xmlns:a16="http://schemas.microsoft.com/office/drawing/2014/main" val="4290922300"/>
+                  </a:ext>
+                </a:extLst>
+              </a:tr>
+              <a:tr h="363331">
+                <a:tc>
+                  <a:txBody>
+                    <a:bodyPr/>
+                    <a:lstStyle/>
+                    <a:p>
+                      <a:pPr marL="0" marR="0" lvl="0" indent="0" algn="l" defTabSz="914400" rtl="0" eaLnBrk="1" fontAlgn="auto" latinLnBrk="0" hangingPunct="1">
+                        <a:lnSpc>
+                          <a:spcPct val="100000"/>
+                        </a:lnSpc>
+                        <a:spcBef>
+                          <a:spcPts val="0"/>
+                        </a:spcBef>
+                        <a:spcAft>
+                          <a:spcPts val="0"/>
+                        </a:spcAft>
+                        <a:buClr>
+                          <a:srgbClr val="000000"/>
+                        </a:buClr>
+                        <a:buSzTx/>
+                        <a:buFont typeface="Arial"/>
+                        <a:buNone/>
+                        <a:tabLst/>
+                        <a:defRPr/>
+                      </a:pPr>
+                      <a:r>
+                        <a:rPr lang="en" altLang="zh-TW" sz="1400" dirty="0" err="1">
+                          <a:latin typeface="+mj-lt"/>
+                          <a:ea typeface="Microsoft JhengHei" panose="020B0604030504040204" pitchFamily="34" charset="-120"/>
+                          <a:cs typeface="Consolas" panose="020B0609020204030204" pitchFamily="49" charset="0"/>
+                        </a:rPr>
+                        <a:t>InfoGather</a:t>
+                      </a:r>
+                      <a:r>
+                        <a:rPr lang="en" altLang="zh-TW" sz="1400" dirty="0">
+                          <a:latin typeface="+mj-lt"/>
+                          <a:ea typeface="Microsoft JhengHei" panose="020B0604030504040204" pitchFamily="34" charset="-120"/>
+                          <a:cs typeface="Consolas" panose="020B0609020204030204" pitchFamily="49" charset="0"/>
+                        </a:rPr>
+                        <a:t> Scheduler</a:t>
+                      </a:r>
+                    </a:p>
+                  </a:txBody>
+                  <a:tcPr anchor="ctr"/>
+                </a:tc>
+                <a:tc>
+                  <a:txBody>
+                    <a:bodyPr/>
+                    <a:lstStyle/>
+                    <a:p>
+                      <a:pPr>
+                        <a:buNone/>
+                      </a:pPr>
+                      <a:r>
+                        <a:rPr lang="en" altLang="zh-TW" dirty="0"/>
+                        <a:t>Azure Container Apps</a:t>
+                      </a:r>
+                      <a:endParaRPr lang="en" sz="1400" dirty="0">
+                        <a:latin typeface="Microsoft JhengHei" panose="020B0604030504040204" pitchFamily="34" charset="-120"/>
+                        <a:ea typeface="Microsoft JhengHei" panose="020B0604030504040204" pitchFamily="34" charset="-120"/>
+                      </a:endParaRPr>
+                    </a:p>
+                  </a:txBody>
+                  <a:tcPr anchor="ctr"/>
+                </a:tc>
+                <a:tc>
+                  <a:txBody>
+                    <a:bodyPr/>
+                    <a:lstStyle/>
+                    <a:p>
+                      <a:pPr>
+                        <a:buNone/>
+                      </a:pPr>
+                      <a:r>
+                        <a:rPr lang="zh-TW" altLang="en-US" dirty="0"/>
+                        <a:t>每個 </a:t>
+                      </a:r>
+                      <a:r>
+                        <a:rPr lang="en" altLang="zh-TW" dirty="0"/>
+                        <a:t>replica </a:t>
+                      </a:r>
+                      <a:r>
+                        <a:rPr lang="en" altLang="zh-TW" sz="1400" b="0" i="0" u="none" strike="noStrike" cap="none" dirty="0">
+                          <a:solidFill>
+                            <a:srgbClr val="000000"/>
+                          </a:solidFill>
+                          <a:latin typeface="Arial"/>
+                          <a:ea typeface="Arial"/>
+                          <a:cs typeface="Arial"/>
+                          <a:sym typeface="Arial"/>
+                        </a:rPr>
+                        <a:t>0.5 vCPU</a:t>
+                      </a:r>
+                      <a:r>
+                        <a:rPr lang="zh-TW" altLang="en" sz="1400" b="0" i="0" u="none" strike="noStrike" cap="none" dirty="0">
+                          <a:solidFill>
+                            <a:srgbClr val="000000"/>
+                          </a:solidFill>
+                          <a:latin typeface="Arial"/>
+                          <a:ea typeface="Arial"/>
+                          <a:cs typeface="Arial"/>
+                          <a:sym typeface="Arial"/>
+                        </a:rPr>
+                        <a:t>／</a:t>
+                      </a:r>
+                      <a:r>
+                        <a:rPr lang="en" altLang="zh-TW" sz="1400" b="0" i="0" u="none" strike="noStrike" cap="none" dirty="0">
+                          <a:solidFill>
+                            <a:srgbClr val="000000"/>
+                          </a:solidFill>
+                          <a:latin typeface="Arial"/>
+                          <a:ea typeface="Arial"/>
+                          <a:cs typeface="Arial"/>
+                          <a:sym typeface="Arial"/>
+                        </a:rPr>
+                        <a:t>1 GiB RAM</a:t>
+                      </a:r>
+                      <a:r>
+                        <a:rPr lang="zh-TW" altLang="en" dirty="0"/>
+                        <a:t>，</a:t>
+                      </a:r>
+                      <a:r>
+                        <a:rPr lang="en" altLang="zh-TW" sz="1400" b="0" i="0" u="none" strike="noStrike" cap="none" dirty="0">
+                          <a:solidFill>
+                            <a:srgbClr val="000000"/>
+                          </a:solidFill>
+                          <a:latin typeface="Arial"/>
+                          <a:ea typeface="Arial"/>
+                          <a:cs typeface="Arial"/>
+                          <a:sym typeface="Arial"/>
+                        </a:rPr>
+                        <a:t>min 1</a:t>
+                      </a:r>
+                      <a:r>
+                        <a:rPr lang="zh-TW" altLang="en" sz="1400" b="0" i="0" u="none" strike="noStrike" cap="none" dirty="0">
+                          <a:solidFill>
+                            <a:srgbClr val="000000"/>
+                          </a:solidFill>
+                          <a:latin typeface="Arial"/>
+                          <a:ea typeface="Arial"/>
+                          <a:cs typeface="Arial"/>
+                          <a:sym typeface="Arial"/>
+                        </a:rPr>
+                        <a:t>／</a:t>
+                      </a:r>
+                      <a:r>
+                        <a:rPr lang="en" altLang="zh-TW" sz="1400" b="0" i="0" u="none" strike="noStrike" cap="none" dirty="0">
+                          <a:solidFill>
+                            <a:srgbClr val="000000"/>
+                          </a:solidFill>
+                          <a:latin typeface="Arial"/>
+                          <a:ea typeface="Arial"/>
+                          <a:cs typeface="Arial"/>
+                          <a:sym typeface="Arial"/>
+                        </a:rPr>
+                        <a:t>max 1</a:t>
+                      </a:r>
+                      <a:endParaRPr lang="zh-TW" altLang="en-US" sz="1400" dirty="0">
+                        <a:latin typeface="Microsoft JhengHei" panose="020B0604030504040204" pitchFamily="34" charset="-120"/>
+                        <a:ea typeface="Microsoft JhengHei" panose="020B0604030504040204" pitchFamily="34" charset="-120"/>
+                      </a:endParaRPr>
+                    </a:p>
+                  </a:txBody>
+                  <a:tcPr anchor="ctr"/>
+                </a:tc>
+                <a:extLst>
+                  <a:ext uri="{0D108BD9-81ED-4DB2-BD59-A6C34878D82A}">
+                    <a16:rowId xmlns:a16="http://schemas.microsoft.com/office/drawing/2014/main" val="1620069153"/>
+                  </a:ext>
+                </a:extLst>
+              </a:tr>
+              <a:tr h="363331">
+                <a:tc>
+                  <a:txBody>
+                    <a:bodyPr/>
+                    <a:lstStyle/>
+                    <a:p>
+                      <a:pPr>
+                        <a:buNone/>
+                      </a:pPr>
+                      <a:r>
+                        <a:rPr lang="en" altLang="zh-TW" sz="1400" b="0" i="0" u="none" strike="noStrike" cap="none" dirty="0">
+                          <a:solidFill>
+                            <a:srgbClr val="000000"/>
+                          </a:solidFill>
+                          <a:latin typeface="Arial"/>
+                          <a:ea typeface="Microsoft JhengHei" panose="020B0604030504040204" pitchFamily="34" charset="-120"/>
+                          <a:cs typeface="Consolas" panose="020B0609020204030204" pitchFamily="49" charset="0"/>
+                          <a:sym typeface="Arial"/>
+                        </a:rPr>
+                        <a:t>MongoDB</a:t>
+                      </a:r>
+                      <a:endParaRPr lang="en" sz="1400" dirty="0">
+                        <a:latin typeface="+mj-lt"/>
+                        <a:ea typeface="Microsoft JhengHei" panose="020B0604030504040204" pitchFamily="34" charset="-120"/>
+                        <a:cs typeface="Consolas" panose="020B0609020204030204" pitchFamily="49" charset="0"/>
+                      </a:endParaRPr>
+                    </a:p>
+                  </a:txBody>
+                  <a:tcPr anchor="ctr"/>
+                </a:tc>
+                <a:tc>
+                  <a:txBody>
+                    <a:bodyPr/>
+                    <a:lstStyle/>
+                    <a:p>
+                      <a:pPr>
+                        <a:buNone/>
+                      </a:pPr>
+                      <a:r>
+                        <a:rPr lang="en" altLang="zh-TW" dirty="0"/>
+                        <a:t>MongoDB Atlas on Azure</a:t>
+                      </a:r>
+                      <a:endParaRPr lang="en" sz="1400" dirty="0">
+                        <a:latin typeface="Microsoft JhengHei" panose="020B0604030504040204" pitchFamily="34" charset="-120"/>
+                        <a:ea typeface="Microsoft JhengHei" panose="020B0604030504040204" pitchFamily="34" charset="-120"/>
+                      </a:endParaRPr>
+                    </a:p>
+                  </a:txBody>
+                  <a:tcPr anchor="ctr"/>
+                </a:tc>
+                <a:tc>
+                  <a:txBody>
+                    <a:bodyPr/>
+                    <a:lstStyle/>
+                    <a:p>
+                      <a:pPr>
+                        <a:buNone/>
+                      </a:pPr>
+                      <a:r>
+                        <a:rPr lang="en" altLang="zh-TW" sz="1400" b="0" i="0" u="none" strike="noStrike" cap="none" dirty="0">
+                          <a:solidFill>
+                            <a:srgbClr val="000000"/>
+                          </a:solidFill>
+                          <a:latin typeface="Arial"/>
+                          <a:ea typeface="Arial"/>
+                          <a:cs typeface="Arial"/>
+                          <a:sym typeface="Arial"/>
+                        </a:rPr>
+                        <a:t>M30</a:t>
+                      </a:r>
+                      <a:r>
+                        <a:rPr lang="zh-TW" altLang="en" dirty="0"/>
+                        <a:t>，</a:t>
+                      </a:r>
+                      <a:r>
+                        <a:rPr lang="en" altLang="zh-TW" sz="1400" b="0" i="0" u="none" strike="noStrike" cap="none" dirty="0">
+                          <a:solidFill>
+                            <a:srgbClr val="000000"/>
+                          </a:solidFill>
+                          <a:latin typeface="Arial"/>
+                          <a:ea typeface="Arial"/>
+                          <a:cs typeface="Arial"/>
+                          <a:sym typeface="Arial"/>
+                        </a:rPr>
+                        <a:t>3</a:t>
+                      </a:r>
+                      <a:r>
+                        <a:rPr lang="en" altLang="zh-TW" dirty="0"/>
+                        <a:t> nodes</a:t>
+                      </a:r>
+                      <a:r>
+                        <a:rPr lang="zh-TW" altLang="en" dirty="0"/>
+                        <a:t>，</a:t>
+                      </a:r>
+                      <a:r>
+                        <a:rPr lang="en" altLang="zh-TW" dirty="0"/>
+                        <a:t>storage </a:t>
+                      </a:r>
+                      <a:r>
+                        <a:rPr lang="en" altLang="zh-TW" sz="1400" b="0" i="0" u="none" strike="noStrike" cap="none" dirty="0">
+                          <a:solidFill>
+                            <a:srgbClr val="000000"/>
+                          </a:solidFill>
+                          <a:latin typeface="Arial"/>
+                          <a:ea typeface="Arial"/>
+                          <a:cs typeface="Arial"/>
+                          <a:sym typeface="Arial"/>
+                        </a:rPr>
+                        <a:t>256 GB</a:t>
+                      </a:r>
+                      <a:endParaRPr lang="en" sz="1400" dirty="0">
+                        <a:latin typeface="Microsoft JhengHei" panose="020B0604030504040204" pitchFamily="34" charset="-120"/>
+                        <a:ea typeface="Microsoft JhengHei" panose="020B0604030504040204" pitchFamily="34" charset="-120"/>
+                      </a:endParaRPr>
+                    </a:p>
+                  </a:txBody>
+                  <a:tcPr anchor="ctr"/>
+                </a:tc>
+                <a:extLst>
+                  <a:ext uri="{0D108BD9-81ED-4DB2-BD59-A6C34878D82A}">
+                    <a16:rowId xmlns:a16="http://schemas.microsoft.com/office/drawing/2014/main" val="2359224097"/>
+                  </a:ext>
+                </a:extLst>
+              </a:tr>
+              <a:tr h="363331">
+                <a:tc>
+                  <a:txBody>
+                    <a:bodyPr/>
+                    <a:lstStyle/>
+                    <a:p>
+                      <a:pPr>
+                        <a:buNone/>
+                      </a:pPr>
+                      <a:r>
+                        <a:rPr lang="en" altLang="zh-TW" sz="1400" b="0" i="0" u="none" strike="noStrike" cap="none" dirty="0">
+                          <a:solidFill>
+                            <a:srgbClr val="000000"/>
+                          </a:solidFill>
+                          <a:latin typeface="Arial"/>
+                          <a:ea typeface="Microsoft JhengHei" panose="020B0604030504040204" pitchFamily="34" charset="-120"/>
+                          <a:cs typeface="Consolas" panose="020B0609020204030204" pitchFamily="49" charset="0"/>
+                          <a:sym typeface="Arial"/>
+                        </a:rPr>
+                        <a:t>Redis</a:t>
+                      </a:r>
+                      <a:endParaRPr lang="en" sz="1400" dirty="0">
+                        <a:latin typeface="+mj-lt"/>
+                        <a:ea typeface="Microsoft JhengHei" panose="020B0604030504040204" pitchFamily="34" charset="-120"/>
+                        <a:cs typeface="Consolas" panose="020B0609020204030204" pitchFamily="49" charset="0"/>
+                      </a:endParaRPr>
+                    </a:p>
+                  </a:txBody>
+                  <a:tcPr anchor="ctr"/>
+                </a:tc>
+                <a:tc>
+                  <a:txBody>
+                    <a:bodyPr/>
+                    <a:lstStyle/>
+                    <a:p>
+                      <a:pPr>
+                        <a:buNone/>
+                      </a:pPr>
+                      <a:r>
+                        <a:rPr lang="en" altLang="zh-TW" dirty="0"/>
+                        <a:t>Azure Managed Redis</a:t>
+                      </a:r>
+                      <a:endParaRPr lang="en" sz="1400" dirty="0">
+                        <a:latin typeface="Microsoft JhengHei" panose="020B0604030504040204" pitchFamily="34" charset="-120"/>
+                        <a:ea typeface="Microsoft JhengHei" panose="020B0604030504040204" pitchFamily="34" charset="-120"/>
+                      </a:endParaRPr>
+                    </a:p>
+                  </a:txBody>
+                  <a:tcPr anchor="ctr"/>
+                </a:tc>
+                <a:tc>
+                  <a:txBody>
+                    <a:bodyPr/>
+                    <a:lstStyle/>
+                    <a:p>
+                      <a:pPr>
+                        <a:buNone/>
+                      </a:pPr>
+                      <a:r>
+                        <a:rPr lang="en" altLang="zh-TW" sz="1400" b="0" i="0" u="none" strike="noStrike" cap="none" dirty="0">
+                          <a:solidFill>
+                            <a:srgbClr val="000000"/>
+                          </a:solidFill>
+                          <a:latin typeface="Arial"/>
+                          <a:ea typeface="Arial"/>
+                          <a:cs typeface="Arial"/>
+                          <a:sym typeface="Arial"/>
+                        </a:rPr>
+                        <a:t>12 GB</a:t>
+                      </a:r>
+                      <a:r>
+                        <a:rPr lang="en" altLang="zh-TW" dirty="0"/>
+                        <a:t> </a:t>
+                      </a:r>
+                      <a:r>
+                        <a:rPr lang="zh-TW" altLang="en-US" dirty="0"/>
+                        <a:t>記憶體起，</a:t>
+                      </a:r>
+                      <a:r>
+                        <a:rPr lang="en" altLang="zh-TW" dirty="0"/>
+                        <a:t>HA</a:t>
+                      </a:r>
+                      <a:r>
+                        <a:rPr lang="zh-TW" altLang="en" dirty="0"/>
+                        <a:t>、</a:t>
+                      </a:r>
+                      <a:r>
+                        <a:rPr lang="en" altLang="zh-TW" dirty="0"/>
+                        <a:t>zone redundancy</a:t>
+                      </a:r>
+                      <a:r>
+                        <a:rPr lang="zh-TW" altLang="en" dirty="0"/>
+                        <a:t>、</a:t>
+                      </a:r>
+                      <a:r>
+                        <a:rPr lang="en" altLang="zh-TW" dirty="0"/>
+                        <a:t>persistence</a:t>
+                      </a:r>
+                      <a:endParaRPr lang="en" sz="1400" dirty="0">
+                        <a:latin typeface="Microsoft JhengHei" panose="020B0604030504040204" pitchFamily="34" charset="-120"/>
+                        <a:ea typeface="Microsoft JhengHei" panose="020B0604030504040204" pitchFamily="34" charset="-120"/>
+                      </a:endParaRPr>
+                    </a:p>
+                  </a:txBody>
+                  <a:tcPr anchor="ctr"/>
+                </a:tc>
+                <a:extLst>
+                  <a:ext uri="{0D108BD9-81ED-4DB2-BD59-A6C34878D82A}">
+                    <a16:rowId xmlns:a16="http://schemas.microsoft.com/office/drawing/2014/main" val="2794067812"/>
+                  </a:ext>
+                </a:extLst>
+              </a:tr>
+              <a:tr h="363331">
+                <a:tc>
+                  <a:txBody>
+                    <a:bodyPr/>
+                    <a:lstStyle/>
+                    <a:p>
+                      <a:pPr marL="0" marR="0" lvl="0" indent="0" algn="l" defTabSz="914400" rtl="0" eaLnBrk="1" fontAlgn="auto" latinLnBrk="0" hangingPunct="1">
+                        <a:lnSpc>
+                          <a:spcPct val="100000"/>
+                        </a:lnSpc>
+                        <a:spcBef>
+                          <a:spcPts val="0"/>
+                        </a:spcBef>
+                        <a:spcAft>
+                          <a:spcPts val="0"/>
+                        </a:spcAft>
+                        <a:buClr>
+                          <a:srgbClr val="000000"/>
+                        </a:buClr>
+                        <a:buSzTx/>
+                        <a:buFont typeface="Arial"/>
+                        <a:buNone/>
+                        <a:tabLst/>
+                        <a:defRPr/>
+                      </a:pPr>
+                      <a:r>
+                        <a:rPr lang="en" altLang="zh-TW" sz="1400" b="0" i="0" u="none" strike="noStrike" cap="none" dirty="0">
+                          <a:solidFill>
+                            <a:srgbClr val="000000"/>
+                          </a:solidFill>
+                          <a:latin typeface="Arial"/>
+                          <a:ea typeface="Arial"/>
+                          <a:cs typeface="Arial"/>
+                          <a:sym typeface="Arial"/>
+                        </a:rPr>
+                        <a:t>Copilot CLI Server</a:t>
+                      </a:r>
+                      <a:endParaRPr lang="en" altLang="zh-TW" sz="1400" b="0" i="0" u="none" strike="noStrike" cap="none" dirty="0">
+                        <a:solidFill>
+                          <a:srgbClr val="000000"/>
+                        </a:solidFill>
+                        <a:latin typeface="Arial"/>
+                        <a:ea typeface="Microsoft JhengHei" panose="020B0604030504040204" pitchFamily="34" charset="-120"/>
+                        <a:cs typeface="Consolas" panose="020B0609020204030204" pitchFamily="49" charset="0"/>
+                        <a:sym typeface="Arial"/>
+                      </a:endParaRPr>
+                    </a:p>
+                  </a:txBody>
+                  <a:tcPr anchor="ctr"/>
+                </a:tc>
+                <a:tc>
+                  <a:txBody>
+                    <a:bodyPr/>
+                    <a:lstStyle/>
+                    <a:p>
+                      <a:pPr>
+                        <a:buNone/>
+                      </a:pPr>
+                      <a:r>
+                        <a:rPr lang="en" altLang="zh-TW" dirty="0"/>
+                        <a:t>Azure Container Apps</a:t>
+                      </a:r>
+                      <a:endParaRPr lang="en" sz="1400" dirty="0">
+                        <a:latin typeface="Microsoft JhengHei" panose="020B0604030504040204" pitchFamily="34" charset="-120"/>
+                        <a:ea typeface="Microsoft JhengHei" panose="020B0604030504040204" pitchFamily="34" charset="-120"/>
+                      </a:endParaRPr>
+                    </a:p>
+                  </a:txBody>
+                  <a:tcPr anchor="ctr"/>
+                </a:tc>
+                <a:tc>
+                  <a:txBody>
+                    <a:bodyPr/>
+                    <a:lstStyle/>
+                    <a:p>
+                      <a:pPr>
+                        <a:buNone/>
+                      </a:pPr>
+                      <a:r>
+                        <a:rPr lang="zh-TW" altLang="en-US" dirty="0"/>
+                        <a:t>每個 </a:t>
+                      </a:r>
+                      <a:r>
+                        <a:rPr lang="en" altLang="zh-TW" dirty="0"/>
+                        <a:t>replica </a:t>
+                      </a:r>
+                      <a:r>
+                        <a:rPr lang="en" altLang="zh-TW" sz="1400" b="0" i="0" u="none" strike="noStrike" cap="none" dirty="0">
+                          <a:solidFill>
+                            <a:srgbClr val="000000"/>
+                          </a:solidFill>
+                          <a:latin typeface="Arial"/>
+                          <a:ea typeface="Arial"/>
+                          <a:cs typeface="Arial"/>
+                          <a:sym typeface="Arial"/>
+                        </a:rPr>
+                        <a:t>1 vCPU</a:t>
+                      </a:r>
+                      <a:r>
+                        <a:rPr lang="zh-TW" altLang="en" sz="1400" b="0" i="0" u="none" strike="noStrike" cap="none" dirty="0">
+                          <a:solidFill>
+                            <a:srgbClr val="000000"/>
+                          </a:solidFill>
+                          <a:latin typeface="Arial"/>
+                          <a:ea typeface="Arial"/>
+                          <a:cs typeface="Arial"/>
+                          <a:sym typeface="Arial"/>
+                        </a:rPr>
+                        <a:t>／</a:t>
+                      </a:r>
+                      <a:r>
+                        <a:rPr lang="en" altLang="zh-TW" sz="1400" b="0" i="0" u="none" strike="noStrike" cap="none" dirty="0">
+                          <a:solidFill>
+                            <a:srgbClr val="000000"/>
+                          </a:solidFill>
+                          <a:latin typeface="Arial"/>
+                          <a:ea typeface="Arial"/>
+                          <a:cs typeface="Arial"/>
+                          <a:sym typeface="Arial"/>
+                        </a:rPr>
+                        <a:t>2 GiB RAM</a:t>
+                      </a:r>
+                      <a:r>
+                        <a:rPr lang="zh-TW" altLang="en" dirty="0"/>
+                        <a:t>，</a:t>
+                      </a:r>
+                      <a:r>
+                        <a:rPr lang="en" altLang="zh-TW" sz="1400" b="0" i="0" u="none" strike="noStrike" cap="none" dirty="0">
+                          <a:solidFill>
+                            <a:srgbClr val="000000"/>
+                          </a:solidFill>
+                          <a:latin typeface="Arial"/>
+                          <a:ea typeface="Arial"/>
+                          <a:cs typeface="Arial"/>
+                          <a:sym typeface="Arial"/>
+                        </a:rPr>
+                        <a:t>min 1</a:t>
+                      </a:r>
+                      <a:r>
+                        <a:rPr lang="zh-TW" altLang="en" sz="1400" b="0" i="0" u="none" strike="noStrike" cap="none" dirty="0">
+                          <a:solidFill>
+                            <a:srgbClr val="000000"/>
+                          </a:solidFill>
+                          <a:latin typeface="Arial"/>
+                          <a:ea typeface="Arial"/>
+                          <a:cs typeface="Arial"/>
+                          <a:sym typeface="Arial"/>
+                        </a:rPr>
+                        <a:t>／</a:t>
+                      </a:r>
+                      <a:r>
+                        <a:rPr lang="en" altLang="zh-TW" sz="1400" b="0" i="0" u="none" strike="noStrike" cap="none" dirty="0">
+                          <a:solidFill>
+                            <a:srgbClr val="000000"/>
+                          </a:solidFill>
+                          <a:latin typeface="Arial"/>
+                          <a:ea typeface="Arial"/>
+                          <a:cs typeface="Arial"/>
+                          <a:sym typeface="Arial"/>
+                        </a:rPr>
+                        <a:t>max 1</a:t>
+                      </a:r>
+                      <a:endParaRPr lang="en" sz="1400" dirty="0">
+                        <a:latin typeface="Microsoft JhengHei" panose="020B0604030504040204" pitchFamily="34" charset="-120"/>
+                        <a:ea typeface="Microsoft JhengHei" panose="020B0604030504040204" pitchFamily="34" charset="-120"/>
+                      </a:endParaRPr>
+                    </a:p>
+                  </a:txBody>
+                  <a:tcPr anchor="ctr"/>
+                </a:tc>
+                <a:extLst>
+                  <a:ext uri="{0D108BD9-81ED-4DB2-BD59-A6C34878D82A}">
+                    <a16:rowId xmlns:a16="http://schemas.microsoft.com/office/drawing/2014/main" val="3889693032"/>
+                  </a:ext>
+                </a:extLst>
+              </a:tr>
+              <a:tr h="363331">
+                <a:tc>
+                  <a:txBody>
+                    <a:bodyPr/>
+                    <a:lstStyle/>
+                    <a:p>
+                      <a:pPr marL="0" marR="0" lvl="0" indent="0" algn="l" defTabSz="914400" rtl="0" eaLnBrk="1" fontAlgn="auto" latinLnBrk="0" hangingPunct="1">
+                        <a:lnSpc>
+                          <a:spcPct val="100000"/>
+                        </a:lnSpc>
+                        <a:spcBef>
+                          <a:spcPts val="0"/>
+                        </a:spcBef>
+                        <a:spcAft>
+                          <a:spcPts val="0"/>
+                        </a:spcAft>
+                        <a:buClr>
+                          <a:srgbClr val="000000"/>
+                        </a:buClr>
+                        <a:buSzTx/>
+                        <a:buFont typeface="Arial"/>
+                        <a:buNone/>
+                        <a:tabLst/>
+                        <a:defRPr/>
+                      </a:pPr>
+                      <a:r>
+                        <a:rPr lang="en" altLang="zh-TW" dirty="0"/>
+                        <a:t>Container Registry</a:t>
+                      </a:r>
+                      <a:endParaRPr lang="en" altLang="zh-TW" sz="1400" b="0" i="0" u="none" strike="noStrike" cap="none" dirty="0">
+                        <a:solidFill>
+                          <a:srgbClr val="000000"/>
+                        </a:solidFill>
+                        <a:latin typeface="Arial"/>
+                        <a:ea typeface="Microsoft JhengHei" panose="020B0604030504040204" pitchFamily="34" charset="-120"/>
+                        <a:cs typeface="Consolas" panose="020B0609020204030204" pitchFamily="49" charset="0"/>
+                        <a:sym typeface="Arial"/>
+                      </a:endParaRPr>
+                    </a:p>
+                  </a:txBody>
+                  <a:tcPr anchor="ctr"/>
+                </a:tc>
+                <a:tc>
+                  <a:txBody>
+                    <a:bodyPr/>
+                    <a:lstStyle/>
+                    <a:p>
+                      <a:pPr>
+                        <a:buNone/>
+                      </a:pPr>
+                      <a:r>
+                        <a:rPr lang="en" altLang="zh-TW" dirty="0"/>
+                        <a:t>Azure Container Registry Basic</a:t>
+                      </a:r>
+                      <a:endParaRPr lang="en" sz="1400" dirty="0">
+                        <a:latin typeface="Microsoft JhengHei" panose="020B0604030504040204" pitchFamily="34" charset="-120"/>
+                        <a:ea typeface="Microsoft JhengHei" panose="020B0604030504040204" pitchFamily="34" charset="-120"/>
+                      </a:endParaRPr>
+                    </a:p>
+                  </a:txBody>
+                  <a:tcPr anchor="ctr"/>
+                </a:tc>
+                <a:tc>
+                  <a:txBody>
+                    <a:bodyPr/>
+                    <a:lstStyle/>
+                    <a:p>
+                      <a:pPr>
+                        <a:buNone/>
+                      </a:pPr>
+                      <a:r>
+                        <a:rPr lang="en" altLang="zh-TW" sz="1400" b="0" i="0" u="none" strike="noStrike" cap="none" dirty="0">
+                          <a:solidFill>
+                            <a:srgbClr val="000000"/>
+                          </a:solidFill>
+                          <a:latin typeface="Arial"/>
+                          <a:ea typeface="Arial"/>
+                          <a:cs typeface="Arial"/>
+                          <a:sym typeface="Arial"/>
+                        </a:rPr>
+                        <a:t>10 GB</a:t>
+                      </a:r>
+                      <a:r>
+                        <a:rPr lang="en" altLang="zh-TW" dirty="0"/>
+                        <a:t> image storage</a:t>
+                      </a:r>
+                      <a:endParaRPr lang="en" sz="1400" dirty="0">
+                        <a:latin typeface="Microsoft JhengHei" panose="020B0604030504040204" pitchFamily="34" charset="-120"/>
+                        <a:ea typeface="Microsoft JhengHei" panose="020B0604030504040204" pitchFamily="34" charset="-120"/>
+                      </a:endParaRPr>
+                    </a:p>
+                  </a:txBody>
+                  <a:tcPr anchor="ctr"/>
+                </a:tc>
+                <a:extLst>
+                  <a:ext uri="{0D108BD9-81ED-4DB2-BD59-A6C34878D82A}">
+                    <a16:rowId xmlns:a16="http://schemas.microsoft.com/office/drawing/2014/main" val="2706894077"/>
+                  </a:ext>
+                </a:extLst>
+              </a:tr>
+              <a:tr h="363331">
+                <a:tc>
+                  <a:txBody>
+                    <a:bodyPr/>
+                    <a:lstStyle/>
+                    <a:p>
+                      <a:pPr>
+                        <a:buNone/>
+                      </a:pPr>
+                      <a:r>
+                        <a:rPr lang="en" altLang="zh-TW" dirty="0"/>
+                        <a:t>Secret</a:t>
+                      </a:r>
+                      <a:endParaRPr lang="en" sz="1400" dirty="0">
+                        <a:latin typeface="+mj-lt"/>
+                        <a:ea typeface="Microsoft JhengHei" panose="020B0604030504040204" pitchFamily="34" charset="-120"/>
+                        <a:cs typeface="Consolas" panose="020B0609020204030204" pitchFamily="49" charset="0"/>
+                      </a:endParaRPr>
+                    </a:p>
+                  </a:txBody>
+                  <a:tcPr anchor="ctr"/>
+                </a:tc>
+                <a:tc>
+                  <a:txBody>
+                    <a:bodyPr/>
+                    <a:lstStyle/>
+                    <a:p>
+                      <a:pPr>
+                        <a:buNone/>
+                      </a:pPr>
+                      <a:r>
+                        <a:rPr lang="en" altLang="zh-TW" dirty="0"/>
+                        <a:t>Azure Key Vault</a:t>
+                      </a:r>
+                      <a:endParaRPr lang="en" sz="1400" dirty="0">
+                        <a:latin typeface="Microsoft JhengHei" panose="020B0604030504040204" pitchFamily="34" charset="-120"/>
+                        <a:ea typeface="Microsoft JhengHei" panose="020B0604030504040204" pitchFamily="34" charset="-120"/>
+                      </a:endParaRPr>
+                    </a:p>
+                  </a:txBody>
+                  <a:tcPr anchor="ctr"/>
+                </a:tc>
+                <a:tc>
+                  <a:txBody>
+                    <a:bodyPr/>
+                    <a:lstStyle/>
+                    <a:p>
+                      <a:pPr>
+                        <a:buNone/>
+                      </a:pPr>
+                      <a:r>
+                        <a:rPr lang="en" altLang="zh-TW" sz="1400" b="0" i="0" u="none" strike="noStrike" cap="none" dirty="0">
+                          <a:solidFill>
+                            <a:srgbClr val="000000"/>
+                          </a:solidFill>
+                          <a:latin typeface="Arial"/>
+                          <a:ea typeface="Arial"/>
+                          <a:cs typeface="Arial"/>
+                          <a:sym typeface="Arial"/>
+                        </a:rPr>
+                        <a:t>1</a:t>
+                      </a:r>
+                      <a:r>
+                        <a:rPr lang="en" altLang="zh-TW" dirty="0"/>
+                        <a:t> vault</a:t>
+                      </a:r>
+                      <a:endParaRPr lang="en" sz="1400" dirty="0">
+                        <a:latin typeface="Microsoft JhengHei" panose="020B0604030504040204" pitchFamily="34" charset="-120"/>
+                        <a:ea typeface="Microsoft JhengHei" panose="020B0604030504040204" pitchFamily="34" charset="-120"/>
+                      </a:endParaRPr>
+                    </a:p>
+                  </a:txBody>
+                  <a:tcPr anchor="ctr"/>
+                </a:tc>
+                <a:extLst>
+                  <a:ext uri="{0D108BD9-81ED-4DB2-BD59-A6C34878D82A}">
+                    <a16:rowId xmlns:a16="http://schemas.microsoft.com/office/drawing/2014/main" val="3138652754"/>
+                  </a:ext>
+                </a:extLst>
+              </a:tr>
+              <a:tr h="363331">
+                <a:tc>
+                  <a:txBody>
+                    <a:bodyPr/>
+                    <a:lstStyle/>
+                    <a:p>
+                      <a:pPr>
+                        <a:buNone/>
+                      </a:pPr>
+                      <a:r>
+                        <a:rPr lang="en" altLang="zh-TW" dirty="0"/>
+                        <a:t>Log</a:t>
+                      </a:r>
+                      <a:r>
+                        <a:rPr lang="zh-TW" altLang="en" dirty="0"/>
+                        <a:t>／</a:t>
+                      </a:r>
+                      <a:r>
+                        <a:rPr lang="en" altLang="zh-TW" dirty="0"/>
+                        <a:t>Metrics</a:t>
+                      </a:r>
+                      <a:endParaRPr lang="en" sz="1400" dirty="0">
+                        <a:latin typeface="+mj-lt"/>
+                        <a:ea typeface="Microsoft JhengHei" panose="020B0604030504040204" pitchFamily="34" charset="-120"/>
+                        <a:cs typeface="Consolas" panose="020B0609020204030204" pitchFamily="49" charset="0"/>
+                      </a:endParaRPr>
+                    </a:p>
+                  </a:txBody>
+                  <a:tcPr anchor="ctr"/>
+                </a:tc>
+                <a:tc>
+                  <a:txBody>
+                    <a:bodyPr/>
+                    <a:lstStyle/>
+                    <a:p>
+                      <a:pPr>
+                        <a:buNone/>
+                      </a:pPr>
+                      <a:r>
+                        <a:rPr lang="en" altLang="zh-TW" dirty="0"/>
+                        <a:t>Log Analytics </a:t>
+                      </a:r>
+                      <a:r>
+                        <a:rPr lang="zh-TW" altLang="en" dirty="0"/>
+                        <a:t>＋ </a:t>
+                      </a:r>
+                      <a:r>
+                        <a:rPr lang="en" altLang="zh-TW" dirty="0"/>
+                        <a:t>Application Insights</a:t>
+                      </a:r>
+                      <a:endParaRPr lang="en" sz="1400" dirty="0">
+                        <a:latin typeface="Microsoft JhengHei" panose="020B0604030504040204" pitchFamily="34" charset="-120"/>
+                        <a:ea typeface="Microsoft JhengHei" panose="020B0604030504040204" pitchFamily="34" charset="-120"/>
+                      </a:endParaRPr>
+                    </a:p>
+                  </a:txBody>
+                  <a:tcPr anchor="ctr"/>
+                </a:tc>
+                <a:tc>
+                  <a:txBody>
+                    <a:bodyPr/>
+                    <a:lstStyle/>
+                    <a:p>
+                      <a:pPr>
+                        <a:buNone/>
+                      </a:pPr>
+                      <a:r>
+                        <a:rPr lang="en" altLang="zh-TW" dirty="0"/>
+                        <a:t>retention </a:t>
+                      </a:r>
+                      <a:r>
+                        <a:rPr lang="en" altLang="zh-TW" sz="1400" b="0" i="0" u="none" strike="noStrike" cap="none" dirty="0">
+                          <a:solidFill>
+                            <a:srgbClr val="000000"/>
+                          </a:solidFill>
+                          <a:latin typeface="Arial"/>
+                          <a:ea typeface="Arial"/>
+                          <a:cs typeface="Arial"/>
+                          <a:sym typeface="Arial"/>
+                        </a:rPr>
+                        <a:t>30</a:t>
+                      </a:r>
+                      <a:r>
+                        <a:rPr lang="en" altLang="zh-TW" dirty="0"/>
+                        <a:t> </a:t>
+                      </a:r>
+                      <a:r>
+                        <a:rPr lang="zh-TW" altLang="en-US" dirty="0"/>
+                        <a:t>天，</a:t>
+                      </a:r>
+                      <a:r>
+                        <a:rPr lang="en" altLang="zh-TW" dirty="0"/>
+                        <a:t>daily cap </a:t>
+                      </a:r>
+                      <a:r>
+                        <a:rPr lang="en" altLang="zh-TW" sz="1400" b="0" i="0" u="none" strike="noStrike" cap="none" dirty="0">
+                          <a:solidFill>
+                            <a:srgbClr val="000000"/>
+                          </a:solidFill>
+                          <a:latin typeface="Arial"/>
+                          <a:ea typeface="Arial"/>
+                          <a:cs typeface="Arial"/>
+                          <a:sym typeface="Arial"/>
+                        </a:rPr>
+                        <a:t>5 GB</a:t>
+                      </a:r>
+                      <a:endParaRPr lang="en" sz="1400" dirty="0">
+                        <a:latin typeface="Microsoft JhengHei" panose="020B0604030504040204" pitchFamily="34" charset="-120"/>
+                        <a:ea typeface="Microsoft JhengHei" panose="020B0604030504040204" pitchFamily="34" charset="-120"/>
+                      </a:endParaRPr>
+                    </a:p>
+                  </a:txBody>
+                  <a:tcPr anchor="ctr"/>
+                </a:tc>
+                <a:extLst>
+                  <a:ext uri="{0D108BD9-81ED-4DB2-BD59-A6C34878D82A}">
+                    <a16:rowId xmlns:a16="http://schemas.microsoft.com/office/drawing/2014/main" val="3866927840"/>
+                  </a:ext>
+                </a:extLst>
+              </a:tr>
+              <a:tr h="363331">
+                <a:tc>
+                  <a:txBody>
+                    <a:bodyPr/>
+                    <a:lstStyle/>
+                    <a:p>
+                      <a:pPr>
+                        <a:buNone/>
+                      </a:pPr>
+                      <a:r>
+                        <a:rPr lang="zh-TW" altLang="en-US" dirty="0"/>
+                        <a:t>備份／匯出檔案</a:t>
+                      </a:r>
+                      <a:endParaRPr lang="en" sz="1400" dirty="0">
+                        <a:latin typeface="+mj-lt"/>
+                        <a:ea typeface="Microsoft JhengHei" panose="020B0604030504040204" pitchFamily="34" charset="-120"/>
+                        <a:cs typeface="Consolas" panose="020B0609020204030204" pitchFamily="49" charset="0"/>
+                      </a:endParaRPr>
+                    </a:p>
+                  </a:txBody>
+                  <a:tcPr anchor="ctr"/>
+                </a:tc>
+                <a:tc>
+                  <a:txBody>
+                    <a:bodyPr/>
+                    <a:lstStyle/>
+                    <a:p>
+                      <a:pPr>
+                        <a:buNone/>
+                      </a:pPr>
+                      <a:r>
+                        <a:rPr lang="en" altLang="zh-TW" dirty="0"/>
+                        <a:t>Azure Blob Storage</a:t>
+                      </a:r>
+                      <a:endParaRPr lang="en" sz="1400" dirty="0">
+                        <a:latin typeface="Microsoft JhengHei" panose="020B0604030504040204" pitchFamily="34" charset="-120"/>
+                        <a:ea typeface="Microsoft JhengHei" panose="020B0604030504040204" pitchFamily="34" charset="-120"/>
+                      </a:endParaRPr>
+                    </a:p>
+                  </a:txBody>
+                  <a:tcPr anchor="ctr"/>
+                </a:tc>
+                <a:tc>
+                  <a:txBody>
+                    <a:bodyPr/>
+                    <a:lstStyle/>
+                    <a:p>
+                      <a:pPr>
+                        <a:buNone/>
+                      </a:pPr>
+                      <a:r>
+                        <a:rPr lang="en" altLang="zh-TW" dirty="0"/>
+                        <a:t>Hot tier</a:t>
+                      </a:r>
+                      <a:r>
+                        <a:rPr lang="zh-TW" altLang="en" dirty="0"/>
+                        <a:t>，</a:t>
+                      </a:r>
+                      <a:r>
+                        <a:rPr lang="en" altLang="zh-TW" sz="1400" b="0" i="0" u="none" strike="noStrike" cap="none" dirty="0">
+                          <a:solidFill>
+                            <a:srgbClr val="000000"/>
+                          </a:solidFill>
+                          <a:latin typeface="Arial"/>
+                          <a:ea typeface="Arial"/>
+                          <a:cs typeface="Arial"/>
+                          <a:sym typeface="Arial"/>
+                        </a:rPr>
+                        <a:t>100 GB</a:t>
+                      </a:r>
+                      <a:endParaRPr lang="zh-TW" altLang="en-US" sz="1400" dirty="0">
+                        <a:latin typeface="Microsoft JhengHei" panose="020B0604030504040204" pitchFamily="34" charset="-120"/>
+                        <a:ea typeface="Microsoft JhengHei" panose="020B0604030504040204" pitchFamily="34" charset="-120"/>
+                      </a:endParaRPr>
+                    </a:p>
+                  </a:txBody>
+                  <a:tcPr anchor="ctr"/>
+                </a:tc>
+                <a:extLst>
+                  <a:ext uri="{0D108BD9-81ED-4DB2-BD59-A6C34878D82A}">
+                    <a16:rowId xmlns:a16="http://schemas.microsoft.com/office/drawing/2014/main" val="1890578122"/>
+                  </a:ext>
+                </a:extLst>
+              </a:tr>
+            </a:tbl>
+          </a:graphicData>
+        </a:graphic>
+      </p:graphicFrame>
+    </p:spTree>
+    <p:extLst>
+      <p:ext uri="{BB962C8B-B14F-4D97-AF65-F5344CB8AC3E}">
+        <p14:creationId xmlns:p14="http://schemas.microsoft.com/office/powerpoint/2010/main" val="901087635"/>
+      </p:ext>
+    </p:extLst>
+  </p:cSld>
+  <p:clrMapOvr>
+    <a:masterClrMapping/>
+  </p:clrMapOvr>
+</p:sld>
+</file>
+
+<file path=ppt/slides/slide7.xml><?xml version="1.0" encoding="utf-8"?>
+<p:sld xmlns:a="http://schemas.openxmlformats.org/drawingml/2006/main" xmlns:r="http://schemas.openxmlformats.org/officeDocument/2006/relationships" xmlns:p="http://schemas.openxmlformats.org/presentationml/2006/main">
+  <p:cSld>
+    <p:spTree>
+      <p:nvGrpSpPr>
         <p:cNvPr id="1" name=""/>
         <p:cNvGrpSpPr/>
         <p:nvPr/>
@@ -14473,7 +17249,7 @@
 </p:sld>
 </file>
 
-<file path=ppt/slides/slide7.xml><?xml version="1.0" encoding="utf-8"?>
+<file path=ppt/slides/slide8.xml><?xml version="1.0" encoding="utf-8"?>
 <p:sld xmlns:a="http://schemas.openxmlformats.org/drawingml/2006/main" xmlns:r="http://schemas.openxmlformats.org/officeDocument/2006/relationships" xmlns:p="http://schemas.openxmlformats.org/presentationml/2006/main">
   <p:cSld>
     <p:spTree>
@@ -17516,7 +20292,7 @@
 </p:sld>
 </file>
 
-<file path=ppt/slides/slide8.xml><?xml version="1.0" encoding="utf-8"?>
+<file path=ppt/slides/slide9.xml><?xml version="1.0" encoding="utf-8"?>
 <p:sld xmlns:a="http://schemas.openxmlformats.org/drawingml/2006/main" xmlns:r="http://schemas.openxmlformats.org/officeDocument/2006/relationships" xmlns:p="http://schemas.openxmlformats.org/presentationml/2006/main">
   <p:cSld>
     <p:spTree>
@@ -21098,1035 +23874,6 @@
     <p:extLst>
       <p:ext uri="{BB962C8B-B14F-4D97-AF65-F5344CB8AC3E}">
         <p14:creationId xmlns:p14="http://schemas.microsoft.com/office/powerpoint/2010/main" val="200946658"/>
-      </p:ext>
-    </p:extLst>
-  </p:cSld>
-  <p:clrMapOvr>
-    <a:masterClrMapping/>
-  </p:clrMapOvr>
-</p:sld>
-</file>
-
-<file path=ppt/slides/slide9.xml><?xml version="1.0" encoding="utf-8"?>
-<p:sld xmlns:a="http://schemas.openxmlformats.org/drawingml/2006/main" xmlns:r="http://schemas.openxmlformats.org/officeDocument/2006/relationships" xmlns:p="http://schemas.openxmlformats.org/presentationml/2006/main">
-  <p:cSld>
-    <p:spTree>
-      <p:nvGrpSpPr>
-        <p:cNvPr id="1" name=""/>
-        <p:cNvGrpSpPr/>
-        <p:nvPr/>
-      </p:nvGrpSpPr>
-      <p:grpSpPr>
-        <a:xfrm>
-          <a:off x="0" y="0"/>
-          <a:ext cx="0" cy="0"/>
-          <a:chOff x="0" y="0"/>
-          <a:chExt cx="0" cy="0"/>
-        </a:xfrm>
-      </p:grpSpPr>
-      <p:graphicFrame>
-        <p:nvGraphicFramePr>
-          <p:cNvPr id="2" name="表格 1">
-            <a:extLst>
-              <a:ext uri="{FF2B5EF4-FFF2-40B4-BE49-F238E27FC236}">
-                <a16:creationId xmlns:a16="http://schemas.microsoft.com/office/drawing/2014/main" id="{C5B7B4DB-FF6E-743F-443E-643AB8056383}"/>
-              </a:ext>
-            </a:extLst>
-          </p:cNvPr>
-          <p:cNvGraphicFramePr>
-            <a:graphicFrameLocks noGrp="1"/>
-          </p:cNvGraphicFramePr>
-          <p:nvPr>
-            <p:extLst>
-              <p:ext uri="{D42A27DB-BD31-4B8C-83A1-F6EECF244321}">
-                <p14:modId xmlns:p14="http://schemas.microsoft.com/office/powerpoint/2010/main" val="1846944417"/>
-              </p:ext>
-            </p:extLst>
-          </p:nvPr>
-        </p:nvGraphicFramePr>
-        <p:xfrm>
-          <a:off x="845344" y="875664"/>
-          <a:ext cx="9829800" cy="4259348"/>
-        </p:xfrm>
-        <a:graphic>
-          <a:graphicData uri="http://schemas.openxmlformats.org/drawingml/2006/table">
-            <a:tbl>
-              <a:tblPr>
-                <a:tableStyleId>{91DB7C30-2B5D-4D34-8F22-85940E495A18}</a:tableStyleId>
-              </a:tblPr>
-              <a:tblGrid>
-                <a:gridCol w="3276600">
-                  <a:extLst>
-                    <a:ext uri="{9D8B030D-6E8A-4147-A177-3AD203B41FA5}">
-                      <a16:colId xmlns:a16="http://schemas.microsoft.com/office/drawing/2014/main" val="1979650834"/>
-                    </a:ext>
-                  </a:extLst>
-                </a:gridCol>
-                <a:gridCol w="3276600">
-                  <a:extLst>
-                    <a:ext uri="{9D8B030D-6E8A-4147-A177-3AD203B41FA5}">
-                      <a16:colId xmlns:a16="http://schemas.microsoft.com/office/drawing/2014/main" val="2978366162"/>
-                    </a:ext>
-                  </a:extLst>
-                </a:gridCol>
-                <a:gridCol w="3276600">
-                  <a:extLst>
-                    <a:ext uri="{9D8B030D-6E8A-4147-A177-3AD203B41FA5}">
-                      <a16:colId xmlns:a16="http://schemas.microsoft.com/office/drawing/2014/main" val="971725472"/>
-                    </a:ext>
-                  </a:extLst>
-                </a:gridCol>
-              </a:tblGrid>
-              <a:tr h="221055">
-                <a:tc>
-                  <a:txBody>
-                    <a:bodyPr/>
-                    <a:lstStyle/>
-                    <a:p>
-                      <a:pPr>
-                        <a:buNone/>
-                      </a:pPr>
-                      <a:r>
-                        <a:rPr lang="zh-TW" altLang="en-US" sz="1000" dirty="0"/>
-                        <a:t>套件</a:t>
-                      </a:r>
-                    </a:p>
-                  </a:txBody>
-                  <a:tcPr marL="66317" marR="66317" marT="33158" marB="33158" anchor="ctr"/>
-                </a:tc>
-                <a:tc>
-                  <a:txBody>
-                    <a:bodyPr/>
-                    <a:lstStyle/>
-                    <a:p>
-                      <a:pPr>
-                        <a:buNone/>
-                      </a:pPr>
-                      <a:r>
-                        <a:rPr lang="zh-TW" altLang="en-US" sz="1000"/>
-                        <a:t>版本號</a:t>
-                      </a:r>
-                    </a:p>
-                  </a:txBody>
-                  <a:tcPr marL="66317" marR="66317" marT="33158" marB="33158" anchor="ctr"/>
-                </a:tc>
-                <a:tc>
-                  <a:txBody>
-                    <a:bodyPr/>
-                    <a:lstStyle/>
-                    <a:p>
-                      <a:pPr>
-                        <a:buNone/>
-                      </a:pPr>
-                      <a:r>
-                        <a:rPr lang="zh-TW" altLang="en-US" sz="1000"/>
-                        <a:t>許可證</a:t>
-                      </a:r>
-                    </a:p>
-                  </a:txBody>
-                  <a:tcPr marL="66317" marR="66317" marT="33158" marB="33158" anchor="ctr"/>
-                </a:tc>
-                <a:extLst>
-                  <a:ext uri="{0D108BD9-81ED-4DB2-BD59-A6C34878D82A}">
-                    <a16:rowId xmlns:a16="http://schemas.microsoft.com/office/drawing/2014/main" val="2034365754"/>
-                  </a:ext>
-                </a:extLst>
-              </a:tr>
-              <a:tr h="375794">
-                <a:tc>
-                  <a:txBody>
-                    <a:bodyPr/>
-                    <a:lstStyle/>
-                    <a:p>
-                      <a:pPr>
-                        <a:buNone/>
-                      </a:pPr>
-                      <a:r>
-                        <a:rPr lang="en" sz="1000" dirty="0"/>
-                        <a:t>@</a:t>
-                      </a:r>
-                      <a:r>
-                        <a:rPr lang="en" sz="1000" dirty="0" err="1"/>
-                        <a:t>nestjs</a:t>
-                      </a:r>
-                      <a:r>
-                        <a:rPr lang="en" sz="1000" dirty="0"/>
-                        <a:t>/common</a:t>
-                      </a:r>
-                    </a:p>
-                    <a:p>
-                      <a:pPr>
-                        <a:buNone/>
-                      </a:pPr>
-                      <a:r>
-                        <a:rPr lang="en" sz="1000" dirty="0"/>
-                        <a:t>@</a:t>
-                      </a:r>
-                      <a:r>
-                        <a:rPr lang="en" sz="1000" dirty="0" err="1"/>
-                        <a:t>nestjs</a:t>
-                      </a:r>
-                      <a:r>
-                        <a:rPr lang="en" sz="1000" dirty="0"/>
-                        <a:t>/core</a:t>
-                      </a:r>
-                    </a:p>
-                    <a:p>
-                      <a:pPr>
-                        <a:buNone/>
-                      </a:pPr>
-                      <a:r>
-                        <a:rPr lang="en" sz="1000" dirty="0"/>
-                        <a:t>@</a:t>
-                      </a:r>
-                      <a:r>
-                        <a:rPr lang="en" sz="1000" dirty="0" err="1"/>
-                        <a:t>nestjs</a:t>
-                      </a:r>
-                      <a:r>
-                        <a:rPr lang="en" sz="1000" dirty="0"/>
-                        <a:t>/platform-express</a:t>
-                      </a:r>
-                    </a:p>
-                  </a:txBody>
-                  <a:tcPr marL="66317" marR="66317" marT="33158" marB="33158" anchor="ctr"/>
-                </a:tc>
-                <a:tc>
-                  <a:txBody>
-                    <a:bodyPr/>
-                    <a:lstStyle/>
-                    <a:p>
-                      <a:pPr>
-                        <a:buNone/>
-                      </a:pPr>
-                      <a:r>
-                        <a:rPr lang="en-US" altLang="zh-TW" sz="1000"/>
-                        <a:t>11.1.6</a:t>
-                      </a:r>
-                      <a:endParaRPr lang="zh-TW" altLang="en-US" sz="1000"/>
-                    </a:p>
-                  </a:txBody>
-                  <a:tcPr marL="66317" marR="66317" marT="33158" marB="33158" anchor="ctr"/>
-                </a:tc>
-                <a:tc>
-                  <a:txBody>
-                    <a:bodyPr/>
-                    <a:lstStyle/>
-                    <a:p>
-                      <a:pPr>
-                        <a:buNone/>
-                      </a:pPr>
-                      <a:r>
-                        <a:rPr lang="en" sz="1000"/>
-                        <a:t>MIT</a:t>
-                      </a:r>
-                    </a:p>
-                  </a:txBody>
-                  <a:tcPr marL="66317" marR="66317" marT="33158" marB="33158" anchor="ctr"/>
-                </a:tc>
-                <a:extLst>
-                  <a:ext uri="{0D108BD9-81ED-4DB2-BD59-A6C34878D82A}">
-                    <a16:rowId xmlns:a16="http://schemas.microsoft.com/office/drawing/2014/main" val="177764190"/>
-                  </a:ext>
-                </a:extLst>
-              </a:tr>
-              <a:tr h="221055">
-                <a:tc>
-                  <a:txBody>
-                    <a:bodyPr/>
-                    <a:lstStyle/>
-                    <a:p>
-                      <a:pPr>
-                        <a:buNone/>
-                      </a:pPr>
-                      <a:r>
-                        <a:rPr lang="en" sz="1000"/>
-                        <a:t>@nestjs/config</a:t>
-                      </a:r>
-                    </a:p>
-                  </a:txBody>
-                  <a:tcPr marL="66317" marR="66317" marT="33158" marB="33158" anchor="ctr"/>
-                </a:tc>
-                <a:tc>
-                  <a:txBody>
-                    <a:bodyPr/>
-                    <a:lstStyle/>
-                    <a:p>
-                      <a:pPr>
-                        <a:buNone/>
-                      </a:pPr>
-                      <a:r>
-                        <a:rPr lang="en-US" altLang="zh-TW" sz="1000"/>
-                        <a:t>4.0.2</a:t>
-                      </a:r>
-                      <a:endParaRPr lang="zh-TW" altLang="en-US" sz="1000"/>
-                    </a:p>
-                  </a:txBody>
-                  <a:tcPr marL="66317" marR="66317" marT="33158" marB="33158" anchor="ctr"/>
-                </a:tc>
-                <a:tc>
-                  <a:txBody>
-                    <a:bodyPr/>
-                    <a:lstStyle/>
-                    <a:p>
-                      <a:pPr>
-                        <a:buNone/>
-                      </a:pPr>
-                      <a:r>
-                        <a:rPr lang="en" sz="1000"/>
-                        <a:t>MIT</a:t>
-                      </a:r>
-                    </a:p>
-                  </a:txBody>
-                  <a:tcPr marL="66317" marR="66317" marT="33158" marB="33158" anchor="ctr"/>
-                </a:tc>
-                <a:extLst>
-                  <a:ext uri="{0D108BD9-81ED-4DB2-BD59-A6C34878D82A}">
-                    <a16:rowId xmlns:a16="http://schemas.microsoft.com/office/drawing/2014/main" val="3883179950"/>
-                  </a:ext>
-                </a:extLst>
-              </a:tr>
-              <a:tr h="221055">
-                <a:tc>
-                  <a:txBody>
-                    <a:bodyPr/>
-                    <a:lstStyle/>
-                    <a:p>
-                      <a:pPr>
-                        <a:buNone/>
-                      </a:pPr>
-                      <a:r>
-                        <a:rPr lang="en" sz="1000"/>
-                        <a:t>@nestjs/swagger</a:t>
-                      </a:r>
-                    </a:p>
-                  </a:txBody>
-                  <a:tcPr marL="66317" marR="66317" marT="33158" marB="33158" anchor="ctr"/>
-                </a:tc>
-                <a:tc>
-                  <a:txBody>
-                    <a:bodyPr/>
-                    <a:lstStyle/>
-                    <a:p>
-                      <a:pPr>
-                        <a:buNone/>
-                      </a:pPr>
-                      <a:r>
-                        <a:rPr lang="en-US" altLang="zh-TW" sz="1000"/>
-                        <a:t>11.2.0</a:t>
-                      </a:r>
-                      <a:endParaRPr lang="zh-TW" altLang="en-US" sz="1000"/>
-                    </a:p>
-                  </a:txBody>
-                  <a:tcPr marL="66317" marR="66317" marT="33158" marB="33158" anchor="ctr"/>
-                </a:tc>
-                <a:tc>
-                  <a:txBody>
-                    <a:bodyPr/>
-                    <a:lstStyle/>
-                    <a:p>
-                      <a:pPr>
-                        <a:buNone/>
-                      </a:pPr>
-                      <a:r>
-                        <a:rPr lang="en" sz="1000"/>
-                        <a:t>MIT</a:t>
-                      </a:r>
-                    </a:p>
-                  </a:txBody>
-                  <a:tcPr marL="66317" marR="66317" marT="33158" marB="33158" anchor="ctr"/>
-                </a:tc>
-                <a:extLst>
-                  <a:ext uri="{0D108BD9-81ED-4DB2-BD59-A6C34878D82A}">
-                    <a16:rowId xmlns:a16="http://schemas.microsoft.com/office/drawing/2014/main" val="810962820"/>
-                  </a:ext>
-                </a:extLst>
-              </a:tr>
-              <a:tr h="221055">
-                <a:tc>
-                  <a:txBody>
-                    <a:bodyPr/>
-                    <a:lstStyle/>
-                    <a:p>
-                      <a:pPr>
-                        <a:buNone/>
-                      </a:pPr>
-                      <a:r>
-                        <a:rPr lang="en" sz="1000" dirty="0"/>
-                        <a:t>@</a:t>
-                      </a:r>
-                      <a:r>
-                        <a:rPr lang="en" sz="1000" dirty="0" err="1"/>
-                        <a:t>nestjs</a:t>
-                      </a:r>
-                      <a:r>
-                        <a:rPr lang="en" sz="1000" dirty="0"/>
-                        <a:t>/</a:t>
-                      </a:r>
-                      <a:r>
-                        <a:rPr lang="en" sz="1000" dirty="0" err="1"/>
-                        <a:t>mongoose、mongoose</a:t>
-                      </a:r>
-                      <a:endParaRPr lang="en" sz="1000" dirty="0"/>
-                    </a:p>
-                  </a:txBody>
-                  <a:tcPr marL="66317" marR="66317" marT="33158" marB="33158" anchor="ctr"/>
-                </a:tc>
-                <a:tc>
-                  <a:txBody>
-                    <a:bodyPr/>
-                    <a:lstStyle/>
-                    <a:p>
-                      <a:pPr>
-                        <a:buNone/>
-                      </a:pPr>
-                      <a:r>
-                        <a:rPr lang="en-US" altLang="zh-TW" sz="1000"/>
-                        <a:t>11.0.3</a:t>
-                      </a:r>
-                      <a:r>
-                        <a:rPr lang="zh-TW" altLang="en-US" sz="1000"/>
-                        <a:t>、</a:t>
-                      </a:r>
-                      <a:r>
-                        <a:rPr lang="en-US" altLang="zh-TW" sz="1000"/>
-                        <a:t>8.18.1</a:t>
-                      </a:r>
-                      <a:endParaRPr lang="zh-TW" altLang="en-US" sz="1000"/>
-                    </a:p>
-                  </a:txBody>
-                  <a:tcPr marL="66317" marR="66317" marT="33158" marB="33158" anchor="ctr"/>
-                </a:tc>
-                <a:tc>
-                  <a:txBody>
-                    <a:bodyPr/>
-                    <a:lstStyle/>
-                    <a:p>
-                      <a:pPr>
-                        <a:buNone/>
-                      </a:pPr>
-                      <a:r>
-                        <a:rPr lang="en" sz="1000"/>
-                        <a:t>MIT</a:t>
-                      </a:r>
-                    </a:p>
-                  </a:txBody>
-                  <a:tcPr marL="66317" marR="66317" marT="33158" marB="33158" anchor="ctr"/>
-                </a:tc>
-                <a:extLst>
-                  <a:ext uri="{0D108BD9-81ED-4DB2-BD59-A6C34878D82A}">
-                    <a16:rowId xmlns:a16="http://schemas.microsoft.com/office/drawing/2014/main" val="2553881078"/>
-                  </a:ext>
-                </a:extLst>
-              </a:tr>
-              <a:tr h="375794">
-                <a:tc>
-                  <a:txBody>
-                    <a:bodyPr/>
-                    <a:lstStyle/>
-                    <a:p>
-                      <a:pPr>
-                        <a:buNone/>
-                      </a:pPr>
-                      <a:r>
-                        <a:rPr lang="en" sz="1000"/>
-                        <a:t>@nestjs/bullmq、bullmq、ioredis</a:t>
-                      </a:r>
-                    </a:p>
-                  </a:txBody>
-                  <a:tcPr marL="66317" marR="66317" marT="33158" marB="33158" anchor="ctr"/>
-                </a:tc>
-                <a:tc>
-                  <a:txBody>
-                    <a:bodyPr/>
-                    <a:lstStyle/>
-                    <a:p>
-                      <a:pPr>
-                        <a:buNone/>
-                      </a:pPr>
-                      <a:r>
-                        <a:rPr lang="en-US" altLang="zh-TW" sz="1000"/>
-                        <a:t>11.0.3</a:t>
-                      </a:r>
-                      <a:r>
-                        <a:rPr lang="zh-TW" altLang="en-US" sz="1000"/>
-                        <a:t>、</a:t>
-                      </a:r>
-                      <a:r>
-                        <a:rPr lang="en-US" altLang="zh-TW" sz="1000"/>
-                        <a:t>5.58.5</a:t>
-                      </a:r>
-                      <a:r>
-                        <a:rPr lang="zh-TW" altLang="en-US" sz="1000"/>
-                        <a:t>、</a:t>
-                      </a:r>
-                      <a:r>
-                        <a:rPr lang="en-US" altLang="zh-TW" sz="1000"/>
-                        <a:t>5.7.0</a:t>
-                      </a:r>
-                      <a:endParaRPr lang="zh-TW" altLang="en-US" sz="1000"/>
-                    </a:p>
-                  </a:txBody>
-                  <a:tcPr marL="66317" marR="66317" marT="33158" marB="33158" anchor="ctr"/>
-                </a:tc>
-                <a:tc>
-                  <a:txBody>
-                    <a:bodyPr/>
-                    <a:lstStyle/>
-                    <a:p>
-                      <a:pPr>
-                        <a:buNone/>
-                      </a:pPr>
-                      <a:r>
-                        <a:rPr lang="en" sz="1000"/>
-                        <a:t>MIT</a:t>
-                      </a:r>
-                    </a:p>
-                  </a:txBody>
-                  <a:tcPr marL="66317" marR="66317" marT="33158" marB="33158" anchor="ctr"/>
-                </a:tc>
-                <a:extLst>
-                  <a:ext uri="{0D108BD9-81ED-4DB2-BD59-A6C34878D82A}">
-                    <a16:rowId xmlns:a16="http://schemas.microsoft.com/office/drawing/2014/main" val="2015474949"/>
-                  </a:ext>
-                </a:extLst>
-              </a:tr>
-              <a:tr h="375794">
-                <a:tc>
-                  <a:txBody>
-                    <a:bodyPr/>
-                    <a:lstStyle/>
-                    <a:p>
-                      <a:pPr>
-                        <a:buNone/>
-                      </a:pPr>
-                      <a:r>
-                        <a:rPr lang="en" sz="1000"/>
-                        <a:t>@nestjs/cache-manager、cache-manager、keyv、@keyv/redis</a:t>
-                      </a:r>
-                    </a:p>
-                  </a:txBody>
-                  <a:tcPr marL="66317" marR="66317" marT="33158" marB="33158" anchor="ctr"/>
-                </a:tc>
-                <a:tc>
-                  <a:txBody>
-                    <a:bodyPr/>
-                    <a:lstStyle/>
-                    <a:p>
-                      <a:pPr>
-                        <a:buNone/>
-                      </a:pPr>
-                      <a:r>
-                        <a:rPr lang="en-US" altLang="zh-TW" sz="1000" dirty="0"/>
-                        <a:t>3.1.0</a:t>
-                      </a:r>
-                      <a:r>
-                        <a:rPr lang="zh-TW" altLang="en-US" sz="1000" dirty="0"/>
-                        <a:t>、</a:t>
-                      </a:r>
-                      <a:r>
-                        <a:rPr lang="en-US" altLang="zh-TW" sz="1000" dirty="0"/>
-                        <a:t>7.2.8</a:t>
-                      </a:r>
-                      <a:r>
-                        <a:rPr lang="zh-TW" altLang="en-US" sz="1000" dirty="0"/>
-                        <a:t>、</a:t>
-                      </a:r>
-                      <a:r>
-                        <a:rPr lang="en-US" altLang="zh-TW" sz="1000" dirty="0"/>
-                        <a:t>5.6.0</a:t>
-                      </a:r>
-                      <a:r>
-                        <a:rPr lang="zh-TW" altLang="en-US" sz="1000" dirty="0"/>
-                        <a:t>、</a:t>
-                      </a:r>
-                      <a:r>
-                        <a:rPr lang="en-US" altLang="zh-TW" sz="1000" dirty="0"/>
-                        <a:t>5.1.6</a:t>
-                      </a:r>
-                      <a:endParaRPr lang="zh-TW" altLang="en-US" sz="1000" dirty="0"/>
-                    </a:p>
-                  </a:txBody>
-                  <a:tcPr marL="66317" marR="66317" marT="33158" marB="33158" anchor="ctr"/>
-                </a:tc>
-                <a:tc>
-                  <a:txBody>
-                    <a:bodyPr/>
-                    <a:lstStyle/>
-                    <a:p>
-                      <a:pPr>
-                        <a:buNone/>
-                      </a:pPr>
-                      <a:r>
-                        <a:rPr lang="en" sz="1000"/>
-                        <a:t>MIT</a:t>
-                      </a:r>
-                    </a:p>
-                  </a:txBody>
-                  <a:tcPr marL="66317" marR="66317" marT="33158" marB="33158" anchor="ctr"/>
-                </a:tc>
-                <a:extLst>
-                  <a:ext uri="{0D108BD9-81ED-4DB2-BD59-A6C34878D82A}">
-                    <a16:rowId xmlns:a16="http://schemas.microsoft.com/office/drawing/2014/main" val="3836038363"/>
-                  </a:ext>
-                </a:extLst>
-              </a:tr>
-              <a:tr h="530532">
-                <a:tc>
-                  <a:txBody>
-                    <a:bodyPr/>
-                    <a:lstStyle/>
-                    <a:p>
-                      <a:pPr>
-                        <a:buNone/>
-                      </a:pPr>
-                      <a:r>
-                        <a:rPr lang="en" sz="1000" dirty="0"/>
-                        <a:t>@</a:t>
-                      </a:r>
-                      <a:r>
-                        <a:rPr lang="en" sz="1000" dirty="0" err="1"/>
-                        <a:t>nestjs</a:t>
-                      </a:r>
-                      <a:r>
-                        <a:rPr lang="en" sz="1000" dirty="0"/>
-                        <a:t>/</a:t>
-                      </a:r>
-                      <a:r>
-                        <a:rPr lang="en" sz="1000" dirty="0" err="1"/>
-                        <a:t>jwt</a:t>
-                      </a:r>
-                      <a:r>
-                        <a:rPr lang="en" sz="1000" dirty="0"/>
-                        <a:t>、@</a:t>
-                      </a:r>
-                      <a:r>
-                        <a:rPr lang="en" sz="1000" dirty="0" err="1"/>
-                        <a:t>nestjs</a:t>
-                      </a:r>
-                      <a:r>
-                        <a:rPr lang="en" sz="1000" dirty="0"/>
-                        <a:t>/</a:t>
-                      </a:r>
-                      <a:r>
-                        <a:rPr lang="en" sz="1000" dirty="0" err="1"/>
-                        <a:t>passport、passport、passport-microsoft</a:t>
-                      </a:r>
-                      <a:r>
-                        <a:rPr lang="en" sz="1000" dirty="0"/>
-                        <a:t>、@azure/</a:t>
-                      </a:r>
-                      <a:r>
-                        <a:rPr lang="en" sz="1000" dirty="0" err="1"/>
-                        <a:t>msal</a:t>
-                      </a:r>
-                      <a:r>
-                        <a:rPr lang="en" sz="1000" dirty="0"/>
-                        <a:t>-node</a:t>
-                      </a:r>
-                    </a:p>
-                  </a:txBody>
-                  <a:tcPr marL="66317" marR="66317" marT="33158" marB="33158" anchor="ctr"/>
-                </a:tc>
-                <a:tc>
-                  <a:txBody>
-                    <a:bodyPr/>
-                    <a:lstStyle/>
-                    <a:p>
-                      <a:pPr>
-                        <a:buNone/>
-                      </a:pPr>
-                      <a:r>
-                        <a:rPr lang="en-US" altLang="zh-TW" sz="1000" dirty="0"/>
-                        <a:t>11.0.0</a:t>
-                      </a:r>
-                      <a:r>
-                        <a:rPr lang="zh-TW" altLang="en-US" sz="1000" dirty="0"/>
-                        <a:t>、</a:t>
-                      </a:r>
-                      <a:r>
-                        <a:rPr lang="en-US" altLang="zh-TW" sz="1000" dirty="0"/>
-                        <a:t>11.0.5</a:t>
-                      </a:r>
-                      <a:r>
-                        <a:rPr lang="zh-TW" altLang="en-US" sz="1000" dirty="0"/>
-                        <a:t>、</a:t>
-                      </a:r>
-                      <a:r>
-                        <a:rPr lang="en-US" altLang="zh-TW" sz="1000" dirty="0"/>
-                        <a:t>0.7.0</a:t>
-                      </a:r>
-                      <a:r>
-                        <a:rPr lang="zh-TW" altLang="en-US" sz="1000" dirty="0"/>
-                        <a:t>、</a:t>
-                      </a:r>
-                      <a:r>
-                        <a:rPr lang="en-US" altLang="zh-TW" sz="1000" dirty="0"/>
-                        <a:t>2.1.0</a:t>
-                      </a:r>
-                      <a:r>
-                        <a:rPr lang="zh-TW" altLang="en-US" sz="1000" dirty="0"/>
-                        <a:t>、</a:t>
-                      </a:r>
-                      <a:r>
-                        <a:rPr lang="en-US" altLang="zh-TW" sz="1000" dirty="0"/>
-                        <a:t>3.8.1</a:t>
-                      </a:r>
-                      <a:endParaRPr lang="zh-TW" altLang="en-US" sz="1000" dirty="0"/>
-                    </a:p>
-                  </a:txBody>
-                  <a:tcPr marL="66317" marR="66317" marT="33158" marB="33158" anchor="ctr"/>
-                </a:tc>
-                <a:tc>
-                  <a:txBody>
-                    <a:bodyPr/>
-                    <a:lstStyle/>
-                    <a:p>
-                      <a:pPr>
-                        <a:buNone/>
-                      </a:pPr>
-                      <a:r>
-                        <a:rPr lang="en" sz="1000"/>
-                        <a:t>MIT</a:t>
-                      </a:r>
-                    </a:p>
-                  </a:txBody>
-                  <a:tcPr marL="66317" marR="66317" marT="33158" marB="33158" anchor="ctr"/>
-                </a:tc>
-                <a:extLst>
-                  <a:ext uri="{0D108BD9-81ED-4DB2-BD59-A6C34878D82A}">
-                    <a16:rowId xmlns:a16="http://schemas.microsoft.com/office/drawing/2014/main" val="1004309143"/>
-                  </a:ext>
-                </a:extLst>
-              </a:tr>
-              <a:tr h="221055">
-                <a:tc>
-                  <a:txBody>
-                    <a:bodyPr/>
-                    <a:lstStyle/>
-                    <a:p>
-                      <a:pPr>
-                        <a:buNone/>
-                      </a:pPr>
-                      <a:r>
-                        <a:rPr lang="en" sz="1000"/>
-                        <a:t>@github/copilot-sdk</a:t>
-                      </a:r>
-                    </a:p>
-                  </a:txBody>
-                  <a:tcPr marL="66317" marR="66317" marT="33158" marB="33158" anchor="ctr"/>
-                </a:tc>
-                <a:tc>
-                  <a:txBody>
-                    <a:bodyPr/>
-                    <a:lstStyle/>
-                    <a:p>
-                      <a:pPr>
-                        <a:buNone/>
-                      </a:pPr>
-                      <a:r>
-                        <a:rPr lang="en-US" altLang="zh-TW" sz="1000" dirty="0"/>
-                        <a:t>0.3.0</a:t>
-                      </a:r>
-                      <a:endParaRPr lang="zh-TW" altLang="en-US" sz="1000" dirty="0"/>
-                    </a:p>
-                  </a:txBody>
-                  <a:tcPr marL="66317" marR="66317" marT="33158" marB="33158" anchor="ctr"/>
-                </a:tc>
-                <a:tc>
-                  <a:txBody>
-                    <a:bodyPr/>
-                    <a:lstStyle/>
-                    <a:p>
-                      <a:pPr>
-                        <a:buNone/>
-                      </a:pPr>
-                      <a:r>
-                        <a:rPr lang="en" sz="1000"/>
-                        <a:t>MIT</a:t>
-                      </a:r>
-                    </a:p>
-                  </a:txBody>
-                  <a:tcPr marL="66317" marR="66317" marT="33158" marB="33158" anchor="ctr"/>
-                </a:tc>
-                <a:extLst>
-                  <a:ext uri="{0D108BD9-81ED-4DB2-BD59-A6C34878D82A}">
-                    <a16:rowId xmlns:a16="http://schemas.microsoft.com/office/drawing/2014/main" val="2872064740"/>
-                  </a:ext>
-                </a:extLst>
-              </a:tr>
-              <a:tr h="375794">
-                <a:tc>
-                  <a:txBody>
-                    <a:bodyPr/>
-                    <a:lstStyle/>
-                    <a:p>
-                      <a:pPr>
-                        <a:buNone/>
-                      </a:pPr>
-                      <a:r>
-                        <a:rPr lang="en" sz="1000"/>
-                        <a:t>class-validator、class-transformer、zod</a:t>
-                      </a:r>
-                    </a:p>
-                  </a:txBody>
-                  <a:tcPr marL="66317" marR="66317" marT="33158" marB="33158" anchor="ctr"/>
-                </a:tc>
-                <a:tc>
-                  <a:txBody>
-                    <a:bodyPr/>
-                    <a:lstStyle/>
-                    <a:p>
-                      <a:pPr>
-                        <a:buNone/>
-                      </a:pPr>
-                      <a:r>
-                        <a:rPr lang="en-US" altLang="zh-TW" sz="1000"/>
-                        <a:t>0.14.2</a:t>
-                      </a:r>
-                      <a:r>
-                        <a:rPr lang="zh-TW" altLang="en-US" sz="1000"/>
-                        <a:t>、</a:t>
-                      </a:r>
-                      <a:r>
-                        <a:rPr lang="en-US" altLang="zh-TW" sz="1000"/>
-                        <a:t>0.5.1</a:t>
-                      </a:r>
-                      <a:r>
-                        <a:rPr lang="zh-TW" altLang="en-US" sz="1000"/>
-                        <a:t>、</a:t>
-                      </a:r>
-                      <a:r>
-                        <a:rPr lang="en-US" altLang="zh-TW" sz="1000"/>
-                        <a:t>4.3.6</a:t>
-                      </a:r>
-                      <a:endParaRPr lang="zh-TW" altLang="en-US" sz="1000"/>
-                    </a:p>
-                  </a:txBody>
-                  <a:tcPr marL="66317" marR="66317" marT="33158" marB="33158" anchor="ctr"/>
-                </a:tc>
-                <a:tc>
-                  <a:txBody>
-                    <a:bodyPr/>
-                    <a:lstStyle/>
-                    <a:p>
-                      <a:pPr>
-                        <a:buNone/>
-                      </a:pPr>
-                      <a:r>
-                        <a:rPr lang="en" sz="1000"/>
-                        <a:t>MIT</a:t>
-                      </a:r>
-                    </a:p>
-                  </a:txBody>
-                  <a:tcPr marL="66317" marR="66317" marT="33158" marB="33158" anchor="ctr"/>
-                </a:tc>
-                <a:extLst>
-                  <a:ext uri="{0D108BD9-81ED-4DB2-BD59-A6C34878D82A}">
-                    <a16:rowId xmlns:a16="http://schemas.microsoft.com/office/drawing/2014/main" val="2144807841"/>
-                  </a:ext>
-                </a:extLst>
-              </a:tr>
-              <a:tr h="375794">
-                <a:tc>
-                  <a:txBody>
-                    <a:bodyPr/>
-                    <a:lstStyle/>
-                    <a:p>
-                      <a:pPr>
-                        <a:buNone/>
-                      </a:pPr>
-                      <a:r>
-                        <a:rPr lang="en" sz="1000"/>
-                        <a:t>rss-parser、@tavily/core、axios</a:t>
-                      </a:r>
-                    </a:p>
-                  </a:txBody>
-                  <a:tcPr marL="66317" marR="66317" marT="33158" marB="33158" anchor="ctr"/>
-                </a:tc>
-                <a:tc>
-                  <a:txBody>
-                    <a:bodyPr/>
-                    <a:lstStyle/>
-                    <a:p>
-                      <a:pPr>
-                        <a:buNone/>
-                      </a:pPr>
-                      <a:r>
-                        <a:rPr lang="en-US" altLang="zh-TW" sz="1000"/>
-                        <a:t>3.13.0</a:t>
-                      </a:r>
-                      <a:r>
-                        <a:rPr lang="zh-TW" altLang="en-US" sz="1000"/>
-                        <a:t>、</a:t>
-                      </a:r>
-                      <a:r>
-                        <a:rPr lang="en-US" altLang="zh-TW" sz="1000"/>
-                        <a:t>0.5.12</a:t>
-                      </a:r>
-                      <a:r>
-                        <a:rPr lang="zh-TW" altLang="en-US" sz="1000"/>
-                        <a:t>、</a:t>
-                      </a:r>
-                      <a:r>
-                        <a:rPr lang="en-US" altLang="zh-TW" sz="1000"/>
-                        <a:t>1.15.0</a:t>
-                      </a:r>
-                      <a:endParaRPr lang="zh-TW" altLang="en-US" sz="1000"/>
-                    </a:p>
-                  </a:txBody>
-                  <a:tcPr marL="66317" marR="66317" marT="33158" marB="33158" anchor="ctr"/>
-                </a:tc>
-                <a:tc>
-                  <a:txBody>
-                    <a:bodyPr/>
-                    <a:lstStyle/>
-                    <a:p>
-                      <a:pPr>
-                        <a:buNone/>
-                      </a:pPr>
-                      <a:r>
-                        <a:rPr lang="en" sz="1000"/>
-                        <a:t>MIT</a:t>
-                      </a:r>
-                    </a:p>
-                  </a:txBody>
-                  <a:tcPr marL="66317" marR="66317" marT="33158" marB="33158" anchor="ctr"/>
-                </a:tc>
-                <a:extLst>
-                  <a:ext uri="{0D108BD9-81ED-4DB2-BD59-A6C34878D82A}">
-                    <a16:rowId xmlns:a16="http://schemas.microsoft.com/office/drawing/2014/main" val="449841225"/>
-                  </a:ext>
-                </a:extLst>
-              </a:tr>
-              <a:tr h="375794">
-                <a:tc>
-                  <a:txBody>
-                    <a:bodyPr/>
-                    <a:lstStyle/>
-                    <a:p>
-                      <a:pPr>
-                        <a:buNone/>
-                      </a:pPr>
-                      <a:r>
-                        <a:rPr lang="en" sz="1000"/>
-                        <a:t>@bull-board/api、@bull-board/express</a:t>
-                      </a:r>
-                    </a:p>
-                  </a:txBody>
-                  <a:tcPr marL="66317" marR="66317" marT="33158" marB="33158" anchor="ctr"/>
-                </a:tc>
-                <a:tc>
-                  <a:txBody>
-                    <a:bodyPr/>
-                    <a:lstStyle/>
-                    <a:p>
-                      <a:pPr>
-                        <a:buNone/>
-                      </a:pPr>
-                      <a:r>
-                        <a:rPr lang="en-US" altLang="zh-TW" sz="1000"/>
-                        <a:t>6.13.0</a:t>
-                      </a:r>
-                      <a:endParaRPr lang="zh-TW" altLang="en-US" sz="1000"/>
-                    </a:p>
-                  </a:txBody>
-                  <a:tcPr marL="66317" marR="66317" marT="33158" marB="33158" anchor="ctr"/>
-                </a:tc>
-                <a:tc>
-                  <a:txBody>
-                    <a:bodyPr/>
-                    <a:lstStyle/>
-                    <a:p>
-                      <a:pPr>
-                        <a:buNone/>
-                      </a:pPr>
-                      <a:r>
-                        <a:rPr lang="en" sz="1000"/>
-                        <a:t>MIT</a:t>
-                      </a:r>
-                    </a:p>
-                  </a:txBody>
-                  <a:tcPr marL="66317" marR="66317" marT="33158" marB="33158" anchor="ctr"/>
-                </a:tc>
-                <a:extLst>
-                  <a:ext uri="{0D108BD9-81ED-4DB2-BD59-A6C34878D82A}">
-                    <a16:rowId xmlns:a16="http://schemas.microsoft.com/office/drawing/2014/main" val="2918851166"/>
-                  </a:ext>
-                </a:extLst>
-              </a:tr>
-              <a:tr h="221055">
-                <a:tc>
-                  <a:txBody>
-                    <a:bodyPr/>
-                    <a:lstStyle/>
-                    <a:p>
-                      <a:pPr>
-                        <a:buNone/>
-                      </a:pPr>
-                      <a:r>
-                        <a:rPr lang="en" sz="1000"/>
-                        <a:t>dotenv、global-agent</a:t>
-                      </a:r>
-                    </a:p>
-                  </a:txBody>
-                  <a:tcPr marL="66317" marR="66317" marT="33158" marB="33158" anchor="ctr"/>
-                </a:tc>
-                <a:tc>
-                  <a:txBody>
-                    <a:bodyPr/>
-                    <a:lstStyle/>
-                    <a:p>
-                      <a:pPr>
-                        <a:buNone/>
-                      </a:pPr>
-                      <a:r>
-                        <a:rPr lang="en-US" altLang="zh-TW" sz="1000"/>
-                        <a:t>17.2.3</a:t>
-                      </a:r>
-                      <a:r>
-                        <a:rPr lang="zh-TW" altLang="en-US" sz="1000"/>
-                        <a:t>、</a:t>
-                      </a:r>
-                      <a:r>
-                        <a:rPr lang="en-US" altLang="zh-TW" sz="1000"/>
-                        <a:t>3.0.0</a:t>
-                      </a:r>
-                      <a:endParaRPr lang="zh-TW" altLang="en-US" sz="1000"/>
-                    </a:p>
-                  </a:txBody>
-                  <a:tcPr marL="66317" marR="66317" marT="33158" marB="33158" anchor="ctr"/>
-                </a:tc>
-                <a:tc>
-                  <a:txBody>
-                    <a:bodyPr/>
-                    <a:lstStyle/>
-                    <a:p>
-                      <a:pPr>
-                        <a:buNone/>
-                      </a:pPr>
-                      <a:r>
-                        <a:rPr lang="en" sz="1000" dirty="0"/>
-                        <a:t>BSD-2-Clause、BSD-3-Clause</a:t>
-                      </a:r>
-                    </a:p>
-                  </a:txBody>
-                  <a:tcPr marL="66317" marR="66317" marT="33158" marB="33158" anchor="ctr"/>
-                </a:tc>
-                <a:extLst>
-                  <a:ext uri="{0D108BD9-81ED-4DB2-BD59-A6C34878D82A}">
-                    <a16:rowId xmlns:a16="http://schemas.microsoft.com/office/drawing/2014/main" val="2391829051"/>
-                  </a:ext>
-                </a:extLst>
-              </a:tr>
-            </a:tbl>
-          </a:graphicData>
-        </a:graphic>
-      </p:graphicFrame>
-    </p:spTree>
-    <p:extLst>
-      <p:ext uri="{BB962C8B-B14F-4D97-AF65-F5344CB8AC3E}">
-        <p14:creationId xmlns:p14="http://schemas.microsoft.com/office/powerpoint/2010/main" val="3058347366"/>
       </p:ext>
     </p:extLst>
   </p:cSld>
@@ -22699,6 +24446,21 @@
 </file>
 
 <file path=customXml/item1.xml><?xml version="1.0" encoding="utf-8"?>
+<p:properties xmlns:p="http://schemas.microsoft.com/office/2006/metadata/properties" xmlns:xsi="http://www.w3.org/2001/XMLSchema-instance" xmlns:pc="http://schemas.microsoft.com/office/infopath/2007/PartnerControls">
+  <documentManagement/>
+</p:properties>
+</file>
+
+<file path=customXml/item2.xml><?xml version="1.0" encoding="utf-8"?>
+<?mso-contentType ?>
+<FormTemplates xmlns="http://schemas.microsoft.com/sharepoint/v3/contenttype/forms">
+  <Display>DocumentLibraryForm</Display>
+  <Edit>DocumentLibraryForm</Edit>
+  <New>DocumentLibraryForm</New>
+</FormTemplates>
+</file>
+
+<file path=customXml/item3.xml><?xml version="1.0" encoding="utf-8"?>
 <ct:contentTypeSchema xmlns:ct="http://schemas.microsoft.com/office/2006/metadata/contentType" xmlns:ma="http://schemas.microsoft.com/office/2006/metadata/properties/metaAttributes" ct:_="" ma:_="" ma:contentTypeName="Document" ma:contentTypeID="0x010100DE4F25D0FF425B4EA678AC2414B6A709" ma:contentTypeVersion="10" ma:contentTypeDescription="Create a new document." ma:contentTypeScope="" ma:versionID="8ceec2ce155b1d63c0c6fcd4110f3cfe">
   <xsd:schema xmlns:xsd="http://www.w3.org/2001/XMLSchema" xmlns:xs="http://www.w3.org/2001/XMLSchema" xmlns:p="http://schemas.microsoft.com/office/2006/metadata/properties" xmlns:ns2="7cac0686-f0c7-4236-b000-d7b90732a875" xmlns:ns3="9bfc64f2-d580-4df8-9fa4-4631ad6ac43d" targetNamespace="http://schemas.microsoft.com/office/2006/metadata/properties" ma:root="true" ma:fieldsID="267f21102a69fda15f58a0ecdfc9abe1" ns2:_="" ns3:_="">
     <xsd:import namespace="7cac0686-f0c7-4236-b000-d7b90732a875"/>
@@ -22899,22 +24661,32 @@
 </ct:contentTypeSchema>
 </file>
 
-<file path=customXml/item2.xml><?xml version="1.0" encoding="utf-8"?>
-<?mso-contentType ?>
-<FormTemplates xmlns="http://schemas.microsoft.com/sharepoint/v3/contenttype/forms">
-  <Display>DocumentLibraryForm</Display>
-  <Edit>DocumentLibraryForm</Edit>
-  <New>DocumentLibraryForm</New>
-</FormTemplates>
+<file path=customXml/itemProps1.xml><?xml version="1.0" encoding="utf-8"?>
+<ds:datastoreItem xmlns:ds="http://schemas.openxmlformats.org/officeDocument/2006/customXml" ds:itemID="{0FD5D526-59E0-46BD-B75A-4A393253F249}">
+  <ds:schemaRefs>
+    <ds:schemaRef ds:uri="http://schemas.microsoft.com/office/2006/documentManagement/types"/>
+    <ds:schemaRef ds:uri="http://schemas.microsoft.com/office/2006/metadata/properties"/>
+    <ds:schemaRef ds:uri="http://purl.org/dc/elements/1.1/"/>
+    <ds:schemaRef ds:uri="9bfc64f2-d580-4df8-9fa4-4631ad6ac43d"/>
+    <ds:schemaRef ds:uri="http://schemas.openxmlformats.org/package/2006/metadata/core-properties"/>
+    <ds:schemaRef ds:uri="http://purl.org/dc/terms/"/>
+    <ds:schemaRef ds:uri="http://www.w3.org/XML/1998/namespace"/>
+    <ds:schemaRef ds:uri="http://schemas.microsoft.com/office/infopath/2007/PartnerControls"/>
+    <ds:schemaRef ds:uri="7cac0686-f0c7-4236-b000-d7b90732a875"/>
+    <ds:schemaRef ds:uri="http://purl.org/dc/dcmitype/"/>
+  </ds:schemaRefs>
+</ds:datastoreItem>
 </file>
 
-<file path=customXml/item3.xml><?xml version="1.0" encoding="utf-8"?>
-<p:properties xmlns:p="http://schemas.microsoft.com/office/2006/metadata/properties" xmlns:xsi="http://www.w3.org/2001/XMLSchema-instance" xmlns:pc="http://schemas.microsoft.com/office/infopath/2007/PartnerControls">
-  <documentManagement/>
-</p:properties>
+<file path=customXml/itemProps2.xml><?xml version="1.0" encoding="utf-8"?>
+<ds:datastoreItem xmlns:ds="http://schemas.openxmlformats.org/officeDocument/2006/customXml" ds:itemID="{76929C79-DB32-411C-8C37-9A0BBBB5F642}">
+  <ds:schemaRefs>
+    <ds:schemaRef ds:uri="http://schemas.microsoft.com/sharepoint/v3/contenttype/forms"/>
+  </ds:schemaRefs>
+</ds:datastoreItem>
 </file>
 
-<file path=customXml/itemProps1.xml><?xml version="1.0" encoding="utf-8"?>
+<file path=customXml/itemProps3.xml><?xml version="1.0" encoding="utf-8"?>
 <ds:datastoreItem xmlns:ds="http://schemas.openxmlformats.org/officeDocument/2006/customXml" ds:itemID="{6B3946E7-66F8-4182-AA38-CFC406C59F4E}">
   <ds:schemaRefs>
     <ds:schemaRef ds:uri="http://schemas.microsoft.com/office/2006/metadata/contentType"/>
@@ -22933,31 +24705,6 @@
 </ds:datastoreItem>
 </file>
 
-<file path=customXml/itemProps2.xml><?xml version="1.0" encoding="utf-8"?>
-<ds:datastoreItem xmlns:ds="http://schemas.openxmlformats.org/officeDocument/2006/customXml" ds:itemID="{76929C79-DB32-411C-8C37-9A0BBBB5F642}">
-  <ds:schemaRefs>
-    <ds:schemaRef ds:uri="http://schemas.microsoft.com/sharepoint/v3/contenttype/forms"/>
-  </ds:schemaRefs>
-</ds:datastoreItem>
-</file>
-
-<file path=customXml/itemProps3.xml><?xml version="1.0" encoding="utf-8"?>
-<ds:datastoreItem xmlns:ds="http://schemas.openxmlformats.org/officeDocument/2006/customXml" ds:itemID="{0FD5D526-59E0-46BD-B75A-4A393253F249}">
-  <ds:schemaRefs>
-    <ds:schemaRef ds:uri="http://schemas.microsoft.com/office/2006/documentManagement/types"/>
-    <ds:schemaRef ds:uri="http://schemas.microsoft.com/office/2006/metadata/properties"/>
-    <ds:schemaRef ds:uri="http://purl.org/dc/elements/1.1/"/>
-    <ds:schemaRef ds:uri="9bfc64f2-d580-4df8-9fa4-4631ad6ac43d"/>
-    <ds:schemaRef ds:uri="http://schemas.openxmlformats.org/package/2006/metadata/core-properties"/>
-    <ds:schemaRef ds:uri="http://purl.org/dc/terms/"/>
-    <ds:schemaRef ds:uri="http://www.w3.org/XML/1998/namespace"/>
-    <ds:schemaRef ds:uri="http://schemas.microsoft.com/office/infopath/2007/PartnerControls"/>
-    <ds:schemaRef ds:uri="7cac0686-f0c7-4236-b000-d7b90732a875"/>
-    <ds:schemaRef ds:uri="http://purl.org/dc/dcmitype/"/>
-  </ds:schemaRefs>
-</ds:datastoreItem>
-</file>
-
 <file path=docMetadata/LabelInfo.xml><?xml version="1.0" encoding="utf-8"?>
 <clbl:labelList xmlns:clbl="http://schemas.microsoft.com/office/2020/mipLabelMetadata">
   <clbl:label id="{217a5a3d-163a-4e8b-af1b-58fd7f92894f}" enabled="0" method="" siteId="{217a5a3d-163a-4e8b-af1b-58fd7f92894f}" removed="1"/>

--- a/infogather.pptx
+++ b/infogather.pptx
@@ -5,17 +5,15 @@
     <p:sldMasterId id="2147483648" r:id="rId4"/>
   </p:sldMasterIdLst>
   <p:notesMasterIdLst>
-    <p:notesMasterId r:id="rId13"/>
+    <p:notesMasterId r:id="rId11"/>
   </p:notesMasterIdLst>
   <p:sldIdLst>
     <p:sldId id="256" r:id="rId5"/>
     <p:sldId id="2147471230" r:id="rId6"/>
     <p:sldId id="2147471223" r:id="rId7"/>
-    <p:sldId id="2147471229" r:id="rId8"/>
-    <p:sldId id="3274" r:id="rId9"/>
-    <p:sldId id="2147471235" r:id="rId10"/>
-    <p:sldId id="2147471236" r:id="rId11"/>
-    <p:sldId id="2147471237" r:id="rId12"/>
+    <p:sldId id="3274" r:id="rId8"/>
+    <p:sldId id="2147471235" r:id="rId9"/>
+    <p:sldId id="2147471237" r:id="rId10"/>
   </p:sldIdLst>
   <p:sldSz cx="11520488" cy="6480175"/>
   <p:notesSz cx="6858000" cy="9144000"/>
@@ -2360,134 +2358,6 @@
             <a:pPr marL="158750" indent="0">
               <a:buNone/>
             </a:pPr>
-            <a:r>
-              <a:rPr lang="zh-TW" altLang="en-US" dirty="0"/>
-              <a:t>這一頁先說明 </a:t>
-            </a:r>
-            <a:r>
-              <a:rPr lang="en" altLang="zh-TW" dirty="0" err="1"/>
-              <a:t>InfoGather</a:t>
-            </a:r>
-            <a:r>
-              <a:rPr lang="en" altLang="zh-TW" dirty="0"/>
-              <a:t> </a:t>
-            </a:r>
-            <a:r>
-              <a:rPr lang="zh-TW" altLang="en-US" dirty="0"/>
-              <a:t>的整體系統組成。</a:t>
-            </a:r>
-            <a:endParaRPr lang="en-US" altLang="zh-TW" dirty="0"/>
-          </a:p>
-          <a:p>
-            <a:pPr marL="158750" indent="0">
-              <a:buNone/>
-            </a:pPr>
-            <a:endParaRPr lang="zh-TW" altLang="en-US" dirty="0"/>
-          </a:p>
-          <a:p>
-            <a:pPr marL="158750" indent="0">
-              <a:buNone/>
-            </a:pPr>
-            <a:r>
-              <a:rPr lang="en" altLang="zh-TW" dirty="0" err="1"/>
-              <a:t>InfoGather</a:t>
-            </a:r>
-            <a:r>
-              <a:rPr lang="en" altLang="zh-TW" dirty="0"/>
-              <a:t> </a:t>
-            </a:r>
-            <a:r>
-              <a:rPr lang="zh-TW" altLang="en-US" dirty="0"/>
-              <a:t>可以先理解成一個內部的公開資料蒐集與整合平台。前端提供使用者操作介面，後端 </a:t>
-            </a:r>
-            <a:r>
-              <a:rPr lang="en" altLang="zh-TW" dirty="0"/>
-              <a:t>API </a:t>
-            </a:r>
-            <a:r>
-              <a:rPr lang="zh-TW" altLang="en-US" dirty="0"/>
-              <a:t>負責業務邏輯與資料存取，</a:t>
-            </a:r>
-            <a:r>
-              <a:rPr lang="en" altLang="zh-TW" dirty="0"/>
-              <a:t>Scheduler </a:t>
-            </a:r>
-            <a:r>
-              <a:rPr lang="zh-TW" altLang="en-US" dirty="0"/>
-              <a:t>負責定期觸發任務，</a:t>
-            </a:r>
-            <a:r>
-              <a:rPr lang="en" altLang="zh-TW" dirty="0"/>
-              <a:t>Worker </a:t>
-            </a:r>
-            <a:r>
-              <a:rPr lang="zh-TW" altLang="en-US" dirty="0"/>
-              <a:t>則處理資料擷取、文章分析與洞見彙報等背景工作。</a:t>
-            </a:r>
-          </a:p>
-          <a:p>
-            <a:pPr marL="158750" indent="0">
-              <a:buNone/>
-            </a:pPr>
-            <a:endParaRPr lang="en-US" altLang="zh-TW" dirty="0"/>
-          </a:p>
-          <a:p>
-            <a:pPr marL="158750" indent="0">
-              <a:buNone/>
-            </a:pPr>
-            <a:r>
-              <a:rPr lang="zh-TW" altLang="en-US" dirty="0"/>
-              <a:t>資料儲存主要使用 </a:t>
-            </a:r>
-            <a:r>
-              <a:rPr lang="en" altLang="zh-TW" dirty="0"/>
-              <a:t>MongoDB</a:t>
-            </a:r>
-            <a:r>
-              <a:rPr lang="zh-TW" altLang="en" dirty="0"/>
-              <a:t>，</a:t>
-            </a:r>
-            <a:r>
-              <a:rPr lang="zh-TW" altLang="en-US" dirty="0"/>
-              <a:t>佇列與快取則使用 </a:t>
-            </a:r>
-            <a:r>
-              <a:rPr lang="en" altLang="zh-TW" dirty="0"/>
-              <a:t>Redis</a:t>
-            </a:r>
-            <a:r>
-              <a:rPr lang="zh-TW" altLang="en" dirty="0"/>
-              <a:t>。</a:t>
-            </a:r>
-            <a:r>
-              <a:rPr lang="en" altLang="zh-TW" dirty="0"/>
-              <a:t>AI </a:t>
-            </a:r>
-            <a:r>
-              <a:rPr lang="zh-TW" altLang="en-US" dirty="0"/>
-              <a:t>能力會透過 </a:t>
-            </a:r>
-            <a:r>
-              <a:rPr lang="en" altLang="zh-TW" dirty="0"/>
-              <a:t>Copilot CLI Server </a:t>
-            </a:r>
-            <a:r>
-              <a:rPr lang="zh-TW" altLang="en-US" dirty="0"/>
-              <a:t>與 </a:t>
-            </a:r>
-            <a:r>
-              <a:rPr lang="en" altLang="zh-TW" dirty="0"/>
-              <a:t>LLM Provider </a:t>
-            </a:r>
-            <a:r>
-              <a:rPr lang="zh-TW" altLang="en-US" dirty="0"/>
-              <a:t>串接，用來支援文章判讀、摘要、分類與助理推理。</a:t>
-            </a:r>
-          </a:p>
-          <a:p>
-            <a:pPr marL="158750" indent="0">
-              <a:buNone/>
-            </a:pPr>
             <a:endParaRPr kumimoji="1" lang="zh-TW" altLang="en-US" dirty="0"/>
           </a:p>
         </p:txBody>
@@ -2557,67 +2427,6 @@
             <a:pPr marL="158750" indent="0">
               <a:buNone/>
             </a:pPr>
-            <a:r>
-              <a:rPr lang="zh-TW" altLang="en-US" dirty="0"/>
-              <a:t>這一頁是測試環境的 </a:t>
-            </a:r>
-            <a:r>
-              <a:rPr lang="en" altLang="zh-TW" dirty="0"/>
-              <a:t>VM </a:t>
-            </a:r>
-            <a:r>
-              <a:rPr lang="zh-TW" altLang="en-US" dirty="0"/>
-              <a:t>配置草案。</a:t>
-            </a:r>
-            <a:endParaRPr lang="en-US" altLang="zh-TW" dirty="0"/>
-          </a:p>
-          <a:p>
-            <a:pPr marL="158750" indent="0">
-              <a:buNone/>
-            </a:pPr>
-            <a:endParaRPr lang="zh-TW" altLang="en-US" dirty="0"/>
-          </a:p>
-          <a:p>
-            <a:pPr marL="158750" indent="0">
-              <a:buNone/>
-            </a:pPr>
-            <a:r>
-              <a:rPr lang="zh-TW" altLang="en-US" dirty="0"/>
-              <a:t>測試環境的設計方向，是盡量貼近正式環境的架構，但資源規格可以相對保守。這樣做的目的是讓我們在 </a:t>
-            </a:r>
-            <a:r>
-              <a:rPr lang="en" altLang="zh-TW" dirty="0"/>
-              <a:t>SIT </a:t>
-            </a:r>
-            <a:r>
-              <a:rPr lang="zh-TW" altLang="en-US" dirty="0"/>
-              <a:t>階段就能驗證完整部署方式，包括入口節點、應用節點、資料庫、</a:t>
-            </a:r>
-            <a:r>
-              <a:rPr lang="en" altLang="zh-TW" dirty="0"/>
-              <a:t>Redis </a:t>
-            </a:r>
-            <a:r>
-              <a:rPr lang="zh-TW" altLang="en-US" dirty="0"/>
-              <a:t>佇列、</a:t>
-            </a:r>
-            <a:r>
-              <a:rPr lang="en" altLang="zh-TW" dirty="0"/>
-              <a:t>Copilot CLI Server</a:t>
-            </a:r>
-            <a:r>
-              <a:rPr lang="zh-TW" altLang="en" dirty="0"/>
-              <a:t>，</a:t>
-            </a:r>
-            <a:r>
-              <a:rPr lang="zh-TW" altLang="en-US" dirty="0"/>
-              <a:t>以及監控節點。</a:t>
-            </a:r>
-          </a:p>
-          <a:p>
-            <a:pPr marL="158750" indent="0">
-              <a:buNone/>
-            </a:pPr>
             <a:endParaRPr kumimoji="1" lang="zh-TW" altLang="en-US" dirty="0"/>
           </a:p>
         </p:txBody>
@@ -2636,126 +2445,6 @@
 </file>
 
 <file path=ppt/notesSlides/notesSlide4.xml><?xml version="1.0" encoding="utf-8"?>
-<p:notes xmlns:a="http://schemas.openxmlformats.org/drawingml/2006/main" xmlns:r="http://schemas.openxmlformats.org/officeDocument/2006/relationships" xmlns:p="http://schemas.openxmlformats.org/presentationml/2006/main">
-  <p:cSld>
-    <p:spTree>
-      <p:nvGrpSpPr>
-        <p:cNvPr id="1" name="">
-          <a:extLst>
-            <a:ext uri="{FF2B5EF4-FFF2-40B4-BE49-F238E27FC236}">
-              <a16:creationId xmlns:a16="http://schemas.microsoft.com/office/drawing/2014/main" id="{1B4D5A0B-C23D-A6B6-F506-DBB4AB60F802}"/>
-            </a:ext>
-          </a:extLst>
-        </p:cNvPr>
-        <p:cNvGrpSpPr/>
-        <p:nvPr/>
-      </p:nvGrpSpPr>
-      <p:grpSpPr>
-        <a:xfrm>
-          <a:off x="0" y="0"/>
-          <a:ext cx="0" cy="0"/>
-          <a:chOff x="0" y="0"/>
-          <a:chExt cx="0" cy="0"/>
-        </a:xfrm>
-      </p:grpSpPr>
-      <p:sp>
-        <p:nvSpPr>
-          <p:cNvPr id="2" name="投影片影像版面配置區 1">
-            <a:extLst>
-              <a:ext uri="{FF2B5EF4-FFF2-40B4-BE49-F238E27FC236}">
-                <a16:creationId xmlns:a16="http://schemas.microsoft.com/office/drawing/2014/main" id="{EF181B94-5775-4AF6-D761-FA6748C4C26C}"/>
-              </a:ext>
-            </a:extLst>
-          </p:cNvPr>
-          <p:cNvSpPr>
-            <a:spLocks noGrp="1" noRot="1" noChangeAspect="1"/>
-          </p:cNvSpPr>
-          <p:nvPr>
-            <p:ph type="sldImg"/>
-          </p:nvPr>
-        </p:nvSpPr>
-        <p:spPr>
-          <a:xfrm>
-            <a:off x="381000" y="685800"/>
-            <a:ext cx="6096000" cy="3429000"/>
-          </a:xfrm>
-        </p:spPr>
-      </p:sp>
-      <p:sp>
-        <p:nvSpPr>
-          <p:cNvPr id="3" name="備忘稿版面配置區 2">
-            <a:extLst>
-              <a:ext uri="{FF2B5EF4-FFF2-40B4-BE49-F238E27FC236}">
-                <a16:creationId xmlns:a16="http://schemas.microsoft.com/office/drawing/2014/main" id="{26A80CD3-F554-6BC9-21C3-A1A8DF906A34}"/>
-              </a:ext>
-            </a:extLst>
-          </p:cNvPr>
-          <p:cNvSpPr>
-            <a:spLocks noGrp="1"/>
-          </p:cNvSpPr>
-          <p:nvPr>
-            <p:ph type="body" idx="1"/>
-          </p:nvPr>
-        </p:nvSpPr>
-        <p:spPr/>
-        <p:txBody>
-          <a:bodyPr/>
-          <a:lstStyle/>
-          <a:p>
-            <a:pPr marL="158750" indent="0">
-              <a:buNone/>
-            </a:pPr>
-            <a:r>
-              <a:rPr lang="zh-TW" altLang="en-US" dirty="0"/>
-              <a:t>這一頁是正式環境的 </a:t>
-            </a:r>
-            <a:r>
-              <a:rPr lang="en" altLang="zh-TW" dirty="0"/>
-              <a:t>VM </a:t>
-            </a:r>
-            <a:r>
-              <a:rPr lang="zh-TW" altLang="en-US" dirty="0"/>
-              <a:t>配置草案。</a:t>
-            </a:r>
-            <a:endParaRPr lang="en-US" altLang="zh-TW" dirty="0"/>
-          </a:p>
-          <a:p>
-            <a:pPr marL="158750" indent="0">
-              <a:buNone/>
-            </a:pPr>
-            <a:endParaRPr lang="zh-TW" altLang="en-US" dirty="0"/>
-          </a:p>
-          <a:p>
-            <a:pPr marL="158750" indent="0">
-              <a:buNone/>
-            </a:pPr>
-            <a:r>
-              <a:rPr lang="zh-TW" altLang="en-US" dirty="0"/>
-              <a:t>正式環境基本上延續前一頁測試環境的架構，但資源規格會提高，主要是因應正式上線後的穩定性、資料成長、背景任務處理，以及監控與備份需求。</a:t>
-            </a:r>
-          </a:p>
-          <a:p>
-            <a:pPr marL="158750" indent="0">
-              <a:buNone/>
-            </a:pPr>
-            <a:endParaRPr kumimoji="1" lang="zh-TW" altLang="en-US" dirty="0"/>
-          </a:p>
-        </p:txBody>
-      </p:sp>
-    </p:spTree>
-    <p:extLst>
-      <p:ext uri="{BB962C8B-B14F-4D97-AF65-F5344CB8AC3E}">
-        <p14:creationId xmlns:p14="http://schemas.microsoft.com/office/powerpoint/2010/main" val="3152261082"/>
-      </p:ext>
-    </p:extLst>
-  </p:cSld>
-  <p:clrMapOvr>
-    <a:masterClrMapping/>
-  </p:clrMapOvr>
-</p:notes>
-</file>
-
-<file path=ppt/notesSlides/notesSlide5.xml><?xml version="1.0" encoding="utf-8"?>
 <p:notes xmlns:a="http://schemas.openxmlformats.org/drawingml/2006/main" xmlns:r="http://schemas.openxmlformats.org/officeDocument/2006/relationships" xmlns:p="http://schemas.openxmlformats.org/presentationml/2006/main">
   <p:cSld>
     <p:spTree>
@@ -2807,184 +2496,6 @@
             <a:pPr marL="158750" indent="0">
               <a:buNone/>
             </a:pPr>
-            <a:r>
-              <a:rPr lang="zh-TW" altLang="en-US" dirty="0"/>
-              <a:t>這一頁是 </a:t>
-            </a:r>
-            <a:r>
-              <a:rPr lang="en" altLang="zh-TW" dirty="0" err="1"/>
-              <a:t>InfoGather</a:t>
-            </a:r>
-            <a:r>
-              <a:rPr lang="en" altLang="zh-TW" dirty="0"/>
-              <a:t> </a:t>
-            </a:r>
-            <a:r>
-              <a:rPr lang="zh-TW" altLang="en-US" dirty="0"/>
-              <a:t>的雲適性評估。</a:t>
-            </a:r>
-            <a:endParaRPr lang="en-US" altLang="zh-TW" dirty="0"/>
-          </a:p>
-          <a:p>
-            <a:pPr marL="158750" indent="0">
-              <a:buNone/>
-            </a:pPr>
-            <a:endParaRPr lang="zh-TW" altLang="en-US" dirty="0"/>
-          </a:p>
-          <a:p>
-            <a:pPr marL="158750" indent="0">
-              <a:buNone/>
-            </a:pPr>
-            <a:r>
-              <a:rPr lang="en" altLang="zh-TW" dirty="0" err="1"/>
-              <a:t>InfoGather</a:t>
-            </a:r>
-            <a:r>
-              <a:rPr lang="en" altLang="zh-TW" dirty="0"/>
-              <a:t> </a:t>
-            </a:r>
-            <a:r>
-              <a:rPr lang="zh-TW" altLang="en-US" dirty="0"/>
-              <a:t>本身採用前後端分離、容器化、背景任務佇列化，以及外部 </a:t>
-            </a:r>
-            <a:r>
-              <a:rPr lang="en" altLang="zh-TW" dirty="0"/>
-              <a:t>API </a:t>
-            </a:r>
-            <a:r>
-              <a:rPr lang="zh-TW" altLang="en-US" dirty="0"/>
-              <a:t>串接的架構，所以從技術面來看，上雲可行性是高的。</a:t>
-            </a:r>
-            <a:endParaRPr lang="en-US" altLang="zh-TW" dirty="0"/>
-          </a:p>
-          <a:p>
-            <a:pPr marL="158750" indent="0">
-              <a:buNone/>
-            </a:pPr>
-            <a:endParaRPr lang="zh-TW" altLang="en-US" dirty="0"/>
-          </a:p>
-          <a:p>
-            <a:pPr marL="158750" indent="0">
-              <a:buNone/>
-            </a:pPr>
-            <a:r>
-              <a:rPr lang="zh-TW" altLang="en-US" dirty="0"/>
-              <a:t>如果部署在雲端，可以利用 </a:t>
-            </a:r>
-            <a:r>
-              <a:rPr lang="en" altLang="zh-TW" dirty="0"/>
-              <a:t>PaaS </a:t>
-            </a:r>
-            <a:r>
-              <a:rPr lang="zh-TW" altLang="en-US" dirty="0"/>
-              <a:t>或代管服務，降低 </a:t>
-            </a:r>
-            <a:r>
-              <a:rPr lang="en" altLang="zh-TW" dirty="0"/>
-              <a:t>VM</a:t>
-            </a:r>
-            <a:r>
-              <a:rPr lang="zh-TW" altLang="en" dirty="0"/>
-              <a:t>、</a:t>
-            </a:r>
-            <a:r>
-              <a:rPr lang="zh-TW" altLang="en-US" dirty="0"/>
-              <a:t>資料庫、</a:t>
-            </a:r>
-            <a:r>
-              <a:rPr lang="en" altLang="zh-TW" dirty="0"/>
-              <a:t>Redis</a:t>
-            </a:r>
-            <a:r>
-              <a:rPr lang="zh-TW" altLang="en" dirty="0"/>
-              <a:t>、</a:t>
-            </a:r>
-            <a:r>
-              <a:rPr lang="zh-TW" altLang="en-US" dirty="0"/>
-              <a:t>監控與備份的維運負擔，也比較容易依照資料擷取與 </a:t>
-            </a:r>
-            <a:r>
-              <a:rPr lang="en" altLang="zh-TW" dirty="0"/>
-              <a:t>LLM </a:t>
-            </a:r>
-            <a:r>
-              <a:rPr lang="zh-TW" altLang="en-US" dirty="0"/>
-              <a:t>分析負載進行彈性擴充。</a:t>
-            </a:r>
-          </a:p>
-          <a:p>
-            <a:pPr marL="158750" indent="0">
-              <a:buNone/>
-            </a:pPr>
-            <a:r>
-              <a:rPr lang="zh-TW" altLang="en-US" dirty="0"/>
-              <a:t>不過，是否適合立即上雲，還是需要進一步評估。</a:t>
-            </a:r>
-            <a:endParaRPr lang="en-US" altLang="zh-TW" dirty="0"/>
-          </a:p>
-          <a:p>
-            <a:pPr marL="158750" indent="0">
-              <a:buNone/>
-            </a:pPr>
-            <a:br>
-              <a:rPr lang="zh-TW" altLang="en-US" dirty="0"/>
-            </a:br>
-            <a:r>
-              <a:rPr lang="zh-TW" altLang="en-US" dirty="0"/>
-              <a:t>如果目前仍是低流量內部 </a:t>
-            </a:r>
-            <a:r>
-              <a:rPr lang="en" altLang="zh-TW" dirty="0"/>
-              <a:t>PoC</a:t>
-            </a:r>
-            <a:r>
-              <a:rPr lang="zh-TW" altLang="en" dirty="0"/>
-              <a:t>，</a:t>
-            </a:r>
-            <a:r>
-              <a:rPr lang="zh-TW" altLang="en-US" dirty="0"/>
-              <a:t>短期上雲效益可能有限，也可能增加成本與管理複雜度。另一方面，資料遷移、</a:t>
-            </a:r>
-            <a:r>
-              <a:rPr lang="en" altLang="zh-TW" dirty="0"/>
-              <a:t>Redis </a:t>
-            </a:r>
-            <a:r>
-              <a:rPr lang="zh-TW" altLang="en-US" dirty="0"/>
-              <a:t>佇列不中斷切換、外部服務網路設定、資安稽核與成本控管，也都會是需要先釐清的議題。</a:t>
-            </a:r>
-          </a:p>
-          <a:p>
-            <a:pPr marL="158750" indent="0">
-              <a:buNone/>
-            </a:pPr>
-            <a:endParaRPr lang="en-US" altLang="zh-TW" dirty="0"/>
-          </a:p>
-          <a:p>
-            <a:pPr marL="158750" indent="0">
-              <a:buNone/>
-            </a:pPr>
-            <a:r>
-              <a:rPr lang="zh-TW" altLang="en-US" dirty="0"/>
-              <a:t>所以這一頁的重點，是先確認 </a:t>
-            </a:r>
-            <a:r>
-              <a:rPr lang="en" altLang="zh-TW" dirty="0" err="1"/>
-              <a:t>InfoGather</a:t>
-            </a:r>
-            <a:r>
-              <a:rPr lang="en" altLang="zh-TW" dirty="0"/>
-              <a:t> </a:t>
-            </a:r>
-            <a:r>
-              <a:rPr lang="zh-TW" altLang="en-US" dirty="0"/>
-              <a:t>技術上具備上雲條件，但實際採用地端或雲端，仍需要從成本、資安、維運與未來擴充性一起評估。</a:t>
-            </a:r>
-          </a:p>
-          <a:p>
-            <a:pPr marL="158750" indent="0">
-              <a:buNone/>
-            </a:pPr>
             <a:endParaRPr lang="zh-TW" altLang="en-US" dirty="0"/>
           </a:p>
         </p:txBody>
@@ -3012,7 +2523,7 @@
               <a:pPr>
                 <a:defRPr/>
               </a:pPr>
-              <a:t>5</a:t>
+              <a:t>4</a:t>
             </a:fld>
             <a:endParaRPr lang="zh-TW" altLang="en-US"/>
           </a:p>
@@ -3031,7 +2542,7 @@
 </p:notes>
 </file>
 
-<file path=ppt/notesSlides/notesSlide6.xml><?xml version="1.0" encoding="utf-8"?>
+<file path=ppt/notesSlides/notesSlide5.xml><?xml version="1.0" encoding="utf-8"?>
 <p:notes xmlns:a="http://schemas.openxmlformats.org/drawingml/2006/main" xmlns:r="http://schemas.openxmlformats.org/officeDocument/2006/relationships" xmlns:p="http://schemas.openxmlformats.org/presentationml/2006/main">
   <p:cSld>
     <p:spTree>
@@ -3101,232 +2612,6 @@
             <a:pPr marL="158750" indent="0">
               <a:buNone/>
             </a:pPr>
-            <a:r>
-              <a:rPr lang="zh-TW" altLang="en-US" dirty="0"/>
-              <a:t>這一頁是 </a:t>
-            </a:r>
-            <a:r>
-              <a:rPr lang="en" altLang="zh-TW" dirty="0"/>
-              <a:t>Azure </a:t>
-            </a:r>
-            <a:r>
-              <a:rPr lang="zh-TW" altLang="en-US" dirty="0"/>
-              <a:t>測試環境的參考配置。</a:t>
-            </a:r>
-          </a:p>
-          <a:p>
-            <a:pPr marL="158750" indent="0">
-              <a:buNone/>
-            </a:pPr>
-            <a:endParaRPr lang="en-US" altLang="zh-TW" dirty="0"/>
-          </a:p>
-          <a:p>
-            <a:pPr marL="158750" indent="0">
-              <a:buNone/>
-            </a:pPr>
-            <a:r>
-              <a:rPr lang="zh-TW" altLang="en-US" dirty="0"/>
-              <a:t>如果採用 </a:t>
-            </a:r>
-            <a:r>
-              <a:rPr lang="en" altLang="zh-TW" dirty="0"/>
-              <a:t>Azure</a:t>
-            </a:r>
-            <a:r>
-              <a:rPr lang="zh-TW" altLang="en" dirty="0"/>
-              <a:t>，</a:t>
-            </a:r>
-            <a:r>
-              <a:rPr lang="zh-TW" altLang="en-US" dirty="0"/>
-              <a:t>測試環境可以用 </a:t>
-            </a:r>
-            <a:r>
-              <a:rPr lang="en" altLang="zh-TW" dirty="0"/>
-              <a:t>Azure Front Door </a:t>
-            </a:r>
-            <a:r>
-              <a:rPr lang="zh-TW" altLang="en-US" dirty="0"/>
-              <a:t>作為入口，</a:t>
-            </a:r>
-            <a:r>
-              <a:rPr lang="en" altLang="zh-TW" dirty="0"/>
-              <a:t>Container Apps </a:t>
-            </a:r>
-            <a:r>
-              <a:rPr lang="zh-TW" altLang="en-US" dirty="0"/>
-              <a:t>部署 </a:t>
-            </a:r>
-            <a:r>
-              <a:rPr lang="en" altLang="zh-TW" dirty="0"/>
-              <a:t>App</a:t>
-            </a:r>
-            <a:r>
-              <a:rPr lang="zh-TW" altLang="en" dirty="0"/>
-              <a:t>、</a:t>
-            </a:r>
-            <a:r>
-              <a:rPr lang="en" altLang="zh-TW" dirty="0"/>
-              <a:t>Worker</a:t>
-            </a:r>
-            <a:r>
-              <a:rPr lang="zh-TW" altLang="en" dirty="0"/>
-              <a:t>、</a:t>
-            </a:r>
-            <a:r>
-              <a:rPr lang="en" altLang="zh-TW" dirty="0"/>
-              <a:t>Scheduler </a:t>
-            </a:r>
-            <a:r>
-              <a:rPr lang="zh-TW" altLang="en-US" dirty="0"/>
-              <a:t>與 </a:t>
-            </a:r>
-            <a:r>
-              <a:rPr lang="en" altLang="zh-TW" dirty="0"/>
-              <a:t>Copilot CLI Server</a:t>
-            </a:r>
-            <a:r>
-              <a:rPr lang="zh-TW" altLang="en" dirty="0"/>
-              <a:t>，</a:t>
-            </a:r>
-            <a:r>
-              <a:rPr lang="en" altLang="zh-TW" dirty="0"/>
-              <a:t>MongoDB </a:t>
-            </a:r>
-            <a:r>
-              <a:rPr lang="zh-TW" altLang="en-US" dirty="0"/>
-              <a:t>與 </a:t>
-            </a:r>
-            <a:r>
-              <a:rPr lang="en" altLang="zh-TW" dirty="0"/>
-              <a:t>Redis </a:t>
-            </a:r>
-            <a:r>
-              <a:rPr lang="zh-TW" altLang="en-US" dirty="0"/>
-              <a:t>則使用代管服務，再搭配 </a:t>
-            </a:r>
-            <a:r>
-              <a:rPr lang="en" altLang="zh-TW" dirty="0"/>
-              <a:t>Key Vault</a:t>
-            </a:r>
-            <a:r>
-              <a:rPr lang="zh-TW" altLang="en" dirty="0"/>
-              <a:t>、</a:t>
-            </a:r>
-            <a:r>
-              <a:rPr lang="en" altLang="zh-TW" dirty="0"/>
-              <a:t>Log Analytics</a:t>
-            </a:r>
-            <a:r>
-              <a:rPr lang="zh-TW" altLang="en" dirty="0"/>
-              <a:t>、</a:t>
-            </a:r>
-            <a:r>
-              <a:rPr lang="en" altLang="zh-TW" dirty="0"/>
-              <a:t>Application Insights </a:t>
-            </a:r>
-            <a:r>
-              <a:rPr lang="zh-TW" altLang="en-US" dirty="0"/>
-              <a:t>與 </a:t>
-            </a:r>
-            <a:r>
-              <a:rPr lang="en" altLang="zh-TW" dirty="0"/>
-              <a:t>Blob Storage</a:t>
-            </a:r>
-            <a:r>
-              <a:rPr lang="zh-TW" altLang="en" dirty="0"/>
-              <a:t>。</a:t>
-            </a:r>
-          </a:p>
-          <a:p>
-            <a:pPr marL="158750" indent="0">
-              <a:buNone/>
-            </a:pPr>
-            <a:endParaRPr lang="en-US" altLang="zh-TW" dirty="0"/>
-          </a:p>
-          <a:p>
-            <a:pPr marL="158750" indent="0">
-              <a:buNone/>
-            </a:pPr>
-            <a:r>
-              <a:rPr lang="zh-TW" altLang="en-US" dirty="0"/>
-              <a:t>這一頁主要不是要確認每一項 </a:t>
-            </a:r>
-            <a:r>
-              <a:rPr lang="en" altLang="zh-TW" dirty="0"/>
-              <a:t>Azure </a:t>
-            </a:r>
-            <a:r>
-              <a:rPr lang="zh-TW" altLang="en-US" dirty="0"/>
-              <a:t>規格，而是提出一個討論方向：如果未來要上雲，</a:t>
-            </a:r>
-            <a:r>
-              <a:rPr lang="en" altLang="zh-TW" dirty="0" err="1"/>
-              <a:t>InfoGather</a:t>
-            </a:r>
-            <a:r>
-              <a:rPr lang="en" altLang="zh-TW" dirty="0"/>
-              <a:t> </a:t>
-            </a:r>
-            <a:r>
-              <a:rPr lang="zh-TW" altLang="en-US" dirty="0"/>
-              <a:t>可以盡量採用 </a:t>
-            </a:r>
-            <a:r>
-              <a:rPr lang="en" altLang="zh-TW" dirty="0"/>
-              <a:t>PaaS </a:t>
-            </a:r>
-            <a:r>
-              <a:rPr lang="zh-TW" altLang="en-US" dirty="0"/>
-              <a:t>與代管服務，減少自行維護 </a:t>
-            </a:r>
-            <a:r>
-              <a:rPr lang="en" altLang="zh-TW" dirty="0"/>
-              <a:t>VM</a:t>
-            </a:r>
-            <a:r>
-              <a:rPr lang="zh-TW" altLang="en" dirty="0"/>
-              <a:t>、</a:t>
-            </a:r>
-            <a:r>
-              <a:rPr lang="zh-TW" altLang="en-US" dirty="0"/>
-              <a:t>資料庫與 </a:t>
-            </a:r>
-            <a:r>
-              <a:rPr lang="en" altLang="zh-TW" dirty="0"/>
-              <a:t>Redis </a:t>
-            </a:r>
-            <a:r>
-              <a:rPr lang="zh-TW" altLang="en-US" dirty="0"/>
-              <a:t>的負擔。</a:t>
-            </a:r>
-          </a:p>
-          <a:p>
-            <a:pPr marL="158750" indent="0">
-              <a:buNone/>
-            </a:pPr>
-            <a:endParaRPr lang="en-US" altLang="zh-TW" dirty="0"/>
-          </a:p>
-          <a:p>
-            <a:pPr marL="158750" indent="0">
-              <a:buNone/>
-            </a:pPr>
-            <a:r>
-              <a:rPr lang="zh-TW" altLang="en-US" dirty="0"/>
-              <a:t>測試環境的重點會是驗證部署流程、服務串接、</a:t>
-            </a:r>
-            <a:r>
-              <a:rPr lang="en" altLang="zh-TW" dirty="0"/>
-              <a:t>Secret </a:t>
-            </a:r>
-            <a:r>
-              <a:rPr lang="zh-TW" altLang="en-US" dirty="0"/>
-              <a:t>管理、監控告警，以及背景任務在雲端環境下的運作情況。</a:t>
-            </a:r>
-          </a:p>
-          <a:p>
-            <a:pPr marL="158750" indent="0">
-              <a:buNone/>
-            </a:pPr>
             <a:endParaRPr kumimoji="1" lang="zh-TW" altLang="en-US" dirty="0"/>
           </a:p>
         </p:txBody>
@@ -3344,135 +2629,7 @@
 </p:notes>
 </file>
 
-<file path=ppt/notesSlides/notesSlide7.xml><?xml version="1.0" encoding="utf-8"?>
-<p:notes xmlns:a="http://schemas.openxmlformats.org/drawingml/2006/main" xmlns:r="http://schemas.openxmlformats.org/officeDocument/2006/relationships" xmlns:p="http://schemas.openxmlformats.org/presentationml/2006/main">
-  <p:cSld>
-    <p:spTree>
-      <p:nvGrpSpPr>
-        <p:cNvPr id="1" name="">
-          <a:extLst>
-            <a:ext uri="{FF2B5EF4-FFF2-40B4-BE49-F238E27FC236}">
-              <a16:creationId xmlns:a16="http://schemas.microsoft.com/office/drawing/2014/main" id="{85C883E1-D631-E4EB-BC3B-39D7EA8CC2D8}"/>
-            </a:ext>
-          </a:extLst>
-        </p:cNvPr>
-        <p:cNvGrpSpPr/>
-        <p:nvPr/>
-      </p:nvGrpSpPr>
-      <p:grpSpPr>
-        <a:xfrm>
-          <a:off x="0" y="0"/>
-          <a:ext cx="0" cy="0"/>
-          <a:chOff x="0" y="0"/>
-          <a:chExt cx="0" cy="0"/>
-        </a:xfrm>
-      </p:grpSpPr>
-      <p:sp>
-        <p:nvSpPr>
-          <p:cNvPr id="2" name="投影片影像版面配置區 1">
-            <a:extLst>
-              <a:ext uri="{FF2B5EF4-FFF2-40B4-BE49-F238E27FC236}">
-                <a16:creationId xmlns:a16="http://schemas.microsoft.com/office/drawing/2014/main" id="{4A5CEB97-780C-7804-8599-68607877EE84}"/>
-              </a:ext>
-            </a:extLst>
-          </p:cNvPr>
-          <p:cNvSpPr>
-            <a:spLocks noGrp="1" noRot="1" noChangeAspect="1"/>
-          </p:cNvSpPr>
-          <p:nvPr>
-            <p:ph type="sldImg"/>
-          </p:nvPr>
-        </p:nvSpPr>
-        <p:spPr>
-          <a:xfrm>
-            <a:off x="381000" y="685800"/>
-            <a:ext cx="6096000" cy="3429000"/>
-          </a:xfrm>
-        </p:spPr>
-      </p:sp>
-      <p:sp>
-        <p:nvSpPr>
-          <p:cNvPr id="3" name="備忘稿版面配置區 2">
-            <a:extLst>
-              <a:ext uri="{FF2B5EF4-FFF2-40B4-BE49-F238E27FC236}">
-                <a16:creationId xmlns:a16="http://schemas.microsoft.com/office/drawing/2014/main" id="{C4EB2E39-F5FF-CADC-3765-02DDC9789243}"/>
-              </a:ext>
-            </a:extLst>
-          </p:cNvPr>
-          <p:cNvSpPr>
-            <a:spLocks noGrp="1"/>
-          </p:cNvSpPr>
-          <p:nvPr>
-            <p:ph type="body" idx="1"/>
-          </p:nvPr>
-        </p:nvSpPr>
-        <p:spPr/>
-        <p:txBody>
-          <a:bodyPr/>
-          <a:lstStyle/>
-          <a:p>
-            <a:pPr marL="158750" indent="0">
-              <a:buNone/>
-            </a:pPr>
-            <a:r>
-              <a:rPr lang="zh-TW" altLang="en-US" dirty="0"/>
-              <a:t>這一頁是 </a:t>
-            </a:r>
-            <a:r>
-              <a:rPr lang="en" altLang="zh-TW" dirty="0"/>
-              <a:t>Azure </a:t>
-            </a:r>
-            <a:r>
-              <a:rPr lang="zh-TW" altLang="en-US" dirty="0"/>
-              <a:t>正式環境的參考配置。</a:t>
-            </a:r>
-            <a:endParaRPr lang="en-US" altLang="zh-TW" dirty="0"/>
-          </a:p>
-          <a:p>
-            <a:pPr marL="158750" indent="0">
-              <a:buNone/>
-            </a:pPr>
-            <a:endParaRPr lang="zh-TW" altLang="en-US" dirty="0"/>
-          </a:p>
-          <a:p>
-            <a:pPr marL="158750" indent="0">
-              <a:buNone/>
-            </a:pPr>
-            <a:r>
-              <a:rPr lang="zh-TW" altLang="en-US" dirty="0"/>
-              <a:t>正式環境的設計方向，基本上延續前一頁 </a:t>
-            </a:r>
-            <a:r>
-              <a:rPr lang="en" altLang="zh-TW" dirty="0"/>
-              <a:t>Azure </a:t>
-            </a:r>
-            <a:r>
-              <a:rPr lang="zh-TW" altLang="en-US" dirty="0"/>
-              <a:t>測試環境，但會針對正式上線需求提高規格與可靠性。</a:t>
-            </a:r>
-          </a:p>
-          <a:p>
-            <a:pPr marL="158750" indent="0">
-              <a:buNone/>
-            </a:pPr>
-            <a:endParaRPr kumimoji="1" lang="zh-TW" altLang="en-US" dirty="0"/>
-          </a:p>
-        </p:txBody>
-      </p:sp>
-    </p:spTree>
-    <p:extLst>
-      <p:ext uri="{BB962C8B-B14F-4D97-AF65-F5344CB8AC3E}">
-        <p14:creationId xmlns:p14="http://schemas.microsoft.com/office/powerpoint/2010/main" val="3924801858"/>
-      </p:ext>
-    </p:extLst>
-  </p:cSld>
-  <p:clrMapOvr>
-    <a:masterClrMapping/>
-  </p:clrMapOvr>
-</p:notes>
-</file>
-
-<file path=ppt/notesSlides/notesSlide8.xml><?xml version="1.0" encoding="utf-8"?>
+<file path=ppt/notesSlides/notesSlide6.xml><?xml version="1.0" encoding="utf-8"?>
 <p:notes xmlns:a="http://schemas.openxmlformats.org/drawingml/2006/main" xmlns:r="http://schemas.openxmlformats.org/officeDocument/2006/relationships" xmlns:p="http://schemas.openxmlformats.org/presentationml/2006/main">
   <p:cSld>
     <p:spTree>
@@ -3520,242 +2677,6 @@
         <p:txBody>
           <a:bodyPr/>
           <a:lstStyle/>
-          <a:p>
-            <a:pPr marL="158750" indent="0">
-              <a:buNone/>
-            </a:pPr>
-            <a:r>
-              <a:rPr lang="zh-TW" altLang="en-US" dirty="0"/>
-              <a:t>最後，這一頁整理本次提案後續需要確認的方向。</a:t>
-            </a:r>
-            <a:endParaRPr lang="en-US" altLang="zh-TW" dirty="0"/>
-          </a:p>
-          <a:p>
-            <a:pPr marL="158750" indent="0">
-              <a:buNone/>
-            </a:pPr>
-            <a:endParaRPr lang="zh-TW" altLang="en-US" dirty="0"/>
-          </a:p>
-          <a:p>
-            <a:pPr marL="158750" indent="0">
-              <a:buNone/>
-            </a:pPr>
-            <a:r>
-              <a:rPr lang="zh-TW" altLang="en-US" dirty="0"/>
-              <a:t>這裡的討論重點不只是要不要上 </a:t>
-            </a:r>
-            <a:r>
-              <a:rPr lang="en" altLang="zh-TW" dirty="0"/>
-              <a:t>Azure</a:t>
-            </a:r>
-            <a:r>
-              <a:rPr lang="zh-TW" altLang="en" dirty="0"/>
-              <a:t>，</a:t>
-            </a:r>
-            <a:r>
-              <a:rPr lang="zh-TW" altLang="en-US" dirty="0"/>
-              <a:t>而是如果要使用 </a:t>
-            </a:r>
-            <a:r>
-              <a:rPr lang="en" altLang="zh-TW" dirty="0"/>
-              <a:t>Azure</a:t>
-            </a:r>
-            <a:r>
-              <a:rPr lang="zh-TW" altLang="en" dirty="0"/>
-              <a:t>，</a:t>
-            </a:r>
-            <a:r>
-              <a:rPr lang="zh-TW" altLang="en-US" dirty="0"/>
-              <a:t>是否可以採用 </a:t>
-            </a:r>
-            <a:r>
-              <a:rPr lang="en" altLang="zh-TW" dirty="0"/>
-              <a:t>PaaS </a:t>
-            </a:r>
-            <a:r>
-              <a:rPr lang="zh-TW" altLang="en-US" dirty="0"/>
-              <a:t>或代管服務。</a:t>
-            </a:r>
-          </a:p>
-          <a:p>
-            <a:pPr marL="158750" indent="0">
-              <a:buNone/>
-            </a:pPr>
-            <a:endParaRPr kumimoji="1" lang="en-US" altLang="zh-TW" dirty="0"/>
-          </a:p>
-          <a:p>
-            <a:pPr marL="158750" indent="0">
-              <a:buNone/>
-            </a:pPr>
-            <a:r>
-              <a:rPr lang="zh-TW" altLang="en-US" dirty="0"/>
-              <a:t>但如果 </a:t>
-            </a:r>
-            <a:r>
-              <a:rPr lang="en" altLang="zh-TW" dirty="0"/>
-              <a:t>PaaS </a:t>
-            </a:r>
-            <a:r>
-              <a:rPr lang="zh-TW" altLang="en-US" dirty="0"/>
-              <a:t>服務受限，仍可以評估 </a:t>
-            </a:r>
-            <a:r>
-              <a:rPr lang="en" altLang="zh-TW" dirty="0"/>
-              <a:t>Azure VM </a:t>
-            </a:r>
-            <a:r>
-              <a:rPr lang="zh-TW" altLang="en-US" dirty="0"/>
-              <a:t>自建，也就是只使用 </a:t>
-            </a:r>
-            <a:r>
-              <a:rPr lang="en" altLang="zh-TW" dirty="0"/>
-              <a:t>Azure </a:t>
-            </a:r>
-            <a:r>
-              <a:rPr lang="zh-TW" altLang="en-US" dirty="0"/>
-              <a:t>的基礎設施資源，</a:t>
-            </a:r>
-            <a:r>
-              <a:rPr lang="en" altLang="zh-TW" dirty="0"/>
-              <a:t>App</a:t>
-            </a:r>
-            <a:r>
-              <a:rPr lang="zh-TW" altLang="en" dirty="0"/>
-              <a:t>、</a:t>
-            </a:r>
-            <a:r>
-              <a:rPr lang="en" altLang="zh-TW" dirty="0"/>
-              <a:t>MongoDB</a:t>
-            </a:r>
-            <a:r>
-              <a:rPr lang="zh-TW" altLang="en" dirty="0"/>
-              <a:t>、</a:t>
-            </a:r>
-            <a:r>
-              <a:rPr lang="en" altLang="zh-TW" dirty="0"/>
-              <a:t>Redis </a:t>
-            </a:r>
-            <a:r>
-              <a:rPr lang="zh-TW" altLang="en-US" dirty="0"/>
-              <a:t>與監控都由我們自行部署。</a:t>
-            </a:r>
-            <a:endParaRPr lang="en-US" altLang="zh-TW" dirty="0"/>
-          </a:p>
-          <a:p>
-            <a:pPr marL="158750" indent="0">
-              <a:buNone/>
-            </a:pPr>
-            <a:endParaRPr lang="zh-TW" altLang="en-US" dirty="0"/>
-          </a:p>
-          <a:p>
-            <a:pPr marL="158750" indent="0">
-              <a:buNone/>
-            </a:pPr>
-            <a:r>
-              <a:rPr lang="zh-TW" altLang="en-US" dirty="0"/>
-              <a:t>如果 </a:t>
-            </a:r>
-            <a:r>
-              <a:rPr lang="en" altLang="zh-TW" dirty="0"/>
-              <a:t>Azure </a:t>
-            </a:r>
-            <a:r>
-              <a:rPr lang="zh-TW" altLang="en-US" dirty="0"/>
-              <a:t>整體條件暫時不適合，則可以先回到地端 </a:t>
-            </a:r>
-            <a:r>
-              <a:rPr lang="en" altLang="zh-TW" dirty="0"/>
-              <a:t>VM </a:t>
-            </a:r>
-            <a:r>
-              <a:rPr lang="zh-TW" altLang="en-US" dirty="0"/>
-              <a:t>建置，保留後續上雲的可能性。</a:t>
-            </a:r>
-            <a:endParaRPr lang="en-US" altLang="zh-TW" dirty="0"/>
-          </a:p>
-          <a:p>
-            <a:pPr marL="158750" indent="0">
-              <a:buNone/>
-            </a:pPr>
-            <a:endParaRPr lang="zh-TW" altLang="en-US" dirty="0"/>
-          </a:p>
-          <a:p>
-            <a:pPr marL="158750" indent="0">
-              <a:buNone/>
-            </a:pPr>
-            <a:r>
-              <a:rPr lang="zh-TW" altLang="en-US" dirty="0"/>
-              <a:t>所以後續建議優先確認的是：</a:t>
-            </a:r>
-            <a:r>
-              <a:rPr lang="en" altLang="zh-TW" dirty="0" err="1"/>
-              <a:t>InfoGather</a:t>
-            </a:r>
-            <a:r>
-              <a:rPr lang="en" altLang="zh-TW" dirty="0"/>
-              <a:t> </a:t>
-            </a:r>
-            <a:r>
-              <a:rPr lang="zh-TW" altLang="en-US" dirty="0"/>
-              <a:t>是否能使用 </a:t>
-            </a:r>
-            <a:r>
-              <a:rPr lang="en" altLang="zh-TW" dirty="0"/>
-              <a:t>Azure PaaS</a:t>
-            </a:r>
-            <a:r>
-              <a:rPr lang="zh-TW" altLang="en" dirty="0"/>
-              <a:t>／</a:t>
-            </a:r>
-            <a:r>
-              <a:rPr lang="zh-TW" altLang="en-US" dirty="0"/>
-              <a:t>代管服務；如果不行，再決定是採 </a:t>
-            </a:r>
-            <a:r>
-              <a:rPr lang="en" altLang="zh-TW" dirty="0"/>
-              <a:t>Azure VM </a:t>
-            </a:r>
-            <a:r>
-              <a:rPr lang="zh-TW" altLang="en-US" dirty="0"/>
-              <a:t>自建，還是先以地端 </a:t>
-            </a:r>
-            <a:r>
-              <a:rPr lang="en" altLang="zh-TW" dirty="0"/>
-              <a:t>VM </a:t>
-            </a:r>
-            <a:r>
-              <a:rPr lang="zh-TW" altLang="en-US" dirty="0"/>
-              <a:t>建置。</a:t>
-            </a:r>
-            <a:endParaRPr lang="en-US" altLang="zh-TW" dirty="0"/>
-          </a:p>
-          <a:p>
-            <a:pPr marL="158750" indent="0">
-              <a:buNone/>
-            </a:pPr>
-            <a:endParaRPr lang="zh-TW" altLang="en-US" dirty="0"/>
-          </a:p>
-          <a:p>
-            <a:pPr marL="158750" indent="0">
-              <a:buNone/>
-            </a:pPr>
-            <a:r>
-              <a:rPr lang="zh-TW" altLang="en-US" dirty="0"/>
-              <a:t>以上是本次 </a:t>
-            </a:r>
-            <a:r>
-              <a:rPr lang="en" altLang="zh-TW" dirty="0" err="1"/>
-              <a:t>InfoGather</a:t>
-            </a:r>
-            <a:r>
-              <a:rPr lang="en" altLang="zh-TW" dirty="0"/>
-              <a:t> </a:t>
-            </a:r>
-            <a:r>
-              <a:rPr lang="zh-TW" altLang="en-US" dirty="0"/>
-              <a:t>系統架構與部署環境配置提案，謝謝各位。</a:t>
-            </a:r>
-          </a:p>
           <a:p>
             <a:pPr marL="158750" indent="0">
               <a:buNone/>
@@ -7311,7 +6232,7 @@
           <a:p>
             <a:r>
               <a:rPr lang="zh-TW" altLang="en-US" b="1" dirty="0"/>
-              <a:t>系統架構與部署環境配置提案</a:t>
+              <a:t>系統架構與部署環境規劃</a:t>
             </a:r>
             <a:endParaRPr lang="en-US" b="1" dirty="0"/>
           </a:p>
@@ -9785,7 +8706,7 @@
           <a:p>
             <a:r>
               <a:rPr lang="zh-TW" altLang="en-US" b="1" dirty="0"/>
-              <a:t>測試環境 </a:t>
+              <a:t>地端 </a:t>
             </a:r>
             <a:r>
               <a:rPr lang="en" altLang="zh-TW" b="1" dirty="0"/>
@@ -9793,7 +8714,7 @@
             </a:r>
             <a:r>
               <a:rPr lang="zh-TW" altLang="en-US" b="1" dirty="0"/>
-              <a:t>與服務配置</a:t>
+              <a:t>部署規劃</a:t>
             </a:r>
             <a:endParaRPr lang="zh-TW" altLang="en-US" dirty="0"/>
           </a:p>
@@ -9862,21 +8783,41 @@
             <a:endParaRPr lang="en-US" altLang="zh-TW" dirty="0"/>
           </a:p>
           <a:p>
-            <a:pPr marL="36000" indent="0">
-              <a:buNone/>
-            </a:pPr>
-            <a:endParaRPr lang="en-US" altLang="zh-TW" dirty="0"/>
+            <a:r>
+              <a:rPr lang="zh-TW" altLang="en-US" sz="1400" dirty="0"/>
+              <a:t>地端架構需自管 </a:t>
+            </a:r>
+            <a:r>
+              <a:rPr lang="en" altLang="zh-TW" sz="1400" dirty="0"/>
+              <a:t>LB</a:t>
+            </a:r>
+            <a:r>
+              <a:rPr lang="zh-TW" altLang="en" sz="1400" dirty="0"/>
+              <a:t>、</a:t>
+            </a:r>
+            <a:r>
+              <a:rPr lang="en" altLang="zh-TW" sz="1400" dirty="0"/>
+              <a:t>MongoDB replica set</a:t>
+            </a:r>
+            <a:r>
+              <a:rPr lang="zh-TW" altLang="en" sz="1400" dirty="0"/>
+              <a:t>、</a:t>
+            </a:r>
+            <a:r>
+              <a:rPr lang="en" altLang="zh-TW" sz="1400" dirty="0"/>
+              <a:t>Redis Sentinel</a:t>
+            </a:r>
+            <a:r>
+              <a:rPr lang="zh-TW" altLang="en" sz="1400" dirty="0"/>
+              <a:t>、</a:t>
+            </a:r>
+            <a:r>
+              <a:rPr lang="zh-TW" altLang="en-US" sz="1400" dirty="0"/>
+              <a:t>監控與備份機制。</a:t>
+            </a:r>
           </a:p>
           <a:p>
-            <a:r>
-              <a:rPr lang="zh-TW" altLang="en-US" dirty="0"/>
-              <a:t>測試環境資源總計：</a:t>
-            </a:r>
-            <a:r>
-              <a:rPr lang="en" altLang="zh-TW" dirty="0"/>
-              <a:t>32 vCPU / 68 GB RAM / 1120 GB SSD</a:t>
-            </a:r>
-            <a:endParaRPr lang="en-US" altLang="zh-TW" dirty="0"/>
+            <a:endParaRPr lang="en-US" altLang="zh-TW" sz="1400" dirty="0"/>
           </a:p>
           <a:p>
             <a:endParaRPr lang="zh-TW" altLang="en-US" dirty="0"/>
@@ -9885,10 +8826,10 @@
       </p:sp>
       <p:graphicFrame>
         <p:nvGraphicFramePr>
-          <p:cNvPr id="7" name="表格 6">
+          <p:cNvPr id="2" name="表格 1">
             <a:extLst>
               <a:ext uri="{FF2B5EF4-FFF2-40B4-BE49-F238E27FC236}">
-                <a16:creationId xmlns:a16="http://schemas.microsoft.com/office/drawing/2014/main" id="{36296B90-57D8-88FB-0610-C42168C6D82F}"/>
+                <a16:creationId xmlns:a16="http://schemas.microsoft.com/office/drawing/2014/main" id="{C5D44799-8E44-BE61-B3E4-9051A00CCCA2}"/>
               </a:ext>
             </a:extLst>
           </p:cNvPr>
@@ -9898,14 +8839,14 @@
           <p:nvPr>
             <p:extLst>
               <p:ext uri="{D42A27DB-BD31-4B8C-83A1-F6EECF244321}">
-                <p14:modId xmlns:p14="http://schemas.microsoft.com/office/powerpoint/2010/main" val="4194308909"/>
+                <p14:modId xmlns:p14="http://schemas.microsoft.com/office/powerpoint/2010/main" val="3678266343"/>
               </p:ext>
             </p:extLst>
           </p:nvPr>
         </p:nvGraphicFramePr>
         <p:xfrm>
-          <a:off x="179388" y="826714"/>
-          <a:ext cx="11161712" cy="4320000"/>
+          <a:off x="270244" y="844830"/>
+          <a:ext cx="10979999" cy="3931920"/>
         </p:xfrm>
         <a:graphic>
           <a:graphicData uri="http://schemas.openxmlformats.org/drawingml/2006/table">
@@ -9914,50 +8855,36 @@
                 <a:tableStyleId>{91DB7C30-2B5D-4D34-8F22-85940E495A18}</a:tableStyleId>
               </a:tblPr>
               <a:tblGrid>
-                <a:gridCol w="2840921">
+                <a:gridCol w="2347697">
                   <a:extLst>
                     <a:ext uri="{9D8B030D-6E8A-4147-A177-3AD203B41FA5}">
-                      <a16:colId xmlns:a16="http://schemas.microsoft.com/office/drawing/2014/main" val="1199597028"/>
+                      <a16:colId xmlns:a16="http://schemas.microsoft.com/office/drawing/2014/main" val="3246578643"/>
                     </a:ext>
                   </a:extLst>
                 </a:gridCol>
-                <a:gridCol w="800337">
+                <a:gridCol w="2871414">
                   <a:extLst>
                     <a:ext uri="{9D8B030D-6E8A-4147-A177-3AD203B41FA5}">
-                      <a16:colId xmlns:a16="http://schemas.microsoft.com/office/drawing/2014/main" val="1578801080"/>
+                      <a16:colId xmlns:a16="http://schemas.microsoft.com/office/drawing/2014/main" val="4152443395"/>
                     </a:ext>
                   </a:extLst>
                 </a:gridCol>
-                <a:gridCol w="735476">
+                <a:gridCol w="2871414">
                   <a:extLst>
                     <a:ext uri="{9D8B030D-6E8A-4147-A177-3AD203B41FA5}">
-                      <a16:colId xmlns:a16="http://schemas.microsoft.com/office/drawing/2014/main" val="3168828867"/>
+                      <a16:colId xmlns:a16="http://schemas.microsoft.com/office/drawing/2014/main" val="2648218261"/>
                     </a:ext>
                   </a:extLst>
                 </a:gridCol>
-                <a:gridCol w="789751">
+                <a:gridCol w="2889474">
                   <a:extLst>
                     <a:ext uri="{9D8B030D-6E8A-4147-A177-3AD203B41FA5}">
-                      <a16:colId xmlns:a16="http://schemas.microsoft.com/office/drawing/2014/main" val="136309821"/>
-                    </a:ext>
-                  </a:extLst>
-                </a:gridCol>
-                <a:gridCol w="3413612">
-                  <a:extLst>
-                    <a:ext uri="{9D8B030D-6E8A-4147-A177-3AD203B41FA5}">
-                      <a16:colId xmlns:a16="http://schemas.microsoft.com/office/drawing/2014/main" val="3760430905"/>
-                    </a:ext>
-                  </a:extLst>
-                </a:gridCol>
-                <a:gridCol w="2581615">
-                  <a:extLst>
-                    <a:ext uri="{9D8B030D-6E8A-4147-A177-3AD203B41FA5}">
-                      <a16:colId xmlns:a16="http://schemas.microsoft.com/office/drawing/2014/main" val="939028161"/>
+                      <a16:colId xmlns:a16="http://schemas.microsoft.com/office/drawing/2014/main" val="964871860"/>
                     </a:ext>
                   </a:extLst>
                 </a:gridCol>
               </a:tblGrid>
-              <a:tr h="353338">
+              <a:tr h="0">
                 <a:tc>
                   <a:txBody>
                     <a:bodyPr/>
@@ -9967,13 +8894,9 @@
                         <a:buNone/>
                       </a:pPr>
                       <a:r>
-                        <a:rPr lang="en" sz="1400" dirty="0"/>
-                        <a:t>VM</a:t>
-                      </a:r>
-                      <a:endParaRPr lang="zh-TW" altLang="en-US" sz="1400" dirty="0">
-                        <a:latin typeface="Microsoft JhengHei" panose="020B0604030504040204" pitchFamily="34" charset="-120"/>
-                        <a:ea typeface="Microsoft JhengHei" panose="020B0604030504040204" pitchFamily="34" charset="-120"/>
-                      </a:endParaRPr>
+                        <a:rPr lang="zh-TW" altLang="en-US" sz="1400" dirty="0"/>
+                        <a:t>服務角色</a:t>
+                      </a:r>
                     </a:p>
                   </a:txBody>
                   <a:tcPr anchor="ctr"/>
@@ -9987,13 +8910,10 @@
                         <a:buNone/>
                       </a:pPr>
                       <a:r>
-                        <a:rPr lang="en" sz="1400" dirty="0"/>
-                        <a:t>vCPU</a:t>
-                      </a:r>
-                      <a:endParaRPr lang="en" sz="1400" dirty="0">
-                        <a:latin typeface="Microsoft JhengHei" panose="020B0604030504040204" pitchFamily="34" charset="-120"/>
-                        <a:ea typeface="Microsoft JhengHei" panose="020B0604030504040204" pitchFamily="34" charset="-120"/>
-                      </a:endParaRPr>
+                        <a:rPr lang="zh-TW" altLang="en-US" sz="1400" dirty="0"/>
+                        <a:t>測試環境</a:t>
+                      </a:r>
+                      <a:endParaRPr lang="en" sz="1400" dirty="0"/>
                     </a:p>
                   </a:txBody>
                   <a:tcPr anchor="ctr"/>
@@ -10007,13 +8927,10 @@
                         <a:buNone/>
                       </a:pPr>
                       <a:r>
-                        <a:rPr lang="en" sz="1400"/>
-                        <a:t>RAM</a:t>
-                      </a:r>
-                      <a:endParaRPr lang="en" sz="1400">
-                        <a:latin typeface="Microsoft JhengHei" panose="020B0604030504040204" pitchFamily="34" charset="-120"/>
-                        <a:ea typeface="Microsoft JhengHei" panose="020B0604030504040204" pitchFamily="34" charset="-120"/>
-                      </a:endParaRPr>
+                        <a:rPr lang="zh-TW" altLang="en-US" sz="1400" dirty="0"/>
+                        <a:t>正式環境</a:t>
+                      </a:r>
+                      <a:endParaRPr lang="en" sz="1400" dirty="0"/>
                     </a:p>
                   </a:txBody>
                   <a:tcPr anchor="ctr"/>
@@ -10027,13 +8944,32 @@
                         <a:buNone/>
                       </a:pPr>
                       <a:r>
-                        <a:rPr lang="en" sz="1400" dirty="0"/>
-                        <a:t>SSD</a:t>
-                      </a:r>
-                      <a:endParaRPr lang="en" sz="1400" dirty="0">
-                        <a:latin typeface="Microsoft JhengHei" panose="020B0604030504040204" pitchFamily="34" charset="-120"/>
-                        <a:ea typeface="Microsoft JhengHei" panose="020B0604030504040204" pitchFamily="34" charset="-120"/>
-                      </a:endParaRPr>
+                        <a:rPr lang="zh-TW" altLang="en-US" sz="1400" dirty="0"/>
+                        <a:t>說明</a:t>
+                      </a:r>
+                    </a:p>
+                  </a:txBody>
+                  <a:tcPr anchor="ctr"/>
+                </a:tc>
+                <a:extLst>
+                  <a:ext uri="{0D108BD9-81ED-4DB2-BD59-A6C34878D82A}">
+                    <a16:rowId xmlns:a16="http://schemas.microsoft.com/office/drawing/2014/main" val="3468449856"/>
+                  </a:ext>
+                </a:extLst>
+              </a:tr>
+              <a:tr h="518160">
+                <a:tc>
+                  <a:txBody>
+                    <a:bodyPr/>
+                    <a:lstStyle/>
+                    <a:p>
+                      <a:pPr>
+                        <a:buNone/>
+                      </a:pPr>
+                      <a:r>
+                        <a:rPr lang="zh-TW" altLang="en-US" sz="1400" dirty="0"/>
+                        <a:t>入口節點</a:t>
+                      </a:r>
                     </a:p>
                   </a:txBody>
                   <a:tcPr anchor="ctr"/>
@@ -10047,13 +8983,21 @@
                         <a:buNone/>
                       </a:pPr>
                       <a:r>
-                        <a:rPr lang="zh-TW" altLang="en-US" sz="1400"/>
-                        <a:t>部署服務</a:t>
-                      </a:r>
-                      <a:endParaRPr lang="zh-TW" altLang="en-US" sz="1400">
-                        <a:latin typeface="Microsoft JhengHei" panose="020B0604030504040204" pitchFamily="34" charset="-120"/>
-                        <a:ea typeface="Microsoft JhengHei" panose="020B0604030504040204" pitchFamily="34" charset="-120"/>
-                      </a:endParaRPr>
+                        <a:rPr lang="en-US" altLang="zh-TW" sz="1400" dirty="0"/>
+                        <a:t>1 </a:t>
+                      </a:r>
+                      <a:r>
+                        <a:rPr lang="zh-TW" altLang="en-US" sz="1400" dirty="0"/>
+                        <a:t>台，</a:t>
+                      </a:r>
+                      <a:r>
+                        <a:rPr lang="en-US" altLang="zh-TW" sz="1400" dirty="0"/>
+                        <a:t>2 </a:t>
+                      </a:r>
+                      <a:r>
+                        <a:rPr lang="en" sz="1400" dirty="0"/>
+                        <a:t>vCPU／4 GB／40 GB SSD</a:t>
+                      </a:r>
                     </a:p>
                   </a:txBody>
                   <a:tcPr anchor="ctr"/>
@@ -10067,44 +9011,21 @@
                         <a:buNone/>
                       </a:pPr>
                       <a:r>
-                        <a:rPr lang="zh-TW" altLang="en-US" sz="1400"/>
-                        <a:t>說明</a:t>
-                      </a:r>
-                      <a:endParaRPr lang="zh-TW" altLang="en-US" sz="1400">
-                        <a:latin typeface="Microsoft JhengHei" panose="020B0604030504040204" pitchFamily="34" charset="-120"/>
-                        <a:ea typeface="Microsoft JhengHei" panose="020B0604030504040204" pitchFamily="34" charset="-120"/>
-                      </a:endParaRPr>
-                    </a:p>
-                  </a:txBody>
-                  <a:tcPr anchor="ctr"/>
-                </a:tc>
-                <a:extLst>
-                  <a:ext uri="{0D108BD9-81ED-4DB2-BD59-A6C34878D82A}">
-                    <a16:rowId xmlns:a16="http://schemas.microsoft.com/office/drawing/2014/main" val="961505403"/>
-                  </a:ext>
-                </a:extLst>
-              </a:tr>
-              <a:tr h="353338">
-                <a:tc>
-                  <a:txBody>
-                    <a:bodyPr/>
-                    <a:lstStyle/>
-                    <a:p>
-                      <a:pPr>
-                        <a:buNone/>
-                      </a:pPr>
-                      <a:r>
-                        <a:rPr lang="en" sz="1400" dirty="0">
-                          <a:latin typeface="Consolas" panose="020B0609020204030204" pitchFamily="49" charset="0"/>
-                          <a:cs typeface="Consolas" panose="020B0609020204030204" pitchFamily="49" charset="0"/>
-                        </a:rPr>
-                        <a:t>infogather-sit-lb-01</a:t>
-                      </a:r>
-                      <a:endParaRPr lang="en" sz="1400" dirty="0">
-                        <a:latin typeface="Consolas" panose="020B0609020204030204" pitchFamily="49" charset="0"/>
-                        <a:ea typeface="Microsoft JhengHei" panose="020B0604030504040204" pitchFamily="34" charset="-120"/>
-                        <a:cs typeface="Consolas" panose="020B0609020204030204" pitchFamily="49" charset="0"/>
-                      </a:endParaRPr>
+                        <a:rPr lang="en-US" altLang="zh-TW" sz="1400" dirty="0"/>
+                        <a:t>1 </a:t>
+                      </a:r>
+                      <a:r>
+                        <a:rPr lang="zh-TW" altLang="en-US" sz="1400" dirty="0"/>
+                        <a:t>台，</a:t>
+                      </a:r>
+                      <a:r>
+                        <a:rPr lang="en-US" altLang="zh-TW" sz="1400" dirty="0"/>
+                        <a:t>2 </a:t>
+                      </a:r>
+                      <a:r>
+                        <a:rPr lang="en" sz="1400" dirty="0"/>
+                        <a:t>vCPU／4 GB／60 GB SSD</a:t>
+                      </a:r>
                     </a:p>
                   </a:txBody>
                   <a:tcPr anchor="ctr"/>
@@ -10118,9 +9039,34 @@
                         <a:buNone/>
                       </a:pPr>
                       <a:r>
-                        <a:rPr lang="en"/>
-                        <a:t>2 vCPU</a:t>
-                      </a:r>
+                        <a:rPr lang="en" sz="1400" dirty="0" err="1"/>
+                        <a:t>Nginx／HAProxy</a:t>
+                      </a:r>
+                      <a:endParaRPr lang="en" sz="1400" dirty="0"/>
+                    </a:p>
+                  </a:txBody>
+                  <a:tcPr anchor="ctr"/>
+                </a:tc>
+                <a:extLst>
+                  <a:ext uri="{0D108BD9-81ED-4DB2-BD59-A6C34878D82A}">
+                    <a16:rowId xmlns:a16="http://schemas.microsoft.com/office/drawing/2014/main" val="211109404"/>
+                  </a:ext>
+                </a:extLst>
+              </a:tr>
+              <a:tr h="518160">
+                <a:tc>
+                  <a:txBody>
+                    <a:bodyPr/>
+                    <a:lstStyle/>
+                    <a:p>
+                      <a:pPr>
+                        <a:buNone/>
+                      </a:pPr>
+                      <a:r>
+                        <a:rPr lang="en" sz="1400" dirty="0" err="1"/>
+                        <a:t>App／Worker／Scheduler</a:t>
+                      </a:r>
+                      <a:endParaRPr lang="en" sz="1400" dirty="0"/>
                     </a:p>
                   </a:txBody>
                   <a:tcPr anchor="ctr"/>
@@ -10134,8 +9080,20 @@
                         <a:buNone/>
                       </a:pPr>
                       <a:r>
-                        <a:rPr lang="en"/>
-                        <a:t>4 GB</a:t>
+                        <a:rPr lang="en-US" altLang="zh-TW" sz="1400" dirty="0"/>
+                        <a:t>2 </a:t>
+                      </a:r>
+                      <a:r>
+                        <a:rPr lang="zh-TW" altLang="en-US" sz="1400" dirty="0"/>
+                        <a:t>台，合計 </a:t>
+                      </a:r>
+                      <a:r>
+                        <a:rPr lang="en-US" altLang="zh-TW" sz="1400" dirty="0"/>
+                        <a:t>8 </a:t>
+                      </a:r>
+                      <a:r>
+                        <a:rPr lang="en" sz="1400" dirty="0"/>
+                        <a:t>vCPU／16 GB／160 GB SSD</a:t>
                       </a:r>
                     </a:p>
                   </a:txBody>
@@ -10150,8 +9108,20 @@
                         <a:buNone/>
                       </a:pPr>
                       <a:r>
-                        <a:rPr lang="en"/>
-                        <a:t>40 GB</a:t>
+                        <a:rPr lang="en-US" altLang="zh-TW" sz="1400" dirty="0"/>
+                        <a:t>2 </a:t>
+                      </a:r>
+                      <a:r>
+                        <a:rPr lang="zh-TW" altLang="en-US" sz="1400" dirty="0"/>
+                        <a:t>台，合計 </a:t>
+                      </a:r>
+                      <a:r>
+                        <a:rPr lang="en-US" altLang="zh-TW" sz="1400" dirty="0"/>
+                        <a:t>8 </a:t>
+                      </a:r>
+                      <a:r>
+                        <a:rPr lang="en" sz="1400" dirty="0"/>
+                        <a:t>vCPU／32 GB／200 GB SSD</a:t>
                       </a:r>
                     </a:p>
                   </a:txBody>
@@ -10166,13 +9136,33 @@
                         <a:buNone/>
                       </a:pPr>
                       <a:r>
-                        <a:rPr lang="en" sz="1400"/>
-                        <a:t>Nginx / HAProxy</a:t>
-                      </a:r>
-                      <a:endParaRPr lang="en" sz="1400">
-                        <a:latin typeface="Microsoft JhengHei" panose="020B0604030504040204" pitchFamily="34" charset="-120"/>
-                        <a:ea typeface="Microsoft JhengHei" panose="020B0604030504040204" pitchFamily="34" charset="-120"/>
-                      </a:endParaRPr>
+                        <a:rPr lang="en" sz="1400" dirty="0" err="1"/>
+                        <a:t>Web、API、worker、scheduler</a:t>
+                      </a:r>
+                      <a:endParaRPr lang="en" sz="1400" dirty="0"/>
+                    </a:p>
+                  </a:txBody>
+                  <a:tcPr anchor="ctr"/>
+                </a:tc>
+                <a:extLst>
+                  <a:ext uri="{0D108BD9-81ED-4DB2-BD59-A6C34878D82A}">
+                    <a16:rowId xmlns:a16="http://schemas.microsoft.com/office/drawing/2014/main" val="2966864755"/>
+                  </a:ext>
+                </a:extLst>
+              </a:tr>
+              <a:tr h="518160">
+                <a:tc>
+                  <a:txBody>
+                    <a:bodyPr/>
+                    <a:lstStyle/>
+                    <a:p>
+                      <a:pPr>
+                        <a:buNone/>
+                      </a:pPr>
+                      <a:r>
+                        <a:rPr lang="en" sz="1400" dirty="0"/>
+                        <a:t>MongoDB</a:t>
+                      </a:r>
                     </a:p>
                   </a:txBody>
                   <a:tcPr anchor="ctr"/>
@@ -10186,48 +9176,21 @@
                         <a:buNone/>
                       </a:pPr>
                       <a:r>
-                        <a:rPr lang="en" sz="1400"/>
-                        <a:t>SIT </a:t>
-                      </a:r>
-                      <a:r>
-                        <a:rPr lang="zh-TW" altLang="en-US" sz="1400"/>
-                        <a:t>入口節點</a:t>
-                      </a:r>
-                      <a:endParaRPr lang="zh-TW" altLang="en-US" sz="1400">
-                        <a:latin typeface="Microsoft JhengHei" panose="020B0604030504040204" pitchFamily="34" charset="-120"/>
-                        <a:ea typeface="Microsoft JhengHei" panose="020B0604030504040204" pitchFamily="34" charset="-120"/>
-                      </a:endParaRPr>
-                    </a:p>
-                  </a:txBody>
-                  <a:tcPr anchor="ctr"/>
-                </a:tc>
-                <a:extLst>
-                  <a:ext uri="{0D108BD9-81ED-4DB2-BD59-A6C34878D82A}">
-                    <a16:rowId xmlns:a16="http://schemas.microsoft.com/office/drawing/2014/main" val="4275047890"/>
-                  </a:ext>
-                </a:extLst>
-              </a:tr>
-              <a:tr h="353338">
-                <a:tc>
-                  <a:txBody>
-                    <a:bodyPr/>
-                    <a:lstStyle/>
-                    <a:p>
-                      <a:pPr>
-                        <a:buNone/>
-                      </a:pPr>
-                      <a:r>
-                        <a:rPr lang="en" sz="1400" dirty="0">
-                          <a:latin typeface="Consolas" panose="020B0609020204030204" pitchFamily="49" charset="0"/>
-                          <a:cs typeface="Consolas" panose="020B0609020204030204" pitchFamily="49" charset="0"/>
-                        </a:rPr>
-                        <a:t>infogather-sit-app-01</a:t>
-                      </a:r>
-                      <a:endParaRPr lang="en" sz="1400" dirty="0">
-                        <a:latin typeface="Consolas" panose="020B0609020204030204" pitchFamily="49" charset="0"/>
-                        <a:ea typeface="Microsoft JhengHei" panose="020B0604030504040204" pitchFamily="34" charset="-120"/>
-                        <a:cs typeface="Consolas" panose="020B0609020204030204" pitchFamily="49" charset="0"/>
-                      </a:endParaRPr>
+                        <a:rPr lang="en-US" altLang="zh-TW" sz="1400" dirty="0"/>
+                        <a:t>3 </a:t>
+                      </a:r>
+                      <a:r>
+                        <a:rPr lang="zh-TW" altLang="en-US" sz="1400" dirty="0"/>
+                        <a:t>台，合計 </a:t>
+                      </a:r>
+                      <a:r>
+                        <a:rPr lang="en-US" altLang="zh-TW" sz="1400" dirty="0"/>
+                        <a:t>12 </a:t>
+                      </a:r>
+                      <a:r>
+                        <a:rPr lang="en" sz="1400" dirty="0"/>
+                        <a:t>vCPU／24 GB／600 GB SSD</a:t>
+                      </a:r>
                     </a:p>
                   </a:txBody>
                   <a:tcPr anchor="ctr"/>
@@ -10241,8 +9204,20 @@
                         <a:buNone/>
                       </a:pPr>
                       <a:r>
-                        <a:rPr lang="en"/>
-                        <a:t>4 vCPU</a:t>
+                        <a:rPr lang="en-US" altLang="zh-TW" sz="1400" dirty="0"/>
+                        <a:t>3 </a:t>
+                      </a:r>
+                      <a:r>
+                        <a:rPr lang="zh-TW" altLang="en-US" sz="1400" dirty="0"/>
+                        <a:t>台，合計 </a:t>
+                      </a:r>
+                      <a:r>
+                        <a:rPr lang="en-US" altLang="zh-TW" sz="1400" dirty="0"/>
+                        <a:t>12 </a:t>
+                      </a:r>
+                      <a:r>
+                        <a:rPr lang="en" sz="1400" dirty="0"/>
+                        <a:t>vCPU／48 GB／1500 GB SSD</a:t>
                       </a:r>
                     </a:p>
                   </a:txBody>
@@ -10257,8 +9232,31 @@
                         <a:buNone/>
                       </a:pPr>
                       <a:r>
-                        <a:rPr lang="en"/>
-                        <a:t>8 GB</a:t>
+                        <a:rPr lang="en" sz="1400" dirty="0"/>
+                        <a:t>Replica set</a:t>
+                      </a:r>
+                    </a:p>
+                  </a:txBody>
+                  <a:tcPr anchor="ctr"/>
+                </a:tc>
+                <a:extLst>
+                  <a:ext uri="{0D108BD9-81ED-4DB2-BD59-A6C34878D82A}">
+                    <a16:rowId xmlns:a16="http://schemas.microsoft.com/office/drawing/2014/main" val="1784424411"/>
+                  </a:ext>
+                </a:extLst>
+              </a:tr>
+              <a:tr h="518160">
+                <a:tc>
+                  <a:txBody>
+                    <a:bodyPr/>
+                    <a:lstStyle/>
+                    <a:p>
+                      <a:pPr>
+                        <a:buNone/>
+                      </a:pPr>
+                      <a:r>
+                        <a:rPr lang="en" sz="1400" dirty="0"/>
+                        <a:t>Redis</a:t>
                       </a:r>
                     </a:p>
                   </a:txBody>
@@ -10273,8 +9271,20 @@
                         <a:buNone/>
                       </a:pPr>
                       <a:r>
-                        <a:rPr lang="en"/>
-                        <a:t>80 GB</a:t>
+                        <a:rPr lang="en-US" altLang="zh-TW" sz="1400" dirty="0"/>
+                        <a:t>3 </a:t>
+                      </a:r>
+                      <a:r>
+                        <a:rPr lang="zh-TW" altLang="en-US" sz="1400" dirty="0"/>
+                        <a:t>台，合計 </a:t>
+                      </a:r>
+                      <a:r>
+                        <a:rPr lang="en-US" altLang="zh-TW" sz="1400" dirty="0"/>
+                        <a:t>6 </a:t>
+                      </a:r>
+                      <a:r>
+                        <a:rPr lang="en" sz="1400" dirty="0"/>
+                        <a:t>vCPU／12 GB／180 GB SSD</a:t>
                       </a:r>
                     </a:p>
                   </a:txBody>
@@ -10289,21 +9299,21 @@
                         <a:buNone/>
                       </a:pPr>
                       <a:r>
-                        <a:rPr lang="en" sz="1400" dirty="0" err="1"/>
-                        <a:t>InfoGather</a:t>
+                        <a:rPr lang="en-US" altLang="zh-TW" sz="1400" dirty="0"/>
+                        <a:t>3 </a:t>
+                      </a:r>
+                      <a:r>
+                        <a:rPr lang="zh-TW" altLang="en-US" sz="1400" dirty="0"/>
+                        <a:t>台，合計 </a:t>
+                      </a:r>
+                      <a:r>
+                        <a:rPr lang="en-US" altLang="zh-TW" sz="1400" dirty="0"/>
+                        <a:t>6 </a:t>
                       </a:r>
                       <a:r>
                         <a:rPr lang="en" sz="1400" dirty="0"/>
-                        <a:t> </a:t>
-                      </a:r>
-                      <a:r>
-                        <a:rPr lang="en" sz="1400" dirty="0" err="1"/>
-                        <a:t>app、worker、scheduler</a:t>
-                      </a:r>
-                      <a:endParaRPr lang="en" sz="1400" dirty="0">
-                        <a:latin typeface="Microsoft JhengHei" panose="020B0604030504040204" pitchFamily="34" charset="-120"/>
-                        <a:ea typeface="Microsoft JhengHei" panose="020B0604030504040204" pitchFamily="34" charset="-120"/>
-                      </a:endParaRPr>
+                        <a:t>vCPU／24 GB／300 GB SSD</a:t>
+                      </a:r>
                     </a:p>
                   </a:txBody>
                   <a:tcPr anchor="ctr"/>
@@ -10318,27 +9328,24 @@
                       </a:pPr>
                       <a:r>
                         <a:rPr lang="en" sz="1400" dirty="0"/>
-                        <a:t>SIT </a:t>
-                      </a:r>
-                      <a:r>
-                        <a:rPr lang="zh-TW" altLang="en-US" sz="1400" dirty="0"/>
-                        <a:t>主應用節點</a:t>
-                      </a:r>
-                      <a:endParaRPr lang="en" sz="1400" dirty="0">
-                        <a:latin typeface="Microsoft JhengHei" panose="020B0604030504040204" pitchFamily="34" charset="-120"/>
-                        <a:ea typeface="Microsoft JhengHei" panose="020B0604030504040204" pitchFamily="34" charset="-120"/>
-                      </a:endParaRPr>
+                        <a:t>Redis </a:t>
+                      </a:r>
+                      <a:r>
+                        <a:rPr lang="en" sz="1400" dirty="0" err="1"/>
+                        <a:t>server＋Sentinel</a:t>
+                      </a:r>
+                      <a:endParaRPr lang="en" sz="1400" dirty="0"/>
                     </a:p>
                   </a:txBody>
                   <a:tcPr anchor="ctr"/>
                 </a:tc>
                 <a:extLst>
                   <a:ext uri="{0D108BD9-81ED-4DB2-BD59-A6C34878D82A}">
-                    <a16:rowId xmlns:a16="http://schemas.microsoft.com/office/drawing/2014/main" val="2565674944"/>
+                    <a16:rowId xmlns:a16="http://schemas.microsoft.com/office/drawing/2014/main" val="4225051405"/>
                   </a:ext>
                 </a:extLst>
               </a:tr>
-              <a:tr h="353338">
+              <a:tr h="518160">
                 <a:tc>
                   <a:txBody>
                     <a:bodyPr/>
@@ -10348,17 +9355,9 @@
                         <a:buNone/>
                       </a:pPr>
                       <a:r>
-                        <a:rPr lang="en" sz="1400" dirty="0">
-                          <a:latin typeface="Consolas" panose="020B0609020204030204" pitchFamily="49" charset="0"/>
-                          <a:cs typeface="Consolas" panose="020B0609020204030204" pitchFamily="49" charset="0"/>
-                        </a:rPr>
-                        <a:t>infogather-sit-app-02</a:t>
-                      </a:r>
-                      <a:endParaRPr lang="en" sz="1400" dirty="0">
-                        <a:latin typeface="Consolas" panose="020B0609020204030204" pitchFamily="49" charset="0"/>
-                        <a:ea typeface="Microsoft JhengHei" panose="020B0604030504040204" pitchFamily="34" charset="-120"/>
-                        <a:cs typeface="Consolas" panose="020B0609020204030204" pitchFamily="49" charset="0"/>
-                      </a:endParaRPr>
+                        <a:rPr lang="en" sz="1400" dirty="0"/>
+                        <a:t>Copilot runtime</a:t>
+                      </a:r>
                     </a:p>
                   </a:txBody>
                   <a:tcPr anchor="ctr"/>
@@ -10372,8 +9371,20 @@
                         <a:buNone/>
                       </a:pPr>
                       <a:r>
-                        <a:rPr lang="en"/>
-                        <a:t>4 vCPU</a:t>
+                        <a:rPr lang="en-US" altLang="zh-TW" sz="1400" dirty="0"/>
+                        <a:t>1 </a:t>
+                      </a:r>
+                      <a:r>
+                        <a:rPr lang="zh-TW" altLang="en-US" sz="1400" dirty="0"/>
+                        <a:t>台，</a:t>
+                      </a:r>
+                      <a:r>
+                        <a:rPr lang="en-US" altLang="zh-TW" sz="1400" dirty="0"/>
+                        <a:t>2 </a:t>
+                      </a:r>
+                      <a:r>
+                        <a:rPr lang="en" sz="1400" dirty="0"/>
+                        <a:t>vCPU／4 GB／40 GB SSD</a:t>
                       </a:r>
                     </a:p>
                   </a:txBody>
@@ -10388,8 +9399,20 @@
                         <a:buNone/>
                       </a:pPr>
                       <a:r>
-                        <a:rPr lang="en"/>
-                        <a:t>8 GB</a:t>
+                        <a:rPr lang="en-US" altLang="zh-TW" sz="1400" dirty="0"/>
+                        <a:t>1 </a:t>
+                      </a:r>
+                      <a:r>
+                        <a:rPr lang="zh-TW" altLang="en-US" sz="1400" dirty="0"/>
+                        <a:t>台，</a:t>
+                      </a:r>
+                      <a:r>
+                        <a:rPr lang="en-US" altLang="zh-TW" sz="1400" dirty="0"/>
+                        <a:t>2 </a:t>
+                      </a:r>
+                      <a:r>
+                        <a:rPr lang="en" sz="1400" dirty="0"/>
+                        <a:t>vCPU／4 GB／60 GB SSD</a:t>
                       </a:r>
                     </a:p>
                   </a:txBody>
@@ -10404,9 +9427,37 @@
                         <a:buNone/>
                       </a:pPr>
                       <a:r>
-                        <a:rPr lang="en"/>
-                        <a:t>80 GB</a:t>
-                      </a:r>
+                        <a:rPr lang="en" sz="1400" dirty="0" err="1"/>
+                        <a:t>Agent／LLM</a:t>
+                      </a:r>
+                      <a:r>
+                        <a:rPr lang="en" sz="1400" dirty="0"/>
+                        <a:t> runtime</a:t>
+                      </a:r>
+                    </a:p>
+                  </a:txBody>
+                  <a:tcPr anchor="ctr"/>
+                </a:tc>
+                <a:extLst>
+                  <a:ext uri="{0D108BD9-81ED-4DB2-BD59-A6C34878D82A}">
+                    <a16:rowId xmlns:a16="http://schemas.microsoft.com/office/drawing/2014/main" val="22341538"/>
+                  </a:ext>
+                </a:extLst>
+              </a:tr>
+              <a:tr h="518160">
+                <a:tc>
+                  <a:txBody>
+                    <a:bodyPr/>
+                    <a:lstStyle/>
+                    <a:p>
+                      <a:pPr>
+                        <a:buNone/>
+                      </a:pPr>
+                      <a:r>
+                        <a:rPr lang="en" sz="1400" dirty="0" err="1"/>
+                        <a:t>Ops／Monitoring</a:t>
+                      </a:r>
+                      <a:endParaRPr lang="en" sz="1400" dirty="0"/>
                     </a:p>
                   </a:txBody>
                   <a:tcPr anchor="ctr"/>
@@ -10420,21 +9471,21 @@
                         <a:buNone/>
                       </a:pPr>
                       <a:r>
-                        <a:rPr lang="en" sz="1400" dirty="0" err="1"/>
-                        <a:t>InfoGather</a:t>
+                        <a:rPr lang="en-US" altLang="zh-TW" sz="1400" dirty="0"/>
+                        <a:t>1 </a:t>
+                      </a:r>
+                      <a:r>
+                        <a:rPr lang="zh-TW" altLang="en-US" sz="1400" dirty="0"/>
+                        <a:t>台，</a:t>
+                      </a:r>
+                      <a:r>
+                        <a:rPr lang="en-US" altLang="zh-TW" sz="1400" dirty="0"/>
+                        <a:t>2 </a:t>
                       </a:r>
                       <a:r>
                         <a:rPr lang="en" sz="1400" dirty="0"/>
-                        <a:t> </a:t>
-                      </a:r>
-                      <a:r>
-                        <a:rPr lang="en" sz="1400" dirty="0" err="1"/>
-                        <a:t>app、worker</a:t>
-                      </a:r>
-                      <a:endParaRPr lang="en" sz="1400" dirty="0">
-                        <a:latin typeface="Microsoft JhengHei" panose="020B0604030504040204" pitchFamily="34" charset="-120"/>
-                        <a:ea typeface="Microsoft JhengHei" panose="020B0604030504040204" pitchFamily="34" charset="-120"/>
-                      </a:endParaRPr>
+                        <a:t>vCPU／4 GB／120 GB SSD</a:t>
+                      </a:r>
                     </a:p>
                   </a:txBody>
                   <a:tcPr anchor="ctr"/>
@@ -10448,48 +9499,21 @@
                         <a:buNone/>
                       </a:pPr>
                       <a:r>
-                        <a:rPr lang="en" sz="1400"/>
-                        <a:t>SIT </a:t>
-                      </a:r>
-                      <a:r>
-                        <a:rPr lang="zh-TW" altLang="en-US" sz="1400"/>
-                        <a:t>第二應用節點</a:t>
-                      </a:r>
-                      <a:endParaRPr lang="zh-TW" altLang="en-US" sz="1400">
-                        <a:latin typeface="Microsoft JhengHei" panose="020B0604030504040204" pitchFamily="34" charset="-120"/>
-                        <a:ea typeface="Microsoft JhengHei" panose="020B0604030504040204" pitchFamily="34" charset="-120"/>
-                      </a:endParaRPr>
-                    </a:p>
-                  </a:txBody>
-                  <a:tcPr anchor="ctr"/>
-                </a:tc>
-                <a:extLst>
-                  <a:ext uri="{0D108BD9-81ED-4DB2-BD59-A6C34878D82A}">
-                    <a16:rowId xmlns:a16="http://schemas.microsoft.com/office/drawing/2014/main" val="507787501"/>
-                  </a:ext>
-                </a:extLst>
-              </a:tr>
-              <a:tr h="363331">
-                <a:tc>
-                  <a:txBody>
-                    <a:bodyPr/>
-                    <a:lstStyle/>
-                    <a:p>
-                      <a:pPr>
-                        <a:buNone/>
-                      </a:pPr>
-                      <a:r>
-                        <a:rPr lang="en" sz="1400" dirty="0">
-                          <a:latin typeface="Consolas" panose="020B0609020204030204" pitchFamily="49" charset="0"/>
-                          <a:cs typeface="Consolas" panose="020B0609020204030204" pitchFamily="49" charset="0"/>
-                        </a:rPr>
-                        <a:t>infogather-sit-mongo-01</a:t>
-                      </a:r>
-                      <a:endParaRPr lang="en" sz="1400" dirty="0">
-                        <a:latin typeface="Consolas" panose="020B0609020204030204" pitchFamily="49" charset="0"/>
-                        <a:ea typeface="Microsoft JhengHei" panose="020B0604030504040204" pitchFamily="34" charset="-120"/>
-                        <a:cs typeface="Consolas" panose="020B0609020204030204" pitchFamily="49" charset="0"/>
-                      </a:endParaRPr>
+                        <a:rPr lang="en-US" altLang="zh-TW" sz="1400" dirty="0"/>
+                        <a:t>1 </a:t>
+                      </a:r>
+                      <a:r>
+                        <a:rPr lang="zh-TW" altLang="en-US" sz="1400" dirty="0"/>
+                        <a:t>台，</a:t>
+                      </a:r>
+                      <a:r>
+                        <a:rPr lang="en-US" altLang="zh-TW" sz="1400" dirty="0"/>
+                        <a:t>4 </a:t>
+                      </a:r>
+                      <a:r>
+                        <a:rPr lang="en" sz="1400" dirty="0"/>
+                        <a:t>vCPU／8 GB／200 GB SSD</a:t>
+                      </a:r>
                     </a:p>
                   </a:txBody>
                   <a:tcPr anchor="ctr"/>
@@ -10503,8 +9527,39 @@
                         <a:buNone/>
                       </a:pPr>
                       <a:r>
-                        <a:rPr lang="en"/>
-                        <a:t>4 vCPU</a:t>
+                        <a:rPr lang="en" sz="1400" dirty="0" err="1"/>
+                        <a:t>Prometheus、Grafana</a:t>
+                      </a:r>
+                      <a:r>
+                        <a:rPr lang="en" sz="1400" dirty="0"/>
+                        <a:t>、</a:t>
+                      </a:r>
+                      <a:r>
+                        <a:rPr lang="zh-TW" altLang="en-US" sz="1400" dirty="0"/>
+                        <a:t>維運工具</a:t>
+                      </a:r>
+                    </a:p>
+                  </a:txBody>
+                  <a:tcPr anchor="ctr"/>
+                </a:tc>
+                <a:extLst>
+                  <a:ext uri="{0D108BD9-81ED-4DB2-BD59-A6C34878D82A}">
+                    <a16:rowId xmlns:a16="http://schemas.microsoft.com/office/drawing/2014/main" val="2851897333"/>
+                  </a:ext>
+                </a:extLst>
+              </a:tr>
+              <a:tr h="518160">
+                <a:tc>
+                  <a:txBody>
+                    <a:bodyPr/>
+                    <a:lstStyle/>
+                    <a:p>
+                      <a:pPr>
+                        <a:buNone/>
+                      </a:pPr>
+                      <a:r>
+                        <a:rPr lang="zh-TW" altLang="en-US" sz="1400" b="0" dirty="0"/>
+                        <a:t>總計</a:t>
                       </a:r>
                     </a:p>
                   </a:txBody>
@@ -10519,8 +9574,20 @@
                         <a:buNone/>
                       </a:pPr>
                       <a:r>
-                        <a:rPr lang="en"/>
-                        <a:t>8 GB</a:t>
+                        <a:rPr lang="en-US" altLang="zh-TW" sz="1400" b="0" dirty="0"/>
+                        <a:t>11 </a:t>
+                      </a:r>
+                      <a:r>
+                        <a:rPr lang="zh-TW" altLang="en-US" sz="1400" b="0" dirty="0"/>
+                        <a:t>台，</a:t>
+                      </a:r>
+                      <a:r>
+                        <a:rPr lang="en-US" altLang="zh-TW" sz="1400" b="0" dirty="0"/>
+                        <a:t>32 </a:t>
+                      </a:r>
+                      <a:r>
+                        <a:rPr lang="en" sz="1400" b="0" dirty="0"/>
+                        <a:t>vCPU／64 GB／1140 GB SSD</a:t>
                       </a:r>
                     </a:p>
                   </a:txBody>
@@ -10535,8 +9602,20 @@
                         <a:buNone/>
                       </a:pPr>
                       <a:r>
-                        <a:rPr lang="en"/>
-                        <a:t>200 GB</a:t>
+                        <a:rPr lang="en-US" altLang="zh-TW" sz="1400" b="0" dirty="0"/>
+                        <a:t>11 </a:t>
+                      </a:r>
+                      <a:r>
+                        <a:rPr lang="zh-TW" altLang="en-US" sz="1400" b="0" dirty="0"/>
+                        <a:t>台，</a:t>
+                      </a:r>
+                      <a:r>
+                        <a:rPr lang="en-US" altLang="zh-TW" sz="1400" b="0" dirty="0"/>
+                        <a:t>34 </a:t>
+                      </a:r>
+                      <a:r>
+                        <a:rPr lang="en" sz="1400" b="0" dirty="0"/>
+                        <a:t>vCPU／120 GB／2320 GB SSD</a:t>
                       </a:r>
                     </a:p>
                   </a:txBody>
@@ -10550,890 +9629,14 @@
                       <a:pPr>
                         <a:buNone/>
                       </a:pPr>
-                      <a:r>
-                        <a:rPr lang="en" sz="1400"/>
-                        <a:t>MongoDB replica set member</a:t>
-                      </a:r>
-                      <a:endParaRPr lang="en" sz="1400">
-                        <a:latin typeface="Microsoft JhengHei" panose="020B0604030504040204" pitchFamily="34" charset="-120"/>
-                        <a:ea typeface="Microsoft JhengHei" panose="020B0604030504040204" pitchFamily="34" charset="-120"/>
-                      </a:endParaRPr>
-                    </a:p>
-                  </a:txBody>
-                  <a:tcPr anchor="ctr"/>
-                </a:tc>
-                <a:tc>
-                  <a:txBody>
-                    <a:bodyPr/>
-                    <a:lstStyle/>
-                    <a:p>
-                      <a:pPr>
-                        <a:buNone/>
-                      </a:pPr>
-                      <a:r>
-                        <a:rPr lang="en" sz="1400" dirty="0"/>
-                        <a:t>primary candidate</a:t>
-                      </a:r>
-                      <a:endParaRPr lang="en" sz="1400" dirty="0">
-                        <a:latin typeface="Microsoft JhengHei" panose="020B0604030504040204" pitchFamily="34" charset="-120"/>
-                        <a:ea typeface="Microsoft JhengHei" panose="020B0604030504040204" pitchFamily="34" charset="-120"/>
-                      </a:endParaRPr>
+                      <a:endParaRPr lang="zh-TW" altLang="en-US" sz="1400" dirty="0"/>
                     </a:p>
                   </a:txBody>
                   <a:tcPr anchor="ctr"/>
                 </a:tc>
                 <a:extLst>
                   <a:ext uri="{0D108BD9-81ED-4DB2-BD59-A6C34878D82A}">
-                    <a16:rowId xmlns:a16="http://schemas.microsoft.com/office/drawing/2014/main" val="3240847069"/>
-                  </a:ext>
-                </a:extLst>
-              </a:tr>
-              <a:tr h="363331">
-                <a:tc>
-                  <a:txBody>
-                    <a:bodyPr/>
-                    <a:lstStyle/>
-                    <a:p>
-                      <a:pPr>
-                        <a:buNone/>
-                      </a:pPr>
-                      <a:r>
-                        <a:rPr lang="en" sz="1400" dirty="0">
-                          <a:latin typeface="Consolas" panose="020B0609020204030204" pitchFamily="49" charset="0"/>
-                          <a:cs typeface="Consolas" panose="020B0609020204030204" pitchFamily="49" charset="0"/>
-                        </a:rPr>
-                        <a:t>infogather-sit-mongo-02</a:t>
-                      </a:r>
-                      <a:endParaRPr lang="en" sz="1400" dirty="0">
-                        <a:latin typeface="Consolas" panose="020B0609020204030204" pitchFamily="49" charset="0"/>
-                        <a:ea typeface="Microsoft JhengHei" panose="020B0604030504040204" pitchFamily="34" charset="-120"/>
-                        <a:cs typeface="Consolas" panose="020B0609020204030204" pitchFamily="49" charset="0"/>
-                      </a:endParaRPr>
-                    </a:p>
-                  </a:txBody>
-                  <a:tcPr anchor="ctr"/>
-                </a:tc>
-                <a:tc>
-                  <a:txBody>
-                    <a:bodyPr/>
-                    <a:lstStyle/>
-                    <a:p>
-                      <a:pPr>
-                        <a:buNone/>
-                      </a:pPr>
-                      <a:r>
-                        <a:rPr lang="en"/>
-                        <a:t>4 vCPU</a:t>
-                      </a:r>
-                    </a:p>
-                  </a:txBody>
-                  <a:tcPr anchor="ctr"/>
-                </a:tc>
-                <a:tc>
-                  <a:txBody>
-                    <a:bodyPr/>
-                    <a:lstStyle/>
-                    <a:p>
-                      <a:pPr>
-                        <a:buNone/>
-                      </a:pPr>
-                      <a:r>
-                        <a:rPr lang="en"/>
-                        <a:t>8 GB</a:t>
-                      </a:r>
-                    </a:p>
-                  </a:txBody>
-                  <a:tcPr anchor="ctr"/>
-                </a:tc>
-                <a:tc>
-                  <a:txBody>
-                    <a:bodyPr/>
-                    <a:lstStyle/>
-                    <a:p>
-                      <a:pPr>
-                        <a:buNone/>
-                      </a:pPr>
-                      <a:r>
-                        <a:rPr lang="en"/>
-                        <a:t>200 GB</a:t>
-                      </a:r>
-                    </a:p>
-                  </a:txBody>
-                  <a:tcPr anchor="ctr"/>
-                </a:tc>
-                <a:tc>
-                  <a:txBody>
-                    <a:bodyPr/>
-                    <a:lstStyle/>
-                    <a:p>
-                      <a:pPr>
-                        <a:buNone/>
-                      </a:pPr>
-                      <a:r>
-                        <a:rPr lang="en" sz="1400"/>
-                        <a:t>MongoDB replica set member</a:t>
-                      </a:r>
-                      <a:endParaRPr lang="en" sz="1400">
-                        <a:latin typeface="Microsoft JhengHei" panose="020B0604030504040204" pitchFamily="34" charset="-120"/>
-                        <a:ea typeface="Microsoft JhengHei" panose="020B0604030504040204" pitchFamily="34" charset="-120"/>
-                      </a:endParaRPr>
-                    </a:p>
-                  </a:txBody>
-                  <a:tcPr anchor="ctr"/>
-                </a:tc>
-                <a:tc>
-                  <a:txBody>
-                    <a:bodyPr/>
-                    <a:lstStyle/>
-                    <a:p>
-                      <a:pPr>
-                        <a:buNone/>
-                      </a:pPr>
-                      <a:r>
-                        <a:rPr lang="en" sz="1400" dirty="0"/>
-                        <a:t>secondary</a:t>
-                      </a:r>
-                      <a:endParaRPr lang="en" sz="1400" dirty="0">
-                        <a:latin typeface="Microsoft JhengHei" panose="020B0604030504040204" pitchFamily="34" charset="-120"/>
-                        <a:ea typeface="Microsoft JhengHei" panose="020B0604030504040204" pitchFamily="34" charset="-120"/>
-                      </a:endParaRPr>
-                    </a:p>
-                  </a:txBody>
-                  <a:tcPr anchor="ctr"/>
-                </a:tc>
-                <a:extLst>
-                  <a:ext uri="{0D108BD9-81ED-4DB2-BD59-A6C34878D82A}">
-                    <a16:rowId xmlns:a16="http://schemas.microsoft.com/office/drawing/2014/main" val="523296309"/>
-                  </a:ext>
-                </a:extLst>
-              </a:tr>
-              <a:tr h="363331">
-                <a:tc>
-                  <a:txBody>
-                    <a:bodyPr/>
-                    <a:lstStyle/>
-                    <a:p>
-                      <a:pPr>
-                        <a:buNone/>
-                      </a:pPr>
-                      <a:r>
-                        <a:rPr lang="en" sz="1400" dirty="0">
-                          <a:latin typeface="Consolas" panose="020B0609020204030204" pitchFamily="49" charset="0"/>
-                          <a:cs typeface="Consolas" panose="020B0609020204030204" pitchFamily="49" charset="0"/>
-                        </a:rPr>
-                        <a:t>infogather-sit-mongo-03</a:t>
-                      </a:r>
-                      <a:endParaRPr lang="en" sz="1400" dirty="0">
-                        <a:latin typeface="Consolas" panose="020B0609020204030204" pitchFamily="49" charset="0"/>
-                        <a:ea typeface="Microsoft JhengHei" panose="020B0604030504040204" pitchFamily="34" charset="-120"/>
-                        <a:cs typeface="Consolas" panose="020B0609020204030204" pitchFamily="49" charset="0"/>
-                      </a:endParaRPr>
-                    </a:p>
-                  </a:txBody>
-                  <a:tcPr anchor="ctr"/>
-                </a:tc>
-                <a:tc>
-                  <a:txBody>
-                    <a:bodyPr/>
-                    <a:lstStyle/>
-                    <a:p>
-                      <a:pPr>
-                        <a:buNone/>
-                      </a:pPr>
-                      <a:r>
-                        <a:rPr lang="en"/>
-                        <a:t>4 vCPU</a:t>
-                      </a:r>
-                    </a:p>
-                  </a:txBody>
-                  <a:tcPr anchor="ctr"/>
-                </a:tc>
-                <a:tc>
-                  <a:txBody>
-                    <a:bodyPr/>
-                    <a:lstStyle/>
-                    <a:p>
-                      <a:pPr>
-                        <a:buNone/>
-                      </a:pPr>
-                      <a:r>
-                        <a:rPr lang="en"/>
-                        <a:t>8 GB</a:t>
-                      </a:r>
-                    </a:p>
-                  </a:txBody>
-                  <a:tcPr anchor="ctr"/>
-                </a:tc>
-                <a:tc>
-                  <a:txBody>
-                    <a:bodyPr/>
-                    <a:lstStyle/>
-                    <a:p>
-                      <a:pPr>
-                        <a:buNone/>
-                      </a:pPr>
-                      <a:r>
-                        <a:rPr lang="en"/>
-                        <a:t>200 GB</a:t>
-                      </a:r>
-                    </a:p>
-                  </a:txBody>
-                  <a:tcPr anchor="ctr"/>
-                </a:tc>
-                <a:tc>
-                  <a:txBody>
-                    <a:bodyPr/>
-                    <a:lstStyle/>
-                    <a:p>
-                      <a:pPr>
-                        <a:buNone/>
-                      </a:pPr>
-                      <a:r>
-                        <a:rPr lang="en" sz="1400" dirty="0"/>
-                        <a:t>MongoDB replica set member</a:t>
-                      </a:r>
-                      <a:endParaRPr lang="en" sz="1400" dirty="0">
-                        <a:latin typeface="Microsoft JhengHei" panose="020B0604030504040204" pitchFamily="34" charset="-120"/>
-                        <a:ea typeface="Microsoft JhengHei" panose="020B0604030504040204" pitchFamily="34" charset="-120"/>
-                      </a:endParaRPr>
-                    </a:p>
-                  </a:txBody>
-                  <a:tcPr anchor="ctr"/>
-                </a:tc>
-                <a:tc>
-                  <a:txBody>
-                    <a:bodyPr/>
-                    <a:lstStyle/>
-                    <a:p>
-                      <a:pPr>
-                        <a:buNone/>
-                      </a:pPr>
-                      <a:r>
-                        <a:rPr lang="en" sz="1400" dirty="0"/>
-                        <a:t>secondary</a:t>
-                      </a:r>
-                      <a:endParaRPr lang="en" sz="1400" dirty="0">
-                        <a:latin typeface="Microsoft JhengHei" panose="020B0604030504040204" pitchFamily="34" charset="-120"/>
-                        <a:ea typeface="Microsoft JhengHei" panose="020B0604030504040204" pitchFamily="34" charset="-120"/>
-                      </a:endParaRPr>
-                    </a:p>
-                  </a:txBody>
-                  <a:tcPr anchor="ctr"/>
-                </a:tc>
-                <a:extLst>
-                  <a:ext uri="{0D108BD9-81ED-4DB2-BD59-A6C34878D82A}">
-                    <a16:rowId xmlns:a16="http://schemas.microsoft.com/office/drawing/2014/main" val="1648244485"/>
-                  </a:ext>
-                </a:extLst>
-              </a:tr>
-              <a:tr h="363331">
-                <a:tc>
-                  <a:txBody>
-                    <a:bodyPr/>
-                    <a:lstStyle/>
-                    <a:p>
-                      <a:pPr>
-                        <a:buNone/>
-                      </a:pPr>
-                      <a:r>
-                        <a:rPr lang="en" sz="1400" dirty="0">
-                          <a:latin typeface="Consolas" panose="020B0609020204030204" pitchFamily="49" charset="0"/>
-                          <a:cs typeface="Consolas" panose="020B0609020204030204" pitchFamily="49" charset="0"/>
-                        </a:rPr>
-                        <a:t>infogather-sit-redis-01</a:t>
-                      </a:r>
-                      <a:endParaRPr lang="en" sz="1400" dirty="0">
-                        <a:latin typeface="Consolas" panose="020B0609020204030204" pitchFamily="49" charset="0"/>
-                        <a:ea typeface="Microsoft JhengHei" panose="020B0604030504040204" pitchFamily="34" charset="-120"/>
-                        <a:cs typeface="Consolas" panose="020B0609020204030204" pitchFamily="49" charset="0"/>
-                      </a:endParaRPr>
-                    </a:p>
-                  </a:txBody>
-                  <a:tcPr anchor="ctr"/>
-                </a:tc>
-                <a:tc>
-                  <a:txBody>
-                    <a:bodyPr/>
-                    <a:lstStyle/>
-                    <a:p>
-                      <a:pPr>
-                        <a:buNone/>
-                      </a:pPr>
-                      <a:r>
-                        <a:rPr lang="en"/>
-                        <a:t>2 vCPU</a:t>
-                      </a:r>
-                    </a:p>
-                  </a:txBody>
-                  <a:tcPr anchor="ctr"/>
-                </a:tc>
-                <a:tc>
-                  <a:txBody>
-                    <a:bodyPr/>
-                    <a:lstStyle/>
-                    <a:p>
-                      <a:pPr>
-                        <a:buNone/>
-                      </a:pPr>
-                      <a:r>
-                        <a:rPr lang="en"/>
-                        <a:t>4 GB</a:t>
-                      </a:r>
-                    </a:p>
-                  </a:txBody>
-                  <a:tcPr anchor="ctr"/>
-                </a:tc>
-                <a:tc>
-                  <a:txBody>
-                    <a:bodyPr/>
-                    <a:lstStyle/>
-                    <a:p>
-                      <a:pPr>
-                        <a:buNone/>
-                      </a:pPr>
-                      <a:r>
-                        <a:rPr lang="en"/>
-                        <a:t>60 GB</a:t>
-                      </a:r>
-                    </a:p>
-                  </a:txBody>
-                  <a:tcPr anchor="ctr"/>
-                </a:tc>
-                <a:tc>
-                  <a:txBody>
-                    <a:bodyPr/>
-                    <a:lstStyle/>
-                    <a:p>
-                      <a:pPr>
-                        <a:buNone/>
-                      </a:pPr>
-                      <a:r>
-                        <a:rPr lang="en" sz="1400"/>
-                        <a:t>Redis server、Sentinel</a:t>
-                      </a:r>
-                      <a:endParaRPr lang="en" sz="1400">
-                        <a:latin typeface="Microsoft JhengHei" panose="020B0604030504040204" pitchFamily="34" charset="-120"/>
-                        <a:ea typeface="Microsoft JhengHei" panose="020B0604030504040204" pitchFamily="34" charset="-120"/>
-                      </a:endParaRPr>
-                    </a:p>
-                  </a:txBody>
-                  <a:tcPr anchor="ctr"/>
-                </a:tc>
-                <a:tc>
-                  <a:txBody>
-                    <a:bodyPr/>
-                    <a:lstStyle/>
-                    <a:p>
-                      <a:pPr>
-                        <a:buNone/>
-                      </a:pPr>
-                      <a:r>
-                        <a:rPr lang="en" sz="1400" dirty="0"/>
-                        <a:t>primary candidate</a:t>
-                      </a:r>
-                      <a:endParaRPr lang="en" sz="1400" dirty="0">
-                        <a:latin typeface="Microsoft JhengHei" panose="020B0604030504040204" pitchFamily="34" charset="-120"/>
-                        <a:ea typeface="Microsoft JhengHei" panose="020B0604030504040204" pitchFamily="34" charset="-120"/>
-                      </a:endParaRPr>
-                    </a:p>
-                  </a:txBody>
-                  <a:tcPr anchor="ctr"/>
-                </a:tc>
-                <a:extLst>
-                  <a:ext uri="{0D108BD9-81ED-4DB2-BD59-A6C34878D82A}">
-                    <a16:rowId xmlns:a16="http://schemas.microsoft.com/office/drawing/2014/main" val="3474832487"/>
-                  </a:ext>
-                </a:extLst>
-              </a:tr>
-              <a:tr h="363331">
-                <a:tc>
-                  <a:txBody>
-                    <a:bodyPr/>
-                    <a:lstStyle/>
-                    <a:p>
-                      <a:pPr>
-                        <a:buNone/>
-                      </a:pPr>
-                      <a:r>
-                        <a:rPr lang="en" sz="1400" dirty="0">
-                          <a:latin typeface="Consolas" panose="020B0609020204030204" pitchFamily="49" charset="0"/>
-                          <a:cs typeface="Consolas" panose="020B0609020204030204" pitchFamily="49" charset="0"/>
-                        </a:rPr>
-                        <a:t>infogather-sit-redis-02</a:t>
-                      </a:r>
-                      <a:endParaRPr lang="en" sz="1400" dirty="0">
-                        <a:latin typeface="Consolas" panose="020B0609020204030204" pitchFamily="49" charset="0"/>
-                        <a:ea typeface="Microsoft JhengHei" panose="020B0604030504040204" pitchFamily="34" charset="-120"/>
-                        <a:cs typeface="Consolas" panose="020B0609020204030204" pitchFamily="49" charset="0"/>
-                      </a:endParaRPr>
-                    </a:p>
-                  </a:txBody>
-                  <a:tcPr anchor="ctr"/>
-                </a:tc>
-                <a:tc>
-                  <a:txBody>
-                    <a:bodyPr/>
-                    <a:lstStyle/>
-                    <a:p>
-                      <a:pPr>
-                        <a:buNone/>
-                      </a:pPr>
-                      <a:r>
-                        <a:rPr lang="en"/>
-                        <a:t>2 vCPU</a:t>
-                      </a:r>
-                    </a:p>
-                  </a:txBody>
-                  <a:tcPr anchor="ctr"/>
-                </a:tc>
-                <a:tc>
-                  <a:txBody>
-                    <a:bodyPr/>
-                    <a:lstStyle/>
-                    <a:p>
-                      <a:pPr>
-                        <a:buNone/>
-                      </a:pPr>
-                      <a:r>
-                        <a:rPr lang="en"/>
-                        <a:t>4 GB</a:t>
-                      </a:r>
-                    </a:p>
-                  </a:txBody>
-                  <a:tcPr anchor="ctr"/>
-                </a:tc>
-                <a:tc>
-                  <a:txBody>
-                    <a:bodyPr/>
-                    <a:lstStyle/>
-                    <a:p>
-                      <a:pPr>
-                        <a:buNone/>
-                      </a:pPr>
-                      <a:r>
-                        <a:rPr lang="en"/>
-                        <a:t>60 GB</a:t>
-                      </a:r>
-                    </a:p>
-                  </a:txBody>
-                  <a:tcPr anchor="ctr"/>
-                </a:tc>
-                <a:tc>
-                  <a:txBody>
-                    <a:bodyPr/>
-                    <a:lstStyle/>
-                    <a:p>
-                      <a:pPr>
-                        <a:buNone/>
-                      </a:pPr>
-                      <a:r>
-                        <a:rPr lang="en" sz="1400"/>
-                        <a:t>Redis server、Sentinel</a:t>
-                      </a:r>
-                      <a:endParaRPr lang="en" sz="1400">
-                        <a:latin typeface="Microsoft JhengHei" panose="020B0604030504040204" pitchFamily="34" charset="-120"/>
-                        <a:ea typeface="Microsoft JhengHei" panose="020B0604030504040204" pitchFamily="34" charset="-120"/>
-                      </a:endParaRPr>
-                    </a:p>
-                  </a:txBody>
-                  <a:tcPr anchor="ctr"/>
-                </a:tc>
-                <a:tc>
-                  <a:txBody>
-                    <a:bodyPr/>
-                    <a:lstStyle/>
-                    <a:p>
-                      <a:pPr>
-                        <a:buNone/>
-                      </a:pPr>
-                      <a:r>
-                        <a:rPr lang="en" sz="1400" dirty="0"/>
-                        <a:t>replica</a:t>
-                      </a:r>
-                      <a:endParaRPr lang="en" sz="1400" dirty="0">
-                        <a:latin typeface="Microsoft JhengHei" panose="020B0604030504040204" pitchFamily="34" charset="-120"/>
-                        <a:ea typeface="Microsoft JhengHei" panose="020B0604030504040204" pitchFamily="34" charset="-120"/>
-                      </a:endParaRPr>
-                    </a:p>
-                  </a:txBody>
-                  <a:tcPr anchor="ctr"/>
-                </a:tc>
-                <a:extLst>
-                  <a:ext uri="{0D108BD9-81ED-4DB2-BD59-A6C34878D82A}">
-                    <a16:rowId xmlns:a16="http://schemas.microsoft.com/office/drawing/2014/main" val="1719398601"/>
-                  </a:ext>
-                </a:extLst>
-              </a:tr>
-              <a:tr h="363331">
-                <a:tc>
-                  <a:txBody>
-                    <a:bodyPr/>
-                    <a:lstStyle/>
-                    <a:p>
-                      <a:pPr>
-                        <a:buNone/>
-                      </a:pPr>
-                      <a:r>
-                        <a:rPr lang="en" sz="1400" dirty="0">
-                          <a:latin typeface="Consolas" panose="020B0609020204030204" pitchFamily="49" charset="0"/>
-                          <a:cs typeface="Consolas" panose="020B0609020204030204" pitchFamily="49" charset="0"/>
-                        </a:rPr>
-                        <a:t>infogather-sit-redis-03</a:t>
-                      </a:r>
-                      <a:endParaRPr lang="en" sz="1400" dirty="0">
-                        <a:latin typeface="Consolas" panose="020B0609020204030204" pitchFamily="49" charset="0"/>
-                        <a:ea typeface="Microsoft JhengHei" panose="020B0604030504040204" pitchFamily="34" charset="-120"/>
-                        <a:cs typeface="Consolas" panose="020B0609020204030204" pitchFamily="49" charset="0"/>
-                      </a:endParaRPr>
-                    </a:p>
-                  </a:txBody>
-                  <a:tcPr anchor="ctr"/>
-                </a:tc>
-                <a:tc>
-                  <a:txBody>
-                    <a:bodyPr/>
-                    <a:lstStyle/>
-                    <a:p>
-                      <a:pPr>
-                        <a:buNone/>
-                      </a:pPr>
-                      <a:r>
-                        <a:rPr lang="en"/>
-                        <a:t>2 vCPU</a:t>
-                      </a:r>
-                    </a:p>
-                  </a:txBody>
-                  <a:tcPr anchor="ctr"/>
-                </a:tc>
-                <a:tc>
-                  <a:txBody>
-                    <a:bodyPr/>
-                    <a:lstStyle/>
-                    <a:p>
-                      <a:pPr>
-                        <a:buNone/>
-                      </a:pPr>
-                      <a:r>
-                        <a:rPr lang="en"/>
-                        <a:t>4 GB</a:t>
-                      </a:r>
-                    </a:p>
-                  </a:txBody>
-                  <a:tcPr anchor="ctr"/>
-                </a:tc>
-                <a:tc>
-                  <a:txBody>
-                    <a:bodyPr/>
-                    <a:lstStyle/>
-                    <a:p>
-                      <a:pPr>
-                        <a:buNone/>
-                      </a:pPr>
-                      <a:r>
-                        <a:rPr lang="en"/>
-                        <a:t>60 GB</a:t>
-                      </a:r>
-                    </a:p>
-                  </a:txBody>
-                  <a:tcPr anchor="ctr"/>
-                </a:tc>
-                <a:tc>
-                  <a:txBody>
-                    <a:bodyPr/>
-                    <a:lstStyle/>
-                    <a:p>
-                      <a:pPr>
-                        <a:buNone/>
-                      </a:pPr>
-                      <a:r>
-                        <a:rPr lang="en" sz="1400" dirty="0"/>
-                        <a:t>Redis </a:t>
-                      </a:r>
-                      <a:r>
-                        <a:rPr lang="en" sz="1400" dirty="0" err="1"/>
-                        <a:t>server、Sentinel</a:t>
-                      </a:r>
-                      <a:endParaRPr lang="en" sz="1400" dirty="0">
-                        <a:latin typeface="Microsoft JhengHei" panose="020B0604030504040204" pitchFamily="34" charset="-120"/>
-                        <a:ea typeface="Microsoft JhengHei" panose="020B0604030504040204" pitchFamily="34" charset="-120"/>
-                      </a:endParaRPr>
-                    </a:p>
-                  </a:txBody>
-                  <a:tcPr anchor="ctr"/>
-                </a:tc>
-                <a:tc>
-                  <a:txBody>
-                    <a:bodyPr/>
-                    <a:lstStyle/>
-                    <a:p>
-                      <a:pPr>
-                        <a:buNone/>
-                      </a:pPr>
-                      <a:r>
-                        <a:rPr lang="en" sz="1400" dirty="0"/>
-                        <a:t>replica</a:t>
-                      </a:r>
-                      <a:endParaRPr lang="en" sz="1400" dirty="0">
-                        <a:latin typeface="Microsoft JhengHei" panose="020B0604030504040204" pitchFamily="34" charset="-120"/>
-                        <a:ea typeface="Microsoft JhengHei" panose="020B0604030504040204" pitchFamily="34" charset="-120"/>
-                      </a:endParaRPr>
-                    </a:p>
-                  </a:txBody>
-                  <a:tcPr anchor="ctr"/>
-                </a:tc>
-                <a:extLst>
-                  <a:ext uri="{0D108BD9-81ED-4DB2-BD59-A6C34878D82A}">
-                    <a16:rowId xmlns:a16="http://schemas.microsoft.com/office/drawing/2014/main" val="1353108866"/>
-                  </a:ext>
-                </a:extLst>
-              </a:tr>
-              <a:tr h="363331">
-                <a:tc>
-                  <a:txBody>
-                    <a:bodyPr/>
-                    <a:lstStyle/>
-                    <a:p>
-                      <a:pPr>
-                        <a:buNone/>
-                      </a:pPr>
-                      <a:r>
-                        <a:rPr lang="en" sz="1400" dirty="0">
-                          <a:latin typeface="Consolas" panose="020B0609020204030204" pitchFamily="49" charset="0"/>
-                          <a:cs typeface="Consolas" panose="020B0609020204030204" pitchFamily="49" charset="0"/>
-                        </a:rPr>
-                        <a:t>infogather-sit-copilot-01</a:t>
-                      </a:r>
-                      <a:endParaRPr lang="en" sz="1400" dirty="0">
-                        <a:latin typeface="Consolas" panose="020B0609020204030204" pitchFamily="49" charset="0"/>
-                        <a:ea typeface="Microsoft JhengHei" panose="020B0604030504040204" pitchFamily="34" charset="-120"/>
-                        <a:cs typeface="Consolas" panose="020B0609020204030204" pitchFamily="49" charset="0"/>
-                      </a:endParaRPr>
-                    </a:p>
-                  </a:txBody>
-                  <a:tcPr anchor="ctr"/>
-                </a:tc>
-                <a:tc>
-                  <a:txBody>
-                    <a:bodyPr/>
-                    <a:lstStyle/>
-                    <a:p>
-                      <a:pPr>
-                        <a:buNone/>
-                      </a:pPr>
-                      <a:r>
-                        <a:rPr lang="en"/>
-                        <a:t>2 vCPU</a:t>
-                      </a:r>
-                    </a:p>
-                  </a:txBody>
-                  <a:tcPr anchor="ctr"/>
-                </a:tc>
-                <a:tc>
-                  <a:txBody>
-                    <a:bodyPr/>
-                    <a:lstStyle/>
-                    <a:p>
-                      <a:pPr>
-                        <a:buNone/>
-                      </a:pPr>
-                      <a:r>
-                        <a:rPr lang="en"/>
-                        <a:t>4 GB</a:t>
-                      </a:r>
-                    </a:p>
-                  </a:txBody>
-                  <a:tcPr anchor="ctr"/>
-                </a:tc>
-                <a:tc>
-                  <a:txBody>
-                    <a:bodyPr/>
-                    <a:lstStyle/>
-                    <a:p>
-                      <a:pPr>
-                        <a:buNone/>
-                      </a:pPr>
-                      <a:r>
-                        <a:rPr lang="en"/>
-                        <a:t>40 GB</a:t>
-                      </a:r>
-                    </a:p>
-                  </a:txBody>
-                  <a:tcPr anchor="ctr"/>
-                </a:tc>
-                <a:tc>
-                  <a:txBody>
-                    <a:bodyPr/>
-                    <a:lstStyle/>
-                    <a:p>
-                      <a:pPr>
-                        <a:buNone/>
-                      </a:pPr>
-                      <a:r>
-                        <a:rPr lang="en" sz="1400" dirty="0"/>
-                        <a:t>Copilot CLI server</a:t>
-                      </a:r>
-                      <a:endParaRPr lang="en" sz="1400" dirty="0">
-                        <a:latin typeface="Microsoft JhengHei" panose="020B0604030504040204" pitchFamily="34" charset="-120"/>
-                        <a:ea typeface="Microsoft JhengHei" panose="020B0604030504040204" pitchFamily="34" charset="-120"/>
-                      </a:endParaRPr>
-                    </a:p>
-                  </a:txBody>
-                  <a:tcPr anchor="ctr"/>
-                </a:tc>
-                <a:tc>
-                  <a:txBody>
-                    <a:bodyPr/>
-                    <a:lstStyle/>
-                    <a:p>
-                      <a:pPr>
-                        <a:buNone/>
-                      </a:pPr>
-                      <a:r>
-                        <a:rPr lang="en" sz="1400" dirty="0"/>
-                        <a:t>SIT Agent / LLM runtime </a:t>
-                      </a:r>
-                      <a:r>
-                        <a:rPr lang="zh-TW" altLang="en-US" sz="1400" dirty="0"/>
-                        <a:t>節點</a:t>
-                      </a:r>
-                      <a:endParaRPr lang="zh-TW" altLang="en-US" sz="1400" dirty="0">
-                        <a:latin typeface="Microsoft JhengHei" panose="020B0604030504040204" pitchFamily="34" charset="-120"/>
-                        <a:ea typeface="Microsoft JhengHei" panose="020B0604030504040204" pitchFamily="34" charset="-120"/>
-                      </a:endParaRPr>
-                    </a:p>
-                  </a:txBody>
-                  <a:tcPr anchor="ctr"/>
-                </a:tc>
-                <a:extLst>
-                  <a:ext uri="{0D108BD9-81ED-4DB2-BD59-A6C34878D82A}">
-                    <a16:rowId xmlns:a16="http://schemas.microsoft.com/office/drawing/2014/main" val="3175800829"/>
-                  </a:ext>
-                </a:extLst>
-              </a:tr>
-              <a:tr h="363331">
-                <a:tc>
-                  <a:txBody>
-                    <a:bodyPr/>
-                    <a:lstStyle/>
-                    <a:p>
-                      <a:pPr>
-                        <a:buNone/>
-                      </a:pPr>
-                      <a:r>
-                        <a:rPr lang="en" sz="1400" dirty="0">
-                          <a:latin typeface="Consolas" panose="020B0609020204030204" pitchFamily="49" charset="0"/>
-                          <a:cs typeface="Consolas" panose="020B0609020204030204" pitchFamily="49" charset="0"/>
-                        </a:rPr>
-                        <a:t>infogather-sit-ops-01</a:t>
-                      </a:r>
-                      <a:endParaRPr lang="en" sz="1400" dirty="0">
-                        <a:latin typeface="Consolas" panose="020B0609020204030204" pitchFamily="49" charset="0"/>
-                        <a:ea typeface="Microsoft JhengHei" panose="020B0604030504040204" pitchFamily="34" charset="-120"/>
-                        <a:cs typeface="Consolas" panose="020B0609020204030204" pitchFamily="49" charset="0"/>
-                      </a:endParaRPr>
-                    </a:p>
-                  </a:txBody>
-                  <a:tcPr anchor="ctr"/>
-                </a:tc>
-                <a:tc>
-                  <a:txBody>
-                    <a:bodyPr/>
-                    <a:lstStyle/>
-                    <a:p>
-                      <a:pPr>
-                        <a:buNone/>
-                      </a:pPr>
-                      <a:r>
-                        <a:rPr lang="en"/>
-                        <a:t>2 vCPU</a:t>
-                      </a:r>
-                    </a:p>
-                  </a:txBody>
-                  <a:tcPr anchor="ctr"/>
-                </a:tc>
-                <a:tc>
-                  <a:txBody>
-                    <a:bodyPr/>
-                    <a:lstStyle/>
-                    <a:p>
-                      <a:pPr>
-                        <a:buNone/>
-                      </a:pPr>
-                      <a:r>
-                        <a:rPr lang="en"/>
-                        <a:t>4 GB</a:t>
-                      </a:r>
-                    </a:p>
-                  </a:txBody>
-                  <a:tcPr anchor="ctr"/>
-                </a:tc>
-                <a:tc>
-                  <a:txBody>
-                    <a:bodyPr/>
-                    <a:lstStyle/>
-                    <a:p>
-                      <a:pPr>
-                        <a:buNone/>
-                      </a:pPr>
-                      <a:r>
-                        <a:rPr lang="en" dirty="0"/>
-                        <a:t>120 GB</a:t>
-                      </a:r>
-                    </a:p>
-                  </a:txBody>
-                  <a:tcPr anchor="ctr"/>
-                </a:tc>
-                <a:tc>
-                  <a:txBody>
-                    <a:bodyPr/>
-                    <a:lstStyle/>
-                    <a:p>
-                      <a:pPr>
-                        <a:buNone/>
-                      </a:pPr>
-                      <a:r>
-                        <a:rPr lang="en" sz="1400" dirty="0" err="1"/>
-                        <a:t>Prometheus、Grafana、operations</a:t>
-                      </a:r>
-                      <a:r>
-                        <a:rPr lang="en" sz="1400" dirty="0"/>
-                        <a:t> tools</a:t>
-                      </a:r>
-                      <a:endParaRPr lang="en" sz="1400" dirty="0">
-                        <a:latin typeface="Microsoft JhengHei" panose="020B0604030504040204" pitchFamily="34" charset="-120"/>
-                        <a:ea typeface="Microsoft JhengHei" panose="020B0604030504040204" pitchFamily="34" charset="-120"/>
-                      </a:endParaRPr>
-                    </a:p>
-                  </a:txBody>
-                  <a:tcPr anchor="ctr"/>
-                </a:tc>
-                <a:tc>
-                  <a:txBody>
-                    <a:bodyPr/>
-                    <a:lstStyle/>
-                    <a:p>
-                      <a:pPr>
-                        <a:buNone/>
-                      </a:pPr>
-                      <a:r>
-                        <a:rPr lang="en" sz="1400" dirty="0"/>
-                        <a:t>SIT </a:t>
-                      </a:r>
-                      <a:r>
-                        <a:rPr lang="zh-TW" altLang="en-US" sz="1400" dirty="0"/>
-                        <a:t>監控與維運控制節點</a:t>
-                      </a:r>
-                      <a:endParaRPr lang="zh-TW" altLang="en-US" sz="1400" dirty="0">
-                        <a:latin typeface="Microsoft JhengHei" panose="020B0604030504040204" pitchFamily="34" charset="-120"/>
-                        <a:ea typeface="Microsoft JhengHei" panose="020B0604030504040204" pitchFamily="34" charset="-120"/>
-                      </a:endParaRPr>
-                    </a:p>
-                  </a:txBody>
-                  <a:tcPr anchor="ctr"/>
-                </a:tc>
-                <a:extLst>
-                  <a:ext uri="{0D108BD9-81ED-4DB2-BD59-A6C34878D82A}">
-                    <a16:rowId xmlns:a16="http://schemas.microsoft.com/office/drawing/2014/main" val="1664710146"/>
+                    <a16:rowId xmlns:a16="http://schemas.microsoft.com/office/drawing/2014/main" val="1263016964"/>
                   </a:ext>
                 </a:extLst>
               </a:tr>
@@ -11455,1717 +9658,6 @@
 </file>
 
 <file path=ppt/slides/slide4.xml><?xml version="1.0" encoding="utf-8"?>
-<p:sld xmlns:a="http://schemas.openxmlformats.org/drawingml/2006/main" xmlns:r="http://schemas.openxmlformats.org/officeDocument/2006/relationships" xmlns:p="http://schemas.openxmlformats.org/presentationml/2006/main">
-  <p:cSld>
-    <p:spTree>
-      <p:nvGrpSpPr>
-        <p:cNvPr id="1" name="">
-          <a:extLst>
-            <a:ext uri="{FF2B5EF4-FFF2-40B4-BE49-F238E27FC236}">
-              <a16:creationId xmlns:a16="http://schemas.microsoft.com/office/drawing/2014/main" id="{46AF1D0A-7358-76D8-4B94-2BDDF0336F91}"/>
-            </a:ext>
-          </a:extLst>
-        </p:cNvPr>
-        <p:cNvGrpSpPr/>
-        <p:nvPr/>
-      </p:nvGrpSpPr>
-      <p:grpSpPr>
-        <a:xfrm>
-          <a:off x="0" y="0"/>
-          <a:ext cx="0" cy="0"/>
-          <a:chOff x="0" y="0"/>
-          <a:chExt cx="0" cy="0"/>
-        </a:xfrm>
-      </p:grpSpPr>
-      <p:sp>
-        <p:nvSpPr>
-          <p:cNvPr id="3" name="標題 2">
-            <a:extLst>
-              <a:ext uri="{FF2B5EF4-FFF2-40B4-BE49-F238E27FC236}">
-                <a16:creationId xmlns:a16="http://schemas.microsoft.com/office/drawing/2014/main" id="{936A83FF-A6D5-B2C4-8B72-33F8656994EF}"/>
-              </a:ext>
-            </a:extLst>
-          </p:cNvPr>
-          <p:cNvSpPr>
-            <a:spLocks noGrp="1"/>
-          </p:cNvSpPr>
-          <p:nvPr>
-            <p:ph type="title"/>
-          </p:nvPr>
-        </p:nvSpPr>
-        <p:spPr/>
-        <p:txBody>
-          <a:bodyPr/>
-          <a:lstStyle/>
-          <a:p>
-            <a:r>
-              <a:rPr lang="zh-TW" altLang="en-US" b="1" dirty="0"/>
-              <a:t>正式環境 </a:t>
-            </a:r>
-            <a:r>
-              <a:rPr lang="en" altLang="zh-TW" b="1" dirty="0"/>
-              <a:t>VM </a:t>
-            </a:r>
-            <a:r>
-              <a:rPr lang="zh-TW" altLang="en-US" b="1" dirty="0"/>
-              <a:t>與服務配置</a:t>
-            </a:r>
-            <a:endParaRPr lang="zh-TW" altLang="en-US" dirty="0"/>
-          </a:p>
-        </p:txBody>
-      </p:sp>
-      <p:sp>
-        <p:nvSpPr>
-          <p:cNvPr id="6" name="文字版面配置區 5">
-            <a:extLst>
-              <a:ext uri="{FF2B5EF4-FFF2-40B4-BE49-F238E27FC236}">
-                <a16:creationId xmlns:a16="http://schemas.microsoft.com/office/drawing/2014/main" id="{E432E00F-A29F-3F3E-DEB4-2839A2892BD4}"/>
-              </a:ext>
-            </a:extLst>
-          </p:cNvPr>
-          <p:cNvSpPr>
-            <a:spLocks noGrp="1"/>
-          </p:cNvSpPr>
-          <p:nvPr>
-            <p:ph type="body" idx="1"/>
-          </p:nvPr>
-        </p:nvSpPr>
-        <p:spPr/>
-        <p:txBody>
-          <a:bodyPr/>
-          <a:lstStyle/>
-          <a:p>
-            <a:endParaRPr lang="en-US" altLang="zh-TW" dirty="0"/>
-          </a:p>
-          <a:p>
-            <a:endParaRPr lang="en-US" altLang="zh-TW" dirty="0"/>
-          </a:p>
-          <a:p>
-            <a:endParaRPr lang="en-US" altLang="zh-TW" dirty="0"/>
-          </a:p>
-          <a:p>
-            <a:endParaRPr lang="en-US" altLang="zh-TW" dirty="0"/>
-          </a:p>
-          <a:p>
-            <a:endParaRPr lang="en-US" altLang="zh-TW" dirty="0"/>
-          </a:p>
-          <a:p>
-            <a:endParaRPr lang="en-US" altLang="zh-TW" dirty="0"/>
-          </a:p>
-          <a:p>
-            <a:endParaRPr lang="en-US" altLang="zh-TW" dirty="0"/>
-          </a:p>
-          <a:p>
-            <a:endParaRPr lang="en-US" altLang="zh-TW" dirty="0"/>
-          </a:p>
-          <a:p>
-            <a:endParaRPr lang="en-US" altLang="zh-TW" dirty="0"/>
-          </a:p>
-          <a:p>
-            <a:endParaRPr lang="en-US" altLang="zh-TW" dirty="0"/>
-          </a:p>
-          <a:p>
-            <a:endParaRPr lang="en-US" altLang="zh-TW" dirty="0"/>
-          </a:p>
-          <a:p>
-            <a:endParaRPr lang="en-US" altLang="zh-TW" dirty="0"/>
-          </a:p>
-          <a:p>
-            <a:pPr marL="36000" indent="0">
-              <a:buNone/>
-            </a:pPr>
-            <a:endParaRPr lang="en-US" altLang="zh-TW" dirty="0"/>
-          </a:p>
-          <a:p>
-            <a:pPr marL="36000" indent="0">
-              <a:buNone/>
-            </a:pPr>
-            <a:endParaRPr lang="en-US" altLang="zh-TW" dirty="0"/>
-          </a:p>
-          <a:p>
-            <a:r>
-              <a:rPr lang="zh-TW" altLang="en-US" dirty="0"/>
-              <a:t>正式環境資源總計：</a:t>
-            </a:r>
-            <a:r>
-              <a:rPr lang="en" altLang="zh-TW" dirty="0"/>
-              <a:t>3</a:t>
-            </a:r>
-            <a:r>
-              <a:rPr lang="en-US" altLang="zh-TW" dirty="0"/>
-              <a:t>4</a:t>
-            </a:r>
-            <a:r>
-              <a:rPr lang="en" altLang="zh-TW" dirty="0"/>
-              <a:t> vCPU / 104 GB RAM / 2240 GB SSD</a:t>
-            </a:r>
-            <a:endParaRPr lang="en-US" altLang="zh-TW" dirty="0"/>
-          </a:p>
-          <a:p>
-            <a:endParaRPr lang="zh-TW" altLang="en-US" dirty="0"/>
-          </a:p>
-        </p:txBody>
-      </p:sp>
-      <p:graphicFrame>
-        <p:nvGraphicFramePr>
-          <p:cNvPr id="2" name="表格 1">
-            <a:extLst>
-              <a:ext uri="{FF2B5EF4-FFF2-40B4-BE49-F238E27FC236}">
-                <a16:creationId xmlns:a16="http://schemas.microsoft.com/office/drawing/2014/main" id="{277419BC-A996-C46D-03AC-7D801D0DA775}"/>
-              </a:ext>
-            </a:extLst>
-          </p:cNvPr>
-          <p:cNvGraphicFramePr>
-            <a:graphicFrameLocks noGrp="1"/>
-          </p:cNvGraphicFramePr>
-          <p:nvPr>
-            <p:extLst>
-              <p:ext uri="{D42A27DB-BD31-4B8C-83A1-F6EECF244321}">
-                <p14:modId xmlns:p14="http://schemas.microsoft.com/office/powerpoint/2010/main" val="424111395"/>
-              </p:ext>
-            </p:extLst>
-          </p:nvPr>
-        </p:nvGraphicFramePr>
-        <p:xfrm>
-          <a:off x="179388" y="826714"/>
-          <a:ext cx="11161712" cy="4320000"/>
-        </p:xfrm>
-        <a:graphic>
-          <a:graphicData uri="http://schemas.openxmlformats.org/drawingml/2006/table">
-            <a:tbl>
-              <a:tblPr>
-                <a:tableStyleId>{91DB7C30-2B5D-4D34-8F22-85940E495A18}</a:tableStyleId>
-              </a:tblPr>
-              <a:tblGrid>
-                <a:gridCol w="2840921">
-                  <a:extLst>
-                    <a:ext uri="{9D8B030D-6E8A-4147-A177-3AD203B41FA5}">
-                      <a16:colId xmlns:a16="http://schemas.microsoft.com/office/drawing/2014/main" val="1199597028"/>
-                    </a:ext>
-                  </a:extLst>
-                </a:gridCol>
-                <a:gridCol w="800337">
-                  <a:extLst>
-                    <a:ext uri="{9D8B030D-6E8A-4147-A177-3AD203B41FA5}">
-                      <a16:colId xmlns:a16="http://schemas.microsoft.com/office/drawing/2014/main" val="1578801080"/>
-                    </a:ext>
-                  </a:extLst>
-                </a:gridCol>
-                <a:gridCol w="735476">
-                  <a:extLst>
-                    <a:ext uri="{9D8B030D-6E8A-4147-A177-3AD203B41FA5}">
-                      <a16:colId xmlns:a16="http://schemas.microsoft.com/office/drawing/2014/main" val="3168828867"/>
-                    </a:ext>
-                  </a:extLst>
-                </a:gridCol>
-                <a:gridCol w="789751">
-                  <a:extLst>
-                    <a:ext uri="{9D8B030D-6E8A-4147-A177-3AD203B41FA5}">
-                      <a16:colId xmlns:a16="http://schemas.microsoft.com/office/drawing/2014/main" val="136309821"/>
-                    </a:ext>
-                  </a:extLst>
-                </a:gridCol>
-                <a:gridCol w="3413612">
-                  <a:extLst>
-                    <a:ext uri="{9D8B030D-6E8A-4147-A177-3AD203B41FA5}">
-                      <a16:colId xmlns:a16="http://schemas.microsoft.com/office/drawing/2014/main" val="3760430905"/>
-                    </a:ext>
-                  </a:extLst>
-                </a:gridCol>
-                <a:gridCol w="2581615">
-                  <a:extLst>
-                    <a:ext uri="{9D8B030D-6E8A-4147-A177-3AD203B41FA5}">
-                      <a16:colId xmlns:a16="http://schemas.microsoft.com/office/drawing/2014/main" val="939028161"/>
-                    </a:ext>
-                  </a:extLst>
-                </a:gridCol>
-              </a:tblGrid>
-              <a:tr h="353338">
-                <a:tc>
-                  <a:txBody>
-                    <a:bodyPr/>
-                    <a:lstStyle/>
-                    <a:p>
-                      <a:pPr>
-                        <a:buNone/>
-                      </a:pPr>
-                      <a:r>
-                        <a:rPr lang="en" sz="1400" dirty="0"/>
-                        <a:t>VM</a:t>
-                      </a:r>
-                      <a:endParaRPr lang="zh-TW" altLang="en-US" sz="1400" dirty="0">
-                        <a:latin typeface="Microsoft JhengHei" panose="020B0604030504040204" pitchFamily="34" charset="-120"/>
-                        <a:ea typeface="Microsoft JhengHei" panose="020B0604030504040204" pitchFamily="34" charset="-120"/>
-                      </a:endParaRPr>
-                    </a:p>
-                  </a:txBody>
-                  <a:tcPr anchor="ctr"/>
-                </a:tc>
-                <a:tc>
-                  <a:txBody>
-                    <a:bodyPr/>
-                    <a:lstStyle/>
-                    <a:p>
-                      <a:pPr>
-                        <a:buNone/>
-                      </a:pPr>
-                      <a:r>
-                        <a:rPr lang="en" sz="1400" dirty="0"/>
-                        <a:t>vCPU</a:t>
-                      </a:r>
-                      <a:endParaRPr lang="en" sz="1400" dirty="0">
-                        <a:latin typeface="Microsoft JhengHei" panose="020B0604030504040204" pitchFamily="34" charset="-120"/>
-                        <a:ea typeface="Microsoft JhengHei" panose="020B0604030504040204" pitchFamily="34" charset="-120"/>
-                      </a:endParaRPr>
-                    </a:p>
-                  </a:txBody>
-                  <a:tcPr anchor="ctr"/>
-                </a:tc>
-                <a:tc>
-                  <a:txBody>
-                    <a:bodyPr/>
-                    <a:lstStyle/>
-                    <a:p>
-                      <a:pPr>
-                        <a:buNone/>
-                      </a:pPr>
-                      <a:r>
-                        <a:rPr lang="en" sz="1400"/>
-                        <a:t>RAM</a:t>
-                      </a:r>
-                      <a:endParaRPr lang="en" sz="1400">
-                        <a:latin typeface="Microsoft JhengHei" panose="020B0604030504040204" pitchFamily="34" charset="-120"/>
-                        <a:ea typeface="Microsoft JhengHei" panose="020B0604030504040204" pitchFamily="34" charset="-120"/>
-                      </a:endParaRPr>
-                    </a:p>
-                  </a:txBody>
-                  <a:tcPr anchor="ctr"/>
-                </a:tc>
-                <a:tc>
-                  <a:txBody>
-                    <a:bodyPr/>
-                    <a:lstStyle/>
-                    <a:p>
-                      <a:pPr>
-                        <a:buNone/>
-                      </a:pPr>
-                      <a:r>
-                        <a:rPr lang="en" sz="1400" dirty="0"/>
-                        <a:t>SSD</a:t>
-                      </a:r>
-                      <a:endParaRPr lang="en" sz="1400" dirty="0">
-                        <a:latin typeface="Microsoft JhengHei" panose="020B0604030504040204" pitchFamily="34" charset="-120"/>
-                        <a:ea typeface="Microsoft JhengHei" panose="020B0604030504040204" pitchFamily="34" charset="-120"/>
-                      </a:endParaRPr>
-                    </a:p>
-                  </a:txBody>
-                  <a:tcPr anchor="ctr"/>
-                </a:tc>
-                <a:tc>
-                  <a:txBody>
-                    <a:bodyPr/>
-                    <a:lstStyle/>
-                    <a:p>
-                      <a:pPr>
-                        <a:buNone/>
-                      </a:pPr>
-                      <a:r>
-                        <a:rPr lang="zh-TW" altLang="en-US" sz="1400"/>
-                        <a:t>部署服務</a:t>
-                      </a:r>
-                      <a:endParaRPr lang="zh-TW" altLang="en-US" sz="1400">
-                        <a:latin typeface="Microsoft JhengHei" panose="020B0604030504040204" pitchFamily="34" charset="-120"/>
-                        <a:ea typeface="Microsoft JhengHei" panose="020B0604030504040204" pitchFamily="34" charset="-120"/>
-                      </a:endParaRPr>
-                    </a:p>
-                  </a:txBody>
-                  <a:tcPr anchor="ctr"/>
-                </a:tc>
-                <a:tc>
-                  <a:txBody>
-                    <a:bodyPr/>
-                    <a:lstStyle/>
-                    <a:p>
-                      <a:pPr>
-                        <a:buNone/>
-                      </a:pPr>
-                      <a:r>
-                        <a:rPr lang="zh-TW" altLang="en-US" sz="1400"/>
-                        <a:t>說明</a:t>
-                      </a:r>
-                      <a:endParaRPr lang="zh-TW" altLang="en-US" sz="1400">
-                        <a:latin typeface="Microsoft JhengHei" panose="020B0604030504040204" pitchFamily="34" charset="-120"/>
-                        <a:ea typeface="Microsoft JhengHei" panose="020B0604030504040204" pitchFamily="34" charset="-120"/>
-                      </a:endParaRPr>
-                    </a:p>
-                  </a:txBody>
-                  <a:tcPr anchor="ctr"/>
-                </a:tc>
-                <a:extLst>
-                  <a:ext uri="{0D108BD9-81ED-4DB2-BD59-A6C34878D82A}">
-                    <a16:rowId xmlns:a16="http://schemas.microsoft.com/office/drawing/2014/main" val="961505403"/>
-                  </a:ext>
-                </a:extLst>
-              </a:tr>
-              <a:tr h="353338">
-                <a:tc>
-                  <a:txBody>
-                    <a:bodyPr/>
-                    <a:lstStyle/>
-                    <a:p>
-                      <a:pPr>
-                        <a:buNone/>
-                      </a:pPr>
-                      <a:r>
-                        <a:rPr lang="en" sz="1400" dirty="0">
-                          <a:latin typeface="Consolas" panose="020B0609020204030204" pitchFamily="49" charset="0"/>
-                          <a:cs typeface="Consolas" panose="020B0609020204030204" pitchFamily="49" charset="0"/>
-                        </a:rPr>
-                        <a:t>infogather-prod-lb-01</a:t>
-                      </a:r>
-                      <a:endParaRPr lang="en" sz="1400" dirty="0">
-                        <a:latin typeface="Consolas" panose="020B0609020204030204" pitchFamily="49" charset="0"/>
-                        <a:ea typeface="Microsoft JhengHei" panose="020B0604030504040204" pitchFamily="34" charset="-120"/>
-                        <a:cs typeface="Consolas" panose="020B0609020204030204" pitchFamily="49" charset="0"/>
-                      </a:endParaRPr>
-                    </a:p>
-                  </a:txBody>
-                  <a:tcPr anchor="ctr"/>
-                </a:tc>
-                <a:tc>
-                  <a:txBody>
-                    <a:bodyPr/>
-                    <a:lstStyle/>
-                    <a:p>
-                      <a:pPr>
-                        <a:buNone/>
-                      </a:pPr>
-                      <a:r>
-                        <a:rPr lang="en"/>
-                        <a:t>2 vCPU</a:t>
-                      </a:r>
-                    </a:p>
-                  </a:txBody>
-                  <a:tcPr anchor="ctr"/>
-                </a:tc>
-                <a:tc>
-                  <a:txBody>
-                    <a:bodyPr/>
-                    <a:lstStyle/>
-                    <a:p>
-                      <a:pPr>
-                        <a:buNone/>
-                      </a:pPr>
-                      <a:r>
-                        <a:rPr lang="en"/>
-                        <a:t>4 GB</a:t>
-                      </a:r>
-                    </a:p>
-                  </a:txBody>
-                  <a:tcPr anchor="ctr"/>
-                </a:tc>
-                <a:tc>
-                  <a:txBody>
-                    <a:bodyPr/>
-                    <a:lstStyle/>
-                    <a:p>
-                      <a:pPr>
-                        <a:buNone/>
-                      </a:pPr>
-                      <a:r>
-                        <a:rPr lang="en"/>
-                        <a:t>60 GB</a:t>
-                      </a:r>
-                    </a:p>
-                  </a:txBody>
-                  <a:tcPr anchor="ctr"/>
-                </a:tc>
-                <a:tc>
-                  <a:txBody>
-                    <a:bodyPr/>
-                    <a:lstStyle/>
-                    <a:p>
-                      <a:pPr>
-                        <a:buNone/>
-                      </a:pPr>
-                      <a:r>
-                        <a:rPr lang="en" sz="1400"/>
-                        <a:t>Nginx / HAProxy</a:t>
-                      </a:r>
-                      <a:endParaRPr lang="en" sz="1400">
-                        <a:latin typeface="Microsoft JhengHei" panose="020B0604030504040204" pitchFamily="34" charset="-120"/>
-                        <a:ea typeface="Microsoft JhengHei" panose="020B0604030504040204" pitchFamily="34" charset="-120"/>
-                      </a:endParaRPr>
-                    </a:p>
-                  </a:txBody>
-                  <a:tcPr anchor="ctr"/>
-                </a:tc>
-                <a:tc>
-                  <a:txBody>
-                    <a:bodyPr/>
-                    <a:lstStyle/>
-                    <a:p>
-                      <a:pPr>
-                        <a:buNone/>
-                      </a:pPr>
-                      <a:r>
-                        <a:rPr lang="en" sz="1400" dirty="0"/>
-                        <a:t>PROD </a:t>
-                      </a:r>
-                      <a:r>
-                        <a:rPr lang="zh-TW" altLang="en-US" sz="1400" dirty="0"/>
-                        <a:t>入口節點</a:t>
-                      </a:r>
-                      <a:endParaRPr lang="zh-TW" altLang="en-US" sz="1400" dirty="0">
-                        <a:latin typeface="Microsoft JhengHei" panose="020B0604030504040204" pitchFamily="34" charset="-120"/>
-                        <a:ea typeface="Microsoft JhengHei" panose="020B0604030504040204" pitchFamily="34" charset="-120"/>
-                      </a:endParaRPr>
-                    </a:p>
-                  </a:txBody>
-                  <a:tcPr anchor="ctr"/>
-                </a:tc>
-                <a:extLst>
-                  <a:ext uri="{0D108BD9-81ED-4DB2-BD59-A6C34878D82A}">
-                    <a16:rowId xmlns:a16="http://schemas.microsoft.com/office/drawing/2014/main" val="4275047890"/>
-                  </a:ext>
-                </a:extLst>
-              </a:tr>
-              <a:tr h="353338">
-                <a:tc>
-                  <a:txBody>
-                    <a:bodyPr/>
-                    <a:lstStyle/>
-                    <a:p>
-                      <a:pPr>
-                        <a:buNone/>
-                      </a:pPr>
-                      <a:r>
-                        <a:rPr lang="en" sz="1400" dirty="0">
-                          <a:latin typeface="Consolas" panose="020B0609020204030204" pitchFamily="49" charset="0"/>
-                          <a:cs typeface="Consolas" panose="020B0609020204030204" pitchFamily="49" charset="0"/>
-                        </a:rPr>
-                        <a:t>infogather-prod-app-01</a:t>
-                      </a:r>
-                      <a:endParaRPr lang="en" sz="1400" dirty="0">
-                        <a:latin typeface="Consolas" panose="020B0609020204030204" pitchFamily="49" charset="0"/>
-                        <a:ea typeface="Microsoft JhengHei" panose="020B0604030504040204" pitchFamily="34" charset="-120"/>
-                        <a:cs typeface="Consolas" panose="020B0609020204030204" pitchFamily="49" charset="0"/>
-                      </a:endParaRPr>
-                    </a:p>
-                  </a:txBody>
-                  <a:tcPr anchor="ctr"/>
-                </a:tc>
-                <a:tc>
-                  <a:txBody>
-                    <a:bodyPr/>
-                    <a:lstStyle/>
-                    <a:p>
-                      <a:pPr>
-                        <a:buNone/>
-                      </a:pPr>
-                      <a:r>
-                        <a:rPr lang="en"/>
-                        <a:t>4 vCPU</a:t>
-                      </a:r>
-                    </a:p>
-                  </a:txBody>
-                  <a:tcPr anchor="ctr"/>
-                </a:tc>
-                <a:tc>
-                  <a:txBody>
-                    <a:bodyPr/>
-                    <a:lstStyle/>
-                    <a:p>
-                      <a:pPr>
-                        <a:buNone/>
-                      </a:pPr>
-                      <a:r>
-                        <a:rPr lang="en"/>
-                        <a:t>16 GB</a:t>
-                      </a:r>
-                    </a:p>
-                  </a:txBody>
-                  <a:tcPr anchor="ctr"/>
-                </a:tc>
-                <a:tc>
-                  <a:txBody>
-                    <a:bodyPr/>
-                    <a:lstStyle/>
-                    <a:p>
-                      <a:pPr>
-                        <a:buNone/>
-                      </a:pPr>
-                      <a:r>
-                        <a:rPr lang="en"/>
-                        <a:t>100 GB</a:t>
-                      </a:r>
-                    </a:p>
-                  </a:txBody>
-                  <a:tcPr anchor="ctr"/>
-                </a:tc>
-                <a:tc>
-                  <a:txBody>
-                    <a:bodyPr/>
-                    <a:lstStyle/>
-                    <a:p>
-                      <a:pPr>
-                        <a:buNone/>
-                      </a:pPr>
-                      <a:r>
-                        <a:rPr lang="en" sz="1400" dirty="0" err="1"/>
-                        <a:t>InfoGather</a:t>
-                      </a:r>
-                      <a:r>
-                        <a:rPr lang="en" sz="1400" dirty="0"/>
-                        <a:t> </a:t>
-                      </a:r>
-                      <a:r>
-                        <a:rPr lang="en" sz="1400" dirty="0" err="1"/>
-                        <a:t>app、worker、scheduler</a:t>
-                      </a:r>
-                      <a:endParaRPr lang="en" sz="1400" dirty="0">
-                        <a:latin typeface="Microsoft JhengHei" panose="020B0604030504040204" pitchFamily="34" charset="-120"/>
-                        <a:ea typeface="Microsoft JhengHei" panose="020B0604030504040204" pitchFamily="34" charset="-120"/>
-                      </a:endParaRPr>
-                    </a:p>
-                  </a:txBody>
-                  <a:tcPr anchor="ctr"/>
-                </a:tc>
-                <a:tc>
-                  <a:txBody>
-                    <a:bodyPr/>
-                    <a:lstStyle/>
-                    <a:p>
-                      <a:pPr>
-                        <a:buNone/>
-                      </a:pPr>
-                      <a:r>
-                        <a:rPr lang="zh-TW" altLang="en-US" sz="1400" dirty="0"/>
-                        <a:t>主應用節點</a:t>
-                      </a:r>
-                      <a:endParaRPr lang="en" sz="1400" dirty="0">
-                        <a:latin typeface="Microsoft JhengHei" panose="020B0604030504040204" pitchFamily="34" charset="-120"/>
-                        <a:ea typeface="Microsoft JhengHei" panose="020B0604030504040204" pitchFamily="34" charset="-120"/>
-                      </a:endParaRPr>
-                    </a:p>
-                  </a:txBody>
-                  <a:tcPr anchor="ctr"/>
-                </a:tc>
-                <a:extLst>
-                  <a:ext uri="{0D108BD9-81ED-4DB2-BD59-A6C34878D82A}">
-                    <a16:rowId xmlns:a16="http://schemas.microsoft.com/office/drawing/2014/main" val="2565674944"/>
-                  </a:ext>
-                </a:extLst>
-              </a:tr>
-              <a:tr h="353338">
-                <a:tc>
-                  <a:txBody>
-                    <a:bodyPr/>
-                    <a:lstStyle/>
-                    <a:p>
-                      <a:pPr>
-                        <a:buNone/>
-                      </a:pPr>
-                      <a:r>
-                        <a:rPr lang="en" sz="1400" dirty="0">
-                          <a:latin typeface="Consolas" panose="020B0609020204030204" pitchFamily="49" charset="0"/>
-                          <a:cs typeface="Consolas" panose="020B0609020204030204" pitchFamily="49" charset="0"/>
-                        </a:rPr>
-                        <a:t>infogather-prod-app-02</a:t>
-                      </a:r>
-                      <a:endParaRPr lang="en" sz="1400" dirty="0">
-                        <a:latin typeface="Consolas" panose="020B0609020204030204" pitchFamily="49" charset="0"/>
-                        <a:ea typeface="Microsoft JhengHei" panose="020B0604030504040204" pitchFamily="34" charset="-120"/>
-                        <a:cs typeface="Consolas" panose="020B0609020204030204" pitchFamily="49" charset="0"/>
-                      </a:endParaRPr>
-                    </a:p>
-                  </a:txBody>
-                  <a:tcPr anchor="ctr"/>
-                </a:tc>
-                <a:tc>
-                  <a:txBody>
-                    <a:bodyPr/>
-                    <a:lstStyle/>
-                    <a:p>
-                      <a:pPr>
-                        <a:buNone/>
-                      </a:pPr>
-                      <a:r>
-                        <a:rPr lang="en"/>
-                        <a:t>4 vCPU</a:t>
-                      </a:r>
-                    </a:p>
-                  </a:txBody>
-                  <a:tcPr anchor="ctr"/>
-                </a:tc>
-                <a:tc>
-                  <a:txBody>
-                    <a:bodyPr/>
-                    <a:lstStyle/>
-                    <a:p>
-                      <a:pPr>
-                        <a:buNone/>
-                      </a:pPr>
-                      <a:r>
-                        <a:rPr lang="en"/>
-                        <a:t>16 GB</a:t>
-                      </a:r>
-                    </a:p>
-                  </a:txBody>
-                  <a:tcPr anchor="ctr"/>
-                </a:tc>
-                <a:tc>
-                  <a:txBody>
-                    <a:bodyPr/>
-                    <a:lstStyle/>
-                    <a:p>
-                      <a:pPr>
-                        <a:buNone/>
-                      </a:pPr>
-                      <a:r>
-                        <a:rPr lang="en"/>
-                        <a:t>100 GB</a:t>
-                      </a:r>
-                    </a:p>
-                  </a:txBody>
-                  <a:tcPr anchor="ctr"/>
-                </a:tc>
-                <a:tc>
-                  <a:txBody>
-                    <a:bodyPr/>
-                    <a:lstStyle/>
-                    <a:p>
-                      <a:pPr>
-                        <a:buNone/>
-                      </a:pPr>
-                      <a:r>
-                        <a:rPr lang="en" sz="1400" dirty="0" err="1"/>
-                        <a:t>InfoGather</a:t>
-                      </a:r>
-                      <a:r>
-                        <a:rPr lang="en" sz="1400" dirty="0"/>
-                        <a:t> </a:t>
-                      </a:r>
-                      <a:r>
-                        <a:rPr lang="en" sz="1400" dirty="0" err="1"/>
-                        <a:t>app、worker</a:t>
-                      </a:r>
-                      <a:endParaRPr lang="en" sz="1400" dirty="0">
-                        <a:latin typeface="Microsoft JhengHei" panose="020B0604030504040204" pitchFamily="34" charset="-120"/>
-                        <a:ea typeface="Microsoft JhengHei" panose="020B0604030504040204" pitchFamily="34" charset="-120"/>
-                      </a:endParaRPr>
-                    </a:p>
-                  </a:txBody>
-                  <a:tcPr anchor="ctr"/>
-                </a:tc>
-                <a:tc>
-                  <a:txBody>
-                    <a:bodyPr/>
-                    <a:lstStyle/>
-                    <a:p>
-                      <a:pPr>
-                        <a:buNone/>
-                      </a:pPr>
-                      <a:r>
-                        <a:rPr lang="zh-TW" altLang="en-US" sz="1400" dirty="0"/>
-                        <a:t>第二應用節點</a:t>
-                      </a:r>
-                      <a:endParaRPr lang="zh-TW" altLang="en-US" sz="1400" dirty="0">
-                        <a:latin typeface="Microsoft JhengHei" panose="020B0604030504040204" pitchFamily="34" charset="-120"/>
-                        <a:ea typeface="Microsoft JhengHei" panose="020B0604030504040204" pitchFamily="34" charset="-120"/>
-                      </a:endParaRPr>
-                    </a:p>
-                  </a:txBody>
-                  <a:tcPr anchor="ctr"/>
-                </a:tc>
-                <a:extLst>
-                  <a:ext uri="{0D108BD9-81ED-4DB2-BD59-A6C34878D82A}">
-                    <a16:rowId xmlns:a16="http://schemas.microsoft.com/office/drawing/2014/main" val="507787501"/>
-                  </a:ext>
-                </a:extLst>
-              </a:tr>
-              <a:tr h="363331">
-                <a:tc>
-                  <a:txBody>
-                    <a:bodyPr/>
-                    <a:lstStyle/>
-                    <a:p>
-                      <a:pPr>
-                        <a:buNone/>
-                      </a:pPr>
-                      <a:r>
-                        <a:rPr lang="en" sz="1400" dirty="0">
-                          <a:latin typeface="Consolas" panose="020B0609020204030204" pitchFamily="49" charset="0"/>
-                          <a:cs typeface="Consolas" panose="020B0609020204030204" pitchFamily="49" charset="0"/>
-                        </a:rPr>
-                        <a:t>infogather-prod-mongo-01</a:t>
-                      </a:r>
-                      <a:endParaRPr lang="en" sz="1400" dirty="0">
-                        <a:latin typeface="Consolas" panose="020B0609020204030204" pitchFamily="49" charset="0"/>
-                        <a:ea typeface="Microsoft JhengHei" panose="020B0604030504040204" pitchFamily="34" charset="-120"/>
-                        <a:cs typeface="Consolas" panose="020B0609020204030204" pitchFamily="49" charset="0"/>
-                      </a:endParaRPr>
-                    </a:p>
-                  </a:txBody>
-                  <a:tcPr anchor="ctr"/>
-                </a:tc>
-                <a:tc>
-                  <a:txBody>
-                    <a:bodyPr/>
-                    <a:lstStyle/>
-                    <a:p>
-                      <a:pPr>
-                        <a:buNone/>
-                      </a:pPr>
-                      <a:r>
-                        <a:rPr lang="en"/>
-                        <a:t>4 vCPU</a:t>
-                      </a:r>
-                    </a:p>
-                  </a:txBody>
-                  <a:tcPr anchor="ctr"/>
-                </a:tc>
-                <a:tc>
-                  <a:txBody>
-                    <a:bodyPr/>
-                    <a:lstStyle/>
-                    <a:p>
-                      <a:pPr>
-                        <a:buNone/>
-                      </a:pPr>
-                      <a:r>
-                        <a:rPr lang="en"/>
-                        <a:t>16 GB</a:t>
-                      </a:r>
-                    </a:p>
-                  </a:txBody>
-                  <a:tcPr anchor="ctr"/>
-                </a:tc>
-                <a:tc>
-                  <a:txBody>
-                    <a:bodyPr/>
-                    <a:lstStyle/>
-                    <a:p>
-                      <a:pPr>
-                        <a:buNone/>
-                      </a:pPr>
-                      <a:r>
-                        <a:rPr lang="en"/>
-                        <a:t>500 GB</a:t>
-                      </a:r>
-                    </a:p>
-                  </a:txBody>
-                  <a:tcPr anchor="ctr"/>
-                </a:tc>
-                <a:tc>
-                  <a:txBody>
-                    <a:bodyPr/>
-                    <a:lstStyle/>
-                    <a:p>
-                      <a:pPr>
-                        <a:buNone/>
-                      </a:pPr>
-                      <a:r>
-                        <a:rPr lang="en" sz="1400"/>
-                        <a:t>MongoDB replica set member</a:t>
-                      </a:r>
-                      <a:endParaRPr lang="en" sz="1400">
-                        <a:latin typeface="Microsoft JhengHei" panose="020B0604030504040204" pitchFamily="34" charset="-120"/>
-                        <a:ea typeface="Microsoft JhengHei" panose="020B0604030504040204" pitchFamily="34" charset="-120"/>
-                      </a:endParaRPr>
-                    </a:p>
-                  </a:txBody>
-                  <a:tcPr anchor="ctr"/>
-                </a:tc>
-                <a:tc>
-                  <a:txBody>
-                    <a:bodyPr/>
-                    <a:lstStyle/>
-                    <a:p>
-                      <a:pPr>
-                        <a:buNone/>
-                      </a:pPr>
-                      <a:r>
-                        <a:rPr lang="en" sz="1400" dirty="0"/>
-                        <a:t>primary candidate</a:t>
-                      </a:r>
-                      <a:endParaRPr lang="en" sz="1400" dirty="0">
-                        <a:latin typeface="Microsoft JhengHei" panose="020B0604030504040204" pitchFamily="34" charset="-120"/>
-                        <a:ea typeface="Microsoft JhengHei" panose="020B0604030504040204" pitchFamily="34" charset="-120"/>
-                      </a:endParaRPr>
-                    </a:p>
-                  </a:txBody>
-                  <a:tcPr anchor="ctr"/>
-                </a:tc>
-                <a:extLst>
-                  <a:ext uri="{0D108BD9-81ED-4DB2-BD59-A6C34878D82A}">
-                    <a16:rowId xmlns:a16="http://schemas.microsoft.com/office/drawing/2014/main" val="3240847069"/>
-                  </a:ext>
-                </a:extLst>
-              </a:tr>
-              <a:tr h="363331">
-                <a:tc>
-                  <a:txBody>
-                    <a:bodyPr/>
-                    <a:lstStyle/>
-                    <a:p>
-                      <a:pPr>
-                        <a:buNone/>
-                      </a:pPr>
-                      <a:r>
-                        <a:rPr lang="en" sz="1400" dirty="0">
-                          <a:latin typeface="Consolas" panose="020B0609020204030204" pitchFamily="49" charset="0"/>
-                          <a:cs typeface="Consolas" panose="020B0609020204030204" pitchFamily="49" charset="0"/>
-                        </a:rPr>
-                        <a:t>infogather-prod-mongo-02</a:t>
-                      </a:r>
-                      <a:endParaRPr lang="en" sz="1400" dirty="0">
-                        <a:latin typeface="Consolas" panose="020B0609020204030204" pitchFamily="49" charset="0"/>
-                        <a:ea typeface="Microsoft JhengHei" panose="020B0604030504040204" pitchFamily="34" charset="-120"/>
-                        <a:cs typeface="Consolas" panose="020B0609020204030204" pitchFamily="49" charset="0"/>
-                      </a:endParaRPr>
-                    </a:p>
-                  </a:txBody>
-                  <a:tcPr anchor="ctr"/>
-                </a:tc>
-                <a:tc>
-                  <a:txBody>
-                    <a:bodyPr/>
-                    <a:lstStyle/>
-                    <a:p>
-                      <a:pPr>
-                        <a:buNone/>
-                      </a:pPr>
-                      <a:r>
-                        <a:rPr lang="en"/>
-                        <a:t>4 vCPU</a:t>
-                      </a:r>
-                    </a:p>
-                  </a:txBody>
-                  <a:tcPr anchor="ctr"/>
-                </a:tc>
-                <a:tc>
-                  <a:txBody>
-                    <a:bodyPr/>
-                    <a:lstStyle/>
-                    <a:p>
-                      <a:pPr>
-                        <a:buNone/>
-                      </a:pPr>
-                      <a:r>
-                        <a:rPr lang="en"/>
-                        <a:t>16 GB</a:t>
-                      </a:r>
-                    </a:p>
-                  </a:txBody>
-                  <a:tcPr anchor="ctr"/>
-                </a:tc>
-                <a:tc>
-                  <a:txBody>
-                    <a:bodyPr/>
-                    <a:lstStyle/>
-                    <a:p>
-                      <a:pPr>
-                        <a:buNone/>
-                      </a:pPr>
-                      <a:r>
-                        <a:rPr lang="en"/>
-                        <a:t>500 GB</a:t>
-                      </a:r>
-                    </a:p>
-                  </a:txBody>
-                  <a:tcPr anchor="ctr"/>
-                </a:tc>
-                <a:tc>
-                  <a:txBody>
-                    <a:bodyPr/>
-                    <a:lstStyle/>
-                    <a:p>
-                      <a:pPr>
-                        <a:buNone/>
-                      </a:pPr>
-                      <a:r>
-                        <a:rPr lang="en" sz="1400"/>
-                        <a:t>MongoDB replica set member</a:t>
-                      </a:r>
-                      <a:endParaRPr lang="en" sz="1400">
-                        <a:latin typeface="Microsoft JhengHei" panose="020B0604030504040204" pitchFamily="34" charset="-120"/>
-                        <a:ea typeface="Microsoft JhengHei" panose="020B0604030504040204" pitchFamily="34" charset="-120"/>
-                      </a:endParaRPr>
-                    </a:p>
-                  </a:txBody>
-                  <a:tcPr anchor="ctr"/>
-                </a:tc>
-                <a:tc>
-                  <a:txBody>
-                    <a:bodyPr/>
-                    <a:lstStyle/>
-                    <a:p>
-                      <a:pPr>
-                        <a:buNone/>
-                      </a:pPr>
-                      <a:r>
-                        <a:rPr lang="en" sz="1400" dirty="0"/>
-                        <a:t>secondary</a:t>
-                      </a:r>
-                      <a:endParaRPr lang="en" sz="1400" dirty="0">
-                        <a:latin typeface="Microsoft JhengHei" panose="020B0604030504040204" pitchFamily="34" charset="-120"/>
-                        <a:ea typeface="Microsoft JhengHei" panose="020B0604030504040204" pitchFamily="34" charset="-120"/>
-                      </a:endParaRPr>
-                    </a:p>
-                  </a:txBody>
-                  <a:tcPr anchor="ctr"/>
-                </a:tc>
-                <a:extLst>
-                  <a:ext uri="{0D108BD9-81ED-4DB2-BD59-A6C34878D82A}">
-                    <a16:rowId xmlns:a16="http://schemas.microsoft.com/office/drawing/2014/main" val="523296309"/>
-                  </a:ext>
-                </a:extLst>
-              </a:tr>
-              <a:tr h="363331">
-                <a:tc>
-                  <a:txBody>
-                    <a:bodyPr/>
-                    <a:lstStyle/>
-                    <a:p>
-                      <a:pPr>
-                        <a:buNone/>
-                      </a:pPr>
-                      <a:r>
-                        <a:rPr lang="en" sz="1400" dirty="0">
-                          <a:latin typeface="Consolas" panose="020B0609020204030204" pitchFamily="49" charset="0"/>
-                          <a:cs typeface="Consolas" panose="020B0609020204030204" pitchFamily="49" charset="0"/>
-                        </a:rPr>
-                        <a:t>infogather-prod-mongo-03</a:t>
-                      </a:r>
-                      <a:endParaRPr lang="en" sz="1400" dirty="0">
-                        <a:latin typeface="Consolas" panose="020B0609020204030204" pitchFamily="49" charset="0"/>
-                        <a:ea typeface="Microsoft JhengHei" panose="020B0604030504040204" pitchFamily="34" charset="-120"/>
-                        <a:cs typeface="Consolas" panose="020B0609020204030204" pitchFamily="49" charset="0"/>
-                      </a:endParaRPr>
-                    </a:p>
-                  </a:txBody>
-                  <a:tcPr anchor="ctr"/>
-                </a:tc>
-                <a:tc>
-                  <a:txBody>
-                    <a:bodyPr/>
-                    <a:lstStyle/>
-                    <a:p>
-                      <a:pPr>
-                        <a:buNone/>
-                      </a:pPr>
-                      <a:r>
-                        <a:rPr lang="en"/>
-                        <a:t>4 vCPU</a:t>
-                      </a:r>
-                    </a:p>
-                  </a:txBody>
-                  <a:tcPr anchor="ctr"/>
-                </a:tc>
-                <a:tc>
-                  <a:txBody>
-                    <a:bodyPr/>
-                    <a:lstStyle/>
-                    <a:p>
-                      <a:pPr>
-                        <a:buNone/>
-                      </a:pPr>
-                      <a:r>
-                        <a:rPr lang="en"/>
-                        <a:t>16 GB</a:t>
-                      </a:r>
-                    </a:p>
-                  </a:txBody>
-                  <a:tcPr anchor="ctr"/>
-                </a:tc>
-                <a:tc>
-                  <a:txBody>
-                    <a:bodyPr/>
-                    <a:lstStyle/>
-                    <a:p>
-                      <a:pPr>
-                        <a:buNone/>
-                      </a:pPr>
-                      <a:r>
-                        <a:rPr lang="en"/>
-                        <a:t>500 GB</a:t>
-                      </a:r>
-                    </a:p>
-                  </a:txBody>
-                  <a:tcPr anchor="ctr"/>
-                </a:tc>
-                <a:tc>
-                  <a:txBody>
-                    <a:bodyPr/>
-                    <a:lstStyle/>
-                    <a:p>
-                      <a:pPr>
-                        <a:buNone/>
-                      </a:pPr>
-                      <a:r>
-                        <a:rPr lang="en" sz="1400" dirty="0"/>
-                        <a:t>MongoDB replica set member</a:t>
-                      </a:r>
-                      <a:endParaRPr lang="en" sz="1400" dirty="0">
-                        <a:latin typeface="Microsoft JhengHei" panose="020B0604030504040204" pitchFamily="34" charset="-120"/>
-                        <a:ea typeface="Microsoft JhengHei" panose="020B0604030504040204" pitchFamily="34" charset="-120"/>
-                      </a:endParaRPr>
-                    </a:p>
-                  </a:txBody>
-                  <a:tcPr anchor="ctr"/>
-                </a:tc>
-                <a:tc>
-                  <a:txBody>
-                    <a:bodyPr/>
-                    <a:lstStyle/>
-                    <a:p>
-                      <a:pPr>
-                        <a:buNone/>
-                      </a:pPr>
-                      <a:r>
-                        <a:rPr lang="en" sz="1400" dirty="0"/>
-                        <a:t>secondary</a:t>
-                      </a:r>
-                      <a:endParaRPr lang="en" sz="1400" dirty="0">
-                        <a:latin typeface="Microsoft JhengHei" panose="020B0604030504040204" pitchFamily="34" charset="-120"/>
-                        <a:ea typeface="Microsoft JhengHei" panose="020B0604030504040204" pitchFamily="34" charset="-120"/>
-                      </a:endParaRPr>
-                    </a:p>
-                  </a:txBody>
-                  <a:tcPr anchor="ctr"/>
-                </a:tc>
-                <a:extLst>
-                  <a:ext uri="{0D108BD9-81ED-4DB2-BD59-A6C34878D82A}">
-                    <a16:rowId xmlns:a16="http://schemas.microsoft.com/office/drawing/2014/main" val="1648244485"/>
-                  </a:ext>
-                </a:extLst>
-              </a:tr>
-              <a:tr h="363331">
-                <a:tc>
-                  <a:txBody>
-                    <a:bodyPr/>
-                    <a:lstStyle/>
-                    <a:p>
-                      <a:pPr>
-                        <a:buNone/>
-                      </a:pPr>
-                      <a:r>
-                        <a:rPr lang="en" sz="1400" dirty="0">
-                          <a:latin typeface="Consolas" panose="020B0609020204030204" pitchFamily="49" charset="0"/>
-                          <a:cs typeface="Consolas" panose="020B0609020204030204" pitchFamily="49" charset="0"/>
-                        </a:rPr>
-                        <a:t>infogather-prod-redis-01</a:t>
-                      </a:r>
-                      <a:endParaRPr lang="en" sz="1400" dirty="0">
-                        <a:latin typeface="Consolas" panose="020B0609020204030204" pitchFamily="49" charset="0"/>
-                        <a:ea typeface="Microsoft JhengHei" panose="020B0604030504040204" pitchFamily="34" charset="-120"/>
-                        <a:cs typeface="Consolas" panose="020B0609020204030204" pitchFamily="49" charset="0"/>
-                      </a:endParaRPr>
-                    </a:p>
-                  </a:txBody>
-                  <a:tcPr anchor="ctr"/>
-                </a:tc>
-                <a:tc>
-                  <a:txBody>
-                    <a:bodyPr/>
-                    <a:lstStyle/>
-                    <a:p>
-                      <a:pPr>
-                        <a:buNone/>
-                      </a:pPr>
-                      <a:r>
-                        <a:rPr lang="en"/>
-                        <a:t>2 vCPU</a:t>
-                      </a:r>
-                    </a:p>
-                  </a:txBody>
-                  <a:tcPr anchor="ctr"/>
-                </a:tc>
-                <a:tc>
-                  <a:txBody>
-                    <a:bodyPr/>
-                    <a:lstStyle/>
-                    <a:p>
-                      <a:pPr>
-                        <a:buNone/>
-                      </a:pPr>
-                      <a:r>
-                        <a:rPr lang="en"/>
-                        <a:t>8 GB</a:t>
-                      </a:r>
-                    </a:p>
-                  </a:txBody>
-                  <a:tcPr anchor="ctr"/>
-                </a:tc>
-                <a:tc>
-                  <a:txBody>
-                    <a:bodyPr/>
-                    <a:lstStyle/>
-                    <a:p>
-                      <a:pPr>
-                        <a:buNone/>
-                      </a:pPr>
-                      <a:r>
-                        <a:rPr lang="en"/>
-                        <a:t>100 GB</a:t>
-                      </a:r>
-                    </a:p>
-                  </a:txBody>
-                  <a:tcPr anchor="ctr"/>
-                </a:tc>
-                <a:tc>
-                  <a:txBody>
-                    <a:bodyPr/>
-                    <a:lstStyle/>
-                    <a:p>
-                      <a:pPr>
-                        <a:buNone/>
-                      </a:pPr>
-                      <a:r>
-                        <a:rPr lang="en" sz="1400"/>
-                        <a:t>Redis server、Sentinel</a:t>
-                      </a:r>
-                      <a:endParaRPr lang="en" sz="1400">
-                        <a:latin typeface="Microsoft JhengHei" panose="020B0604030504040204" pitchFamily="34" charset="-120"/>
-                        <a:ea typeface="Microsoft JhengHei" panose="020B0604030504040204" pitchFamily="34" charset="-120"/>
-                      </a:endParaRPr>
-                    </a:p>
-                  </a:txBody>
-                  <a:tcPr anchor="ctr"/>
-                </a:tc>
-                <a:tc>
-                  <a:txBody>
-                    <a:bodyPr/>
-                    <a:lstStyle/>
-                    <a:p>
-                      <a:pPr>
-                        <a:buNone/>
-                      </a:pPr>
-                      <a:r>
-                        <a:rPr lang="en" sz="1400" dirty="0"/>
-                        <a:t>primary candidate</a:t>
-                      </a:r>
-                      <a:endParaRPr lang="en" sz="1400" dirty="0">
-                        <a:latin typeface="Microsoft JhengHei" panose="020B0604030504040204" pitchFamily="34" charset="-120"/>
-                        <a:ea typeface="Microsoft JhengHei" panose="020B0604030504040204" pitchFamily="34" charset="-120"/>
-                      </a:endParaRPr>
-                    </a:p>
-                  </a:txBody>
-                  <a:tcPr anchor="ctr"/>
-                </a:tc>
-                <a:extLst>
-                  <a:ext uri="{0D108BD9-81ED-4DB2-BD59-A6C34878D82A}">
-                    <a16:rowId xmlns:a16="http://schemas.microsoft.com/office/drawing/2014/main" val="3474832487"/>
-                  </a:ext>
-                </a:extLst>
-              </a:tr>
-              <a:tr h="363331">
-                <a:tc>
-                  <a:txBody>
-                    <a:bodyPr/>
-                    <a:lstStyle/>
-                    <a:p>
-                      <a:pPr>
-                        <a:buNone/>
-                      </a:pPr>
-                      <a:r>
-                        <a:rPr lang="en" sz="1400" dirty="0">
-                          <a:latin typeface="Consolas" panose="020B0609020204030204" pitchFamily="49" charset="0"/>
-                          <a:cs typeface="Consolas" panose="020B0609020204030204" pitchFamily="49" charset="0"/>
-                        </a:rPr>
-                        <a:t>infogather-prod-redis-02</a:t>
-                      </a:r>
-                      <a:endParaRPr lang="en" sz="1400" dirty="0">
-                        <a:latin typeface="Consolas" panose="020B0609020204030204" pitchFamily="49" charset="0"/>
-                        <a:ea typeface="Microsoft JhengHei" panose="020B0604030504040204" pitchFamily="34" charset="-120"/>
-                        <a:cs typeface="Consolas" panose="020B0609020204030204" pitchFamily="49" charset="0"/>
-                      </a:endParaRPr>
-                    </a:p>
-                  </a:txBody>
-                  <a:tcPr anchor="ctr"/>
-                </a:tc>
-                <a:tc>
-                  <a:txBody>
-                    <a:bodyPr/>
-                    <a:lstStyle/>
-                    <a:p>
-                      <a:pPr>
-                        <a:buNone/>
-                      </a:pPr>
-                      <a:r>
-                        <a:rPr lang="en"/>
-                        <a:t>2 vCPU</a:t>
-                      </a:r>
-                    </a:p>
-                  </a:txBody>
-                  <a:tcPr anchor="ctr"/>
-                </a:tc>
-                <a:tc>
-                  <a:txBody>
-                    <a:bodyPr/>
-                    <a:lstStyle/>
-                    <a:p>
-                      <a:pPr>
-                        <a:buNone/>
-                      </a:pPr>
-                      <a:r>
-                        <a:rPr lang="en"/>
-                        <a:t>8 GB</a:t>
-                      </a:r>
-                    </a:p>
-                  </a:txBody>
-                  <a:tcPr anchor="ctr"/>
-                </a:tc>
-                <a:tc>
-                  <a:txBody>
-                    <a:bodyPr/>
-                    <a:lstStyle/>
-                    <a:p>
-                      <a:pPr>
-                        <a:buNone/>
-                      </a:pPr>
-                      <a:r>
-                        <a:rPr lang="en"/>
-                        <a:t>100 GB</a:t>
-                      </a:r>
-                    </a:p>
-                  </a:txBody>
-                  <a:tcPr anchor="ctr"/>
-                </a:tc>
-                <a:tc>
-                  <a:txBody>
-                    <a:bodyPr/>
-                    <a:lstStyle/>
-                    <a:p>
-                      <a:pPr>
-                        <a:buNone/>
-                      </a:pPr>
-                      <a:r>
-                        <a:rPr lang="en" sz="1400"/>
-                        <a:t>Redis server、Sentinel</a:t>
-                      </a:r>
-                      <a:endParaRPr lang="en" sz="1400">
-                        <a:latin typeface="Microsoft JhengHei" panose="020B0604030504040204" pitchFamily="34" charset="-120"/>
-                        <a:ea typeface="Microsoft JhengHei" panose="020B0604030504040204" pitchFamily="34" charset="-120"/>
-                      </a:endParaRPr>
-                    </a:p>
-                  </a:txBody>
-                  <a:tcPr anchor="ctr"/>
-                </a:tc>
-                <a:tc>
-                  <a:txBody>
-                    <a:bodyPr/>
-                    <a:lstStyle/>
-                    <a:p>
-                      <a:pPr>
-                        <a:buNone/>
-                      </a:pPr>
-                      <a:r>
-                        <a:rPr lang="en" sz="1400" dirty="0"/>
-                        <a:t>replica</a:t>
-                      </a:r>
-                      <a:endParaRPr lang="en" sz="1400" dirty="0">
-                        <a:latin typeface="Microsoft JhengHei" panose="020B0604030504040204" pitchFamily="34" charset="-120"/>
-                        <a:ea typeface="Microsoft JhengHei" panose="020B0604030504040204" pitchFamily="34" charset="-120"/>
-                      </a:endParaRPr>
-                    </a:p>
-                  </a:txBody>
-                  <a:tcPr anchor="ctr"/>
-                </a:tc>
-                <a:extLst>
-                  <a:ext uri="{0D108BD9-81ED-4DB2-BD59-A6C34878D82A}">
-                    <a16:rowId xmlns:a16="http://schemas.microsoft.com/office/drawing/2014/main" val="1719398601"/>
-                  </a:ext>
-                </a:extLst>
-              </a:tr>
-              <a:tr h="363331">
-                <a:tc>
-                  <a:txBody>
-                    <a:bodyPr/>
-                    <a:lstStyle/>
-                    <a:p>
-                      <a:pPr>
-                        <a:buNone/>
-                      </a:pPr>
-                      <a:r>
-                        <a:rPr lang="en" sz="1400" dirty="0">
-                          <a:latin typeface="Consolas" panose="020B0609020204030204" pitchFamily="49" charset="0"/>
-                          <a:cs typeface="Consolas" panose="020B0609020204030204" pitchFamily="49" charset="0"/>
-                        </a:rPr>
-                        <a:t>infogather-prod-redis-03</a:t>
-                      </a:r>
-                      <a:endParaRPr lang="en" sz="1400" dirty="0">
-                        <a:latin typeface="Consolas" panose="020B0609020204030204" pitchFamily="49" charset="0"/>
-                        <a:ea typeface="Microsoft JhengHei" panose="020B0604030504040204" pitchFamily="34" charset="-120"/>
-                        <a:cs typeface="Consolas" panose="020B0609020204030204" pitchFamily="49" charset="0"/>
-                      </a:endParaRPr>
-                    </a:p>
-                  </a:txBody>
-                  <a:tcPr anchor="ctr"/>
-                </a:tc>
-                <a:tc>
-                  <a:txBody>
-                    <a:bodyPr/>
-                    <a:lstStyle/>
-                    <a:p>
-                      <a:pPr>
-                        <a:buNone/>
-                      </a:pPr>
-                      <a:r>
-                        <a:rPr lang="en"/>
-                        <a:t>2 vCPU</a:t>
-                      </a:r>
-                    </a:p>
-                  </a:txBody>
-                  <a:tcPr anchor="ctr"/>
-                </a:tc>
-                <a:tc>
-                  <a:txBody>
-                    <a:bodyPr/>
-                    <a:lstStyle/>
-                    <a:p>
-                      <a:pPr>
-                        <a:buNone/>
-                      </a:pPr>
-                      <a:r>
-                        <a:rPr lang="en"/>
-                        <a:t>8 GB</a:t>
-                      </a:r>
-                    </a:p>
-                  </a:txBody>
-                  <a:tcPr anchor="ctr"/>
-                </a:tc>
-                <a:tc>
-                  <a:txBody>
-                    <a:bodyPr/>
-                    <a:lstStyle/>
-                    <a:p>
-                      <a:pPr>
-                        <a:buNone/>
-                      </a:pPr>
-                      <a:r>
-                        <a:rPr lang="en"/>
-                        <a:t>100 GB</a:t>
-                      </a:r>
-                    </a:p>
-                  </a:txBody>
-                  <a:tcPr anchor="ctr"/>
-                </a:tc>
-                <a:tc>
-                  <a:txBody>
-                    <a:bodyPr/>
-                    <a:lstStyle/>
-                    <a:p>
-                      <a:pPr>
-                        <a:buNone/>
-                      </a:pPr>
-                      <a:r>
-                        <a:rPr lang="en" sz="1400" dirty="0"/>
-                        <a:t>Redis </a:t>
-                      </a:r>
-                      <a:r>
-                        <a:rPr lang="en" sz="1400" dirty="0" err="1"/>
-                        <a:t>server、Sentinel</a:t>
-                      </a:r>
-                      <a:endParaRPr lang="en" sz="1400" dirty="0">
-                        <a:latin typeface="Microsoft JhengHei" panose="020B0604030504040204" pitchFamily="34" charset="-120"/>
-                        <a:ea typeface="Microsoft JhengHei" panose="020B0604030504040204" pitchFamily="34" charset="-120"/>
-                      </a:endParaRPr>
-                    </a:p>
-                  </a:txBody>
-                  <a:tcPr anchor="ctr"/>
-                </a:tc>
-                <a:tc>
-                  <a:txBody>
-                    <a:bodyPr/>
-                    <a:lstStyle/>
-                    <a:p>
-                      <a:pPr>
-                        <a:buNone/>
-                      </a:pPr>
-                      <a:r>
-                        <a:rPr lang="en" sz="1400" dirty="0"/>
-                        <a:t>replica</a:t>
-                      </a:r>
-                      <a:endParaRPr lang="en" sz="1400" dirty="0">
-                        <a:latin typeface="Microsoft JhengHei" panose="020B0604030504040204" pitchFamily="34" charset="-120"/>
-                        <a:ea typeface="Microsoft JhengHei" panose="020B0604030504040204" pitchFamily="34" charset="-120"/>
-                      </a:endParaRPr>
-                    </a:p>
-                  </a:txBody>
-                  <a:tcPr anchor="ctr"/>
-                </a:tc>
-                <a:extLst>
-                  <a:ext uri="{0D108BD9-81ED-4DB2-BD59-A6C34878D82A}">
-                    <a16:rowId xmlns:a16="http://schemas.microsoft.com/office/drawing/2014/main" val="1353108866"/>
-                  </a:ext>
-                </a:extLst>
-              </a:tr>
-              <a:tr h="363331">
-                <a:tc>
-                  <a:txBody>
-                    <a:bodyPr/>
-                    <a:lstStyle/>
-                    <a:p>
-                      <a:pPr>
-                        <a:buNone/>
-                      </a:pPr>
-                      <a:r>
-                        <a:rPr lang="en" sz="1400" dirty="0">
-                          <a:latin typeface="Consolas" panose="020B0609020204030204" pitchFamily="49" charset="0"/>
-                          <a:cs typeface="Consolas" panose="020B0609020204030204" pitchFamily="49" charset="0"/>
-                        </a:rPr>
-                        <a:t>infogather-prod-copilot-01</a:t>
-                      </a:r>
-                      <a:endParaRPr lang="en" sz="1400" dirty="0">
-                        <a:latin typeface="Consolas" panose="020B0609020204030204" pitchFamily="49" charset="0"/>
-                        <a:ea typeface="Microsoft JhengHei" panose="020B0604030504040204" pitchFamily="34" charset="-120"/>
-                        <a:cs typeface="Consolas" panose="020B0609020204030204" pitchFamily="49" charset="0"/>
-                      </a:endParaRPr>
-                    </a:p>
-                  </a:txBody>
-                  <a:tcPr anchor="ctr"/>
-                </a:tc>
-                <a:tc>
-                  <a:txBody>
-                    <a:bodyPr/>
-                    <a:lstStyle/>
-                    <a:p>
-                      <a:pPr>
-                        <a:buNone/>
-                      </a:pPr>
-                      <a:r>
-                        <a:rPr lang="en"/>
-                        <a:t>2 vCPU</a:t>
-                      </a:r>
-                    </a:p>
-                  </a:txBody>
-                  <a:tcPr anchor="ctr"/>
-                </a:tc>
-                <a:tc>
-                  <a:txBody>
-                    <a:bodyPr/>
-                    <a:lstStyle/>
-                    <a:p>
-                      <a:pPr>
-                        <a:buNone/>
-                      </a:pPr>
-                      <a:r>
-                        <a:rPr lang="en"/>
-                        <a:t>4 GB</a:t>
-                      </a:r>
-                    </a:p>
-                  </a:txBody>
-                  <a:tcPr anchor="ctr"/>
-                </a:tc>
-                <a:tc>
-                  <a:txBody>
-                    <a:bodyPr/>
-                    <a:lstStyle/>
-                    <a:p>
-                      <a:pPr>
-                        <a:buNone/>
-                      </a:pPr>
-                      <a:r>
-                        <a:rPr lang="en"/>
-                        <a:t>60 GB</a:t>
-                      </a:r>
-                    </a:p>
-                  </a:txBody>
-                  <a:tcPr anchor="ctr"/>
-                </a:tc>
-                <a:tc>
-                  <a:txBody>
-                    <a:bodyPr/>
-                    <a:lstStyle/>
-                    <a:p>
-                      <a:pPr>
-                        <a:buNone/>
-                      </a:pPr>
-                      <a:r>
-                        <a:rPr lang="en" sz="1400" dirty="0"/>
-                        <a:t>Copilot CLI server</a:t>
-                      </a:r>
-                      <a:endParaRPr lang="en" sz="1400" dirty="0">
-                        <a:latin typeface="Microsoft JhengHei" panose="020B0604030504040204" pitchFamily="34" charset="-120"/>
-                        <a:ea typeface="Microsoft JhengHei" panose="020B0604030504040204" pitchFamily="34" charset="-120"/>
-                      </a:endParaRPr>
-                    </a:p>
-                  </a:txBody>
-                  <a:tcPr anchor="ctr"/>
-                </a:tc>
-                <a:tc>
-                  <a:txBody>
-                    <a:bodyPr/>
-                    <a:lstStyle/>
-                    <a:p>
-                      <a:pPr>
-                        <a:buNone/>
-                      </a:pPr>
-                      <a:r>
-                        <a:rPr lang="en" sz="1400" dirty="0"/>
-                        <a:t>Agent / LLM runtime </a:t>
-                      </a:r>
-                      <a:r>
-                        <a:rPr lang="zh-TW" altLang="en-US" sz="1400" dirty="0"/>
-                        <a:t>節點</a:t>
-                      </a:r>
-                      <a:endParaRPr lang="zh-TW" altLang="en-US" sz="1400" dirty="0">
-                        <a:latin typeface="Microsoft JhengHei" panose="020B0604030504040204" pitchFamily="34" charset="-120"/>
-                        <a:ea typeface="Microsoft JhengHei" panose="020B0604030504040204" pitchFamily="34" charset="-120"/>
-                      </a:endParaRPr>
-                    </a:p>
-                  </a:txBody>
-                  <a:tcPr anchor="ctr"/>
-                </a:tc>
-                <a:extLst>
-                  <a:ext uri="{0D108BD9-81ED-4DB2-BD59-A6C34878D82A}">
-                    <a16:rowId xmlns:a16="http://schemas.microsoft.com/office/drawing/2014/main" val="3175800829"/>
-                  </a:ext>
-                </a:extLst>
-              </a:tr>
-              <a:tr h="363331">
-                <a:tc>
-                  <a:txBody>
-                    <a:bodyPr/>
-                    <a:lstStyle/>
-                    <a:p>
-                      <a:pPr>
-                        <a:buNone/>
-                      </a:pPr>
-                      <a:r>
-                        <a:rPr lang="en" sz="1400" dirty="0">
-                          <a:latin typeface="Consolas" panose="020B0609020204030204" pitchFamily="49" charset="0"/>
-                          <a:cs typeface="Consolas" panose="020B0609020204030204" pitchFamily="49" charset="0"/>
-                        </a:rPr>
-                        <a:t>infogather-prod-ops-01</a:t>
-                      </a:r>
-                      <a:endParaRPr lang="en" sz="1400" dirty="0">
-                        <a:latin typeface="Consolas" panose="020B0609020204030204" pitchFamily="49" charset="0"/>
-                        <a:ea typeface="Microsoft JhengHei" panose="020B0604030504040204" pitchFamily="34" charset="-120"/>
-                        <a:cs typeface="Consolas" panose="020B0609020204030204" pitchFamily="49" charset="0"/>
-                      </a:endParaRPr>
-                    </a:p>
-                  </a:txBody>
-                  <a:tcPr anchor="ctr"/>
-                </a:tc>
-                <a:tc>
-                  <a:txBody>
-                    <a:bodyPr/>
-                    <a:lstStyle/>
-                    <a:p>
-                      <a:pPr>
-                        <a:buNone/>
-                      </a:pPr>
-                      <a:r>
-                        <a:rPr lang="en"/>
-                        <a:t>4 vCPU</a:t>
-                      </a:r>
-                    </a:p>
-                  </a:txBody>
-                  <a:tcPr anchor="ctr"/>
-                </a:tc>
-                <a:tc>
-                  <a:txBody>
-                    <a:bodyPr/>
-                    <a:lstStyle/>
-                    <a:p>
-                      <a:pPr>
-                        <a:buNone/>
-                      </a:pPr>
-                      <a:r>
-                        <a:rPr lang="en"/>
-                        <a:t>8 GB</a:t>
-                      </a:r>
-                    </a:p>
-                  </a:txBody>
-                  <a:tcPr anchor="ctr"/>
-                </a:tc>
-                <a:tc>
-                  <a:txBody>
-                    <a:bodyPr/>
-                    <a:lstStyle/>
-                    <a:p>
-                      <a:pPr>
-                        <a:buNone/>
-                      </a:pPr>
-                      <a:r>
-                        <a:rPr lang="en" dirty="0"/>
-                        <a:t>200 GB</a:t>
-                      </a:r>
-                    </a:p>
-                  </a:txBody>
-                  <a:tcPr anchor="ctr"/>
-                </a:tc>
-                <a:tc>
-                  <a:txBody>
-                    <a:bodyPr/>
-                    <a:lstStyle/>
-                    <a:p>
-                      <a:pPr>
-                        <a:buNone/>
-                      </a:pPr>
-                      <a:r>
-                        <a:rPr lang="en" sz="1400" dirty="0" err="1"/>
-                        <a:t>Prometheus、Grafana、operations</a:t>
-                      </a:r>
-                      <a:r>
-                        <a:rPr lang="en" sz="1400" dirty="0"/>
-                        <a:t> tools</a:t>
-                      </a:r>
-                      <a:endParaRPr lang="en" sz="1400" dirty="0">
-                        <a:latin typeface="Microsoft JhengHei" panose="020B0604030504040204" pitchFamily="34" charset="-120"/>
-                        <a:ea typeface="Microsoft JhengHei" panose="020B0604030504040204" pitchFamily="34" charset="-120"/>
-                      </a:endParaRPr>
-                    </a:p>
-                  </a:txBody>
-                  <a:tcPr anchor="ctr"/>
-                </a:tc>
-                <a:tc>
-                  <a:txBody>
-                    <a:bodyPr/>
-                    <a:lstStyle/>
-                    <a:p>
-                      <a:pPr>
-                        <a:buNone/>
-                      </a:pPr>
-                      <a:r>
-                        <a:rPr lang="zh-TW" altLang="en-US" sz="1400" dirty="0"/>
-                        <a:t>正式環境監控與維運控制節點</a:t>
-                      </a:r>
-                      <a:endParaRPr lang="zh-TW" altLang="en-US" sz="1400" dirty="0">
-                        <a:latin typeface="Microsoft JhengHei" panose="020B0604030504040204" pitchFamily="34" charset="-120"/>
-                        <a:ea typeface="Microsoft JhengHei" panose="020B0604030504040204" pitchFamily="34" charset="-120"/>
-                      </a:endParaRPr>
-                    </a:p>
-                  </a:txBody>
-                  <a:tcPr anchor="ctr"/>
-                </a:tc>
-                <a:extLst>
-                  <a:ext uri="{0D108BD9-81ED-4DB2-BD59-A6C34878D82A}">
-                    <a16:rowId xmlns:a16="http://schemas.microsoft.com/office/drawing/2014/main" val="1664710146"/>
-                  </a:ext>
-                </a:extLst>
-              </a:tr>
-            </a:tbl>
-          </a:graphicData>
-        </a:graphic>
-      </p:graphicFrame>
-    </p:spTree>
-    <p:extLst>
-      <p:ext uri="{BB962C8B-B14F-4D97-AF65-F5344CB8AC3E}">
-        <p14:creationId xmlns:p14="http://schemas.microsoft.com/office/powerpoint/2010/main" val="381932011"/>
-      </p:ext>
-    </p:extLst>
-  </p:cSld>
-  <p:clrMapOvr>
-    <a:masterClrMapping/>
-  </p:clrMapOvr>
-</p:sld>
-</file>
-
-<file path=ppt/slides/slide5.xml><?xml version="1.0" encoding="utf-8"?>
 <p:sld xmlns:a="http://schemas.openxmlformats.org/drawingml/2006/main" xmlns:r="http://schemas.openxmlformats.org/officeDocument/2006/relationships" xmlns:p="http://schemas.openxmlformats.org/presentationml/2006/main">
   <p:cSld>
     <p:spTree>
@@ -18161,7 +14653,7 @@
 </p:sld>
 </file>
 
-<file path=ppt/slides/slide6.xml><?xml version="1.0" encoding="utf-8"?>
+<file path=ppt/slides/slide5.xml><?xml version="1.0" encoding="utf-8"?>
 <p:sld xmlns:a="http://schemas.openxmlformats.org/drawingml/2006/main" xmlns:r="http://schemas.openxmlformats.org/officeDocument/2006/relationships" xmlns:p="http://schemas.openxmlformats.org/presentationml/2006/main">
   <p:cSld>
     <p:spTree>
@@ -18211,7 +14703,7 @@
             </a:r>
             <a:r>
               <a:rPr lang="zh-TW" altLang="en-US" b="1" dirty="0"/>
-              <a:t>測試環境配置</a:t>
+              <a:t>環境部署規劃</a:t>
             </a:r>
             <a:endParaRPr lang="zh-TW" altLang="en-US" dirty="0"/>
           </a:p>
@@ -18289,10 +14781,10 @@
       </p:sp>
       <p:graphicFrame>
         <p:nvGraphicFramePr>
-          <p:cNvPr id="2" name="表格 1">
+          <p:cNvPr id="4" name="表格 3">
             <a:extLst>
               <a:ext uri="{FF2B5EF4-FFF2-40B4-BE49-F238E27FC236}">
-                <a16:creationId xmlns:a16="http://schemas.microsoft.com/office/drawing/2014/main" id="{CE8CC8BE-B4A4-5C4E-E50C-E5E10C10FEC4}"/>
+                <a16:creationId xmlns:a16="http://schemas.microsoft.com/office/drawing/2014/main" id="{857D0040-85B5-BA3C-E888-AC94363694A4}"/>
               </a:ext>
             </a:extLst>
           </p:cNvPr>
@@ -18302,14 +14794,14 @@
           <p:nvPr>
             <p:extLst>
               <p:ext uri="{D42A27DB-BD31-4B8C-83A1-F6EECF244321}">
-                <p14:modId xmlns:p14="http://schemas.microsoft.com/office/powerpoint/2010/main" val="3000966339"/>
+                <p14:modId xmlns:p14="http://schemas.microsoft.com/office/powerpoint/2010/main" val="1861292669"/>
               </p:ext>
             </p:extLst>
           </p:nvPr>
         </p:nvGraphicFramePr>
         <p:xfrm>
-          <a:off x="179388" y="826714"/>
-          <a:ext cx="11161712" cy="4349979"/>
+          <a:off x="270244" y="848151"/>
+          <a:ext cx="10980000" cy="4994144"/>
         </p:xfrm>
         <a:graphic>
           <a:graphicData uri="http://schemas.openxmlformats.org/drawingml/2006/table">
@@ -18318,29 +14810,36 @@
                 <a:tableStyleId>{91DB7C30-2B5D-4D34-8F22-85940E495A18}</a:tableStyleId>
               </a:tblPr>
               <a:tblGrid>
-                <a:gridCol w="2095338">
+                <a:gridCol w="1620000">
                   <a:extLst>
                     <a:ext uri="{9D8B030D-6E8A-4147-A177-3AD203B41FA5}">
-                      <a16:colId xmlns:a16="http://schemas.microsoft.com/office/drawing/2014/main" val="1199597028"/>
+                      <a16:colId xmlns:a16="http://schemas.microsoft.com/office/drawing/2014/main" val="3681974681"/>
                     </a:ext>
                   </a:extLst>
                 </a:gridCol>
-                <a:gridCol w="3376283">
+                <a:gridCol w="3060000">
                   <a:extLst>
                     <a:ext uri="{9D8B030D-6E8A-4147-A177-3AD203B41FA5}">
-                      <a16:colId xmlns:a16="http://schemas.microsoft.com/office/drawing/2014/main" val="3760430905"/>
+                      <a16:colId xmlns:a16="http://schemas.microsoft.com/office/drawing/2014/main" val="4115335333"/>
                     </a:ext>
                   </a:extLst>
                 </a:gridCol>
-                <a:gridCol w="5690091">
+                <a:gridCol w="3060000">
                   <a:extLst>
                     <a:ext uri="{9D8B030D-6E8A-4147-A177-3AD203B41FA5}">
-                      <a16:colId xmlns:a16="http://schemas.microsoft.com/office/drawing/2014/main" val="939028161"/>
+                      <a16:colId xmlns:a16="http://schemas.microsoft.com/office/drawing/2014/main" val="1719324340"/>
+                    </a:ext>
+                  </a:extLst>
+                </a:gridCol>
+                <a:gridCol w="3240000">
+                  <a:extLst>
+                    <a:ext uri="{9D8B030D-6E8A-4147-A177-3AD203B41FA5}">
+                      <a16:colId xmlns:a16="http://schemas.microsoft.com/office/drawing/2014/main" val="1938134840"/>
                     </a:ext>
                   </a:extLst>
                 </a:gridCol>
               </a:tblGrid>
-              <a:tr h="353338">
+              <a:tr h="0">
                 <a:tc>
                   <a:txBody>
                     <a:bodyPr/>
@@ -18350,15 +14849,12 @@
                         <a:buNone/>
                       </a:pPr>
                       <a:r>
-                        <a:rPr lang="zh-TW" altLang="en-US" sz="1400" dirty="0">
-                          <a:latin typeface="Microsoft JhengHei" panose="020B0604030504040204" pitchFamily="34" charset="-120"/>
-                          <a:ea typeface="Microsoft JhengHei" panose="020B0604030504040204" pitchFamily="34" charset="-120"/>
-                        </a:rPr>
+                        <a:rPr lang="zh-TW" altLang="en-US" sz="1400" dirty="0"/>
                         <a:t>元件</a:t>
                       </a:r>
                     </a:p>
                   </a:txBody>
-                  <a:tcPr anchor="ctr"/>
+                  <a:tcPr marL="82784" marR="82784" marT="41392" marB="41392" anchor="ctr"/>
                 </a:tc>
                 <a:tc>
                   <a:txBody>
@@ -18369,20 +14865,13 @@
                         <a:buNone/>
                       </a:pPr>
                       <a:r>
-                        <a:rPr lang="en-US" altLang="zh-TW" sz="1400" dirty="0"/>
-                        <a:t>Azure </a:t>
-                      </a:r>
-                      <a:r>
                         <a:rPr lang="zh-TW" altLang="en-US" sz="1400" dirty="0"/>
-                        <a:t>服務</a:t>
-                      </a:r>
-                      <a:endParaRPr lang="zh-TW" altLang="en-US" sz="1400" dirty="0">
-                        <a:latin typeface="Microsoft JhengHei" panose="020B0604030504040204" pitchFamily="34" charset="-120"/>
-                        <a:ea typeface="Microsoft JhengHei" panose="020B0604030504040204" pitchFamily="34" charset="-120"/>
-                      </a:endParaRPr>
+                        <a:t>測試環境</a:t>
+                      </a:r>
+                      <a:endParaRPr lang="en" sz="1400" dirty="0"/>
                     </a:p>
                   </a:txBody>
-                  <a:tcPr anchor="ctr"/>
+                  <a:tcPr marL="82784" marR="82784" marT="41392" marB="41392" anchor="ctr"/>
                 </a:tc>
                 <a:tc>
                   <a:txBody>
@@ -18393,43 +14882,13 @@
                         <a:buNone/>
                       </a:pPr>
                       <a:r>
-                        <a:rPr lang="zh-TW" altLang="en-US" sz="1400" dirty="0">
-                          <a:latin typeface="Microsoft JhengHei" panose="020B0604030504040204" pitchFamily="34" charset="-120"/>
-                          <a:ea typeface="Microsoft JhengHei" panose="020B0604030504040204" pitchFamily="34" charset="-120"/>
-                        </a:rPr>
-                        <a:t>規格</a:t>
-                      </a:r>
+                        <a:rPr lang="zh-TW" altLang="en-US" sz="1400" dirty="0"/>
+                        <a:t>正式環境</a:t>
+                      </a:r>
+                      <a:endParaRPr lang="en" sz="1400" dirty="0"/>
                     </a:p>
                   </a:txBody>
-                  <a:tcPr anchor="ctr"/>
-                </a:tc>
-                <a:extLst>
-                  <a:ext uri="{0D108BD9-81ED-4DB2-BD59-A6C34878D82A}">
-                    <a16:rowId xmlns:a16="http://schemas.microsoft.com/office/drawing/2014/main" val="961505403"/>
-                  </a:ext>
-                </a:extLst>
-              </a:tr>
-              <a:tr h="363331">
-                <a:tc>
-                  <a:txBody>
-                    <a:bodyPr/>
-                    <a:lstStyle/>
-                    <a:p>
-                      <a:pPr>
-                        <a:buNone/>
-                      </a:pPr>
-                      <a:r>
-                        <a:rPr lang="zh-TW" altLang="en-US" dirty="0"/>
-                        <a:t>入口</a:t>
-                      </a:r>
-                      <a:endParaRPr lang="en" sz="1400" dirty="0">
-                        <a:latin typeface="+mj-lt"/>
-                        <a:ea typeface="Microsoft JhengHei" panose="020B0604030504040204" pitchFamily="34" charset="-120"/>
-                        <a:cs typeface="Consolas" panose="020B0609020204030204" pitchFamily="49" charset="0"/>
-                      </a:endParaRPr>
-                    </a:p>
-                  </a:txBody>
-                  <a:tcPr anchor="ctr"/>
+                  <a:tcPr marL="82784" marR="82784" marT="41392" marB="41392" anchor="ctr"/>
                 </a:tc>
                 <a:tc>
                   <a:txBody>
@@ -18440,24 +14899,35 @@
                         <a:buNone/>
                       </a:pPr>
                       <a:r>
-                        <a:rPr lang="en" altLang="zh-TW" dirty="0"/>
-                        <a:t>Azure Front Door Standard </a:t>
-                      </a:r>
-                      <a:r>
-                        <a:rPr lang="zh-TW" altLang="en" dirty="0"/>
-                        <a:t>＋ </a:t>
-                      </a:r>
-                      <a:r>
-                        <a:rPr lang="en" altLang="zh-TW" dirty="0"/>
-                        <a:t>WAF</a:t>
-                      </a:r>
-                      <a:endParaRPr lang="en" sz="1400" dirty="0">
-                        <a:latin typeface="Microsoft JhengHei" panose="020B0604030504040204" pitchFamily="34" charset="-120"/>
-                        <a:ea typeface="Microsoft JhengHei" panose="020B0604030504040204" pitchFamily="34" charset="-120"/>
-                      </a:endParaRPr>
+                        <a:rPr lang="zh-TW" altLang="en-US" sz="1400" dirty="0"/>
+                        <a:t>說明</a:t>
+                      </a:r>
                     </a:p>
                   </a:txBody>
-                  <a:tcPr anchor="ctr"/>
+                  <a:tcPr marL="82784" marR="82784" marT="41392" marB="41392" anchor="ctr"/>
+                </a:tc>
+                <a:extLst>
+                  <a:ext uri="{0D108BD9-81ED-4DB2-BD59-A6C34878D82A}">
+                    <a16:rowId xmlns:a16="http://schemas.microsoft.com/office/drawing/2014/main" val="2002802921"/>
+                  </a:ext>
+                </a:extLst>
+              </a:tr>
+              <a:tr h="522000">
+                <a:tc>
+                  <a:txBody>
+                    <a:bodyPr/>
+                    <a:lstStyle/>
+                    <a:p>
+                      <a:pPr>
+                        <a:buNone/>
+                      </a:pPr>
+                      <a:r>
+                        <a:rPr lang="zh-TW" altLang="en-US" sz="1400" dirty="0"/>
+                        <a:t>入口</a:t>
+                      </a:r>
+                    </a:p>
+                  </a:txBody>
+                  <a:tcPr marL="82784" marR="82784" marT="41392" marB="41392" anchor="ctr"/>
                 </a:tc>
                 <a:tc>
                   <a:txBody>
@@ -18468,95 +14938,12 @@
                         <a:buNone/>
                       </a:pPr>
                       <a:r>
-                        <a:rPr lang="en-US" altLang="zh-TW" sz="1400" b="0" i="0" u="none" strike="noStrike" cap="none" dirty="0">
-                          <a:solidFill>
-                            <a:srgbClr val="000000"/>
-                          </a:solidFill>
-                          <a:latin typeface="Arial"/>
-                          <a:ea typeface="Arial"/>
-                          <a:cs typeface="Arial"/>
-                          <a:sym typeface="Arial"/>
-                        </a:rPr>
-                        <a:t>1</a:t>
-                      </a:r>
-                      <a:r>
-                        <a:rPr lang="zh-TW" altLang="en-US" dirty="0"/>
-                        <a:t> 組 </a:t>
-                      </a:r>
-                      <a:r>
-                        <a:rPr lang="en" altLang="zh-TW" dirty="0"/>
-                        <a:t>endpoint</a:t>
-                      </a:r>
-                      <a:r>
-                        <a:rPr lang="zh-TW" altLang="en" dirty="0"/>
-                        <a:t>，</a:t>
-                      </a:r>
-                      <a:r>
-                        <a:rPr lang="en" altLang="zh-TW" sz="1400" b="0" i="0" u="none" strike="noStrike" cap="none" dirty="0">
-                          <a:solidFill>
-                            <a:srgbClr val="000000"/>
-                          </a:solidFill>
-                          <a:latin typeface="Arial"/>
-                          <a:ea typeface="Arial"/>
-                          <a:cs typeface="Arial"/>
-                          <a:sym typeface="Arial"/>
-                        </a:rPr>
-                        <a:t>1</a:t>
-                      </a:r>
-                      <a:r>
-                        <a:rPr lang="en" altLang="zh-TW" dirty="0"/>
-                        <a:t> </a:t>
-                      </a:r>
-                      <a:r>
-                        <a:rPr lang="zh-TW" altLang="en-US" dirty="0"/>
-                        <a:t>個 </a:t>
-                      </a:r>
-                      <a:r>
-                        <a:rPr lang="en" altLang="zh-TW" dirty="0"/>
-                        <a:t>backend pool</a:t>
-                      </a:r>
-                      <a:endParaRPr lang="zh-TW" altLang="en-US" sz="1400" dirty="0">
-                        <a:latin typeface="Microsoft JhengHei" panose="020B0604030504040204" pitchFamily="34" charset="-120"/>
-                        <a:ea typeface="Microsoft JhengHei" panose="020B0604030504040204" pitchFamily="34" charset="-120"/>
-                      </a:endParaRPr>
+                        <a:rPr lang="en" sz="1400" dirty="0"/>
+                        <a:t>Front Door Standard ＋ WAF</a:t>
+                      </a:r>
                     </a:p>
                   </a:txBody>
-                  <a:tcPr anchor="ctr"/>
-                </a:tc>
-                <a:extLst>
-                  <a:ext uri="{0D108BD9-81ED-4DB2-BD59-A6C34878D82A}">
-                    <a16:rowId xmlns:a16="http://schemas.microsoft.com/office/drawing/2014/main" val="1506681514"/>
-                  </a:ext>
-                </a:extLst>
-              </a:tr>
-              <a:tr h="363331">
-                <a:tc>
-                  <a:txBody>
-                    <a:bodyPr/>
-                    <a:lstStyle/>
-                    <a:p>
-                      <a:pPr>
-                        <a:buNone/>
-                      </a:pPr>
-                      <a:r>
-                        <a:rPr lang="en" sz="1400" dirty="0" err="1">
-                          <a:latin typeface="+mj-lt"/>
-                          <a:ea typeface="Microsoft JhengHei" panose="020B0604030504040204" pitchFamily="34" charset="-120"/>
-                          <a:cs typeface="Consolas" panose="020B0609020204030204" pitchFamily="49" charset="0"/>
-                        </a:rPr>
-                        <a:t>InfoGather</a:t>
-                      </a:r>
-                      <a:r>
-                        <a:rPr lang="en" sz="1400" dirty="0">
-                          <a:latin typeface="+mj-lt"/>
-                          <a:ea typeface="Microsoft JhengHei" panose="020B0604030504040204" pitchFamily="34" charset="-120"/>
-                          <a:cs typeface="Consolas" panose="020B0609020204030204" pitchFamily="49" charset="0"/>
-                        </a:rPr>
-                        <a:t> App</a:t>
-                      </a:r>
-                    </a:p>
-                  </a:txBody>
-                  <a:tcPr anchor="ctr"/>
+                  <a:tcPr marL="82784" marR="82784" marT="41392" marB="41392" anchor="ctr"/>
                 </a:tc>
                 <a:tc>
                   <a:txBody>
@@ -18567,16 +14954,12 @@
                         <a:buNone/>
                       </a:pPr>
                       <a:r>
-                        <a:rPr lang="en" altLang="zh-TW" dirty="0"/>
-                        <a:t>Azure Container Apps</a:t>
-                      </a:r>
-                      <a:endParaRPr lang="en" sz="1400" dirty="0">
-                        <a:latin typeface="Microsoft JhengHei" panose="020B0604030504040204" pitchFamily="34" charset="-120"/>
-                        <a:ea typeface="Microsoft JhengHei" panose="020B0604030504040204" pitchFamily="34" charset="-120"/>
-                      </a:endParaRPr>
+                        <a:rPr lang="en" sz="1400"/>
+                        <a:t>Front Door Premium ＋ WAF</a:t>
+                      </a:r>
                     </a:p>
                   </a:txBody>
-                  <a:tcPr anchor="ctr"/>
+                  <a:tcPr marL="82784" marR="82784" marT="41392" marB="41392" anchor="ctr"/>
                 </a:tc>
                 <a:tc>
                   <a:txBody>
@@ -18587,104 +14970,25 @@
                         <a:buNone/>
                       </a:pPr>
                       <a:r>
-                        <a:rPr lang="zh-TW" altLang="en-US" dirty="0"/>
-                        <a:t>每個 </a:t>
-                      </a:r>
-                      <a:r>
-                        <a:rPr lang="en" altLang="zh-TW" dirty="0"/>
-                        <a:t>replica </a:t>
-                      </a:r>
-                      <a:r>
-                        <a:rPr lang="en" altLang="zh-TW" sz="1400" b="0" i="0" u="none" strike="noStrike" cap="none" dirty="0">
-                          <a:solidFill>
-                            <a:srgbClr val="000000"/>
-                          </a:solidFill>
-                          <a:latin typeface="Arial"/>
-                          <a:ea typeface="Arial"/>
-                          <a:cs typeface="Arial"/>
-                          <a:sym typeface="Arial"/>
-                        </a:rPr>
-                        <a:t>1 vCPU</a:t>
-                      </a:r>
-                      <a:r>
-                        <a:rPr lang="zh-TW" altLang="en" sz="1400" b="0" i="0" u="none" strike="noStrike" cap="none" dirty="0">
-                          <a:solidFill>
-                            <a:srgbClr val="000000"/>
-                          </a:solidFill>
-                          <a:latin typeface="Arial"/>
-                          <a:ea typeface="Arial"/>
-                          <a:cs typeface="Arial"/>
-                          <a:sym typeface="Arial"/>
-                        </a:rPr>
-                        <a:t>／</a:t>
-                      </a:r>
-                      <a:r>
-                        <a:rPr lang="en" altLang="zh-TW" sz="1400" b="0" i="0" u="none" strike="noStrike" cap="none" dirty="0">
-                          <a:solidFill>
-                            <a:srgbClr val="000000"/>
-                          </a:solidFill>
-                          <a:latin typeface="Arial"/>
-                          <a:ea typeface="Arial"/>
-                          <a:cs typeface="Arial"/>
-                          <a:sym typeface="Arial"/>
-                        </a:rPr>
-                        <a:t>2 GiB RAM</a:t>
-                      </a:r>
-                      <a:r>
-                        <a:rPr lang="zh-TW" altLang="en" dirty="0"/>
-                        <a:t>，</a:t>
-                      </a:r>
-                      <a:r>
-                        <a:rPr lang="en" altLang="zh-TW" sz="1400" b="0" i="0" u="none" strike="noStrike" cap="none" dirty="0">
-                          <a:solidFill>
-                            <a:srgbClr val="000000"/>
-                          </a:solidFill>
-                          <a:latin typeface="Arial"/>
-                          <a:ea typeface="Arial"/>
-                          <a:cs typeface="Arial"/>
-                          <a:sym typeface="Arial"/>
-                        </a:rPr>
-                        <a:t>min 1</a:t>
-                      </a:r>
-                      <a:r>
-                        <a:rPr lang="zh-TW" altLang="en" sz="1400" b="0" i="0" u="none" strike="noStrike" cap="none" dirty="0">
-                          <a:solidFill>
-                            <a:srgbClr val="000000"/>
-                          </a:solidFill>
-                          <a:latin typeface="Arial"/>
-                          <a:ea typeface="Arial"/>
-                          <a:cs typeface="Arial"/>
-                          <a:sym typeface="Arial"/>
-                        </a:rPr>
-                        <a:t>／</a:t>
-                      </a:r>
-                      <a:r>
-                        <a:rPr lang="en" altLang="zh-TW" sz="1400" b="0" i="0" u="none" strike="noStrike" cap="none" dirty="0">
-                          <a:solidFill>
-                            <a:srgbClr val="000000"/>
-                          </a:solidFill>
-                          <a:latin typeface="Arial"/>
-                          <a:ea typeface="Arial"/>
-                          <a:cs typeface="Arial"/>
-                          <a:sym typeface="Arial"/>
-                        </a:rPr>
-                        <a:t>max 2</a:t>
-                      </a:r>
-                      <a:endParaRPr lang="zh-TW" altLang="en-US" sz="1400" dirty="0">
-                        <a:latin typeface="Microsoft JhengHei" panose="020B0604030504040204" pitchFamily="34" charset="-120"/>
-                        <a:ea typeface="Microsoft JhengHei" panose="020B0604030504040204" pitchFamily="34" charset="-120"/>
-                      </a:endParaRPr>
+                        <a:rPr lang="zh-TW" altLang="en-US" sz="1400" dirty="0"/>
+                        <a:t>取代 </a:t>
+                      </a:r>
+                      <a:r>
+                        <a:rPr lang="en" sz="1400" dirty="0" err="1"/>
+                        <a:t>Nginx／HAProxy</a:t>
+                      </a:r>
+                      <a:endParaRPr lang="en" sz="1400" dirty="0"/>
                     </a:p>
                   </a:txBody>
-                  <a:tcPr anchor="ctr"/>
+                  <a:tcPr marL="82784" marR="82784" marT="41392" marB="41392" anchor="ctr"/>
                 </a:tc>
                 <a:extLst>
                   <a:ext uri="{0D108BD9-81ED-4DB2-BD59-A6C34878D82A}">
-                    <a16:rowId xmlns:a16="http://schemas.microsoft.com/office/drawing/2014/main" val="1157993873"/>
+                    <a16:rowId xmlns:a16="http://schemas.microsoft.com/office/drawing/2014/main" val="3329258313"/>
                   </a:ext>
                 </a:extLst>
               </a:tr>
-              <a:tr h="363331">
+              <a:tr h="522000">
                 <a:tc>
                   <a:txBody>
                     <a:bodyPr/>
@@ -18694,24 +14998,13 @@
                         <a:buNone/>
                       </a:pPr>
                       <a:r>
-                        <a:rPr lang="en" sz="1400" dirty="0" err="1">
-                          <a:latin typeface="+mj-lt"/>
-                          <a:ea typeface="Microsoft JhengHei" panose="020B0604030504040204" pitchFamily="34" charset="-120"/>
-                          <a:cs typeface="Consolas" panose="020B0609020204030204" pitchFamily="49" charset="0"/>
-                        </a:rPr>
-                        <a:t>InfoGather</a:t>
-                      </a:r>
-                      <a:r>
-                        <a:rPr lang="en" sz="1400" dirty="0">
-                          <a:latin typeface="+mj-lt"/>
-                          <a:ea typeface="Microsoft JhengHei" panose="020B0604030504040204" pitchFamily="34" charset="-120"/>
-                          <a:cs typeface="Consolas" panose="020B0609020204030204" pitchFamily="49" charset="0"/>
-                        </a:rPr>
-                        <a:t> Worker</a:t>
-                      </a:r>
+                        <a:rPr lang="en" sz="1400" dirty="0" err="1"/>
+                        <a:t>Web＋API</a:t>
+                      </a:r>
+                      <a:endParaRPr lang="en" sz="1400" dirty="0"/>
                     </a:p>
                   </a:txBody>
-                  <a:tcPr anchor="ctr"/>
+                  <a:tcPr marL="82784" marR="82784" marT="41392" marB="41392" anchor="ctr"/>
                 </a:tc>
                 <a:tc>
                   <a:txBody>
@@ -18722,16 +15015,20 @@
                         <a:buNone/>
                       </a:pPr>
                       <a:r>
-                        <a:rPr lang="en" altLang="zh-TW" dirty="0"/>
-                        <a:t>Azure Container Apps</a:t>
-                      </a:r>
-                      <a:endParaRPr lang="en" sz="1400" dirty="0">
-                        <a:latin typeface="Microsoft JhengHei" panose="020B0604030504040204" pitchFamily="34" charset="-120"/>
-                        <a:ea typeface="Microsoft JhengHei" panose="020B0604030504040204" pitchFamily="34" charset="-120"/>
-                      </a:endParaRPr>
+                        <a:rPr lang="en" sz="1400" dirty="0"/>
+                        <a:t>1 vCPU／2 </a:t>
+                      </a:r>
+                      <a:r>
+                        <a:rPr lang="en" sz="1400" dirty="0" err="1"/>
+                        <a:t>GiB，min</a:t>
+                      </a:r>
+                      <a:r>
+                        <a:rPr lang="en" sz="1400" dirty="0"/>
+                        <a:t> 1／max 2</a:t>
+                      </a:r>
                     </a:p>
                   </a:txBody>
-                  <a:tcPr anchor="ctr"/>
+                  <a:tcPr marL="82784" marR="82784" marT="41392" marB="41392" anchor="ctr"/>
                 </a:tc>
                 <a:tc>
                   <a:txBody>
@@ -18742,147 +15039,20 @@
                         <a:buNone/>
                       </a:pPr>
                       <a:r>
-                        <a:rPr lang="zh-TW" altLang="en-US" dirty="0"/>
-                        <a:t>每個 </a:t>
-                      </a:r>
-                      <a:r>
-                        <a:rPr lang="en" altLang="zh-TW" dirty="0"/>
-                        <a:t>replica </a:t>
-                      </a:r>
-                      <a:r>
-                        <a:rPr lang="en" altLang="zh-TW" sz="1400" b="0" i="0" u="none" strike="noStrike" cap="none" dirty="0">
-                          <a:solidFill>
-                            <a:srgbClr val="000000"/>
-                          </a:solidFill>
-                          <a:latin typeface="Arial"/>
-                          <a:ea typeface="Arial"/>
-                          <a:cs typeface="Arial"/>
-                          <a:sym typeface="Arial"/>
-                        </a:rPr>
-                        <a:t>2 vCPU</a:t>
-                      </a:r>
-                      <a:r>
-                        <a:rPr lang="zh-TW" altLang="en" sz="1400" b="0" i="0" u="none" strike="noStrike" cap="none" dirty="0">
-                          <a:solidFill>
-                            <a:srgbClr val="000000"/>
-                          </a:solidFill>
-                          <a:latin typeface="Arial"/>
-                          <a:ea typeface="Arial"/>
-                          <a:cs typeface="Arial"/>
-                          <a:sym typeface="Arial"/>
-                        </a:rPr>
-                        <a:t>／</a:t>
-                      </a:r>
-                      <a:r>
-                        <a:rPr lang="en" altLang="zh-TW" sz="1400" b="0" i="0" u="none" strike="noStrike" cap="none" dirty="0">
-                          <a:solidFill>
-                            <a:srgbClr val="000000"/>
-                          </a:solidFill>
-                          <a:latin typeface="Arial"/>
-                          <a:ea typeface="Arial"/>
-                          <a:cs typeface="Arial"/>
-                          <a:sym typeface="Arial"/>
-                        </a:rPr>
-                        <a:t>4 GiB RAM</a:t>
-                      </a:r>
-                      <a:r>
-                        <a:rPr lang="zh-TW" altLang="en" dirty="0"/>
-                        <a:t>，</a:t>
-                      </a:r>
-                      <a:r>
-                        <a:rPr lang="en" altLang="zh-TW" sz="1400" b="0" i="0" u="none" strike="noStrike" cap="none" dirty="0">
-                          <a:solidFill>
-                            <a:srgbClr val="000000"/>
-                          </a:solidFill>
-                          <a:latin typeface="Arial"/>
-                          <a:ea typeface="Arial"/>
-                          <a:cs typeface="Arial"/>
-                          <a:sym typeface="Arial"/>
-                        </a:rPr>
-                        <a:t>min 8</a:t>
-                      </a:r>
-                      <a:r>
-                        <a:rPr lang="zh-TW" altLang="en" sz="1400" b="0" i="0" u="none" strike="noStrike" cap="none" dirty="0">
-                          <a:solidFill>
-                            <a:srgbClr val="000000"/>
-                          </a:solidFill>
-                          <a:latin typeface="Arial"/>
-                          <a:ea typeface="Arial"/>
-                          <a:cs typeface="Arial"/>
-                          <a:sym typeface="Arial"/>
-                        </a:rPr>
-                        <a:t>／</a:t>
-                      </a:r>
-                      <a:r>
-                        <a:rPr lang="en" altLang="zh-TW" sz="1400" b="0" i="0" u="none" strike="noStrike" cap="none" dirty="0">
-                          <a:solidFill>
-                            <a:srgbClr val="000000"/>
-                          </a:solidFill>
-                          <a:latin typeface="Arial"/>
-                          <a:ea typeface="Arial"/>
-                          <a:cs typeface="Arial"/>
-                          <a:sym typeface="Arial"/>
-                        </a:rPr>
-                        <a:t>max 16</a:t>
-                      </a:r>
-                      <a:endParaRPr lang="en" sz="1400" dirty="0">
-                        <a:latin typeface="Microsoft JhengHei" panose="020B0604030504040204" pitchFamily="34" charset="-120"/>
-                        <a:ea typeface="Microsoft JhengHei" panose="020B0604030504040204" pitchFamily="34" charset="-120"/>
-                      </a:endParaRPr>
+                        <a:rPr lang="en" sz="1400" dirty="0"/>
+                        <a:t>2 vCPU／4 </a:t>
+                      </a:r>
+                      <a:r>
+                        <a:rPr lang="en" sz="1400" dirty="0" err="1"/>
+                        <a:t>GiB，min</a:t>
+                      </a:r>
+                      <a:r>
+                        <a:rPr lang="en" sz="1400" dirty="0"/>
+                        <a:t> 2／max 6</a:t>
+                      </a:r>
                     </a:p>
                   </a:txBody>
-                  <a:tcPr anchor="ctr"/>
-                </a:tc>
-                <a:extLst>
-                  <a:ext uri="{0D108BD9-81ED-4DB2-BD59-A6C34878D82A}">
-                    <a16:rowId xmlns:a16="http://schemas.microsoft.com/office/drawing/2014/main" val="4290922300"/>
-                  </a:ext>
-                </a:extLst>
-              </a:tr>
-              <a:tr h="363331">
-                <a:tc>
-                  <a:txBody>
-                    <a:bodyPr/>
-                    <a:lstStyle/>
-                    <a:p>
-                      <a:pPr marL="0" marR="0" lvl="0" indent="0" algn="l" defTabSz="914400" rtl="0" eaLnBrk="1" fontAlgn="auto" latinLnBrk="0" hangingPunct="1">
-                        <a:lnSpc>
-                          <a:spcPct val="100000"/>
-                        </a:lnSpc>
-                        <a:spcBef>
-                          <a:spcPts val="0"/>
-                        </a:spcBef>
-                        <a:spcAft>
-                          <a:spcPts val="0"/>
-                        </a:spcAft>
-                        <a:buClr>
-                          <a:srgbClr val="000000"/>
-                        </a:buClr>
-                        <a:buSzTx/>
-                        <a:buFont typeface="Arial"/>
-                        <a:buNone/>
-                        <a:tabLst/>
-                        <a:defRPr/>
-                      </a:pPr>
-                      <a:r>
-                        <a:rPr lang="en" altLang="zh-TW" sz="1400" dirty="0" err="1">
-                          <a:latin typeface="+mj-lt"/>
-                          <a:ea typeface="Microsoft JhengHei" panose="020B0604030504040204" pitchFamily="34" charset="-120"/>
-                          <a:cs typeface="Consolas" panose="020B0609020204030204" pitchFamily="49" charset="0"/>
-                        </a:rPr>
-                        <a:t>InfoGather</a:t>
-                      </a:r>
-                      <a:r>
-                        <a:rPr lang="en" altLang="zh-TW" sz="1400" dirty="0">
-                          <a:latin typeface="+mj-lt"/>
-                          <a:ea typeface="Microsoft JhengHei" panose="020B0604030504040204" pitchFamily="34" charset="-120"/>
-                          <a:cs typeface="Consolas" panose="020B0609020204030204" pitchFamily="49" charset="0"/>
-                        </a:rPr>
-                        <a:t> Scheduler</a:t>
-                      </a:r>
-                    </a:p>
-                  </a:txBody>
-                  <a:tcPr anchor="ctr"/>
+                  <a:tcPr marL="82784" marR="82784" marT="41392" marB="41392" anchor="ctr"/>
                 </a:tc>
                 <a:tc>
                   <a:txBody>
@@ -18893,16 +15063,47 @@
                         <a:buNone/>
                       </a:pPr>
                       <a:r>
-                        <a:rPr lang="en" altLang="zh-TW" dirty="0"/>
-                        <a:t>Azure Container Apps</a:t>
-                      </a:r>
-                      <a:endParaRPr lang="en" sz="1400" dirty="0">
-                        <a:latin typeface="Microsoft JhengHei" panose="020B0604030504040204" pitchFamily="34" charset="-120"/>
-                        <a:ea typeface="Microsoft JhengHei" panose="020B0604030504040204" pitchFamily="34" charset="-120"/>
-                      </a:endParaRPr>
+                        <a:rPr lang="en" sz="1400" dirty="0"/>
+                        <a:t>Web </a:t>
+                      </a:r>
+                      <a:r>
+                        <a:rPr lang="zh-TW" altLang="en-US" sz="1400" dirty="0"/>
+                        <a:t>靜態資產＋</a:t>
+                      </a:r>
+                      <a:r>
+                        <a:rPr lang="en" sz="1400" dirty="0" err="1"/>
+                        <a:t>NestJS</a:t>
+                      </a:r>
+                      <a:r>
+                        <a:rPr lang="en" sz="1400" dirty="0"/>
+                        <a:t> API</a:t>
+                      </a:r>
                     </a:p>
                   </a:txBody>
-                  <a:tcPr anchor="ctr"/>
+                  <a:tcPr marL="82784" marR="82784" marT="41392" marB="41392" anchor="ctr"/>
+                </a:tc>
+                <a:extLst>
+                  <a:ext uri="{0D108BD9-81ED-4DB2-BD59-A6C34878D82A}">
+                    <a16:rowId xmlns:a16="http://schemas.microsoft.com/office/drawing/2014/main" val="2121237908"/>
+                  </a:ext>
+                </a:extLst>
+              </a:tr>
+              <a:tr h="522000">
+                <a:tc>
+                  <a:txBody>
+                    <a:bodyPr/>
+                    <a:lstStyle/>
+                    <a:p>
+                      <a:pPr>
+                        <a:buNone/>
+                      </a:pPr>
+                      <a:r>
+                        <a:rPr lang="en" sz="1400" dirty="0"/>
+                        <a:t>Worker</a:t>
+                      </a:r>
+                    </a:p>
+                  </a:txBody>
+                  <a:tcPr marL="82784" marR="82784" marT="41392" marB="41392" anchor="ctr"/>
                 </a:tc>
                 <a:tc>
                   <a:txBody>
@@ -18913,132 +15114,20 @@
                         <a:buNone/>
                       </a:pPr>
                       <a:r>
-                        <a:rPr lang="zh-TW" altLang="en-US" dirty="0"/>
-                        <a:t>每個 </a:t>
-                      </a:r>
-                      <a:r>
-                        <a:rPr lang="en" altLang="zh-TW" dirty="0"/>
-                        <a:t>replica </a:t>
-                      </a:r>
-                      <a:r>
-                        <a:rPr lang="en" altLang="zh-TW" sz="1400" b="0" i="0" u="none" strike="noStrike" cap="none" dirty="0">
-                          <a:solidFill>
-                            <a:srgbClr val="000000"/>
-                          </a:solidFill>
-                          <a:latin typeface="Arial"/>
-                          <a:ea typeface="Arial"/>
-                          <a:cs typeface="Arial"/>
-                          <a:sym typeface="Arial"/>
-                        </a:rPr>
-                        <a:t>0.5 vCPU</a:t>
-                      </a:r>
-                      <a:r>
-                        <a:rPr lang="zh-TW" altLang="en" sz="1400" b="0" i="0" u="none" strike="noStrike" cap="none" dirty="0">
-                          <a:solidFill>
-                            <a:srgbClr val="000000"/>
-                          </a:solidFill>
-                          <a:latin typeface="Arial"/>
-                          <a:ea typeface="Arial"/>
-                          <a:cs typeface="Arial"/>
-                          <a:sym typeface="Arial"/>
-                        </a:rPr>
-                        <a:t>／</a:t>
-                      </a:r>
-                      <a:r>
-                        <a:rPr lang="en" altLang="zh-TW" sz="1400" b="0" i="0" u="none" strike="noStrike" cap="none" dirty="0">
-                          <a:solidFill>
-                            <a:srgbClr val="000000"/>
-                          </a:solidFill>
-                          <a:latin typeface="Arial"/>
-                          <a:ea typeface="Arial"/>
-                          <a:cs typeface="Arial"/>
-                          <a:sym typeface="Arial"/>
-                        </a:rPr>
-                        <a:t>1 GiB RAM</a:t>
-                      </a:r>
-                      <a:r>
-                        <a:rPr lang="zh-TW" altLang="en" dirty="0"/>
-                        <a:t>，</a:t>
-                      </a:r>
-                      <a:r>
-                        <a:rPr lang="en" altLang="zh-TW" sz="1400" b="0" i="0" u="none" strike="noStrike" cap="none" dirty="0">
-                          <a:solidFill>
-                            <a:srgbClr val="000000"/>
-                          </a:solidFill>
-                          <a:latin typeface="Arial"/>
-                          <a:ea typeface="Arial"/>
-                          <a:cs typeface="Arial"/>
-                          <a:sym typeface="Arial"/>
-                        </a:rPr>
-                        <a:t>min 1</a:t>
-                      </a:r>
-                      <a:r>
-                        <a:rPr lang="zh-TW" altLang="en" sz="1400" b="0" i="0" u="none" strike="noStrike" cap="none" dirty="0">
-                          <a:solidFill>
-                            <a:srgbClr val="000000"/>
-                          </a:solidFill>
-                          <a:latin typeface="Arial"/>
-                          <a:ea typeface="Arial"/>
-                          <a:cs typeface="Arial"/>
-                          <a:sym typeface="Arial"/>
-                        </a:rPr>
-                        <a:t>／</a:t>
-                      </a:r>
-                      <a:r>
-                        <a:rPr lang="en" altLang="zh-TW" sz="1400" b="0" i="0" u="none" strike="noStrike" cap="none" dirty="0">
-                          <a:solidFill>
-                            <a:srgbClr val="000000"/>
-                          </a:solidFill>
-                          <a:latin typeface="Arial"/>
-                          <a:ea typeface="Arial"/>
-                          <a:cs typeface="Arial"/>
-                          <a:sym typeface="Arial"/>
-                        </a:rPr>
-                        <a:t>max 1</a:t>
-                      </a:r>
-                      <a:endParaRPr lang="zh-TW" altLang="en-US" sz="1400" dirty="0">
-                        <a:latin typeface="Microsoft JhengHei" panose="020B0604030504040204" pitchFamily="34" charset="-120"/>
-                        <a:ea typeface="Microsoft JhengHei" panose="020B0604030504040204" pitchFamily="34" charset="-120"/>
-                      </a:endParaRPr>
+                        <a:rPr lang="en" sz="1400" dirty="0"/>
+                        <a:t>2 vCPU／4 </a:t>
+                      </a:r>
+                      <a:r>
+                        <a:rPr lang="en" sz="1400" dirty="0" err="1"/>
+                        <a:t>GiB，min</a:t>
+                      </a:r>
+                      <a:r>
+                        <a:rPr lang="en" sz="1400" dirty="0"/>
+                        <a:t> 1／max 3</a:t>
+                      </a:r>
                     </a:p>
                   </a:txBody>
-                  <a:tcPr anchor="ctr"/>
-                </a:tc>
-                <a:extLst>
-                  <a:ext uri="{0D108BD9-81ED-4DB2-BD59-A6C34878D82A}">
-                    <a16:rowId xmlns:a16="http://schemas.microsoft.com/office/drawing/2014/main" val="1620069153"/>
-                  </a:ext>
-                </a:extLst>
-              </a:tr>
-              <a:tr h="363331">
-                <a:tc>
-                  <a:txBody>
-                    <a:bodyPr/>
-                    <a:lstStyle/>
-                    <a:p>
-                      <a:pPr>
-                        <a:buNone/>
-                      </a:pPr>
-                      <a:r>
-                        <a:rPr lang="en" altLang="zh-TW" sz="1400" b="0" i="0" u="none" strike="noStrike" cap="none" dirty="0">
-                          <a:solidFill>
-                            <a:srgbClr val="000000"/>
-                          </a:solidFill>
-                          <a:latin typeface="Arial"/>
-                          <a:ea typeface="Microsoft JhengHei" panose="020B0604030504040204" pitchFamily="34" charset="-120"/>
-                          <a:cs typeface="Consolas" panose="020B0609020204030204" pitchFamily="49" charset="0"/>
-                          <a:sym typeface="Arial"/>
-                        </a:rPr>
-                        <a:t>MongoDB</a:t>
-                      </a:r>
-                      <a:endParaRPr lang="en" sz="1400" dirty="0">
-                        <a:latin typeface="+mj-lt"/>
-                        <a:ea typeface="Microsoft JhengHei" panose="020B0604030504040204" pitchFamily="34" charset="-120"/>
-                        <a:cs typeface="Consolas" panose="020B0609020204030204" pitchFamily="49" charset="0"/>
-                      </a:endParaRPr>
-                    </a:p>
-                  </a:txBody>
-                  <a:tcPr anchor="ctr"/>
+                  <a:tcPr marL="82784" marR="82784" marT="41392" marB="41392" anchor="ctr"/>
                 </a:tc>
                 <a:tc>
                   <a:txBody>
@@ -19049,16 +15138,20 @@
                         <a:buNone/>
                       </a:pPr>
                       <a:r>
-                        <a:rPr lang="en" altLang="zh-TW" dirty="0"/>
-                        <a:t>MongoDB Atlas on Azure</a:t>
-                      </a:r>
-                      <a:endParaRPr lang="en" sz="1400" dirty="0">
-                        <a:latin typeface="Microsoft JhengHei" panose="020B0604030504040204" pitchFamily="34" charset="-120"/>
-                        <a:ea typeface="Microsoft JhengHei" panose="020B0604030504040204" pitchFamily="34" charset="-120"/>
-                      </a:endParaRPr>
+                        <a:rPr lang="en" sz="1400" dirty="0"/>
+                        <a:t>2 vCPU／4 </a:t>
+                      </a:r>
+                      <a:r>
+                        <a:rPr lang="en" sz="1400" dirty="0" err="1"/>
+                        <a:t>GiB，min</a:t>
+                      </a:r>
+                      <a:r>
+                        <a:rPr lang="en" sz="1400" dirty="0"/>
+                        <a:t> 2／max 8</a:t>
+                      </a:r>
                     </a:p>
                   </a:txBody>
-                  <a:tcPr anchor="ctr"/>
+                  <a:tcPr marL="82784" marR="82784" marT="41392" marB="41392" anchor="ctr"/>
                 </a:tc>
                 <a:tc>
                   <a:txBody>
@@ -19069,72 +15162,20 @@
                         <a:buNone/>
                       </a:pPr>
                       <a:r>
-                        <a:rPr lang="en" altLang="zh-TW" sz="1400" b="0" i="0" u="none" strike="noStrike" cap="none" dirty="0">
-                          <a:solidFill>
-                            <a:srgbClr val="000000"/>
-                          </a:solidFill>
-                          <a:latin typeface="Arial"/>
-                          <a:ea typeface="Arial"/>
-                          <a:cs typeface="Arial"/>
-                          <a:sym typeface="Arial"/>
-                        </a:rPr>
-                        <a:t>M30</a:t>
-                      </a:r>
-                      <a:r>
-                        <a:rPr lang="zh-TW" altLang="en" dirty="0"/>
-                        <a:t>，</a:t>
-                      </a:r>
-                      <a:r>
-                        <a:rPr lang="en" altLang="zh-TW" sz="1400" b="0" i="0" u="none" strike="noStrike" cap="none" dirty="0">
-                          <a:solidFill>
-                            <a:srgbClr val="000000"/>
-                          </a:solidFill>
-                          <a:latin typeface="Arial"/>
-                          <a:ea typeface="Arial"/>
-                          <a:cs typeface="Arial"/>
-                          <a:sym typeface="Arial"/>
-                        </a:rPr>
-                        <a:t>3</a:t>
-                      </a:r>
-                      <a:r>
-                        <a:rPr lang="en" altLang="zh-TW" dirty="0"/>
-                        <a:t> nodes</a:t>
-                      </a:r>
-                      <a:r>
-                        <a:rPr lang="zh-TW" altLang="en" dirty="0"/>
-                        <a:t>，</a:t>
-                      </a:r>
-                      <a:r>
-                        <a:rPr lang="en" altLang="zh-TW" dirty="0"/>
-                        <a:t>storage </a:t>
-                      </a:r>
-                      <a:r>
-                        <a:rPr lang="en" altLang="zh-TW" sz="1400" b="0" i="0" u="none" strike="noStrike" cap="none" dirty="0">
-                          <a:solidFill>
-                            <a:srgbClr val="000000"/>
-                          </a:solidFill>
-                          <a:latin typeface="Arial"/>
-                          <a:ea typeface="Arial"/>
-                          <a:cs typeface="Arial"/>
-                          <a:sym typeface="Arial"/>
-                        </a:rPr>
-                        <a:t>256 GB</a:t>
-                      </a:r>
-                      <a:endParaRPr lang="en" sz="1400" dirty="0">
-                        <a:latin typeface="Microsoft JhengHei" panose="020B0604030504040204" pitchFamily="34" charset="-120"/>
-                        <a:ea typeface="Microsoft JhengHei" panose="020B0604030504040204" pitchFamily="34" charset="-120"/>
-                      </a:endParaRPr>
+                        <a:rPr lang="zh-TW" altLang="en-US" sz="1400" dirty="0"/>
+                        <a:t>依背景佇列長度擴充</a:t>
+                      </a:r>
                     </a:p>
                   </a:txBody>
-                  <a:tcPr anchor="ctr"/>
+                  <a:tcPr marL="82784" marR="82784" marT="41392" marB="41392" anchor="ctr"/>
                 </a:tc>
                 <a:extLst>
                   <a:ext uri="{0D108BD9-81ED-4DB2-BD59-A6C34878D82A}">
-                    <a16:rowId xmlns:a16="http://schemas.microsoft.com/office/drawing/2014/main" val="2359224097"/>
+                    <a16:rowId xmlns:a16="http://schemas.microsoft.com/office/drawing/2014/main" val="561895132"/>
                   </a:ext>
                 </a:extLst>
               </a:tr>
-              <a:tr h="363331">
+              <a:tr h="522000">
                 <a:tc>
                   <a:txBody>
                     <a:bodyPr/>
@@ -19144,25 +15185,12 @@
                         <a:buNone/>
                       </a:pPr>
                       <a:r>
-                        <a:rPr lang="en" altLang="zh-TW" sz="1400" b="0" i="0" u="none" strike="noStrike" cap="none" dirty="0">
-                          <a:solidFill>
-                            <a:srgbClr val="000000"/>
-                          </a:solidFill>
-                          <a:latin typeface="Arial"/>
-                          <a:ea typeface="Microsoft JhengHei" panose="020B0604030504040204" pitchFamily="34" charset="-120"/>
-                          <a:cs typeface="Consolas" panose="020B0609020204030204" pitchFamily="49" charset="0"/>
-                          <a:sym typeface="Arial"/>
-                        </a:rPr>
-                        <a:t>Redis</a:t>
-                      </a:r>
-                      <a:endParaRPr lang="en" sz="1400" dirty="0">
-                        <a:latin typeface="+mj-lt"/>
-                        <a:ea typeface="Microsoft JhengHei" panose="020B0604030504040204" pitchFamily="34" charset="-120"/>
-                        <a:cs typeface="Consolas" panose="020B0609020204030204" pitchFamily="49" charset="0"/>
-                      </a:endParaRPr>
+                        <a:rPr lang="en" sz="1400" dirty="0"/>
+                        <a:t>Scheduler</a:t>
+                      </a:r>
                     </a:p>
                   </a:txBody>
-                  <a:tcPr anchor="ctr"/>
+                  <a:tcPr marL="82784" marR="82784" marT="41392" marB="41392" anchor="ctr"/>
                 </a:tc>
                 <a:tc>
                   <a:txBody>
@@ -19173,16 +15201,20 @@
                         <a:buNone/>
                       </a:pPr>
                       <a:r>
-                        <a:rPr lang="en" altLang="zh-TW" dirty="0"/>
-                        <a:t>Azure Managed Redis</a:t>
-                      </a:r>
-                      <a:endParaRPr lang="en" sz="1400" dirty="0">
-                        <a:latin typeface="Microsoft JhengHei" panose="020B0604030504040204" pitchFamily="34" charset="-120"/>
-                        <a:ea typeface="Microsoft JhengHei" panose="020B0604030504040204" pitchFamily="34" charset="-120"/>
-                      </a:endParaRPr>
+                        <a:rPr lang="en" sz="1400" dirty="0"/>
+                        <a:t>0.5 vCPU／1 </a:t>
+                      </a:r>
+                      <a:r>
+                        <a:rPr lang="en" sz="1400" dirty="0" err="1"/>
+                        <a:t>GiB，min</a:t>
+                      </a:r>
+                      <a:r>
+                        <a:rPr lang="en" sz="1400" dirty="0"/>
+                        <a:t> 1／max 1</a:t>
+                      </a:r>
                     </a:p>
                   </a:txBody>
-                  <a:tcPr anchor="ctr"/>
+                  <a:tcPr marL="82784" marR="82784" marT="41392" marB="41392" anchor="ctr"/>
                 </a:tc>
                 <a:tc>
                   <a:txBody>
@@ -19193,108 +15225,20 @@
                         <a:buNone/>
                       </a:pPr>
                       <a:r>
-                        <a:rPr lang="en" altLang="zh-TW" sz="1400" b="0" i="0" u="none" strike="noStrike" cap="none" dirty="0">
-                          <a:solidFill>
-                            <a:srgbClr val="000000"/>
-                          </a:solidFill>
-                          <a:latin typeface="Arial"/>
-                          <a:ea typeface="Arial"/>
-                          <a:cs typeface="Arial"/>
-                          <a:sym typeface="Arial"/>
-                        </a:rPr>
-                        <a:t>3 GB</a:t>
-                      </a:r>
-                      <a:r>
-                        <a:rPr lang="en" altLang="zh-TW" dirty="0"/>
-                        <a:t> </a:t>
-                      </a:r>
-                      <a:r>
-                        <a:rPr lang="zh-TW" altLang="en-US" dirty="0"/>
-                        <a:t>記憶體起，</a:t>
-                      </a:r>
-                      <a:r>
-                        <a:rPr lang="en" altLang="zh-TW" dirty="0"/>
-                        <a:t>HA</a:t>
-                      </a:r>
-                      <a:r>
-                        <a:rPr lang="zh-TW" altLang="en" dirty="0"/>
-                        <a:t>、</a:t>
-                      </a:r>
-                      <a:r>
-                        <a:rPr lang="en" altLang="zh-TW" dirty="0"/>
-                        <a:t>zone redundancy</a:t>
-                      </a:r>
-                      <a:r>
-                        <a:rPr lang="zh-TW" altLang="en" dirty="0"/>
-                        <a:t>、</a:t>
-                      </a:r>
-                      <a:r>
-                        <a:rPr lang="en" altLang="zh-TW" dirty="0"/>
-                        <a:t>persistence</a:t>
-                      </a:r>
-                      <a:endParaRPr lang="en" sz="1400" dirty="0">
-                        <a:latin typeface="Microsoft JhengHei" panose="020B0604030504040204" pitchFamily="34" charset="-120"/>
-                        <a:ea typeface="Microsoft JhengHei" panose="020B0604030504040204" pitchFamily="34" charset="-120"/>
-                      </a:endParaRPr>
+                        <a:rPr lang="en" sz="1400" dirty="0"/>
+                        <a:t>1 vCPU／2 </a:t>
+                      </a:r>
+                      <a:r>
+                        <a:rPr lang="en" sz="1400" dirty="0" err="1"/>
+                        <a:t>GiB，min</a:t>
+                      </a:r>
+                      <a:r>
+                        <a:rPr lang="en" sz="1400" dirty="0"/>
+                        <a:t> 1／max 1</a:t>
+                      </a:r>
                     </a:p>
                   </a:txBody>
-                  <a:tcPr anchor="ctr"/>
-                </a:tc>
-                <a:extLst>
-                  <a:ext uri="{0D108BD9-81ED-4DB2-BD59-A6C34878D82A}">
-                    <a16:rowId xmlns:a16="http://schemas.microsoft.com/office/drawing/2014/main" val="2794067812"/>
-                  </a:ext>
-                </a:extLst>
-              </a:tr>
-              <a:tr h="363331">
-                <a:tc>
-                  <a:txBody>
-                    <a:bodyPr/>
-                    <a:lstStyle/>
-                    <a:p>
-                      <a:pPr marL="0" marR="0" lvl="0" indent="0" algn="l" defTabSz="914400" rtl="0" eaLnBrk="1" fontAlgn="auto" latinLnBrk="0" hangingPunct="1">
-                        <a:lnSpc>
-                          <a:spcPct val="100000"/>
-                        </a:lnSpc>
-                        <a:spcBef>
-                          <a:spcPts val="0"/>
-                        </a:spcBef>
-                        <a:spcAft>
-                          <a:spcPts val="0"/>
-                        </a:spcAft>
-                        <a:buClr>
-                          <a:srgbClr val="000000"/>
-                        </a:buClr>
-                        <a:buSzTx/>
-                        <a:buFont typeface="Arial"/>
-                        <a:buNone/>
-                        <a:tabLst/>
-                        <a:defRPr/>
-                      </a:pPr>
-                      <a:r>
-                        <a:rPr lang="en" altLang="zh-TW" sz="1400" b="0" i="0" u="none" strike="noStrike" cap="none" dirty="0">
-                          <a:solidFill>
-                            <a:srgbClr val="000000"/>
-                          </a:solidFill>
-                          <a:latin typeface="Arial"/>
-                          <a:ea typeface="Arial"/>
-                          <a:cs typeface="Arial"/>
-                          <a:sym typeface="Arial"/>
-                        </a:rPr>
-                        <a:t>Copilot CLI Server</a:t>
-                      </a:r>
-                      <a:endParaRPr lang="en" altLang="zh-TW" sz="1400" b="0" i="0" u="none" strike="noStrike" cap="none" dirty="0">
-                        <a:solidFill>
-                          <a:srgbClr val="000000"/>
-                        </a:solidFill>
-                        <a:latin typeface="Arial"/>
-                        <a:ea typeface="Microsoft JhengHei" panose="020B0604030504040204" pitchFamily="34" charset="-120"/>
-                        <a:cs typeface="Consolas" panose="020B0609020204030204" pitchFamily="49" charset="0"/>
-                        <a:sym typeface="Arial"/>
-                      </a:endParaRPr>
-                    </a:p>
-                  </a:txBody>
-                  <a:tcPr anchor="ctr"/>
+                  <a:tcPr marL="82784" marR="82784" marT="41392" marB="41392" anchor="ctr"/>
                 </a:tc>
                 <a:tc>
                   <a:txBody>
@@ -19305,16 +15249,35 @@
                         <a:buNone/>
                       </a:pPr>
                       <a:r>
-                        <a:rPr lang="en" altLang="zh-TW" dirty="0"/>
-                        <a:t>Azure Container Apps</a:t>
-                      </a:r>
-                      <a:endParaRPr lang="en" sz="1400" dirty="0">
-                        <a:latin typeface="Microsoft JhengHei" panose="020B0604030504040204" pitchFamily="34" charset="-120"/>
-                        <a:ea typeface="Microsoft JhengHei" panose="020B0604030504040204" pitchFamily="34" charset="-120"/>
-                      </a:endParaRPr>
+                        <a:rPr lang="zh-TW" altLang="en-US" sz="1400" dirty="0"/>
+                        <a:t>固定單副本，避免重複排程</a:t>
+                      </a:r>
                     </a:p>
                   </a:txBody>
-                  <a:tcPr anchor="ctr"/>
+                  <a:tcPr marL="82784" marR="82784" marT="41392" marB="41392" anchor="ctr"/>
+                </a:tc>
+                <a:extLst>
+                  <a:ext uri="{0D108BD9-81ED-4DB2-BD59-A6C34878D82A}">
+                    <a16:rowId xmlns:a16="http://schemas.microsoft.com/office/drawing/2014/main" val="309150299"/>
+                  </a:ext>
+                </a:extLst>
+              </a:tr>
+              <a:tr h="522000">
+                <a:tc>
+                  <a:txBody>
+                    <a:bodyPr/>
+                    <a:lstStyle/>
+                    <a:p>
+                      <a:pPr>
+                        <a:buNone/>
+                      </a:pPr>
+                      <a:r>
+                        <a:rPr lang="en" sz="1400" dirty="0"/>
+                        <a:t>Copilot runtime</a:t>
+                      </a:r>
+                    </a:p>
+                  </a:txBody>
+                  <a:tcPr marL="82784" marR="82784" marT="41392" marB="41392" anchor="ctr"/>
                 </a:tc>
                 <a:tc>
                   <a:txBody>
@@ -19325,144 +15288,20 @@
                         <a:buNone/>
                       </a:pPr>
                       <a:r>
-                        <a:rPr lang="zh-TW" altLang="en-US" dirty="0"/>
-                        <a:t>每個 </a:t>
-                      </a:r>
-                      <a:r>
-                        <a:rPr lang="en" altLang="zh-TW" dirty="0"/>
-                        <a:t>replica </a:t>
-                      </a:r>
-                      <a:r>
-                        <a:rPr lang="en" altLang="zh-TW" sz="1400" b="0" i="0" u="none" strike="noStrike" cap="none" dirty="0">
-                          <a:solidFill>
-                            <a:srgbClr val="000000"/>
-                          </a:solidFill>
-                          <a:latin typeface="Arial"/>
-                          <a:ea typeface="Arial"/>
-                          <a:cs typeface="Arial"/>
-                          <a:sym typeface="Arial"/>
-                        </a:rPr>
-                        <a:t>1 vCPU</a:t>
-                      </a:r>
-                      <a:r>
-                        <a:rPr lang="zh-TW" altLang="en" sz="1400" b="0" i="0" u="none" strike="noStrike" cap="none" dirty="0">
-                          <a:solidFill>
-                            <a:srgbClr val="000000"/>
-                          </a:solidFill>
-                          <a:latin typeface="Arial"/>
-                          <a:ea typeface="Arial"/>
-                          <a:cs typeface="Arial"/>
-                          <a:sym typeface="Arial"/>
-                        </a:rPr>
-                        <a:t>／</a:t>
-                      </a:r>
-                      <a:r>
-                        <a:rPr lang="en" altLang="zh-TW" sz="1400" b="0" i="0" u="none" strike="noStrike" cap="none" dirty="0">
-                          <a:solidFill>
-                            <a:srgbClr val="000000"/>
-                          </a:solidFill>
-                          <a:latin typeface="Arial"/>
-                          <a:ea typeface="Arial"/>
-                          <a:cs typeface="Arial"/>
-                          <a:sym typeface="Arial"/>
-                        </a:rPr>
-                        <a:t>2 GiB RAM</a:t>
-                      </a:r>
-                      <a:r>
-                        <a:rPr lang="zh-TW" altLang="en" dirty="0"/>
-                        <a:t>，</a:t>
-                      </a:r>
-                      <a:r>
-                        <a:rPr lang="en" altLang="zh-TW" sz="1400" b="0" i="0" u="none" strike="noStrike" cap="none" dirty="0">
-                          <a:solidFill>
-                            <a:srgbClr val="000000"/>
-                          </a:solidFill>
-                          <a:latin typeface="Arial"/>
-                          <a:ea typeface="Arial"/>
-                          <a:cs typeface="Arial"/>
-                          <a:sym typeface="Arial"/>
-                        </a:rPr>
-                        <a:t>min 1</a:t>
-                      </a:r>
-                      <a:r>
-                        <a:rPr lang="zh-TW" altLang="en" sz="1400" b="0" i="0" u="none" strike="noStrike" cap="none" dirty="0">
-                          <a:solidFill>
-                            <a:srgbClr val="000000"/>
-                          </a:solidFill>
-                          <a:latin typeface="Arial"/>
-                          <a:ea typeface="Arial"/>
-                          <a:cs typeface="Arial"/>
-                          <a:sym typeface="Arial"/>
-                        </a:rPr>
-                        <a:t>／</a:t>
-                      </a:r>
-                      <a:r>
-                        <a:rPr lang="en" altLang="zh-TW" sz="1400" b="0" i="0" u="none" strike="noStrike" cap="none" dirty="0">
-                          <a:solidFill>
-                            <a:srgbClr val="000000"/>
-                          </a:solidFill>
-                          <a:latin typeface="Arial"/>
-                          <a:ea typeface="Arial"/>
-                          <a:cs typeface="Arial"/>
-                          <a:sym typeface="Arial"/>
-                        </a:rPr>
-                        <a:t>max 1</a:t>
-                      </a:r>
-                      <a:endParaRPr lang="en" sz="1400" dirty="0">
-                        <a:latin typeface="Microsoft JhengHei" panose="020B0604030504040204" pitchFamily="34" charset="-120"/>
-                        <a:ea typeface="Microsoft JhengHei" panose="020B0604030504040204" pitchFamily="34" charset="-120"/>
-                      </a:endParaRPr>
+                        <a:rPr lang="en" sz="1400" dirty="0"/>
+                        <a:t>1 vCPU／2 </a:t>
+                      </a:r>
+                      <a:r>
+                        <a:rPr lang="en" sz="1400" dirty="0" err="1"/>
+                        <a:t>GiB，min</a:t>
+                      </a:r>
+                      <a:r>
+                        <a:rPr lang="en" sz="1400" dirty="0"/>
+                        <a:t> 1／max 1</a:t>
+                      </a:r>
                     </a:p>
                   </a:txBody>
-                  <a:tcPr anchor="ctr"/>
-                </a:tc>
-                <a:extLst>
-                  <a:ext uri="{0D108BD9-81ED-4DB2-BD59-A6C34878D82A}">
-                    <a16:rowId xmlns:a16="http://schemas.microsoft.com/office/drawing/2014/main" val="3889693032"/>
-                  </a:ext>
-                </a:extLst>
-              </a:tr>
-              <a:tr h="363331">
-                <a:tc>
-                  <a:txBody>
-                    <a:bodyPr/>
-                    <a:lstStyle/>
-                    <a:p>
-                      <a:pPr marL="0" marR="0" lvl="0" indent="0" algn="l" defTabSz="914400" rtl="0" eaLnBrk="1" fontAlgn="auto" latinLnBrk="0" hangingPunct="1">
-                        <a:lnSpc>
-                          <a:spcPct val="100000"/>
-                        </a:lnSpc>
-                        <a:spcBef>
-                          <a:spcPts val="0"/>
-                        </a:spcBef>
-                        <a:spcAft>
-                          <a:spcPts val="0"/>
-                        </a:spcAft>
-                        <a:buClr>
-                          <a:srgbClr val="000000"/>
-                        </a:buClr>
-                        <a:buSzTx/>
-                        <a:buFont typeface="Arial"/>
-                        <a:buNone/>
-                        <a:tabLst/>
-                        <a:defRPr/>
-                      </a:pPr>
-                      <a:r>
-                        <a:rPr lang="en" altLang="zh-TW" dirty="0"/>
-                        <a:t>Container Registry</a:t>
-                      </a:r>
-                      <a:endParaRPr lang="en" altLang="zh-TW" sz="1400" b="0" i="0" u="none" strike="noStrike" cap="none" dirty="0">
-                        <a:solidFill>
-                          <a:srgbClr val="000000"/>
-                        </a:solidFill>
-                        <a:latin typeface="Arial"/>
-                        <a:ea typeface="Microsoft JhengHei" panose="020B0604030504040204" pitchFamily="34" charset="-120"/>
-                        <a:cs typeface="Consolas" panose="020B0609020204030204" pitchFamily="49" charset="0"/>
-                        <a:sym typeface="Arial"/>
-                      </a:endParaRPr>
-                    </a:p>
-                  </a:txBody>
-                  <a:tcPr anchor="ctr"/>
+                  <a:tcPr marL="82784" marR="82784" marT="41392" marB="41392" anchor="ctr"/>
                 </a:tc>
                 <a:tc>
                   <a:txBody>
@@ -19473,16 +15312,20 @@
                         <a:buNone/>
                       </a:pPr>
                       <a:r>
-                        <a:rPr lang="en" altLang="zh-TW" dirty="0"/>
-                        <a:t>Azure Container Registry Basic</a:t>
-                      </a:r>
-                      <a:endParaRPr lang="en" sz="1400" dirty="0">
-                        <a:latin typeface="Microsoft JhengHei" panose="020B0604030504040204" pitchFamily="34" charset="-120"/>
-                        <a:ea typeface="Microsoft JhengHei" panose="020B0604030504040204" pitchFamily="34" charset="-120"/>
-                      </a:endParaRPr>
+                        <a:rPr lang="en" sz="1400" dirty="0"/>
+                        <a:t>2 vCPU／4 </a:t>
+                      </a:r>
+                      <a:r>
+                        <a:rPr lang="en" sz="1400" dirty="0" err="1"/>
+                        <a:t>GiB，min</a:t>
+                      </a:r>
+                      <a:r>
+                        <a:rPr lang="en" sz="1400" dirty="0"/>
+                        <a:t> 1／max 2</a:t>
+                      </a:r>
                     </a:p>
                   </a:txBody>
-                  <a:tcPr anchor="ctr"/>
+                  <a:tcPr marL="82784" marR="82784" marT="41392" marB="41392" anchor="ctr"/>
                 </a:tc>
                 <a:tc>
                   <a:txBody>
@@ -19493,36 +15336,28 @@
                         <a:buNone/>
                       </a:pPr>
                       <a:r>
-                        <a:rPr lang="en" altLang="zh-TW" sz="1400" b="0" i="0" u="none" strike="noStrike" cap="none" dirty="0">
-                          <a:solidFill>
-                            <a:srgbClr val="000000"/>
-                          </a:solidFill>
-                          <a:latin typeface="Arial"/>
-                          <a:ea typeface="Arial"/>
-                          <a:cs typeface="Arial"/>
-                          <a:sym typeface="Arial"/>
-                        </a:rPr>
-                        <a:t>10 GB</a:t>
-                      </a:r>
-                      <a:r>
-                        <a:rPr lang="en" altLang="zh-TW" dirty="0"/>
-                        <a:t> image storage</a:t>
-                      </a:r>
-                      <a:endParaRPr lang="en" sz="1400" dirty="0">
-                        <a:latin typeface="Microsoft JhengHei" panose="020B0604030504040204" pitchFamily="34" charset="-120"/>
-                        <a:ea typeface="Microsoft JhengHei" panose="020B0604030504040204" pitchFamily="34" charset="-120"/>
-                      </a:endParaRPr>
+                        <a:rPr lang="zh-TW" altLang="en-US" sz="1400" dirty="0"/>
+                        <a:t>與 </a:t>
+                      </a:r>
+                      <a:r>
+                        <a:rPr lang="en" sz="1400" dirty="0"/>
+                        <a:t>API </a:t>
+                      </a:r>
+                      <a:r>
+                        <a:rPr lang="zh-TW" altLang="en-US" sz="1400" dirty="0"/>
+                        <a:t>分離部署</a:t>
+                      </a:r>
                     </a:p>
                   </a:txBody>
-                  <a:tcPr anchor="ctr"/>
+                  <a:tcPr marL="82784" marR="82784" marT="41392" marB="41392" anchor="ctr"/>
                 </a:tc>
                 <a:extLst>
                   <a:ext uri="{0D108BD9-81ED-4DB2-BD59-A6C34878D82A}">
-                    <a16:rowId xmlns:a16="http://schemas.microsoft.com/office/drawing/2014/main" val="2706894077"/>
+                    <a16:rowId xmlns:a16="http://schemas.microsoft.com/office/drawing/2014/main" val="2652530355"/>
                   </a:ext>
                 </a:extLst>
               </a:tr>
-              <a:tr h="363331">
+              <a:tr h="522000">
                 <a:tc>
                   <a:txBody>
                     <a:bodyPr/>
@@ -19532,17 +15367,12 @@
                         <a:buNone/>
                       </a:pPr>
                       <a:r>
-                        <a:rPr lang="en" altLang="zh-TW" dirty="0"/>
-                        <a:t>Secret</a:t>
-                      </a:r>
-                      <a:endParaRPr lang="en" sz="1400" dirty="0">
-                        <a:latin typeface="+mj-lt"/>
-                        <a:ea typeface="Microsoft JhengHei" panose="020B0604030504040204" pitchFamily="34" charset="-120"/>
-                        <a:cs typeface="Consolas" panose="020B0609020204030204" pitchFamily="49" charset="0"/>
-                      </a:endParaRPr>
+                        <a:rPr lang="en" sz="1400" dirty="0"/>
+                        <a:t>MongoDB</a:t>
+                      </a:r>
                     </a:p>
                   </a:txBody>
-                  <a:tcPr anchor="ctr"/>
+                  <a:tcPr marL="82784" marR="82784" marT="41392" marB="41392" anchor="ctr"/>
                 </a:tc>
                 <a:tc>
                   <a:txBody>
@@ -19553,16 +15383,12 @@
                         <a:buNone/>
                       </a:pPr>
                       <a:r>
-                        <a:rPr lang="en" altLang="zh-TW" dirty="0"/>
-                        <a:t>Azure Key Vault</a:t>
-                      </a:r>
-                      <a:endParaRPr lang="en" sz="1400" dirty="0">
-                        <a:latin typeface="Microsoft JhengHei" panose="020B0604030504040204" pitchFamily="34" charset="-120"/>
-                        <a:ea typeface="Microsoft JhengHei" panose="020B0604030504040204" pitchFamily="34" charset="-120"/>
-                      </a:endParaRPr>
+                        <a:rPr lang="en" sz="1400"/>
+                        <a:t>Atlas M30，3 nodes，256 GB</a:t>
+                      </a:r>
                     </a:p>
                   </a:txBody>
-                  <a:tcPr anchor="ctr"/>
+                  <a:tcPr marL="82784" marR="82784" marT="41392" marB="41392" anchor="ctr"/>
                 </a:tc>
                 <a:tc>
                   <a:txBody>
@@ -19573,64 +15399,12 @@
                         <a:buNone/>
                       </a:pPr>
                       <a:r>
-                        <a:rPr lang="en" altLang="zh-TW" sz="1400" b="0" i="0" u="none" strike="noStrike" cap="none" dirty="0">
-                          <a:solidFill>
-                            <a:srgbClr val="000000"/>
-                          </a:solidFill>
-                          <a:latin typeface="Arial"/>
-                          <a:ea typeface="Arial"/>
-                          <a:cs typeface="Arial"/>
-                          <a:sym typeface="Arial"/>
-                        </a:rPr>
-                        <a:t>1</a:t>
-                      </a:r>
-                      <a:r>
-                        <a:rPr lang="en" altLang="zh-TW" dirty="0"/>
-                        <a:t> vault</a:t>
-                      </a:r>
-                      <a:endParaRPr lang="en" sz="1400" dirty="0">
-                        <a:latin typeface="Microsoft JhengHei" panose="020B0604030504040204" pitchFamily="34" charset="-120"/>
-                        <a:ea typeface="Microsoft JhengHei" panose="020B0604030504040204" pitchFamily="34" charset="-120"/>
-                      </a:endParaRPr>
+                        <a:rPr lang="en" sz="1400" dirty="0"/>
+                        <a:t>Atlas M40，3 nodes，512 GB</a:t>
+                      </a:r>
                     </a:p>
                   </a:txBody>
-                  <a:tcPr anchor="ctr"/>
-                </a:tc>
-                <a:extLst>
-                  <a:ext uri="{0D108BD9-81ED-4DB2-BD59-A6C34878D82A}">
-                    <a16:rowId xmlns:a16="http://schemas.microsoft.com/office/drawing/2014/main" val="3138652754"/>
-                  </a:ext>
-                </a:extLst>
-              </a:tr>
-              <a:tr h="363331">
-                <a:tc>
-                  <a:txBody>
-                    <a:bodyPr/>
-                    <a:lstStyle/>
-                    <a:p>
-                      <a:pPr>
-                        <a:buNone/>
-                      </a:pPr>
-                      <a:r>
-                        <a:rPr lang="en" altLang="zh-TW" dirty="0"/>
-                        <a:t>Log</a:t>
-                      </a:r>
-                      <a:r>
-                        <a:rPr lang="zh-TW" altLang="en" dirty="0"/>
-                        <a:t>／</a:t>
-                      </a:r>
-                      <a:r>
-                        <a:rPr lang="en" altLang="zh-TW" dirty="0"/>
-                        <a:t>Metrics</a:t>
-                      </a:r>
-                      <a:endParaRPr lang="en" sz="1400" dirty="0">
-                        <a:latin typeface="+mj-lt"/>
-                        <a:ea typeface="Microsoft JhengHei" panose="020B0604030504040204" pitchFamily="34" charset="-120"/>
-                        <a:cs typeface="Consolas" panose="020B0609020204030204" pitchFamily="49" charset="0"/>
-                      </a:endParaRPr>
-                    </a:p>
-                  </a:txBody>
-                  <a:tcPr anchor="ctr"/>
+                  <a:tcPr marL="82784" marR="82784" marT="41392" marB="41392" anchor="ctr"/>
                 </a:tc>
                 <a:tc>
                   <a:txBody>
@@ -19641,24 +15415,45 @@
                         <a:buNone/>
                       </a:pPr>
                       <a:r>
-                        <a:rPr lang="en" altLang="zh-TW" dirty="0"/>
-                        <a:t>Log Analytics </a:t>
-                      </a:r>
-                      <a:r>
-                        <a:rPr lang="zh-TW" altLang="en" dirty="0"/>
-                        <a:t>＋ </a:t>
-                      </a:r>
-                      <a:r>
-                        <a:rPr lang="en" altLang="zh-TW" dirty="0"/>
-                        <a:t>Application Insights</a:t>
-                      </a:r>
-                      <a:endParaRPr lang="en" sz="1400" dirty="0">
-                        <a:latin typeface="Microsoft JhengHei" panose="020B0604030504040204" pitchFamily="34" charset="-120"/>
-                        <a:ea typeface="Microsoft JhengHei" panose="020B0604030504040204" pitchFamily="34" charset="-120"/>
-                      </a:endParaRPr>
+                        <a:rPr lang="en" sz="1400" dirty="0"/>
+                        <a:t>PROD </a:t>
+                      </a:r>
+                      <a:r>
+                        <a:rPr lang="zh-TW" altLang="en-US" sz="1400" dirty="0"/>
+                        <a:t>啟用 </a:t>
+                      </a:r>
+                      <a:r>
+                        <a:rPr lang="en" sz="1400" dirty="0" err="1"/>
+                        <a:t>PITR／auto-scale</a:t>
+                      </a:r>
+                      <a:endParaRPr lang="en" sz="1400" dirty="0"/>
                     </a:p>
                   </a:txBody>
-                  <a:tcPr anchor="ctr"/>
+                  <a:tcPr marL="82784" marR="82784" marT="41392" marB="41392" anchor="ctr"/>
+                </a:tc>
+                <a:extLst>
+                  <a:ext uri="{0D108BD9-81ED-4DB2-BD59-A6C34878D82A}">
+                    <a16:rowId xmlns:a16="http://schemas.microsoft.com/office/drawing/2014/main" val="1724110278"/>
+                  </a:ext>
+                </a:extLst>
+              </a:tr>
+              <a:tr h="522000">
+                <a:tc>
+                  <a:txBody>
+                    <a:bodyPr/>
+                    <a:lstStyle/>
+                    <a:p>
+                      <a:pPr>
+                        <a:buNone/>
+                      </a:pPr>
+                      <a:r>
+                        <a:rPr lang="en" sz="1400" dirty="0" err="1"/>
+                        <a:t>Redis／BullMQ</a:t>
+                      </a:r>
+                      <a:endParaRPr lang="en" sz="1400" dirty="0"/>
+                    </a:p>
+                  </a:txBody>
+                  <a:tcPr marL="82784" marR="82784" marT="41392" marB="41392" anchor="ctr"/>
                 </a:tc>
                 <a:tc>
                   <a:txBody>
@@ -19669,80 +15464,16 @@
                         <a:buNone/>
                       </a:pPr>
                       <a:r>
-                        <a:rPr lang="en" altLang="zh-TW" dirty="0"/>
-                        <a:t>retention </a:t>
-                      </a:r>
-                      <a:r>
-                        <a:rPr lang="en" altLang="zh-TW" sz="1400" b="0" i="0" u="none" strike="noStrike" cap="none" dirty="0">
-                          <a:solidFill>
-                            <a:srgbClr val="000000"/>
-                          </a:solidFill>
-                          <a:latin typeface="Arial"/>
-                          <a:ea typeface="Arial"/>
-                          <a:cs typeface="Arial"/>
-                          <a:sym typeface="Arial"/>
-                        </a:rPr>
-                        <a:t>30</a:t>
-                      </a:r>
-                      <a:r>
-                        <a:rPr lang="en" altLang="zh-TW" dirty="0"/>
-                        <a:t> </a:t>
-                      </a:r>
-                      <a:r>
-                        <a:rPr lang="zh-TW" altLang="en-US" dirty="0"/>
-                        <a:t>天，</a:t>
-                      </a:r>
-                      <a:r>
-                        <a:rPr lang="en" altLang="zh-TW" dirty="0"/>
-                        <a:t>daily cap </a:t>
-                      </a:r>
-                      <a:r>
-                        <a:rPr lang="en" altLang="zh-TW" sz="1400" b="0" i="0" u="none" strike="noStrike" cap="none" dirty="0">
-                          <a:solidFill>
-                            <a:srgbClr val="000000"/>
-                          </a:solidFill>
-                          <a:latin typeface="Arial"/>
-                          <a:ea typeface="Arial"/>
-                          <a:cs typeface="Arial"/>
-                          <a:sym typeface="Arial"/>
-                        </a:rPr>
-                        <a:t>5 GB</a:t>
-                      </a:r>
-                      <a:endParaRPr lang="en" sz="1400" dirty="0">
-                        <a:latin typeface="Microsoft JhengHei" panose="020B0604030504040204" pitchFamily="34" charset="-120"/>
-                        <a:ea typeface="Microsoft JhengHei" panose="020B0604030504040204" pitchFamily="34" charset="-120"/>
-                      </a:endParaRPr>
+                        <a:rPr lang="en" sz="1400"/>
+                        <a:t>Managed Redis，3 GB </a:t>
+                      </a:r>
+                      <a:r>
+                        <a:rPr lang="zh-TW" altLang="en-US" sz="1400"/>
+                        <a:t>起</a:t>
+                      </a:r>
                     </a:p>
                   </a:txBody>
-                  <a:tcPr anchor="ctr"/>
-                </a:tc>
-                <a:extLst>
-                  <a:ext uri="{0D108BD9-81ED-4DB2-BD59-A6C34878D82A}">
-                    <a16:rowId xmlns:a16="http://schemas.microsoft.com/office/drawing/2014/main" val="3866927840"/>
-                  </a:ext>
-                </a:extLst>
-              </a:tr>
-              <a:tr h="363331">
-                <a:tc>
-                  <a:txBody>
-                    <a:bodyPr/>
-                    <a:lstStyle/>
-                    <a:p>
-                      <a:pPr>
-                        <a:buNone/>
-                      </a:pPr>
-                      <a:r>
-                        <a:rPr lang="zh-TW" altLang="en-US" dirty="0"/>
-                        <a:t>備份／匯出檔案</a:t>
-                      </a:r>
-                      <a:endParaRPr lang="en" sz="1400" dirty="0">
-                        <a:latin typeface="+mj-lt"/>
-                        <a:ea typeface="Microsoft JhengHei" panose="020B0604030504040204" pitchFamily="34" charset="-120"/>
-                        <a:cs typeface="Consolas" panose="020B0609020204030204" pitchFamily="49" charset="0"/>
-                      </a:endParaRPr>
-                    </a:p>
-                  </a:txBody>
-                  <a:tcPr anchor="ctr"/>
+                  <a:tcPr marL="82784" marR="82784" marT="41392" marB="41392" anchor="ctr"/>
                 </a:tc>
                 <a:tc>
                   <a:txBody>
@@ -19753,16 +15484,16 @@
                         <a:buNone/>
                       </a:pPr>
                       <a:r>
-                        <a:rPr lang="en" altLang="zh-TW" dirty="0"/>
-                        <a:t>Azure Blob Storage</a:t>
-                      </a:r>
-                      <a:endParaRPr lang="en" sz="1400" dirty="0">
-                        <a:latin typeface="Microsoft JhengHei" panose="020B0604030504040204" pitchFamily="34" charset="-120"/>
-                        <a:ea typeface="Microsoft JhengHei" panose="020B0604030504040204" pitchFamily="34" charset="-120"/>
-                      </a:endParaRPr>
+                        <a:rPr lang="en" sz="1400" dirty="0"/>
+                        <a:t>Managed Redis，12 GB </a:t>
+                      </a:r>
+                      <a:r>
+                        <a:rPr lang="zh-TW" altLang="en-US" sz="1400" dirty="0"/>
+                        <a:t>起</a:t>
+                      </a:r>
                     </a:p>
                   </a:txBody>
-                  <a:tcPr anchor="ctr"/>
+                  <a:tcPr marL="82784" marR="82784" marT="41392" marB="41392" anchor="ctr"/>
                 </a:tc>
                 <a:tc>
                   <a:txBody>
@@ -19773,36 +15504,213 @@
                         <a:buNone/>
                       </a:pPr>
                       <a:r>
-                        <a:rPr lang="en" altLang="zh-TW" dirty="0"/>
-                        <a:t>Hot tier</a:t>
-                      </a:r>
-                      <a:r>
-                        <a:rPr lang="zh-TW" altLang="en" dirty="0"/>
-                        <a:t>，</a:t>
-                      </a:r>
-                      <a:r>
-                        <a:rPr lang="en" altLang="zh-TW" sz="1400" b="0" i="0" u="none" strike="noStrike" cap="none" dirty="0">
-                          <a:solidFill>
-                            <a:srgbClr val="000000"/>
-                          </a:solidFill>
-                          <a:latin typeface="Arial"/>
-                          <a:ea typeface="Arial"/>
-                          <a:cs typeface="Arial"/>
-                          <a:sym typeface="Arial"/>
-                        </a:rPr>
-                        <a:t>100 GB</a:t>
-                      </a:r>
-                      <a:endParaRPr lang="zh-TW" altLang="en-US" sz="1400" dirty="0">
-                        <a:latin typeface="Microsoft JhengHei" panose="020B0604030504040204" pitchFamily="34" charset="-120"/>
-                        <a:ea typeface="Microsoft JhengHei" panose="020B0604030504040204" pitchFamily="34" charset="-120"/>
-                      </a:endParaRPr>
+                        <a:rPr lang="en" sz="1400" dirty="0"/>
+                        <a:t>PROD </a:t>
+                      </a:r>
+                      <a:r>
+                        <a:rPr lang="zh-TW" altLang="en-US" sz="1400" dirty="0"/>
+                        <a:t>啟用 </a:t>
+                      </a:r>
+                      <a:r>
+                        <a:rPr lang="en" sz="1400" dirty="0" err="1"/>
+                        <a:t>HA／zone</a:t>
+                      </a:r>
+                      <a:r>
+                        <a:rPr lang="en" sz="1400" dirty="0"/>
+                        <a:t> </a:t>
+                      </a:r>
+                      <a:r>
+                        <a:rPr lang="en" sz="1400" dirty="0" err="1"/>
+                        <a:t>redundancy／persistence</a:t>
+                      </a:r>
+                      <a:endParaRPr lang="en" sz="1400" dirty="0"/>
                     </a:p>
                   </a:txBody>
-                  <a:tcPr anchor="ctr"/>
+                  <a:tcPr marL="82784" marR="82784" marT="41392" marB="41392" anchor="ctr"/>
                 </a:tc>
                 <a:extLst>
                   <a:ext uri="{0D108BD9-81ED-4DB2-BD59-A6C34878D82A}">
-                    <a16:rowId xmlns:a16="http://schemas.microsoft.com/office/drawing/2014/main" val="1890578122"/>
+                    <a16:rowId xmlns:a16="http://schemas.microsoft.com/office/drawing/2014/main" val="4044549491"/>
+                  </a:ext>
+                </a:extLst>
+              </a:tr>
+              <a:tr h="522000">
+                <a:tc>
+                  <a:txBody>
+                    <a:bodyPr/>
+                    <a:lstStyle/>
+                    <a:p>
+                      <a:pPr>
+                        <a:buNone/>
+                      </a:pPr>
+                      <a:r>
+                        <a:rPr lang="en" sz="1400" dirty="0" err="1"/>
+                        <a:t>Log／Storage</a:t>
+                      </a:r>
+                      <a:endParaRPr lang="en" sz="1400" dirty="0"/>
+                    </a:p>
+                  </a:txBody>
+                  <a:tcPr marL="82784" marR="82784" marT="41392" marB="41392" anchor="ctr"/>
+                </a:tc>
+                <a:tc>
+                  <a:txBody>
+                    <a:bodyPr/>
+                    <a:lstStyle/>
+                    <a:p>
+                      <a:pPr>
+                        <a:buNone/>
+                      </a:pPr>
+                      <a:r>
+                        <a:rPr lang="en" sz="1400"/>
+                        <a:t>Log 30 </a:t>
+                      </a:r>
+                      <a:r>
+                        <a:rPr lang="zh-TW" altLang="en-US" sz="1400"/>
+                        <a:t>天，</a:t>
+                      </a:r>
+                      <a:r>
+                        <a:rPr lang="en" sz="1400"/>
+                        <a:t>Blob 100 GB</a:t>
+                      </a:r>
+                    </a:p>
+                  </a:txBody>
+                  <a:tcPr marL="82784" marR="82784" marT="41392" marB="41392" anchor="ctr"/>
+                </a:tc>
+                <a:tc>
+                  <a:txBody>
+                    <a:bodyPr/>
+                    <a:lstStyle/>
+                    <a:p>
+                      <a:pPr>
+                        <a:buNone/>
+                      </a:pPr>
+                      <a:r>
+                        <a:rPr lang="en" sz="1400" dirty="0"/>
+                        <a:t>Log 180 </a:t>
+                      </a:r>
+                      <a:r>
+                        <a:rPr lang="zh-TW" altLang="en-US" sz="1400" dirty="0"/>
+                        <a:t>天，</a:t>
+                      </a:r>
+                      <a:r>
+                        <a:rPr lang="en" sz="1400" dirty="0"/>
+                        <a:t>Blob 500 GB</a:t>
+                      </a:r>
+                    </a:p>
+                  </a:txBody>
+                  <a:tcPr marL="82784" marR="82784" marT="41392" marB="41392" anchor="ctr"/>
+                </a:tc>
+                <a:tc>
+                  <a:txBody>
+                    <a:bodyPr/>
+                    <a:lstStyle/>
+                    <a:p>
+                      <a:pPr>
+                        <a:buNone/>
+                      </a:pPr>
+                      <a:r>
+                        <a:rPr lang="zh-TW" altLang="en-US" sz="1400" dirty="0"/>
+                        <a:t>支援監控、稽核與匯出保存</a:t>
+                      </a:r>
+                    </a:p>
+                  </a:txBody>
+                  <a:tcPr marL="82784" marR="82784" marT="41392" marB="41392" anchor="ctr"/>
+                </a:tc>
+                <a:extLst>
+                  <a:ext uri="{0D108BD9-81ED-4DB2-BD59-A6C34878D82A}">
+                    <a16:rowId xmlns:a16="http://schemas.microsoft.com/office/drawing/2014/main" val="1075399132"/>
+                  </a:ext>
+                </a:extLst>
+              </a:tr>
+              <a:tr h="522000">
+                <a:tc>
+                  <a:txBody>
+                    <a:bodyPr/>
+                    <a:lstStyle/>
+                    <a:p>
+                      <a:pPr>
+                        <a:buNone/>
+                      </a:pPr>
+                      <a:r>
+                        <a:rPr lang="en" sz="1400" dirty="0" err="1"/>
+                        <a:t>Secret／Registry</a:t>
+                      </a:r>
+                      <a:endParaRPr lang="en" sz="1400" dirty="0"/>
+                    </a:p>
+                  </a:txBody>
+                  <a:tcPr marL="82784" marR="82784" marT="41392" marB="41392" anchor="ctr"/>
+                </a:tc>
+                <a:tc>
+                  <a:txBody>
+                    <a:bodyPr/>
+                    <a:lstStyle/>
+                    <a:p>
+                      <a:pPr>
+                        <a:buNone/>
+                      </a:pPr>
+                      <a:r>
+                        <a:rPr lang="en" sz="1400"/>
+                        <a:t>Key Vault 1 vault，ACR Basic 10 GB</a:t>
+                      </a:r>
+                    </a:p>
+                  </a:txBody>
+                  <a:tcPr marL="82784" marR="82784" marT="41392" marB="41392" anchor="ctr"/>
+                </a:tc>
+                <a:tc>
+                  <a:txBody>
+                    <a:bodyPr/>
+                    <a:lstStyle/>
+                    <a:p>
+                      <a:pPr>
+                        <a:buNone/>
+                      </a:pPr>
+                      <a:r>
+                        <a:rPr lang="en" sz="1400" dirty="0"/>
+                        <a:t>Key Vault 1 </a:t>
+                      </a:r>
+                      <a:r>
+                        <a:rPr lang="en" sz="1400" dirty="0" err="1"/>
+                        <a:t>vault，ACR</a:t>
+                      </a:r>
+                      <a:r>
+                        <a:rPr lang="en" sz="1400" dirty="0"/>
+                        <a:t> Standard 100 GB</a:t>
+                      </a:r>
+                    </a:p>
+                  </a:txBody>
+                  <a:tcPr marL="82784" marR="82784" marT="41392" marB="41392" anchor="ctr"/>
+                </a:tc>
+                <a:tc>
+                  <a:txBody>
+                    <a:bodyPr/>
+                    <a:lstStyle/>
+                    <a:p>
+                      <a:pPr>
+                        <a:buNone/>
+                      </a:pPr>
+                      <a:r>
+                        <a:rPr lang="en" sz="1400" dirty="0"/>
+                        <a:t>Secret </a:t>
+                      </a:r>
+                      <a:r>
+                        <a:rPr lang="zh-TW" altLang="en-US" sz="1400" dirty="0"/>
+                        <a:t>管理與 </a:t>
+                      </a:r>
+                      <a:r>
+                        <a:rPr lang="en" sz="1400" dirty="0"/>
+                        <a:t>image </a:t>
+                      </a:r>
+                      <a:r>
+                        <a:rPr lang="zh-TW" altLang="en-US" sz="1400" dirty="0"/>
+                        <a:t>儲存</a:t>
+                      </a:r>
+                    </a:p>
+                  </a:txBody>
+                  <a:tcPr marL="82784" marR="82784" marT="41392" marB="41392" anchor="ctr"/>
+                </a:tc>
+                <a:extLst>
+                  <a:ext uri="{0D108BD9-81ED-4DB2-BD59-A6C34878D82A}">
+                    <a16:rowId xmlns:a16="http://schemas.microsoft.com/office/drawing/2014/main" val="4000500559"/>
                   </a:ext>
                 </a:extLst>
               </a:tr>
@@ -19823,1751 +15731,7 @@
 </p:sld>
 </file>
 
-<file path=ppt/slides/slide7.xml><?xml version="1.0" encoding="utf-8"?>
-<p:sld xmlns:a="http://schemas.openxmlformats.org/drawingml/2006/main" xmlns:r="http://schemas.openxmlformats.org/officeDocument/2006/relationships" xmlns:p="http://schemas.openxmlformats.org/presentationml/2006/main">
-  <p:cSld>
-    <p:spTree>
-      <p:nvGrpSpPr>
-        <p:cNvPr id="1" name="">
-          <a:extLst>
-            <a:ext uri="{FF2B5EF4-FFF2-40B4-BE49-F238E27FC236}">
-              <a16:creationId xmlns:a16="http://schemas.microsoft.com/office/drawing/2014/main" id="{BFF2539D-7BC6-E87B-CAED-0947F7BF6A5D}"/>
-            </a:ext>
-          </a:extLst>
-        </p:cNvPr>
-        <p:cNvGrpSpPr/>
-        <p:nvPr/>
-      </p:nvGrpSpPr>
-      <p:grpSpPr>
-        <a:xfrm>
-          <a:off x="0" y="0"/>
-          <a:ext cx="0" cy="0"/>
-          <a:chOff x="0" y="0"/>
-          <a:chExt cx="0" cy="0"/>
-        </a:xfrm>
-      </p:grpSpPr>
-      <p:sp>
-        <p:nvSpPr>
-          <p:cNvPr id="3" name="標題 2">
-            <a:extLst>
-              <a:ext uri="{FF2B5EF4-FFF2-40B4-BE49-F238E27FC236}">
-                <a16:creationId xmlns:a16="http://schemas.microsoft.com/office/drawing/2014/main" id="{E16CE74C-0430-7BA1-4C41-1297E3322A35}"/>
-              </a:ext>
-            </a:extLst>
-          </p:cNvPr>
-          <p:cNvSpPr>
-            <a:spLocks noGrp="1"/>
-          </p:cNvSpPr>
-          <p:nvPr>
-            <p:ph type="title"/>
-          </p:nvPr>
-        </p:nvSpPr>
-        <p:spPr/>
-        <p:txBody>
-          <a:bodyPr/>
-          <a:lstStyle/>
-          <a:p>
-            <a:r>
-              <a:rPr lang="en-US" altLang="zh-TW" b="1" dirty="0"/>
-              <a:t>Azure </a:t>
-            </a:r>
-            <a:r>
-              <a:rPr lang="zh-TW" altLang="en-US" b="1" dirty="0"/>
-              <a:t>正式環境配置</a:t>
-            </a:r>
-            <a:endParaRPr lang="zh-TW" altLang="en-US" dirty="0"/>
-          </a:p>
-        </p:txBody>
-      </p:sp>
-      <p:sp>
-        <p:nvSpPr>
-          <p:cNvPr id="6" name="文字版面配置區 5">
-            <a:extLst>
-              <a:ext uri="{FF2B5EF4-FFF2-40B4-BE49-F238E27FC236}">
-                <a16:creationId xmlns:a16="http://schemas.microsoft.com/office/drawing/2014/main" id="{5AC5690D-703F-1C5B-7D7F-F2C426234E93}"/>
-              </a:ext>
-            </a:extLst>
-          </p:cNvPr>
-          <p:cNvSpPr>
-            <a:spLocks noGrp="1"/>
-          </p:cNvSpPr>
-          <p:nvPr>
-            <p:ph type="body" idx="1"/>
-          </p:nvPr>
-        </p:nvSpPr>
-        <p:spPr/>
-        <p:txBody>
-          <a:bodyPr/>
-          <a:lstStyle/>
-          <a:p>
-            <a:endParaRPr lang="en-US" altLang="zh-TW" dirty="0"/>
-          </a:p>
-          <a:p>
-            <a:endParaRPr lang="en-US" altLang="zh-TW" dirty="0"/>
-          </a:p>
-          <a:p>
-            <a:endParaRPr lang="en-US" altLang="zh-TW" dirty="0"/>
-          </a:p>
-          <a:p>
-            <a:endParaRPr lang="en-US" altLang="zh-TW" dirty="0"/>
-          </a:p>
-          <a:p>
-            <a:endParaRPr lang="en-US" altLang="zh-TW" dirty="0"/>
-          </a:p>
-          <a:p>
-            <a:endParaRPr lang="en-US" altLang="zh-TW" dirty="0"/>
-          </a:p>
-          <a:p>
-            <a:endParaRPr lang="en-US" altLang="zh-TW" dirty="0"/>
-          </a:p>
-          <a:p>
-            <a:endParaRPr lang="en-US" altLang="zh-TW" dirty="0"/>
-          </a:p>
-          <a:p>
-            <a:endParaRPr lang="en-US" altLang="zh-TW" dirty="0"/>
-          </a:p>
-          <a:p>
-            <a:endParaRPr lang="en-US" altLang="zh-TW" dirty="0"/>
-          </a:p>
-          <a:p>
-            <a:endParaRPr lang="en-US" altLang="zh-TW" dirty="0"/>
-          </a:p>
-          <a:p>
-            <a:endParaRPr lang="en-US" altLang="zh-TW" dirty="0"/>
-          </a:p>
-          <a:p>
-            <a:pPr marL="36000" indent="0">
-              <a:buNone/>
-            </a:pPr>
-            <a:endParaRPr lang="en-US" altLang="zh-TW" dirty="0"/>
-          </a:p>
-          <a:p>
-            <a:pPr marL="36000" indent="0">
-              <a:buNone/>
-            </a:pPr>
-            <a:endParaRPr lang="en-US" altLang="zh-TW" dirty="0"/>
-          </a:p>
-        </p:txBody>
-      </p:sp>
-      <p:graphicFrame>
-        <p:nvGraphicFramePr>
-          <p:cNvPr id="2" name="表格 1">
-            <a:extLst>
-              <a:ext uri="{FF2B5EF4-FFF2-40B4-BE49-F238E27FC236}">
-                <a16:creationId xmlns:a16="http://schemas.microsoft.com/office/drawing/2014/main" id="{98F72E0A-3C50-A9E0-B4C8-4A5765E85617}"/>
-              </a:ext>
-            </a:extLst>
-          </p:cNvPr>
-          <p:cNvGraphicFramePr>
-            <a:graphicFrameLocks noGrp="1"/>
-          </p:cNvGraphicFramePr>
-          <p:nvPr>
-            <p:extLst>
-              <p:ext uri="{D42A27DB-BD31-4B8C-83A1-F6EECF244321}">
-                <p14:modId xmlns:p14="http://schemas.microsoft.com/office/powerpoint/2010/main" val="1376597111"/>
-              </p:ext>
-            </p:extLst>
-          </p:nvPr>
-        </p:nvGraphicFramePr>
-        <p:xfrm>
-          <a:off x="179388" y="826714"/>
-          <a:ext cx="11161712" cy="4349979"/>
-        </p:xfrm>
-        <a:graphic>
-          <a:graphicData uri="http://schemas.openxmlformats.org/drawingml/2006/table">
-            <a:tbl>
-              <a:tblPr>
-                <a:tableStyleId>{91DB7C30-2B5D-4D34-8F22-85940E495A18}</a:tableStyleId>
-              </a:tblPr>
-              <a:tblGrid>
-                <a:gridCol w="2095338">
-                  <a:extLst>
-                    <a:ext uri="{9D8B030D-6E8A-4147-A177-3AD203B41FA5}">
-                      <a16:colId xmlns:a16="http://schemas.microsoft.com/office/drawing/2014/main" val="1199597028"/>
-                    </a:ext>
-                  </a:extLst>
-                </a:gridCol>
-                <a:gridCol w="3376283">
-                  <a:extLst>
-                    <a:ext uri="{9D8B030D-6E8A-4147-A177-3AD203B41FA5}">
-                      <a16:colId xmlns:a16="http://schemas.microsoft.com/office/drawing/2014/main" val="3760430905"/>
-                    </a:ext>
-                  </a:extLst>
-                </a:gridCol>
-                <a:gridCol w="5690091">
-                  <a:extLst>
-                    <a:ext uri="{9D8B030D-6E8A-4147-A177-3AD203B41FA5}">
-                      <a16:colId xmlns:a16="http://schemas.microsoft.com/office/drawing/2014/main" val="939028161"/>
-                    </a:ext>
-                  </a:extLst>
-                </a:gridCol>
-              </a:tblGrid>
-              <a:tr h="353338">
-                <a:tc>
-                  <a:txBody>
-                    <a:bodyPr/>
-                    <a:lstStyle/>
-                    <a:p>
-                      <a:pPr>
-                        <a:buNone/>
-                      </a:pPr>
-                      <a:r>
-                        <a:rPr lang="zh-TW" altLang="en-US" sz="1400" dirty="0">
-                          <a:latin typeface="Microsoft JhengHei" panose="020B0604030504040204" pitchFamily="34" charset="-120"/>
-                          <a:ea typeface="Microsoft JhengHei" panose="020B0604030504040204" pitchFamily="34" charset="-120"/>
-                        </a:rPr>
-                        <a:t>元件</a:t>
-                      </a:r>
-                    </a:p>
-                  </a:txBody>
-                  <a:tcPr anchor="ctr"/>
-                </a:tc>
-                <a:tc>
-                  <a:txBody>
-                    <a:bodyPr/>
-                    <a:lstStyle/>
-                    <a:p>
-                      <a:pPr>
-                        <a:buNone/>
-                      </a:pPr>
-                      <a:r>
-                        <a:rPr lang="en-US" altLang="zh-TW" sz="1400" dirty="0"/>
-                        <a:t>Azure </a:t>
-                      </a:r>
-                      <a:r>
-                        <a:rPr lang="zh-TW" altLang="en-US" sz="1400" dirty="0"/>
-                        <a:t>服務</a:t>
-                      </a:r>
-                      <a:endParaRPr lang="zh-TW" altLang="en-US" sz="1400" dirty="0">
-                        <a:latin typeface="Microsoft JhengHei" panose="020B0604030504040204" pitchFamily="34" charset="-120"/>
-                        <a:ea typeface="Microsoft JhengHei" panose="020B0604030504040204" pitchFamily="34" charset="-120"/>
-                      </a:endParaRPr>
-                    </a:p>
-                  </a:txBody>
-                  <a:tcPr anchor="ctr"/>
-                </a:tc>
-                <a:tc>
-                  <a:txBody>
-                    <a:bodyPr/>
-                    <a:lstStyle/>
-                    <a:p>
-                      <a:pPr>
-                        <a:buNone/>
-                      </a:pPr>
-                      <a:r>
-                        <a:rPr lang="zh-TW" altLang="en-US" sz="1400" dirty="0">
-                          <a:latin typeface="Microsoft JhengHei" panose="020B0604030504040204" pitchFamily="34" charset="-120"/>
-                          <a:ea typeface="Microsoft JhengHei" panose="020B0604030504040204" pitchFamily="34" charset="-120"/>
-                        </a:rPr>
-                        <a:t>規格</a:t>
-                      </a:r>
-                    </a:p>
-                  </a:txBody>
-                  <a:tcPr anchor="ctr"/>
-                </a:tc>
-                <a:extLst>
-                  <a:ext uri="{0D108BD9-81ED-4DB2-BD59-A6C34878D82A}">
-                    <a16:rowId xmlns:a16="http://schemas.microsoft.com/office/drawing/2014/main" val="961505403"/>
-                  </a:ext>
-                </a:extLst>
-              </a:tr>
-              <a:tr h="363331">
-                <a:tc>
-                  <a:txBody>
-                    <a:bodyPr/>
-                    <a:lstStyle/>
-                    <a:p>
-                      <a:pPr>
-                        <a:buNone/>
-                      </a:pPr>
-                      <a:r>
-                        <a:rPr lang="zh-TW" altLang="en-US" dirty="0"/>
-                        <a:t>入口</a:t>
-                      </a:r>
-                      <a:endParaRPr lang="en" sz="1400" dirty="0">
-                        <a:latin typeface="+mj-lt"/>
-                        <a:ea typeface="Microsoft JhengHei" panose="020B0604030504040204" pitchFamily="34" charset="-120"/>
-                        <a:cs typeface="Consolas" panose="020B0609020204030204" pitchFamily="49" charset="0"/>
-                      </a:endParaRPr>
-                    </a:p>
-                  </a:txBody>
-                  <a:tcPr anchor="ctr"/>
-                </a:tc>
-                <a:tc>
-                  <a:txBody>
-                    <a:bodyPr/>
-                    <a:lstStyle/>
-                    <a:p>
-                      <a:pPr>
-                        <a:buNone/>
-                      </a:pPr>
-                      <a:r>
-                        <a:rPr lang="en" altLang="zh-TW" dirty="0"/>
-                        <a:t>Azure Front Door Standard </a:t>
-                      </a:r>
-                      <a:r>
-                        <a:rPr lang="zh-TW" altLang="en" dirty="0"/>
-                        <a:t>＋ </a:t>
-                      </a:r>
-                      <a:r>
-                        <a:rPr lang="en" altLang="zh-TW" dirty="0"/>
-                        <a:t>WAF</a:t>
-                      </a:r>
-                      <a:endParaRPr lang="en" sz="1400" dirty="0">
-                        <a:latin typeface="Microsoft JhengHei" panose="020B0604030504040204" pitchFamily="34" charset="-120"/>
-                        <a:ea typeface="Microsoft JhengHei" panose="020B0604030504040204" pitchFamily="34" charset="-120"/>
-                      </a:endParaRPr>
-                    </a:p>
-                  </a:txBody>
-                  <a:tcPr anchor="ctr"/>
-                </a:tc>
-                <a:tc>
-                  <a:txBody>
-                    <a:bodyPr/>
-                    <a:lstStyle/>
-                    <a:p>
-                      <a:pPr>
-                        <a:buNone/>
-                      </a:pPr>
-                      <a:r>
-                        <a:rPr lang="en-US" altLang="zh-TW" sz="1400" b="0" i="0" u="none" strike="noStrike" cap="none" dirty="0">
-                          <a:solidFill>
-                            <a:srgbClr val="000000"/>
-                          </a:solidFill>
-                          <a:latin typeface="Arial"/>
-                          <a:ea typeface="Arial"/>
-                          <a:cs typeface="Arial"/>
-                          <a:sym typeface="Arial"/>
-                        </a:rPr>
-                        <a:t>1</a:t>
-                      </a:r>
-                      <a:r>
-                        <a:rPr lang="zh-TW" altLang="en-US" dirty="0"/>
-                        <a:t> 組 </a:t>
-                      </a:r>
-                      <a:r>
-                        <a:rPr lang="en" altLang="zh-TW" dirty="0"/>
-                        <a:t>endpoint</a:t>
-                      </a:r>
-                      <a:r>
-                        <a:rPr lang="zh-TW" altLang="en" dirty="0"/>
-                        <a:t>，</a:t>
-                      </a:r>
-                      <a:r>
-                        <a:rPr lang="en" altLang="zh-TW" sz="1400" b="0" i="0" u="none" strike="noStrike" cap="none" dirty="0">
-                          <a:solidFill>
-                            <a:srgbClr val="000000"/>
-                          </a:solidFill>
-                          <a:latin typeface="Arial"/>
-                          <a:ea typeface="Arial"/>
-                          <a:cs typeface="Arial"/>
-                          <a:sym typeface="Arial"/>
-                        </a:rPr>
-                        <a:t>1</a:t>
-                      </a:r>
-                      <a:r>
-                        <a:rPr lang="en" altLang="zh-TW" dirty="0"/>
-                        <a:t> </a:t>
-                      </a:r>
-                      <a:r>
-                        <a:rPr lang="zh-TW" altLang="en-US" dirty="0"/>
-                        <a:t>個 </a:t>
-                      </a:r>
-                      <a:r>
-                        <a:rPr lang="en" altLang="zh-TW" dirty="0"/>
-                        <a:t>backend pool</a:t>
-                      </a:r>
-                      <a:endParaRPr lang="zh-TW" altLang="en-US" sz="1400" dirty="0">
-                        <a:latin typeface="Microsoft JhengHei" panose="020B0604030504040204" pitchFamily="34" charset="-120"/>
-                        <a:ea typeface="Microsoft JhengHei" panose="020B0604030504040204" pitchFamily="34" charset="-120"/>
-                      </a:endParaRPr>
-                    </a:p>
-                  </a:txBody>
-                  <a:tcPr anchor="ctr"/>
-                </a:tc>
-                <a:extLst>
-                  <a:ext uri="{0D108BD9-81ED-4DB2-BD59-A6C34878D82A}">
-                    <a16:rowId xmlns:a16="http://schemas.microsoft.com/office/drawing/2014/main" val="1506681514"/>
-                  </a:ext>
-                </a:extLst>
-              </a:tr>
-              <a:tr h="363331">
-                <a:tc>
-                  <a:txBody>
-                    <a:bodyPr/>
-                    <a:lstStyle/>
-                    <a:p>
-                      <a:pPr>
-                        <a:buNone/>
-                      </a:pPr>
-                      <a:r>
-                        <a:rPr lang="en" sz="1400" dirty="0" err="1">
-                          <a:latin typeface="+mj-lt"/>
-                          <a:ea typeface="Microsoft JhengHei" panose="020B0604030504040204" pitchFamily="34" charset="-120"/>
-                          <a:cs typeface="Consolas" panose="020B0609020204030204" pitchFamily="49" charset="0"/>
-                        </a:rPr>
-                        <a:t>InfoGather</a:t>
-                      </a:r>
-                      <a:r>
-                        <a:rPr lang="en" sz="1400" dirty="0">
-                          <a:latin typeface="+mj-lt"/>
-                          <a:ea typeface="Microsoft JhengHei" panose="020B0604030504040204" pitchFamily="34" charset="-120"/>
-                          <a:cs typeface="Consolas" panose="020B0609020204030204" pitchFamily="49" charset="0"/>
-                        </a:rPr>
-                        <a:t> App</a:t>
-                      </a:r>
-                    </a:p>
-                  </a:txBody>
-                  <a:tcPr anchor="ctr"/>
-                </a:tc>
-                <a:tc>
-                  <a:txBody>
-                    <a:bodyPr/>
-                    <a:lstStyle/>
-                    <a:p>
-                      <a:pPr>
-                        <a:buNone/>
-                      </a:pPr>
-                      <a:r>
-                        <a:rPr lang="en" altLang="zh-TW" dirty="0"/>
-                        <a:t>Azure Container Apps</a:t>
-                      </a:r>
-                      <a:endParaRPr lang="en" sz="1400" dirty="0">
-                        <a:latin typeface="Microsoft JhengHei" panose="020B0604030504040204" pitchFamily="34" charset="-120"/>
-                        <a:ea typeface="Microsoft JhengHei" panose="020B0604030504040204" pitchFamily="34" charset="-120"/>
-                      </a:endParaRPr>
-                    </a:p>
-                  </a:txBody>
-                  <a:tcPr anchor="ctr"/>
-                </a:tc>
-                <a:tc>
-                  <a:txBody>
-                    <a:bodyPr/>
-                    <a:lstStyle/>
-                    <a:p>
-                      <a:pPr>
-                        <a:buNone/>
-                      </a:pPr>
-                      <a:r>
-                        <a:rPr lang="zh-TW" altLang="en-US" dirty="0"/>
-                        <a:t>每個 </a:t>
-                      </a:r>
-                      <a:r>
-                        <a:rPr lang="en" altLang="zh-TW" dirty="0"/>
-                        <a:t>replica 2</a:t>
-                      </a:r>
-                      <a:r>
-                        <a:rPr lang="en" altLang="zh-TW" sz="1400" b="0" i="0" u="none" strike="noStrike" cap="none" dirty="0">
-                          <a:solidFill>
-                            <a:srgbClr val="000000"/>
-                          </a:solidFill>
-                          <a:latin typeface="Arial"/>
-                          <a:ea typeface="Arial"/>
-                          <a:cs typeface="Arial"/>
-                          <a:sym typeface="Arial"/>
-                        </a:rPr>
-                        <a:t> vCPU</a:t>
-                      </a:r>
-                      <a:r>
-                        <a:rPr lang="zh-TW" altLang="en" sz="1400" b="0" i="0" u="none" strike="noStrike" cap="none" dirty="0">
-                          <a:solidFill>
-                            <a:srgbClr val="000000"/>
-                          </a:solidFill>
-                          <a:latin typeface="Arial"/>
-                          <a:ea typeface="Arial"/>
-                          <a:cs typeface="Arial"/>
-                          <a:sym typeface="Arial"/>
-                        </a:rPr>
-                        <a:t>／</a:t>
-                      </a:r>
-                      <a:r>
-                        <a:rPr lang="en" altLang="zh-TW" sz="1400" b="0" i="0" u="none" strike="noStrike" cap="none" dirty="0">
-                          <a:solidFill>
-                            <a:srgbClr val="000000"/>
-                          </a:solidFill>
-                          <a:latin typeface="Arial"/>
-                          <a:ea typeface="Arial"/>
-                          <a:cs typeface="Arial"/>
-                          <a:sym typeface="Arial"/>
-                        </a:rPr>
-                        <a:t>4 GiB RAM</a:t>
-                      </a:r>
-                      <a:r>
-                        <a:rPr lang="zh-TW" altLang="en" dirty="0"/>
-                        <a:t>，</a:t>
-                      </a:r>
-                      <a:r>
-                        <a:rPr lang="en" altLang="zh-TW" sz="1400" b="0" i="0" u="none" strike="noStrike" cap="none" dirty="0">
-                          <a:solidFill>
-                            <a:srgbClr val="000000"/>
-                          </a:solidFill>
-                          <a:latin typeface="Arial"/>
-                          <a:ea typeface="Arial"/>
-                          <a:cs typeface="Arial"/>
-                          <a:sym typeface="Arial"/>
-                        </a:rPr>
-                        <a:t>min 2</a:t>
-                      </a:r>
-                      <a:r>
-                        <a:rPr lang="zh-TW" altLang="en" sz="1400" b="0" i="0" u="none" strike="noStrike" cap="none" dirty="0">
-                          <a:solidFill>
-                            <a:srgbClr val="000000"/>
-                          </a:solidFill>
-                          <a:latin typeface="Arial"/>
-                          <a:ea typeface="Arial"/>
-                          <a:cs typeface="Arial"/>
-                          <a:sym typeface="Arial"/>
-                        </a:rPr>
-                        <a:t>／</a:t>
-                      </a:r>
-                      <a:r>
-                        <a:rPr lang="en" altLang="zh-TW" sz="1400" b="0" i="0" u="none" strike="noStrike" cap="none" dirty="0">
-                          <a:solidFill>
-                            <a:srgbClr val="000000"/>
-                          </a:solidFill>
-                          <a:latin typeface="Arial"/>
-                          <a:ea typeface="Arial"/>
-                          <a:cs typeface="Arial"/>
-                          <a:sym typeface="Arial"/>
-                        </a:rPr>
-                        <a:t>max 6</a:t>
-                      </a:r>
-                      <a:endParaRPr lang="zh-TW" altLang="en-US" sz="1400" dirty="0">
-                        <a:latin typeface="Microsoft JhengHei" panose="020B0604030504040204" pitchFamily="34" charset="-120"/>
-                        <a:ea typeface="Microsoft JhengHei" panose="020B0604030504040204" pitchFamily="34" charset="-120"/>
-                      </a:endParaRPr>
-                    </a:p>
-                  </a:txBody>
-                  <a:tcPr anchor="ctr"/>
-                </a:tc>
-                <a:extLst>
-                  <a:ext uri="{0D108BD9-81ED-4DB2-BD59-A6C34878D82A}">
-                    <a16:rowId xmlns:a16="http://schemas.microsoft.com/office/drawing/2014/main" val="1157993873"/>
-                  </a:ext>
-                </a:extLst>
-              </a:tr>
-              <a:tr h="363331">
-                <a:tc>
-                  <a:txBody>
-                    <a:bodyPr/>
-                    <a:lstStyle/>
-                    <a:p>
-                      <a:pPr>
-                        <a:buNone/>
-                      </a:pPr>
-                      <a:r>
-                        <a:rPr lang="en" sz="1400" dirty="0" err="1">
-                          <a:latin typeface="+mj-lt"/>
-                          <a:ea typeface="Microsoft JhengHei" panose="020B0604030504040204" pitchFamily="34" charset="-120"/>
-                          <a:cs typeface="Consolas" panose="020B0609020204030204" pitchFamily="49" charset="0"/>
-                        </a:rPr>
-                        <a:t>InfoGather</a:t>
-                      </a:r>
-                      <a:r>
-                        <a:rPr lang="en" sz="1400" dirty="0">
-                          <a:latin typeface="+mj-lt"/>
-                          <a:ea typeface="Microsoft JhengHei" panose="020B0604030504040204" pitchFamily="34" charset="-120"/>
-                          <a:cs typeface="Consolas" panose="020B0609020204030204" pitchFamily="49" charset="0"/>
-                        </a:rPr>
-                        <a:t> Worker</a:t>
-                      </a:r>
-                    </a:p>
-                  </a:txBody>
-                  <a:tcPr anchor="ctr"/>
-                </a:tc>
-                <a:tc>
-                  <a:txBody>
-                    <a:bodyPr/>
-                    <a:lstStyle/>
-                    <a:p>
-                      <a:pPr>
-                        <a:buNone/>
-                      </a:pPr>
-                      <a:r>
-                        <a:rPr lang="en" altLang="zh-TW" dirty="0"/>
-                        <a:t>Azure Container Apps</a:t>
-                      </a:r>
-                      <a:endParaRPr lang="en" sz="1400" dirty="0">
-                        <a:latin typeface="Microsoft JhengHei" panose="020B0604030504040204" pitchFamily="34" charset="-120"/>
-                        <a:ea typeface="Microsoft JhengHei" panose="020B0604030504040204" pitchFamily="34" charset="-120"/>
-                      </a:endParaRPr>
-                    </a:p>
-                  </a:txBody>
-                  <a:tcPr anchor="ctr"/>
-                </a:tc>
-                <a:tc>
-                  <a:txBody>
-                    <a:bodyPr/>
-                    <a:lstStyle/>
-                    <a:p>
-                      <a:pPr>
-                        <a:buNone/>
-                      </a:pPr>
-                      <a:r>
-                        <a:rPr lang="zh-TW" altLang="en-US" dirty="0"/>
-                        <a:t>每個 </a:t>
-                      </a:r>
-                      <a:r>
-                        <a:rPr lang="en" altLang="zh-TW" dirty="0"/>
-                        <a:t>replica </a:t>
-                      </a:r>
-                      <a:r>
-                        <a:rPr lang="en" altLang="zh-TW" sz="1400" b="0" i="0" u="none" strike="noStrike" cap="none" dirty="0">
-                          <a:solidFill>
-                            <a:srgbClr val="000000"/>
-                          </a:solidFill>
-                          <a:latin typeface="Arial"/>
-                          <a:ea typeface="Arial"/>
-                          <a:cs typeface="Arial"/>
-                          <a:sym typeface="Arial"/>
-                        </a:rPr>
-                        <a:t>2 vCPU</a:t>
-                      </a:r>
-                      <a:r>
-                        <a:rPr lang="zh-TW" altLang="en" sz="1400" b="0" i="0" u="none" strike="noStrike" cap="none" dirty="0">
-                          <a:solidFill>
-                            <a:srgbClr val="000000"/>
-                          </a:solidFill>
-                          <a:latin typeface="Arial"/>
-                          <a:ea typeface="Arial"/>
-                          <a:cs typeface="Arial"/>
-                          <a:sym typeface="Arial"/>
-                        </a:rPr>
-                        <a:t>／</a:t>
-                      </a:r>
-                      <a:r>
-                        <a:rPr lang="en" altLang="zh-TW" sz="1400" b="0" i="0" u="none" strike="noStrike" cap="none" dirty="0">
-                          <a:solidFill>
-                            <a:srgbClr val="000000"/>
-                          </a:solidFill>
-                          <a:latin typeface="Arial"/>
-                          <a:ea typeface="Arial"/>
-                          <a:cs typeface="Arial"/>
-                          <a:sym typeface="Arial"/>
-                        </a:rPr>
-                        <a:t>4 GiB RAM</a:t>
-                      </a:r>
-                      <a:r>
-                        <a:rPr lang="zh-TW" altLang="en" dirty="0"/>
-                        <a:t>，</a:t>
-                      </a:r>
-                      <a:r>
-                        <a:rPr lang="en" altLang="zh-TW" sz="1400" b="0" i="0" u="none" strike="noStrike" cap="none" dirty="0">
-                          <a:solidFill>
-                            <a:srgbClr val="000000"/>
-                          </a:solidFill>
-                          <a:latin typeface="Arial"/>
-                          <a:ea typeface="Arial"/>
-                          <a:cs typeface="Arial"/>
-                          <a:sym typeface="Arial"/>
-                        </a:rPr>
-                        <a:t>min 8</a:t>
-                      </a:r>
-                      <a:r>
-                        <a:rPr lang="zh-TW" altLang="en" sz="1400" b="0" i="0" u="none" strike="noStrike" cap="none" dirty="0">
-                          <a:solidFill>
-                            <a:srgbClr val="000000"/>
-                          </a:solidFill>
-                          <a:latin typeface="Arial"/>
-                          <a:ea typeface="Arial"/>
-                          <a:cs typeface="Arial"/>
-                          <a:sym typeface="Arial"/>
-                        </a:rPr>
-                        <a:t>／</a:t>
-                      </a:r>
-                      <a:r>
-                        <a:rPr lang="en" altLang="zh-TW" sz="1400" b="0" i="0" u="none" strike="noStrike" cap="none" dirty="0">
-                          <a:solidFill>
-                            <a:srgbClr val="000000"/>
-                          </a:solidFill>
-                          <a:latin typeface="Arial"/>
-                          <a:ea typeface="Arial"/>
-                          <a:cs typeface="Arial"/>
-                          <a:sym typeface="Arial"/>
-                        </a:rPr>
-                        <a:t>max 16</a:t>
-                      </a:r>
-                      <a:endParaRPr lang="en" sz="1400" dirty="0">
-                        <a:latin typeface="Microsoft JhengHei" panose="020B0604030504040204" pitchFamily="34" charset="-120"/>
-                        <a:ea typeface="Microsoft JhengHei" panose="020B0604030504040204" pitchFamily="34" charset="-120"/>
-                      </a:endParaRPr>
-                    </a:p>
-                  </a:txBody>
-                  <a:tcPr anchor="ctr"/>
-                </a:tc>
-                <a:extLst>
-                  <a:ext uri="{0D108BD9-81ED-4DB2-BD59-A6C34878D82A}">
-                    <a16:rowId xmlns:a16="http://schemas.microsoft.com/office/drawing/2014/main" val="4290922300"/>
-                  </a:ext>
-                </a:extLst>
-              </a:tr>
-              <a:tr h="363331">
-                <a:tc>
-                  <a:txBody>
-                    <a:bodyPr/>
-                    <a:lstStyle/>
-                    <a:p>
-                      <a:pPr marL="0" marR="0" lvl="0" indent="0" algn="l" defTabSz="914400" rtl="0" eaLnBrk="1" fontAlgn="auto" latinLnBrk="0" hangingPunct="1">
-                        <a:lnSpc>
-                          <a:spcPct val="100000"/>
-                        </a:lnSpc>
-                        <a:spcBef>
-                          <a:spcPts val="0"/>
-                        </a:spcBef>
-                        <a:spcAft>
-                          <a:spcPts val="0"/>
-                        </a:spcAft>
-                        <a:buClr>
-                          <a:srgbClr val="000000"/>
-                        </a:buClr>
-                        <a:buSzTx/>
-                        <a:buFont typeface="Arial"/>
-                        <a:buNone/>
-                        <a:tabLst/>
-                        <a:defRPr/>
-                      </a:pPr>
-                      <a:r>
-                        <a:rPr lang="en" altLang="zh-TW" sz="1400" dirty="0" err="1">
-                          <a:latin typeface="+mj-lt"/>
-                          <a:ea typeface="Microsoft JhengHei" panose="020B0604030504040204" pitchFamily="34" charset="-120"/>
-                          <a:cs typeface="Consolas" panose="020B0609020204030204" pitchFamily="49" charset="0"/>
-                        </a:rPr>
-                        <a:t>InfoGather</a:t>
-                      </a:r>
-                      <a:r>
-                        <a:rPr lang="en" altLang="zh-TW" sz="1400" dirty="0">
-                          <a:latin typeface="+mj-lt"/>
-                          <a:ea typeface="Microsoft JhengHei" panose="020B0604030504040204" pitchFamily="34" charset="-120"/>
-                          <a:cs typeface="Consolas" panose="020B0609020204030204" pitchFamily="49" charset="0"/>
-                        </a:rPr>
-                        <a:t> Scheduler</a:t>
-                      </a:r>
-                    </a:p>
-                  </a:txBody>
-                  <a:tcPr anchor="ctr"/>
-                </a:tc>
-                <a:tc>
-                  <a:txBody>
-                    <a:bodyPr/>
-                    <a:lstStyle/>
-                    <a:p>
-                      <a:pPr>
-                        <a:buNone/>
-                      </a:pPr>
-                      <a:r>
-                        <a:rPr lang="en" altLang="zh-TW" dirty="0"/>
-                        <a:t>Azure Container Apps</a:t>
-                      </a:r>
-                      <a:endParaRPr lang="en" sz="1400" dirty="0">
-                        <a:latin typeface="Microsoft JhengHei" panose="020B0604030504040204" pitchFamily="34" charset="-120"/>
-                        <a:ea typeface="Microsoft JhengHei" panose="020B0604030504040204" pitchFamily="34" charset="-120"/>
-                      </a:endParaRPr>
-                    </a:p>
-                  </a:txBody>
-                  <a:tcPr anchor="ctr"/>
-                </a:tc>
-                <a:tc>
-                  <a:txBody>
-                    <a:bodyPr/>
-                    <a:lstStyle/>
-                    <a:p>
-                      <a:pPr>
-                        <a:buNone/>
-                      </a:pPr>
-                      <a:r>
-                        <a:rPr lang="zh-TW" altLang="en-US" dirty="0"/>
-                        <a:t>每個 </a:t>
-                      </a:r>
-                      <a:r>
-                        <a:rPr lang="en" altLang="zh-TW" dirty="0"/>
-                        <a:t>replica </a:t>
-                      </a:r>
-                      <a:r>
-                        <a:rPr lang="en" altLang="zh-TW" sz="1400" b="0" i="0" u="none" strike="noStrike" cap="none" dirty="0">
-                          <a:solidFill>
-                            <a:srgbClr val="000000"/>
-                          </a:solidFill>
-                          <a:latin typeface="Arial"/>
-                          <a:cs typeface="Arial"/>
-                          <a:sym typeface="Arial"/>
-                        </a:rPr>
-                        <a:t>1</a:t>
-                      </a:r>
-                      <a:r>
-                        <a:rPr lang="en" altLang="zh-TW" sz="1400" b="0" i="0" u="none" strike="noStrike" cap="none" dirty="0">
-                          <a:solidFill>
-                            <a:srgbClr val="000000"/>
-                          </a:solidFill>
-                          <a:latin typeface="Arial"/>
-                          <a:ea typeface="Arial"/>
-                          <a:cs typeface="Arial"/>
-                          <a:sym typeface="Arial"/>
-                        </a:rPr>
-                        <a:t> vCPU</a:t>
-                      </a:r>
-                      <a:r>
-                        <a:rPr lang="zh-TW" altLang="en" sz="1400" b="0" i="0" u="none" strike="noStrike" cap="none" dirty="0">
-                          <a:solidFill>
-                            <a:srgbClr val="000000"/>
-                          </a:solidFill>
-                          <a:latin typeface="Arial"/>
-                          <a:ea typeface="Arial"/>
-                          <a:cs typeface="Arial"/>
-                          <a:sym typeface="Arial"/>
-                        </a:rPr>
-                        <a:t>／</a:t>
-                      </a:r>
-                      <a:r>
-                        <a:rPr lang="en" altLang="zh-TW" sz="1400" b="0" i="0" u="none" strike="noStrike" cap="none" dirty="0">
-                          <a:solidFill>
-                            <a:srgbClr val="000000"/>
-                          </a:solidFill>
-                          <a:latin typeface="Arial"/>
-                          <a:ea typeface="Arial"/>
-                          <a:cs typeface="Arial"/>
-                          <a:sym typeface="Arial"/>
-                        </a:rPr>
-                        <a:t>2 GiB RAM</a:t>
-                      </a:r>
-                      <a:r>
-                        <a:rPr lang="zh-TW" altLang="en" dirty="0"/>
-                        <a:t>，</a:t>
-                      </a:r>
-                      <a:r>
-                        <a:rPr lang="en" altLang="zh-TW" sz="1400" b="0" i="0" u="none" strike="noStrike" cap="none" dirty="0">
-                          <a:solidFill>
-                            <a:srgbClr val="000000"/>
-                          </a:solidFill>
-                          <a:latin typeface="Arial"/>
-                          <a:ea typeface="Arial"/>
-                          <a:cs typeface="Arial"/>
-                          <a:sym typeface="Arial"/>
-                        </a:rPr>
-                        <a:t>min 1</a:t>
-                      </a:r>
-                      <a:r>
-                        <a:rPr lang="zh-TW" altLang="en" sz="1400" b="0" i="0" u="none" strike="noStrike" cap="none" dirty="0">
-                          <a:solidFill>
-                            <a:srgbClr val="000000"/>
-                          </a:solidFill>
-                          <a:latin typeface="Arial"/>
-                          <a:ea typeface="Arial"/>
-                          <a:cs typeface="Arial"/>
-                          <a:sym typeface="Arial"/>
-                        </a:rPr>
-                        <a:t>／</a:t>
-                      </a:r>
-                      <a:r>
-                        <a:rPr lang="en" altLang="zh-TW" sz="1400" b="0" i="0" u="none" strike="noStrike" cap="none" dirty="0">
-                          <a:solidFill>
-                            <a:srgbClr val="000000"/>
-                          </a:solidFill>
-                          <a:latin typeface="Arial"/>
-                          <a:ea typeface="Arial"/>
-                          <a:cs typeface="Arial"/>
-                          <a:sym typeface="Arial"/>
-                        </a:rPr>
-                        <a:t>max 1</a:t>
-                      </a:r>
-                      <a:endParaRPr lang="zh-TW" altLang="en-US" sz="1400" dirty="0">
-                        <a:latin typeface="Microsoft JhengHei" panose="020B0604030504040204" pitchFamily="34" charset="-120"/>
-                        <a:ea typeface="Microsoft JhengHei" panose="020B0604030504040204" pitchFamily="34" charset="-120"/>
-                      </a:endParaRPr>
-                    </a:p>
-                  </a:txBody>
-                  <a:tcPr anchor="ctr"/>
-                </a:tc>
-                <a:extLst>
-                  <a:ext uri="{0D108BD9-81ED-4DB2-BD59-A6C34878D82A}">
-                    <a16:rowId xmlns:a16="http://schemas.microsoft.com/office/drawing/2014/main" val="1620069153"/>
-                  </a:ext>
-                </a:extLst>
-              </a:tr>
-              <a:tr h="363331">
-                <a:tc>
-                  <a:txBody>
-                    <a:bodyPr/>
-                    <a:lstStyle/>
-                    <a:p>
-                      <a:pPr>
-                        <a:buNone/>
-                      </a:pPr>
-                      <a:r>
-                        <a:rPr lang="en" altLang="zh-TW" sz="1400" b="0" i="0" u="none" strike="noStrike" cap="none" dirty="0">
-                          <a:solidFill>
-                            <a:srgbClr val="000000"/>
-                          </a:solidFill>
-                          <a:latin typeface="Arial"/>
-                          <a:ea typeface="Microsoft JhengHei" panose="020B0604030504040204" pitchFamily="34" charset="-120"/>
-                          <a:cs typeface="Consolas" panose="020B0609020204030204" pitchFamily="49" charset="0"/>
-                          <a:sym typeface="Arial"/>
-                        </a:rPr>
-                        <a:t>MongoDB</a:t>
-                      </a:r>
-                      <a:endParaRPr lang="en" sz="1400" dirty="0">
-                        <a:latin typeface="+mj-lt"/>
-                        <a:ea typeface="Microsoft JhengHei" panose="020B0604030504040204" pitchFamily="34" charset="-120"/>
-                        <a:cs typeface="Consolas" panose="020B0609020204030204" pitchFamily="49" charset="0"/>
-                      </a:endParaRPr>
-                    </a:p>
-                  </a:txBody>
-                  <a:tcPr anchor="ctr"/>
-                </a:tc>
-                <a:tc>
-                  <a:txBody>
-                    <a:bodyPr/>
-                    <a:lstStyle/>
-                    <a:p>
-                      <a:pPr>
-                        <a:buNone/>
-                      </a:pPr>
-                      <a:r>
-                        <a:rPr lang="en" altLang="zh-TW" dirty="0"/>
-                        <a:t>MongoDB Atlas on Azure</a:t>
-                      </a:r>
-                      <a:endParaRPr lang="en" sz="1400" dirty="0">
-                        <a:latin typeface="Microsoft JhengHei" panose="020B0604030504040204" pitchFamily="34" charset="-120"/>
-                        <a:ea typeface="Microsoft JhengHei" panose="020B0604030504040204" pitchFamily="34" charset="-120"/>
-                      </a:endParaRPr>
-                    </a:p>
-                  </a:txBody>
-                  <a:tcPr anchor="ctr"/>
-                </a:tc>
-                <a:tc>
-                  <a:txBody>
-                    <a:bodyPr/>
-                    <a:lstStyle/>
-                    <a:p>
-                      <a:pPr>
-                        <a:buNone/>
-                      </a:pPr>
-                      <a:r>
-                        <a:rPr lang="en" altLang="zh-TW" sz="1400" b="0" i="0" u="none" strike="noStrike" cap="none" dirty="0">
-                          <a:solidFill>
-                            <a:srgbClr val="000000"/>
-                          </a:solidFill>
-                          <a:latin typeface="Arial"/>
-                          <a:ea typeface="Arial"/>
-                          <a:cs typeface="Arial"/>
-                          <a:sym typeface="Arial"/>
-                        </a:rPr>
-                        <a:t>M40</a:t>
-                      </a:r>
-                      <a:r>
-                        <a:rPr lang="zh-TW" altLang="en" dirty="0"/>
-                        <a:t>，</a:t>
-                      </a:r>
-                      <a:r>
-                        <a:rPr lang="en" altLang="zh-TW" sz="1400" b="0" i="0" u="none" strike="noStrike" cap="none" dirty="0">
-                          <a:solidFill>
-                            <a:srgbClr val="000000"/>
-                          </a:solidFill>
-                          <a:latin typeface="Arial"/>
-                          <a:ea typeface="Arial"/>
-                          <a:cs typeface="Arial"/>
-                          <a:sym typeface="Arial"/>
-                        </a:rPr>
-                        <a:t>3</a:t>
-                      </a:r>
-                      <a:r>
-                        <a:rPr lang="en" altLang="zh-TW" dirty="0"/>
-                        <a:t> nodes</a:t>
-                      </a:r>
-                      <a:r>
-                        <a:rPr lang="zh-TW" altLang="en" dirty="0"/>
-                        <a:t>，</a:t>
-                      </a:r>
-                      <a:r>
-                        <a:rPr lang="en" altLang="zh-TW" dirty="0"/>
-                        <a:t>storage </a:t>
-                      </a:r>
-                      <a:r>
-                        <a:rPr lang="en" altLang="zh-TW" sz="1400" b="0" i="0" u="none" strike="noStrike" cap="none" dirty="0">
-                          <a:solidFill>
-                            <a:srgbClr val="000000"/>
-                          </a:solidFill>
-                          <a:latin typeface="Arial"/>
-                          <a:cs typeface="Arial"/>
-                          <a:sym typeface="Arial"/>
-                        </a:rPr>
-                        <a:t>512</a:t>
-                      </a:r>
-                      <a:r>
-                        <a:rPr lang="en" altLang="zh-TW" sz="1400" b="0" i="0" u="none" strike="noStrike" cap="none" dirty="0">
-                          <a:solidFill>
-                            <a:srgbClr val="000000"/>
-                          </a:solidFill>
-                          <a:latin typeface="Arial"/>
-                          <a:ea typeface="Arial"/>
-                          <a:cs typeface="Arial"/>
-                          <a:sym typeface="Arial"/>
-                        </a:rPr>
-                        <a:t> GB</a:t>
-                      </a:r>
-                      <a:endParaRPr lang="en" sz="1400" dirty="0">
-                        <a:latin typeface="Microsoft JhengHei" panose="020B0604030504040204" pitchFamily="34" charset="-120"/>
-                        <a:ea typeface="Microsoft JhengHei" panose="020B0604030504040204" pitchFamily="34" charset="-120"/>
-                      </a:endParaRPr>
-                    </a:p>
-                  </a:txBody>
-                  <a:tcPr anchor="ctr"/>
-                </a:tc>
-                <a:extLst>
-                  <a:ext uri="{0D108BD9-81ED-4DB2-BD59-A6C34878D82A}">
-                    <a16:rowId xmlns:a16="http://schemas.microsoft.com/office/drawing/2014/main" val="2359224097"/>
-                  </a:ext>
-                </a:extLst>
-              </a:tr>
-              <a:tr h="363331">
-                <a:tc>
-                  <a:txBody>
-                    <a:bodyPr/>
-                    <a:lstStyle/>
-                    <a:p>
-                      <a:pPr>
-                        <a:buNone/>
-                      </a:pPr>
-                      <a:r>
-                        <a:rPr lang="en" altLang="zh-TW" sz="1400" b="0" i="0" u="none" strike="noStrike" cap="none" dirty="0">
-                          <a:solidFill>
-                            <a:srgbClr val="000000"/>
-                          </a:solidFill>
-                          <a:latin typeface="Arial"/>
-                          <a:ea typeface="Microsoft JhengHei" panose="020B0604030504040204" pitchFamily="34" charset="-120"/>
-                          <a:cs typeface="Consolas" panose="020B0609020204030204" pitchFamily="49" charset="0"/>
-                          <a:sym typeface="Arial"/>
-                        </a:rPr>
-                        <a:t>Redis</a:t>
-                      </a:r>
-                      <a:endParaRPr lang="en" sz="1400" dirty="0">
-                        <a:latin typeface="+mj-lt"/>
-                        <a:ea typeface="Microsoft JhengHei" panose="020B0604030504040204" pitchFamily="34" charset="-120"/>
-                        <a:cs typeface="Consolas" panose="020B0609020204030204" pitchFamily="49" charset="0"/>
-                      </a:endParaRPr>
-                    </a:p>
-                  </a:txBody>
-                  <a:tcPr anchor="ctr"/>
-                </a:tc>
-                <a:tc>
-                  <a:txBody>
-                    <a:bodyPr/>
-                    <a:lstStyle/>
-                    <a:p>
-                      <a:pPr>
-                        <a:buNone/>
-                      </a:pPr>
-                      <a:r>
-                        <a:rPr lang="en" altLang="zh-TW" dirty="0"/>
-                        <a:t>Azure Managed Redis</a:t>
-                      </a:r>
-                      <a:endParaRPr lang="en" sz="1400" dirty="0">
-                        <a:latin typeface="Microsoft JhengHei" panose="020B0604030504040204" pitchFamily="34" charset="-120"/>
-                        <a:ea typeface="Microsoft JhengHei" panose="020B0604030504040204" pitchFamily="34" charset="-120"/>
-                      </a:endParaRPr>
-                    </a:p>
-                  </a:txBody>
-                  <a:tcPr anchor="ctr"/>
-                </a:tc>
-                <a:tc>
-                  <a:txBody>
-                    <a:bodyPr/>
-                    <a:lstStyle/>
-                    <a:p>
-                      <a:pPr>
-                        <a:buNone/>
-                      </a:pPr>
-                      <a:r>
-                        <a:rPr lang="en" altLang="zh-TW" sz="1400" b="0" i="0" u="none" strike="noStrike" cap="none" dirty="0">
-                          <a:solidFill>
-                            <a:srgbClr val="000000"/>
-                          </a:solidFill>
-                          <a:latin typeface="Arial"/>
-                          <a:ea typeface="Arial"/>
-                          <a:cs typeface="Arial"/>
-                          <a:sym typeface="Arial"/>
-                        </a:rPr>
-                        <a:t>12 GB</a:t>
-                      </a:r>
-                      <a:r>
-                        <a:rPr lang="en" altLang="zh-TW" dirty="0"/>
-                        <a:t> </a:t>
-                      </a:r>
-                      <a:r>
-                        <a:rPr lang="zh-TW" altLang="en-US" dirty="0"/>
-                        <a:t>記憶體起，</a:t>
-                      </a:r>
-                      <a:r>
-                        <a:rPr lang="en" altLang="zh-TW" dirty="0"/>
-                        <a:t>HA</a:t>
-                      </a:r>
-                      <a:r>
-                        <a:rPr lang="zh-TW" altLang="en" dirty="0"/>
-                        <a:t>、</a:t>
-                      </a:r>
-                      <a:r>
-                        <a:rPr lang="en" altLang="zh-TW" dirty="0"/>
-                        <a:t>zone redundancy</a:t>
-                      </a:r>
-                      <a:r>
-                        <a:rPr lang="zh-TW" altLang="en" dirty="0"/>
-                        <a:t>、</a:t>
-                      </a:r>
-                      <a:r>
-                        <a:rPr lang="en" altLang="zh-TW" dirty="0"/>
-                        <a:t>persistence</a:t>
-                      </a:r>
-                      <a:endParaRPr lang="en" sz="1400" dirty="0">
-                        <a:latin typeface="Microsoft JhengHei" panose="020B0604030504040204" pitchFamily="34" charset="-120"/>
-                        <a:ea typeface="Microsoft JhengHei" panose="020B0604030504040204" pitchFamily="34" charset="-120"/>
-                      </a:endParaRPr>
-                    </a:p>
-                  </a:txBody>
-                  <a:tcPr anchor="ctr"/>
-                </a:tc>
-                <a:extLst>
-                  <a:ext uri="{0D108BD9-81ED-4DB2-BD59-A6C34878D82A}">
-                    <a16:rowId xmlns:a16="http://schemas.microsoft.com/office/drawing/2014/main" val="2794067812"/>
-                  </a:ext>
-                </a:extLst>
-              </a:tr>
-              <a:tr h="363331">
-                <a:tc>
-                  <a:txBody>
-                    <a:bodyPr/>
-                    <a:lstStyle/>
-                    <a:p>
-                      <a:pPr marL="0" marR="0" lvl="0" indent="0" algn="l" defTabSz="914400" rtl="0" eaLnBrk="1" fontAlgn="auto" latinLnBrk="0" hangingPunct="1">
-                        <a:lnSpc>
-                          <a:spcPct val="100000"/>
-                        </a:lnSpc>
-                        <a:spcBef>
-                          <a:spcPts val="0"/>
-                        </a:spcBef>
-                        <a:spcAft>
-                          <a:spcPts val="0"/>
-                        </a:spcAft>
-                        <a:buClr>
-                          <a:srgbClr val="000000"/>
-                        </a:buClr>
-                        <a:buSzTx/>
-                        <a:buFont typeface="Arial"/>
-                        <a:buNone/>
-                        <a:tabLst/>
-                        <a:defRPr/>
-                      </a:pPr>
-                      <a:r>
-                        <a:rPr lang="en" altLang="zh-TW" sz="1400" b="0" i="0" u="none" strike="noStrike" cap="none" dirty="0">
-                          <a:solidFill>
-                            <a:srgbClr val="000000"/>
-                          </a:solidFill>
-                          <a:latin typeface="Arial"/>
-                          <a:ea typeface="Arial"/>
-                          <a:cs typeface="Arial"/>
-                          <a:sym typeface="Arial"/>
-                        </a:rPr>
-                        <a:t>Copilot CLI Server</a:t>
-                      </a:r>
-                      <a:endParaRPr lang="en" altLang="zh-TW" sz="1400" b="0" i="0" u="none" strike="noStrike" cap="none" dirty="0">
-                        <a:solidFill>
-                          <a:srgbClr val="000000"/>
-                        </a:solidFill>
-                        <a:latin typeface="Arial"/>
-                        <a:ea typeface="Microsoft JhengHei" panose="020B0604030504040204" pitchFamily="34" charset="-120"/>
-                        <a:cs typeface="Consolas" panose="020B0609020204030204" pitchFamily="49" charset="0"/>
-                        <a:sym typeface="Arial"/>
-                      </a:endParaRPr>
-                    </a:p>
-                  </a:txBody>
-                  <a:tcPr anchor="ctr"/>
-                </a:tc>
-                <a:tc>
-                  <a:txBody>
-                    <a:bodyPr/>
-                    <a:lstStyle/>
-                    <a:p>
-                      <a:pPr>
-                        <a:buNone/>
-                      </a:pPr>
-                      <a:r>
-                        <a:rPr lang="en" altLang="zh-TW" dirty="0"/>
-                        <a:t>Azure Container Apps</a:t>
-                      </a:r>
-                      <a:endParaRPr lang="en" sz="1400" dirty="0">
-                        <a:latin typeface="Microsoft JhengHei" panose="020B0604030504040204" pitchFamily="34" charset="-120"/>
-                        <a:ea typeface="Microsoft JhengHei" panose="020B0604030504040204" pitchFamily="34" charset="-120"/>
-                      </a:endParaRPr>
-                    </a:p>
-                  </a:txBody>
-                  <a:tcPr anchor="ctr"/>
-                </a:tc>
-                <a:tc>
-                  <a:txBody>
-                    <a:bodyPr/>
-                    <a:lstStyle/>
-                    <a:p>
-                      <a:pPr>
-                        <a:buNone/>
-                      </a:pPr>
-                      <a:r>
-                        <a:rPr lang="zh-TW" altLang="en-US" dirty="0"/>
-                        <a:t>每個 </a:t>
-                      </a:r>
-                      <a:r>
-                        <a:rPr lang="en" altLang="zh-TW" dirty="0"/>
-                        <a:t>replica </a:t>
-                      </a:r>
-                      <a:r>
-                        <a:rPr lang="en" altLang="zh-TW" sz="1400" b="0" i="0" u="none" strike="noStrike" cap="none" dirty="0">
-                          <a:solidFill>
-                            <a:srgbClr val="000000"/>
-                          </a:solidFill>
-                          <a:latin typeface="Arial"/>
-                          <a:cs typeface="Arial"/>
-                          <a:sym typeface="Arial"/>
-                        </a:rPr>
-                        <a:t>2</a:t>
-                      </a:r>
-                      <a:r>
-                        <a:rPr lang="en" altLang="zh-TW" sz="1400" b="0" i="0" u="none" strike="noStrike" cap="none" dirty="0">
-                          <a:solidFill>
-                            <a:srgbClr val="000000"/>
-                          </a:solidFill>
-                          <a:latin typeface="Arial"/>
-                          <a:ea typeface="Arial"/>
-                          <a:cs typeface="Arial"/>
-                          <a:sym typeface="Arial"/>
-                        </a:rPr>
-                        <a:t> vCPU</a:t>
-                      </a:r>
-                      <a:r>
-                        <a:rPr lang="zh-TW" altLang="en" sz="1400" b="0" i="0" u="none" strike="noStrike" cap="none" dirty="0">
-                          <a:solidFill>
-                            <a:srgbClr val="000000"/>
-                          </a:solidFill>
-                          <a:latin typeface="Arial"/>
-                          <a:ea typeface="Arial"/>
-                          <a:cs typeface="Arial"/>
-                          <a:sym typeface="Arial"/>
-                        </a:rPr>
-                        <a:t>／</a:t>
-                      </a:r>
-                      <a:r>
-                        <a:rPr lang="en" altLang="zh-TW" sz="1400" b="0" i="0" u="none" strike="noStrike" cap="none" dirty="0">
-                          <a:solidFill>
-                            <a:srgbClr val="000000"/>
-                          </a:solidFill>
-                          <a:latin typeface="Arial"/>
-                          <a:ea typeface="Arial"/>
-                          <a:cs typeface="Arial"/>
-                          <a:sym typeface="Arial"/>
-                        </a:rPr>
-                        <a:t>4 GiB RAM</a:t>
-                      </a:r>
-                      <a:r>
-                        <a:rPr lang="zh-TW" altLang="en" dirty="0"/>
-                        <a:t>，</a:t>
-                      </a:r>
-                      <a:r>
-                        <a:rPr lang="en" altLang="zh-TW" sz="1400" b="0" i="0" u="none" strike="noStrike" cap="none" dirty="0">
-                          <a:solidFill>
-                            <a:srgbClr val="000000"/>
-                          </a:solidFill>
-                          <a:latin typeface="Arial"/>
-                          <a:ea typeface="Arial"/>
-                          <a:cs typeface="Arial"/>
-                          <a:sym typeface="Arial"/>
-                        </a:rPr>
-                        <a:t>min 1</a:t>
-                      </a:r>
-                      <a:r>
-                        <a:rPr lang="zh-TW" altLang="en" sz="1400" b="0" i="0" u="none" strike="noStrike" cap="none" dirty="0">
-                          <a:solidFill>
-                            <a:srgbClr val="000000"/>
-                          </a:solidFill>
-                          <a:latin typeface="Arial"/>
-                          <a:ea typeface="Arial"/>
-                          <a:cs typeface="Arial"/>
-                          <a:sym typeface="Arial"/>
-                        </a:rPr>
-                        <a:t>／</a:t>
-                      </a:r>
-                      <a:r>
-                        <a:rPr lang="en" altLang="zh-TW" sz="1400" b="0" i="0" u="none" strike="noStrike" cap="none" dirty="0">
-                          <a:solidFill>
-                            <a:srgbClr val="000000"/>
-                          </a:solidFill>
-                          <a:latin typeface="Arial"/>
-                          <a:ea typeface="Arial"/>
-                          <a:cs typeface="Arial"/>
-                          <a:sym typeface="Arial"/>
-                        </a:rPr>
-                        <a:t>max 2</a:t>
-                      </a:r>
-                      <a:endParaRPr lang="en" sz="1400" dirty="0">
-                        <a:latin typeface="Microsoft JhengHei" panose="020B0604030504040204" pitchFamily="34" charset="-120"/>
-                        <a:ea typeface="Microsoft JhengHei" panose="020B0604030504040204" pitchFamily="34" charset="-120"/>
-                      </a:endParaRPr>
-                    </a:p>
-                  </a:txBody>
-                  <a:tcPr anchor="ctr"/>
-                </a:tc>
-                <a:extLst>
-                  <a:ext uri="{0D108BD9-81ED-4DB2-BD59-A6C34878D82A}">
-                    <a16:rowId xmlns:a16="http://schemas.microsoft.com/office/drawing/2014/main" val="3889693032"/>
-                  </a:ext>
-                </a:extLst>
-              </a:tr>
-              <a:tr h="363331">
-                <a:tc>
-                  <a:txBody>
-                    <a:bodyPr/>
-                    <a:lstStyle/>
-                    <a:p>
-                      <a:pPr marL="0" marR="0" lvl="0" indent="0" algn="l" defTabSz="914400" rtl="0" eaLnBrk="1" fontAlgn="auto" latinLnBrk="0" hangingPunct="1">
-                        <a:lnSpc>
-                          <a:spcPct val="100000"/>
-                        </a:lnSpc>
-                        <a:spcBef>
-                          <a:spcPts val="0"/>
-                        </a:spcBef>
-                        <a:spcAft>
-                          <a:spcPts val="0"/>
-                        </a:spcAft>
-                        <a:buClr>
-                          <a:srgbClr val="000000"/>
-                        </a:buClr>
-                        <a:buSzTx/>
-                        <a:buFont typeface="Arial"/>
-                        <a:buNone/>
-                        <a:tabLst/>
-                        <a:defRPr/>
-                      </a:pPr>
-                      <a:r>
-                        <a:rPr lang="en" altLang="zh-TW" dirty="0"/>
-                        <a:t>Container Registry</a:t>
-                      </a:r>
-                      <a:endParaRPr lang="en" altLang="zh-TW" sz="1400" b="0" i="0" u="none" strike="noStrike" cap="none" dirty="0">
-                        <a:solidFill>
-                          <a:srgbClr val="000000"/>
-                        </a:solidFill>
-                        <a:latin typeface="Arial"/>
-                        <a:ea typeface="Microsoft JhengHei" panose="020B0604030504040204" pitchFamily="34" charset="-120"/>
-                        <a:cs typeface="Consolas" panose="020B0609020204030204" pitchFamily="49" charset="0"/>
-                        <a:sym typeface="Arial"/>
-                      </a:endParaRPr>
-                    </a:p>
-                  </a:txBody>
-                  <a:tcPr anchor="ctr"/>
-                </a:tc>
-                <a:tc>
-                  <a:txBody>
-                    <a:bodyPr/>
-                    <a:lstStyle/>
-                    <a:p>
-                      <a:pPr>
-                        <a:buNone/>
-                      </a:pPr>
-                      <a:r>
-                        <a:rPr lang="en" altLang="zh-TW" dirty="0"/>
-                        <a:t>Azure Container Registry Basic</a:t>
-                      </a:r>
-                      <a:endParaRPr lang="en" sz="1400" dirty="0">
-                        <a:latin typeface="Microsoft JhengHei" panose="020B0604030504040204" pitchFamily="34" charset="-120"/>
-                        <a:ea typeface="Microsoft JhengHei" panose="020B0604030504040204" pitchFamily="34" charset="-120"/>
-                      </a:endParaRPr>
-                    </a:p>
-                  </a:txBody>
-                  <a:tcPr anchor="ctr"/>
-                </a:tc>
-                <a:tc>
-                  <a:txBody>
-                    <a:bodyPr/>
-                    <a:lstStyle/>
-                    <a:p>
-                      <a:pPr>
-                        <a:buNone/>
-                      </a:pPr>
-                      <a:r>
-                        <a:rPr lang="en" altLang="zh-TW" sz="1400" b="0" i="0" u="none" strike="noStrike" cap="none" dirty="0">
-                          <a:solidFill>
-                            <a:srgbClr val="000000"/>
-                          </a:solidFill>
-                          <a:latin typeface="Arial"/>
-                          <a:ea typeface="Arial"/>
-                          <a:cs typeface="Arial"/>
-                          <a:sym typeface="Arial"/>
-                        </a:rPr>
-                        <a:t>100 GB</a:t>
-                      </a:r>
-                      <a:r>
-                        <a:rPr lang="en" altLang="zh-TW" dirty="0"/>
-                        <a:t> image storage</a:t>
-                      </a:r>
-                      <a:endParaRPr lang="en" sz="1400" dirty="0">
-                        <a:latin typeface="Microsoft JhengHei" panose="020B0604030504040204" pitchFamily="34" charset="-120"/>
-                        <a:ea typeface="Microsoft JhengHei" panose="020B0604030504040204" pitchFamily="34" charset="-120"/>
-                      </a:endParaRPr>
-                    </a:p>
-                  </a:txBody>
-                  <a:tcPr anchor="ctr"/>
-                </a:tc>
-                <a:extLst>
-                  <a:ext uri="{0D108BD9-81ED-4DB2-BD59-A6C34878D82A}">
-                    <a16:rowId xmlns:a16="http://schemas.microsoft.com/office/drawing/2014/main" val="2706894077"/>
-                  </a:ext>
-                </a:extLst>
-              </a:tr>
-              <a:tr h="363331">
-                <a:tc>
-                  <a:txBody>
-                    <a:bodyPr/>
-                    <a:lstStyle/>
-                    <a:p>
-                      <a:pPr>
-                        <a:buNone/>
-                      </a:pPr>
-                      <a:r>
-                        <a:rPr lang="en" altLang="zh-TW" dirty="0"/>
-                        <a:t>Secret</a:t>
-                      </a:r>
-                      <a:endParaRPr lang="en" sz="1400" dirty="0">
-                        <a:latin typeface="+mj-lt"/>
-                        <a:ea typeface="Microsoft JhengHei" panose="020B0604030504040204" pitchFamily="34" charset="-120"/>
-                        <a:cs typeface="Consolas" panose="020B0609020204030204" pitchFamily="49" charset="0"/>
-                      </a:endParaRPr>
-                    </a:p>
-                  </a:txBody>
-                  <a:tcPr anchor="ctr"/>
-                </a:tc>
-                <a:tc>
-                  <a:txBody>
-                    <a:bodyPr/>
-                    <a:lstStyle/>
-                    <a:p>
-                      <a:pPr>
-                        <a:buNone/>
-                      </a:pPr>
-                      <a:r>
-                        <a:rPr lang="en" altLang="zh-TW" dirty="0"/>
-                        <a:t>Azure Key Vault</a:t>
-                      </a:r>
-                      <a:endParaRPr lang="en" sz="1400" dirty="0">
-                        <a:latin typeface="Microsoft JhengHei" panose="020B0604030504040204" pitchFamily="34" charset="-120"/>
-                        <a:ea typeface="Microsoft JhengHei" panose="020B0604030504040204" pitchFamily="34" charset="-120"/>
-                      </a:endParaRPr>
-                    </a:p>
-                  </a:txBody>
-                  <a:tcPr anchor="ctr"/>
-                </a:tc>
-                <a:tc>
-                  <a:txBody>
-                    <a:bodyPr/>
-                    <a:lstStyle/>
-                    <a:p>
-                      <a:pPr>
-                        <a:buNone/>
-                      </a:pPr>
-                      <a:r>
-                        <a:rPr lang="en" altLang="zh-TW" sz="1400" b="0" i="0" u="none" strike="noStrike" cap="none" dirty="0">
-                          <a:solidFill>
-                            <a:srgbClr val="000000"/>
-                          </a:solidFill>
-                          <a:latin typeface="Arial"/>
-                          <a:ea typeface="Arial"/>
-                          <a:cs typeface="Arial"/>
-                          <a:sym typeface="Arial"/>
-                        </a:rPr>
-                        <a:t>1</a:t>
-                      </a:r>
-                      <a:r>
-                        <a:rPr lang="en" altLang="zh-TW" dirty="0"/>
-                        <a:t> vault</a:t>
-                      </a:r>
-                      <a:r>
-                        <a:rPr lang="zh-TW" altLang="en" dirty="0"/>
-                        <a:t>，</a:t>
-                      </a:r>
-                      <a:r>
-                        <a:rPr lang="en" altLang="zh-TW" dirty="0"/>
-                        <a:t>soft delete</a:t>
-                      </a:r>
-                      <a:r>
-                        <a:rPr lang="zh-TW" altLang="en" dirty="0"/>
-                        <a:t>、</a:t>
-                      </a:r>
-                      <a:r>
-                        <a:rPr lang="en" altLang="zh-TW" dirty="0"/>
-                        <a:t>purge protection</a:t>
-                      </a:r>
-                      <a:endParaRPr lang="en" sz="1400" dirty="0">
-                        <a:latin typeface="Microsoft JhengHei" panose="020B0604030504040204" pitchFamily="34" charset="-120"/>
-                        <a:ea typeface="Microsoft JhengHei" panose="020B0604030504040204" pitchFamily="34" charset="-120"/>
-                      </a:endParaRPr>
-                    </a:p>
-                  </a:txBody>
-                  <a:tcPr anchor="ctr"/>
-                </a:tc>
-                <a:extLst>
-                  <a:ext uri="{0D108BD9-81ED-4DB2-BD59-A6C34878D82A}">
-                    <a16:rowId xmlns:a16="http://schemas.microsoft.com/office/drawing/2014/main" val="3138652754"/>
-                  </a:ext>
-                </a:extLst>
-              </a:tr>
-              <a:tr h="363331">
-                <a:tc>
-                  <a:txBody>
-                    <a:bodyPr/>
-                    <a:lstStyle/>
-                    <a:p>
-                      <a:pPr>
-                        <a:buNone/>
-                      </a:pPr>
-                      <a:r>
-                        <a:rPr lang="en" altLang="zh-TW" dirty="0"/>
-                        <a:t>Log</a:t>
-                      </a:r>
-                      <a:r>
-                        <a:rPr lang="zh-TW" altLang="en" dirty="0"/>
-                        <a:t>／</a:t>
-                      </a:r>
-                      <a:r>
-                        <a:rPr lang="en" altLang="zh-TW" dirty="0"/>
-                        <a:t>Metrics</a:t>
-                      </a:r>
-                      <a:endParaRPr lang="en" sz="1400" dirty="0">
-                        <a:latin typeface="+mj-lt"/>
-                        <a:ea typeface="Microsoft JhengHei" panose="020B0604030504040204" pitchFamily="34" charset="-120"/>
-                        <a:cs typeface="Consolas" panose="020B0609020204030204" pitchFamily="49" charset="0"/>
-                      </a:endParaRPr>
-                    </a:p>
-                  </a:txBody>
-                  <a:tcPr anchor="ctr"/>
-                </a:tc>
-                <a:tc>
-                  <a:txBody>
-                    <a:bodyPr/>
-                    <a:lstStyle/>
-                    <a:p>
-                      <a:pPr>
-                        <a:buNone/>
-                      </a:pPr>
-                      <a:r>
-                        <a:rPr lang="en" altLang="zh-TW" dirty="0"/>
-                        <a:t>Log Analytics </a:t>
-                      </a:r>
-                      <a:r>
-                        <a:rPr lang="zh-TW" altLang="en" dirty="0"/>
-                        <a:t>＋ </a:t>
-                      </a:r>
-                      <a:r>
-                        <a:rPr lang="en" altLang="zh-TW" dirty="0"/>
-                        <a:t>Application Insights</a:t>
-                      </a:r>
-                      <a:endParaRPr lang="en" sz="1400" dirty="0">
-                        <a:latin typeface="Microsoft JhengHei" panose="020B0604030504040204" pitchFamily="34" charset="-120"/>
-                        <a:ea typeface="Microsoft JhengHei" panose="020B0604030504040204" pitchFamily="34" charset="-120"/>
-                      </a:endParaRPr>
-                    </a:p>
-                  </a:txBody>
-                  <a:tcPr anchor="ctr"/>
-                </a:tc>
-                <a:tc>
-                  <a:txBody>
-                    <a:bodyPr/>
-                    <a:lstStyle/>
-                    <a:p>
-                      <a:pPr>
-                        <a:buNone/>
-                      </a:pPr>
-                      <a:r>
-                        <a:rPr lang="en" altLang="zh-TW" dirty="0"/>
-                        <a:t>retention </a:t>
-                      </a:r>
-                      <a:r>
-                        <a:rPr lang="en" altLang="zh-TW" sz="1400" b="0" i="0" u="none" strike="noStrike" cap="none" dirty="0">
-                          <a:solidFill>
-                            <a:srgbClr val="000000"/>
-                          </a:solidFill>
-                          <a:latin typeface="Arial"/>
-                          <a:cs typeface="Arial"/>
-                          <a:sym typeface="Arial"/>
-                        </a:rPr>
-                        <a:t>18</a:t>
-                      </a:r>
-                      <a:r>
-                        <a:rPr lang="en" altLang="zh-TW" sz="1400" b="0" i="0" u="none" strike="noStrike" cap="none" dirty="0">
-                          <a:solidFill>
-                            <a:srgbClr val="000000"/>
-                          </a:solidFill>
-                          <a:latin typeface="Arial"/>
-                          <a:ea typeface="Arial"/>
-                          <a:cs typeface="Arial"/>
-                          <a:sym typeface="Arial"/>
-                        </a:rPr>
-                        <a:t>0</a:t>
-                      </a:r>
-                      <a:r>
-                        <a:rPr lang="en" altLang="zh-TW" dirty="0"/>
-                        <a:t> </a:t>
-                      </a:r>
-                      <a:r>
-                        <a:rPr lang="zh-TW" altLang="en-US" dirty="0"/>
-                        <a:t>天，</a:t>
-                      </a:r>
-                      <a:r>
-                        <a:rPr lang="en" altLang="zh-TW" dirty="0"/>
-                        <a:t>daily cap </a:t>
-                      </a:r>
-                      <a:r>
-                        <a:rPr lang="en" altLang="zh-TW" sz="1400" b="0" i="0" u="none" strike="noStrike" cap="none" dirty="0">
-                          <a:solidFill>
-                            <a:srgbClr val="000000"/>
-                          </a:solidFill>
-                          <a:latin typeface="Arial"/>
-                          <a:cs typeface="Arial"/>
-                          <a:sym typeface="Arial"/>
-                        </a:rPr>
-                        <a:t>20</a:t>
-                      </a:r>
-                      <a:r>
-                        <a:rPr lang="en" altLang="zh-TW" sz="1400" b="0" i="0" u="none" strike="noStrike" cap="none" dirty="0">
-                          <a:solidFill>
-                            <a:srgbClr val="000000"/>
-                          </a:solidFill>
-                          <a:latin typeface="Arial"/>
-                          <a:ea typeface="Arial"/>
-                          <a:cs typeface="Arial"/>
-                          <a:sym typeface="Arial"/>
-                        </a:rPr>
-                        <a:t> GB</a:t>
-                      </a:r>
-                      <a:endParaRPr lang="en" sz="1400" dirty="0">
-                        <a:latin typeface="Microsoft JhengHei" panose="020B0604030504040204" pitchFamily="34" charset="-120"/>
-                        <a:ea typeface="Microsoft JhengHei" panose="020B0604030504040204" pitchFamily="34" charset="-120"/>
-                      </a:endParaRPr>
-                    </a:p>
-                  </a:txBody>
-                  <a:tcPr anchor="ctr"/>
-                </a:tc>
-                <a:extLst>
-                  <a:ext uri="{0D108BD9-81ED-4DB2-BD59-A6C34878D82A}">
-                    <a16:rowId xmlns:a16="http://schemas.microsoft.com/office/drawing/2014/main" val="3866927840"/>
-                  </a:ext>
-                </a:extLst>
-              </a:tr>
-              <a:tr h="363331">
-                <a:tc>
-                  <a:txBody>
-                    <a:bodyPr/>
-                    <a:lstStyle/>
-                    <a:p>
-                      <a:pPr>
-                        <a:buNone/>
-                      </a:pPr>
-                      <a:r>
-                        <a:rPr lang="zh-TW" altLang="en-US" dirty="0"/>
-                        <a:t>備份／匯出檔案</a:t>
-                      </a:r>
-                      <a:endParaRPr lang="en" sz="1400" dirty="0">
-                        <a:latin typeface="+mj-lt"/>
-                        <a:ea typeface="Microsoft JhengHei" panose="020B0604030504040204" pitchFamily="34" charset="-120"/>
-                        <a:cs typeface="Consolas" panose="020B0609020204030204" pitchFamily="49" charset="0"/>
-                      </a:endParaRPr>
-                    </a:p>
-                  </a:txBody>
-                  <a:tcPr anchor="ctr"/>
-                </a:tc>
-                <a:tc>
-                  <a:txBody>
-                    <a:bodyPr/>
-                    <a:lstStyle/>
-                    <a:p>
-                      <a:pPr>
-                        <a:buNone/>
-                      </a:pPr>
-                      <a:r>
-                        <a:rPr lang="en" altLang="zh-TW" dirty="0"/>
-                        <a:t>Azure Blob Storage</a:t>
-                      </a:r>
-                      <a:endParaRPr lang="en" sz="1400" dirty="0">
-                        <a:latin typeface="Microsoft JhengHei" panose="020B0604030504040204" pitchFamily="34" charset="-120"/>
-                        <a:ea typeface="Microsoft JhengHei" panose="020B0604030504040204" pitchFamily="34" charset="-120"/>
-                      </a:endParaRPr>
-                    </a:p>
-                  </a:txBody>
-                  <a:tcPr anchor="ctr"/>
-                </a:tc>
-                <a:tc>
-                  <a:txBody>
-                    <a:bodyPr/>
-                    <a:lstStyle/>
-                    <a:p>
-                      <a:pPr>
-                        <a:buNone/>
-                      </a:pPr>
-                      <a:r>
-                        <a:rPr lang="en" altLang="zh-TW" dirty="0"/>
-                        <a:t>Hot tier</a:t>
-                      </a:r>
-                      <a:r>
-                        <a:rPr lang="zh-TW" altLang="en" dirty="0"/>
-                        <a:t>，</a:t>
-                      </a:r>
-                      <a:r>
-                        <a:rPr lang="en" altLang="zh-TW" sz="1400" b="0" i="0" u="none" strike="noStrike" cap="none" dirty="0">
-                          <a:solidFill>
-                            <a:srgbClr val="000000"/>
-                          </a:solidFill>
-                          <a:latin typeface="Arial"/>
-                          <a:cs typeface="Arial"/>
-                          <a:sym typeface="Arial"/>
-                        </a:rPr>
-                        <a:t>5</a:t>
-                      </a:r>
-                      <a:r>
-                        <a:rPr lang="en" altLang="zh-TW" sz="1400" b="0" i="0" u="none" strike="noStrike" cap="none" dirty="0">
-                          <a:solidFill>
-                            <a:srgbClr val="000000"/>
-                          </a:solidFill>
-                          <a:latin typeface="Arial"/>
-                          <a:ea typeface="Arial"/>
-                          <a:cs typeface="Arial"/>
-                          <a:sym typeface="Arial"/>
-                        </a:rPr>
-                        <a:t>00 GB</a:t>
-                      </a:r>
-                      <a:endParaRPr lang="zh-TW" altLang="en-US" sz="1400" dirty="0">
-                        <a:latin typeface="Microsoft JhengHei" panose="020B0604030504040204" pitchFamily="34" charset="-120"/>
-                        <a:ea typeface="Microsoft JhengHei" panose="020B0604030504040204" pitchFamily="34" charset="-120"/>
-                      </a:endParaRPr>
-                    </a:p>
-                  </a:txBody>
-                  <a:tcPr anchor="ctr"/>
-                </a:tc>
-                <a:extLst>
-                  <a:ext uri="{0D108BD9-81ED-4DB2-BD59-A6C34878D82A}">
-                    <a16:rowId xmlns:a16="http://schemas.microsoft.com/office/drawing/2014/main" val="1890578122"/>
-                  </a:ext>
-                </a:extLst>
-              </a:tr>
-            </a:tbl>
-          </a:graphicData>
-        </a:graphic>
-      </p:graphicFrame>
-    </p:spTree>
-    <p:extLst>
-      <p:ext uri="{BB962C8B-B14F-4D97-AF65-F5344CB8AC3E}">
-        <p14:creationId xmlns:p14="http://schemas.microsoft.com/office/powerpoint/2010/main" val="1133213242"/>
-      </p:ext>
-    </p:extLst>
-  </p:cSld>
-  <p:clrMapOvr>
-    <a:masterClrMapping/>
-  </p:clrMapOvr>
-</p:sld>
-</file>
-
-<file path=ppt/slides/slide8.xml><?xml version="1.0" encoding="utf-8"?>
+<file path=ppt/slides/slide6.xml><?xml version="1.0" encoding="utf-8"?>
 <p:sld xmlns:a="http://schemas.openxmlformats.org/drawingml/2006/main" xmlns:r="http://schemas.openxmlformats.org/officeDocument/2006/relationships" xmlns:p="http://schemas.openxmlformats.org/presentationml/2006/main">
   <p:cSld>
     <p:spTree>
@@ -21607,7 +15771,7 @@
           <a:p>
             <a:r>
               <a:rPr lang="zh-TW" altLang="en-US" b="1" dirty="0"/>
-              <a:t>後續確認事項：</a:t>
+              <a:t>後續決策方向：</a:t>
             </a:r>
             <a:r>
               <a:rPr lang="en" altLang="zh-TW" b="1" dirty="0"/>
@@ -21674,12 +15838,12 @@
             <a:endParaRPr lang="en-US" altLang="zh-TW" b="1" dirty="0"/>
           </a:p>
           <a:p>
+            <a:pPr marL="36000" indent="0">
+              <a:buNone/>
+            </a:pPr>
             <a:endParaRPr lang="en-US" altLang="zh-TW" b="1" dirty="0"/>
           </a:p>
           <a:p>
-            <a:pPr marL="36000" indent="0">
-              <a:buNone/>
-            </a:pPr>
             <a:endParaRPr lang="en-US" altLang="zh-TW" b="1" dirty="0"/>
           </a:p>
           <a:p>
@@ -21705,14 +15869,14 @@
           <p:nvPr>
             <p:extLst>
               <p:ext uri="{D42A27DB-BD31-4B8C-83A1-F6EECF244321}">
-                <p14:modId xmlns:p14="http://schemas.microsoft.com/office/powerpoint/2010/main" val="1214090088"/>
+                <p14:modId xmlns:p14="http://schemas.microsoft.com/office/powerpoint/2010/main" val="408683861"/>
               </p:ext>
             </p:extLst>
           </p:nvPr>
         </p:nvGraphicFramePr>
         <p:xfrm>
-          <a:off x="540244" y="1231756"/>
-          <a:ext cx="10440000" cy="1927394"/>
+          <a:off x="540244" y="1186103"/>
+          <a:ext cx="10440000" cy="2284800"/>
         </p:xfrm>
         <a:graphic>
           <a:graphicData uri="http://schemas.openxmlformats.org/drawingml/2006/table">
@@ -21775,7 +15939,7 @@
                   </a:ext>
                 </a:extLst>
               </a:tr>
-              <a:tr h="354097">
+              <a:tr h="396000">
                 <a:tc>
                   <a:txBody>
                     <a:bodyPr/>
@@ -21858,7 +16022,7 @@
                   </a:ext>
                 </a:extLst>
               </a:tr>
-              <a:tr h="354097">
+              <a:tr h="396000">
                 <a:tc>
                   <a:txBody>
                     <a:bodyPr/>
@@ -21921,7 +16085,7 @@
                   </a:ext>
                 </a:extLst>
               </a:tr>
-              <a:tr h="243145">
+              <a:tr h="396000">
                 <a:tc>
                   <a:txBody>
                     <a:bodyPr/>
@@ -21964,7 +16128,7 @@
                   </a:ext>
                 </a:extLst>
               </a:tr>
-              <a:tr h="243145">
+              <a:tr h="396000">
                 <a:tc>
                   <a:txBody>
                     <a:bodyPr/>
@@ -22023,7 +16187,7 @@
                   </a:ext>
                 </a:extLst>
               </a:tr>
-              <a:tr h="243145">
+              <a:tr h="396000">
                 <a:tc>
                   <a:txBody>
                     <a:bodyPr/>
@@ -22097,14 +16261,14 @@
           <p:nvPr>
             <p:extLst>
               <p:ext uri="{D42A27DB-BD31-4B8C-83A1-F6EECF244321}">
-                <p14:modId xmlns:p14="http://schemas.microsoft.com/office/powerpoint/2010/main" val="2630475600"/>
+                <p14:modId xmlns:p14="http://schemas.microsoft.com/office/powerpoint/2010/main" val="1794415813"/>
               </p:ext>
             </p:extLst>
           </p:nvPr>
         </p:nvGraphicFramePr>
         <p:xfrm>
-          <a:off x="540244" y="4140557"/>
-          <a:ext cx="10440000" cy="1362564"/>
+          <a:off x="540244" y="4096982"/>
+          <a:ext cx="10440000" cy="1492800"/>
         </p:xfrm>
         <a:graphic>
           <a:graphicData uri="http://schemas.openxmlformats.org/drawingml/2006/table">
@@ -22128,7 +16292,7 @@
                   </a:extLst>
                 </a:gridCol>
               </a:tblGrid>
-              <a:tr h="0">
+              <a:tr h="172515">
                 <a:tc>
                   <a:txBody>
                     <a:bodyPr/>
@@ -22155,7 +16319,7 @@
                       </a:pPr>
                       <a:r>
                         <a:rPr lang="zh-TW" altLang="en-US" dirty="0"/>
-                        <a:t>適用情境</a:t>
+                        <a:t>情境</a:t>
                       </a:r>
                     </a:p>
                   </a:txBody>
@@ -22167,7 +16331,7 @@
                   </a:ext>
                 </a:extLst>
               </a:tr>
-              <a:tr h="221460">
+              <a:tr h="396000">
                 <a:tc>
                   <a:txBody>
                     <a:bodyPr/>
@@ -22210,7 +16374,7 @@
                   </a:ext>
                 </a:extLst>
               </a:tr>
-              <a:tr h="376482">
+              <a:tr h="396000">
                 <a:tc>
                   <a:txBody>
                     <a:bodyPr/>
@@ -22289,7 +16453,7 @@
                   </a:ext>
                 </a:extLst>
               </a:tr>
-              <a:tr h="376482">
+              <a:tr h="396000">
                 <a:tc>
                   <a:txBody>
                     <a:bodyPr/>
